--- a/vi/files/slides/Session_7_VN.pptx
+++ b/vi/files/slides/Session_7_VN.pptx
@@ -2902,7 +2902,7 @@
           <a:p>
             <a:r>
               <a:rPr lang="en-US" sz="1400" b="0" dirty="0"/>
-              <a:t>VÍ DỤ MẪU (Cấp độ 2). Đọc từng câu và chỉ vào mục STROBE bên phải.</a:t>
+              <a:t>VÍ DỤ MẪU (bộ dữ liệu khóa học). Đọc từng câu và chỉ vào mục STROBE bên phải.</a:t>
             </a:r>
           </a:p>
           <a:p>
@@ -3829,7 +3829,7 @@
           <a:p>
             <a:r>
               <a:rPr lang="en-US" sz="1400" b="0" dirty="0"/>
-              <a:t>THỰC HÀNH BẢN THẢO 1 (2:05-2:55). Cấp độ 2. Mỗi nhóm viết Phương pháp và Kết quả cho bài báo FLUID-ICU của mình (Q1-Q5) từ gói kết quả.</a:t>
+              <a:t>THỰC HÀNH BẢN THẢO 1 (2:05-2:55). Bộ dữ liệu khóa học. Mỗi nhóm viết Phương pháp và Kết quả cho bài báo FLUID-ICU của mình (Q1-Q5) từ gói kết quả.</a:t>
             </a:r>
           </a:p>
           <a:p>

--- a/vi/files/slides/Session_7_VN.pptx
+++ b/vi/files/slides/Session_7_VN.pptx
@@ -733,7 +733,7 @@
           <a:p>
             <a:r>
               <a:rPr lang="en-US" sz="1400" b="0" dirty="0"/>
-              <a:t>BUỔI 7 (0:00). Cuối tuần 4, Thứ Bảy. Hôm nay có hai nửa: trước giải lao chúng ta bảo vệ người bệnh và khoa học (đạo đức, liêm chính) và hoàn thành Đề cương Phần 4; sau giải lao chúng ta bắt đầu VIẾT bản thảo FLUID-ICU.</a:t>
+              <a:t>BUỔI 7 (0:00). Tuần 7, Thứ Bảy. Hôm nay có hai nửa: trước giải lao chúng ta bảo vệ người bệnh và khoa học (đạo đức, liêm chính) và hoàn thành Đề cương Phần 4; sau giải lao chúng ta bắt đầu VIẾT bản thảo FLUID-ICU.</a:t>
             </a:r>
           </a:p>
           <a:p>
@@ -2431,13 +2431,13 @@
           <a:p>
             <a:r>
               <a:rPr lang="en-US" sz="1400" b="0" dirty="0"/>
-              <a:t>Tạp chí và bảng kiểm EQUATOR sẽ được kiểm tra lại ở 8.2 ngày mai - hôm nay trả lời tạm là được.</a:t>
+              <a:t>Tạp chí và bảng kiểm EQUATOR sẽ được kiểm tra lại ở 8.2 thứ Bảy tuần sau - hôm nay trả lời tạm là được.</a:t>
             </a:r>
           </a:p>
           <a:p>
             <a:r>
               <a:rPr lang="en-US" sz="1400" b="0" dirty="0"/>
-              <a:t>Nhắc: ngày mai mỗi nhóm trình bày (6 phút, 6 slide) - slide 5 (đạo đức &amp; khả thi) và 6 (kế hoạch công bố) lấy từ phiếu này.</a:t>
+              <a:t>Nhắc: thứ Bảy tuần sau mỗi nhóm trình bày (6 phút, 6 slide) - slide 5 (đạo đức &amp; khả thi) và 6 (kế hoạch công bố) lấy từ phiếu này.</a:t>
             </a:r>
           </a:p>
         </p:txBody>
@@ -3007,13 +3007,13 @@
           <a:p>
             <a:r>
               <a:rPr lang="en-US" sz="1400" b="0" dirty="0"/>
-              <a:t>Hai sản phẩm, hai hàng. Sản phẩm 1 - đề cương nghiên cứu của chính nhóm - hôm nay có phần cuối cùng (đạo đức, đăng ký, khả thi, kế hoạch công bố) và được trình bày ngày mai.</a:t>
+              <a:t>Hai sản phẩm, hai hàng. Sản phẩm 1 - đề cương nghiên cứu của chính nhóm - hôm nay có phần cuối cùng (đạo đức, đăng ký, khả thi, kế hoạch công bố) và được trình bày thứ Bảy tuần sau.</a:t>
             </a:r>
           </a:p>
           <a:p>
             <a:r>
               <a:rPr lang="en-US" sz="1400" b="0" dirty="0"/>
-              <a:t>Sản phẩm 2 - bản thảo FLUID-ICU - chuyển từ 'đọc kết quả phân tích' (Buổi 6) sang VIẾT: hôm nay Phương pháp và Kết quả, ngày mai Đặt vấn đề, Bàn luận, Tóm tắt và Tiêu đề.</a:t>
+              <a:t>Sản phẩm 2 - bản thảo FLUID-ICU - chuyển từ 'đọc kết quả phân tích' (Buổi 6) sang VIẾT: hôm nay Phương pháp và Kết quả, thứ Bảy tuần sau Đặt vấn đề, Bàn luận, Tóm tắt và Tiêu đề.</a:t>
             </a:r>
           </a:p>
           <a:p>
@@ -3334,7 +3334,7 @@
           <a:p>
             <a:r>
               <a:rPr lang="en-US" sz="1400" b="0" dirty="0"/>
-              <a:t>Chỉ ra điều KHÔNG có trong đoạn: không 'vì', không 'có ý nghĩa', không giải thích vì sao OR giảm - đó là việc của Bàn luận ngày mai.</a:t>
+              <a:t>Chỉ ra điều KHÔNG có trong đoạn: không 'vì', không 'có ý nghĩa', không giải thích vì sao OR giảm - đó là việc của Bàn luận thứ Bảy tuần sau.</a:t>
             </a:r>
           </a:p>
           <a:p>
@@ -3643,7 +3643,7 @@
           <a:p>
             <a:r>
               <a:rPr lang="en-US" sz="1400" b="0" dirty="0"/>
-              <a:t>Bảng kiểm đầy đủ có trong phiếu bài tập s7 và trên equator-network.org (trình diễn ngày mai).</a:t>
+              <a:t>Bảng kiểm đầy đủ có trong phiếu bài tập s7 và trên equator-network.org (trình diễn thứ Bảy tuần sau).</a:t>
             </a:r>
           </a:p>
           <a:p>
@@ -4033,7 +4033,7 @@
           <a:p>
             <a:r>
               <a:rPr lang="en-US" sz="1400" b="0" dirty="0"/>
-              <a:t>Lúc 2:52 đề nghị mỗi nhóm lưu và gửi bản nháp (email hoặc thư mục chung) - đây là tệp khởi đầu cho thực hành 2 ngày mai.</a:t>
+              <a:t>Lúc 2:52 đề nghị mỗi nhóm lưu và gửi bản nháp (email hoặc thư mục chung) - đây là tệp khởi đầu cho thực hành 2 thứ Bảy tuần sau.</a:t>
             </a:r>
           </a:p>
         </p:txBody>
@@ -4213,7 +4213,7 @@
           <a:p>
             <a:r>
               <a:rPr lang="en-US" sz="1400" b="0" dirty="0"/>
-              <a:t>Đây cũng là những từ dễ xuất hiện nhất trong bài kiểm tra cuối khóa ngày mai.</a:t>
+              <a:t>Đây cũng là những từ dễ xuất hiện nhất trong bài kiểm tra cuối khóa thứ Bảy tuần sau.</a:t>
             </a:r>
           </a:p>
         </p:txBody>
@@ -4300,7 +4300,7 @@
           <a:p>
             <a:r>
               <a:rPr lang="en-US" sz="1400" b="0" dirty="0"/>
-              <a:t>Bài về nhà: slide đề cương (hướng dẫn trình bày: 6 phút, 6 slide) và đọc lại bản nháp. Ngày mai bắt đầu bằng 5 phút ôn tập và đi thẳng vào phần viết.</a:t>
+              <a:t>Bài về nhà: slide đề cương (hướng dẫn trình bày: 6 phút, 6 slide) và đọc lại bản nháp. Thứ Bảy tuần sau bắt đầu bằng 5 phút ôn tập và đi thẳng vào phần viết.</a:t>
             </a:r>
           </a:p>
         </p:txBody>
@@ -8340,7 +8340,7 @@
                 <a:latin typeface="Segoe UI"/>
                 <a:cs typeface="Segoe UI"/>
               </a:rPr>
-              <a:t>Cuối tuần 4 · Thứ Bảy</a:t>
+              <a:t>Tuần 7 · Thứ Bảy</a:t>
             </a:r>
           </a:p>
           <a:p>
@@ -15643,7 +15643,7 @@
                 <a:latin typeface="Segoe UI"/>
                 <a:cs typeface="Segoe UI"/>
               </a:rPr>
-              <a:t>Slide 5 và 6 cho ngày mai</a:t>
+              <a:t>Slide 5 và 6 cho thứ Bảy tuần sau</a:t>
             </a:r>
           </a:p>
           <a:p>
@@ -15665,7 +15665,7 @@
                 <a:latin typeface="Segoe UI"/>
                 <a:cs typeface="Segoe UI"/>
               </a:rPr>
-              <a:t>Hoàn thiện ở nhà tối nay</a:t>
+              <a:t>Hoàn thiện ở nhà trong tuần</a:t>
             </a:r>
           </a:p>
         </p:txBody>
@@ -23010,7 +23010,7 @@
                 <a:latin typeface="Segoe UI"/>
                 <a:cs typeface="Segoe UI"/>
               </a:rPr>
-              <a:t>Tổng kết và bài tập về nhà cho ngày mai</a:t>
+              <a:t>Tổng kết và bài tập về nhà cho thứ Bảy tuần sau</a:t>
             </a:r>
           </a:p>
         </p:txBody>
@@ -23167,7 +23167,7 @@
                 <a:latin typeface="Segoe UI"/>
                 <a:cs typeface="Segoe UI"/>
               </a:rPr>
-              <a:t>Tối nay: hoàn thiện Đề cương Phần 4 và 6 slide trình bày</a:t>
+              <a:t>Trong tuần: hoàn thiện Đề cương Phần 4 và 6 slide trình bày</a:t>
             </a:r>
           </a:p>
           <a:p>
@@ -23198,7 +23198,7 @@
                 <a:latin typeface="Segoe UI"/>
                 <a:cs typeface="Segoe UI"/>
               </a:rPr>
-              <a:t>Tối nay: đọc to bản nháp Phương pháp + Kết quả một lần</a:t>
+              <a:t>Trong tuần: đọc to bản nháp Phương pháp + Kết quả một lần</a:t>
             </a:r>
           </a:p>
           <a:p>
@@ -23229,7 +23229,7 @@
                 <a:latin typeface="Segoe UI"/>
                 <a:cs typeface="Segoe UI"/>
               </a:rPr>
-              <a:t>Ngày mai: Đặt vấn đề, Bàn luận, Tóm tắt, Tiêu đề - rồi trình bày</a:t>
+              <a:t>Thứ Bảy tuần sau: Đặt vấn đề, Bàn luận, Tóm tắt, Tiêu đề - rồi trình bày</a:t>
             </a:r>
           </a:p>
         </p:txBody>

--- a/vi/files/slides/Session_7_VN.pptx
+++ b/vi/files/slides/Session_7_VN.pptx
@@ -739,7 +739,7 @@
           <a:p>
             <a:r>
               <a:rPr lang="en-US" sz="1400" b="0" dirty="0"/>
-              <a:t>Nhịp: chậm. Mỗi phần có một ví dụ mẫu và 1 phút kiểm tra hiểu bài. Nếu thiếu thời gian, bỏ các slide trong mục 'Slide bổ sung - Buổi 7' ở cuối, không bao giờ bỏ phần thực hành.</a:t>
+              <a:t>Nhịp: chậm. Mỗi phần có một ví dụ mẫu và 1 phút kiểm tra hiểu bài. Nếu thiếu thời gian, bỏ các slide trong mục 'Slide bổ sung: Buổi 7' ở cuối, không bao giờ bỏ phần thực hành.</a:t>
             </a:r>
           </a:p>
           <a:p>
@@ -832,19 +832,19 @@
           <a:p>
             <a:r>
               <a:rPr lang="en-US" sz="1400" b="0" dirty="0"/>
-              <a:t>Ý chính: chấp thuận hợp lệ cần đủ bốn yếu tố - thông tin, hiểu biết, tự nguyện và có văn bản.</a:t>
+              <a:t>Ý chính: chấp thuận hợp lệ cần đủ bốn yếu tố: thông tin, hiểu biết, tự nguyện và có văn bản.</a:t>
             </a:r>
           </a:p>
           <a:p>
             <a:r>
               <a:rPr lang="en-US" sz="1400" b="0" dirty="0"/>
-              <a:t>Điều dưỡng và dược sĩ thường là người được bệnh nhân hỏi lại 'tôi đã ký cái gì?' - đây là việc của mọi người, không riêng nghiên cứu viên chính.</a:t>
+              <a:t>Điều dưỡng và dược sĩ thường là người được bệnh nhân hỏi lại 'tôi đã ký cái gì?', nên đây là việc của mọi người, không riêng nghiên cứu viên chính.</a:t>
             </a:r>
           </a:p>
           <a:p>
             <a:r>
               <a:rPr lang="en-US" sz="1400" b="0" dirty="0"/>
-              <a:t>Rút lui: người tham gia có thể rời nghiên cứu bất cứ lúc nào, không cần nêu lý do và không ảnh hưởng đến điều trị. Ví dụ xuyên suốt: trong Bài 1, hai bệnh nhân nhóm chứng rút lại chấp thuận và không được đưa vào phân tích - quyền đó được tôn trọng, và vì vậy thử nghiệm phân tích 48 trên 50 người.</a:t>
+              <a:t>Rút lui: người tham gia có thể rời nghiên cứu bất cứ lúc nào, không cần nêu lý do và không ảnh hưởng đến điều trị. Ví dụ xuyên suốt: trong Bài 1, hai bệnh nhân nhóm chứng rút lại chấp thuận và không được đưa vào phân tích. Quyền đó được tôn trọng, và vì vậy thử nghiệm phân tích 48 trên 50 người.</a:t>
             </a:r>
           </a:p>
           <a:p>
@@ -955,13 +955,13 @@
           <a:p>
             <a:r>
               <a:rPr lang="en-US" sz="1400" b="0" dirty="0"/>
-              <a:t>Bài 2 khác: một sổ bộ dùng dữ liệu thường quy - hội đồng miễn chấp thuận cá nhân và dữ liệu được ẩn danh trước khi phân tích (trang 8).</a:t>
+              <a:t>Bài 2 khác: một sổ bộ dùng dữ liệu thường quy. Hội đồng miễn chấp thuận cá nhân và dữ liệu được ẩn danh trước khi phân tích (trang 8).</a:t>
             </a:r>
           </a:p>
           <a:p>
             <a:r>
               <a:rPr lang="en-US" sz="1400" b="0" dirty="0"/>
-              <a:t>Luật địa phương quy định ai được làm người đại diện và có cho phép chấp thuận trì hoãn hay không - hãy hỏi hội đồng trước khi viết đề cương.</a:t>
+              <a:t>Luật địa phương quy định ai được làm người đại diện và có cho phép chấp thuận trì hoãn hay không. Hãy hỏi hội đồng trước khi viết đề cương.</a:t>
             </a:r>
           </a:p>
           <a:p>
@@ -1054,25 +1054,25 @@
           <a:p>
             <a:r>
               <a:rPr lang="en-US" sz="1400" b="0" dirty="0"/>
-              <a:t>Ông A: có năng lực quyết định - bệnh nhân tự quyết định.</a:t>
+              <a:t>Ông A: có năng lực quyết định, nên bệnh nhân tự quyết định.</a:t>
             </a:r>
           </a:p>
           <a:p>
             <a:r>
               <a:rPr lang="en-US" sz="1400" b="0" dirty="0"/>
-              <a:t>Bà B: hiện không có năng lực; người đại diện hợp pháp (ở đây là con gái, nếu luật địa phương cho phép) chấp thuận; bà B được hỏi lại khi có năng lực - bà có thể rút lui.</a:t>
+              <a:t>Bà B: hiện không có năng lực. Người đại diện hợp pháp (ở đây là con gái, nếu luật địa phương cho phép) chấp thuận. Bà B được hỏi lại khi có năng lực, và bà có thể rút lui.</a:t>
             </a:r>
           </a:p>
           <a:p>
             <a:r>
               <a:rPr lang="en-US" sz="1400" b="0" dirty="0"/>
-              <a:t>Ông C: không liên lạc kịp người đại diện, điều trị không thể chờ - chấp thuận trì hoãn CHỈ khi đề cương mô tả và hội đồng đã phê duyệt; xin chấp thuận của gia đình hoặc bệnh nhân sớm nhất có thể. Bài 1 dùng cách này.</a:t>
+              <a:t>Ông C: không liên lạc kịp người đại diện và điều trị không thể chờ. Chấp thuận trì hoãn CHỈ áp dụng khi đề cương mô tả và hội đồng đã phê duyệt; xin chấp thuận của gia đình hoặc bệnh nhân sớm nhất có thể. Bài 1 dùng cách này.</a:t>
             </a:r>
           </a:p>
           <a:p>
             <a:r>
               <a:rPr lang="en-US" sz="1400" b="0" dirty="0"/>
-              <a:t>Quan niệm sai: 'bác sĩ điều trị có thể chấp thuận thay bệnh nhân'. Không - bác sĩ điều trị không phải người đại diện.</a:t>
+              <a:t>Quan niệm sai: 'bác sĩ điều trị có thể chấp thuận thay bệnh nhân'. Không. Bác sĩ điều trị không phải người đại diện.</a:t>
             </a:r>
           </a:p>
         </p:txBody>
@@ -1159,7 +1159,7 @@
           <a:p>
             <a:r>
               <a:rPr lang="en-US" sz="1400" b="0" dirty="0"/>
-              <a:t>Trước: các định danh trực tiếp - họ tên, mã bệnh án, ngày sinh chính xác, địa chỉ, số điện thoại, ảnh. Sau: mã nghiên cứu, tuổi thay cho ngày sinh, tháng thay cho ngày chính xác, và chỉ các biến có trong từ điển dữ liệu.</a:t>
+              <a:t>Trước: các định danh trực tiếp như họ tên, mã bệnh án, ngày sinh chính xác, địa chỉ, số điện thoại, ảnh. Sau: mã nghiên cứu, tuổi thay cho ngày sinh, tháng thay cho ngày chính xác, và chỉ các biến có trong từ điển dữ liệu.</a:t>
             </a:r>
           </a:p>
           <a:p>
@@ -1189,7 +1189,7 @@
           <a:p>
             <a:r>
               <a:rPr lang="en-US" sz="1400" b="0" dirty="0"/>
-              <a:t>Hỏi: tệp khóa của nhóm bạn sẽ nằm ở đâu? Đáp án: nơi lưu trữ được cơ sở phê duyệt, có mật khẩu - không phải USB trong túi áo.</a:t>
+              <a:t>Hỏi: tệp khóa của nhóm bạn sẽ nằm ở đâu? Đáp án: nơi lưu trữ được cơ sở phê duyệt, có mật khẩu, không phải USB trong túi áo.</a:t>
             </a:r>
           </a:p>
         </p:txBody>
@@ -1270,7 +1270,7 @@
           <a:p>
             <a:r>
               <a:rPr lang="en-US" sz="1400" b="0" dirty="0"/>
-              <a:t>VÍ DỤ MẪU nối 7.1 với bản thảo. Nói rõ FLUID-ICU là bộ dữ liệu giảng dạy MÔ PHỎNG - không có phê duyệt thật - nên trong bản thảo của khóa học các nhóm viết: 'Phân tích này dùng bộ dữ liệu giảng dạy mô phỏng; không cần phê duyệt đạo đức.' Với một đoàn hệ thật, đoạn văn sẽ như bốn thẻ trên.</a:t>
+              <a:t>VÍ DỤ MẪU nối 7.1 với bản thảo. Nói rõ FLUID-ICU là bộ dữ liệu giảng dạy MÔ PHỎNG, không có phê duyệt thật, nên trong bản thảo của khóa học các nhóm viết: 'Phân tích này dùng bộ dữ liệu giảng dạy mô phỏng; không cần phê duyệt đạo đức.' Với một đoàn hệ thật, đoạn văn sẽ như bốn thẻ trên.</a:t>
             </a:r>
           </a:p>
           <a:p>
@@ -1363,7 +1363,7 @@
           <a:p>
             <a:r>
               <a:rPr lang="en-US" sz="1400" b="0" dirty="0"/>
-              <a:t>Đi qua năm ô. THỜI GIAN: riêng phê duyệt đạo đức có thể mất 1-3 tháng; tuyển bệnh luôn lâu hơn dự kiến. KINH PHÍ: ghi các khoản dù số tiền nhỏ - thời gian nhân sự, vật tư hoặc xét nghiệm, phí công bố. NHÂN LỰC: ai thu thập số liệu ca đêm và cuối tuần, ai phân tích, có thời gian dành riêng không? TUYỂN CHỌN: Bài 1 sàng lọc 1201 bệnh nhân ở ba ICU trong 17 tháng để phân nhóm được 50 (khoảng 4%) - phần lớn bệnh nhân 'trông có vẻ đủ tiêu chuẩn' lại không đủ hoặc không được đưa vào. DỮ LIỆU: biến đó đã được ghi thường quy chưa? Bài 2 không thể nghiên cứu thuốc lợi tiểu vì sổ bộ không ghi nhận.</a:t>
+              <a:t>Đi qua năm ô. THỜI GIAN: riêng phê duyệt đạo đức có thể mất 1-3 tháng; tuyển bệnh luôn lâu hơn dự kiến. KINH PHÍ: ghi các khoản dù số tiền nhỏ (thời gian nhân sự, vật tư hoặc xét nghiệm, phí công bố). NHÂN LỰC: ai thu thập số liệu ca đêm và cuối tuần, ai phân tích, có thời gian dành riêng không? TUYỂN CHỌN: Bài 1 sàng lọc 1201 bệnh nhân ở ba ICU trong 17 tháng để phân nhóm được 50 (khoảng 4%). Phần lớn bệnh nhân 'trông có vẻ đủ tiêu chuẩn' lại không đủ hoặc không được đưa vào. DỮ LIỆU: biến đó đã được ghi thường quy chưa? Bài 2 không thể nghiên cứu thuốc lợi tiểu vì sổ bộ không ghi nhận.</a:t>
             </a:r>
           </a:p>
           <a:p>
@@ -1381,7 +1381,7 @@
           <a:p>
             <a:r>
               <a:rPr lang="en-US" sz="1400" b="0" dirty="0"/>
-              <a:t>Đây là slide khả thi duy nhất của Cấp độ 1 - không đi sâu hơn.</a:t>
+              <a:t>Đây là slide khả thi duy nhất của Cấp độ 1. Không đi sâu hơn.</a:t>
             </a:r>
           </a:p>
         </p:txBody>
@@ -1468,7 +1468,7 @@
           <a:p>
             <a:r>
               <a:rPr lang="en-US" sz="1400" b="0" dirty="0"/>
-              <a:t>Giọng điệu: không phải để 'bắt lỗi'. Phần lớn vấn đề liêm chính bắt đầu từ những lối tắt nhỏ khi bị áp lực - một giá trị thiếu 'được điền vào', một giá trị ngoại lai 'được làm sạch', thêm sếp vào danh sách tác giả.</a:t>
+              <a:t>Giọng điệu: không phải để 'bắt lỗi'. Phần lớn vấn đề liêm chính bắt đầu từ những lối tắt nhỏ khi bị áp lực: một giá trị thiếu 'được điền vào', một giá trị ngoại lai 'được làm sạch', thêm sếp vào danh sách tác giả.</a:t>
             </a:r>
           </a:p>
           <a:p>
@@ -1555,7 +1555,7 @@
           <a:p>
             <a:r>
               <a:rPr lang="en-US" sz="1400" b="0" dirty="0"/>
-              <a:t>Ý chính: ba hình thức sai phạm nghiên cứu kinh điển.</a:t>
+              <a:t>Ý chính: ba hình thức sai phạm nghiên cứu kinh điển (FFP).</a:t>
             </a:r>
           </a:p>
           <a:p>
@@ -1573,13 +1573,13 @@
           <a:p>
             <a:r>
               <a:rPr lang="en-US" sz="1400" b="0" dirty="0"/>
-              <a:t>Đạo văn: dùng câu chữ, ý tưởng hoặc hình ảnh của người khác mà không ghi nguồn - kể cả chép nguyên đoạn CÓ trích dẫn nhưng không đặt trong ngoặc kép.</a:t>
+              <a:t>Đạo văn: dùng câu chữ, ý tưởng hoặc hình ảnh của người khác mà không ghi nguồn, kể cả chép nguyên đoạn CÓ trích dẫn nhưng không đặt trong ngoặc kép.</a:t>
             </a:r>
           </a:p>
           <a:p>
             <a:r>
               <a:rPr lang="en-US" sz="1400" b="0" dirty="0"/>
-              <a:t>Sai sót trung thực không phải sai phạm - nhưng phải được đính chính công khai.</a:t>
+              <a:t>Sai sót trung thực không phải sai phạm, nhưng phải được đính chính công khai.</a:t>
             </a:r>
           </a:p>
           <a:p>
@@ -1591,7 +1591,7 @@
           <a:p>
             <a:r>
               <a:rPr lang="en-US" sz="1400" b="0" dirty="0"/>
-              <a:t>Hỏi: trong ba loại này, loại nào hay gặp nhất trong luận văn? Đáp án: đạo văn - thường là chép phần đặt vấn đề. Phần mềm kiểm tra trùng lặp sẽ phát hiện.</a:t>
+              <a:t>Hỏi: trong ba loại này, loại nào hay gặp nhất trong luận văn? Đáp án: đạo văn, thường là chép phần đặt vấn đề. Phần mềm kiểm tra trùng lặp sẽ phát hiện.</a:t>
             </a:r>
           </a:p>
         </p:txBody>
@@ -1678,7 +1678,7 @@
           <a:p>
             <a:r>
               <a:rPr lang="en-US" sz="1400" b="0" dirty="0"/>
-              <a:t>Công bố trùng lặp làm cùng một nhóm bệnh nhân bị tính hai lần trong phân tích gộp và có thể phóng đại tác dụng. Một bài phân tích thứ cấp hợp lệ vẫn được chấp nhận - nếu trích dẫn chéo rõ ràng và có thêm điều mới.</a:t>
+              <a:t>Công bố trùng lặp làm cùng một nhóm bệnh nhân bị tính hai lần trong phân tích gộp và có thể phóng đại tác dụng. Một bài phân tích thứ cấp hợp lệ vẫn được chấp nhận nếu trích dẫn chéo rõ ràng và có thêm điều mới.</a:t>
             </a:r>
           </a:p>
           <a:p>
@@ -1696,7 +1696,7 @@
           <a:p>
             <a:r>
               <a:rPr lang="en-US" sz="1400" b="0" dirty="0"/>
-              <a:t>Hỏi: kết cục chính của Bài 1 là âm tính. Vì sao việc nó được công bố lại quan trọng? Đáp án: sai lệch công bố - nếu chỉ thử nghiệm dương tính được đăng, y văn sẽ phóng đại lợi ích.</a:t>
+              <a:t>Hỏi: kết cục chính của Bài 1 là âm tính. Vì sao việc nó được công bố lại quan trọng? Đáp án: sai lệch công bố. Nếu chỉ thử nghiệm dương tính được đăng, y văn sẽ phóng đại lợi ích.</a:t>
             </a:r>
           </a:p>
         </p:txBody>
@@ -1789,19 +1789,19 @@
           <a:p>
             <a:r>
               <a:rPr lang="en-US" sz="1400" b="0" dirty="0"/>
-              <a:t>Tác giả 'quà tặng': tên được thêm vì thâm niên hay quan hệ. Tác giả 'ma': người thực sự làm - thường là người trẻ hoặc người viết thuê - nhưng không có tên. Cả hai đều là sai phạm.</a:t>
+              <a:t>Tác giả 'quà tặng': tên được thêm vì thâm niên hay quan hệ. Tác giả 'ma': người thực sự làm (thường là người trẻ hoặc người viết thuê) nhưng không có tên. Cả hai đều là sai phạm.</a:t>
             </a:r>
           </a:p>
           <a:p>
             <a:r>
               <a:rPr lang="en-US" sz="1400" b="0" dirty="0"/>
-              <a:t>Ví dụ xuyên suốt: Bài 2 được công bố 'thay mặt' một nhóm nghiên cứu; các thành viên được liệt kê trong Lời cảm ơn - cách ghi công đúng cho một mạng lưới lớn.</a:t>
+              <a:t>Ví dụ xuyên suốt: Bài 2 được công bố 'thay mặt' một nhóm nghiên cứu, và các thành viên được liệt kê trong Lời cảm ơn. Đó là cách ghi công đúng cho một mạng lưới lớn.</a:t>
             </a:r>
           </a:p>
           <a:p>
             <a:r>
               <a:rPr lang="en-US" sz="1400" b="0" dirty="0"/>
-              <a:t>Hỏi: chỉ thu thập số liệu - có đủ để đứng tên tác giả không? Đáp án: không, nếu thiếu tiêu chí 2, 3 và 4.</a:t>
+              <a:t>Hỏi: chỉ thu thập số liệu, có đủ để đứng tên tác giả không? Đáp án: không, nếu thiếu tiêu chí 2, 3 và 4.</a:t>
             </a:r>
           </a:p>
           <a:p>
@@ -1900,7 +1900,7 @@
           <a:p>
             <a:r>
               <a:rPr lang="en-US" sz="1400" b="0" dirty="0"/>
-              <a:t>Câu 5: hỏi mỗi nhóm một người - đây là con số họ sẽ viết sau giải lao. Nếu nhóm nào không nói được, ngồi với nhóm đó trong giờ giải lao và cùng xem gói kết quả.</a:t>
+              <a:t>Câu 5: hỏi mỗi nhóm một người. Đây là con số họ sẽ viết sau giải lao. Nếu nhóm nào không nói được, ngồi với nhóm đó trong giờ giải lao và cùng xem gói kết quả.</a:t>
             </a:r>
           </a:p>
           <a:p>
@@ -1987,7 +1987,7 @@
           <a:p>
             <a:r>
               <a:rPr lang="en-US" sz="1400" b="0" dirty="0"/>
-              <a:t>Ý chính: xung đột lợi ích là bất cứ điều gì có thể bị xem là ảnh hưởng đến nhận định của bạn - tài chính hoặc phi tài chính. Có xung đột lợi ích là chuyện thường gặp và không sai; che giấu mới là sai.</a:t>
+              <a:t>Ý chính: xung đột lợi ích là bất cứ điều gì có thể bị xem là ảnh hưởng đến nhận định của bạn, tài chính hoặc phi tài chính. Có xung đột lợi ích là chuyện thường gặp và không sai; che giấu mới là sai.</a:t>
             </a:r>
           </a:p>
           <a:p>
@@ -2011,13 +2011,13 @@
           <a:p>
             <a:r>
               <a:rPr lang="en-US" sz="1400" b="0" dirty="0"/>
-              <a:t>Ví dụ xuyên suốt: Bài 2 ghi rõ nhà tài trợ không có vai trò trong thiết kế, thu thập, phân tích dữ liệu hay soạn bản thảo - một yêu cầu của ICMJE thường bị quên (chú giải #39). Bài 1 ghi kinh phí nội bộ của bệnh viện và không có xung đột lợi ích (trang 12).</a:t>
+              <a:t>Ví dụ xuyên suốt: Bài 2 ghi rõ nhà tài trợ không có vai trò trong thiết kế, thu thập, phân tích dữ liệu hay soạn bản thảo, một yêu cầu của ICMJE thường bị quên (chú giải #39). Bài 1 ghi kinh phí nội bộ của bệnh viện và không có xung đột lợi ích (trang 12).</a:t>
             </a:r>
           </a:p>
           <a:p>
             <a:r>
               <a:rPr lang="en-US" sz="1400" b="0" dirty="0"/>
-              <a:t>Hỏi: năm ngoái một công ty dược tài trợ bạn đi hội nghị. Có khai báo khi viết bài về dịch truyền không? Đáp án: có nếu có thể bị xem là liên quan - khi nghi ngờ, hãy khai báo.</a:t>
+              <a:t>Hỏi: năm ngoái một công ty dược tài trợ bạn đi hội nghị. Có khai báo khi viết bài về dịch truyền không? Đáp án: có nếu có thể bị xem là liên quan. Khi nghi ngờ, hãy khai báo.</a:t>
             </a:r>
           </a:p>
         </p:txBody>
@@ -2104,7 +2104,7 @@
           <a:p>
             <a:r>
               <a:rPr lang="en-US" sz="1400" b="0" dirty="0"/>
-              <a:t>Các bậc: không chia sẻ; 'có thể cung cấp theo yêu cầu hợp lý' (cam kết yếu nhất - cả hai bài đều dùng, trang 12 và 8); kho dữ liệu có kiểm soát (nhà nghiên cứu nộp đơn xin); kho mở có mã DOI (cho dữ liệu đã ẩn danh hoàn toàn).</a:t>
+              <a:t>Các bậc: không chia sẻ; 'có thể cung cấp theo yêu cầu hợp lý' (cam kết yếu nhất, cả hai bài đều dùng, trang 12 và 8); kho dữ liệu có kiểm soát (nhà nghiên cứu nộp đơn xin); kho mở có mã DOI (cho dữ liệu đã ẩn danh hoàn toàn).</a:t>
             </a:r>
           </a:p>
           <a:p>
@@ -2203,7 +2203,7 @@
           <a:p>
             <a:r>
               <a:rPr lang="en-US" sz="1400" b="0" dirty="0"/>
-              <a:t>Ý chính - quan điểm hiện nay của ICMJE và COPE (Ủy ban Đạo đức Xuất bản): công cụ AI không thể là tác giả, vì không thể nhận trách nhiệm về công trình. Tác giả dùng AI phải khai báo - hỗ trợ viết thường ghi ở Lời cảm ơn, dùng trong thu thập, phân tích dữ liệu hay tạo hình ghi ở phần Phương pháp - và vẫn chịu hoàn toàn trách nhiệm về từng chữ, con số và tài liệu tham khảo, kể cả phần do công cụ tạo ra.</a:t>
+              <a:t>Ý chính: quan điểm hiện nay của ICMJE và COPE (Ủy ban Đạo đức Xuất bản). Công cụ AI không thể là tác giả, vì không thể nhận trách nhiệm về công trình. Tác giả dùng AI phải khai báo (hỗ trợ viết thường ghi ở Lời cảm ơn, dùng trong thu thập, phân tích dữ liệu hay tạo hình ghi ở phần Phương pháp) và vẫn chịu hoàn toàn trách nhiệm về từng chữ, con số và tài liệu tham khảo, kể cả phần do công cụ tạo ra.</a:t>
             </a:r>
           </a:p>
           <a:p>
@@ -2227,13 +2227,13 @@
           <a:p>
             <a:r>
               <a:rPr lang="en-US" sz="1400" b="0" dirty="0"/>
-              <a:t>Luôn đọc chính sách AI trong Hướng dẫn tác giả của tạp chí dự kiến - chính sách thay đổi liên tục.</a:t>
+              <a:t>Luôn đọc chính sách AI trong Hướng dẫn tác giả của tạp chí dự kiến, vì chính sách thay đổi liên tục.</a:t>
             </a:r>
           </a:p>
           <a:p>
             <a:r>
               <a:rPr lang="en-US" sz="1400" b="0" dirty="0"/>
-              <a:t>Hỏi: một đồng nghiệp nhờ chatbot 'viết phần bàn luận' rồi nộp mà không đọc. Vi phạm ô KHÔNG BAO GIỜ nào? Đáp án: tài liệu tham khảo có thể bị bịa, văn bản không ai chịu trách nhiệm - và không khai báo.</a:t>
+              <a:t>Hỏi: một đồng nghiệp nhờ chatbot 'viết phần bàn luận' rồi nộp mà không đọc. Vi phạm ô KHÔNG BAO GIỜ nào? Đáp án: tài liệu tham khảo có thể bị bịa, văn bản không ai chịu trách nhiệm, và không khai báo.</a:t>
             </a:r>
           </a:p>
         </p:txBody>
@@ -2320,25 +2320,25 @@
           <a:p>
             <a:r>
               <a:rPr lang="en-US" sz="1400" b="0" dirty="0"/>
-              <a:t>Chọn ba: 1 (dữ liệu thiếu 'điền theo trí nhớ' - ĐỎ, bịa đặt), 3 (trưởng khoa đứng tác giả cuối mà không đóng góp - ĐỎ, tác giả quà tặng, đề nghị ghi Lời cảm ơn), 4 (dùng AI sửa tiếng Anh, có kiểm tra và khai báo - XANH; cũng chatbot đó nhưng được đưa bảng dữ liệu bệnh nhân - ĐỎ).</a:t>
+              <a:t>Chọn ba: 1 (dữ liệu thiếu 'điền theo trí nhớ': ĐỎ, bịa đặt), 3 (trưởng khoa đứng tác giả cuối mà không đóng góp: ĐỎ, tác giả quà tặng, đề nghị ghi Lời cảm ơn), 4 (dùng AI sửa tiếng Anh, có kiểm tra và khai báo: XANH; cũng chatbot đó nhưng được đưa bảng dữ liệu bệnh nhân: ĐỎ).</a:t>
             </a:r>
           </a:p>
           <a:p>
             <a:r>
               <a:rPr lang="en-US" sz="1400" b="0" dirty="0"/>
-              <a:t>Ví dụ trên slide: cho mượn thiết bị không phải là quyền tác giả - VÀNG/ĐỎ: cảm ơn trong Lời cảm ơn.</a:t>
+              <a:t>Ví dụ trên slide: cho mượn thiết bị không phải là quyền tác giả (VÀNG/ĐỎ). Cảm ơn trong Lời cảm ơn.</a:t>
             </a:r>
           </a:p>
           <a:p>
             <a:r>
               <a:rPr lang="en-US" sz="1400" b="0" dirty="0"/>
-              <a:t>Tổ chức: thẻ hoặc giấy màu trên mỗi bàn; nếu không có, giơ ngón tay - 1 = xanh, 2 = vàng, 3 = đỏ.</a:t>
+              <a:t>Tổ chức: thẻ hoặc giấy màu trên mỗi bàn; nếu không có, giơ ngón tay: 1 = xanh, 2 = vàng, 3 = đỏ.</a:t>
             </a:r>
           </a:p>
           <a:p>
             <a:r>
               <a:rPr lang="en-US" sz="1400" b="0" dirty="0"/>
-              <a:t>Nếu các nhóm bất đồng, đó chính là lúc dạy - mời mỗi bên nêu một lý do.</a:t>
+              <a:t>Nếu các nhóm bất đồng, đó chính là lúc dạy. Mời mỗi bên nêu một lý do.</a:t>
             </a:r>
           </a:p>
         </p:txBody>
@@ -2425,19 +2425,19 @@
           <a:p>
             <a:r>
               <a:rPr lang="en-US" sz="1400" b="0" dirty="0"/>
-              <a:t>Đi quanh các bàn. Vấn đề thường gặp: (1) 'sẽ xin chấp thuận' mà không nói ai, khi nào, thế nào - hướng theo sơ đồ ICU; (2) nghiên cứu hồi cứu hồ sơ cho rằng không cần hội đồng - sai, hội đồng quyết định và có thể miễn chấp thuận; (3) số bệnh nhân lấy từ tính cỡ mẫu thay vì từ số nhập viện của khoa; (4) chọn CONSORT cho đề cương quan sát.</a:t>
+              <a:t>Đi quanh các bàn. Vấn đề thường gặp: (1) 'sẽ xin chấp thuận' mà không nói ai, khi nào, thế nào (hướng theo sơ đồ ICU); (2) nghiên cứu hồi cứu hồ sơ cho rằng không cần hội đồng (sai: hội đồng quyết định và có thể miễn chấp thuận); (3) số bệnh nhân lấy từ tính cỡ mẫu thay vì từ số nhập viện của khoa; (4) chọn CONSORT cho đề cương quan sát.</a:t>
             </a:r>
           </a:p>
           <a:p>
             <a:r>
               <a:rPr lang="en-US" sz="1400" b="0" dirty="0"/>
-              <a:t>Tạp chí và bảng kiểm EQUATOR sẽ được kiểm tra lại ở 8.2 thứ Bảy tuần sau - hôm nay trả lời tạm là được.</a:t>
+              <a:t>Tạp chí và bảng kiểm EQUATOR sẽ được kiểm tra lại ở 8.2 thứ Bảy tuần sau. Hôm nay trả lời tạm là được.</a:t>
             </a:r>
           </a:p>
           <a:p>
             <a:r>
               <a:rPr lang="en-US" sz="1400" b="0" dirty="0"/>
-              <a:t>Nhắc: thứ Bảy tuần sau mỗi nhóm trình bày (6 phút, 6 slide) - slide 5 (đạo đức &amp; khả thi) và 6 (kế hoạch công bố) lấy từ phiếu này.</a:t>
+              <a:t>Nhắc: thứ Bảy tuần sau mỗi nhóm trình bày (6 phút, 6 slide). Slide 5 (đạo đức &amp; khả thi) và 6 (kế hoạch công bố) lấy từ phiếu này.</a:t>
             </a:r>
           </a:p>
         </p:txBody>
@@ -2623,7 +2623,7 @@
           <a:p>
             <a:r>
               <a:rPr lang="en-US" sz="1400" b="0" dirty="0"/>
-              <a:t>Nhịp: 3 phút mỗi slide. Hai ví dụ mẫu là trọng tâm - đọc chậm cùng cả lớp.</a:t>
+              <a:t>Nhịp: 3 phút mỗi slide. Hai ví dụ mẫu là trọng tâm. Đọc chậm cùng cả lớp.</a:t>
             </a:r>
           </a:p>
         </p:txBody>
@@ -2704,13 +2704,13 @@
           <a:p>
             <a:r>
               <a:rPr lang="en-US" sz="1400" b="0" dirty="0"/>
-              <a:t>Ý chính: người đọc đi từ tiêu đề - tóm tắt - đặt vấn đề - phương pháp - kết quả - bàn luận. Người viết thì không nên. Hãy bắt đầu từ bằng chứng: soạn bảng và hình (câu chuyện nằm trong dữ liệu), rồi Phương pháp (bạn biết mình đã làm gì - có thể soạn từ đề cương ngay cả trước khi có dữ liệu), rồi Kết quả (mô tả các bảng), rồi Đặt vấn đề (dẫn tới đúng câu hỏi bạn đã trả lời), rồi Bàn luận, và chỉ sau đó mới viết tóm tắt và tiêu đề.</a:t>
+              <a:t>Ý chính: người đọc đi từ tiêu đề đến tóm tắt, đặt vấn đề, phương pháp, kết quả và bàn luận. Người viết thì không nên. Hãy bắt đầu từ bằng chứng: soạn bảng và hình (câu chuyện nằm trong dữ liệu), rồi Phương pháp (bạn biết mình đã làm gì, nên có thể soạn từ đề cương ngay cả trước khi có dữ liệu), rồi Kết quả (mô tả các bảng), rồi Đặt vấn đề (dẫn tới đúng câu hỏi bạn đã trả lời), rồi Bàn luận, và chỉ sau đó mới viết tóm tắt và tiêu đề.</a:t>
             </a:r>
           </a:p>
           <a:p>
             <a:r>
               <a:rPr lang="en-US" sz="1400" b="0" dirty="0"/>
-              <a:t>Vì sao hiệu quả: mỗi phần được viết từ thứ đã có sẵn, còn tóm tắt và tiêu đề tóm lược một bài đã xong - nên không thể hứa hẹn nhiều hơn những gì bài báo có.</a:t>
+              <a:t>Vì sao hiệu quả: mỗi phần được viết từ thứ đã có sẵn, còn tóm tắt và tiêu đề tóm lược một bài đã xong, nên không thể hứa hẹn nhiều hơn những gì bài báo có.</a:t>
             </a:r>
           </a:p>
           <a:p>
@@ -2722,7 +2722,7 @@
           <a:p>
             <a:r>
               <a:rPr lang="en-US" sz="1400" b="0" dirty="0"/>
-              <a:t>Hỏi: phần nào trong đề cương của bạn đã có thể thành phần Phương pháp của bài báo? Đáp án: Phần 2 và 3 - thiết kế, đối tượng, biến số, kế hoạch phân tích.</a:t>
+              <a:t>Hỏi: phần nào trong đề cương của bạn đã có thể thành phần Phương pháp của bài báo? Đáp án: Phần 2 và 3 (thiết kế, đối tượng, biến số, kế hoạch phân tích).</a:t>
             </a:r>
           </a:p>
         </p:txBody>
@@ -2809,7 +2809,7 @@
           <a:p>
             <a:r>
               <a:rPr lang="en-US" sz="1400" b="0" dirty="0"/>
-              <a:t>Thực hành tốt: Bài 1 đặt tên hội đồng đạo đức, số phê duyệt, quy trình chấp thuận và nguồn tài trợ ngay trong Phương pháp (chú giải #13); mô tả can thiệp đủ để làm lại - tập huấn nhân viên, dược sĩ kiểm tra hằng ngày, bảng pha loãng thuốc trong phụ lục (#16); tách một kết cục chính khỏi kết cục phụ và an toàn (#17); ghi phần mềm và phiên bản (#21). Bài 2 định nghĩa rõ dịch vào và dịch ra nào tạo nên cân bằng dịch (#13) và dẫn bài mô tả đoàn hệ thay vì viết lại (#12).</a:t>
+              <a:t>Thực hành tốt: Bài 1 đặt tên hội đồng đạo đức, số phê duyệt, quy trình chấp thuận và nguồn tài trợ ngay trong Phương pháp (chú giải #13); mô tả can thiệp đủ để làm lại: tập huấn nhân viên, dược sĩ kiểm tra hằng ngày, bảng pha loãng thuốc trong phụ lục (#16); tách một kết cục chính khỏi kết cục phụ và an toàn (#17); ghi phần mềm và phiên bản (#21). Bài 2 định nghĩa rõ dịch vào và dịch ra nào tạo nên cân bằng dịch (#13) và dẫn bài mô tả đoàn hệ thay vì viết lại (#12).</a:t>
             </a:r>
           </a:p>
           <a:p>
@@ -2821,7 +2821,7 @@
           <a:p>
             <a:r>
               <a:rPr lang="en-US" sz="1400" b="0" dirty="0"/>
-              <a:t>Đoạn phân tích thống kê: với mỗi so sánh - cách tóm tắt, kiểm định hoặc mô hình, số đo tác động kèm KTC 95%, cách xử lý dữ liệu thiếu và so sánh bội, và phần mềm.</a:t>
+              <a:t>Đoạn phân tích thống kê: với mỗi so sánh, nêu cách tóm tắt, kiểm định hoặc mô hình, số đo tác động kèm KTC 95%, cách xử lý dữ liệu thiếu và so sánh bội, và phần mềm.</a:t>
             </a:r>
           </a:p>
         </p:txBody>
@@ -2908,7 +2908,7 @@
           <a:p>
             <a:r>
               <a:rPr lang="en-US" sz="1400" b="0" dirty="0"/>
-              <a:t>Mọi thông tin lấy từ gói kết quả Q1, mục 2: đoàn hệ tiến cứu đa trung tâm, 4 ICU, người lớn nhiễm khuẩn huyết liên tiếp, 1/2023 - 12/2024; phơi nhiễm = cân bằng tích lũy (vào trừ ra, ngày 1-3) &gt; 0 ml/kg; kết cục = tử vong trong 28 ngày sau nhập ICU.</a:t>
+              <a:t>Mọi thông tin lấy từ gói kết quả Q1, mục 2: đoàn hệ tiến cứu đa trung tâm, 4 ICU, người lớn nhiễm khuẩn huyết liên tiếp, từ 1/2023 đến 12/2024; phơi nhiễm = cân bằng tích lũy (vào trừ ra, ngày 1-3) &gt; 0 ml/kg; kết cục = tử vong trong 28 ngày sau nhập ICU.</a:t>
             </a:r>
           </a:p>
           <a:p>
@@ -2920,13 +2920,13 @@
           <a:p>
             <a:r>
               <a:rPr lang="en-US" sz="1400" b="0" dirty="0"/>
-              <a:t>Câu đạo đức là riêng của khóa học: FLUID-ICU là dữ liệu MÔ PHỎNG - mọi bản thảo phải nói rõ.</a:t>
+              <a:t>Câu đạo đức là riêng của khóa học: FLUID-ICU là dữ liệu MÔ PHỎNG, và mọi bản thảo phải nói rõ.</a:t>
             </a:r>
           </a:p>
           <a:p>
             <a:r>
               <a:rPr lang="en-US" sz="1400" b="0" dirty="0"/>
-              <a:t>Hỏi: câu nào người đọc cần để lặp lại nghiên cứu? Đáp án: định nghĩa phơi nhiễm - cân bằng dịch được tính thế nào.</a:t>
+              <a:t>Hỏi: câu nào người đọc cần để lặp lại nghiên cứu? Đáp án: định nghĩa phơi nhiễm (cân bằng dịch được tính thế nào).</a:t>
             </a:r>
           </a:p>
         </p:txBody>
@@ -3007,13 +3007,13 @@
           <a:p>
             <a:r>
               <a:rPr lang="en-US" sz="1400" b="0" dirty="0"/>
-              <a:t>Hai sản phẩm, hai hàng. Sản phẩm 1 - đề cương nghiên cứu của chính nhóm - hôm nay có phần cuối cùng (đạo đức, đăng ký, khả thi, kế hoạch công bố) và được trình bày thứ Bảy tuần sau.</a:t>
+              <a:t>Hai sản phẩm, hai hàng. Sản phẩm 1, đề cương nghiên cứu của chính nhóm, hôm nay có phần cuối cùng (đạo đức, đăng ký, khả thi, kế hoạch công bố) và được trình bày thứ Bảy tuần sau.</a:t>
             </a:r>
           </a:p>
           <a:p>
             <a:r>
               <a:rPr lang="en-US" sz="1400" b="0" dirty="0"/>
-              <a:t>Sản phẩm 2 - bản thảo FLUID-ICU - chuyển từ 'đọc kết quả phân tích' (Buổi 6) sang VIẾT: hôm nay Phương pháp và Kết quả, thứ Bảy tuần sau Đặt vấn đề, Bàn luận, Tóm tắt và Tiêu đề.</a:t>
+              <a:t>Sản phẩm 2, bản thảo FLUID-ICU, chuyển từ 'đọc kết quả phân tích' (Buổi 6) sang VIẾT: hôm nay Phương pháp và Kết quả, thứ Bảy tuần sau Đặt vấn đề, Bàn luận, Tóm tắt và Tiêu đề.</a:t>
             </a:r>
           </a:p>
           <a:p>
@@ -3106,7 +3106,7 @@
           <a:p>
             <a:r>
               <a:rPr lang="en-US" sz="1400" b="0" dirty="0"/>
-              <a:t>Biến hiệu chỉnh: tuổi, SOFA, lactat, vận mạch, thở máy, bệnh thận mạn - định trước trong kế hoạch phân tích thống kê (Buổi 6), không chọn theo giá trị p.</a:t>
+              <a:t>Biến hiệu chỉnh: tuổi, SOFA, lactat, vận mạch, thở máy, bệnh thận mạn. Tất cả được định trước trong kế hoạch phân tích thống kê (Buổi 6), không chọn theo giá trị p.</a:t>
             </a:r>
           </a:p>
           <a:p>
@@ -3205,7 +3205,7 @@
           <a:p>
             <a:r>
               <a:rPr lang="en-US" sz="1400" b="0" dirty="0"/>
-              <a:t>Bốn quy tắc. 1) Đối tượng trước tiên: bao nhiêu người được sàng lọc, đưa vào, phân tích và vì sao mất một số - kèm sơ đồ. Bài 1 có sơ đồ CONSORT trong bài chính (chú giải #23, #27); Bài 2 để trong phụ lục dù 79% sổ bộ bị loại (#20).</a:t>
+              <a:t>Bốn quy tắc. 1) Đối tượng trước tiên: bao nhiêu người được sàng lọc, đưa vào, phân tích và vì sao mất một số, kèm sơ đồ. Bài 1 có sơ đồ CONSORT trong bài chính (chú giải #23, #27); Bài 2 để trong phụ lục dù 79% sổ bộ bị loại (#20).</a:t>
             </a:r>
           </a:p>
           <a:p>
@@ -3223,7 +3223,7 @@
           <a:p>
             <a:r>
               <a:rPr lang="en-US" sz="1400" b="0" dirty="0"/>
-              <a:t>4) Mỗi con số một chỗ: số chính trong văn bản, chi tiết trong bảng - và phải khớp nhau. Văn bản Bài 1 nói creatinine cao hơn ở nhóm can thiệp; Bảng 1 cho thấy ngược lại (#25). Mâu thuẫn văn bản - bảng là lý do bị từ chối kinh điển.</a:t>
+              <a:t>4) Mỗi con số một chỗ: số chính trong văn bản, chi tiết trong bảng, và phải khớp nhau. Văn bản Bài 1 nói creatinine cao hơn ở nhóm can thiệp; Bảng 1 cho thấy ngược lại (#25). Mâu thuẫn giữa văn bản và bảng là lý do bị từ chối kinh điển.</a:t>
             </a:r>
           </a:p>
           <a:p>
@@ -3316,7 +3316,7 @@
           <a:p>
             <a:r>
               <a:rPr lang="en-US" sz="1400" b="0" dirty="0"/>
-              <a:t>Luồng: 620 đưa vào -&gt; 618 có cân bằng ngày 3 -&gt; 527 trong mô hình hiệu chỉnh ca đầy đủ (91 thiếu lactat hoặc tuổi).</a:t>
+              <a:t>Luồng: 620 đưa vào → 618 có cân bằng ngày 3 → 527 trong mô hình hiệu chỉnh ca đầy đủ (91 thiếu lactat hoặc tuổi).</a:t>
             </a:r>
           </a:p>
           <a:p>
@@ -3334,7 +3334,7 @@
           <a:p>
             <a:r>
               <a:rPr lang="en-US" sz="1400" b="0" dirty="0"/>
-              <a:t>Chỉ ra điều KHÔNG có trong đoạn: không 'vì', không 'có ý nghĩa', không giải thích vì sao OR giảm - đó là việc của Bàn luận thứ Bảy tuần sau.</a:t>
+              <a:t>Chỉ ra điều KHÔNG có trong đoạn: không 'vì', không 'có ý nghĩa', không giải thích vì sao OR giảm. Đó là việc của Bàn luận thứ Bảy tuần sau.</a:t>
             </a:r>
           </a:p>
           <a:p>
@@ -3427,7 +3427,7 @@
           <a:p>
             <a:r>
               <a:rPr lang="en-US" sz="1400" b="0" dirty="0"/>
-              <a:t>Thực hành tốt: Bảng 1 Bài 1 có n mỗi cột, ĐLC hoặc KTPV mỗi dòng và không có giá trị p ban đầu - đúng cho thử nghiệm ngẫu nhiên (chú giải #31). Bảng 1 Bài 2 thêm SMD và chú thích số bệnh nhân thiếu dữ liệu (#30); hình trục thời gian có chú thích tự đủ nghĩa (#21).</a:t>
+              <a:t>Thực hành tốt: Bảng 1 Bài 1 có n mỗi cột, ĐLC hoặc KTPV mỗi dòng và không có giá trị p ban đầu, đúng cho thử nghiệm ngẫu nhiên (chú giải #31). Bảng 1 Bài 2 thêm SMD và chú thích số bệnh nhân thiếu dữ liệu (#30); hình trục thời gian có chú thích tự đủ nghĩa (#21).</a:t>
             </a:r>
           </a:p>
           <a:p>
@@ -3439,7 +3439,7 @@
           <a:p>
             <a:r>
               <a:rPr lang="en-US" sz="1400" b="0" dirty="0"/>
-              <a:t>Liên hệ Buổi 5: quy tắc bảng đạt chuẩn công bố. Bảng 1 FLUID-ICU trong gói kết quả đã theo các quy tắc này - hãy đối chiếu trong buổi thực hành.</a:t>
+              <a:t>Liên hệ Buổi 5: quy tắc bảng đạt chuẩn công bố. Bảng 1 FLUID-ICU trong gói kết quả đã theo các quy tắc này. Hãy đối chiếu trong buổi thực hành.</a:t>
             </a:r>
           </a:p>
           <a:p>
@@ -3538,13 +3538,13 @@
           <a:p>
             <a:r>
               <a:rPr lang="en-US" sz="1400" b="0" dirty="0"/>
-              <a:t>Ý chính: câu về Bảng 1 mô tả, không kiểm định - không cần giá trị p (Bảng 1 của nghiên cứu quan sát thường dùng SMD).</a:t>
+              <a:t>Ý chính: câu về Bảng 1 mô tả, không kiểm định, nên không cần giá trị p (Bảng 1 của nghiên cứu quan sát thường dùng SMD).</a:t>
             </a:r>
           </a:p>
           <a:p>
             <a:r>
               <a:rPr lang="en-US" sz="1400" b="0" dirty="0"/>
-              <a:t>Suy tim thấp hơn ở nhóm dương vì bác sĩ truyền ít dịch cho bệnh nhân suy tim - ví dụ hay về việc quyết định điều trị định hình dữ liệu.</a:t>
+              <a:t>Suy tim thấp hơn ở nhóm dương vì bác sĩ truyền ít dịch cho bệnh nhân suy tim: ví dụ hay về việc quyết định điều trị định hình dữ liệu.</a:t>
             </a:r>
           </a:p>
           <a:p>
@@ -3637,7 +3637,7 @@
           <a:p>
             <a:r>
               <a:rPr lang="en-US" sz="1400" b="0" dirty="0"/>
-              <a:t>Các mục hay bị quên: 9 (sai lệch - nói rõ cách xử lý nhiễu do chỉ định: hiệu chỉnh theo mức độ nặng); 10 (cỡ mẫu - với bộ dữ liệu cố định ghi 'đưa vào toàn bộ bệnh nhân đủ tiêu chuẩn trong đoàn hệ'); 12 (dữ liệu thiếu - xử lý lactat thiếu thế nào); 16 (báo cáo CẢ ước lượng thô và hiệu chỉnh, kèm các biến hiệu chỉnh).</a:t>
+              <a:t>Các mục hay bị quên: 9 (sai lệch: nói rõ cách xử lý nhiễu do chỉ định, tức là hiệu chỉnh theo mức độ nặng); 10 (cỡ mẫu: với bộ dữ liệu cố định ghi 'đưa vào toàn bộ bệnh nhân đủ tiêu chuẩn trong đoàn hệ'); 12 (dữ liệu thiếu: xử lý lactat thiếu thế nào); 16 (báo cáo CẢ ước lượng thô và hiệu chỉnh, kèm các biến hiệu chỉnh).</a:t>
             </a:r>
           </a:p>
           <a:p>
@@ -3748,7 +3748,7 @@
           <a:p>
             <a:r>
               <a:rPr lang="en-US" sz="1400" b="0" dirty="0"/>
-              <a:t>Câu 3 là lỗi kinh điển - một lời diễn giải lọt vào Kết quả. Chuyển nó sang Bàn luận.</a:t>
+              <a:t>Câu 3 là lỗi kinh điển: một lời diễn giải lọt vào Kết quả. Chuyển nó sang Bàn luận.</a:t>
             </a:r>
           </a:p>
         </p:txBody>
@@ -3835,7 +3835,7 @@
           <a:p>
             <a:r>
               <a:rPr lang="en-US" sz="1400" b="0" dirty="0"/>
-              <a:t>Hướng dẫn cho học viên: Practicals/s7_exercises.md, Phần C. Đoạn văn mẫu cho Q1: Solutions/s7_solutions.md (KHÔNG phát trước buổi thực hành - chỉ chiếu các ví dụ mẫu trên slide).</a:t>
+              <a:t>Hướng dẫn cho học viên: Practicals/s7_exercises.md, Phần C. Đoạn văn mẫu cho Q1: Solutions/s7_solutions.md. KHÔNG phát trước buổi thực hành; chỉ chiếu các ví dụ mẫu trên slide.</a:t>
             </a:r>
           </a:p>
         </p:txBody>
@@ -4027,13 +4027,13 @@
           <a:p>
             <a:r>
               <a:rPr lang="en-US" sz="1400" b="0" dirty="0"/>
-              <a:t>Nhóm Q4 (lactat): bảo đảm báo cáo CẢ ước lượng phân tích ca đầy đủ và quy gán. Nhóm Q5 (thời gian nằm ICU): trung vị và KTPV, không dùng trung bình. Nhóm Q3: số ngày không thở máy bị lệch - kiểm tra cách tóm tắt.</a:t>
+              <a:t>Nhóm Q4 (lactat): bảo đảm báo cáo CẢ ước lượng phân tích ca đầy đủ và quy gán. Nhóm Q5 (thời gian nằm ICU): trung vị và KTPV, không dùng trung bình. Nhóm Q3: số ngày không thở máy bị lệch, nên kiểm tra cách tóm tắt.</a:t>
             </a:r>
           </a:p>
           <a:p>
             <a:r>
               <a:rPr lang="en-US" sz="1400" b="0" dirty="0"/>
-              <a:t>Lúc 2:52 đề nghị mỗi nhóm lưu và gửi bản nháp (email hoặc thư mục chung) - đây là tệp khởi đầu cho thực hành 2 thứ Bảy tuần sau.</a:t>
+              <a:t>Lúc 2:52 đề nghị mỗi nhóm lưu và gửi bản nháp (email hoặc thư mục chung). Đây là tệp khởi đầu cho thực hành 2 thứ Bảy tuần sau.</a:t>
             </a:r>
           </a:p>
         </p:txBody>
@@ -4120,7 +4120,7 @@
           <a:p>
             <a:r>
               <a:rPr lang="en-US" sz="1400" b="0" dirty="0"/>
-              <a:t>Khoảng 2,5 phút mỗi slide. Slide chấp thuận trong ICU và ví dụ mẫu đi kèm cần nhiều thời gian nhất - đó là vấn đề thực tế của khoa.</a:t>
+              <a:t>Khoảng 2,5 phút mỗi slide. Slide chấp thuận trong ICU và ví dụ mẫu đi kèm cần nhiều thời gian nhất: đó là vấn đề thực tế của khoa.</a:t>
             </a:r>
           </a:p>
           <a:p>
@@ -4207,7 +4207,7 @@
           <a:p>
             <a:r>
               <a:rPr lang="en-US" sz="1400" b="0" dirty="0"/>
-              <a:t>Đọc sáu thuật ngữ cùng cả lớp - mời một người giải thích bằng lời của mình trước khi đọc cột bên phải.</a:t>
+              <a:t>Đọc sáu thuật ngữ cùng cả lớp. Mời một người giải thích bằng lời của mình trước khi đọc cột bên phải.</a:t>
             </a:r>
           </a:p>
           <a:p>
@@ -4462,7 +4462,7 @@
           <a:p>
             <a:r>
               <a:rPr lang="en-US" sz="1400" b="0" dirty="0"/>
-              <a:t>EXTRA: Ý chính: hầu hết bài báo lâm sàng theo cấu trúc IMRaD - Đặt vấn đề, Phương pháp, Kết quả, Bàn luận - mở đầu bằng tiêu đề và tóm tắt, kết thúc bằng tài liệu tham khảo và các cam kết.</a:t>
+              <a:t>EXTRA: Ý chính: hầu hết bài báo lâm sàng theo cấu trúc IMRaD (Đặt vấn đề, Phương pháp, Kết quả, Bàn luận), mở đầu bằng tiêu đề và tóm tắt, kết thúc bằng tài liệu tham khảo và các cam kết.</a:t>
             </a:r>
           </a:p>
           <a:p>
@@ -4480,13 +4480,13 @@
           <a:p>
             <a:r>
               <a:rPr lang="en-US" sz="1400" b="0" dirty="0"/>
-              <a:t>Mẹo cho bài thẩm định sau giải lao: đồng hồ cát chỉ chỗ cần tìm - PICO ở đoạn cuối Đặt vấn đề, thiết kế và kết cục ở Phương pháp, tác dụng chính ở đoạn đầu Kết quả, hạn chế ở gần cuối Bàn luận.</a:t>
+              <a:t>Mẹo cho bài thẩm định sau giải lao: đồng hồ cát chỉ chỗ cần tìm. PICO ở đoạn cuối Đặt vấn đề, thiết kế và kết cục ở Phương pháp, tác dụng chính ở đoạn đầu Kết quả, hạn chế ở gần cuối Bàn luận.</a:t>
             </a:r>
           </a:p>
           <a:p>
             <a:r>
               <a:rPr lang="en-US" sz="1400" b="0" dirty="0"/>
-              <a:t>Hỏi: bạn đọc phần nào trước? Nhiều người nói tóm tắt và kết luận - không sao, nhưng câu trả lời cho 'có tin được không?' nằm ở phần Phương pháp.</a:t>
+              <a:t>Hỏi: bạn đọc phần nào trước? Nhiều người nói tóm tắt và kết luận. Không sao, nhưng câu trả lời cho 'có tin được không?' nằm ở phần Phương pháp.</a:t>
             </a:r>
           </a:p>
         </p:txBody>
@@ -4567,13 +4567,13 @@
           <a:p>
             <a:r>
               <a:rPr lang="en-US" sz="1400" b="0" dirty="0"/>
-              <a:t>EXTRA: CRediT (Contributor Roles Taxonomy - phân loại vai trò người đóng góp) gồm 14 vai trò chuẩn, giữ nguyên tên tiếng Anh khi nộp bài. Nó không thay thế tiêu chí ICMJE mà làm cho đóng góp của mỗi người được nhìn thấy.</a:t>
+              <a:t>EXTRA: CRediT (Contributor Roles Taxonomy, phân loại vai trò người đóng góp) gồm 14 vai trò chuẩn, giữ nguyên tên tiếng Anh khi nộp bài. Nó không thay thế tiêu chí ICMJE mà làm cho đóng góp của mỗi người được nhìn thấy.</a:t>
             </a:r>
           </a:p>
           <a:p>
             <a:r>
               <a:rPr lang="en-US" sz="1400" b="0" dirty="0"/>
-              <a:t>Ví dụ xuyên suốt: Bài 1 (trang 12) có tuyên bố CRediT - VD nhà thống kê được ghi công Methodology và Formal analysis. Bài 2 (trang 8) mô tả đóng góp bằng văn xuôi và ghi tất cả tác giả đã đọc và duyệt bản thảo cuối - chấp nhận được, nhưng CRediT là định dạng đa số tạp chí đang yêu cầu.</a:t>
+              <a:t>Ví dụ xuyên suốt: Bài 1 (trang 12) có tuyên bố CRediT; VD nhà thống kê được ghi công Methodology và Formal analysis. Bài 2 (trang 8) mô tả đóng góp bằng văn xuôi và ghi tất cả tác giả đã đọc và duyệt bản thảo cuối. Cách này chấp nhận được, nhưng CRediT là định dạng đa số tạp chí đang yêu cầu.</a:t>
             </a:r>
           </a:p>
           <a:p>
@@ -4585,7 +4585,7 @@
           <a:p>
             <a:r>
               <a:rPr lang="en-US" sz="1400" b="0" dirty="0"/>
-              <a:t>Hỏi: trong bệnh viện, ai thường đứng tên tác giả cuối, vì sao? Đáp án: người hướng dẫn cấp cao - hợp lệ nếu đủ bốn tiêu chí, là 'quà tặng' nếu không.</a:t>
+              <a:t>Hỏi: trong bệnh viện, ai thường đứng tên tác giả cuối, vì sao? Đáp án: người hướng dẫn cấp cao. Hợp lệ nếu đủ bốn tiêu chí, là 'quà tặng' nếu không.</a:t>
             </a:r>
           </a:p>
         </p:txBody>
@@ -4666,7 +4666,7 @@
           <a:p>
             <a:r>
               <a:rPr lang="en-US" sz="1400" b="0" dirty="0"/>
-              <a:t>Slide bản quyền - để trên màn hình khi học viên ra về.</a:t>
+              <a:t>Slide bản quyền. Để trên màn hình khi học viên ra về.</a:t>
             </a:r>
           </a:p>
         </p:txBody>
@@ -4759,19 +4759,19 @@
           <a:p>
             <a:r>
               <a:rPr lang="en-US" sz="1400" b="0" dirty="0"/>
-              <a:t>Chỉ vào thanh nền: mọi thay đổi sau khi phê duyệt phải là sửa đổi chính thức, được duyệt trước khi áp dụng - không được lặng lẽ thay đổi.</a:t>
+              <a:t>Chỉ vào thanh nền: mọi thay đổi sau khi phê duyệt phải là sửa đổi chính thức, được duyệt trước khi áp dụng, không được lặng lẽ thay đổi.</a:t>
             </a:r>
           </a:p>
           <a:p>
             <a:r>
               <a:rPr lang="en-US" sz="1400" b="0" dirty="0"/>
-              <a:t>Ví dụ xuyên suốt: Bài 1 cho biết đề cương và kế hoạch phân tích thống kê đã đăng ký trên ClinicalTrials.gov (NCT04947904) trước bệnh nhân đầu tiên - nhờ vậy người đọc kiểm tra được tác giả có làm đúng kế hoạch hay không.</a:t>
+              <a:t>Ví dụ xuyên suốt: Bài 1 cho biết đề cương và kế hoạch phân tích thống kê đã đăng ký trên ClinicalTrials.gov (NCT04947904) trước bệnh nhân đầu tiên. Nhờ vậy người đọc kiểm tra được tác giả có làm đúng kế hoạch hay không.</a:t>
             </a:r>
           </a:p>
           <a:p>
             <a:r>
               <a:rPr lang="en-US" sz="1400" b="0" dirty="0"/>
-              <a:t>Hỏi: cột nào trong đề cương của nhóm bạn đang yếu nhất? Thường là NHƯ THẾ NÀO - cỡ mẫu hoặc kế hoạch phân tích. Trấn an: mẫu đề cương trong thư mục Templates/ theo đúng thứ tự này.</a:t>
+              <a:t>Hỏi: cột nào trong đề cương của nhóm bạn đang yếu nhất? Thường là NHƯ THẾ NÀO (cỡ mẫu hoặc kế hoạch phân tích). Trấn an: mẫu đề cương trong thư mục Templates/ theo đúng thứ tự này.</a:t>
             </a:r>
           </a:p>
         </p:txBody>
@@ -4852,7 +4852,7 @@
           <a:p>
             <a:r>
               <a:rPr lang="en-US" sz="1400" b="0" dirty="0"/>
-              <a:t>Ý chính: Tuyên bố Helsinki (Hội Y khoa Thế giới, bản sửa đổi mới nhất tháng 10/2024) là nền tảng đạo đức của nghiên cứu trên người. Cốt lõi: quyền và lợi ích của từng người tham gia đặt trên mục tiêu tạo ra tri thức; đề cương được một hội đồng đạo đức độc lập phê duyệt trước khi bắt đầu; chấp thuận tự nguyện, có hiểu biết; rủi ro tối thiểu và có lý do chính đáng; bảo vệ quyền riêng tư; mọi nghiên cứu đăng ký trước người tham gia đầu tiên và công bố TẤT CẢ kết quả - kể cả âm tính hoặc chưa kết luận được.</a:t>
+              <a:t>Ý chính: Tuyên bố Helsinki (Hội Y khoa Thế giới, bản sửa đổi mới nhất tháng 10/2024) là nền tảng đạo đức của nghiên cứu trên người. Cốt lõi: quyền và lợi ích của từng người tham gia đặt trên mục tiêu tạo ra tri thức; đề cương được một hội đồng đạo đức độc lập phê duyệt trước khi bắt đầu; chấp thuận tự nguyện, có hiểu biết; rủi ro tối thiểu và có lý do chính đáng; bảo vệ quyền riêng tư; mọi nghiên cứu đăng ký trước người tham gia đầu tiên và công bố TẤT CẢ kết quả, kể cả âm tính hoặc chưa kết luận được.</a:t>
             </a:r>
           </a:p>
           <a:p>
@@ -4864,13 +4864,13 @@
           <a:p>
             <a:r>
               <a:rPr lang="en-US" sz="1400" b="0" dirty="0"/>
-              <a:t>ICH E6(R3) - Thực hành lâm sàng tốt (ICH thông qua tháng 1/2025) là chuẩn chất lượng quốc tế cho thử nghiệm lâm sàng: nhân lực đủ năng lực, chất lượng được thiết kế từ đầu, giám sát tương xứng với rủi ro, dữ liệu tin cậy và truy xuất được, vai trò rõ ràng. Tinh thần này áp dụng cho mọi nghiên cứu.</a:t>
+              <a:t>ICH E6(R3) Thực hành lâm sàng tốt (ICH thông qua tháng 1/2025) là chuẩn chất lượng quốc tế cho thử nghiệm lâm sàng: nhân lực đủ năng lực, chất lượng được thiết kế từ đầu, giám sát tương xứng với rủi ro, dữ liệu tin cậy và truy xuất được, vai trò rõ ràng. Tinh thần này áp dụng cho mọi nghiên cứu.</a:t>
             </a:r>
           </a:p>
           <a:p>
             <a:r>
               <a:rPr lang="en-US" sz="1400" b="0" dirty="0"/>
-              <a:t>Quan niệm sai: 'GCP chỉ dành cho công ty dược'. Bài 1 - một thử nghiệm ICU học thuật - ghi rõ phân tích theo ICH-GCP.</a:t>
+              <a:t>Quan niệm sai: 'GCP chỉ dành cho công ty dược'. Bài 1, một thử nghiệm ICU học thuật, ghi rõ phân tích theo ICH-GCP.</a:t>
             </a:r>
           </a:p>
           <a:p>
@@ -4969,13 +4969,13 @@
           <a:p>
             <a:r>
               <a:rPr lang="en-US" sz="1400" b="0" dirty="0"/>
-              <a:t>Các hình thức xét duyệt: một số nghiên cứu nguy cơ thấp được miễn hoặc xét duyệt rút gọn; thử nghiệm và nghiên cứu có nguy cơ cao hơn mức tối thiểu được xét tại hội đồng toàn thể. Hội đồng quyết định hình thức - không phải nghiên cứu viên.</a:t>
+              <a:t>Các hình thức xét duyệt: một số nghiên cứu nguy cơ thấp được miễn hoặc xét duyệt rút gọn; thử nghiệm và nghiên cứu có nguy cơ cao hơn mức tối thiểu được xét tại hội đồng toàn thể. Hội đồng quyết định hình thức, không phải nghiên cứu viên.</a:t>
             </a:r>
           </a:p>
           <a:p>
             <a:r>
               <a:rPr lang="en-US" sz="1400" b="0" dirty="0"/>
-              <a:t>Có câu hỏi và yêu cầu chỉnh sửa là bình thường - dự kiến 1-3 tháng cho cả hành trình.</a:t>
+              <a:t>Có câu hỏi và yêu cầu chỉnh sửa là bình thường. Dự kiến 1-3 tháng cho cả hành trình.</a:t>
             </a:r>
           </a:p>
           <a:p>
@@ -5080,7 +5080,7 @@
           <a:p>
             <a:r>
               <a:rPr lang="en-US" sz="1400" b="0" dirty="0"/>
-              <a:t>Thử nghiệm lâm sàng: bắt buộc đăng ký. Các tạp chí theo ICMJE không đăng thử nghiệm không được đăng ký trước người tham gia đầu tiên, và nhiều quốc gia quy định bằng luật. Dùng ClinicalTrials.gov hoặc một cơ sở đăng ký chính thức khác của WHO; cổng WHO ICTRP tra cứu tất cả cùng lúc - đó là cổng tìm kiếm, không phải nơi đăng ký.</a:t>
+              <a:t>Thử nghiệm lâm sàng: bắt buộc đăng ký. Các tạp chí theo ICMJE không đăng thử nghiệm không được đăng ký trước người tham gia đầu tiên, và nhiều quốc gia quy định bằng luật. Dùng ClinicalTrials.gov hoặc một cơ sở đăng ký chính thức khác của WHO. Cổng WHO ICTRP tra cứu tất cả cùng lúc; đó là cổng tìm kiếm, không phải nơi đăng ký.</a:t>
             </a:r>
           </a:p>
           <a:p>
@@ -5092,13 +5092,13 @@
           <a:p>
             <a:r>
               <a:rPr lang="en-US" sz="1400" b="0" dirty="0"/>
-              <a:t>Nghiên cứu quan sát: khuyến khích chứ chưa bắt buộc - kiểm tra yêu cầu của tạp chí và quy định địa phương. Tuyên bố Helsinki yêu cầu mọi nghiên cứu trên người được đăng ký.</a:t>
+              <a:t>Nghiên cứu quan sát: khuyến khích chứ chưa bắt buộc. Kiểm tra yêu cầu của tạp chí và quy định địa phương. Tuyên bố Helsinki yêu cầu mọi nghiên cứu trên người được đăng ký.</a:t>
             </a:r>
           </a:p>
           <a:p>
             <a:r>
               <a:rPr lang="en-US" sz="1400" b="0" dirty="0"/>
-              <a:t>Ví dụ xuyên suốt: Bài 1 đăng ký NCT04947904 ngày 1/7/2021; bệnh nhân đầu tiên vào tháng 9/2021 - đăng ký tiến cứu. Số đăng ký có ngay trong phần tóm tắt.</a:t>
+              <a:t>Ví dụ xuyên suốt: Bài 1 đăng ký NCT04947904 ngày 1/7/2021, bệnh nhân đầu tiên vào tháng 9/2021, tức là đăng ký tiến cứu. Số đăng ký có ngay trong phần tóm tắt.</a:t>
             </a:r>
           </a:p>
           <a:p>
@@ -5191,7 +5191,7 @@
           <a:p>
             <a:r>
               <a:rPr lang="en-US" sz="1400" b="0" dirty="0"/>
-              <a:t>Tình huống 4 mở ra một thảo luận hữu ích: audit so sánh thực hành với một chuẩn và thường được phê duyệt qua phòng quản lý chất lượng, không đăng ký; nhưng nếu định công bố như một nghiên cứu, hãy hỏi hội đồng đạo đức trước (Buổi 1: nghiên cứu, audit và cải tiến chất lượng).</a:t>
+              <a:t>Tình huống 4 mở ra một thảo luận hữu ích: audit so sánh thực hành với một chuẩn và thường được phê duyệt qua phòng quản lý chất lượng, không đăng ký. Nếu định công bố như một nghiên cứu, hãy hỏi hội đồng đạo đức trước (Buổi 1: nghiên cứu, audit và cải tiến chất lượng).</a:t>
             </a:r>
           </a:p>
         </p:txBody>
@@ -9582,7 +9582,7 @@
                 <a:latin typeface="Segoe UI"/>
                 <a:cs typeface="Segoe UI"/>
               </a:rPr>
-              <a:t>Người bệnh, rồi người đại diện hợp pháp, rồi chấp thuận trì hoãn - chỉ khi được duyệt.</a:t>
+              <a:t>Người bệnh, rồi người đại diện hợp pháp, rồi chấp thuận trì hoãn (chỉ khi được duyệt).</a:t>
             </a:r>
           </a:p>
         </p:txBody>
@@ -10784,7 +10784,7 @@
                 <a:latin typeface="Segoe UI"/>
                 <a:cs typeface="Segoe UI"/>
               </a:rPr>
-              <a:t>FLUID-ICU là dữ liệu mô phỏng - nhưng nếu là thật, bài báo sẽ viết như sau.</a:t>
+              <a:t>FLUID-ICU là dữ liệu mô phỏng. Nếu là thật, bài báo sẽ viết như sau.</a:t>
             </a:r>
           </a:p>
         </p:txBody>
@@ -12074,7 +12074,7 @@
                 <a:latin typeface="Segoe UI"/>
                 <a:cs typeface="Segoe UI"/>
               </a:rPr>
-              <a:t>Bịa đặt, xuyên tạc, đạo văn (FFP)</a:t>
+              <a:t>Sai phạm nghiên cứu: bịa đặt, xuyên tạc, đạo văn</a:t>
             </a:r>
           </a:p>
         </p:txBody>
@@ -12181,7 +12181,7 @@
                 <a:latin typeface="Segoe UI"/>
                 <a:cs typeface="Segoe UI"/>
               </a:rPr>
-              <a:t>Dữ liệu thiếu được báo cáo là thiếu - không bao giờ bịa ra, không lặng lẽ loại bỏ.</a:t>
+              <a:t>Dữ liệu thiếu được báo cáo là thiếu: không bao giờ bịa ra, không lặng lẽ loại bỏ.</a:t>
             </a:r>
           </a:p>
         </p:txBody>
@@ -13148,7 +13148,7 @@
                 <a:latin typeface="Segoe UI"/>
                 <a:cs typeface="Segoe UI"/>
               </a:rPr>
-              <a:t>Đủ cả bốn tiêu chí, cho mọi tác giả - thống nhất danh sách ngay từ đầu.</a:t>
+              <a:t>Đủ cả bốn tiêu chí, cho mọi tác giả. Thống nhất danh sách ngay từ đầu.</a:t>
             </a:r>
           </a:p>
         </p:txBody>
@@ -13655,7 +13655,7 @@
                 <a:latin typeface="Segoe UI"/>
                 <a:cs typeface="Segoe UI"/>
               </a:rPr>
-              <a:t>2. Không - KTC chứa giá trị 1</a:t>
+              <a:t>2. Không: KTC chứa giá trị 1</a:t>
             </a:r>
           </a:p>
           <a:p>
@@ -14328,7 +14328,7 @@
                 <a:latin typeface="Segoe UI"/>
                 <a:cs typeface="Segoe UI"/>
               </a:rPr>
-              <a:t>Lên kế hoạch chia sẻ dữ liệu từ đề cương - phiếu chấp thuận phải cho phép.</a:t>
+              <a:t>Lên kế hoạch chia sẻ dữ liệu từ đề cương: phiếu chấp thuận phải cho phép.</a:t>
             </a:r>
           </a:p>
         </p:txBody>
@@ -16454,7 +16454,7 @@
                 <a:latin typeface="Segoe UI"/>
                 <a:cs typeface="Segoe UI"/>
               </a:rPr>
-              <a:t>Viết những gì đã làm và đã thấy - không hơn</a:t>
+              <a:t>Viết những gì đã làm và đã thấy, không hơn</a:t>
             </a:r>
           </a:p>
         </p:txBody>
@@ -17872,7 +17872,7 @@
                 <a:latin typeface="Segoe UI"/>
                 <a:cs typeface="Segoe UI"/>
               </a:rPr>
-              <a:t>Mỗi mục STROBE một câu - và nói rõ dữ liệu là mô phỏng.</a:t>
+              <a:t>Mỗi mục STROBE một câu, và nói rõ dữ liệu là mô phỏng.</a:t>
             </a:r>
           </a:p>
         </p:txBody>
@@ -18422,7 +18422,7 @@
                 <a:latin typeface="Segoe UI"/>
                 <a:cs typeface="Segoe UI"/>
               </a:rPr>
-              <a:t>Nêu phương pháp cho mọi so sánh được báo cáo - chọn trước khi xem dữ liệu.</a:t>
+              <a:t>Nêu phương pháp cho mọi so sánh được báo cáo, chọn trước khi xem dữ liệu.</a:t>
             </a:r>
           </a:p>
         </p:txBody>
@@ -18972,7 +18972,7 @@
                 <a:latin typeface="Segoe UI"/>
                 <a:cs typeface="Segoe UI"/>
               </a:rPr>
-              <a:t>Đối tượng, Bảng 1, số liệu kết cục, ước lượng thô và hiệu chỉnh - theo thứ tự đó.</a:t>
+              <a:t>Đối tượng, Bảng 1, số liệu kết cục, ước lượng thô và hiệu chỉnh, theo thứ tự đó.</a:t>
             </a:r>
           </a:p>
         </p:txBody>
@@ -20279,7 +20279,7 @@
                 <a:latin typeface="Segoe UI"/>
                 <a:cs typeface="Segoe UI"/>
               </a:rPr>
-              <a:t>Viết với bảng kiểm STROBE mở bên cạnh - đánh dấu từng mục khi viết.</a:t>
+              <a:t>Viết với bảng kiểm STROBE mở bên cạnh và đánh dấu từng mục khi viết.</a:t>
             </a:r>
           </a:p>
         </p:txBody>
@@ -21108,7 +21108,7 @@
                 <a:latin typeface="Segoe UI"/>
                 <a:cs typeface="Segoe UI"/>
               </a:rPr>
-              <a:t>Khoảng 600 từ, Bảng 1 và một hình hoặc bảng - từ gói kết quả của nhóm</a:t>
+              <a:t>Khoảng 600 từ, Bảng 1 và một hình hoặc bảng, từ gói kết quả của nhóm</a:t>
             </a:r>
           </a:p>
         </p:txBody>
@@ -21383,7 +21383,7 @@
                 <a:latin typeface="Segoe UI"/>
                 <a:cs typeface="Segoe UI"/>
               </a:rPr>
-              <a:t>Mọi con số trong bài phải lấy từ gói kết quả - không ai phải tự tính.</a:t>
+              <a:t>Mọi con số trong bài phải lấy từ gói kết quả: không ai phải tự tính.</a:t>
             </a:r>
           </a:p>
         </p:txBody>
@@ -21708,7 +21708,7 @@
                 <a:latin typeface="Segoe UI"/>
                 <a:cs typeface="Segoe UI"/>
               </a:rPr>
-              <a:t>5-25: Phương pháp - thiết kế, bối cảnh, đối tượng, biến số, thống kê</a:t>
+              <a:t>5-25: Phương pháp (thiết kế, bối cảnh, đối tượng, biến số, thống kê)</a:t>
             </a:r>
           </a:p>
           <a:p>
@@ -21739,7 +21739,7 @@
                 <a:latin typeface="Segoe UI"/>
                 <a:cs typeface="Segoe UI"/>
               </a:rPr>
-              <a:t>25-40: Kết quả - đối tượng, Bảng 1, kết quả chính (thô + hiệu chỉnh)</a:t>
+              <a:t>25-40: Kết quả (đối tượng, Bảng 1, kết quả chính thô + hiệu chỉnh)</a:t>
             </a:r>
           </a:p>
           <a:p>
@@ -22649,7 +22649,7 @@
                           </a:solidFill>
                           <a:latin typeface="Segoe UI"/>
                         </a:rPr>
-                        <a:t>Bịa đặt, xuyên tạc, đạo văn - sai phạm nghiên cứu</a:t>
+                        <a:t>Sai phạm nghiên cứu: bịa đặt, xuyên tạc, đạo văn</a:t>
                       </a:r>
                     </a:p>
                   </a:txBody>
@@ -22745,7 +22745,7 @@
                           </a:solidFill>
                           <a:latin typeface="Segoe UI"/>
                         </a:rPr>
-                        <a:t>Điều có thể bị xem là ảnh hưởng đến nhận định - hãy khai báo</a:t>
+                        <a:t>Điều có thể bị xem là ảnh hưởng đến nhận định. Hãy khai báo</a:t>
                       </a:r>
                     </a:p>
                   </a:txBody>
@@ -23229,7 +23229,7 @@
                 <a:latin typeface="Segoe UI"/>
                 <a:cs typeface="Segoe UI"/>
               </a:rPr>
-              <a:t>Thứ Bảy tuần sau: Đặt vấn đề, Bàn luận, Tóm tắt, Tiêu đề - rồi trình bày</a:t>
+              <a:t>Thứ Bảy tuần sau: Đặt vấn đề, Bàn luận, Tóm tắt, Tiêu đề, rồi trình bày</a:t>
             </a:r>
           </a:p>
         </p:txBody>
@@ -23296,7 +23296,7 @@
                 <a:latin typeface="Segoe UI"/>
                 <a:cs typeface="Segoe UI"/>
               </a:rPr>
-              <a:t>Chưa phê duyệt thì không có dữ liệu - kể cả 'vài ca'</a:t>
+              <a:t>Chưa phê duyệt thì không có dữ liệu, kể cả 'vài ca'</a:t>
             </a:r>
           </a:p>
           <a:p>
@@ -23635,7 +23635,7 @@
                 <a:latin typeface="Segoe UI"/>
                 <a:cs typeface="Segoe UI"/>
               </a:rPr>
-              <a:t>Slide bổ sung - Buổi 7</a:t>
+              <a:t>Slide bổ sung: Buổi 7</a:t>
             </a:r>
           </a:p>
           <a:p>
@@ -24297,7 +24297,7 @@
                 <a:latin typeface="Segoe UI"/>
                 <a:cs typeface="Segoe UI"/>
               </a:rPr>
-              <a:t>Writing - original draft</a:t>
+              <a:t>Writing – original draft</a:t>
             </a:r>
           </a:p>
           <a:p>
@@ -24318,7 +24318,7 @@
                 <a:latin typeface="Segoe UI"/>
                 <a:cs typeface="Segoe UI"/>
               </a:rPr>
-              <a:t>Writing - review &amp; editing</a:t>
+              <a:t>Writing – review &amp; editing</a:t>
             </a:r>
           </a:p>
           <a:p>
@@ -24431,7 +24431,7 @@
                 <a:latin typeface="Segoe UI"/>
                 <a:cs typeface="Segoe UI"/>
               </a:rPr>
-              <a:t>NB: Writing - original draft</a:t>
+              <a:t>NB: Writing – original draft</a:t>
             </a:r>
           </a:p>
           <a:p>
@@ -25649,14 +25649,14 @@
               <a:buNone/>
             </a:pPr>
             <a:r>
-              <a:rPr lang="en-US" sz="2800" b="1" dirty="0">
+              <a:rPr lang="en-US" sz="2400" b="1" dirty="0">
                 <a:solidFill>
                   <a:srgbClr val="0D7377"/>
                 </a:solidFill>
                 <a:latin typeface="Segoe UI"/>
                 <a:cs typeface="Segoe UI"/>
               </a:rPr>
-              <a:t>Hành trình qua hội đồng đạo đức</a:t>
+              <a:t>Hành trình qua hội đồng đạo đức: phê duyệt trước dữ liệu</a:t>
             </a:r>
           </a:p>
         </p:txBody>
@@ -25763,7 +25763,7 @@
                 <a:latin typeface="Segoe UI"/>
                 <a:cs typeface="Segoe UI"/>
               </a:rPr>
-              <a:t>Chưa có quyết định phê duyệt thì không thu thập dữ liệu - kể cả 'vài ca thôi'.</a:t>
+              <a:t>Chưa có quyết định phê duyệt thì không thu thập dữ liệu, kể cả 'vài ca thôi'.</a:t>
             </a:r>
           </a:p>
         </p:txBody>
@@ -26523,7 +26523,7 @@
                 <a:latin typeface="Segoe UI"/>
                 <a:cs typeface="Segoe UI"/>
               </a:rPr>
-              <a:t>1. Bắt buộc - cơ sở đăng ký thử nghiệm, trước bệnh nhân 1</a:t>
+              <a:t>1. Bắt buộc: cơ sở đăng ký thử nghiệm, trước bệnh nhân 1</a:t>
             </a:r>
           </a:p>
           <a:p>
@@ -26545,7 +26545,7 @@
                 <a:latin typeface="Segoe UI"/>
                 <a:cs typeface="Segoe UI"/>
               </a:rPr>
-              <a:t>2. Nên - PROSPERO</a:t>
+              <a:t>2. Nên: PROSPERO</a:t>
             </a:r>
           </a:p>
           <a:p>

--- a/vi/files/slides/Session_7_VN.pptx
+++ b/vi/files/slides/Session_7_VN.pptx
@@ -4480,7 +4480,7 @@
           <a:p>
             <a:r>
               <a:rPr lang="en-US" sz="1400" b="0" dirty="0"/>
-              <a:t>Mẹo cho bài thẩm định sau giải lao: đồng hồ cát chỉ chỗ cần tìm. PICO ở đoạn cuối Đặt vấn đề, thiết kế và kết cục ở Phương pháp, tác dụng chính ở đoạn đầu Kết quả, hạn chế ở gần cuối Bàn luận.</a:t>
+              <a:t>Mẹo cho bài thẩm định ở Buổi 8: đồng hồ cát chỉ chỗ cần tìm. PICO ở đoạn cuối Đặt vấn đề, thiết kế và kết cục ở Phương pháp, tác dụng chính ở đoạn đầu Kết quả, hạn chế ở gần cuối Bàn luận.</a:t>
             </a:r>
           </a:p>
           <a:p>
@@ -8269,8 +8269,8 @@
                 <a:solidFill>
                   <a:srgbClr val="0D7377"/>
                 </a:solidFill>
-                <a:latin typeface="Segoe UI"/>
-                <a:cs typeface="Segoe UI"/>
+                <a:latin typeface="Arial"/>
+                <a:cs typeface="Arial"/>
               </a:rPr>
               <a:t>Buổi 7 · Bảo vệ &amp; viết: đạo đức, liêm chính, Phương pháp và Kết quả</a:t>
             </a:r>
@@ -8337,8 +8337,8 @@
                 <a:solidFill>
                   <a:srgbClr val="0070C0"/>
                 </a:solidFill>
-                <a:latin typeface="Segoe UI"/>
-                <a:cs typeface="Segoe UI"/>
+                <a:latin typeface="Arial"/>
+                <a:cs typeface="Arial"/>
               </a:rPr>
               <a:t>Tuần 7 · Thứ Bảy</a:t>
             </a:r>
@@ -8362,8 +8362,8 @@
                 <a:solidFill>
                   <a:srgbClr val="000000"/>
                 </a:solidFill>
-                <a:latin typeface="Segoe UI"/>
-                <a:cs typeface="Segoe UI"/>
+                <a:latin typeface="Arial"/>
+                <a:cs typeface="Arial"/>
               </a:rPr>
               <a:t>Câu hỏi ôn tập: Buổi 6</a:t>
             </a:r>
@@ -8381,8 +8381,8 @@
                 <a:solidFill>
                   <a:srgbClr val="000000"/>
                 </a:solidFill>
-                <a:latin typeface="Segoe UI"/>
-                <a:cs typeface="Segoe UI"/>
+                <a:latin typeface="Arial"/>
+                <a:cs typeface="Arial"/>
               </a:rPr>
               <a:t>7.1  Đề cương, đạo đức, chấp thuận, đăng ký, tính khả thi</a:t>
             </a:r>
@@ -8400,8 +8400,8 @@
                 <a:solidFill>
                   <a:srgbClr val="000000"/>
                 </a:solidFill>
-                <a:latin typeface="Segoe UI"/>
-                <a:cs typeface="Segoe UI"/>
+                <a:latin typeface="Arial"/>
+                <a:cs typeface="Arial"/>
               </a:rPr>
               <a:t>7.2  Liêm chính: quyền tác giả, xung đột lợi ích, chia sẻ dữ liệu, AI</a:t>
             </a:r>
@@ -8419,8 +8419,8 @@
                 <a:solidFill>
                   <a:srgbClr val="000000"/>
                 </a:solidFill>
-                <a:latin typeface="Segoe UI"/>
-                <a:cs typeface="Segoe UI"/>
+                <a:latin typeface="Arial"/>
+                <a:cs typeface="Arial"/>
               </a:rPr>
               <a:t>Xây dựng đề cương 7: đạo đức + kế hoạch công bố</a:t>
             </a:r>
@@ -8438,8 +8438,8 @@
                 <a:solidFill>
                   <a:srgbClr val="000000"/>
                 </a:solidFill>
-                <a:latin typeface="Segoe UI"/>
-                <a:cs typeface="Segoe UI"/>
+                <a:latin typeface="Arial"/>
+                <a:cs typeface="Arial"/>
               </a:rPr>
               <a:t>7.3  Viết bài báo (I): Phương pháp, Kết quả, bảng, STROBE</a:t>
             </a:r>
@@ -8457,8 +8457,8 @@
                 <a:solidFill>
                   <a:srgbClr val="000000"/>
                 </a:solidFill>
-                <a:latin typeface="Segoe UI"/>
-                <a:cs typeface="Segoe UI"/>
+                <a:latin typeface="Arial"/>
+                <a:cs typeface="Arial"/>
               </a:rPr>
               <a:t>Thực hành bản thảo 1: soạn Phương pháp + Kết quả</a:t>
             </a:r>
@@ -8495,7 +8495,7 @@
                     <a:lumMod val="50000"/>
                   </a:schemeClr>
                 </a:solidFill>
-                <a:latin typeface="Verdana"/>
+                <a:latin typeface="Arial"/>
               </a:rPr>
               <a:t>Neudata | #ClearDataClearImpact</a:t>
             </a:r>
@@ -8625,8 +8625,8 @@
                 <a:solidFill>
                   <a:srgbClr val="0D7377"/>
                 </a:solidFill>
-                <a:latin typeface="Segoe UI"/>
-                <a:cs typeface="Segoe UI"/>
+                <a:latin typeface="Arial"/>
+                <a:cs typeface="Arial"/>
               </a:rPr>
               <a:t>Chấp thuận tham gia: bốn yếu tố cốt lõi</a:t>
             </a:r>
@@ -8692,8 +8692,8 @@
                 <a:solidFill>
                   <a:srgbClr val="595959"/>
                 </a:solidFill>
-                <a:latin typeface="Segoe UI"/>
-                <a:cs typeface="Segoe UI"/>
+                <a:latin typeface="Arial"/>
+                <a:cs typeface="Arial"/>
               </a:rPr>
               <a:t>Chấp thuận là một cuộc trao đổi, không chỉ là một chữ ký.</a:t>
             </a:r>
@@ -8735,8 +8735,8 @@
                 <a:solidFill>
                   <a:srgbClr val="FFFFFF"/>
                 </a:solidFill>
-                <a:latin typeface="Segoe UI"/>
-                <a:cs typeface="Segoe UI"/>
+                <a:latin typeface="Arial"/>
+                <a:cs typeface="Arial"/>
               </a:rPr>
               <a:t>Được thông tin</a:t>
             </a:r>
@@ -8784,8 +8784,8 @@
                 <a:solidFill>
                   <a:srgbClr val="000000"/>
                 </a:solidFill>
-                <a:latin typeface="Segoe UI"/>
-                <a:cs typeface="Segoe UI"/>
+                <a:latin typeface="Arial"/>
+                <a:cs typeface="Arial"/>
               </a:rPr>
               <a:t>Mục đích, những gì sẽ diễn ra</a:t>
             </a:r>
@@ -8805,8 +8805,8 @@
                 <a:solidFill>
                   <a:srgbClr val="000000"/>
                 </a:solidFill>
-                <a:latin typeface="Segoe UI"/>
-                <a:cs typeface="Segoe UI"/>
+                <a:latin typeface="Arial"/>
+                <a:cs typeface="Arial"/>
               </a:rPr>
               <a:t>Rủi ro, lợi ích, lựa chọn khác</a:t>
             </a:r>
@@ -8826,8 +8826,8 @@
                 <a:solidFill>
                   <a:srgbClr val="000000"/>
                 </a:solidFill>
-                <a:latin typeface="Segoe UI"/>
-                <a:cs typeface="Segoe UI"/>
+                <a:latin typeface="Arial"/>
+                <a:cs typeface="Arial"/>
               </a:rPr>
               <a:t>Dữ liệu được bảo vệ ra sao</a:t>
             </a:r>
@@ -8847,8 +8847,8 @@
                 <a:solidFill>
                   <a:srgbClr val="000000"/>
                 </a:solidFill>
-                <a:latin typeface="Segoe UI"/>
-                <a:cs typeface="Segoe UI"/>
+                <a:latin typeface="Arial"/>
+                <a:cs typeface="Arial"/>
               </a:rPr>
               <a:t>Liên hệ với ai</a:t>
             </a:r>
@@ -8890,8 +8890,8 @@
                 <a:solidFill>
                   <a:srgbClr val="FFFFFF"/>
                 </a:solidFill>
-                <a:latin typeface="Segoe UI"/>
-                <a:cs typeface="Segoe UI"/>
+                <a:latin typeface="Arial"/>
+                <a:cs typeface="Arial"/>
               </a:rPr>
               <a:t>Hiểu rõ</a:t>
             </a:r>
@@ -8939,8 +8939,8 @@
                 <a:solidFill>
                   <a:srgbClr val="000000"/>
                 </a:solidFill>
-                <a:latin typeface="Segoe UI"/>
-                <a:cs typeface="Segoe UI"/>
+                <a:latin typeface="Arial"/>
+                <a:cs typeface="Arial"/>
               </a:rPr>
               <a:t>Ngôn ngữ đơn giản, quen thuộc</a:t>
             </a:r>
@@ -8960,8 +8960,8 @@
                 <a:solidFill>
                   <a:srgbClr val="000000"/>
                 </a:solidFill>
-                <a:latin typeface="Segoe UI"/>
-                <a:cs typeface="Segoe UI"/>
+                <a:latin typeface="Arial"/>
+                <a:cs typeface="Arial"/>
               </a:rPr>
               <a:t>Có thời gian để hỏi</a:t>
             </a:r>
@@ -8981,8 +8981,8 @@
                 <a:solidFill>
                   <a:srgbClr val="000000"/>
                 </a:solidFill>
-                <a:latin typeface="Segoe UI"/>
-                <a:cs typeface="Segoe UI"/>
+                <a:latin typeface="Arial"/>
+                <a:cs typeface="Arial"/>
               </a:rPr>
               <a:t>Nhắc lại: 'hãy nói theo cách của bác'</a:t>
             </a:r>
@@ -9024,8 +9024,8 @@
                 <a:solidFill>
                   <a:srgbClr val="FFFFFF"/>
                 </a:solidFill>
-                <a:latin typeface="Segoe UI"/>
-                <a:cs typeface="Segoe UI"/>
+                <a:latin typeface="Arial"/>
+                <a:cs typeface="Arial"/>
               </a:rPr>
               <a:t>Tự nguyện</a:t>
             </a:r>
@@ -9073,8 +9073,8 @@
                 <a:solidFill>
                   <a:srgbClr val="000000"/>
                 </a:solidFill>
-                <a:latin typeface="Segoe UI"/>
-                <a:cs typeface="Segoe UI"/>
+                <a:latin typeface="Arial"/>
+                <a:cs typeface="Arial"/>
               </a:rPr>
               <a:t>Không ép buộc</a:t>
             </a:r>
@@ -9094,8 +9094,8 @@
                 <a:solidFill>
                   <a:srgbClr val="000000"/>
                 </a:solidFill>
-                <a:latin typeface="Segoe UI"/>
-                <a:cs typeface="Segoe UI"/>
+                <a:latin typeface="Arial"/>
+                <a:cs typeface="Arial"/>
               </a:rPr>
               <a:t>Được từ chối hoặc rút lui</a:t>
             </a:r>
@@ -9115,8 +9115,8 @@
                 <a:solidFill>
                   <a:srgbClr val="000000"/>
                 </a:solidFill>
-                <a:latin typeface="Segoe UI"/>
-                <a:cs typeface="Segoe UI"/>
+                <a:latin typeface="Arial"/>
+                <a:cs typeface="Arial"/>
               </a:rPr>
               <a:t>Việc điều trị KHÔNG bị ảnh hưởng</a:t>
             </a:r>
@@ -9158,8 +9158,8 @@
                 <a:solidFill>
                   <a:srgbClr val="FFFFFF"/>
                 </a:solidFill>
-                <a:latin typeface="Segoe UI"/>
-                <a:cs typeface="Segoe UI"/>
+                <a:latin typeface="Arial"/>
+                <a:cs typeface="Arial"/>
               </a:rPr>
               <a:t>Có văn bản</a:t>
             </a:r>
@@ -9207,8 +9207,8 @@
                 <a:solidFill>
                   <a:srgbClr val="000000"/>
                 </a:solidFill>
-                <a:latin typeface="Segoe UI"/>
-                <a:cs typeface="Segoe UI"/>
+                <a:latin typeface="Arial"/>
+                <a:cs typeface="Arial"/>
               </a:rPr>
               <a:t>Phiếu ký tên, ghi ngày</a:t>
             </a:r>
@@ -9228,8 +9228,8 @@
                 <a:solidFill>
                   <a:srgbClr val="000000"/>
                 </a:solidFill>
-                <a:latin typeface="Segoe UI"/>
-                <a:cs typeface="Segoe UI"/>
+                <a:latin typeface="Arial"/>
+                <a:cs typeface="Arial"/>
               </a:rPr>
               <a:t>Một bản cho người tham gia</a:t>
             </a:r>
@@ -9249,8 +9249,8 @@
                 <a:solidFill>
                   <a:srgbClr val="000000"/>
                 </a:solidFill>
-                <a:latin typeface="Segoe UI"/>
-                <a:cs typeface="Segoe UI"/>
+                <a:latin typeface="Arial"/>
+                <a:cs typeface="Arial"/>
               </a:rPr>
               <a:t>Xin lại nếu nghiên cứu thay đổi</a:t>
             </a:r>
@@ -9294,8 +9294,8 @@
                 <a:solidFill>
                   <a:srgbClr val="FFFFFF"/>
                 </a:solidFill>
-                <a:latin typeface="Segoe UI"/>
-                <a:cs typeface="Segoe UI"/>
+                <a:latin typeface="Arial"/>
+                <a:cs typeface="Arial"/>
               </a:rPr>
               <a:t>THÔNG ĐIỆP CHÍNH   </a:t>
             </a:r>
@@ -9304,8 +9304,8 @@
                 <a:solidFill>
                   <a:srgbClr val="FFFFFF"/>
                 </a:solidFill>
-                <a:latin typeface="Segoe UI"/>
-                <a:cs typeface="Segoe UI"/>
+                <a:latin typeface="Arial"/>
+                <a:cs typeface="Arial"/>
               </a:rPr>
               <a:t>Nếu người bệnh không giải thích lại được nghiên cứu, chấp thuận chưa có hiểu biết.</a:t>
             </a:r>
@@ -9342,7 +9342,7 @@
                     <a:lumMod val="50000"/>
                   </a:schemeClr>
                 </a:solidFill>
-                <a:latin typeface="Verdana"/>
+                <a:latin typeface="Arial"/>
               </a:rPr>
               <a:t>Neudata | #ClearDataClearImpact</a:t>
             </a:r>
@@ -9472,8 +9472,8 @@
                 <a:solidFill>
                   <a:srgbClr val="0D7377"/>
                 </a:solidFill>
-                <a:latin typeface="Segoe UI"/>
-                <a:cs typeface="Segoe UI"/>
+                <a:latin typeface="Arial"/>
+                <a:cs typeface="Arial"/>
               </a:rPr>
               <a:t>Chấp thuận trong ICU: khi người bệnh không thể tự quyết định</a:t>
             </a:r>
@@ -9569,8 +9569,8 @@
                 <a:solidFill>
                   <a:srgbClr val="FFFFFF"/>
                 </a:solidFill>
-                <a:latin typeface="Segoe UI"/>
-                <a:cs typeface="Segoe UI"/>
+                <a:latin typeface="Arial"/>
+                <a:cs typeface="Arial"/>
               </a:rPr>
               <a:t>THÔNG ĐIỆP CHÍNH   </a:t>
             </a:r>
@@ -9579,8 +9579,8 @@
                 <a:solidFill>
                   <a:srgbClr val="FFFFFF"/>
                 </a:solidFill>
-                <a:latin typeface="Segoe UI"/>
-                <a:cs typeface="Segoe UI"/>
+                <a:latin typeface="Arial"/>
+                <a:cs typeface="Arial"/>
               </a:rPr>
               <a:t>Người bệnh, rồi người đại diện hợp pháp, rồi chấp thuận trì hoãn (chỉ khi được duyệt).</a:t>
             </a:r>
@@ -9617,7 +9617,7 @@
                     <a:lumMod val="50000"/>
                   </a:schemeClr>
                 </a:solidFill>
-                <a:latin typeface="Verdana"/>
+                <a:latin typeface="Arial"/>
               </a:rPr>
               <a:t>Neudata | #ClearDataClearImpact</a:t>
             </a:r>
@@ -9747,8 +9747,8 @@
                 <a:solidFill>
                   <a:srgbClr val="0D7377"/>
                 </a:solidFill>
-                <a:latin typeface="Segoe UI"/>
-                <a:cs typeface="Segoe UI"/>
+                <a:latin typeface="Arial"/>
+                <a:cs typeface="Arial"/>
               </a:rPr>
               <a:t>Ví dụ mẫu: ai chấp thuận cho ba bệnh nhân ICU này?</a:t>
             </a:r>
@@ -9814,8 +9814,8 @@
                 <a:solidFill>
                   <a:srgbClr val="595959"/>
                 </a:solidFill>
-                <a:latin typeface="Segoe UI"/>
-                <a:cs typeface="Segoe UI"/>
+                <a:latin typeface="Arial"/>
+                <a:cs typeface="Arial"/>
               </a:rPr>
               <a:t>Đưa từng bệnh nhân qua sơ đồ.</a:t>
             </a:r>
@@ -9857,8 +9857,8 @@
                 <a:solidFill>
                   <a:srgbClr val="FFFFFF"/>
                 </a:solidFill>
-                <a:latin typeface="Segoe UI"/>
-                <a:cs typeface="Segoe UI"/>
+                <a:latin typeface="Arial"/>
+                <a:cs typeface="Arial"/>
               </a:rPr>
               <a:t>Ông A, 54 tuổi</a:t>
             </a:r>
@@ -9906,8 +9906,8 @@
                 <a:solidFill>
                   <a:srgbClr val="000000"/>
                 </a:solidFill>
-                <a:latin typeface="Segoe UI"/>
-                <a:cs typeface="Segoe UI"/>
+                <a:latin typeface="Arial"/>
+                <a:cs typeface="Arial"/>
               </a:rPr>
               <a:t>Viêm phổi, tỉnh, định hướng tốt</a:t>
             </a:r>
@@ -9927,8 +9927,8 @@
                 <a:solidFill>
                   <a:srgbClr val="000000"/>
                 </a:solidFill>
-                <a:latin typeface="Segoe UI"/>
-                <a:cs typeface="Segoe UI"/>
+                <a:latin typeface="Arial"/>
+                <a:cs typeface="Arial"/>
               </a:rPr>
               <a:t>Đủ tiêu chuẩn thử nghiệm dịch</a:t>
             </a:r>
@@ -9948,8 +9948,8 @@
                 <a:solidFill>
                   <a:srgbClr val="2E8B57"/>
                 </a:solidFill>
-                <a:latin typeface="Segoe UI"/>
-                <a:cs typeface="Segoe UI"/>
+                <a:latin typeface="Arial"/>
+                <a:cs typeface="Arial"/>
               </a:rPr>
               <a:t>Bệnh nhân tự chấp thuận</a:t>
             </a:r>
@@ -9991,8 +9991,8 @@
                 <a:solidFill>
                   <a:srgbClr val="FFFFFF"/>
                 </a:solidFill>
-                <a:latin typeface="Segoe UI"/>
-                <a:cs typeface="Segoe UI"/>
+                <a:latin typeface="Arial"/>
+                <a:cs typeface="Arial"/>
               </a:rPr>
               <a:t>Bà B, 71 tuổi</a:t>
             </a:r>
@@ -10040,8 +10040,8 @@
                 <a:solidFill>
                   <a:srgbClr val="000000"/>
                 </a:solidFill>
-                <a:latin typeface="Segoe UI"/>
-                <a:cs typeface="Segoe UI"/>
+                <a:latin typeface="Arial"/>
+                <a:cs typeface="Arial"/>
               </a:rPr>
               <a:t>Sốc nhiễm khuẩn, đang an thần</a:t>
             </a:r>
@@ -10061,8 +10061,8 @@
                 <a:solidFill>
                   <a:srgbClr val="000000"/>
                 </a:solidFill>
-                <a:latin typeface="Segoe UI"/>
-                <a:cs typeface="Segoe UI"/>
+                <a:latin typeface="Arial"/>
+                <a:cs typeface="Arial"/>
               </a:rPr>
               <a:t>Con gái ở cạnh giường</a:t>
             </a:r>
@@ -10082,8 +10082,8 @@
                 <a:solidFill>
                   <a:srgbClr val="2E8B57"/>
                 </a:solidFill>
-                <a:latin typeface="Segoe UI"/>
-                <a:cs typeface="Segoe UI"/>
+                <a:latin typeface="Arial"/>
+                <a:cs typeface="Arial"/>
               </a:rPr>
               <a:t>Người đại diện chấp thuận; hỏi lại bà B khi tỉnh</a:t>
             </a:r>
@@ -10125,8 +10125,8 @@
                 <a:solidFill>
                   <a:srgbClr val="FFFFFF"/>
                 </a:solidFill>
-                <a:latin typeface="Segoe UI"/>
-                <a:cs typeface="Segoe UI"/>
+                <a:latin typeface="Arial"/>
+                <a:cs typeface="Arial"/>
               </a:rPr>
               <a:t>Ông C, 38 tuổi</a:t>
             </a:r>
@@ -10174,8 +10174,8 @@
                 <a:solidFill>
                   <a:srgbClr val="000000"/>
                 </a:solidFill>
-                <a:latin typeface="Segoe UI"/>
-                <a:cs typeface="Segoe UI"/>
+                <a:latin typeface="Arial"/>
+                <a:cs typeface="Arial"/>
               </a:rPr>
               <a:t>Sốc lúc 3 giờ sáng, chưa có người nhà</a:t>
             </a:r>
@@ -10195,8 +10195,8 @@
                 <a:solidFill>
                   <a:srgbClr val="000000"/>
                 </a:solidFill>
-                <a:latin typeface="Segoe UI"/>
-                <a:cs typeface="Segoe UI"/>
+                <a:latin typeface="Arial"/>
+                <a:cs typeface="Arial"/>
               </a:rPr>
               <a:t>Điều trị không thể chờ; hội đồng đã duyệt</a:t>
             </a:r>
@@ -10216,8 +10216,8 @@
                 <a:solidFill>
                   <a:srgbClr val="D9822B"/>
                 </a:solidFill>
-                <a:latin typeface="Segoe UI"/>
-                <a:cs typeface="Segoe UI"/>
+                <a:latin typeface="Arial"/>
+                <a:cs typeface="Arial"/>
               </a:rPr>
               <a:t>Chấp thuận trì hoãn: hỏi sớm nhất có thể</a:t>
             </a:r>
@@ -10261,8 +10261,8 @@
                 <a:solidFill>
                   <a:srgbClr val="FFFFFF"/>
                 </a:solidFill>
-                <a:latin typeface="Segoe UI"/>
-                <a:cs typeface="Segoe UI"/>
+                <a:latin typeface="Arial"/>
+                <a:cs typeface="Arial"/>
               </a:rPr>
               <a:t>THÔNG ĐIỆP CHÍNH   </a:t>
             </a:r>
@@ -10271,8 +10271,8 @@
                 <a:solidFill>
                   <a:srgbClr val="FFFFFF"/>
                 </a:solidFill>
-                <a:latin typeface="Segoe UI"/>
-                <a:cs typeface="Segoe UI"/>
+                <a:latin typeface="Arial"/>
+                <a:cs typeface="Arial"/>
               </a:rPr>
               <a:t>Quy trình và thời điểm được ghi trong đề cương trước bệnh nhân đầu tiên.</a:t>
             </a:r>
@@ -10309,7 +10309,7 @@
                     <a:lumMod val="50000"/>
                   </a:schemeClr>
                 </a:solidFill>
-                <a:latin typeface="Verdana"/>
+                <a:latin typeface="Arial"/>
               </a:rPr>
               <a:t>Neudata | #ClearDataClearImpact</a:t>
             </a:r>
@@ -10439,8 +10439,8 @@
                 <a:solidFill>
                   <a:srgbClr val="0D7377"/>
                 </a:solidFill>
-                <a:latin typeface="Segoe UI"/>
-                <a:cs typeface="Segoe UI"/>
+                <a:latin typeface="Arial"/>
+                <a:cs typeface="Arial"/>
               </a:rPr>
               <a:t>Bảo mật: ẩn danh trước khi phân tích</a:t>
             </a:r>
@@ -10536,8 +10536,8 @@
                 <a:solidFill>
                   <a:srgbClr val="FFFFFF"/>
                 </a:solidFill>
-                <a:latin typeface="Segoe UI"/>
-                <a:cs typeface="Segoe UI"/>
+                <a:latin typeface="Arial"/>
+                <a:cs typeface="Arial"/>
               </a:rPr>
               <a:t>THÔNG ĐIỆP CHÍNH   </a:t>
             </a:r>
@@ -10546,8 +10546,8 @@
                 <a:solidFill>
                   <a:srgbClr val="FFFFFF"/>
                 </a:solidFill>
-                <a:latin typeface="Segoe UI"/>
-                <a:cs typeface="Segoe UI"/>
+                <a:latin typeface="Arial"/>
+                <a:cs typeface="Arial"/>
               </a:rPr>
               <a:t>Họ tên ở lại khoa; chỉ mã nghiên cứu được mang đi.</a:t>
             </a:r>
@@ -10584,7 +10584,7 @@
                     <a:lumMod val="50000"/>
                   </a:schemeClr>
                 </a:solidFill>
-                <a:latin typeface="Verdana"/>
+                <a:latin typeface="Arial"/>
               </a:rPr>
               <a:t>Neudata | #ClearDataClearImpact</a:t>
             </a:r>
@@ -10714,8 +10714,8 @@
                 <a:solidFill>
                   <a:srgbClr val="0D7377"/>
                 </a:solidFill>
-                <a:latin typeface="Segoe UI"/>
-                <a:cs typeface="Segoe UI"/>
+                <a:latin typeface="Arial"/>
+                <a:cs typeface="Arial"/>
               </a:rPr>
               <a:t>Ví dụ mẫu: đoạn đạo đức cho một đoàn hệ như FLUID-ICU</a:t>
             </a:r>
@@ -10781,8 +10781,8 @@
                 <a:solidFill>
                   <a:srgbClr val="595959"/>
                 </a:solidFill>
-                <a:latin typeface="Segoe UI"/>
-                <a:cs typeface="Segoe UI"/>
+                <a:latin typeface="Arial"/>
+                <a:cs typeface="Arial"/>
               </a:rPr>
               <a:t>FLUID-ICU là dữ liệu mô phỏng. Nếu là thật, bài báo sẽ viết như sau.</a:t>
             </a:r>
@@ -10824,8 +10824,8 @@
                 <a:solidFill>
                   <a:srgbClr val="FFFFFF"/>
                 </a:solidFill>
-                <a:latin typeface="Segoe UI"/>
-                <a:cs typeface="Segoe UI"/>
+                <a:latin typeface="Arial"/>
+                <a:cs typeface="Arial"/>
               </a:rPr>
               <a:t>Phê duyệt</a:t>
             </a:r>
@@ -10873,8 +10873,8 @@
                 <a:solidFill>
                   <a:srgbClr val="000000"/>
                 </a:solidFill>
-                <a:latin typeface="Segoe UI"/>
-                <a:cs typeface="Segoe UI"/>
+                <a:latin typeface="Arial"/>
+                <a:cs typeface="Arial"/>
               </a:rPr>
               <a:t>Hội đồng đạo đức của từng ICU</a:t>
             </a:r>
@@ -10894,8 +10894,8 @@
                 <a:solidFill>
                   <a:srgbClr val="000000"/>
                 </a:solidFill>
-                <a:latin typeface="Segoe UI"/>
-                <a:cs typeface="Segoe UI"/>
+                <a:latin typeface="Arial"/>
+                <a:cs typeface="Arial"/>
               </a:rPr>
               <a:t>Số và ngày phê duyệt</a:t>
             </a:r>
@@ -10915,8 +10915,8 @@
                 <a:solidFill>
                   <a:srgbClr val="000000"/>
                 </a:solidFill>
-                <a:latin typeface="Segoe UI"/>
-                <a:cs typeface="Segoe UI"/>
+                <a:latin typeface="Arial"/>
+                <a:cs typeface="Arial"/>
               </a:rPr>
               <a:t>Trước khi thu thập dữ liệu</a:t>
             </a:r>
@@ -10958,8 +10958,8 @@
                 <a:solidFill>
                   <a:srgbClr val="FFFFFF"/>
                 </a:solidFill>
-                <a:latin typeface="Segoe UI"/>
-                <a:cs typeface="Segoe UI"/>
+                <a:latin typeface="Arial"/>
+                <a:cs typeface="Arial"/>
               </a:rPr>
               <a:t>Chấp thuận</a:t>
             </a:r>
@@ -11007,8 +11007,8 @@
                 <a:solidFill>
                   <a:srgbClr val="000000"/>
                 </a:solidFill>
-                <a:latin typeface="Segoe UI"/>
-                <a:cs typeface="Segoe UI"/>
+                <a:latin typeface="Arial"/>
+                <a:cs typeface="Arial"/>
               </a:rPr>
               <a:t>Dữ liệu thường quy, nguy cơ tối thiểu</a:t>
             </a:r>
@@ -11028,8 +11028,8 @@
                 <a:solidFill>
                   <a:srgbClr val="000000"/>
                 </a:solidFill>
-                <a:latin typeface="Segoe UI"/>
-                <a:cs typeface="Segoe UI"/>
+                <a:latin typeface="Arial"/>
+                <a:cs typeface="Arial"/>
               </a:rPr>
               <a:t>Hội đồng có thể MIỄN chấp thuận</a:t>
             </a:r>
@@ -11049,8 +11049,8 @@
                 <a:solidFill>
                   <a:srgbClr val="000000"/>
                 </a:solidFill>
-                <a:latin typeface="Segoe UI"/>
-                <a:cs typeface="Segoe UI"/>
+                <a:latin typeface="Arial"/>
+                <a:cs typeface="Arial"/>
               </a:rPr>
               <a:t>(như Bài 2)</a:t>
             </a:r>
@@ -11092,8 +11092,8 @@
                 <a:solidFill>
                   <a:srgbClr val="FFFFFF"/>
                 </a:solidFill>
-                <a:latin typeface="Segoe UI"/>
-                <a:cs typeface="Segoe UI"/>
+                <a:latin typeface="Arial"/>
+                <a:cs typeface="Arial"/>
               </a:rPr>
               <a:t>Bảo mật</a:t>
             </a:r>
@@ -11141,8 +11141,8 @@
                 <a:solidFill>
                   <a:srgbClr val="000000"/>
                 </a:solidFill>
-                <a:latin typeface="Segoe UI"/>
-                <a:cs typeface="Segoe UI"/>
+                <a:latin typeface="Arial"/>
+                <a:cs typeface="Arial"/>
               </a:rPr>
               <a:t>Chỉ dùng mã nghiên cứu</a:t>
             </a:r>
@@ -11162,8 +11162,8 @@
                 <a:solidFill>
                   <a:srgbClr val="000000"/>
                 </a:solidFill>
-                <a:latin typeface="Segoe UI"/>
-                <a:cs typeface="Segoe UI"/>
+                <a:latin typeface="Arial"/>
+                <a:cs typeface="Arial"/>
               </a:rPr>
               <a:t>Tệp khóa lưu ở từng ICU</a:t>
             </a:r>
@@ -11183,8 +11183,8 @@
                 <a:solidFill>
                   <a:srgbClr val="000000"/>
                 </a:solidFill>
-                <a:latin typeface="Segoe UI"/>
-                <a:cs typeface="Segoe UI"/>
+                <a:latin typeface="Arial"/>
+                <a:cs typeface="Arial"/>
               </a:rPr>
               <a:t>Ẩn danh trước khi phân tích</a:t>
             </a:r>
@@ -11226,8 +11226,8 @@
                 <a:solidFill>
                   <a:srgbClr val="FFFFFF"/>
                 </a:solidFill>
-                <a:latin typeface="Segoe UI"/>
-                <a:cs typeface="Segoe UI"/>
+                <a:latin typeface="Arial"/>
+                <a:cs typeface="Arial"/>
               </a:rPr>
               <a:t>Đăng ký &amp; chia sẻ</a:t>
             </a:r>
@@ -11275,8 +11275,8 @@
                 <a:solidFill>
                   <a:srgbClr val="000000"/>
                 </a:solidFill>
-                <a:latin typeface="Segoe UI"/>
-                <a:cs typeface="Segoe UI"/>
+                <a:latin typeface="Arial"/>
+                <a:cs typeface="Arial"/>
               </a:rPr>
               <a:t>Khuyến khích đăng ký</a:t>
             </a:r>
@@ -11296,8 +11296,8 @@
                 <a:solidFill>
                   <a:srgbClr val="000000"/>
                 </a:solidFill>
-                <a:latin typeface="Segoe UI"/>
-                <a:cs typeface="Segoe UI"/>
+                <a:latin typeface="Arial"/>
+                <a:cs typeface="Arial"/>
               </a:rPr>
               <a:t>Tuyên bố chia sẻ dữ liệu</a:t>
             </a:r>
@@ -11317,8 +11317,8 @@
                 <a:solidFill>
                   <a:srgbClr val="000000"/>
                 </a:solidFill>
-                <a:latin typeface="Segoe UI"/>
-                <a:cs typeface="Segoe UI"/>
+                <a:latin typeface="Arial"/>
+                <a:cs typeface="Arial"/>
               </a:rPr>
               <a:t>Chia sẻ từ điển dữ liệu</a:t>
             </a:r>
@@ -11362,8 +11362,8 @@
                 <a:solidFill>
                   <a:srgbClr val="FFFFFF"/>
                 </a:solidFill>
-                <a:latin typeface="Segoe UI"/>
-                <a:cs typeface="Segoe UI"/>
+                <a:latin typeface="Arial"/>
+                <a:cs typeface="Arial"/>
               </a:rPr>
               <a:t>THÔNG ĐIỆP CHÍNH   </a:t>
             </a:r>
@@ -11372,8 +11372,8 @@
                 <a:solidFill>
                   <a:srgbClr val="FFFFFF"/>
                 </a:solidFill>
-                <a:latin typeface="Segoe UI"/>
-                <a:cs typeface="Segoe UI"/>
+                <a:latin typeface="Arial"/>
+                <a:cs typeface="Arial"/>
               </a:rPr>
               <a:t>Đoạn đạo đức của bản thảo trả lời bốn câu hỏi trong bốn câu.</a:t>
             </a:r>
@@ -11410,7 +11410,7 @@
                     <a:lumMod val="50000"/>
                   </a:schemeClr>
                 </a:solidFill>
-                <a:latin typeface="Verdana"/>
+                <a:latin typeface="Arial"/>
               </a:rPr>
               <a:t>Neudata | #ClearDataClearImpact</a:t>
             </a:r>
@@ -11540,8 +11540,8 @@
                 <a:solidFill>
                   <a:srgbClr val="0D7377"/>
                 </a:solidFill>
-                <a:latin typeface="Segoe UI"/>
-                <a:cs typeface="Segoe UI"/>
+                <a:latin typeface="Arial"/>
+                <a:cs typeface="Arial"/>
               </a:rPr>
               <a:t>Tính khả thi trong một hình: năm câu hỏi trung thực</a:t>
             </a:r>
@@ -11637,8 +11637,8 @@
                 <a:solidFill>
                   <a:srgbClr val="FFFFFF"/>
                 </a:solidFill>
-                <a:latin typeface="Segoe UI"/>
-                <a:cs typeface="Segoe UI"/>
+                <a:latin typeface="Arial"/>
+                <a:cs typeface="Arial"/>
               </a:rPr>
               <a:t>THÔNG ĐIỆP CHÍNH   </a:t>
             </a:r>
@@ -11647,8 +11647,8 @@
                 <a:solidFill>
                   <a:srgbClr val="FFFFFF"/>
                 </a:solidFill>
-                <a:latin typeface="Segoe UI"/>
-                <a:cs typeface="Segoe UI"/>
+                <a:latin typeface="Arial"/>
+                <a:cs typeface="Arial"/>
               </a:rPr>
               <a:t>Đếm số bệnh nhân đủ tiêu chuẩn ở khoa TRƯỚC khi viết cỡ mẫu.</a:t>
             </a:r>
@@ -11685,7 +11685,7 @@
                     <a:lumMod val="50000"/>
                   </a:schemeClr>
                 </a:solidFill>
-                <a:latin typeface="Verdana"/>
+                <a:latin typeface="Arial"/>
               </a:rPr>
               <a:t>Neudata | #ClearDataClearImpact</a:t>
             </a:r>
@@ -11815,8 +11815,8 @@
                 <a:solidFill>
                   <a:srgbClr val="0D7377"/>
                 </a:solidFill>
-                <a:latin typeface="Segoe UI"/>
-                <a:cs typeface="Segoe UI"/>
+                <a:latin typeface="Arial"/>
+                <a:cs typeface="Arial"/>
               </a:rPr>
               <a:t>7.2  |  20 phút</a:t>
             </a:r>
@@ -11885,8 +11885,8 @@
                 <a:solidFill>
                   <a:srgbClr val="0D7377"/>
                 </a:solidFill>
-                <a:latin typeface="Segoe UI"/>
-                <a:cs typeface="Segoe UI"/>
+                <a:latin typeface="Arial"/>
+                <a:cs typeface="Arial"/>
               </a:rPr>
               <a:t>Liêm chính nghiên cứu</a:t>
             </a:r>
@@ -11903,8 +11903,8 @@
                 <a:solidFill>
                   <a:srgbClr val="595959"/>
                 </a:solidFill>
-                <a:latin typeface="Segoe UI"/>
-                <a:cs typeface="Segoe UI"/>
+                <a:latin typeface="Arial"/>
+                <a:cs typeface="Arial"/>
               </a:rPr>
               <a:t>Dữ liệu trung thực, ghi công trung thực, dùng AI trung thực</a:t>
             </a:r>
@@ -11941,7 +11941,7 @@
                     <a:lumMod val="50000"/>
                   </a:schemeClr>
                 </a:solidFill>
-                <a:latin typeface="Verdana"/>
+                <a:latin typeface="Arial"/>
               </a:rPr>
               <a:t>Neudata | #ClearDataClearImpact</a:t>
             </a:r>
@@ -12071,8 +12071,8 @@
                 <a:solidFill>
                   <a:srgbClr val="0D7377"/>
                 </a:solidFill>
-                <a:latin typeface="Segoe UI"/>
-                <a:cs typeface="Segoe UI"/>
+                <a:latin typeface="Arial"/>
+                <a:cs typeface="Arial"/>
               </a:rPr>
               <a:t>Sai phạm nghiên cứu: bịa đặt, xuyên tạc, đạo văn</a:t>
             </a:r>
@@ -12168,8 +12168,8 @@
                 <a:solidFill>
                   <a:srgbClr val="FFFFFF"/>
                 </a:solidFill>
-                <a:latin typeface="Segoe UI"/>
-                <a:cs typeface="Segoe UI"/>
+                <a:latin typeface="Arial"/>
+                <a:cs typeface="Arial"/>
               </a:rPr>
               <a:t>THÔNG ĐIỆP CHÍNH   </a:t>
             </a:r>
@@ -12178,8 +12178,8 @@
                 <a:solidFill>
                   <a:srgbClr val="FFFFFF"/>
                 </a:solidFill>
-                <a:latin typeface="Segoe UI"/>
-                <a:cs typeface="Segoe UI"/>
+                <a:latin typeface="Arial"/>
+                <a:cs typeface="Arial"/>
               </a:rPr>
               <a:t>Dữ liệu thiếu được báo cáo là thiếu: không bao giờ bịa ra, không lặng lẽ loại bỏ.</a:t>
             </a:r>
@@ -12216,7 +12216,7 @@
                     <a:lumMod val="50000"/>
                   </a:schemeClr>
                 </a:solidFill>
-                <a:latin typeface="Verdana"/>
+                <a:latin typeface="Arial"/>
               </a:rPr>
               <a:t>Neudata | #ClearDataClearImpact</a:t>
             </a:r>
@@ -12346,8 +12346,8 @@
                 <a:solidFill>
                   <a:srgbClr val="0D7377"/>
                 </a:solidFill>
-                <a:latin typeface="Segoe UI"/>
-                <a:cs typeface="Segoe UI"/>
+                <a:latin typeface="Arial"/>
+                <a:cs typeface="Arial"/>
               </a:rPr>
               <a:t>Cũng không được làm: những mẹo làm sai lệch y văn</a:t>
             </a:r>
@@ -12413,8 +12413,8 @@
                 <a:solidFill>
                   <a:srgbClr val="595959"/>
                 </a:solidFill>
-                <a:latin typeface="Segoe UI"/>
-                <a:cs typeface="Segoe UI"/>
+                <a:latin typeface="Arial"/>
+                <a:cs typeface="Arial"/>
               </a:rPr>
               <a:t>Một nghiên cứu nên kể một câu chuyện đầy đủ và trung thực.</a:t>
             </a:r>
@@ -12456,8 +12456,8 @@
                 <a:solidFill>
                   <a:srgbClr val="FFFFFF"/>
                 </a:solidFill>
-                <a:latin typeface="Segoe UI"/>
-                <a:cs typeface="Segoe UI"/>
+                <a:latin typeface="Arial"/>
+                <a:cs typeface="Arial"/>
               </a:rPr>
               <a:t>Công bố trùng lặp</a:t>
             </a:r>
@@ -12505,8 +12505,8 @@
                 <a:solidFill>
                   <a:srgbClr val="000000"/>
                 </a:solidFill>
-                <a:latin typeface="Segoe UI"/>
-                <a:cs typeface="Segoe UI"/>
+                <a:latin typeface="Arial"/>
+                <a:cs typeface="Arial"/>
               </a:rPr>
               <a:t>Cùng nghiên cứu, cùng kết quả</a:t>
             </a:r>
@@ -12526,8 +12526,8 @@
                 <a:solidFill>
                   <a:srgbClr val="000000"/>
                 </a:solidFill>
-                <a:latin typeface="Segoe UI"/>
-                <a:cs typeface="Segoe UI"/>
+                <a:latin typeface="Arial"/>
+                <a:cs typeface="Arial"/>
               </a:rPr>
               <a:t>đăng ở tạp chí thứ hai</a:t>
             </a:r>
@@ -12547,8 +12547,8 @@
                 <a:solidFill>
                   <a:srgbClr val="000000"/>
                 </a:solidFill>
-                <a:latin typeface="Segoe UI"/>
-                <a:cs typeface="Segoe UI"/>
+                <a:latin typeface="Arial"/>
+                <a:cs typeface="Arial"/>
               </a:rPr>
               <a:t>mà không nói rõ</a:t>
             </a:r>
@@ -12590,8 +12590,8 @@
                 <a:solidFill>
                   <a:srgbClr val="FFFFFF"/>
                 </a:solidFill>
-                <a:latin typeface="Segoe UI"/>
-                <a:cs typeface="Segoe UI"/>
+                <a:latin typeface="Arial"/>
+                <a:cs typeface="Arial"/>
               </a:rPr>
               <a:t>Cắt lát salami</a:t>
             </a:r>
@@ -12639,8 +12639,8 @@
                 <a:solidFill>
                   <a:srgbClr val="000000"/>
                 </a:solidFill>
-                <a:latin typeface="Segoe UI"/>
-                <a:cs typeface="Segoe UI"/>
+                <a:latin typeface="Arial"/>
+                <a:cs typeface="Arial"/>
               </a:rPr>
               <a:t>Cắt một nghiên cứu thành nhiều bài</a:t>
             </a:r>
@@ -12660,8 +12660,8 @@
                 <a:solidFill>
                   <a:srgbClr val="000000"/>
                 </a:solidFill>
-                <a:latin typeface="Segoe UI"/>
-                <a:cs typeface="Segoe UI"/>
+                <a:latin typeface="Arial"/>
+                <a:cs typeface="Arial"/>
               </a:rPr>
               <a:t>để tăng số bài báo</a:t>
             </a:r>
@@ -12681,8 +12681,8 @@
                 <a:solidFill>
                   <a:srgbClr val="000000"/>
                 </a:solidFill>
-                <a:latin typeface="Segoe UI"/>
-                <a:cs typeface="Segoe UI"/>
+                <a:latin typeface="Arial"/>
+                <a:cs typeface="Arial"/>
               </a:rPr>
               <a:t>Người đọc không thấy toàn cảnh</a:t>
             </a:r>
@@ -12724,8 +12724,8 @@
                 <a:solidFill>
                   <a:srgbClr val="FFFFFF"/>
                 </a:solidFill>
-                <a:latin typeface="Segoe UI"/>
-                <a:cs typeface="Segoe UI"/>
+                <a:latin typeface="Arial"/>
+                <a:cs typeface="Arial"/>
               </a:rPr>
               <a:t>Báo cáo chọn lọc</a:t>
             </a:r>
@@ -12773,8 +12773,8 @@
                 <a:solidFill>
                   <a:srgbClr val="000000"/>
                 </a:solidFill>
-                <a:latin typeface="Segoe UI"/>
-                <a:cs typeface="Segoe UI"/>
+                <a:latin typeface="Arial"/>
+                <a:cs typeface="Arial"/>
               </a:rPr>
               <a:t>Chỉ báo cáo kết cục 'có ý nghĩa'</a:t>
             </a:r>
@@ -12794,8 +12794,8 @@
                 <a:solidFill>
                   <a:srgbClr val="000000"/>
                 </a:solidFill>
-                <a:latin typeface="Segoe UI"/>
-                <a:cs typeface="Segoe UI"/>
+                <a:latin typeface="Arial"/>
+                <a:cs typeface="Arial"/>
               </a:rPr>
               <a:t>Đổi kết cục chính</a:t>
             </a:r>
@@ -12815,8 +12815,8 @@
                 <a:solidFill>
                   <a:srgbClr val="000000"/>
                 </a:solidFill>
-                <a:latin typeface="Segoe UI"/>
-                <a:cs typeface="Segoe UI"/>
+                <a:latin typeface="Arial"/>
+                <a:cs typeface="Arial"/>
               </a:rPr>
               <a:t>sau khi xem dữ liệu</a:t>
             </a:r>
@@ -12860,8 +12860,8 @@
                 <a:solidFill>
                   <a:srgbClr val="FFFFFF"/>
                 </a:solidFill>
-                <a:latin typeface="Segoe UI"/>
-                <a:cs typeface="Segoe UI"/>
+                <a:latin typeface="Arial"/>
+                <a:cs typeface="Arial"/>
               </a:rPr>
               <a:t>THÔNG ĐIỆP CHÍNH   </a:t>
             </a:r>
@@ -12870,8 +12870,8 @@
                 <a:solidFill>
                   <a:srgbClr val="FFFFFF"/>
                 </a:solidFill>
-                <a:latin typeface="Segoe UI"/>
-                <a:cs typeface="Segoe UI"/>
+                <a:latin typeface="Arial"/>
+                <a:cs typeface="Arial"/>
               </a:rPr>
               <a:t>Đăng ký trước, định trước kết cục chính, báo cáo tất cả.</a:t>
             </a:r>
@@ -12908,7 +12908,7 @@
                     <a:lumMod val="50000"/>
                   </a:schemeClr>
                 </a:solidFill>
-                <a:latin typeface="Verdana"/>
+                <a:latin typeface="Arial"/>
               </a:rPr>
               <a:t>Neudata | #ClearDataClearImpact</a:t>
             </a:r>
@@ -13038,8 +13038,8 @@
                 <a:solidFill>
                   <a:srgbClr val="0D7377"/>
                 </a:solidFill>
-                <a:latin typeface="Segoe UI"/>
-                <a:cs typeface="Segoe UI"/>
+                <a:latin typeface="Arial"/>
+                <a:cs typeface="Arial"/>
               </a:rPr>
               <a:t>Ai là tác giả? Bốn tiêu chí ICMJE</a:t>
             </a:r>
@@ -13135,8 +13135,8 @@
                 <a:solidFill>
                   <a:srgbClr val="FFFFFF"/>
                 </a:solidFill>
-                <a:latin typeface="Segoe UI"/>
-                <a:cs typeface="Segoe UI"/>
+                <a:latin typeface="Arial"/>
+                <a:cs typeface="Arial"/>
               </a:rPr>
               <a:t>THÔNG ĐIỆP CHÍNH   </a:t>
             </a:r>
@@ -13145,8 +13145,8 @@
                 <a:solidFill>
                   <a:srgbClr val="FFFFFF"/>
                 </a:solidFill>
-                <a:latin typeface="Segoe UI"/>
-                <a:cs typeface="Segoe UI"/>
+                <a:latin typeface="Arial"/>
+                <a:cs typeface="Arial"/>
               </a:rPr>
               <a:t>Đủ cả bốn tiêu chí, cho mọi tác giả. Thống nhất danh sách ngay từ đầu.</a:t>
             </a:r>
@@ -13183,7 +13183,7 @@
                     <a:lumMod val="50000"/>
                   </a:schemeClr>
                 </a:solidFill>
-                <a:latin typeface="Verdana"/>
+                <a:latin typeface="Arial"/>
               </a:rPr>
               <a:t>Neudata | #ClearDataClearImpact</a:t>
             </a:r>
@@ -13313,8 +13313,8 @@
                 <a:solidFill>
                   <a:srgbClr val="0D7377"/>
                 </a:solidFill>
-                <a:latin typeface="Segoe UI"/>
-                <a:cs typeface="Segoe UI"/>
+                <a:latin typeface="Arial"/>
+                <a:cs typeface="Arial"/>
               </a:rPr>
               <a:t>Câu hỏi ôn tập: Buổi 6 trong năm câu</a:t>
             </a:r>
@@ -13384,8 +13384,8 @@
                 <a:solidFill>
                   <a:srgbClr val="FFFFFF"/>
                 </a:solidFill>
-                <a:latin typeface="Segoe UI"/>
-                <a:cs typeface="Segoe UI"/>
+                <a:latin typeface="Arial"/>
+                <a:cs typeface="Arial"/>
               </a:rPr>
               <a:t>CÂU HỎI NHANH   |   10 phút</a:t>
             </a:r>
@@ -13422,25 +13422,19 @@
               <a:spcBef>
                 <a:spcPts val="450"/>
               </a:spcBef>
-              <a:buNone/>
-            </a:pPr>
-            <a:r>
-              <a:rPr lang="en-US" sz="1650" b="1" dirty="0">
-                <a:solidFill>
-                  <a:srgbClr val="6C3483"/>
-                </a:solidFill>
-                <a:latin typeface="Segoe UI"/>
-                <a:cs typeface="Segoe UI"/>
-              </a:rPr>
-              <a:t>1.  </a:t>
-            </a:r>
+              <a:buClr>
+                <a:srgbClr val="6C3483"/>
+              </a:buClr>
+              <a:buFont typeface="Arial"/>
+              <a:buChar char="•"/>
+            </a:pPr>
             <a:r>
               <a:rPr lang="en-US" sz="1650" dirty="0">
                 <a:solidFill>
                   <a:srgbClr val="000000"/>
                 </a:solidFill>
-                <a:latin typeface="Segoe UI"/>
-                <a:cs typeface="Segoe UI"/>
+                <a:latin typeface="Arial"/>
+                <a:cs typeface="Arial"/>
               </a:rPr>
               <a:t>OR thô là 2,1; OR hiệu chỉnh là 1,4. Điều gì đã xảy ra?</a:t>
             </a:r>
@@ -13453,25 +13447,19 @@
               <a:spcBef>
                 <a:spcPts val="450"/>
               </a:spcBef>
-              <a:buNone/>
-            </a:pPr>
-            <a:r>
-              <a:rPr lang="en-US" sz="1650" b="1" dirty="0">
-                <a:solidFill>
-                  <a:srgbClr val="6C3483"/>
-                </a:solidFill>
-                <a:latin typeface="Segoe UI"/>
-                <a:cs typeface="Segoe UI"/>
-              </a:rPr>
-              <a:t>2.  </a:t>
-            </a:r>
+              <a:buClr>
+                <a:srgbClr val="6C3483"/>
+              </a:buClr>
+              <a:buFont typeface="Arial"/>
+              <a:buChar char="•"/>
+            </a:pPr>
             <a:r>
               <a:rPr lang="en-US" sz="1650" dirty="0">
                 <a:solidFill>
                   <a:srgbClr val="000000"/>
                 </a:solidFill>
-                <a:latin typeface="Segoe UI"/>
-                <a:cs typeface="Segoe UI"/>
+                <a:latin typeface="Arial"/>
+                <a:cs typeface="Arial"/>
               </a:rPr>
               <a:t>HR 0,85 (KTC 95% 0,60 đến 1,20): có lợi rõ ràng không?</a:t>
             </a:r>
@@ -13484,25 +13472,19 @@
               <a:spcBef>
                 <a:spcPts val="450"/>
               </a:spcBef>
-              <a:buNone/>
-            </a:pPr>
-            <a:r>
-              <a:rPr lang="en-US" sz="1650" b="1" dirty="0">
-                <a:solidFill>
-                  <a:srgbClr val="6C3483"/>
-                </a:solidFill>
-                <a:latin typeface="Segoe UI"/>
-                <a:cs typeface="Segoe UI"/>
-              </a:rPr>
-              <a:t>3.  </a:t>
-            </a:r>
+              <a:buClr>
+                <a:srgbClr val="6C3483"/>
+              </a:buClr>
+              <a:buFont typeface="Arial"/>
+              <a:buChar char="•"/>
+            </a:pPr>
             <a:r>
               <a:rPr lang="en-US" sz="1650" dirty="0">
                 <a:solidFill>
                   <a:srgbClr val="000000"/>
                 </a:solidFill>
-                <a:latin typeface="Segoe UI"/>
-                <a:cs typeface="Segoe UI"/>
+                <a:latin typeface="Arial"/>
+                <a:cs typeface="Arial"/>
               </a:rPr>
               <a:t>Lactat thiếu ở 15% bệnh nhân. Nêu một cách xử lý</a:t>
             </a:r>
@@ -13515,25 +13497,19 @@
               <a:spcBef>
                 <a:spcPts val="450"/>
               </a:spcBef>
-              <a:buNone/>
-            </a:pPr>
-            <a:r>
-              <a:rPr lang="en-US" sz="1650" b="1" dirty="0">
-                <a:solidFill>
-                  <a:srgbClr val="6C3483"/>
-                </a:solidFill>
-                <a:latin typeface="Segoe UI"/>
-                <a:cs typeface="Segoe UI"/>
-              </a:rPr>
-              <a:t>4.  </a:t>
-            </a:r>
+              <a:buClr>
+                <a:srgbClr val="6C3483"/>
+              </a:buClr>
+              <a:buFont typeface="Arial"/>
+              <a:buChar char="•"/>
+            </a:pPr>
             <a:r>
               <a:rPr lang="en-US" sz="1650" dirty="0">
                 <a:solidFill>
                   <a:srgbClr val="000000"/>
                 </a:solidFill>
-                <a:latin typeface="Segoe UI"/>
-                <a:cs typeface="Segoe UI"/>
+                <a:latin typeface="Arial"/>
+                <a:cs typeface="Arial"/>
               </a:rPr>
               <a:t>Kaplan-Meier: bệnh nhân 'bị kiểm duyệt' nghĩa là gì?</a:t>
             </a:r>
@@ -13546,25 +13522,19 @@
               <a:spcBef>
                 <a:spcPts val="450"/>
               </a:spcBef>
-              <a:buNone/>
-            </a:pPr>
-            <a:r>
-              <a:rPr lang="en-US" sz="1650" b="1" dirty="0">
-                <a:solidFill>
-                  <a:srgbClr val="6C3483"/>
-                </a:solidFill>
-                <a:latin typeface="Segoe UI"/>
-                <a:cs typeface="Segoe UI"/>
-              </a:rPr>
-              <a:t>5.  </a:t>
-            </a:r>
+              <a:buClr>
+                <a:srgbClr val="6C3483"/>
+              </a:buClr>
+              <a:buFont typeface="Arial"/>
+              <a:buChar char="•"/>
+            </a:pPr>
             <a:r>
               <a:rPr lang="en-US" sz="1650" dirty="0">
                 <a:solidFill>
                   <a:srgbClr val="000000"/>
                 </a:solidFill>
-                <a:latin typeface="Segoe UI"/>
-                <a:cs typeface="Segoe UI"/>
+                <a:latin typeface="Arial"/>
+                <a:cs typeface="Arial"/>
               </a:rPr>
               <a:t>Câu hỏi FLUID-ICU của nhóm bạn: kết quả chính là gì?</a:t>
             </a:r>
@@ -13608,8 +13578,8 @@
                 <a:solidFill>
                   <a:srgbClr val="6C3483"/>
                 </a:solidFill>
-                <a:latin typeface="Segoe UI"/>
-                <a:cs typeface="Segoe UI"/>
+                <a:latin typeface="Arial"/>
+                <a:cs typeface="Arial"/>
               </a:rPr>
               <a:t>Đáp án</a:t>
             </a:r>
@@ -13630,10 +13600,10 @@
                 <a:solidFill>
                   <a:srgbClr val="000000"/>
                 </a:solidFill>
-                <a:latin typeface="Segoe UI"/>
-                <a:cs typeface="Segoe UI"/>
-              </a:rPr>
-              <a:t>1. Nhiễu: một phần liên quan thô là do mức độ nặng</a:t>
+                <a:latin typeface="Arial"/>
+                <a:cs typeface="Arial"/>
+              </a:rPr>
+              <a:t>Nhiễu: một phần liên quan thô là do mức độ nặng</a:t>
             </a:r>
           </a:p>
           <a:p>
@@ -13652,10 +13622,10 @@
                 <a:solidFill>
                   <a:srgbClr val="000000"/>
                 </a:solidFill>
-                <a:latin typeface="Segoe UI"/>
-                <a:cs typeface="Segoe UI"/>
-              </a:rPr>
-              <a:t>2. Không: KTC chứa giá trị 1</a:t>
+                <a:latin typeface="Arial"/>
+                <a:cs typeface="Arial"/>
+              </a:rPr>
+              <a:t>Không: KTC chứa giá trị 1</a:t>
             </a:r>
           </a:p>
           <a:p>
@@ -13674,10 +13644,10 @@
                 <a:solidFill>
                   <a:srgbClr val="000000"/>
                 </a:solidFill>
-                <a:latin typeface="Segoe UI"/>
-                <a:cs typeface="Segoe UI"/>
-              </a:rPr>
-              <a:t>3. Phân tích ca đầy đủ, hoặc quy gán đa bội + phân tích độ nhạy</a:t>
+                <a:latin typeface="Arial"/>
+                <a:cs typeface="Arial"/>
+              </a:rPr>
+              <a:t>Phân tích ca đầy đủ, hoặc quy gán đa bội + phân tích độ nhạy</a:t>
             </a:r>
           </a:p>
           <a:p>
@@ -13696,10 +13666,10 @@
                 <a:solidFill>
                   <a:srgbClr val="000000"/>
                 </a:solidFill>
-                <a:latin typeface="Segoe UI"/>
-                <a:cs typeface="Segoe UI"/>
-              </a:rPr>
-              <a:t>4. Rời nghiên cứu khi còn sống, sau đó không biết kết cục</a:t>
+                <a:latin typeface="Arial"/>
+                <a:cs typeface="Arial"/>
+              </a:rPr>
+              <a:t>Rời nghiên cứu khi còn sống, sau đó không biết kết cục</a:t>
             </a:r>
           </a:p>
           <a:p>
@@ -13718,10 +13688,10 @@
                 <a:solidFill>
                   <a:srgbClr val="000000"/>
                 </a:solidFill>
-                <a:latin typeface="Segoe UI"/>
-                <a:cs typeface="Segoe UI"/>
-              </a:rPr>
-              <a:t>5. Theo gói kết quả của nhóm</a:t>
+                <a:latin typeface="Arial"/>
+                <a:cs typeface="Arial"/>
+              </a:rPr>
+              <a:t>Theo gói kết quả của nhóm</a:t>
             </a:r>
           </a:p>
         </p:txBody>
@@ -13765,8 +13735,8 @@
                 <a:solidFill>
                   <a:srgbClr val="6C3483"/>
                 </a:solidFill>
-                <a:latin typeface="Segoe UI"/>
-                <a:cs typeface="Segoe UI"/>
+                <a:latin typeface="Arial"/>
+                <a:cs typeface="Arial"/>
               </a:rPr>
               <a:t>SẢN PHẨM   </a:t>
             </a:r>
@@ -13775,8 +13745,8 @@
                 <a:solidFill>
                   <a:srgbClr val="000000"/>
                 </a:solidFill>
-                <a:latin typeface="Segoe UI"/>
-                <a:cs typeface="Segoe UI"/>
+                <a:latin typeface="Arial"/>
+                <a:cs typeface="Arial"/>
               </a:rPr>
               <a:t>Mọi người nhớ lại: hiệu chỉnh, KTC, dữ liệu thiếu, sống còn</a:t>
             </a:r>
@@ -13813,7 +13783,7 @@
                     <a:lumMod val="50000"/>
                   </a:schemeClr>
                 </a:solidFill>
-                <a:latin typeface="Verdana"/>
+                <a:latin typeface="Arial"/>
               </a:rPr>
               <a:t>Neudata | #ClearDataClearImpact</a:t>
             </a:r>
@@ -13943,8 +13913,8 @@
                 <a:solidFill>
                   <a:srgbClr val="0D7377"/>
                 </a:solidFill>
-                <a:latin typeface="Segoe UI"/>
-                <a:cs typeface="Segoe UI"/>
+                <a:latin typeface="Arial"/>
+                <a:cs typeface="Arial"/>
               </a:rPr>
               <a:t>Xung đột lợi ích và nguồn tài trợ: khai báo tất cả</a:t>
             </a:r>
@@ -14040,8 +14010,8 @@
                 <a:solidFill>
                   <a:srgbClr val="FFFFFF"/>
                 </a:solidFill>
-                <a:latin typeface="Segoe UI"/>
-                <a:cs typeface="Segoe UI"/>
+                <a:latin typeface="Arial"/>
+                <a:cs typeface="Arial"/>
               </a:rPr>
               <a:t>THÔNG ĐIỆP CHÍNH   </a:t>
             </a:r>
@@ -14050,8 +14020,8 @@
                 <a:solidFill>
                   <a:srgbClr val="FFFFFF"/>
                 </a:solidFill>
-                <a:latin typeface="Segoe UI"/>
-                <a:cs typeface="Segoe UI"/>
+                <a:latin typeface="Arial"/>
+                <a:cs typeface="Arial"/>
               </a:rPr>
               <a:t>Lợi ích được khai báo là thông tin; lợi ích bị che giấu là bê bối.</a:t>
             </a:r>
@@ -14088,7 +14058,7 @@
                     <a:lumMod val="50000"/>
                   </a:schemeClr>
                 </a:solidFill>
-                <a:latin typeface="Verdana"/>
+                <a:latin typeface="Arial"/>
               </a:rPr>
               <a:t>Neudata | #ClearDataClearImpact</a:t>
             </a:r>
@@ -14218,8 +14188,8 @@
                 <a:solidFill>
                   <a:srgbClr val="0D7377"/>
                 </a:solidFill>
-                <a:latin typeface="Segoe UI"/>
-                <a:cs typeface="Segoe UI"/>
+                <a:latin typeface="Arial"/>
+                <a:cs typeface="Arial"/>
               </a:rPr>
               <a:t>Chia sẻ dữ liệu: từ 'theo yêu cầu' đến mở</a:t>
             </a:r>
@@ -14315,8 +14285,8 @@
                 <a:solidFill>
                   <a:srgbClr val="FFFFFF"/>
                 </a:solidFill>
-                <a:latin typeface="Segoe UI"/>
-                <a:cs typeface="Segoe UI"/>
+                <a:latin typeface="Arial"/>
+                <a:cs typeface="Arial"/>
               </a:rPr>
               <a:t>THÔNG ĐIỆP CHÍNH   </a:t>
             </a:r>
@@ -14325,8 +14295,8 @@
                 <a:solidFill>
                   <a:srgbClr val="FFFFFF"/>
                 </a:solidFill>
-                <a:latin typeface="Segoe UI"/>
-                <a:cs typeface="Segoe UI"/>
+                <a:latin typeface="Arial"/>
+                <a:cs typeface="Arial"/>
               </a:rPr>
               <a:t>Lên kế hoạch chia sẻ dữ liệu từ đề cương: phiếu chấp thuận phải cho phép.</a:t>
             </a:r>
@@ -14363,7 +14333,7 @@
                     <a:lumMod val="50000"/>
                   </a:schemeClr>
                 </a:solidFill>
-                <a:latin typeface="Verdana"/>
+                <a:latin typeface="Arial"/>
               </a:rPr>
               <a:t>Neudata | #ClearDataClearImpact</a:t>
             </a:r>
@@ -14493,8 +14463,8 @@
                 <a:solidFill>
                   <a:srgbClr val="0D7377"/>
                 </a:solidFill>
-                <a:latin typeface="Segoe UI"/>
-                <a:cs typeface="Segoe UI"/>
+                <a:latin typeface="Arial"/>
+                <a:cs typeface="Arial"/>
               </a:rPr>
               <a:t>AI trong nghiên cứu và viết bài: điều gì được phép</a:t>
             </a:r>
@@ -14590,8 +14560,8 @@
                 <a:solidFill>
                   <a:srgbClr val="FFFFFF"/>
                 </a:solidFill>
-                <a:latin typeface="Segoe UI"/>
-                <a:cs typeface="Segoe UI"/>
+                <a:latin typeface="Arial"/>
+                <a:cs typeface="Arial"/>
               </a:rPr>
               <a:t>THÔNG ĐIỆP CHÍNH   </a:t>
             </a:r>
@@ -14600,8 +14570,8 @@
                 <a:solidFill>
                   <a:srgbClr val="FFFFFF"/>
                 </a:solidFill>
-                <a:latin typeface="Segoe UI"/>
-                <a:cs typeface="Segoe UI"/>
+                <a:latin typeface="Arial"/>
+                <a:cs typeface="Arial"/>
               </a:rPr>
               <a:t>Dùng AI như một trợ lý mới: kiểm tra mọi thứ, khai báo, giữ dữ liệu bệnh nhân bên ngoài.</a:t>
             </a:r>
@@ -14638,7 +14608,7 @@
                     <a:lumMod val="50000"/>
                   </a:schemeClr>
                 </a:solidFill>
-                <a:latin typeface="Verdana"/>
+                <a:latin typeface="Arial"/>
               </a:rPr>
               <a:t>Neudata | #ClearDataClearImpact</a:t>
             </a:r>
@@ -14768,8 +14738,8 @@
                 <a:solidFill>
                   <a:srgbClr val="0D7377"/>
                 </a:solidFill>
-                <a:latin typeface="Segoe UI"/>
-                <a:cs typeface="Segoe UI"/>
+                <a:latin typeface="Arial"/>
+                <a:cs typeface="Arial"/>
               </a:rPr>
               <a:t>Tình huống liêm chính: xanh, vàng hay đỏ?</a:t>
             </a:r>
@@ -14839,8 +14809,8 @@
                 <a:solidFill>
                   <a:srgbClr val="FFFFFF"/>
                 </a:solidFill>
-                <a:latin typeface="Segoe UI"/>
-                <a:cs typeface="Segoe UI"/>
+                <a:latin typeface="Arial"/>
+                <a:cs typeface="Arial"/>
               </a:rPr>
               <a:t>CÂU HỎI NHANH   |   5 phút</a:t>
             </a:r>
@@ -14877,25 +14847,19 @@
               <a:spcBef>
                 <a:spcPts val="450"/>
               </a:spcBef>
-              <a:buNone/>
-            </a:pPr>
-            <a:r>
-              <a:rPr lang="en-US" sz="1650" b="1" dirty="0">
-                <a:solidFill>
-                  <a:srgbClr val="6C3483"/>
-                </a:solidFill>
-                <a:latin typeface="Segoe UI"/>
-                <a:cs typeface="Segoe UI"/>
-              </a:rPr>
-              <a:t>1.  </a:t>
-            </a:r>
+              <a:buClr>
+                <a:srgbClr val="6C3483"/>
+              </a:buClr>
+              <a:buFont typeface="Arial"/>
+              <a:buChar char="•"/>
+            </a:pPr>
             <a:r>
               <a:rPr lang="en-US" sz="1650" dirty="0">
                 <a:solidFill>
                   <a:srgbClr val="000000"/>
                 </a:solidFill>
-                <a:latin typeface="Segoe UI"/>
-                <a:cs typeface="Segoe UI"/>
+                <a:latin typeface="Arial"/>
+                <a:cs typeface="Arial"/>
               </a:rPr>
               <a:t>Đọc tình huống trên màn hình hoặc trong tài liệu phát tay (6 tình huống)</a:t>
             </a:r>
@@ -14908,25 +14872,19 @@
               <a:spcBef>
                 <a:spcPts val="450"/>
               </a:spcBef>
-              <a:buNone/>
-            </a:pPr>
-            <a:r>
-              <a:rPr lang="en-US" sz="1650" b="1" dirty="0">
-                <a:solidFill>
-                  <a:srgbClr val="6C3483"/>
-                </a:solidFill>
-                <a:latin typeface="Segoe UI"/>
-                <a:cs typeface="Segoe UI"/>
-              </a:rPr>
-              <a:t>2.  </a:t>
-            </a:r>
+              <a:buClr>
+                <a:srgbClr val="6C3483"/>
+              </a:buClr>
+              <a:buFont typeface="Arial"/>
+              <a:buChar char="•"/>
+            </a:pPr>
             <a:r>
               <a:rPr lang="en-US" sz="1650" dirty="0">
                 <a:solidFill>
                   <a:srgbClr val="000000"/>
                 </a:solidFill>
-                <a:latin typeface="Segoe UI"/>
-                <a:cs typeface="Segoe UI"/>
+                <a:latin typeface="Arial"/>
+                <a:cs typeface="Arial"/>
               </a:rPr>
               <a:t>Mỗi nhóm giơ thẻ XANH (ổn), VÀNG (chỉ ổn nếu sửa hoặc khai báo) hoặc ĐỎ (sai phạm)</a:t>
             </a:r>
@@ -14939,25 +14897,19 @@
               <a:spcBef>
                 <a:spcPts val="450"/>
               </a:spcBef>
-              <a:buNone/>
-            </a:pPr>
-            <a:r>
-              <a:rPr lang="en-US" sz="1650" b="1" dirty="0">
-                <a:solidFill>
-                  <a:srgbClr val="6C3483"/>
-                </a:solidFill>
-                <a:latin typeface="Segoe UI"/>
-                <a:cs typeface="Segoe UI"/>
-              </a:rPr>
-              <a:t>3.  </a:t>
-            </a:r>
+              <a:buClr>
+                <a:srgbClr val="6C3483"/>
+              </a:buClr>
+              <a:buFont typeface="Arial"/>
+              <a:buChar char="•"/>
+            </a:pPr>
             <a:r>
               <a:rPr lang="en-US" sz="1650" dirty="0">
                 <a:solidFill>
                   <a:srgbClr val="000000"/>
                 </a:solidFill>
-                <a:latin typeface="Segoe UI"/>
-                <a:cs typeface="Segoe UI"/>
+                <a:latin typeface="Arial"/>
+                <a:cs typeface="Arial"/>
               </a:rPr>
               <a:t>Giảng viên mời một nhóm giải thích màu đã chọn</a:t>
             </a:r>
@@ -14970,25 +14922,19 @@
               <a:spcBef>
                 <a:spcPts val="450"/>
               </a:spcBef>
-              <a:buNone/>
-            </a:pPr>
-            <a:r>
-              <a:rPr lang="en-US" sz="1650" b="1" dirty="0">
-                <a:solidFill>
-                  <a:srgbClr val="6C3483"/>
-                </a:solidFill>
-                <a:latin typeface="Segoe UI"/>
-                <a:cs typeface="Segoe UI"/>
-              </a:rPr>
-              <a:t>4.  </a:t>
-            </a:r>
+              <a:buClr>
+                <a:srgbClr val="6C3483"/>
+              </a:buClr>
+              <a:buFont typeface="Arial"/>
+              <a:buChar char="•"/>
+            </a:pPr>
             <a:r>
               <a:rPr lang="en-US" sz="1650" dirty="0">
                 <a:solidFill>
                   <a:srgbClr val="000000"/>
                 </a:solidFill>
-                <a:latin typeface="Segoe UI"/>
-                <a:cs typeface="Segoe UI"/>
+                <a:latin typeface="Arial"/>
+                <a:cs typeface="Arial"/>
               </a:rPr>
               <a:t>Làm 3 tình huống cùng nhau; phần còn lại trong tài liệu</a:t>
             </a:r>
@@ -15032,8 +14978,8 @@
                 <a:solidFill>
                   <a:srgbClr val="6C3483"/>
                 </a:solidFill>
-                <a:latin typeface="Segoe UI"/>
-                <a:cs typeface="Segoe UI"/>
+                <a:latin typeface="Arial"/>
+                <a:cs typeface="Arial"/>
               </a:rPr>
               <a:t>Ví dụ</a:t>
             </a:r>
@@ -15054,8 +15000,8 @@
                 <a:solidFill>
                   <a:srgbClr val="000000"/>
                 </a:solidFill>
-                <a:latin typeface="Segoe UI"/>
-                <a:cs typeface="Segoe UI"/>
+                <a:latin typeface="Arial"/>
+                <a:cs typeface="Arial"/>
               </a:rPr>
               <a:t>Một đồng nghiệp cho mượn máy siêu âm và đề nghị được đứng tên tác giả.</a:t>
             </a:r>
@@ -15076,8 +15022,8 @@
                 <a:solidFill>
                   <a:srgbClr val="000000"/>
                 </a:solidFill>
-                <a:latin typeface="Segoe UI"/>
-                <a:cs typeface="Segoe UI"/>
+                <a:latin typeface="Arial"/>
+                <a:cs typeface="Arial"/>
               </a:rPr>
               <a:t>Bạn chọn màu gì?</a:t>
             </a:r>
@@ -15123,8 +15069,8 @@
                 <a:solidFill>
                   <a:srgbClr val="6C3483"/>
                 </a:solidFill>
-                <a:latin typeface="Segoe UI"/>
-                <a:cs typeface="Segoe UI"/>
+                <a:latin typeface="Arial"/>
+                <a:cs typeface="Arial"/>
               </a:rPr>
               <a:t>SẢN PHẨM   </a:t>
             </a:r>
@@ -15133,8 +15079,8 @@
                 <a:solidFill>
                   <a:srgbClr val="000000"/>
                 </a:solidFill>
-                <a:latin typeface="Segoe UI"/>
-                <a:cs typeface="Segoe UI"/>
+                <a:latin typeface="Arial"/>
+                <a:cs typeface="Arial"/>
               </a:rPr>
               <a:t>Mỗi học viên gọi tên được FFP, tác giả 'quà tặng'/'ma' và quy tắc dùng AI</a:t>
             </a:r>
@@ -15171,7 +15117,7 @@
                     <a:lumMod val="50000"/>
                   </a:schemeClr>
                 </a:solidFill>
-                <a:latin typeface="Verdana"/>
+                <a:latin typeface="Arial"/>
               </a:rPr>
               <a:t>Neudata | #ClearDataClearImpact</a:t>
             </a:r>
@@ -15301,8 +15247,8 @@
                 <a:solidFill>
                   <a:srgbClr val="0D7377"/>
                 </a:solidFill>
-                <a:latin typeface="Segoe UI"/>
-                <a:cs typeface="Segoe UI"/>
+                <a:latin typeface="Arial"/>
+                <a:cs typeface="Arial"/>
               </a:rPr>
               <a:t>Xây dựng đề cương 7: đạo đức, đăng ký, khả thi, kế hoạch công bố</a:t>
             </a:r>
@@ -15372,8 +15318,8 @@
                 <a:solidFill>
                   <a:srgbClr val="FFFFFF"/>
                 </a:solidFill>
-                <a:latin typeface="Segoe UI"/>
-                <a:cs typeface="Segoe UI"/>
+                <a:latin typeface="Arial"/>
+                <a:cs typeface="Arial"/>
               </a:rPr>
               <a:t>XÂY DỰNG ĐỀ CƯƠNG   |   15 phút</a:t>
             </a:r>
@@ -15410,25 +15356,19 @@
               <a:spcBef>
                 <a:spcPts val="450"/>
               </a:spcBef>
-              <a:buNone/>
-            </a:pPr>
-            <a:r>
-              <a:rPr lang="en-US" sz="1650" b="1" dirty="0">
-                <a:solidFill>
-                  <a:srgbClr val="055F56"/>
-                </a:solidFill>
-                <a:latin typeface="Segoe UI"/>
-                <a:cs typeface="Segoe UI"/>
-              </a:rPr>
-              <a:t>1.  </a:t>
-            </a:r>
+              <a:buClr>
+                <a:srgbClr val="055F56"/>
+              </a:buClr>
+              <a:buFont typeface="Arial"/>
+              <a:buChar char="•"/>
+            </a:pPr>
             <a:r>
               <a:rPr lang="en-US" sz="1650" dirty="0">
                 <a:solidFill>
                   <a:srgbClr val="000000"/>
                 </a:solidFill>
-                <a:latin typeface="Segoe UI"/>
-                <a:cs typeface="Segoe UI"/>
+                <a:latin typeface="Arial"/>
+                <a:cs typeface="Arial"/>
               </a:rPr>
               <a:t>Ai chấp thuận trong nghiên cứu của bạn? Dùng sơ đồ ICU (5 phút)</a:t>
             </a:r>
@@ -15441,25 +15381,19 @@
               <a:spcBef>
                 <a:spcPts val="450"/>
               </a:spcBef>
-              <a:buNone/>
-            </a:pPr>
-            <a:r>
-              <a:rPr lang="en-US" sz="1650" b="1" dirty="0">
-                <a:solidFill>
-                  <a:srgbClr val="055F56"/>
-                </a:solidFill>
-                <a:latin typeface="Segoe UI"/>
-                <a:cs typeface="Segoe UI"/>
-              </a:rPr>
-              <a:t>2.  </a:t>
-            </a:r>
+              <a:buClr>
+                <a:srgbClr val="055F56"/>
+              </a:buClr>
+              <a:buFont typeface="Arial"/>
+              <a:buChar char="•"/>
+            </a:pPr>
             <a:r>
               <a:rPr lang="en-US" sz="1650" dirty="0">
                 <a:solidFill>
                   <a:srgbClr val="000000"/>
                 </a:solidFill>
-                <a:latin typeface="Segoe UI"/>
-                <a:cs typeface="Segoe UI"/>
+                <a:latin typeface="Arial"/>
+                <a:cs typeface="Arial"/>
               </a:rPr>
               <a:t>Đăng ký: có cần? ở đâu? Tệp khóa để ở đâu?</a:t>
             </a:r>
@@ -15472,25 +15406,19 @@
               <a:spcBef>
                 <a:spcPts val="450"/>
               </a:spcBef>
-              <a:buNone/>
-            </a:pPr>
-            <a:r>
-              <a:rPr lang="en-US" sz="1650" b="1" dirty="0">
-                <a:solidFill>
-                  <a:srgbClr val="055F56"/>
-                </a:solidFill>
-                <a:latin typeface="Segoe UI"/>
-                <a:cs typeface="Segoe UI"/>
-              </a:rPr>
-              <a:t>3.  </a:t>
-            </a:r>
+              <a:buClr>
+                <a:srgbClr val="055F56"/>
+              </a:buClr>
+              <a:buFont typeface="Arial"/>
+              <a:buChar char="•"/>
+            </a:pPr>
             <a:r>
               <a:rPr lang="en-US" sz="1650" dirty="0">
                 <a:solidFill>
                   <a:srgbClr val="000000"/>
                 </a:solidFill>
-                <a:latin typeface="Segoe UI"/>
-                <a:cs typeface="Segoe UI"/>
+                <a:latin typeface="Arial"/>
+                <a:cs typeface="Arial"/>
               </a:rPr>
               <a:t>Khả thi: rủi ro lớn nhất và một cách khắc phục (3 phút)</a:t>
             </a:r>
@@ -15503,25 +15431,19 @@
               <a:spcBef>
                 <a:spcPts val="450"/>
               </a:spcBef>
-              <a:buNone/>
-            </a:pPr>
-            <a:r>
-              <a:rPr lang="en-US" sz="1650" b="1" dirty="0">
-                <a:solidFill>
-                  <a:srgbClr val="055F56"/>
-                </a:solidFill>
-                <a:latin typeface="Segoe UI"/>
-                <a:cs typeface="Segoe UI"/>
-              </a:rPr>
-              <a:t>4.  </a:t>
-            </a:r>
+              <a:buClr>
+                <a:srgbClr val="055F56"/>
+              </a:buClr>
+              <a:buFont typeface="Arial"/>
+              <a:buChar char="•"/>
+            </a:pPr>
             <a:r>
               <a:rPr lang="en-US" sz="1650" dirty="0">
                 <a:solidFill>
                   <a:srgbClr val="000000"/>
                 </a:solidFill>
-                <a:latin typeface="Segoe UI"/>
-                <a:cs typeface="Segoe UI"/>
+                <a:latin typeface="Arial"/>
+                <a:cs typeface="Arial"/>
               </a:rPr>
               <a:t>Kế hoạch công bố: tạp chí, hướng dẫn, tác giả + CRediT (5 phút)</a:t>
             </a:r>
@@ -15534,25 +15456,19 @@
               <a:spcBef>
                 <a:spcPts val="450"/>
               </a:spcBef>
-              <a:buNone/>
-            </a:pPr>
-            <a:r>
-              <a:rPr lang="en-US" sz="1650" b="1" dirty="0">
-                <a:solidFill>
-                  <a:srgbClr val="055F56"/>
-                </a:solidFill>
-                <a:latin typeface="Segoe UI"/>
-                <a:cs typeface="Segoe UI"/>
-              </a:rPr>
-              <a:t>5.  </a:t>
-            </a:r>
+              <a:buClr>
+                <a:srgbClr val="055F56"/>
+              </a:buClr>
+              <a:buFont typeface="Arial"/>
+              <a:buChar char="•"/>
+            </a:pPr>
             <a:r>
               <a:rPr lang="en-US" sz="1650" dirty="0">
                 <a:solidFill>
                   <a:srgbClr val="000000"/>
                 </a:solidFill>
-                <a:latin typeface="Segoe UI"/>
-                <a:cs typeface="Segoe UI"/>
+                <a:latin typeface="Arial"/>
+                <a:cs typeface="Arial"/>
               </a:rPr>
               <a:t>Tiêu đề tạm từ PICO (2 phút)</a:t>
             </a:r>
@@ -15596,8 +15512,8 @@
                 <a:solidFill>
                   <a:srgbClr val="055F56"/>
                 </a:solidFill>
-                <a:latin typeface="Segoe UI"/>
-                <a:cs typeface="Segoe UI"/>
+                <a:latin typeface="Arial"/>
+                <a:cs typeface="Arial"/>
               </a:rPr>
               <a:t>Phiếu bài tập</a:t>
             </a:r>
@@ -15618,8 +15534,8 @@
                 <a:solidFill>
                   <a:srgbClr val="000000"/>
                 </a:solidFill>
-                <a:latin typeface="Segoe UI"/>
-                <a:cs typeface="Segoe UI"/>
+                <a:latin typeface="Arial"/>
+                <a:cs typeface="Arial"/>
               </a:rPr>
               <a:t>Practicals/s7_exercises.md, Phần B</a:t>
             </a:r>
@@ -15640,8 +15556,8 @@
                 <a:solidFill>
                   <a:srgbClr val="000000"/>
                 </a:solidFill>
-                <a:latin typeface="Segoe UI"/>
-                <a:cs typeface="Segoe UI"/>
+                <a:latin typeface="Arial"/>
+                <a:cs typeface="Arial"/>
               </a:rPr>
               <a:t>Slide 5 và 6 cho thứ Bảy tuần sau</a:t>
             </a:r>
@@ -15662,8 +15578,8 @@
                 <a:solidFill>
                   <a:srgbClr val="000000"/>
                 </a:solidFill>
-                <a:latin typeface="Segoe UI"/>
-                <a:cs typeface="Segoe UI"/>
+                <a:latin typeface="Arial"/>
+                <a:cs typeface="Arial"/>
               </a:rPr>
               <a:t>Hoàn thiện ở nhà trong tuần</a:t>
             </a:r>
@@ -15709,8 +15625,8 @@
                 <a:solidFill>
                   <a:srgbClr val="055F56"/>
                 </a:solidFill>
-                <a:latin typeface="Segoe UI"/>
-                <a:cs typeface="Segoe UI"/>
+                <a:latin typeface="Arial"/>
+                <a:cs typeface="Arial"/>
               </a:rPr>
               <a:t>SẢN PHẨM   </a:t>
             </a:r>
@@ -15719,8 +15635,8 @@
                 <a:solidFill>
                   <a:srgbClr val="000000"/>
                 </a:solidFill>
-                <a:latin typeface="Segoe UI"/>
-                <a:cs typeface="Segoe UI"/>
+                <a:latin typeface="Arial"/>
+                <a:cs typeface="Arial"/>
               </a:rPr>
               <a:t>Bản nháp Đề cương Phần 4; dàn ý slide 5-6 của bài trình bày</a:t>
             </a:r>
@@ -15757,7 +15673,7 @@
                     <a:lumMod val="50000"/>
                   </a:schemeClr>
                 </a:solidFill>
-                <a:latin typeface="Verdana"/>
+                <a:latin typeface="Arial"/>
               </a:rPr>
               <a:t>Neudata | #ClearDataClearImpact</a:t>
             </a:r>
@@ -15887,8 +15803,8 @@
                 <a:solidFill>
                   <a:srgbClr val="0D7377"/>
                 </a:solidFill>
-                <a:latin typeface="Segoe UI"/>
-                <a:cs typeface="Segoe UI"/>
+                <a:latin typeface="Arial"/>
+                <a:cs typeface="Arial"/>
               </a:rPr>
               <a:t>Giải lao</a:t>
             </a:r>
@@ -15958,8 +15874,8 @@
                 <a:solidFill>
                   <a:srgbClr val="FFFFFF"/>
                 </a:solidFill>
-                <a:latin typeface="Segoe UI"/>
-                <a:cs typeface="Segoe UI"/>
+                <a:latin typeface="Arial"/>
+                <a:cs typeface="Arial"/>
               </a:rPr>
               <a:t>GIẢI LAO   |   15 phút</a:t>
             </a:r>
@@ -15996,25 +15912,19 @@
               <a:spcBef>
                 <a:spcPts val="450"/>
               </a:spcBef>
-              <a:buNone/>
-            </a:pPr>
-            <a:r>
-              <a:rPr lang="en-US" sz="1650" b="1" dirty="0">
-                <a:solidFill>
-                  <a:srgbClr val="8A99A3"/>
-                </a:solidFill>
-                <a:latin typeface="Segoe UI"/>
-                <a:cs typeface="Segoe UI"/>
-              </a:rPr>
-              <a:t>1.  </a:t>
-            </a:r>
+              <a:buClr>
+                <a:srgbClr val="8A99A3"/>
+              </a:buClr>
+              <a:buFont typeface="Arial"/>
+              <a:buChar char="•"/>
+            </a:pPr>
             <a:r>
               <a:rPr lang="en-US" sz="1650" dirty="0">
                 <a:solidFill>
                   <a:srgbClr val="000000"/>
                 </a:solidFill>
-                <a:latin typeface="Segoe UI"/>
-                <a:cs typeface="Segoe UI"/>
+                <a:latin typeface="Arial"/>
+                <a:cs typeface="Arial"/>
               </a:rPr>
               <a:t>Nhận gói kết quả FLUID-ICU của nhóm</a:t>
             </a:r>
@@ -16027,25 +15937,19 @@
               <a:spcBef>
                 <a:spcPts val="450"/>
               </a:spcBef>
-              <a:buNone/>
-            </a:pPr>
-            <a:r>
-              <a:rPr lang="en-US" sz="1650" b="1" dirty="0">
-                <a:solidFill>
-                  <a:srgbClr val="8A99A3"/>
-                </a:solidFill>
-                <a:latin typeface="Segoe UI"/>
-                <a:cs typeface="Segoe UI"/>
-              </a:rPr>
-              <a:t>2.  </a:t>
-            </a:r>
+              <a:buClr>
+                <a:srgbClr val="8A99A3"/>
+              </a:buClr>
+              <a:buFont typeface="Arial"/>
+              <a:buChar char="•"/>
+            </a:pPr>
             <a:r>
               <a:rPr lang="en-US" sz="1650" dirty="0">
                 <a:solidFill>
                   <a:srgbClr val="000000"/>
                 </a:solidFill>
-                <a:latin typeface="Segoe UI"/>
-                <a:cs typeface="Segoe UI"/>
+                <a:latin typeface="Arial"/>
+                <a:cs typeface="Arial"/>
               </a:rPr>
               <a:t>Mở mẫu bản thảo (hoặc dùng giấy)</a:t>
             </a:r>
@@ -16058,25 +15962,19 @@
               <a:spcBef>
                 <a:spcPts val="450"/>
               </a:spcBef>
-              <a:buNone/>
-            </a:pPr>
-            <a:r>
-              <a:rPr lang="en-US" sz="1650" b="1" dirty="0">
-                <a:solidFill>
-                  <a:srgbClr val="8A99A3"/>
-                </a:solidFill>
-                <a:latin typeface="Segoe UI"/>
-                <a:cs typeface="Segoe UI"/>
-              </a:rPr>
-              <a:t>3.  </a:t>
-            </a:r>
+              <a:buClr>
+                <a:srgbClr val="8A99A3"/>
+              </a:buClr>
+              <a:buFont typeface="Arial"/>
+              <a:buChar char="•"/>
+            </a:pPr>
             <a:r>
               <a:rPr lang="en-US" sz="1650" dirty="0">
                 <a:solidFill>
                   <a:srgbClr val="000000"/>
                 </a:solidFill>
-                <a:latin typeface="Segoe UI"/>
-                <a:cs typeface="Segoe UI"/>
+                <a:latin typeface="Arial"/>
+                <a:cs typeface="Arial"/>
               </a:rPr>
               <a:t>Phân công ai viết Phương pháp, ai viết Kết quả</a:t>
             </a:r>
@@ -16089,25 +15987,19 @@
               <a:spcBef>
                 <a:spcPts val="450"/>
               </a:spcBef>
-              <a:buNone/>
-            </a:pPr>
-            <a:r>
-              <a:rPr lang="en-US" sz="1650" b="1" dirty="0">
-                <a:solidFill>
-                  <a:srgbClr val="8A99A3"/>
-                </a:solidFill>
-                <a:latin typeface="Segoe UI"/>
-                <a:cs typeface="Segoe UI"/>
-              </a:rPr>
-              <a:t>4.  </a:t>
-            </a:r>
+              <a:buClr>
+                <a:srgbClr val="8A99A3"/>
+              </a:buClr>
+              <a:buFont typeface="Arial"/>
+              <a:buChar char="•"/>
+            </a:pPr>
             <a:r>
               <a:rPr lang="en-US" sz="1650" dirty="0">
                 <a:solidFill>
                   <a:srgbClr val="000000"/>
                 </a:solidFill>
-                <a:latin typeface="Segoe UI"/>
-                <a:cs typeface="Segoe UI"/>
+                <a:latin typeface="Arial"/>
+                <a:cs typeface="Arial"/>
               </a:rPr>
               <a:t>Quay lại đúng 1:30</a:t>
             </a:r>
@@ -16151,8 +16043,8 @@
                 <a:solidFill>
                   <a:srgbClr val="8A99A3"/>
                 </a:solidFill>
-                <a:latin typeface="Segoe UI"/>
-                <a:cs typeface="Segoe UI"/>
+                <a:latin typeface="Arial"/>
+                <a:cs typeface="Arial"/>
               </a:rPr>
               <a:t>Sau giải lao</a:t>
             </a:r>
@@ -16173,8 +16065,8 @@
                 <a:solidFill>
                   <a:srgbClr val="000000"/>
                 </a:solidFill>
-                <a:latin typeface="Segoe UI"/>
-                <a:cs typeface="Segoe UI"/>
+                <a:latin typeface="Arial"/>
+                <a:cs typeface="Arial"/>
               </a:rPr>
               <a:t>7.3 Viết bài báo (35 phút)</a:t>
             </a:r>
@@ -16195,8 +16087,8 @@
                 <a:solidFill>
                   <a:srgbClr val="000000"/>
                 </a:solidFill>
-                <a:latin typeface="Segoe UI"/>
-                <a:cs typeface="Segoe UI"/>
+                <a:latin typeface="Arial"/>
+                <a:cs typeface="Arial"/>
               </a:rPr>
               <a:t>Thực hành bản thảo 1 (50 phút)</a:t>
             </a:r>
@@ -16233,7 +16125,7 @@
                     <a:lumMod val="50000"/>
                   </a:schemeClr>
                 </a:solidFill>
-                <a:latin typeface="Verdana"/>
+                <a:latin typeface="Arial"/>
               </a:rPr>
               <a:t>Neudata | #ClearDataClearImpact</a:t>
             </a:r>
@@ -16363,8 +16255,8 @@
                 <a:solidFill>
                   <a:srgbClr val="0D7377"/>
                 </a:solidFill>
-                <a:latin typeface="Segoe UI"/>
-                <a:cs typeface="Segoe UI"/>
+                <a:latin typeface="Arial"/>
+                <a:cs typeface="Arial"/>
               </a:rPr>
               <a:t>7.3  |  35 phút</a:t>
             </a:r>
@@ -16433,8 +16325,8 @@
                 <a:solidFill>
                   <a:srgbClr val="0D7377"/>
                 </a:solidFill>
-                <a:latin typeface="Segoe UI"/>
-                <a:cs typeface="Segoe UI"/>
+                <a:latin typeface="Arial"/>
+                <a:cs typeface="Arial"/>
               </a:rPr>
               <a:t>Viết bài báo (I): Phương pháp và Kết quả</a:t>
             </a:r>
@@ -16451,8 +16343,8 @@
                 <a:solidFill>
                   <a:srgbClr val="595959"/>
                 </a:solidFill>
-                <a:latin typeface="Segoe UI"/>
-                <a:cs typeface="Segoe UI"/>
+                <a:latin typeface="Arial"/>
+                <a:cs typeface="Arial"/>
               </a:rPr>
               <a:t>Viết những gì đã làm và đã thấy, không hơn</a:t>
             </a:r>
@@ -16489,7 +16381,7 @@
                     <a:lumMod val="50000"/>
                   </a:schemeClr>
                 </a:solidFill>
-                <a:latin typeface="Verdana"/>
+                <a:latin typeface="Arial"/>
               </a:rPr>
               <a:t>Neudata | #ClearDataClearImpact</a:t>
             </a:r>
@@ -16619,8 +16511,8 @@
                 <a:solidFill>
                   <a:srgbClr val="0D7377"/>
                 </a:solidFill>
-                <a:latin typeface="Segoe UI"/>
-                <a:cs typeface="Segoe UI"/>
+                <a:latin typeface="Arial"/>
+                <a:cs typeface="Arial"/>
               </a:rPr>
               <a:t>Viết theo thứ tự khác với thứ tự người đọc</a:t>
             </a:r>
@@ -16716,8 +16608,8 @@
                 <a:solidFill>
                   <a:srgbClr val="FFFFFF"/>
                 </a:solidFill>
-                <a:latin typeface="Segoe UI"/>
-                <a:cs typeface="Segoe UI"/>
+                <a:latin typeface="Arial"/>
+                <a:cs typeface="Arial"/>
               </a:rPr>
               <a:t>THÔNG ĐIỆP CHÍNH   </a:t>
             </a:r>
@@ -16726,8 +16618,8 @@
                 <a:solidFill>
                   <a:srgbClr val="FFFFFF"/>
                 </a:solidFill>
-                <a:latin typeface="Segoe UI"/>
-                <a:cs typeface="Segoe UI"/>
+                <a:latin typeface="Arial"/>
+                <a:cs typeface="Arial"/>
               </a:rPr>
               <a:t>Bắt đầu từ các bảng; viết tiêu đề sau cùng.</a:t>
             </a:r>
@@ -16764,7 +16656,7 @@
                     <a:lumMod val="50000"/>
                   </a:schemeClr>
                 </a:solidFill>
-                <a:latin typeface="Verdana"/>
+                <a:latin typeface="Arial"/>
               </a:rPr>
               <a:t>Neudata | #ClearDataClearImpact</a:t>
             </a:r>
@@ -16894,8 +16786,8 @@
                 <a:solidFill>
                   <a:srgbClr val="0D7377"/>
                 </a:solidFill>
-                <a:latin typeface="Segoe UI"/>
-                <a:cs typeface="Segoe UI"/>
+                <a:latin typeface="Arial"/>
+                <a:cs typeface="Arial"/>
               </a:rPr>
               <a:t>Phương pháp: đủ chi tiết để người khác làm lại</a:t>
             </a:r>
@@ -16961,8 +16853,8 @@
                 <a:solidFill>
                   <a:srgbClr val="595959"/>
                 </a:solidFill>
-                <a:latin typeface="Segoe UI"/>
-                <a:cs typeface="Segoe UI"/>
+                <a:latin typeface="Arial"/>
+                <a:cs typeface="Arial"/>
               </a:rPr>
               <a:t>Nếu đồng nghiệp không làm lại được nghiên cứu từ phần Phương pháp, hãy thêm chi tiết.</a:t>
             </a:r>
@@ -17004,8 +16896,8 @@
                 <a:solidFill>
                   <a:srgbClr val="FFFFFF"/>
                 </a:solidFill>
-                <a:latin typeface="Segoe UI"/>
-                <a:cs typeface="Segoe UI"/>
+                <a:latin typeface="Arial"/>
+                <a:cs typeface="Arial"/>
               </a:rPr>
               <a:t>Ai và ở đâu</a:t>
             </a:r>
@@ -17053,8 +16945,8 @@
                 <a:solidFill>
                   <a:srgbClr val="000000"/>
                 </a:solidFill>
-                <a:latin typeface="Segoe UI"/>
-                <a:cs typeface="Segoe UI"/>
+                <a:latin typeface="Arial"/>
+                <a:cs typeface="Arial"/>
               </a:rPr>
               <a:t>Thiết kế, bối cảnh, thời gian</a:t>
             </a:r>
@@ -17074,8 +16966,8 @@
                 <a:solidFill>
                   <a:srgbClr val="000000"/>
                 </a:solidFill>
-                <a:latin typeface="Segoe UI"/>
-                <a:cs typeface="Segoe UI"/>
+                <a:latin typeface="Arial"/>
+                <a:cs typeface="Arial"/>
               </a:rPr>
               <a:t>Tiêu chuẩn chọn</a:t>
             </a:r>
@@ -17095,8 +16987,8 @@
                 <a:solidFill>
                   <a:srgbClr val="000000"/>
                 </a:solidFill>
-                <a:latin typeface="Segoe UI"/>
-                <a:cs typeface="Segoe UI"/>
+                <a:latin typeface="Arial"/>
+                <a:cs typeface="Arial"/>
               </a:rPr>
               <a:t>Số phê duyệt, chấp thuận</a:t>
             </a:r>
@@ -17116,8 +17008,8 @@
                 <a:solidFill>
                   <a:srgbClr val="000000"/>
                 </a:solidFill>
-                <a:latin typeface="Segoe UI"/>
-                <a:cs typeface="Segoe UI"/>
+                <a:latin typeface="Arial"/>
+                <a:cs typeface="Arial"/>
               </a:rPr>
               <a:t>Số đăng ký</a:t>
             </a:r>
@@ -17159,8 +17051,8 @@
                 <a:solidFill>
                   <a:srgbClr val="FFFFFF"/>
                 </a:solidFill>
-                <a:latin typeface="Segoe UI"/>
-                <a:cs typeface="Segoe UI"/>
+                <a:latin typeface="Arial"/>
+                <a:cs typeface="Arial"/>
               </a:rPr>
               <a:t>Đã làm gì</a:t>
             </a:r>
@@ -17208,8 +17100,8 @@
                 <a:solidFill>
                   <a:srgbClr val="000000"/>
                 </a:solidFill>
-                <a:latin typeface="Segoe UI"/>
-                <a:cs typeface="Segoe UI"/>
+                <a:latin typeface="Arial"/>
+                <a:cs typeface="Arial"/>
               </a:rPr>
               <a:t>Mô tả đầy đủ can thiệp</a:t>
             </a:r>
@@ -17229,8 +17121,8 @@
                 <a:solidFill>
                   <a:srgbClr val="000000"/>
                 </a:solidFill>
-                <a:latin typeface="Segoe UI"/>
-                <a:cs typeface="Segoe UI"/>
+                <a:latin typeface="Arial"/>
+                <a:cs typeface="Arial"/>
               </a:rPr>
               <a:t>Định nghĩa các biến</a:t>
             </a:r>
@@ -17250,8 +17142,8 @@
                 <a:solidFill>
                   <a:srgbClr val="000000"/>
                 </a:solidFill>
-                <a:latin typeface="Segoe UI"/>
-                <a:cs typeface="Segoe UI"/>
+                <a:latin typeface="Arial"/>
+                <a:cs typeface="Arial"/>
               </a:rPr>
               <a:t>B1: tập huấn, dược sĩ kiểm tra hằng ngày</a:t>
             </a:r>
@@ -17293,8 +17185,8 @@
                 <a:solidFill>
                   <a:srgbClr val="FFFFFF"/>
                 </a:solidFill>
-                <a:latin typeface="Segoe UI"/>
-                <a:cs typeface="Segoe UI"/>
+                <a:latin typeface="Arial"/>
+                <a:cs typeface="Arial"/>
               </a:rPr>
               <a:t>Kết cục và cỡ mẫu</a:t>
             </a:r>
@@ -17342,8 +17234,8 @@
                 <a:solidFill>
                   <a:srgbClr val="000000"/>
                 </a:solidFill>
-                <a:latin typeface="Segoe UI"/>
-                <a:cs typeface="Segoe UI"/>
+                <a:latin typeface="Arial"/>
+                <a:cs typeface="Arial"/>
               </a:rPr>
               <a:t>MỘT kết cục chính: đo thế nào, khi nào</a:t>
             </a:r>
@@ -17363,8 +17255,8 @@
                 <a:solidFill>
                   <a:srgbClr val="000000"/>
                 </a:solidFill>
-                <a:latin typeface="Segoe UI"/>
-                <a:cs typeface="Segoe UI"/>
+                <a:latin typeface="Arial"/>
+                <a:cs typeface="Arial"/>
               </a:rPr>
               <a:t>Cỡ mẫu: giả định + nguồn</a:t>
             </a:r>
@@ -17384,8 +17276,8 @@
                 <a:solidFill>
                   <a:srgbClr val="000000"/>
                 </a:solidFill>
-                <a:latin typeface="Segoe UI"/>
-                <a:cs typeface="Segoe UI"/>
+                <a:latin typeface="Arial"/>
+                <a:cs typeface="Arial"/>
               </a:rPr>
               <a:t>B2: không nêu cỡ mẫu</a:t>
             </a:r>
@@ -17427,8 +17319,8 @@
                 <a:solidFill>
                   <a:srgbClr val="FFFFFF"/>
                 </a:solidFill>
-                <a:latin typeface="Segoe UI"/>
-                <a:cs typeface="Segoe UI"/>
+                <a:latin typeface="Arial"/>
+                <a:cs typeface="Arial"/>
               </a:rPr>
               <a:t>Phân tích thống kê</a:t>
             </a:r>
@@ -17476,8 +17368,8 @@
                 <a:solidFill>
                   <a:srgbClr val="000000"/>
                 </a:solidFill>
-                <a:latin typeface="Segoe UI"/>
-                <a:cs typeface="Segoe UI"/>
+                <a:latin typeface="Arial"/>
+                <a:cs typeface="Arial"/>
               </a:rPr>
               <a:t>Mỗi so sánh có một kiểm định</a:t>
             </a:r>
@@ -17497,8 +17389,8 @@
                 <a:solidFill>
                   <a:srgbClr val="000000"/>
                 </a:solidFill>
-                <a:latin typeface="Segoe UI"/>
-                <a:cs typeface="Segoe UI"/>
+                <a:latin typeface="Arial"/>
+                <a:cs typeface="Arial"/>
               </a:rPr>
               <a:t>Ước lượng khớp với kiểm định</a:t>
             </a:r>
@@ -17518,8 +17410,8 @@
                 <a:solidFill>
                   <a:srgbClr val="000000"/>
                 </a:solidFill>
-                <a:latin typeface="Segoe UI"/>
-                <a:cs typeface="Segoe UI"/>
+                <a:latin typeface="Arial"/>
+                <a:cs typeface="Arial"/>
               </a:rPr>
               <a:t>Dữ liệu thiếu, so sánh bội</a:t>
             </a:r>
@@ -17539,8 +17431,8 @@
                 <a:solidFill>
                   <a:srgbClr val="000000"/>
                 </a:solidFill>
-                <a:latin typeface="Segoe UI"/>
-                <a:cs typeface="Segoe UI"/>
+                <a:latin typeface="Arial"/>
+                <a:cs typeface="Arial"/>
               </a:rPr>
               <a:t>Phần mềm và phiên bản</a:t>
             </a:r>
@@ -17584,8 +17476,8 @@
                 <a:solidFill>
                   <a:srgbClr val="FFFFFF"/>
                 </a:solidFill>
-                <a:latin typeface="Segoe UI"/>
-                <a:cs typeface="Segoe UI"/>
+                <a:latin typeface="Arial"/>
+                <a:cs typeface="Arial"/>
               </a:rPr>
               <a:t>THÔNG ĐIỆP CHÍNH   </a:t>
             </a:r>
@@ -17594,8 +17486,8 @@
                 <a:solidFill>
                   <a:srgbClr val="FFFFFF"/>
                 </a:solidFill>
-                <a:latin typeface="Segoe UI"/>
-                <a:cs typeface="Segoe UI"/>
+                <a:latin typeface="Arial"/>
+                <a:cs typeface="Arial"/>
               </a:rPr>
               <a:t>Đoạn phân tích thống kê nêu phương pháp cho mọi so sánh được báo cáo.</a:t>
             </a:r>
@@ -17632,7 +17524,7 @@
                     <a:lumMod val="50000"/>
                   </a:schemeClr>
                 </a:solidFill>
-                <a:latin typeface="Verdana"/>
+                <a:latin typeface="Arial"/>
               </a:rPr>
               <a:t>Neudata | #ClearDataClearImpact</a:t>
             </a:r>
@@ -17762,8 +17654,8 @@
                 <a:solidFill>
                   <a:srgbClr val="0D7377"/>
                 </a:solidFill>
-                <a:latin typeface="Segoe UI"/>
-                <a:cs typeface="Segoe UI"/>
+                <a:latin typeface="Arial"/>
+                <a:cs typeface="Arial"/>
               </a:rPr>
               <a:t>Ví dụ mẫu: Phương pháp cho FLUID-ICU câu hỏi 1</a:t>
             </a:r>
@@ -17859,8 +17751,8 @@
                 <a:solidFill>
                   <a:srgbClr val="FFFFFF"/>
                 </a:solidFill>
-                <a:latin typeface="Segoe UI"/>
-                <a:cs typeface="Segoe UI"/>
+                <a:latin typeface="Arial"/>
+                <a:cs typeface="Arial"/>
               </a:rPr>
               <a:t>THÔNG ĐIỆP CHÍNH   </a:t>
             </a:r>
@@ -17869,8 +17761,8 @@
                 <a:solidFill>
                   <a:srgbClr val="FFFFFF"/>
                 </a:solidFill>
-                <a:latin typeface="Segoe UI"/>
-                <a:cs typeface="Segoe UI"/>
+                <a:latin typeface="Arial"/>
+                <a:cs typeface="Arial"/>
               </a:rPr>
               <a:t>Mỗi mục STROBE một câu, và nói rõ dữ liệu là mô phỏng.</a:t>
             </a:r>
@@ -17907,7 +17799,7 @@
                     <a:lumMod val="50000"/>
                   </a:schemeClr>
                 </a:solidFill>
-                <a:latin typeface="Verdana"/>
+                <a:latin typeface="Arial"/>
               </a:rPr>
               <a:t>Neudata | #ClearDataClearImpact</a:t>
             </a:r>
@@ -18037,8 +17929,8 @@
                 <a:solidFill>
                   <a:srgbClr val="0D7377"/>
                 </a:solidFill>
-                <a:latin typeface="Segoe UI"/>
-                <a:cs typeface="Segoe UI"/>
+                <a:latin typeface="Arial"/>
+                <a:cs typeface="Arial"/>
               </a:rPr>
               <a:t>Hôm nay: hoàn thành đề cương, bắt đầu bài báo</a:t>
             </a:r>
@@ -18134,8 +18026,8 @@
                 <a:solidFill>
                   <a:srgbClr val="FFFFFF"/>
                 </a:solidFill>
-                <a:latin typeface="Segoe UI"/>
-                <a:cs typeface="Segoe UI"/>
+                <a:latin typeface="Arial"/>
+                <a:cs typeface="Arial"/>
               </a:rPr>
               <a:t>THÔNG ĐIỆP CHÍNH   </a:t>
             </a:r>
@@ -18144,8 +18036,8 @@
                 <a:solidFill>
                   <a:srgbClr val="FFFFFF"/>
                 </a:solidFill>
-                <a:latin typeface="Segoe UI"/>
-                <a:cs typeface="Segoe UI"/>
+                <a:latin typeface="Arial"/>
+                <a:cs typeface="Arial"/>
               </a:rPr>
               <a:t>Trước giải lao: Đề cương Phần 4. Sau giải lao: Phương pháp và Kết quả.</a:t>
             </a:r>
@@ -18182,7 +18074,7 @@
                     <a:lumMod val="50000"/>
                   </a:schemeClr>
                 </a:solidFill>
-                <a:latin typeface="Verdana"/>
+                <a:latin typeface="Arial"/>
               </a:rPr>
               <a:t>Neudata | #ClearDataClearImpact</a:t>
             </a:r>
@@ -18312,8 +18204,8 @@
                 <a:solidFill>
                   <a:srgbClr val="0D7377"/>
                 </a:solidFill>
-                <a:latin typeface="Segoe UI"/>
-                <a:cs typeface="Segoe UI"/>
+                <a:latin typeface="Arial"/>
+                <a:cs typeface="Arial"/>
               </a:rPr>
               <a:t>Ví dụ mẫu: đoạn phân tích thống kê</a:t>
             </a:r>
@@ -18409,8 +18301,8 @@
                 <a:solidFill>
                   <a:srgbClr val="FFFFFF"/>
                 </a:solidFill>
-                <a:latin typeface="Segoe UI"/>
-                <a:cs typeface="Segoe UI"/>
+                <a:latin typeface="Arial"/>
+                <a:cs typeface="Arial"/>
               </a:rPr>
               <a:t>THÔNG ĐIỆP CHÍNH   </a:t>
             </a:r>
@@ -18419,8 +18311,8 @@
                 <a:solidFill>
                   <a:srgbClr val="FFFFFF"/>
                 </a:solidFill>
-                <a:latin typeface="Segoe UI"/>
-                <a:cs typeface="Segoe UI"/>
+                <a:latin typeface="Arial"/>
+                <a:cs typeface="Arial"/>
               </a:rPr>
               <a:t>Nêu phương pháp cho mọi so sánh được báo cáo, chọn trước khi xem dữ liệu.</a:t>
             </a:r>
@@ -18457,7 +18349,7 @@
                     <a:lumMod val="50000"/>
                   </a:schemeClr>
                 </a:solidFill>
-                <a:latin typeface="Verdana"/>
+                <a:latin typeface="Arial"/>
               </a:rPr>
               <a:t>Neudata | #ClearDataClearImpact</a:t>
             </a:r>
@@ -18587,8 +18479,8 @@
                 <a:solidFill>
                   <a:srgbClr val="0D7377"/>
                 </a:solidFill>
-                <a:latin typeface="Segoe UI"/>
-                <a:cs typeface="Segoe UI"/>
+                <a:latin typeface="Arial"/>
+                <a:cs typeface="Arial"/>
               </a:rPr>
               <a:t>Kết quả: báo cáo, không bình luận</a:t>
             </a:r>
@@ -18684,8 +18576,8 @@
                 <a:solidFill>
                   <a:srgbClr val="FFFFFF"/>
                 </a:solidFill>
-                <a:latin typeface="Segoe UI"/>
-                <a:cs typeface="Segoe UI"/>
+                <a:latin typeface="Arial"/>
+                <a:cs typeface="Arial"/>
               </a:rPr>
               <a:t>THÔNG ĐIỆP CHÍNH   </a:t>
             </a:r>
@@ -18694,8 +18586,8 @@
                 <a:solidFill>
                   <a:srgbClr val="FFFFFF"/>
                 </a:solidFill>
-                <a:latin typeface="Segoe UI"/>
-                <a:cs typeface="Segoe UI"/>
+                <a:latin typeface="Arial"/>
+                <a:cs typeface="Arial"/>
               </a:rPr>
               <a:t>Đối tượng trước, rồi mỗi kết cục là độ lớn tác động kèm KTC 95%.</a:t>
             </a:r>
@@ -18732,7 +18624,7 @@
                     <a:lumMod val="50000"/>
                   </a:schemeClr>
                 </a:solidFill>
-                <a:latin typeface="Verdana"/>
+                <a:latin typeface="Arial"/>
               </a:rPr>
               <a:t>Neudata | #ClearDataClearImpact</a:t>
             </a:r>
@@ -18862,8 +18754,8 @@
                 <a:solidFill>
                   <a:srgbClr val="0D7377"/>
                 </a:solidFill>
-                <a:latin typeface="Segoe UI"/>
-                <a:cs typeface="Segoe UI"/>
+                <a:latin typeface="Arial"/>
+                <a:cs typeface="Arial"/>
               </a:rPr>
               <a:t>Ví dụ mẫu: Kết quả cho FLUID-ICU câu hỏi 1</a:t>
             </a:r>
@@ -18959,8 +18851,8 @@
                 <a:solidFill>
                   <a:srgbClr val="FFFFFF"/>
                 </a:solidFill>
-                <a:latin typeface="Segoe UI"/>
-                <a:cs typeface="Segoe UI"/>
+                <a:latin typeface="Arial"/>
+                <a:cs typeface="Arial"/>
               </a:rPr>
               <a:t>THÔNG ĐIỆP CHÍNH   </a:t>
             </a:r>
@@ -18969,8 +18861,8 @@
                 <a:solidFill>
                   <a:srgbClr val="FFFFFF"/>
                 </a:solidFill>
-                <a:latin typeface="Segoe UI"/>
-                <a:cs typeface="Segoe UI"/>
+                <a:latin typeface="Arial"/>
+                <a:cs typeface="Arial"/>
               </a:rPr>
               <a:t>Đối tượng, Bảng 1, số liệu kết cục, ước lượng thô và hiệu chỉnh, theo thứ tự đó.</a:t>
             </a:r>
@@ -19007,7 +18899,7 @@
                     <a:lumMod val="50000"/>
                   </a:schemeClr>
                 </a:solidFill>
-                <a:latin typeface="Verdana"/>
+                <a:latin typeface="Arial"/>
               </a:rPr>
               <a:t>Neudata | #ClearDataClearImpact</a:t>
             </a:r>
@@ -19137,8 +19029,8 @@
                 <a:solidFill>
                   <a:srgbClr val="0D7377"/>
                 </a:solidFill>
-                <a:latin typeface="Segoe UI"/>
-                <a:cs typeface="Segoe UI"/>
+                <a:latin typeface="Arial"/>
+                <a:cs typeface="Arial"/>
               </a:rPr>
               <a:t>Bảng và hình tự đứng được</a:t>
             </a:r>
@@ -19234,8 +19126,8 @@
                 <a:solidFill>
                   <a:srgbClr val="FFFFFF"/>
                 </a:solidFill>
-                <a:latin typeface="Segoe UI"/>
-                <a:cs typeface="Segoe UI"/>
+                <a:latin typeface="Arial"/>
+                <a:cs typeface="Arial"/>
               </a:rPr>
               <a:t>THÔNG ĐIỆP CHÍNH   </a:t>
             </a:r>
@@ -19244,8 +19136,8 @@
                 <a:solidFill>
                   <a:srgbClr val="FFFFFF"/>
                 </a:solidFill>
-                <a:latin typeface="Segoe UI"/>
-                <a:cs typeface="Segoe UI"/>
+                <a:latin typeface="Arial"/>
+                <a:cs typeface="Arial"/>
               </a:rPr>
               <a:t>Người đọc phải hiểu mỗi bảng mà không cần đọc văn bản.</a:t>
             </a:r>
@@ -19282,7 +19174,7 @@
                     <a:lumMod val="50000"/>
                   </a:schemeClr>
                 </a:solidFill>
-                <a:latin typeface="Verdana"/>
+                <a:latin typeface="Arial"/>
               </a:rPr>
               <a:t>Neudata | #ClearDataClearImpact</a:t>
             </a:r>
@@ -19412,8 +19304,8 @@
                 <a:solidFill>
                   <a:srgbClr val="0D7377"/>
                 </a:solidFill>
-                <a:latin typeface="Segoe UI"/>
-                <a:cs typeface="Segoe UI"/>
+                <a:latin typeface="Arial"/>
+                <a:cs typeface="Arial"/>
               </a:rPr>
               <a:t>Ví dụ mẫu: Bảng 1 FLUID-ICU trong một câu</a:t>
             </a:r>
@@ -19481,7 +19373,7 @@
                           <a:solidFill>
                             <a:srgbClr val="FFFFFF"/>
                           </a:solidFill>
-                          <a:latin typeface="Segoe UI"/>
+                          <a:latin typeface="Arial"/>
                         </a:rPr>
                         <a:t>Đặc điểm</a:t>
                       </a:r>
@@ -19504,7 +19396,7 @@
                           <a:solidFill>
                             <a:srgbClr val="FFFFFF"/>
                           </a:solidFill>
-                          <a:latin typeface="Segoe UI"/>
+                          <a:latin typeface="Arial"/>
                         </a:rPr>
                         <a:t>Cân bằng âm (n = 245)</a:t>
                       </a:r>
@@ -19527,7 +19419,7 @@
                           <a:solidFill>
                             <a:srgbClr val="FFFFFF"/>
                           </a:solidFill>
-                          <a:latin typeface="Segoe UI"/>
+                          <a:latin typeface="Arial"/>
                         </a:rPr>
                         <a:t>Cân bằng dương (n = 373)</a:t>
                       </a:r>
@@ -19552,7 +19444,7 @@
                           <a:solidFill>
                             <a:srgbClr val="000000"/>
                           </a:solidFill>
-                          <a:latin typeface="Segoe UI"/>
+                          <a:latin typeface="Arial"/>
                         </a:rPr>
                         <a:t>Tuổi, năm, trung bình</a:t>
                       </a:r>
@@ -19575,7 +19467,7 @@
                           <a:solidFill>
                             <a:srgbClr val="000000"/>
                           </a:solidFill>
-                          <a:latin typeface="Segoe UI"/>
+                          <a:latin typeface="Arial"/>
                         </a:rPr>
                         <a:t>64,6</a:t>
                       </a:r>
@@ -19598,7 +19490,7 @@
                           <a:solidFill>
                             <a:srgbClr val="000000"/>
                           </a:solidFill>
-                          <a:latin typeface="Segoe UI"/>
+                          <a:latin typeface="Arial"/>
                         </a:rPr>
                         <a:t>61,4</a:t>
                       </a:r>
@@ -19623,7 +19515,7 @@
                           <a:solidFill>
                             <a:srgbClr val="000000"/>
                           </a:solidFill>
-                          <a:latin typeface="Segoe UI"/>
+                          <a:latin typeface="Arial"/>
                         </a:rPr>
                         <a:t>SOFA, trung vị (KTPV)</a:t>
                       </a:r>
@@ -19646,7 +19538,7 @@
                           <a:solidFill>
                             <a:srgbClr val="000000"/>
                           </a:solidFill>
-                          <a:latin typeface="Segoe UI"/>
+                          <a:latin typeface="Arial"/>
                         </a:rPr>
                         <a:t>6 (4 đến 8)</a:t>
                       </a:r>
@@ -19669,7 +19561,7 @@
                           <a:solidFill>
                             <a:srgbClr val="000000"/>
                           </a:solidFill>
-                          <a:latin typeface="Segoe UI"/>
+                          <a:latin typeface="Arial"/>
                         </a:rPr>
                         <a:t>8 (6 đến 10)</a:t>
                       </a:r>
@@ -19694,7 +19586,7 @@
                           <a:solidFill>
                             <a:srgbClr val="000000"/>
                           </a:solidFill>
-                          <a:latin typeface="Segoe UI"/>
+                          <a:latin typeface="Arial"/>
                         </a:rPr>
                         <a:t>Vận mạch, n (%)</a:t>
                       </a:r>
@@ -19717,7 +19609,7 @@
                           <a:solidFill>
                             <a:srgbClr val="000000"/>
                           </a:solidFill>
-                          <a:latin typeface="Segoe UI"/>
+                          <a:latin typeface="Arial"/>
                         </a:rPr>
                         <a:t>61 (24,9%)</a:t>
                       </a:r>
@@ -19740,7 +19632,7 @@
                           <a:solidFill>
                             <a:srgbClr val="000000"/>
                           </a:solidFill>
-                          <a:latin typeface="Segoe UI"/>
+                          <a:latin typeface="Arial"/>
                         </a:rPr>
                         <a:t>205 (55,0%)</a:t>
                       </a:r>
@@ -19765,7 +19657,7 @@
                           <a:solidFill>
                             <a:srgbClr val="000000"/>
                           </a:solidFill>
-                          <a:latin typeface="Segoe UI"/>
+                          <a:latin typeface="Arial"/>
                         </a:rPr>
                         <a:t>Thở máy, n (%)</a:t>
                       </a:r>
@@ -19788,7 +19680,7 @@
                           <a:solidFill>
                             <a:srgbClr val="000000"/>
                           </a:solidFill>
-                          <a:latin typeface="Segoe UI"/>
+                          <a:latin typeface="Arial"/>
                         </a:rPr>
                         <a:t>97 (39,6%)</a:t>
                       </a:r>
@@ -19811,7 +19703,7 @@
                           <a:solidFill>
                             <a:srgbClr val="000000"/>
                           </a:solidFill>
-                          <a:latin typeface="Segoe UI"/>
+                          <a:latin typeface="Arial"/>
                         </a:rPr>
                         <a:t>216 (57,9%)</a:t>
                       </a:r>
@@ -19836,7 +19728,7 @@
                           <a:solidFill>
                             <a:srgbClr val="000000"/>
                           </a:solidFill>
-                          <a:latin typeface="Segoe UI"/>
+                          <a:latin typeface="Arial"/>
                         </a:rPr>
                         <a:t>Lactat, mmol/L, trung vị (KTPV)</a:t>
                       </a:r>
@@ -19859,7 +19751,7 @@
                           <a:solidFill>
                             <a:srgbClr val="000000"/>
                           </a:solidFill>
-                          <a:latin typeface="Segoe UI"/>
+                          <a:latin typeface="Arial"/>
                         </a:rPr>
                         <a:t>2,2 (1,4 đến 3,0)</a:t>
                       </a:r>
@@ -19882,7 +19774,7 @@
                           <a:solidFill>
                             <a:srgbClr val="000000"/>
                           </a:solidFill>
-                          <a:latin typeface="Segoe UI"/>
+                          <a:latin typeface="Arial"/>
                         </a:rPr>
                         <a:t>2,9 (1,9 đến 4,0)</a:t>
                       </a:r>
@@ -19907,7 +19799,7 @@
                           <a:solidFill>
                             <a:srgbClr val="000000"/>
                           </a:solidFill>
-                          <a:latin typeface="Segoe UI"/>
+                          <a:latin typeface="Arial"/>
                         </a:rPr>
                         <a:t>Suy tim, n (%)</a:t>
                       </a:r>
@@ -19930,7 +19822,7 @@
                           <a:solidFill>
                             <a:srgbClr val="000000"/>
                           </a:solidFill>
-                          <a:latin typeface="Segoe UI"/>
+                          <a:latin typeface="Arial"/>
                         </a:rPr>
                         <a:t>54 (22,0%)</a:t>
                       </a:r>
@@ -19953,7 +19845,7 @@
                           <a:solidFill>
                             <a:srgbClr val="000000"/>
                           </a:solidFill>
-                          <a:latin typeface="Segoe UI"/>
+                          <a:latin typeface="Arial"/>
                         </a:rPr>
                         <a:t>43 (11,5%)</a:t>
                       </a:r>
@@ -20001,8 +19893,8 @@
                 <a:solidFill>
                   <a:srgbClr val="595959"/>
                 </a:solidFill>
-                <a:latin typeface="Segoe UI"/>
-                <a:cs typeface="Segoe UI"/>
+                <a:latin typeface="Arial"/>
+                <a:cs typeface="Arial"/>
               </a:rPr>
               <a:t>Dữ liệu MÔ PHỎNG (gói kết quả Q1, Bảng 1). Câu: 'Bệnh nhân cân bằng dương nặng hơn lúc ban đầu.'</a:t>
             </a:r>
@@ -20039,7 +19931,7 @@
                     <a:lumMod val="50000"/>
                   </a:schemeClr>
                 </a:solidFill>
-                <a:latin typeface="Verdana"/>
+                <a:latin typeface="Arial"/>
               </a:rPr>
               <a:t>Neudata | #ClearDataClearImpact</a:t>
             </a:r>
@@ -20169,8 +20061,8 @@
                 <a:solidFill>
                   <a:srgbClr val="0D7377"/>
                 </a:solidFill>
-                <a:latin typeface="Segoe UI"/>
-                <a:cs typeface="Segoe UI"/>
+                <a:latin typeface="Arial"/>
+                <a:cs typeface="Arial"/>
               </a:rPr>
               <a:t>STROBE cho bài báo FLUID-ICU: mục nào ở đâu</a:t>
             </a:r>
@@ -20266,8 +20158,8 @@
                 <a:solidFill>
                   <a:srgbClr val="FFFFFF"/>
                 </a:solidFill>
-                <a:latin typeface="Segoe UI"/>
-                <a:cs typeface="Segoe UI"/>
+                <a:latin typeface="Arial"/>
+                <a:cs typeface="Arial"/>
               </a:rPr>
               <a:t>THÔNG ĐIỆP CHÍNH   </a:t>
             </a:r>
@@ -20276,8 +20168,8 @@
                 <a:solidFill>
                   <a:srgbClr val="FFFFFF"/>
                 </a:solidFill>
-                <a:latin typeface="Segoe UI"/>
-                <a:cs typeface="Segoe UI"/>
+                <a:latin typeface="Arial"/>
+                <a:cs typeface="Arial"/>
               </a:rPr>
               <a:t>Viết với bảng kiểm STROBE mở bên cạnh và đánh dấu từng mục khi viết.</a:t>
             </a:r>
@@ -20314,7 +20206,7 @@
                     <a:lumMod val="50000"/>
                   </a:schemeClr>
                 </a:solidFill>
-                <a:latin typeface="Verdana"/>
+                <a:latin typeface="Arial"/>
               </a:rPr>
               <a:t>Neudata | #ClearDataClearImpact</a:t>
             </a:r>
@@ -20444,8 +20336,8 @@
                 <a:solidFill>
                   <a:srgbClr val="0D7377"/>
                 </a:solidFill>
-                <a:latin typeface="Segoe UI"/>
-                <a:cs typeface="Segoe UI"/>
+                <a:latin typeface="Arial"/>
+                <a:cs typeface="Arial"/>
               </a:rPr>
               <a:t>Kiểm tra: Phương pháp, Kết quả hay Bàn luận?</a:t>
             </a:r>
@@ -20515,8 +20407,8 @@
                 <a:solidFill>
                   <a:srgbClr val="FFFFFF"/>
                 </a:solidFill>
-                <a:latin typeface="Segoe UI"/>
-                <a:cs typeface="Segoe UI"/>
+                <a:latin typeface="Arial"/>
+                <a:cs typeface="Arial"/>
               </a:rPr>
               <a:t>CÂU HỎI NHANH   |   3 phút</a:t>
             </a:r>
@@ -20553,25 +20445,19 @@
               <a:spcBef>
                 <a:spcPts val="450"/>
               </a:spcBef>
-              <a:buNone/>
-            </a:pPr>
-            <a:r>
-              <a:rPr lang="en-US" sz="1650" b="1" dirty="0">
-                <a:solidFill>
-                  <a:srgbClr val="6C3483"/>
-                </a:solidFill>
-                <a:latin typeface="Segoe UI"/>
-                <a:cs typeface="Segoe UI"/>
-              </a:rPr>
-              <a:t>1.  </a:t>
-            </a:r>
+              <a:buClr>
+                <a:srgbClr val="6C3483"/>
+              </a:buClr>
+              <a:buFont typeface="Arial"/>
+              <a:buChar char="•"/>
+            </a:pPr>
             <a:r>
               <a:rPr lang="en-US" sz="1650" dirty="0">
                 <a:solidFill>
                   <a:srgbClr val="000000"/>
                 </a:solidFill>
-                <a:latin typeface="Segoe UI"/>
-                <a:cs typeface="Segoe UI"/>
+                <a:latin typeface="Arial"/>
+                <a:cs typeface="Arial"/>
               </a:rPr>
               <a:t>'Chúng tôi dùng hồi quy logistic hiệu chỉnh theo SOFA và tuổi.'</a:t>
             </a:r>
@@ -20584,25 +20470,19 @@
               <a:spcBef>
                 <a:spcPts val="450"/>
               </a:spcBef>
-              <a:buNone/>
-            </a:pPr>
-            <a:r>
-              <a:rPr lang="en-US" sz="1650" b="1" dirty="0">
-                <a:solidFill>
-                  <a:srgbClr val="6C3483"/>
-                </a:solidFill>
-                <a:latin typeface="Segoe UI"/>
-                <a:cs typeface="Segoe UI"/>
-              </a:rPr>
-              <a:t>2.  </a:t>
-            </a:r>
+              <a:buClr>
+                <a:srgbClr val="6C3483"/>
+              </a:buClr>
+              <a:buFont typeface="Arial"/>
+              <a:buChar char="•"/>
+            </a:pPr>
             <a:r>
               <a:rPr lang="en-US" sz="1650" dirty="0">
                 <a:solidFill>
                   <a:srgbClr val="000000"/>
                 </a:solidFill>
-                <a:latin typeface="Segoe UI"/>
-                <a:cs typeface="Segoe UI"/>
+                <a:latin typeface="Arial"/>
+                <a:cs typeface="Arial"/>
               </a:rPr>
               <a:t>'Trong 640 bệnh nhân được sàng lọc, 600 được đưa vào.'</a:t>
             </a:r>
@@ -20615,25 +20495,19 @@
               <a:spcBef>
                 <a:spcPts val="450"/>
               </a:spcBef>
-              <a:buNone/>
-            </a:pPr>
-            <a:r>
-              <a:rPr lang="en-US" sz="1650" b="1" dirty="0">
-                <a:solidFill>
-                  <a:srgbClr val="6C3483"/>
-                </a:solidFill>
-                <a:latin typeface="Segoe UI"/>
-                <a:cs typeface="Segoe UI"/>
-              </a:rPr>
-              <a:t>3.  </a:t>
-            </a:r>
+              <a:buClr>
+                <a:srgbClr val="6C3483"/>
+              </a:buClr>
+              <a:buFont typeface="Arial"/>
+              <a:buChar char="•"/>
+            </a:pPr>
             <a:r>
               <a:rPr lang="en-US" sz="1650" dirty="0">
                 <a:solidFill>
                   <a:srgbClr val="000000"/>
                 </a:solidFill>
-                <a:latin typeface="Segoe UI"/>
-                <a:cs typeface="Segoe UI"/>
+                <a:latin typeface="Arial"/>
+                <a:cs typeface="Arial"/>
               </a:rPr>
               <a:t>'Điều này có thể do bệnh nặng hơn được truyền nhiều dịch hơn.'</a:t>
             </a:r>
@@ -20646,25 +20520,19 @@
               <a:spcBef>
                 <a:spcPts val="450"/>
               </a:spcBef>
-              <a:buNone/>
-            </a:pPr>
-            <a:r>
-              <a:rPr lang="en-US" sz="1650" b="1" dirty="0">
-                <a:solidFill>
-                  <a:srgbClr val="6C3483"/>
-                </a:solidFill>
-                <a:latin typeface="Segoe UI"/>
-                <a:cs typeface="Segoe UI"/>
-              </a:rPr>
-              <a:t>4.  </a:t>
-            </a:r>
+              <a:buClr>
+                <a:srgbClr val="6C3483"/>
+              </a:buClr>
+              <a:buFont typeface="Arial"/>
+              <a:buChar char="•"/>
+            </a:pPr>
             <a:r>
               <a:rPr lang="en-US" sz="1650" dirty="0">
                 <a:solidFill>
                   <a:srgbClr val="000000"/>
                 </a:solidFill>
-                <a:latin typeface="Segoe UI"/>
-                <a:cs typeface="Segoe UI"/>
+                <a:latin typeface="Arial"/>
+                <a:cs typeface="Arial"/>
               </a:rPr>
               <a:t>'Lactat thiếu ở 15% và được quy gán.'</a:t>
             </a:r>
@@ -20677,25 +20545,19 @@
               <a:spcBef>
                 <a:spcPts val="450"/>
               </a:spcBef>
-              <a:buNone/>
-            </a:pPr>
-            <a:r>
-              <a:rPr lang="en-US" sz="1650" b="1" dirty="0">
-                <a:solidFill>
-                  <a:srgbClr val="6C3483"/>
-                </a:solidFill>
-                <a:latin typeface="Segoe UI"/>
-                <a:cs typeface="Segoe UI"/>
-              </a:rPr>
-              <a:t>5.  </a:t>
-            </a:r>
+              <a:buClr>
+                <a:srgbClr val="6C3483"/>
+              </a:buClr>
+              <a:buFont typeface="Arial"/>
+              <a:buChar char="•"/>
+            </a:pPr>
             <a:r>
               <a:rPr lang="en-US" sz="1650" dirty="0">
                 <a:solidFill>
                   <a:srgbClr val="000000"/>
                 </a:solidFill>
-                <a:latin typeface="Segoe UI"/>
-                <a:cs typeface="Segoe UI"/>
+                <a:latin typeface="Arial"/>
+                <a:cs typeface="Arial"/>
               </a:rPr>
               <a:t>'Tử vong 28 ngày cao hơn khi cân bằng dương (OR ..., KTC 95% ...).'</a:t>
             </a:r>
@@ -20739,8 +20601,8 @@
                 <a:solidFill>
                   <a:srgbClr val="6C3483"/>
                 </a:solidFill>
-                <a:latin typeface="Segoe UI"/>
-                <a:cs typeface="Segoe UI"/>
+                <a:latin typeface="Arial"/>
+                <a:cs typeface="Arial"/>
               </a:rPr>
               <a:t>Đáp án</a:t>
             </a:r>
@@ -20761,8 +20623,8 @@
                 <a:solidFill>
                   <a:srgbClr val="000000"/>
                 </a:solidFill>
-                <a:latin typeface="Segoe UI"/>
-                <a:cs typeface="Segoe UI"/>
+                <a:latin typeface="Arial"/>
+                <a:cs typeface="Arial"/>
               </a:rPr>
               <a:t>1 Phương pháp</a:t>
             </a:r>
@@ -20783,8 +20645,8 @@
                 <a:solidFill>
                   <a:srgbClr val="000000"/>
                 </a:solidFill>
-                <a:latin typeface="Segoe UI"/>
-                <a:cs typeface="Segoe UI"/>
+                <a:latin typeface="Arial"/>
+                <a:cs typeface="Arial"/>
               </a:rPr>
               <a:t>2 Kết quả (đối tượng)</a:t>
             </a:r>
@@ -20805,8 +20667,8 @@
                 <a:solidFill>
                   <a:srgbClr val="000000"/>
                 </a:solidFill>
-                <a:latin typeface="Segoe UI"/>
-                <a:cs typeface="Segoe UI"/>
+                <a:latin typeface="Arial"/>
+                <a:cs typeface="Arial"/>
               </a:rPr>
               <a:t>3 Bàn luận (giải thích)</a:t>
             </a:r>
@@ -20827,8 +20689,8 @@
                 <a:solidFill>
                   <a:srgbClr val="000000"/>
                 </a:solidFill>
-                <a:latin typeface="Segoe UI"/>
-                <a:cs typeface="Segoe UI"/>
+                <a:latin typeface="Arial"/>
+                <a:cs typeface="Arial"/>
               </a:rPr>
               <a:t>4 Phương pháp (+ Kết quả: bao nhiêu)</a:t>
             </a:r>
@@ -20849,8 +20711,8 @@
                 <a:solidFill>
                   <a:srgbClr val="000000"/>
                 </a:solidFill>
-                <a:latin typeface="Segoe UI"/>
-                <a:cs typeface="Segoe UI"/>
+                <a:latin typeface="Arial"/>
+                <a:cs typeface="Arial"/>
               </a:rPr>
               <a:t>5 Kết quả</a:t>
             </a:r>
@@ -20887,7 +20749,7 @@
                     <a:lumMod val="50000"/>
                   </a:schemeClr>
                 </a:solidFill>
-                <a:latin typeface="Verdana"/>
+                <a:latin typeface="Arial"/>
               </a:rPr>
               <a:t>Neudata | #ClearDataClearImpact</a:t>
             </a:r>
@@ -21017,8 +20879,8 @@
                 <a:solidFill>
                   <a:srgbClr val="0D7377"/>
                 </a:solidFill>
-                <a:latin typeface="Segoe UI"/>
-                <a:cs typeface="Segoe UI"/>
+                <a:latin typeface="Arial"/>
+                <a:cs typeface="Arial"/>
               </a:rPr>
               <a:t>Thực hành bản thảo 1  |  50 phút</a:t>
             </a:r>
@@ -21087,8 +20949,8 @@
                 <a:solidFill>
                   <a:srgbClr val="0D7377"/>
                 </a:solidFill>
-                <a:latin typeface="Segoe UI"/>
-                <a:cs typeface="Segoe UI"/>
+                <a:latin typeface="Arial"/>
+                <a:cs typeface="Arial"/>
               </a:rPr>
               <a:t>Viết Phương pháp và Kết quả</a:t>
             </a:r>
@@ -21105,8 +20967,8 @@
                 <a:solidFill>
                   <a:srgbClr val="595959"/>
                 </a:solidFill>
-                <a:latin typeface="Segoe UI"/>
-                <a:cs typeface="Segoe UI"/>
+                <a:latin typeface="Arial"/>
+                <a:cs typeface="Arial"/>
               </a:rPr>
               <a:t>Khoảng 600 từ, Bảng 1 và một hình hoặc bảng, từ gói kết quả của nhóm</a:t>
             </a:r>
@@ -21143,7 +21005,7 @@
                     <a:lumMod val="50000"/>
                   </a:schemeClr>
                 </a:solidFill>
-                <a:latin typeface="Verdana"/>
+                <a:latin typeface="Arial"/>
               </a:rPr>
               <a:t>Neudata | #ClearDataClearImpact</a:t>
             </a:r>
@@ -21273,8 +21135,8 @@
                 <a:solidFill>
                   <a:srgbClr val="0D7377"/>
                 </a:solidFill>
-                <a:latin typeface="Segoe UI"/>
-                <a:cs typeface="Segoe UI"/>
+                <a:latin typeface="Arial"/>
+                <a:cs typeface="Arial"/>
               </a:rPr>
               <a:t>Năm mươi phút, sáu người, một bản nháp</a:t>
             </a:r>
@@ -21370,8 +21232,8 @@
                 <a:solidFill>
                   <a:srgbClr val="FFFFFF"/>
                 </a:solidFill>
-                <a:latin typeface="Segoe UI"/>
-                <a:cs typeface="Segoe UI"/>
+                <a:latin typeface="Arial"/>
+                <a:cs typeface="Arial"/>
               </a:rPr>
               <a:t>THÔNG ĐIỆP CHÍNH   </a:t>
             </a:r>
@@ -21380,8 +21242,8 @@
                 <a:solidFill>
                   <a:srgbClr val="FFFFFF"/>
                 </a:solidFill>
-                <a:latin typeface="Segoe UI"/>
-                <a:cs typeface="Segoe UI"/>
+                <a:latin typeface="Arial"/>
+                <a:cs typeface="Arial"/>
               </a:rPr>
               <a:t>Mọi con số trong bài phải lấy từ gói kết quả: không ai phải tự tính.</a:t>
             </a:r>
@@ -21418,7 +21280,7 @@
                     <a:lumMod val="50000"/>
                   </a:schemeClr>
                 </a:solidFill>
-                <a:latin typeface="Verdana"/>
+                <a:latin typeface="Arial"/>
               </a:rPr>
               <a:t>Neudata | #ClearDataClearImpact</a:t>
             </a:r>
@@ -21548,8 +21410,8 @@
                 <a:solidFill>
                   <a:srgbClr val="0D7377"/>
                 </a:solidFill>
-                <a:latin typeface="Segoe UI"/>
-                <a:cs typeface="Segoe UI"/>
+                <a:latin typeface="Arial"/>
+                <a:cs typeface="Arial"/>
               </a:rPr>
               <a:t>Thực hành bản thảo 1: soạn Phương pháp + Kết quả</a:t>
             </a:r>
@@ -21619,8 +21481,8 @@
                 <a:solidFill>
                   <a:srgbClr val="FFFFFF"/>
                 </a:solidFill>
-                <a:latin typeface="Segoe UI"/>
-                <a:cs typeface="Segoe UI"/>
+                <a:latin typeface="Arial"/>
+                <a:cs typeface="Arial"/>
               </a:rPr>
               <a:t>LÀM VIỆC NHÓM   |   50 phút</a:t>
             </a:r>
@@ -21657,25 +21519,19 @@
               <a:spcBef>
                 <a:spcPts val="450"/>
               </a:spcBef>
-              <a:buNone/>
-            </a:pPr>
-            <a:r>
-              <a:rPr lang="en-US" sz="1650" b="1" dirty="0">
-                <a:solidFill>
-                  <a:srgbClr val="0D7377"/>
-                </a:solidFill>
-                <a:latin typeface="Segoe UI"/>
-                <a:cs typeface="Segoe UI"/>
-              </a:rPr>
-              <a:t>1.  </a:t>
-            </a:r>
+              <a:buClr>
+                <a:srgbClr val="0D7377"/>
+              </a:buClr>
+              <a:buFont typeface="Arial"/>
+              <a:buChar char="•"/>
+            </a:pPr>
             <a:r>
               <a:rPr lang="en-US" sz="1650" dirty="0">
                 <a:solidFill>
                   <a:srgbClr val="000000"/>
                 </a:solidFill>
-                <a:latin typeface="Segoe UI"/>
-                <a:cs typeface="Segoe UI"/>
+                <a:latin typeface="Arial"/>
+                <a:cs typeface="Arial"/>
               </a:rPr>
               <a:t>0-5: đọc gói kết quả; thống nhất kết quả chính trong một câu</a:t>
             </a:r>
@@ -21688,25 +21544,19 @@
               <a:spcBef>
                 <a:spcPts val="450"/>
               </a:spcBef>
-              <a:buNone/>
-            </a:pPr>
-            <a:r>
-              <a:rPr lang="en-US" sz="1650" b="1" dirty="0">
-                <a:solidFill>
-                  <a:srgbClr val="0D7377"/>
-                </a:solidFill>
-                <a:latin typeface="Segoe UI"/>
-                <a:cs typeface="Segoe UI"/>
-              </a:rPr>
-              <a:t>2.  </a:t>
-            </a:r>
+              <a:buClr>
+                <a:srgbClr val="0D7377"/>
+              </a:buClr>
+              <a:buFont typeface="Arial"/>
+              <a:buChar char="•"/>
+            </a:pPr>
             <a:r>
               <a:rPr lang="en-US" sz="1650" dirty="0">
                 <a:solidFill>
                   <a:srgbClr val="000000"/>
                 </a:solidFill>
-                <a:latin typeface="Segoe UI"/>
-                <a:cs typeface="Segoe UI"/>
+                <a:latin typeface="Arial"/>
+                <a:cs typeface="Arial"/>
               </a:rPr>
               <a:t>5-25: Phương pháp (thiết kế, bối cảnh, đối tượng, biến số, thống kê)</a:t>
             </a:r>
@@ -21719,25 +21569,19 @@
               <a:spcBef>
                 <a:spcPts val="450"/>
               </a:spcBef>
-              <a:buNone/>
-            </a:pPr>
-            <a:r>
-              <a:rPr lang="en-US" sz="1650" b="1" dirty="0">
-                <a:solidFill>
-                  <a:srgbClr val="0D7377"/>
-                </a:solidFill>
-                <a:latin typeface="Segoe UI"/>
-                <a:cs typeface="Segoe UI"/>
-              </a:rPr>
-              <a:t>3.  </a:t>
-            </a:r>
+              <a:buClr>
+                <a:srgbClr val="0D7377"/>
+              </a:buClr>
+              <a:buFont typeface="Arial"/>
+              <a:buChar char="•"/>
+            </a:pPr>
             <a:r>
               <a:rPr lang="en-US" sz="1650" dirty="0">
                 <a:solidFill>
                   <a:srgbClr val="000000"/>
                 </a:solidFill>
-                <a:latin typeface="Segoe UI"/>
-                <a:cs typeface="Segoe UI"/>
+                <a:latin typeface="Arial"/>
+                <a:cs typeface="Arial"/>
               </a:rPr>
               <a:t>25-40: Kết quả (đối tượng, Bảng 1, kết quả chính thô + hiệu chỉnh)</a:t>
             </a:r>
@@ -21750,25 +21594,19 @@
               <a:spcBef>
                 <a:spcPts val="450"/>
               </a:spcBef>
-              <a:buNone/>
-            </a:pPr>
-            <a:r>
-              <a:rPr lang="en-US" sz="1650" b="1" dirty="0">
-                <a:solidFill>
-                  <a:srgbClr val="0D7377"/>
-                </a:solidFill>
-                <a:latin typeface="Segoe UI"/>
-                <a:cs typeface="Segoe UI"/>
-              </a:rPr>
-              <a:t>4.  </a:t>
-            </a:r>
+              <a:buClr>
+                <a:srgbClr val="0D7377"/>
+              </a:buClr>
+              <a:buFont typeface="Arial"/>
+              <a:buChar char="•"/>
+            </a:pPr>
             <a:r>
               <a:rPr lang="en-US" sz="1650" dirty="0">
                 <a:solidFill>
                   <a:srgbClr val="000000"/>
                 </a:solidFill>
-                <a:latin typeface="Segoe UI"/>
-                <a:cs typeface="Segoe UI"/>
+                <a:latin typeface="Arial"/>
+                <a:cs typeface="Arial"/>
               </a:rPr>
               <a:t>40-47: Bảng 1 + một hình/bảng có tiêu đề và chú thích</a:t>
             </a:r>
@@ -21781,25 +21619,19 @@
               <a:spcBef>
                 <a:spcPts val="450"/>
               </a:spcBef>
-              <a:buNone/>
-            </a:pPr>
-            <a:r>
-              <a:rPr lang="en-US" sz="1650" b="1" dirty="0">
-                <a:solidFill>
-                  <a:srgbClr val="0D7377"/>
-                </a:solidFill>
-                <a:latin typeface="Segoe UI"/>
-                <a:cs typeface="Segoe UI"/>
-              </a:rPr>
-              <a:t>5.  </a:t>
-            </a:r>
+              <a:buClr>
+                <a:srgbClr val="0D7377"/>
+              </a:buClr>
+              <a:buFont typeface="Arial"/>
+              <a:buChar char="•"/>
+            </a:pPr>
             <a:r>
               <a:rPr lang="en-US" sz="1650" dirty="0">
                 <a:solidFill>
                   <a:srgbClr val="000000"/>
                 </a:solidFill>
-                <a:latin typeface="Segoe UI"/>
-                <a:cs typeface="Segoe UI"/>
+                <a:latin typeface="Arial"/>
+                <a:cs typeface="Arial"/>
               </a:rPr>
               <a:t>47-50: đánh dấu mục STROBE 4-17; kiểm tra từng con số</a:t>
             </a:r>
@@ -21843,8 +21675,8 @@
                 <a:solidFill>
                   <a:srgbClr val="0D7377"/>
                 </a:solidFill>
-                <a:latin typeface="Segoe UI"/>
-                <a:cs typeface="Segoe UI"/>
+                <a:latin typeface="Arial"/>
+                <a:cs typeface="Arial"/>
               </a:rPr>
               <a:t>Dùng</a:t>
             </a:r>
@@ -21865,8 +21697,8 @@
                 <a:solidFill>
                   <a:srgbClr val="000000"/>
                 </a:solidFill>
-                <a:latin typeface="Segoe UI"/>
-                <a:cs typeface="Segoe UI"/>
+                <a:latin typeface="Arial"/>
+                <a:cs typeface="Arial"/>
               </a:rPr>
               <a:t>Gói kết quả (Q1-Q5)</a:t>
             </a:r>
@@ -21887,8 +21719,8 @@
                 <a:solidFill>
                   <a:srgbClr val="000000"/>
                 </a:solidFill>
-                <a:latin typeface="Segoe UI"/>
-                <a:cs typeface="Segoe UI"/>
+                <a:latin typeface="Arial"/>
+                <a:cs typeface="Arial"/>
               </a:rPr>
               <a:t>Mẫu bản thảo</a:t>
             </a:r>
@@ -21909,8 +21741,8 @@
                 <a:solidFill>
                   <a:srgbClr val="000000"/>
                 </a:solidFill>
-                <a:latin typeface="Segoe UI"/>
-                <a:cs typeface="Segoe UI"/>
+                <a:latin typeface="Arial"/>
+                <a:cs typeface="Arial"/>
               </a:rPr>
               <a:t>Ví dụ mẫu (slide)</a:t>
             </a:r>
@@ -21931,8 +21763,8 @@
                 <a:solidFill>
                   <a:srgbClr val="000000"/>
                 </a:solidFill>
-                <a:latin typeface="Segoe UI"/>
-                <a:cs typeface="Segoe UI"/>
+                <a:latin typeface="Arial"/>
+                <a:cs typeface="Arial"/>
               </a:rPr>
               <a:t>Mục STROBE 4-17</a:t>
             </a:r>
@@ -21978,8 +21810,8 @@
                 <a:solidFill>
                   <a:srgbClr val="0D7377"/>
                 </a:solidFill>
-                <a:latin typeface="Segoe UI"/>
-                <a:cs typeface="Segoe UI"/>
+                <a:latin typeface="Arial"/>
+                <a:cs typeface="Arial"/>
               </a:rPr>
               <a:t>SẢN PHẨM   </a:t>
             </a:r>
@@ -21988,8 +21820,8 @@
                 <a:solidFill>
                   <a:srgbClr val="000000"/>
                 </a:solidFill>
-                <a:latin typeface="Segoe UI"/>
-                <a:cs typeface="Segoe UI"/>
+                <a:latin typeface="Arial"/>
+                <a:cs typeface="Arial"/>
               </a:rPr>
               <a:t>Phương pháp + Kết quả (~600 từ) + Bảng 1 + một hình/bảng, đã lưu và chia sẻ</a:t>
             </a:r>
@@ -22026,7 +21858,7 @@
                     <a:lumMod val="50000"/>
                   </a:schemeClr>
                 </a:solidFill>
-                <a:latin typeface="Verdana"/>
+                <a:latin typeface="Arial"/>
               </a:rPr>
               <a:t>Neudata | #ClearDataClearImpact</a:t>
             </a:r>
@@ -22156,8 +21988,8 @@
                 <a:solidFill>
                   <a:srgbClr val="0D7377"/>
                 </a:solidFill>
-                <a:latin typeface="Segoe UI"/>
-                <a:cs typeface="Segoe UI"/>
+                <a:latin typeface="Arial"/>
+                <a:cs typeface="Arial"/>
               </a:rPr>
               <a:t>7.1  |  30 phút</a:t>
             </a:r>
@@ -22226,8 +22058,8 @@
                 <a:solidFill>
                   <a:srgbClr val="0D7377"/>
                 </a:solidFill>
-                <a:latin typeface="Segoe UI"/>
-                <a:cs typeface="Segoe UI"/>
+                <a:latin typeface="Arial"/>
+                <a:cs typeface="Arial"/>
               </a:rPr>
               <a:t>Đề cương, đạo đức và chấp thuận tham gia</a:t>
             </a:r>
@@ -22244,8 +22076,8 @@
                 <a:solidFill>
                   <a:srgbClr val="595959"/>
                 </a:solidFill>
-                <a:latin typeface="Segoe UI"/>
-                <a:cs typeface="Segoe UI"/>
+                <a:latin typeface="Arial"/>
+                <a:cs typeface="Arial"/>
               </a:rPr>
               <a:t>Bảo vệ người bệnh trước khi có dữ liệu đầu tiên</a:t>
             </a:r>
@@ -22282,7 +22114,7 @@
                     <a:lumMod val="50000"/>
                   </a:schemeClr>
                 </a:solidFill>
-                <a:latin typeface="Verdana"/>
+                <a:latin typeface="Arial"/>
               </a:rPr>
               <a:t>Neudata | #ClearDataClearImpact</a:t>
             </a:r>
@@ -22412,8 +22244,8 @@
                 <a:solidFill>
                   <a:srgbClr val="0D7377"/>
                 </a:solidFill>
-                <a:latin typeface="Segoe UI"/>
-                <a:cs typeface="Segoe UI"/>
+                <a:latin typeface="Arial"/>
+                <a:cs typeface="Arial"/>
               </a:rPr>
               <a:t>Từ khóa của Buổi 7</a:t>
             </a:r>
@@ -22480,7 +22312,7 @@
                           <a:solidFill>
                             <a:srgbClr val="FFFFFF"/>
                           </a:solidFill>
-                          <a:latin typeface="Segoe UI"/>
+                          <a:latin typeface="Arial"/>
                         </a:rPr>
                         <a:t>Thuật ngữ</a:t>
                       </a:r>
@@ -22503,7 +22335,7 @@
                           <a:solidFill>
                             <a:srgbClr val="FFFFFF"/>
                           </a:solidFill>
-                          <a:latin typeface="Segoe UI"/>
+                          <a:latin typeface="Arial"/>
                         </a:rPr>
                         <a:t>Nói đơn giản</a:t>
                       </a:r>
@@ -22528,7 +22360,7 @@
                           <a:solidFill>
                             <a:srgbClr val="000000"/>
                           </a:solidFill>
-                          <a:latin typeface="Segoe UI"/>
+                          <a:latin typeface="Arial"/>
                         </a:rPr>
                         <a:t>Chấp thuận trì hoãn</a:t>
                       </a:r>
@@ -22551,7 +22383,7 @@
                           <a:solidFill>
                             <a:srgbClr val="000000"/>
                           </a:solidFill>
-                          <a:latin typeface="Segoe UI"/>
+                          <a:latin typeface="Arial"/>
                         </a:rPr>
                         <a:t>Cấp cứu: đưa vào trước, xin chấp thuận sớm nhất có thể (hội đồng đã duyệt)</a:t>
                       </a:r>
@@ -22576,7 +22408,7 @@
                           <a:solidFill>
                             <a:srgbClr val="000000"/>
                           </a:solidFill>
-                          <a:latin typeface="Segoe UI"/>
+                          <a:latin typeface="Arial"/>
                         </a:rPr>
                         <a:t>Đăng ký</a:t>
                       </a:r>
@@ -22599,7 +22431,7 @@
                           <a:solidFill>
                             <a:srgbClr val="000000"/>
                           </a:solidFill>
-                          <a:latin typeface="Segoe UI"/>
+                          <a:latin typeface="Arial"/>
                         </a:rPr>
                         <a:t>Hồ sơ công khai về nghiên cứu trước bệnh nhân 1 (bắt buộc với thử nghiệm)</a:t>
                       </a:r>
@@ -22624,7 +22456,7 @@
                           <a:solidFill>
                             <a:srgbClr val="000000"/>
                           </a:solidFill>
-                          <a:latin typeface="Segoe UI"/>
+                          <a:latin typeface="Arial"/>
                         </a:rPr>
                         <a:t>FFP</a:t>
                       </a:r>
@@ -22647,7 +22479,7 @@
                           <a:solidFill>
                             <a:srgbClr val="000000"/>
                           </a:solidFill>
-                          <a:latin typeface="Segoe UI"/>
+                          <a:latin typeface="Arial"/>
                         </a:rPr>
                         <a:t>Sai phạm nghiên cứu: bịa đặt, xuyên tạc, đạo văn</a:t>
                       </a:r>
@@ -22672,7 +22504,7 @@
                           <a:solidFill>
                             <a:srgbClr val="000000"/>
                           </a:solidFill>
-                          <a:latin typeface="Segoe UI"/>
+                          <a:latin typeface="Arial"/>
                         </a:rPr>
                         <a:t>Tiêu chí ICMJE / CRediT</a:t>
                       </a:r>
@@ -22695,7 +22527,7 @@
                           <a:solidFill>
                             <a:srgbClr val="000000"/>
                           </a:solidFill>
-                          <a:latin typeface="Segoe UI"/>
+                          <a:latin typeface="Arial"/>
                         </a:rPr>
                         <a:t>Ai được đứng tên tác giả / ai làm gì</a:t>
                       </a:r>
@@ -22720,7 +22552,7 @@
                           <a:solidFill>
                             <a:srgbClr val="000000"/>
                           </a:solidFill>
-                          <a:latin typeface="Segoe UI"/>
+                          <a:latin typeface="Arial"/>
                         </a:rPr>
                         <a:t>Xung đột lợi ích</a:t>
                       </a:r>
@@ -22743,7 +22575,7 @@
                           <a:solidFill>
                             <a:srgbClr val="000000"/>
                           </a:solidFill>
-                          <a:latin typeface="Segoe UI"/>
+                          <a:latin typeface="Arial"/>
                         </a:rPr>
                         <a:t>Điều có thể bị xem là ảnh hưởng đến nhận định. Hãy khai báo</a:t>
                       </a:r>
@@ -22768,7 +22600,7 @@
                           <a:solidFill>
                             <a:srgbClr val="000000"/>
                           </a:solidFill>
-                          <a:latin typeface="Segoe UI"/>
+                          <a:latin typeface="Arial"/>
                         </a:rPr>
                         <a:t>STROBE</a:t>
                       </a:r>
@@ -22791,7 +22623,7 @@
                           <a:solidFill>
                             <a:srgbClr val="000000"/>
                           </a:solidFill>
-                          <a:latin typeface="Segoe UI"/>
+                          <a:latin typeface="Arial"/>
                         </a:rPr>
                         <a:t>Bảng kiểm báo cáo nghiên cứu quan sát: Phương pháp mục 4-12, Kết quả 13-17</a:t>
                       </a:r>
@@ -22839,8 +22671,8 @@
                 <a:solidFill>
                   <a:srgbClr val="595959"/>
                 </a:solidFill>
-                <a:latin typeface="Segoe UI"/>
-                <a:cs typeface="Segoe UI"/>
+                <a:latin typeface="Arial"/>
+                <a:cs typeface="Arial"/>
               </a:rPr>
               <a:t>Bảng thuật ngữ đầy đủ (Anh-Việt): Course/References/</a:t>
             </a:r>
@@ -22877,7 +22709,7 @@
                     <a:lumMod val="50000"/>
                   </a:schemeClr>
                 </a:solidFill>
-                <a:latin typeface="Verdana"/>
+                <a:latin typeface="Arial"/>
               </a:rPr>
               <a:t>Neudata | #ClearDataClearImpact</a:t>
             </a:r>
@@ -23007,8 +22839,8 @@
                 <a:solidFill>
                   <a:srgbClr val="0D7377"/>
                 </a:solidFill>
-                <a:latin typeface="Segoe UI"/>
-                <a:cs typeface="Segoe UI"/>
+                <a:latin typeface="Arial"/>
+                <a:cs typeface="Arial"/>
               </a:rPr>
               <a:t>Tổng kết và bài tập về nhà cho thứ Bảy tuần sau</a:t>
             </a:r>
@@ -23078,8 +22910,8 @@
                 <a:solidFill>
                   <a:srgbClr val="FFFFFF"/>
                 </a:solidFill>
-                <a:latin typeface="Segoe UI"/>
-                <a:cs typeface="Segoe UI"/>
+                <a:latin typeface="Arial"/>
+                <a:cs typeface="Arial"/>
               </a:rPr>
               <a:t>THẢO LUẬN   |   5 phút</a:t>
             </a:r>
@@ -23116,25 +22948,19 @@
               <a:spcBef>
                 <a:spcPts val="450"/>
               </a:spcBef>
-              <a:buNone/>
-            </a:pPr>
-            <a:r>
-              <a:rPr lang="en-US" sz="1650" b="1" dirty="0">
-                <a:solidFill>
-                  <a:srgbClr val="1F5C7A"/>
-                </a:solidFill>
-                <a:latin typeface="Segoe UI"/>
-                <a:cs typeface="Segoe UI"/>
-              </a:rPr>
-              <a:t>1.  </a:t>
-            </a:r>
+              <a:buClr>
+                <a:srgbClr val="1F5C7A"/>
+              </a:buClr>
+              <a:buFont typeface="Arial"/>
+              <a:buChar char="•"/>
+            </a:pPr>
             <a:r>
               <a:rPr lang="en-US" sz="1650" dirty="0">
                 <a:solidFill>
                   <a:srgbClr val="000000"/>
                 </a:solidFill>
-                <a:latin typeface="Segoe UI"/>
-                <a:cs typeface="Segoe UI"/>
+                <a:latin typeface="Arial"/>
+                <a:cs typeface="Arial"/>
               </a:rPr>
               <a:t>Ba thông điệp mang về (bên cạnh danh sách này)</a:t>
             </a:r>
@@ -23147,25 +22973,19 @@
               <a:spcBef>
                 <a:spcPts val="450"/>
               </a:spcBef>
-              <a:buNone/>
-            </a:pPr>
-            <a:r>
-              <a:rPr lang="en-US" sz="1650" b="1" dirty="0">
-                <a:solidFill>
-                  <a:srgbClr val="1F5C7A"/>
-                </a:solidFill>
-                <a:latin typeface="Segoe UI"/>
-                <a:cs typeface="Segoe UI"/>
-              </a:rPr>
-              <a:t>2.  </a:t>
-            </a:r>
+              <a:buClr>
+                <a:srgbClr val="1F5C7A"/>
+              </a:buClr>
+              <a:buFont typeface="Arial"/>
+              <a:buChar char="•"/>
+            </a:pPr>
             <a:r>
               <a:rPr lang="en-US" sz="1650" dirty="0">
                 <a:solidFill>
                   <a:srgbClr val="000000"/>
                 </a:solidFill>
-                <a:latin typeface="Segoe UI"/>
-                <a:cs typeface="Segoe UI"/>
+                <a:latin typeface="Arial"/>
+                <a:cs typeface="Arial"/>
               </a:rPr>
               <a:t>Trong tuần: hoàn thiện Đề cương Phần 4 và 6 slide trình bày</a:t>
             </a:r>
@@ -23178,25 +22998,19 @@
               <a:spcBef>
                 <a:spcPts val="450"/>
               </a:spcBef>
-              <a:buNone/>
-            </a:pPr>
-            <a:r>
-              <a:rPr lang="en-US" sz="1650" b="1" dirty="0">
-                <a:solidFill>
-                  <a:srgbClr val="1F5C7A"/>
-                </a:solidFill>
-                <a:latin typeface="Segoe UI"/>
-                <a:cs typeface="Segoe UI"/>
-              </a:rPr>
-              <a:t>3.  </a:t>
-            </a:r>
+              <a:buClr>
+                <a:srgbClr val="1F5C7A"/>
+              </a:buClr>
+              <a:buFont typeface="Arial"/>
+              <a:buChar char="•"/>
+            </a:pPr>
             <a:r>
               <a:rPr lang="en-US" sz="1650" dirty="0">
                 <a:solidFill>
                   <a:srgbClr val="000000"/>
                 </a:solidFill>
-                <a:latin typeface="Segoe UI"/>
-                <a:cs typeface="Segoe UI"/>
+                <a:latin typeface="Arial"/>
+                <a:cs typeface="Arial"/>
               </a:rPr>
               <a:t>Trong tuần: đọc to bản nháp Phương pháp + Kết quả một lần</a:t>
             </a:r>
@@ -23209,25 +23023,19 @@
               <a:spcBef>
                 <a:spcPts val="450"/>
               </a:spcBef>
-              <a:buNone/>
-            </a:pPr>
-            <a:r>
-              <a:rPr lang="en-US" sz="1650" b="1" dirty="0">
-                <a:solidFill>
-                  <a:srgbClr val="1F5C7A"/>
-                </a:solidFill>
-                <a:latin typeface="Segoe UI"/>
-                <a:cs typeface="Segoe UI"/>
-              </a:rPr>
-              <a:t>4.  </a:t>
-            </a:r>
+              <a:buClr>
+                <a:srgbClr val="1F5C7A"/>
+              </a:buClr>
+              <a:buFont typeface="Arial"/>
+              <a:buChar char="•"/>
+            </a:pPr>
             <a:r>
               <a:rPr lang="en-US" sz="1650" dirty="0">
                 <a:solidFill>
                   <a:srgbClr val="000000"/>
                 </a:solidFill>
-                <a:latin typeface="Segoe UI"/>
-                <a:cs typeface="Segoe UI"/>
+                <a:latin typeface="Arial"/>
+                <a:cs typeface="Arial"/>
               </a:rPr>
               <a:t>Thứ Bảy tuần sau: Đặt vấn đề, Bàn luận, Tóm tắt, Tiêu đề, rồi trình bày</a:t>
             </a:r>
@@ -23271,8 +23079,8 @@
                 <a:solidFill>
                   <a:srgbClr val="1F5C7A"/>
                 </a:solidFill>
-                <a:latin typeface="Segoe UI"/>
-                <a:cs typeface="Segoe UI"/>
+                <a:latin typeface="Arial"/>
+                <a:cs typeface="Arial"/>
               </a:rPr>
               <a:t>Mang về</a:t>
             </a:r>
@@ -23293,8 +23101,8 @@
                 <a:solidFill>
                   <a:srgbClr val="000000"/>
                 </a:solidFill>
-                <a:latin typeface="Segoe UI"/>
-                <a:cs typeface="Segoe UI"/>
+                <a:latin typeface="Arial"/>
+                <a:cs typeface="Arial"/>
               </a:rPr>
               <a:t>Chưa phê duyệt thì không có dữ liệu, kể cả 'vài ca'</a:t>
             </a:r>
@@ -23315,8 +23123,8 @@
                 <a:solidFill>
                   <a:srgbClr val="000000"/>
                 </a:solidFill>
-                <a:latin typeface="Segoe UI"/>
-                <a:cs typeface="Segoe UI"/>
+                <a:latin typeface="Arial"/>
+                <a:cs typeface="Arial"/>
               </a:rPr>
               <a:t>Mọi tác giả đủ bốn tiêu chí; khai báo mọi lợi ích</a:t>
             </a:r>
@@ -23337,8 +23145,8 @@
                 <a:solidFill>
                   <a:srgbClr val="000000"/>
                 </a:solidFill>
-                <a:latin typeface="Segoe UI"/>
-                <a:cs typeface="Segoe UI"/>
+                <a:latin typeface="Arial"/>
+                <a:cs typeface="Arial"/>
               </a:rPr>
               <a:t>Phương pháp = đã làm gì; Kết quả = con số kèm KTC, không bình luận</a:t>
             </a:r>
@@ -23384,8 +23192,8 @@
                 <a:solidFill>
                   <a:srgbClr val="1F5C7A"/>
                 </a:solidFill>
-                <a:latin typeface="Segoe UI"/>
-                <a:cs typeface="Segoe UI"/>
+                <a:latin typeface="Arial"/>
+                <a:cs typeface="Arial"/>
               </a:rPr>
               <a:t>SẢN PHẨM   </a:t>
             </a:r>
@@ -23394,8 +23202,8 @@
                 <a:solidFill>
                   <a:srgbClr val="000000"/>
                 </a:solidFill>
-                <a:latin typeface="Segoe UI"/>
-                <a:cs typeface="Segoe UI"/>
+                <a:latin typeface="Arial"/>
+                <a:cs typeface="Arial"/>
               </a:rPr>
               <a:t>Slide đề cương sẵn sàng; bản nháp Phương pháp + Kết quả đã lưu</a:t>
             </a:r>
@@ -23432,7 +23240,7 @@
                     <a:lumMod val="50000"/>
                   </a:schemeClr>
                 </a:solidFill>
-                <a:latin typeface="Verdana"/>
+                <a:latin typeface="Arial"/>
               </a:rPr>
               <a:t>Neudata | #ClearDataClearImpact</a:t>
             </a:r>
@@ -23562,8 +23370,8 @@
                 <a:solidFill>
                   <a:srgbClr val="0D7377"/>
                 </a:solidFill>
-                <a:latin typeface="Segoe UI"/>
-                <a:cs typeface="Segoe UI"/>
+                <a:latin typeface="Arial"/>
+                <a:cs typeface="Arial"/>
               </a:rPr>
               <a:t>Slide bổ sung  |  Buổi 7</a:t>
             </a:r>
@@ -23632,8 +23440,8 @@
                 <a:solidFill>
                   <a:srgbClr val="0D7377"/>
                 </a:solidFill>
-                <a:latin typeface="Segoe UI"/>
-                <a:cs typeface="Segoe UI"/>
+                <a:latin typeface="Arial"/>
+                <a:cs typeface="Arial"/>
               </a:rPr>
               <a:t>Slide bổ sung: Buổi 7</a:t>
             </a:r>
@@ -23650,8 +23458,8 @@
                 <a:solidFill>
                   <a:srgbClr val="595959"/>
                 </a:solidFill>
-                <a:latin typeface="Segoe UI"/>
-                <a:cs typeface="Segoe UI"/>
+                <a:latin typeface="Arial"/>
+                <a:cs typeface="Arial"/>
               </a:rPr>
               <a:t>Chỉ dùng khi còn thời gian, hoặc để tự học</a:t>
             </a:r>
@@ -23688,7 +23496,7 @@
                     <a:lumMod val="50000"/>
                   </a:schemeClr>
                 </a:solidFill>
-                <a:latin typeface="Verdana"/>
+                <a:latin typeface="Arial"/>
               </a:rPr>
               <a:t>Neudata | #ClearDataClearImpact</a:t>
             </a:r>
@@ -23818,8 +23626,8 @@
                 <a:solidFill>
                   <a:srgbClr val="0D7377"/>
                 </a:solidFill>
-                <a:latin typeface="Segoe UI"/>
-                <a:cs typeface="Segoe UI"/>
+                <a:latin typeface="Arial"/>
+                <a:cs typeface="Arial"/>
               </a:rPr>
               <a:t>IMRaD: hình đồng hồ cát của mọi bài báo</a:t>
             </a:r>
@@ -23915,8 +23723,8 @@
                 <a:solidFill>
                   <a:srgbClr val="FFFFFF"/>
                 </a:solidFill>
-                <a:latin typeface="Segoe UI"/>
-                <a:cs typeface="Segoe UI"/>
+                <a:latin typeface="Arial"/>
+                <a:cs typeface="Arial"/>
               </a:rPr>
               <a:t>THÔNG ĐIỆP CHÍNH   </a:t>
             </a:r>
@@ -23925,8 +23733,8 @@
                 <a:solidFill>
                   <a:srgbClr val="FFFFFF"/>
                 </a:solidFill>
-                <a:latin typeface="Segoe UI"/>
-                <a:cs typeface="Segoe UI"/>
+                <a:latin typeface="Arial"/>
+                <a:cs typeface="Arial"/>
               </a:rPr>
               <a:t>Đặt vấn đề thu hẹp đến câu hỏi; Bàn luận mở rộng trở lại thực hành.</a:t>
             </a:r>
@@ -23963,7 +23771,7 @@
                     <a:lumMod val="50000"/>
                   </a:schemeClr>
                 </a:solidFill>
-                <a:latin typeface="Verdana"/>
+                <a:latin typeface="Arial"/>
               </a:rPr>
               <a:t>Neudata | #ClearDataClearImpact</a:t>
             </a:r>
@@ -24093,8 +23901,8 @@
                 <a:solidFill>
                   <a:srgbClr val="0D7377"/>
                 </a:solidFill>
-                <a:latin typeface="Segoe UI"/>
-                <a:cs typeface="Segoe UI"/>
+                <a:latin typeface="Arial"/>
+                <a:cs typeface="Arial"/>
               </a:rPr>
               <a:t>CRediT: ghi rõ ai làm gì</a:t>
             </a:r>
@@ -24160,8 +23968,8 @@
                 <a:solidFill>
                   <a:srgbClr val="595959"/>
                 </a:solidFill>
-                <a:latin typeface="Segoe UI"/>
-                <a:cs typeface="Segoe UI"/>
+                <a:latin typeface="Arial"/>
+                <a:cs typeface="Arial"/>
               </a:rPr>
               <a:t>Tạp chí ngày nay yêu cầu ghi vai trò từng tác giả theo thuật ngữ chuẩn.</a:t>
             </a:r>
@@ -24203,8 +24011,8 @@
                 <a:solidFill>
                   <a:srgbClr val="FFFFFF"/>
                 </a:solidFill>
-                <a:latin typeface="Segoe UI"/>
-                <a:cs typeface="Segoe UI"/>
+                <a:latin typeface="Arial"/>
+                <a:cs typeface="Arial"/>
               </a:rPr>
               <a:t>14 vai trò CRediT</a:t>
             </a:r>
@@ -24252,8 +24060,8 @@
                 <a:solidFill>
                   <a:srgbClr val="000000"/>
                 </a:solidFill>
-                <a:latin typeface="Segoe UI"/>
-                <a:cs typeface="Segoe UI"/>
+                <a:latin typeface="Arial"/>
+                <a:cs typeface="Arial"/>
               </a:rPr>
               <a:t>Conceptualization, Methodology</a:t>
             </a:r>
@@ -24273,8 +24081,8 @@
                 <a:solidFill>
                   <a:srgbClr val="000000"/>
                 </a:solidFill>
-                <a:latin typeface="Segoe UI"/>
-                <a:cs typeface="Segoe UI"/>
+                <a:latin typeface="Arial"/>
+                <a:cs typeface="Arial"/>
               </a:rPr>
               <a:t>Investigation, Formal analysis</a:t>
             </a:r>
@@ -24294,8 +24102,8 @@
                 <a:solidFill>
                   <a:srgbClr val="000000"/>
                 </a:solidFill>
-                <a:latin typeface="Segoe UI"/>
-                <a:cs typeface="Segoe UI"/>
+                <a:latin typeface="Arial"/>
+                <a:cs typeface="Arial"/>
               </a:rPr>
               <a:t>Writing – original draft</a:t>
             </a:r>
@@ -24315,8 +24123,8 @@
                 <a:solidFill>
                   <a:srgbClr val="000000"/>
                 </a:solidFill>
-                <a:latin typeface="Segoe UI"/>
-                <a:cs typeface="Segoe UI"/>
+                <a:latin typeface="Arial"/>
+                <a:cs typeface="Arial"/>
               </a:rPr>
               <a:t>Writing – review &amp; editing</a:t>
             </a:r>
@@ -24336,8 +24144,8 @@
                 <a:solidFill>
                   <a:srgbClr val="000000"/>
                 </a:solidFill>
-                <a:latin typeface="Segoe UI"/>
-                <a:cs typeface="Segoe UI"/>
+                <a:latin typeface="Arial"/>
+                <a:cs typeface="Arial"/>
               </a:rPr>
               <a:t>Supervision, Funding ...</a:t>
             </a:r>
@@ -24379,8 +24187,8 @@
                 <a:solidFill>
                   <a:srgbClr val="FFFFFF"/>
                 </a:solidFill>
-                <a:latin typeface="Segoe UI"/>
-                <a:cs typeface="Segoe UI"/>
+                <a:latin typeface="Arial"/>
+                <a:cs typeface="Arial"/>
               </a:rPr>
               <a:t>Bài 1 đã làm</a:t>
             </a:r>
@@ -24428,8 +24236,8 @@
                 <a:solidFill>
                   <a:srgbClr val="000000"/>
                 </a:solidFill>
-                <a:latin typeface="Segoe UI"/>
-                <a:cs typeface="Segoe UI"/>
+                <a:latin typeface="Arial"/>
+                <a:cs typeface="Arial"/>
               </a:rPr>
               <a:t>NB: Writing – original draft</a:t>
             </a:r>
@@ -24449,8 +24257,8 @@
                 <a:solidFill>
                   <a:srgbClr val="000000"/>
                 </a:solidFill>
-                <a:latin typeface="Segoe UI"/>
-                <a:cs typeface="Segoe UI"/>
+                <a:latin typeface="Arial"/>
+                <a:cs typeface="Arial"/>
               </a:rPr>
               <a:t>CS: Methodology, Formal analysis</a:t>
             </a:r>
@@ -24470,8 +24278,8 @@
                 <a:solidFill>
                   <a:srgbClr val="000000"/>
                 </a:solidFill>
-                <a:latin typeface="Segoe UI"/>
-                <a:cs typeface="Segoe UI"/>
+                <a:latin typeface="Arial"/>
+                <a:cs typeface="Arial"/>
               </a:rPr>
               <a:t>SDB: Conceptualization, Supervision, Funding acquisition</a:t>
             </a:r>
@@ -24513,8 +24321,8 @@
                 <a:solidFill>
                   <a:srgbClr val="FFFFFF"/>
                 </a:solidFill>
-                <a:latin typeface="Segoe UI"/>
-                <a:cs typeface="Segoe UI"/>
+                <a:latin typeface="Arial"/>
+                <a:cs typeface="Arial"/>
               </a:rPr>
               <a:t>Nhóm bạn, hôm nay</a:t>
             </a:r>
@@ -24562,8 +24370,8 @@
                 <a:solidFill>
                   <a:srgbClr val="000000"/>
                 </a:solidFill>
-                <a:latin typeface="Segoe UI"/>
-                <a:cs typeface="Segoe UI"/>
+                <a:latin typeface="Arial"/>
+                <a:cs typeface="Arial"/>
               </a:rPr>
               <a:t>Thống nhất danh sách tác giả</a:t>
             </a:r>
@@ -24583,8 +24391,8 @@
                 <a:solidFill>
                   <a:srgbClr val="000000"/>
                 </a:solidFill>
-                <a:latin typeface="Segoe UI"/>
-                <a:cs typeface="Segoe UI"/>
+                <a:latin typeface="Arial"/>
+                <a:cs typeface="Arial"/>
               </a:rPr>
               <a:t>Ghi vai trò từng người</a:t>
             </a:r>
@@ -24604,8 +24412,8 @@
                 <a:solidFill>
                   <a:srgbClr val="000000"/>
                 </a:solidFill>
-                <a:latin typeface="Segoe UI"/>
-                <a:cs typeface="Segoe UI"/>
+                <a:latin typeface="Arial"/>
+                <a:cs typeface="Arial"/>
               </a:rPr>
               <a:t>Xem lại trước khi nộp</a:t>
             </a:r>
@@ -24649,8 +24457,8 @@
                 <a:solidFill>
                   <a:srgbClr val="FFFFFF"/>
                 </a:solidFill>
-                <a:latin typeface="Segoe UI"/>
-                <a:cs typeface="Segoe UI"/>
+                <a:latin typeface="Arial"/>
+                <a:cs typeface="Arial"/>
               </a:rPr>
               <a:t>THÔNG ĐIỆP CHÍNH   </a:t>
             </a:r>
@@ -24659,8 +24467,8 @@
                 <a:solidFill>
                   <a:srgbClr val="FFFFFF"/>
                 </a:solidFill>
-                <a:latin typeface="Segoe UI"/>
-                <a:cs typeface="Segoe UI"/>
+                <a:latin typeface="Arial"/>
+                <a:cs typeface="Arial"/>
               </a:rPr>
               <a:t>Vai trò minh bạch ngăn tác giả 'quà tặng' và tác giả 'ma'.</a:t>
             </a:r>
@@ -24697,7 +24505,7 @@
                     <a:lumMod val="50000"/>
                   </a:schemeClr>
                 </a:solidFill>
-                <a:latin typeface="Verdana"/>
+                <a:latin typeface="Arial"/>
               </a:rPr>
               <a:t>Neudata | #ClearDataClearImpact</a:t>
             </a:r>
@@ -24851,8 +24659,8 @@
                 <a:solidFill>
                   <a:srgbClr val="4472C4"/>
                 </a:solidFill>
-                <a:latin typeface="Segoe UI"/>
-                <a:cs typeface="Segoe UI"/>
+                <a:latin typeface="Arial"/>
+                <a:cs typeface="Arial"/>
               </a:rPr>
               <a:t>Copyright © Neudata, 2026</a:t>
             </a:r>
@@ -24997,7 +24805,7 @@
                     <a:lumMod val="50000"/>
                   </a:schemeClr>
                 </a:solidFill>
-                <a:latin typeface="Verdana"/>
+                <a:latin typeface="Arial"/>
               </a:rPr>
               <a:t>Neudata | #ClearDataClearImpact</a:t>
             </a:r>
@@ -25103,8 +24911,8 @@
                 <a:solidFill>
                   <a:srgbClr val="0D7377"/>
                 </a:solidFill>
-                <a:latin typeface="Segoe UI"/>
-                <a:cs typeface="Segoe UI"/>
+                <a:latin typeface="Arial"/>
+                <a:cs typeface="Arial"/>
               </a:rPr>
               <a:t>Đề cương: bản thiết kế của nghiên cứu</a:t>
             </a:r>
@@ -25200,8 +25008,8 @@
                 <a:solidFill>
                   <a:srgbClr val="FFFFFF"/>
                 </a:solidFill>
-                <a:latin typeface="Segoe UI"/>
-                <a:cs typeface="Segoe UI"/>
+                <a:latin typeface="Arial"/>
+                <a:cs typeface="Arial"/>
               </a:rPr>
               <a:t>THÔNG ĐIỆP CHÍNH   </a:t>
             </a:r>
@@ -25210,8 +25018,8 @@
                 <a:solidFill>
                   <a:srgbClr val="FFFFFF"/>
                 </a:solidFill>
-                <a:latin typeface="Segoe UI"/>
-                <a:cs typeface="Segoe UI"/>
+                <a:latin typeface="Arial"/>
+                <a:cs typeface="Arial"/>
               </a:rPr>
               <a:t>Bốn phần đề cương của bạn CHÍNH LÀ khung của một đề cương nghiên cứu.</a:t>
             </a:r>
@@ -25248,7 +25056,7 @@
                     <a:lumMod val="50000"/>
                   </a:schemeClr>
                 </a:solidFill>
-                <a:latin typeface="Verdana"/>
+                <a:latin typeface="Arial"/>
               </a:rPr>
               <a:t>Neudata | #ClearDataClearImpact</a:t>
             </a:r>
@@ -25378,8 +25186,8 @@
                 <a:solidFill>
                   <a:srgbClr val="0D7377"/>
                 </a:solidFill>
-                <a:latin typeface="Segoe UI"/>
-                <a:cs typeface="Segoe UI"/>
+                <a:latin typeface="Arial"/>
+                <a:cs typeface="Arial"/>
               </a:rPr>
               <a:t>Hai bộ nguyên tắc: Helsinki và Thực hành lâm sàng tốt</a:t>
             </a:r>
@@ -25475,8 +25283,8 @@
                 <a:solidFill>
                   <a:srgbClr val="FFFFFF"/>
                 </a:solidFill>
-                <a:latin typeface="Segoe UI"/>
-                <a:cs typeface="Segoe UI"/>
+                <a:latin typeface="Arial"/>
+                <a:cs typeface="Arial"/>
               </a:rPr>
               <a:t>THÔNG ĐIỆP CHÍNH   </a:t>
             </a:r>
@@ -25485,8 +25293,8 @@
                 <a:solidFill>
                   <a:srgbClr val="FFFFFF"/>
                 </a:solidFill>
-                <a:latin typeface="Segoe UI"/>
-                <a:cs typeface="Segoe UI"/>
+                <a:latin typeface="Arial"/>
+                <a:cs typeface="Arial"/>
               </a:rPr>
               <a:t>Helsinki nói TẠI SAO bảo vệ người tham gia; GCP nói LÀM THẾ NÀO cho tốt.</a:t>
             </a:r>
@@ -25523,7 +25331,7 @@
                     <a:lumMod val="50000"/>
                   </a:schemeClr>
                 </a:solidFill>
-                <a:latin typeface="Verdana"/>
+                <a:latin typeface="Arial"/>
               </a:rPr>
               <a:t>Neudata | #ClearDataClearImpact</a:t>
             </a:r>
@@ -25653,8 +25461,8 @@
                 <a:solidFill>
                   <a:srgbClr val="0D7377"/>
                 </a:solidFill>
-                <a:latin typeface="Segoe UI"/>
-                <a:cs typeface="Segoe UI"/>
+                <a:latin typeface="Arial"/>
+                <a:cs typeface="Arial"/>
               </a:rPr>
               <a:t>Hành trình qua hội đồng đạo đức: phê duyệt trước dữ liệu</a:t>
             </a:r>
@@ -25750,8 +25558,8 @@
                 <a:solidFill>
                   <a:srgbClr val="FFFFFF"/>
                 </a:solidFill>
-                <a:latin typeface="Segoe UI"/>
-                <a:cs typeface="Segoe UI"/>
+                <a:latin typeface="Arial"/>
+                <a:cs typeface="Arial"/>
               </a:rPr>
               <a:t>THÔNG ĐIỆP CHÍNH   </a:t>
             </a:r>
@@ -25760,8 +25568,8 @@
                 <a:solidFill>
                   <a:srgbClr val="FFFFFF"/>
                 </a:solidFill>
-                <a:latin typeface="Segoe UI"/>
-                <a:cs typeface="Segoe UI"/>
+                <a:latin typeface="Arial"/>
+                <a:cs typeface="Arial"/>
               </a:rPr>
               <a:t>Chưa có quyết định phê duyệt thì không thu thập dữ liệu, kể cả 'vài ca thôi'.</a:t>
             </a:r>
@@ -25798,7 +25606,7 @@
                     <a:lumMod val="50000"/>
                   </a:schemeClr>
                 </a:solidFill>
-                <a:latin typeface="Verdana"/>
+                <a:latin typeface="Arial"/>
               </a:rPr>
               <a:t>Neudata | #ClearDataClearImpact</a:t>
             </a:r>
@@ -25928,8 +25736,8 @@
                 <a:solidFill>
                   <a:srgbClr val="0D7377"/>
                 </a:solidFill>
-                <a:latin typeface="Segoe UI"/>
-                <a:cs typeface="Segoe UI"/>
+                <a:latin typeface="Arial"/>
+                <a:cs typeface="Arial"/>
               </a:rPr>
               <a:t>Đăng ký trước người tham gia đầu tiên</a:t>
             </a:r>
@@ -26025,8 +25833,8 @@
                 <a:solidFill>
                   <a:srgbClr val="FFFFFF"/>
                 </a:solidFill>
-                <a:latin typeface="Segoe UI"/>
-                <a:cs typeface="Segoe UI"/>
+                <a:latin typeface="Arial"/>
+                <a:cs typeface="Arial"/>
               </a:rPr>
               <a:t>THÔNG ĐIỆP CHÍNH   </a:t>
             </a:r>
@@ -26035,8 +25843,8 @@
                 <a:solidFill>
                   <a:srgbClr val="FFFFFF"/>
                 </a:solidFill>
-                <a:latin typeface="Segoe UI"/>
-                <a:cs typeface="Segoe UI"/>
+                <a:latin typeface="Arial"/>
+                <a:cs typeface="Arial"/>
               </a:rPr>
               <a:t>Thử nghiệm: không đăng ký trước bệnh nhân đầu tiên thì không được công bố.</a:t>
             </a:r>
@@ -26073,7 +25881,7 @@
                     <a:lumMod val="50000"/>
                   </a:schemeClr>
                 </a:solidFill>
-                <a:latin typeface="Verdana"/>
+                <a:latin typeface="Arial"/>
               </a:rPr>
               <a:t>Neudata | #ClearDataClearImpact</a:t>
             </a:r>
@@ -26203,8 +26011,8 @@
                 <a:solidFill>
                   <a:srgbClr val="0D7377"/>
                 </a:solidFill>
-                <a:latin typeface="Segoe UI"/>
-                <a:cs typeface="Segoe UI"/>
+                <a:latin typeface="Arial"/>
+                <a:cs typeface="Arial"/>
               </a:rPr>
               <a:t>Kiểm tra: có cần đăng ký không?</a:t>
             </a:r>
@@ -26274,8 +26082,8 @@
                 <a:solidFill>
                   <a:srgbClr val="FFFFFF"/>
                 </a:solidFill>
-                <a:latin typeface="Segoe UI"/>
-                <a:cs typeface="Segoe UI"/>
+                <a:latin typeface="Arial"/>
+                <a:cs typeface="Arial"/>
               </a:rPr>
               <a:t>CÂU HỎI NHANH   |   2 phút</a:t>
             </a:r>
@@ -26312,25 +26120,19 @@
               <a:spcBef>
                 <a:spcPts val="450"/>
               </a:spcBef>
-              <a:buNone/>
-            </a:pPr>
-            <a:r>
-              <a:rPr lang="en-US" sz="1650" b="1" dirty="0">
-                <a:solidFill>
-                  <a:srgbClr val="6C3483"/>
-                </a:solidFill>
-                <a:latin typeface="Segoe UI"/>
-                <a:cs typeface="Segoe UI"/>
-              </a:rPr>
-              <a:t>1.  </a:t>
-            </a:r>
+              <a:buClr>
+                <a:srgbClr val="6C3483"/>
+              </a:buClr>
+              <a:buFont typeface="Arial"/>
+              <a:buChar char="•"/>
+            </a:pPr>
             <a:r>
               <a:rPr lang="en-US" sz="1650" dirty="0">
                 <a:solidFill>
                   <a:srgbClr val="000000"/>
                 </a:solidFill>
-                <a:latin typeface="Segoe UI"/>
-                <a:cs typeface="Segoe UI"/>
+                <a:latin typeface="Arial"/>
+                <a:cs typeface="Arial"/>
               </a:rPr>
               <a:t>Thử nghiệm ngẫu nhiên so sánh hai loại băng cho loét tì đè</a:t>
             </a:r>
@@ -26343,25 +26145,19 @@
               <a:spcBef>
                 <a:spcPts val="450"/>
               </a:spcBef>
-              <a:buNone/>
-            </a:pPr>
-            <a:r>
-              <a:rPr lang="en-US" sz="1650" b="1" dirty="0">
-                <a:solidFill>
-                  <a:srgbClr val="6C3483"/>
-                </a:solidFill>
-                <a:latin typeface="Segoe UI"/>
-                <a:cs typeface="Segoe UI"/>
-              </a:rPr>
-              <a:t>2.  </a:t>
-            </a:r>
+              <a:buClr>
+                <a:srgbClr val="6C3483"/>
+              </a:buClr>
+              <a:buFont typeface="Arial"/>
+              <a:buChar char="•"/>
+            </a:pPr>
             <a:r>
               <a:rPr lang="en-US" sz="1650" dirty="0">
                 <a:solidFill>
                   <a:srgbClr val="000000"/>
                 </a:solidFill>
-                <a:latin typeface="Segoe UI"/>
-                <a:cs typeface="Segoe UI"/>
+                <a:latin typeface="Arial"/>
+                <a:cs typeface="Arial"/>
               </a:rPr>
               <a:t>Tổng quan hệ thống về chiến lược dịch truyền trong nhiễm khuẩn huyết</a:t>
             </a:r>
@@ -26374,25 +26170,19 @@
               <a:spcBef>
                 <a:spcPts val="450"/>
               </a:spcBef>
-              <a:buNone/>
-            </a:pPr>
-            <a:r>
-              <a:rPr lang="en-US" sz="1650" b="1" dirty="0">
-                <a:solidFill>
-                  <a:srgbClr val="6C3483"/>
-                </a:solidFill>
-                <a:latin typeface="Segoe UI"/>
-                <a:cs typeface="Segoe UI"/>
-              </a:rPr>
-              <a:t>3.  </a:t>
-            </a:r>
+              <a:buClr>
+                <a:srgbClr val="6C3483"/>
+              </a:buClr>
+              <a:buFont typeface="Arial"/>
+              <a:buChar char="•"/>
+            </a:pPr>
             <a:r>
               <a:rPr lang="en-US" sz="1650" dirty="0">
                 <a:solidFill>
                   <a:srgbClr val="000000"/>
                 </a:solidFill>
-                <a:latin typeface="Segoe UI"/>
-                <a:cs typeface="Segoe UI"/>
+                <a:latin typeface="Arial"/>
+                <a:cs typeface="Arial"/>
               </a:rPr>
               <a:t>Đoàn hệ hồi cứu từ hồ sơ ICU (như FLUID-ICU)</a:t>
             </a:r>
@@ -26405,25 +26195,19 @@
               <a:spcBef>
                 <a:spcPts val="450"/>
               </a:spcBef>
-              <a:buNone/>
-            </a:pPr>
-            <a:r>
-              <a:rPr lang="en-US" sz="1650" b="1" dirty="0">
-                <a:solidFill>
-                  <a:srgbClr val="6C3483"/>
-                </a:solidFill>
-                <a:latin typeface="Segoe UI"/>
-                <a:cs typeface="Segoe UI"/>
-              </a:rPr>
-              <a:t>4.  </a:t>
-            </a:r>
+              <a:buClr>
+                <a:srgbClr val="6C3483"/>
+              </a:buClr>
+              <a:buFont typeface="Arial"/>
+              <a:buChar char="•"/>
+            </a:pPr>
             <a:r>
               <a:rPr lang="en-US" sz="1650" dirty="0">
                 <a:solidFill>
                   <a:srgbClr val="000000"/>
                 </a:solidFill>
-                <a:latin typeface="Segoe UI"/>
-                <a:cs typeface="Segoe UI"/>
+                <a:latin typeface="Arial"/>
+                <a:cs typeface="Arial"/>
               </a:rPr>
               <a:t>Đánh giá tuân thủ vệ sinh tay (audit lâm sàng)</a:t>
             </a:r>
@@ -26436,25 +26220,19 @@
               <a:spcBef>
                 <a:spcPts val="450"/>
               </a:spcBef>
-              <a:buNone/>
-            </a:pPr>
-            <a:r>
-              <a:rPr lang="en-US" sz="1650" b="1" dirty="0">
-                <a:solidFill>
-                  <a:srgbClr val="6C3483"/>
-                </a:solidFill>
-                <a:latin typeface="Segoe UI"/>
-                <a:cs typeface="Segoe UI"/>
-              </a:rPr>
-              <a:t>5.  </a:t>
-            </a:r>
+              <a:buClr>
+                <a:srgbClr val="6C3483"/>
+              </a:buClr>
+              <a:buFont typeface="Arial"/>
+              <a:buChar char="•"/>
+            </a:pPr>
             <a:r>
               <a:rPr lang="en-US" sz="1650" dirty="0">
                 <a:solidFill>
                   <a:srgbClr val="000000"/>
                 </a:solidFill>
-                <a:latin typeface="Segoe UI"/>
-                <a:cs typeface="Segoe UI"/>
+                <a:latin typeface="Arial"/>
+                <a:cs typeface="Arial"/>
               </a:rPr>
               <a:t>Giơ: 1 ngón = bắt buộc, 2 = nên, 3 = không cần</a:t>
             </a:r>
@@ -26498,8 +26276,8 @@
                 <a:solidFill>
                   <a:srgbClr val="6C3483"/>
                 </a:solidFill>
-                <a:latin typeface="Segoe UI"/>
-                <a:cs typeface="Segoe UI"/>
+                <a:latin typeface="Arial"/>
+                <a:cs typeface="Arial"/>
               </a:rPr>
               <a:t>Đáp án</a:t>
             </a:r>
@@ -26520,10 +26298,10 @@
                 <a:solidFill>
                   <a:srgbClr val="000000"/>
                 </a:solidFill>
-                <a:latin typeface="Segoe UI"/>
-                <a:cs typeface="Segoe UI"/>
-              </a:rPr>
-              <a:t>1. Bắt buộc: cơ sở đăng ký thử nghiệm, trước bệnh nhân 1</a:t>
+                <a:latin typeface="Arial"/>
+                <a:cs typeface="Arial"/>
+              </a:rPr>
+              <a:t>Bắt buộc: cơ sở đăng ký thử nghiệm, trước bệnh nhân 1</a:t>
             </a:r>
           </a:p>
           <a:p>
@@ -26542,10 +26320,10 @@
                 <a:solidFill>
                   <a:srgbClr val="000000"/>
                 </a:solidFill>
-                <a:latin typeface="Segoe UI"/>
-                <a:cs typeface="Segoe UI"/>
-              </a:rPr>
-              <a:t>2. Nên: PROSPERO</a:t>
+                <a:latin typeface="Arial"/>
+                <a:cs typeface="Arial"/>
+              </a:rPr>
+              <a:t>Nên: PROSPERO</a:t>
             </a:r>
           </a:p>
           <a:p>
@@ -26564,10 +26342,10 @@
                 <a:solidFill>
                   <a:srgbClr val="000000"/>
                 </a:solidFill>
-                <a:latin typeface="Segoe UI"/>
-                <a:cs typeface="Segoe UI"/>
-              </a:rPr>
-              <a:t>3. Khuyến khích, không bắt buộc</a:t>
+                <a:latin typeface="Arial"/>
+                <a:cs typeface="Arial"/>
+              </a:rPr>
+              <a:t>Khuyến khích, không bắt buộc</a:t>
             </a:r>
           </a:p>
           <a:p>
@@ -26586,10 +26364,10 @@
                 <a:solidFill>
                   <a:srgbClr val="000000"/>
                 </a:solidFill>
-                <a:latin typeface="Segoe UI"/>
-                <a:cs typeface="Segoe UI"/>
-              </a:rPr>
-              <a:t>4. Audit: không đăng ký nghiên cứu; phê duyệt nội bộ</a:t>
+                <a:latin typeface="Arial"/>
+                <a:cs typeface="Arial"/>
+              </a:rPr>
+              <a:t>Audit: không đăng ký nghiên cứu; phê duyệt nội bộ</a:t>
             </a:r>
           </a:p>
         </p:txBody>
@@ -26624,7 +26402,7 @@
                     <a:lumMod val="50000"/>
                   </a:schemeClr>
                 </a:solidFill>
-                <a:latin typeface="Verdana"/>
+                <a:latin typeface="Arial"/>
               </a:rPr>
               <a:t>Neudata | #ClearDataClearImpact</a:t>
             </a:r>
@@ -26741,7 +26519,7 @@
     </a:clrScheme>
     <a:fontScheme name="Office">
       <a:majorFont>
-        <a:latin typeface="Calibri"/>
+        <a:latin typeface="Arial"/>
         <a:ea typeface=""/>
         <a:cs typeface=""/>
         <a:font script="Jpan" typeface="ＭＳ Ｐゴシック"/>
@@ -26776,7 +26554,7 @@
         <a:font script="Geor" typeface="Sylfaen"/>
       </a:majorFont>
       <a:minorFont>
-        <a:latin typeface="Calibri"/>
+        <a:latin typeface="Arial"/>
         <a:ea typeface=""/>
         <a:cs typeface=""/>
         <a:font script="Jpan" typeface="ＭＳ Ｐゴシック"/>
@@ -27061,7 +26839,7 @@
     </a:clrScheme>
     <a:fontScheme name="Office">
       <a:majorFont>
-        <a:latin typeface="Calibri Light" panose="020F0302020204030204"/>
+        <a:latin typeface="Arial" panose="020F0302020204030204"/>
         <a:ea typeface=""/>
         <a:cs typeface=""/>
         <a:font script="Jpan" typeface="游ゴシック Light"/>
@@ -27096,7 +26874,7 @@
         <a:font script="Geor" typeface="Sylfaen"/>
       </a:majorFont>
       <a:minorFont>
-        <a:latin typeface="Calibri" panose="020F0502020204030204"/>
+        <a:latin typeface="Arial" panose="020F0502020204030204"/>
         <a:ea typeface=""/>
         <a:cs typeface=""/>
         <a:font script="Jpan" typeface="游ゴシック"/>
@@ -27322,7 +27100,7 @@
     </a:clrScheme>
     <a:fontScheme name="Office">
       <a:majorFont>
-        <a:latin typeface="Calibri Light" panose="020F0302020204030204"/>
+        <a:latin typeface="Arial" panose="020F0302020204030204"/>
         <a:ea typeface=""/>
         <a:cs typeface=""/>
         <a:font script="Jpan" typeface="游ゴシック Light"/>
@@ -27357,7 +27135,7 @@
         <a:font script="Geor" typeface="Sylfaen"/>
       </a:majorFont>
       <a:minorFont>
-        <a:latin typeface="Calibri" panose="020F0502020204030204"/>
+        <a:latin typeface="Arial" panose="020F0502020204030204"/>
         <a:ea typeface=""/>
         <a:cs typeface=""/>
         <a:font script="Jpan" typeface="游ゴシック"/>

--- a/vi/files/slides/Session_7_VN.pptx
+++ b/vi/files/slides/Session_7_VN.pptx
@@ -733,7 +733,7 @@
           <a:p>
             <a:r>
               <a:rPr lang="en-US" sz="1400" b="0" dirty="0"/>
-              <a:t>Buổi 7 (19:30). Trực tuyến, 19:30-22:30, giải lao 15 phút lúc 20:45. Hai nửa: trước giải lao chúng ta bảo vệ người bệnh và khoa học (đạo đức, liêm chính) và làm mẫu Phần 4 của đề cương. Sau giải lao chúng ta bắt đầu viết bản thảo FLUID-ICU.</a:t>
+              <a:t>Buổi 7 (19:30). Trực tuyến, 19:30-22:30, giải lao 15 phút lúc 20:45. Hai nửa: trước giải lao là bảo vệ người bệnh và khoa học (đạo đức, liêm chính) và làm mẫu Phần 4 của đề cương. Sau giải lao bắt đầu viết bản thảo FLUID-ICU.</a:t>
             </a:r>
           </a:p>
           <a:p>
@@ -1363,7 +1363,7 @@
           <a:p>
             <a:r>
               <a:rPr lang="en-US" sz="1400" b="0" dirty="0"/>
-              <a:t>Giọng điệu: không phải để 'bắt lỗi'. Phần lớn vấn đề liêm chính bắt đầu từ những lối tắt nhỏ khi bị áp lực: một giá trị thiếu 'được điền vào', một giá trị ngoại lai 'được làm sạch', thêm sếp vào danh sách tác giả. Chúng ta muốn mọi người nhận ra con dốc này sớm.</a:t>
+              <a:t>Giọng điệu: không phải để 'bắt lỗi'. Phần lớn vấn đề liêm chính bắt đầu từ những lối tắt nhỏ khi bị áp lực: một giá trị thiếu 'được điền vào', một giá trị ngoại lai 'được làm sạch', thêm sếp vào danh sách tác giả. Mục tiêu là nhận ra sớm những bước trượt nhỏ này.</a:t>
             </a:r>
           </a:p>
           <a:p>
@@ -1591,7 +1591,7 @@
           <a:p>
             <a:r>
               <a:rPr lang="en-US" sz="1400" b="0" dirty="0"/>
-              <a:t>Hỏi: kết cục chính của Bài 1 là âm tính. Vì sao việc nó được công bố lại quan trọng? Đáp án: sai lệch công bố. Nếu chỉ thử nghiệm dương tính được đăng, y văn sẽ phóng đại lợi ích.</a:t>
+              <a:t>Hỏi: kết cục chính của Bài 1 là âm tính. Vì sao việc nó được công bố lại quan trọng? Đáp án: sai lệch công bố. Nếu chỉ thử nghiệm dương tính được đăng, các bài đã công bố sẽ phóng đại lợi ích.</a:t>
             </a:r>
           </a:p>
         </p:txBody>
@@ -1900,7 +1900,7 @@
           <a:p>
             <a:r>
               <a:rPr lang="en-US" sz="1400" b="0" dirty="0"/>
-              <a:t>Câu 1 nối thẳng với phần viết hôm nay: trong Kết quả ta báo cáo cả ước lượng thô và hiệu chỉnh (mục STROBE 16), và trong Bàn luận ta giải thích vì sao chúng khác nhau.</a:t>
+              <a:t>Câu 1 nối thẳng với phần viết hôm nay: trong Kết quả báo cáo cả ước lượng thô và hiệu chỉnh (mục STROBE 16), và trong Bàn luận giải thích vì sao chúng khác nhau.</a:t>
             </a:r>
           </a:p>
           <a:p>
@@ -2092,7 +2092,7 @@
           <a:p>
             <a:r>
               <a:rPr lang="en-US" sz="1400" b="0" dirty="0"/>
-              <a:t>Ý chính: quan điểm hiện nay của ICMJE và COPE (Ủy ban Đạo đức Xuất bản). Công cụ ai không thể là tác giả, vì không thể nhận trách nhiệm về công trình. Tác giả dùng AI phải công khai (hỗ trợ viết thường ghi ở Lời cảm ơn, dùng trong thu thập, phân tích dữ liệu hay tạo hình ghi ở phần Phương pháp) và vẫn chịu hoàn toàn trách nhiệm về từng chữ, con số và tài liệu tham khảo, kể cả phần do công cụ tạo ra.</a:t>
+              <a:t>Ý chính: quan điểm hiện nay của ICMJE và COPE (Ủy ban Đạo đức Xuất bản). Công cụ AI không thể là tác giả, vì không thể nhận trách nhiệm về công trình. Tác giả dùng AI phải công khai (hỗ trợ viết thường ghi ở Lời cảm ơn, dùng trong thu thập, phân tích dữ liệu hay tạo hình ghi ở phần Phương pháp) và vẫn chịu hoàn toàn trách nhiệm về từng chữ, con số và tài liệu tham khảo, kể cả phần do công cụ tạo ra.</a:t>
             </a:r>
           </a:p>
           <a:p>
@@ -2122,7 +2122,7 @@
           <a:p>
             <a:r>
               <a:rPr lang="en-US" sz="1400" b="0" dirty="0"/>
-              <a:t>Hỏi: một đồng nghiệp nhờ chatbot 'viết phần bàn luận' rồi nộp mà không đọc. Vi phạm những điểm không bao giờ nào? Đáp án: tài liệu tham khảo có thể bị bịa, văn bản không ai chịu trách nhiệm, và không công khai.</a:t>
+              <a:t>Hỏi: một đồng nghiệp nhờ chatbot 'viết phần bàn luận' rồi nộp mà không đọc. Đã vi phạm những điều cấm nào? Đáp án: tài liệu tham khảo có thể bị bịa, văn bản không ai chịu trách nhiệm, và không công khai.</a:t>
             </a:r>
           </a:p>
         </p:txBody>
@@ -2221,7 +2221,7 @@
           <a:p>
             <a:r>
               <a:rPr lang="en-US" sz="1400" b="0" dirty="0"/>
-              <a:t>Nếu lớp chia rẽ, đó chính là lúc dạy.</a:t>
+              <a:t>Nếu lớp chia rẽ, đó là lúc tốt nhất để giảng.</a:t>
             </a:r>
           </a:p>
         </p:txBody>
@@ -2302,7 +2302,7 @@
           <a:p>
             <a:r>
               <a:rPr lang="en-US" sz="1400" b="0" dirty="0"/>
-              <a:t>Xây dựng đề cương 7 (20:30-20:45). Cả lớp. Chia sẻ phiếu Phần B và điền trực tiếp cho ví dụ xuyên suốt: nghiên cứu thuần tập hồi cứu về cân bằng dịch và tử vong 28 ngày ở người lớn sốc nhiễm khuẩn tại ICU của ta (đáp án mẫu: Course/Solutions/s7_solutions.md, Phần B). Với mỗi câu, mời hai ba người trả lời và gõ câu tốt nhất.</a:t>
+              <a:t>Xây dựng đề cương 7 (20:30-20:45). Cả lớp. Chia sẻ phiếu Phần B và điền trực tiếp cho ví dụ xuyên suốt: nghiên cứu thuần tập hồi cứu về cân bằng dịch và tử vong 28 ngày ở người lớn sốc nhiễm khuẩn tại ICU của mình (đáp án mẫu: Course/Solutions/s7_solutions.md, Phần B). Với mỗi câu, mời hai ba người trả lời và gõ câu tốt nhất.</a:t>
             </a:r>
           </a:p>
           <a:p>
@@ -2401,7 +2401,7 @@
           <a:p>
             <a:r>
               <a:rPr lang="en-US" sz="1400" b="0" dirty="0"/>
-              <a:t>Slide chỉ có hình, có chủ ý. Trước giờ giải lao, nói: ta quay lại lúc 21:00 với phần 7.3, viết bài báo (35 phút), rồi thực hành bản thảo 1 (45 phút). Trong giờ giải lao, mở gói kết quả phân tích của câu hỏi bạn đã chọn (Q1 đến Q5) và mẫu bản thảo (Course/Templates/Manuscript_Template_IMRaD). Ai chưa chọn câu hỏi thì chọn ngay bây giờ.</a:t>
+              <a:t>Slide chỉ có hình, có chủ ý. Trước giờ giải lao, nói: lớp quay lại lúc 21:00 với phần 7.3, viết bài báo (35 phút), rồi thực hành bản thảo 1 (45 phút). Trong giờ giải lao, mở gói kết quả phân tích của câu hỏi bạn đã chọn (Q1 đến Q5) và mẫu bản thảo (Course/Templates/Manuscript_Template_IMRaD). Ai chưa chọn câu hỏi thì chọn ngay bây giờ.</a:t>
             </a:r>
           </a:p>
           <a:p>
@@ -2803,7 +2803,7 @@
           <a:p>
             <a:r>
               <a:rPr lang="en-US" sz="1400" b="0" dirty="0"/>
-              <a:t>STROBE 10 (cỡ mẫu): với một nghiên cứu thuần tập cố định ta không bịa ra phép tính cỡ mẫu. Chỉ nói đã đưa vào toàn bộ người bệnh đủ tiêu chuẩn.</a:t>
+              <a:t>STROBE 10 (cỡ mẫu): với một nghiên cứu thuần tập cố định, không bịa ra phép tính cỡ mẫu. Chỉ nói đã đưa vào toàn bộ người bệnh đủ tiêu chuẩn.</a:t>
             </a:r>
           </a:p>
           <a:p>
@@ -3013,7 +3013,7 @@
           <a:p>
             <a:r>
               <a:rPr lang="en-US" sz="1400" b="0" dirty="0"/>
-              <a:t>Nhắc lại tên hai bài báo: Bài 1 (Boulet 2024) là thử nghiệm ngẫu nhiên về hạn chế dịch trong sốc nhiễm khuẩn (48 người bệnh). Bài 2 (Hyun 2023) là nghiên cứu thuần tập về cân bằng dịch và tử vong trong nhiễm khuẩn huyết (2 516 người bệnh). Cả buổi ta dùng chúng làm ví dụ về cách làm tốt và chưa tốt.</a:t>
+              <a:t>Nhắc lại tên hai bài báo: Bài 1 (Boulet 2024) là thử nghiệm ngẫu nhiên về hạn chế dịch trong sốc nhiễm khuẩn (48 người bệnh). Bài 2 (Hyun 2023) là nghiên cứu thuần tập về cân bằng dịch và tử vong trong nhiễm khuẩn huyết (2516 người bệnh). Cả buổi dùng chúng làm ví dụ về cách làm tốt và chưa tốt.</a:t>
             </a:r>
           </a:p>
           <a:p>
@@ -3106,7 +3106,7 @@
           <a:p>
             <a:r>
               <a:rPr lang="en-US" sz="1400" b="0" dirty="0"/>
-              <a:t>2) Con số kèm khoảng tin cậy, không phải 'p = 0.42, KCYN'. Phân tích 48 trên 50 người bệnh đã phân nhóm là phân tích theo ý định điều trị có điều chỉnh và nên gọi đúng tên (#24).</a:t>
+              <a:t>2) Con số kèm khoảng tin cậy, không phải 'p = 0.42, không có ý nghĩa'. Phân tích 48 trên 50 người bệnh đã phân nhóm là phân tích theo ý định điều trị có điều chỉnh và nên gọi đúng tên (#24).</a:t>
             </a:r>
           </a:p>
           <a:p>
@@ -3316,13 +3316,13 @@
           <a:p>
             <a:r>
               <a:rPr lang="en-US" sz="1400" b="0" dirty="0"/>
-              <a:t>Ý chính: người phản biện và bác sĩ đọc bảng kỹ hơn văn bản. Bảng phải tự đứng được: tiêu đề nói cái gì, ở ai, khi nào, n ở mỗi tiêu đề cột. Đơn vị và cách tóm tắt ở mỗi dòng. Chú thích giải nghĩa từ viết tắt và dữ liệu bị thiếu. Hình là Bảng 1 của Bài 1, vẽ lại.</a:t>
+              <a:t>Ý chính: người phản biện và bác sĩ đọc bảng kỹ hơn văn bản. Bảng phải tự giải thích được: tiêu đề nói cái gì, ở ai, khi nào, n ở mỗi tiêu đề cột. Đơn vị và cách tóm tắt ở mỗi dòng. Chú thích giải nghĩa từ viết tắt và dữ liệu bị thiếu. Hình là Bảng 1 của Bài 1, vẽ lại.</a:t>
             </a:r>
           </a:p>
           <a:p>
             <a:r>
               <a:rPr lang="en-US" sz="1400" b="0" dirty="0"/>
-              <a:t>Thực hành tốt: Bảng 1 Bài 1 có n mỗi cột, SD hoặc IQR mỗi dòng và không có giá trị p ban đầu, đúng cho thử nghiệm ngẫu nhiên (chú giải #31). Bảng 1 Bài 2 thêm SMD (chênh lệch trung bình chuẩn hóa) và chú thích số người bệnh thiếu dữ liệu (#30). hình trục thời gian có chú thích tự đủ nghĩa (#21).</a:t>
+              <a:t>Thực hành tốt: Bảng 1 Bài 1 có n mỗi cột, SD hoặc IQR mỗi dòng và không có giá trị p ban đầu, đúng cho thử nghiệm ngẫu nhiên (chú giải #31). Bảng 1 Bài 2 thêm SMD (chênh lệch trung bình chuẩn hóa) và chú thích số người bệnh thiếu dữ liệu (#30). Hình trục thời gian có chú thích tự đủ nghĩa (#21).</a:t>
             </a:r>
           </a:p>
           <a:p>
@@ -3829,7 +3829,7 @@
           <a:p>
             <a:r>
               <a:rPr lang="en-US" sz="1400" b="0" dirty="0"/>
-              <a:t>Câu gợi ý cho lớp: 'Đoạn phân tích thống kê ở đâu?' 'Ta đã hiệu chỉnh theo gì?' 'Có con số nào không có khoảng tin cậy?' 'Có tính từ ("có ý nghĩa", "mạnh") nào lẽ ra phải là con số?' 'Có lời diễn giải nào trong phần Kết quả không?'</a:t>
+              <a:t>Câu gợi ý cho lớp: 'Đoạn phân tích thống kê ở đâu?' 'Đã hiệu chỉnh theo gì?' 'Có con số nào không có khoảng tin cậy?' 'Có tính từ ("có ý nghĩa", "mạnh") nào lẽ ra phải là con số?' 'Có lời diễn giải nào trong phần Kết quả không?'</a:t>
             </a:r>
           </a:p>
           <a:p>
@@ -4864,7 +4864,7 @@
           <a:p>
             <a:r>
               <a:rPr lang="en-US" sz="1400" b="0" dirty="0"/>
-              <a:t>Bình chọn: điểm nào trong 12 điểm này khó thực hiện nhất ở khoa ta? Thường là dữ liệu tin cậy (hồ sơ thiếu) hoặc thời gian dành riêng cho nghiên cứu.</a:t>
+              <a:t>Bình chọn: điểm nào trong 12 điểm này khó thực hiện nhất ở khoa của bạn? Thường là dữ liệu tin cậy (hồ sơ thiếu) hoặc thời gian dành riêng cho nghiên cứu.</a:t>
             </a:r>
           </a:p>
         </p:txBody>
@@ -4945,7 +4945,7 @@
           <a:p>
             <a:r>
               <a:rPr lang="en-US" sz="1400" b="0" dirty="0"/>
-              <a:t>Đi qua sáu bước từ trái sang phải. Phần lớn cơ sở yêu cầu thẩm định khoa học hoặc cấp khoa trước. sau đó hồ sơ được nộp cho hội đồng đạo đức trong nghiên cứu y sinh học (còn gọi là IRB hoặc IEC).</a:t>
+              <a:t>Đi qua sáu bước từ trái sang phải. Phần lớn cơ sở yêu cầu thẩm định khoa học hoặc cấp khoa trước, sau đó hồ sơ được nộp cho hội đồng đạo đức trong nghiên cứu y sinh học (còn gọi là IRB hoặc IEC).</a:t>
             </a:r>
           </a:p>
           <a:p>
@@ -5056,7 +5056,7 @@
           <a:p>
             <a:r>
               <a:rPr lang="en-US" sz="1400" b="0" dirty="0"/>
-              <a:t>Ý chính: đăng ký đưa sự tồn tại, thiết kế và kết cục chính của nghiên cứu lên hồ sơ công khai Trước khi đưa bất kỳ ai vào. Điều này ngăn việc giấu các nghiên cứu âm tính và đổi kết cục.</a:t>
+              <a:t>Ý chính: đăng ký đưa sự tồn tại, thiết kế và kết cục chính của nghiên cứu lên hồ sơ công khai trước khi đưa bất kỳ ai vào. Điều này ngăn việc giấu các nghiên cứu âm tính và đổi kết cục.</a:t>
             </a:r>
           </a:p>
           <a:p>
@@ -8384,7 +8384,7 @@
                 <a:latin typeface="Arial"/>
                 <a:cs typeface="Arial"/>
               </a:rPr>
-              <a:t>19:40  7.1  Đề cương chi tiết, đạo đức, sự đồng ý, đăng ký, tính khả thi</a:t>
+              <a:t>19:40  7.1  Đề cương chi tiết, đạo đức, sự đồng ý, đăng ký, tính khả thi</a:t>
             </a:r>
           </a:p>
           <a:p>
@@ -9040,12 +9040,12 @@
           </a:ln>
         </p:spPr>
         <p:txBody>
-          <a:bodyPr wrap="square" lIns="137160" tIns="91440" rIns="137160" bIns="91440" rtlCol="0" anchor="t">
+          <a:bodyPr wrap="square" lIns="137160" tIns="91440" rIns="137160" bIns="91440" rtlCol="0" anchor="ctr">
             <a:normAutofit/>
           </a:bodyPr>
           <a:lstStyle/>
           <a:p>
-            <a:pPr marL="0" indent="0" algn="l">
+            <a:pPr marL="0" indent="0" algn="ctr">
               <a:lnSpc>
                 <a:spcPct val="104000"/>
               </a:lnSpc>
@@ -9066,7 +9066,7 @@
             </a:r>
           </a:p>
           <a:p>
-            <a:pPr marL="0" indent="0" algn="l">
+            <a:pPr marL="0" indent="0" algn="ctr">
               <a:lnSpc>
                 <a:spcPct val="104000"/>
               </a:lnSpc>
@@ -9087,7 +9087,7 @@
             </a:r>
           </a:p>
           <a:p>
-            <a:pPr marL="0" indent="0" algn="l">
+            <a:pPr marL="0" indent="0" algn="ctr">
               <a:lnSpc>
                 <a:spcPct val="104000"/>
               </a:lnSpc>
@@ -9174,12 +9174,12 @@
           </a:ln>
         </p:spPr>
         <p:txBody>
-          <a:bodyPr wrap="square" lIns="137160" tIns="91440" rIns="137160" bIns="91440" rtlCol="0" anchor="t">
+          <a:bodyPr wrap="square" lIns="137160" tIns="91440" rIns="137160" bIns="91440" rtlCol="0" anchor="ctr">
             <a:normAutofit/>
           </a:bodyPr>
           <a:lstStyle/>
           <a:p>
-            <a:pPr marL="0" indent="0" algn="l">
+            <a:pPr marL="0" indent="0" algn="ctr">
               <a:lnSpc>
                 <a:spcPct val="104000"/>
               </a:lnSpc>
@@ -9200,7 +9200,7 @@
             </a:r>
           </a:p>
           <a:p>
-            <a:pPr marL="0" indent="0" algn="l">
+            <a:pPr marL="0" indent="0" algn="ctr">
               <a:lnSpc>
                 <a:spcPct val="104000"/>
               </a:lnSpc>
@@ -9221,7 +9221,7 @@
             </a:r>
           </a:p>
           <a:p>
-            <a:pPr marL="0" indent="0" algn="l">
+            <a:pPr marL="0" indent="0" algn="ctr">
               <a:lnSpc>
                 <a:spcPct val="104000"/>
               </a:lnSpc>
@@ -9308,12 +9308,12 @@
           </a:ln>
         </p:spPr>
         <p:txBody>
-          <a:bodyPr wrap="square" lIns="137160" tIns="91440" rIns="137160" bIns="91440" rtlCol="0" anchor="t">
+          <a:bodyPr wrap="square" lIns="137160" tIns="91440" rIns="137160" bIns="91440" rtlCol="0" anchor="ctr">
             <a:normAutofit/>
           </a:bodyPr>
           <a:lstStyle/>
           <a:p>
-            <a:pPr marL="0" indent="0" algn="l">
+            <a:pPr marL="0" indent="0" algn="ctr">
               <a:lnSpc>
                 <a:spcPct val="104000"/>
               </a:lnSpc>
@@ -9334,7 +9334,7 @@
             </a:r>
           </a:p>
           <a:p>
-            <a:pPr marL="0" indent="0" algn="l">
+            <a:pPr marL="0" indent="0" algn="ctr">
               <a:lnSpc>
                 <a:spcPct val="104000"/>
               </a:lnSpc>
@@ -9355,7 +9355,7 @@
             </a:r>
           </a:p>
           <a:p>
-            <a:pPr marL="0" indent="0" algn="l">
+            <a:pPr marL="0" indent="0" algn="ctr">
               <a:lnSpc>
                 <a:spcPct val="104000"/>
               </a:lnSpc>
@@ -10436,12 +10436,12 @@
           </a:ln>
         </p:spPr>
         <p:txBody>
-          <a:bodyPr wrap="square" lIns="137160" tIns="91440" rIns="137160" bIns="91440" rtlCol="0" anchor="t">
+          <a:bodyPr wrap="square" lIns="137160" tIns="91440" rIns="137160" bIns="91440" rtlCol="0" anchor="ctr">
             <a:normAutofit/>
           </a:bodyPr>
           <a:lstStyle/>
           <a:p>
-            <a:pPr marL="0" indent="0" algn="l">
+            <a:pPr marL="0" indent="0" algn="ctr">
               <a:lnSpc>
                 <a:spcPct val="104000"/>
               </a:lnSpc>
@@ -10462,7 +10462,7 @@
             </a:r>
           </a:p>
           <a:p>
-            <a:pPr marL="0" indent="0" algn="l">
+            <a:pPr marL="0" indent="0" algn="ctr">
               <a:lnSpc>
                 <a:spcPct val="104000"/>
               </a:lnSpc>
@@ -10483,7 +10483,7 @@
             </a:r>
           </a:p>
           <a:p>
-            <a:pPr marL="0" indent="0" algn="l">
+            <a:pPr marL="0" indent="0" algn="ctr">
               <a:lnSpc>
                 <a:spcPct val="104000"/>
               </a:lnSpc>
@@ -10570,12 +10570,12 @@
           </a:ln>
         </p:spPr>
         <p:txBody>
-          <a:bodyPr wrap="square" lIns="137160" tIns="91440" rIns="137160" bIns="91440" rtlCol="0" anchor="t">
+          <a:bodyPr wrap="square" lIns="137160" tIns="91440" rIns="137160" bIns="91440" rtlCol="0" anchor="ctr">
             <a:normAutofit/>
           </a:bodyPr>
           <a:lstStyle/>
           <a:p>
-            <a:pPr marL="0" indent="0" algn="l">
+            <a:pPr marL="0" indent="0" algn="ctr">
               <a:lnSpc>
                 <a:spcPct val="104000"/>
               </a:lnSpc>
@@ -10596,7 +10596,7 @@
             </a:r>
           </a:p>
           <a:p>
-            <a:pPr marL="0" indent="0" algn="l">
+            <a:pPr marL="0" indent="0" algn="ctr">
               <a:lnSpc>
                 <a:spcPct val="104000"/>
               </a:lnSpc>
@@ -10683,12 +10683,12 @@
           </a:ln>
         </p:spPr>
         <p:txBody>
-          <a:bodyPr wrap="square" lIns="137160" tIns="91440" rIns="137160" bIns="91440" rtlCol="0" anchor="t">
+          <a:bodyPr wrap="square" lIns="137160" tIns="91440" rIns="137160" bIns="91440" rtlCol="0" anchor="ctr">
             <a:normAutofit/>
           </a:bodyPr>
           <a:lstStyle/>
           <a:p>
-            <a:pPr marL="0" indent="0" algn="l">
+            <a:pPr marL="0" indent="0" algn="ctr">
               <a:lnSpc>
                 <a:spcPct val="104000"/>
               </a:lnSpc>
@@ -10709,7 +10709,7 @@
             </a:r>
           </a:p>
           <a:p>
-            <a:pPr marL="0" indent="0" algn="l">
+            <a:pPr marL="0" indent="0" algn="ctr">
               <a:lnSpc>
                 <a:spcPct val="104000"/>
               </a:lnSpc>
@@ -10730,7 +10730,7 @@
             </a:r>
           </a:p>
           <a:p>
-            <a:pPr marL="0" indent="0" algn="l">
+            <a:pPr marL="0" indent="0" algn="ctr">
               <a:lnSpc>
                 <a:spcPct val="104000"/>
               </a:lnSpc>
@@ -10817,12 +10817,12 @@
           </a:ln>
         </p:spPr>
         <p:txBody>
-          <a:bodyPr wrap="square" lIns="137160" tIns="91440" rIns="137160" bIns="91440" rtlCol="0" anchor="t">
+          <a:bodyPr wrap="square" lIns="137160" tIns="91440" rIns="137160" bIns="91440" rtlCol="0" anchor="ctr">
             <a:normAutofit/>
           </a:bodyPr>
           <a:lstStyle/>
           <a:p>
-            <a:pPr marL="0" indent="0" algn="l">
+            <a:pPr marL="0" indent="0" algn="ctr">
               <a:lnSpc>
                 <a:spcPct val="104000"/>
               </a:lnSpc>
@@ -10843,7 +10843,7 @@
             </a:r>
           </a:p>
           <a:p>
-            <a:pPr marL="0" indent="0" algn="l">
+            <a:pPr marL="0" indent="0" algn="ctr">
               <a:lnSpc>
                 <a:spcPct val="104000"/>
               </a:lnSpc>
@@ -10864,7 +10864,7 @@
             </a:r>
           </a:p>
           <a:p>
-            <a:pPr marL="0" indent="0" algn="l">
+            <a:pPr marL="0" indent="0" algn="ctr">
               <a:lnSpc>
                 <a:spcPct val="104000"/>
               </a:lnSpc>
@@ -11104,7 +11104,7 @@
                 <a:latin typeface="Arial"/>
                 <a:cs typeface="Arial"/>
               </a:rPr>
-              <a:t>Tính khả thi: năm câu hỏi trung thực</a:t>
+              <a:t>Tính khả thi: năm câu hỏi trung thực</a:t>
             </a:r>
           </a:p>
         </p:txBody>
@@ -11202,12 +11202,12 @@
           </a:ln>
         </p:spPr>
         <p:txBody>
-          <a:bodyPr wrap="square" lIns="137160" tIns="91440" rIns="137160" bIns="91440" rtlCol="0" anchor="t">
+          <a:bodyPr wrap="square" lIns="137160" tIns="91440" rIns="137160" bIns="91440" rtlCol="0" anchor="ctr">
             <a:normAutofit/>
           </a:bodyPr>
           <a:lstStyle/>
           <a:p>
-            <a:pPr marL="0" indent="0" algn="l">
+            <a:pPr marL="0" indent="0" algn="ctr">
               <a:lnSpc>
                 <a:spcPct val="104000"/>
               </a:lnSpc>
@@ -11228,7 +11228,7 @@
             </a:r>
           </a:p>
           <a:p>
-            <a:pPr marL="0" indent="0" algn="l">
+            <a:pPr marL="0" indent="0" algn="ctr">
               <a:lnSpc>
                 <a:spcPct val="104000"/>
               </a:lnSpc>
@@ -11249,7 +11249,7 @@
             </a:r>
           </a:p>
           <a:p>
-            <a:pPr marL="0" indent="0" algn="l">
+            <a:pPr marL="0" indent="0" algn="ctr">
               <a:lnSpc>
                 <a:spcPct val="104000"/>
               </a:lnSpc>
@@ -11336,12 +11336,12 @@
           </a:ln>
         </p:spPr>
         <p:txBody>
-          <a:bodyPr wrap="square" lIns="137160" tIns="91440" rIns="137160" bIns="91440" rtlCol="0" anchor="t">
+          <a:bodyPr wrap="square" lIns="137160" tIns="91440" rIns="137160" bIns="91440" rtlCol="0" anchor="ctr">
             <a:normAutofit/>
           </a:bodyPr>
           <a:lstStyle/>
           <a:p>
-            <a:pPr marL="0" indent="0" algn="l">
+            <a:pPr marL="0" indent="0" algn="ctr">
               <a:lnSpc>
                 <a:spcPct val="104000"/>
               </a:lnSpc>
@@ -11362,7 +11362,7 @@
             </a:r>
           </a:p>
           <a:p>
-            <a:pPr marL="0" indent="0" algn="l">
+            <a:pPr marL="0" indent="0" algn="ctr">
               <a:lnSpc>
                 <a:spcPct val="104000"/>
               </a:lnSpc>
@@ -11383,7 +11383,7 @@
             </a:r>
           </a:p>
           <a:p>
-            <a:pPr marL="0" indent="0" algn="l">
+            <a:pPr marL="0" indent="0" algn="ctr">
               <a:lnSpc>
                 <a:spcPct val="104000"/>
               </a:lnSpc>
@@ -11470,12 +11470,12 @@
           </a:ln>
         </p:spPr>
         <p:txBody>
-          <a:bodyPr wrap="square" lIns="137160" tIns="91440" rIns="137160" bIns="91440" rtlCol="0" anchor="t">
+          <a:bodyPr wrap="square" lIns="137160" tIns="91440" rIns="137160" bIns="91440" rtlCol="0" anchor="ctr">
             <a:normAutofit/>
           </a:bodyPr>
           <a:lstStyle/>
           <a:p>
-            <a:pPr marL="0" indent="0" algn="l">
+            <a:pPr marL="0" indent="0" algn="ctr">
               <a:lnSpc>
                 <a:spcPct val="104000"/>
               </a:lnSpc>
@@ -11496,7 +11496,7 @@
             </a:r>
           </a:p>
           <a:p>
-            <a:pPr marL="0" indent="0" algn="l">
+            <a:pPr marL="0" indent="0" algn="ctr">
               <a:lnSpc>
                 <a:spcPct val="104000"/>
               </a:lnSpc>
@@ -11517,7 +11517,7 @@
             </a:r>
           </a:p>
           <a:p>
-            <a:pPr marL="0" indent="0" algn="l">
+            <a:pPr marL="0" indent="0" algn="ctr">
               <a:lnSpc>
                 <a:spcPct val="104000"/>
               </a:lnSpc>
@@ -11604,12 +11604,12 @@
           </a:ln>
         </p:spPr>
         <p:txBody>
-          <a:bodyPr wrap="square" lIns="137160" tIns="91440" rIns="137160" bIns="91440" rtlCol="0" anchor="t">
+          <a:bodyPr wrap="square" lIns="137160" tIns="91440" rIns="137160" bIns="91440" rtlCol="0" anchor="ctr">
             <a:normAutofit/>
           </a:bodyPr>
           <a:lstStyle/>
           <a:p>
-            <a:pPr marL="0" indent="0" algn="l">
+            <a:pPr marL="0" indent="0" algn="ctr">
               <a:lnSpc>
                 <a:spcPct val="104000"/>
               </a:lnSpc>
@@ -11630,7 +11630,7 @@
             </a:r>
           </a:p>
           <a:p>
-            <a:pPr marL="0" indent="0" algn="l">
+            <a:pPr marL="0" indent="0" algn="ctr">
               <a:lnSpc>
                 <a:spcPct val="104000"/>
               </a:lnSpc>
@@ -11717,12 +11717,12 @@
           </a:ln>
         </p:spPr>
         <p:txBody>
-          <a:bodyPr wrap="square" lIns="137160" tIns="91440" rIns="137160" bIns="91440" rtlCol="0" anchor="t">
+          <a:bodyPr wrap="square" lIns="137160" tIns="91440" rIns="137160" bIns="91440" rtlCol="0" anchor="ctr">
             <a:normAutofit/>
           </a:bodyPr>
           <a:lstStyle/>
           <a:p>
-            <a:pPr marL="0" indent="0" algn="l">
+            <a:pPr marL="0" indent="0" algn="ctr">
               <a:lnSpc>
                 <a:spcPct val="104000"/>
               </a:lnSpc>
@@ -11743,7 +11743,7 @@
             </a:r>
           </a:p>
           <a:p>
-            <a:pPr marL="0" indent="0" algn="l">
+            <a:pPr marL="0" indent="0" algn="ctr">
               <a:lnSpc>
                 <a:spcPct val="104000"/>
               </a:lnSpc>
@@ -11764,7 +11764,7 @@
             </a:r>
           </a:p>
           <a:p>
-            <a:pPr marL="0" indent="0" algn="l">
+            <a:pPr marL="0" indent="0" algn="ctr">
               <a:lnSpc>
                 <a:spcPct val="104000"/>
               </a:lnSpc>
@@ -12397,12 +12397,12 @@
           </a:ln>
         </p:spPr>
         <p:txBody>
-          <a:bodyPr wrap="square" lIns="137160" tIns="91440" rIns="137160" bIns="91440" rtlCol="0" anchor="t">
+          <a:bodyPr wrap="square" lIns="137160" tIns="91440" rIns="137160" bIns="91440" rtlCol="0" anchor="ctr">
             <a:normAutofit/>
           </a:bodyPr>
           <a:lstStyle/>
           <a:p>
-            <a:pPr marL="0" indent="0" algn="l">
+            <a:pPr marL="0" indent="0" algn="ctr">
               <a:lnSpc>
                 <a:spcPct val="104000"/>
               </a:lnSpc>
@@ -12423,7 +12423,7 @@
             </a:r>
           </a:p>
           <a:p>
-            <a:pPr marL="0" indent="0" algn="l">
+            <a:pPr marL="0" indent="0" algn="ctr">
               <a:lnSpc>
                 <a:spcPct val="104000"/>
               </a:lnSpc>
@@ -12510,12 +12510,12 @@
           </a:ln>
         </p:spPr>
         <p:txBody>
-          <a:bodyPr wrap="square" lIns="137160" tIns="91440" rIns="137160" bIns="91440" rtlCol="0" anchor="t">
+          <a:bodyPr wrap="square" lIns="137160" tIns="91440" rIns="137160" bIns="91440" rtlCol="0" anchor="ctr">
             <a:normAutofit/>
           </a:bodyPr>
           <a:lstStyle/>
           <a:p>
-            <a:pPr marL="0" indent="0" algn="l">
+            <a:pPr marL="0" indent="0" algn="ctr">
               <a:lnSpc>
                 <a:spcPct val="104000"/>
               </a:lnSpc>
@@ -12536,7 +12536,7 @@
             </a:r>
           </a:p>
           <a:p>
-            <a:pPr marL="0" indent="0" algn="l">
+            <a:pPr marL="0" indent="0" algn="ctr">
               <a:lnSpc>
                 <a:spcPct val="104000"/>
               </a:lnSpc>
@@ -12623,12 +12623,12 @@
           </a:ln>
         </p:spPr>
         <p:txBody>
-          <a:bodyPr wrap="square" lIns="137160" tIns="91440" rIns="137160" bIns="91440" rtlCol="0" anchor="t">
+          <a:bodyPr wrap="square" lIns="137160" tIns="91440" rIns="137160" bIns="91440" rtlCol="0" anchor="ctr">
             <a:normAutofit/>
           </a:bodyPr>
           <a:lstStyle/>
           <a:p>
-            <a:pPr marL="0" indent="0" algn="l">
+            <a:pPr marL="0" indent="0" algn="ctr">
               <a:lnSpc>
                 <a:spcPct val="104000"/>
               </a:lnSpc>
@@ -12649,7 +12649,7 @@
             </a:r>
           </a:p>
           <a:p>
-            <a:pPr marL="0" indent="0" algn="l">
+            <a:pPr marL="0" indent="0" algn="ctr">
               <a:lnSpc>
                 <a:spcPct val="104000"/>
               </a:lnSpc>
@@ -12882,14 +12882,14 @@
               <a:buNone/>
             </a:pPr>
             <a:r>
-              <a:rPr lang="en-US" sz="2800" b="1" dirty="0">
+              <a:rPr lang="en-US" sz="2400" b="1" dirty="0">
                 <a:solidFill>
                   <a:srgbClr val="0D7377"/>
                 </a:solidFill>
                 <a:latin typeface="Arial"/>
                 <a:cs typeface="Arial"/>
               </a:rPr>
-              <a:t>Cũng không được làm: những mẹo làm sai lệch y văn</a:t>
+              <a:t>Cũng không được làm: những cách làm sai lệch bằng chứng đã công bố</a:t>
             </a:r>
           </a:p>
         </p:txBody>
@@ -12956,7 +12956,7 @@
                 <a:latin typeface="Arial"/>
                 <a:cs typeface="Arial"/>
               </a:rPr>
-              <a:t>Một nghiên cứu nên kể một câu chuyện đầy đủ và trung thực.</a:t>
+              <a:t>Một nghiên cứu nên được báo cáo đầy đủ và trung thực.</a:t>
             </a:r>
           </a:p>
         </p:txBody>
@@ -13026,12 +13026,12 @@
           </a:ln>
         </p:spPr>
         <p:txBody>
-          <a:bodyPr wrap="square" lIns="137160" tIns="91440" rIns="137160" bIns="91440" rtlCol="0" anchor="t">
+          <a:bodyPr wrap="square" lIns="137160" tIns="91440" rIns="137160" bIns="91440" rtlCol="0" anchor="ctr">
             <a:normAutofit/>
           </a:bodyPr>
           <a:lstStyle/>
           <a:p>
-            <a:pPr marL="0" indent="0" algn="l">
+            <a:pPr marL="0" indent="0" algn="ctr">
               <a:lnSpc>
                 <a:spcPct val="104000"/>
               </a:lnSpc>
@@ -13052,7 +13052,7 @@
             </a:r>
           </a:p>
           <a:p>
-            <a:pPr marL="0" indent="0" algn="l">
+            <a:pPr marL="0" indent="0" algn="ctr">
               <a:lnSpc>
                 <a:spcPct val="104000"/>
               </a:lnSpc>
@@ -13139,12 +13139,12 @@
           </a:ln>
         </p:spPr>
         <p:txBody>
-          <a:bodyPr wrap="square" lIns="137160" tIns="91440" rIns="137160" bIns="91440" rtlCol="0" anchor="t">
+          <a:bodyPr wrap="square" lIns="137160" tIns="91440" rIns="137160" bIns="91440" rtlCol="0" anchor="ctr">
             <a:normAutofit/>
           </a:bodyPr>
           <a:lstStyle/>
           <a:p>
-            <a:pPr marL="0" indent="0" algn="l">
+            <a:pPr marL="0" indent="0" algn="ctr">
               <a:lnSpc>
                 <a:spcPct val="104000"/>
               </a:lnSpc>
@@ -13165,7 +13165,7 @@
             </a:r>
           </a:p>
           <a:p>
-            <a:pPr marL="0" indent="0" algn="l">
+            <a:pPr marL="0" indent="0" algn="ctr">
               <a:lnSpc>
                 <a:spcPct val="104000"/>
               </a:lnSpc>
@@ -13186,7 +13186,7 @@
             </a:r>
           </a:p>
           <a:p>
-            <a:pPr marL="0" indent="0" algn="l">
+            <a:pPr marL="0" indent="0" algn="ctr">
               <a:lnSpc>
                 <a:spcPct val="104000"/>
               </a:lnSpc>
@@ -13273,12 +13273,12 @@
           </a:ln>
         </p:spPr>
         <p:txBody>
-          <a:bodyPr wrap="square" lIns="137160" tIns="91440" rIns="137160" bIns="91440" rtlCol="0" anchor="t">
+          <a:bodyPr wrap="square" lIns="137160" tIns="91440" rIns="137160" bIns="91440" rtlCol="0" anchor="ctr">
             <a:normAutofit/>
           </a:bodyPr>
           <a:lstStyle/>
           <a:p>
-            <a:pPr marL="0" indent="0" algn="l">
+            <a:pPr marL="0" indent="0" algn="ctr">
               <a:lnSpc>
                 <a:spcPct val="104000"/>
               </a:lnSpc>
@@ -13299,7 +13299,7 @@
             </a:r>
           </a:p>
           <a:p>
-            <a:pPr marL="0" indent="0" algn="l">
+            <a:pPr marL="0" indent="0" algn="ctr">
               <a:lnSpc>
                 <a:spcPct val="104000"/>
               </a:lnSpc>
@@ -13676,12 +13676,12 @@
           </a:ln>
         </p:spPr>
         <p:txBody>
-          <a:bodyPr wrap="square" lIns="137160" tIns="91440" rIns="137160" bIns="91440" rtlCol="0" anchor="t">
+          <a:bodyPr wrap="square" lIns="137160" tIns="91440" rIns="137160" bIns="91440" rtlCol="0" anchor="ctr">
             <a:normAutofit/>
           </a:bodyPr>
           <a:lstStyle/>
           <a:p>
-            <a:pPr marL="0" indent="0" algn="l">
+            <a:pPr marL="0" indent="0" algn="ctr">
               <a:lnSpc>
                 <a:spcPct val="104000"/>
               </a:lnSpc>
@@ -13768,12 +13768,12 @@
           </a:ln>
         </p:spPr>
         <p:txBody>
-          <a:bodyPr wrap="square" lIns="137160" tIns="91440" rIns="137160" bIns="91440" rtlCol="0" anchor="t">
+          <a:bodyPr wrap="square" lIns="137160" tIns="91440" rIns="137160" bIns="91440" rtlCol="0" anchor="ctr">
             <a:normAutofit/>
           </a:bodyPr>
           <a:lstStyle/>
           <a:p>
-            <a:pPr marL="0" indent="0" algn="l">
+            <a:pPr marL="0" indent="0" algn="ctr">
               <a:lnSpc>
                 <a:spcPct val="104000"/>
               </a:lnSpc>
@@ -13860,12 +13860,12 @@
           </a:ln>
         </p:spPr>
         <p:txBody>
-          <a:bodyPr wrap="square" lIns="137160" tIns="91440" rIns="137160" bIns="91440" rtlCol="0" anchor="t">
+          <a:bodyPr wrap="square" lIns="137160" tIns="91440" rIns="137160" bIns="91440" rtlCol="0" anchor="ctr">
             <a:normAutofit/>
           </a:bodyPr>
           <a:lstStyle/>
           <a:p>
-            <a:pPr marL="0" indent="0" algn="l">
+            <a:pPr marL="0" indent="0" algn="ctr">
               <a:lnSpc>
                 <a:spcPct val="104000"/>
               </a:lnSpc>
@@ -13952,12 +13952,12 @@
           </a:ln>
         </p:spPr>
         <p:txBody>
-          <a:bodyPr wrap="square" lIns="137160" tIns="91440" rIns="137160" bIns="91440" rtlCol="0" anchor="t">
+          <a:bodyPr wrap="square" lIns="137160" tIns="91440" rIns="137160" bIns="91440" rtlCol="0" anchor="ctr">
             <a:normAutofit/>
           </a:bodyPr>
           <a:lstStyle/>
           <a:p>
-            <a:pPr marL="0" indent="0" algn="l">
+            <a:pPr marL="0" indent="0" algn="ctr">
               <a:lnSpc>
                 <a:spcPct val="104000"/>
               </a:lnSpc>
@@ -14044,12 +14044,12 @@
           </a:ln>
         </p:spPr>
         <p:txBody>
-          <a:bodyPr wrap="square" lIns="137160" tIns="91440" rIns="137160" bIns="91440" rtlCol="0" anchor="t">
+          <a:bodyPr wrap="square" lIns="137160" tIns="91440" rIns="137160" bIns="91440" rtlCol="0" anchor="ctr">
             <a:normAutofit/>
           </a:bodyPr>
           <a:lstStyle/>
           <a:p>
-            <a:pPr marL="0" indent="0" algn="l">
+            <a:pPr marL="0" indent="0" algn="ctr">
               <a:lnSpc>
                 <a:spcPct val="104000"/>
               </a:lnSpc>
@@ -14070,7 +14070,7 @@
             </a:r>
           </a:p>
           <a:p>
-            <a:pPr marL="0" indent="0" algn="l">
+            <a:pPr marL="0" indent="0" algn="ctr">
               <a:lnSpc>
                 <a:spcPct val="104000"/>
               </a:lnSpc>
@@ -14091,7 +14091,7 @@
             </a:r>
           </a:p>
           <a:p>
-            <a:pPr marL="0" indent="0" algn="l">
+            <a:pPr marL="0" indent="0" algn="ctr">
               <a:lnSpc>
                 <a:spcPct val="104000"/>
               </a:lnSpc>
@@ -14429,12 +14429,12 @@
           </a:ln>
         </p:spPr>
         <p:txBody>
-          <a:bodyPr wrap="square" lIns="137160" tIns="91440" rIns="137160" bIns="91440" rtlCol="0" anchor="t">
+          <a:bodyPr wrap="square" lIns="137160" tIns="91440" rIns="137160" bIns="91440" rtlCol="0" anchor="ctr">
             <a:normAutofit/>
           </a:bodyPr>
           <a:lstStyle/>
           <a:p>
-            <a:pPr marL="0" indent="0" algn="l">
+            <a:pPr marL="0" indent="0" algn="ctr">
               <a:lnSpc>
                 <a:spcPct val="104000"/>
               </a:lnSpc>
@@ -14455,7 +14455,7 @@
             </a:r>
           </a:p>
           <a:p>
-            <a:pPr marL="0" indent="0" algn="l">
+            <a:pPr marL="0" indent="0" algn="ctr">
               <a:lnSpc>
                 <a:spcPct val="104000"/>
               </a:lnSpc>
@@ -14476,7 +14476,7 @@
             </a:r>
           </a:p>
           <a:p>
-            <a:pPr marL="0" indent="0" algn="l">
+            <a:pPr marL="0" indent="0" algn="ctr">
               <a:lnSpc>
                 <a:spcPct val="104000"/>
               </a:lnSpc>
@@ -14497,7 +14497,7 @@
             </a:r>
           </a:p>
           <a:p>
-            <a:pPr marL="0" indent="0" algn="l">
+            <a:pPr marL="0" indent="0" algn="ctr">
               <a:lnSpc>
                 <a:spcPct val="104000"/>
               </a:lnSpc>
@@ -14584,12 +14584,12 @@
           </a:ln>
         </p:spPr>
         <p:txBody>
-          <a:bodyPr wrap="square" lIns="137160" tIns="91440" rIns="137160" bIns="91440" rtlCol="0" anchor="t">
+          <a:bodyPr wrap="square" lIns="137160" tIns="91440" rIns="137160" bIns="91440" rtlCol="0" anchor="ctr">
             <a:normAutofit/>
           </a:bodyPr>
           <a:lstStyle/>
           <a:p>
-            <a:pPr marL="0" indent="0" algn="l">
+            <a:pPr marL="0" indent="0" algn="ctr">
               <a:lnSpc>
                 <a:spcPct val="104000"/>
               </a:lnSpc>
@@ -14610,7 +14610,7 @@
             </a:r>
           </a:p>
           <a:p>
-            <a:pPr marL="0" indent="0" algn="l">
+            <a:pPr marL="0" indent="0" algn="ctr">
               <a:lnSpc>
                 <a:spcPct val="104000"/>
               </a:lnSpc>
@@ -14631,7 +14631,7 @@
             </a:r>
           </a:p>
           <a:p>
-            <a:pPr marL="0" indent="0" algn="l">
+            <a:pPr marL="0" indent="0" algn="ctr">
               <a:lnSpc>
                 <a:spcPct val="104000"/>
               </a:lnSpc>
@@ -14652,7 +14652,7 @@
             </a:r>
           </a:p>
           <a:p>
-            <a:pPr marL="0" indent="0" algn="l">
+            <a:pPr marL="0" indent="0" algn="ctr">
               <a:lnSpc>
                 <a:spcPct val="104000"/>
               </a:lnSpc>
@@ -14739,12 +14739,12 @@
           </a:ln>
         </p:spPr>
         <p:txBody>
-          <a:bodyPr wrap="square" lIns="137160" tIns="91440" rIns="137160" bIns="91440" rtlCol="0" anchor="t">
+          <a:bodyPr wrap="square" lIns="137160" tIns="91440" rIns="137160" bIns="91440" rtlCol="0" anchor="ctr">
             <a:normAutofit/>
           </a:bodyPr>
           <a:lstStyle/>
           <a:p>
-            <a:pPr marL="0" indent="0" algn="l">
+            <a:pPr marL="0" indent="0" algn="ctr">
               <a:lnSpc>
                 <a:spcPct val="104000"/>
               </a:lnSpc>
@@ -14765,7 +14765,7 @@
             </a:r>
           </a:p>
           <a:p>
-            <a:pPr marL="0" indent="0" algn="l">
+            <a:pPr marL="0" indent="0" algn="ctr">
               <a:lnSpc>
                 <a:spcPct val="104000"/>
               </a:lnSpc>
@@ -14786,7 +14786,7 @@
             </a:r>
           </a:p>
           <a:p>
-            <a:pPr marL="0" indent="0" algn="l">
+            <a:pPr marL="0" indent="0" algn="ctr">
               <a:lnSpc>
                 <a:spcPct val="104000"/>
               </a:lnSpc>
@@ -15275,12 +15275,12 @@
           </a:ln>
         </p:spPr>
         <p:txBody>
-          <a:bodyPr wrap="square" lIns="137160" tIns="91440" rIns="137160" bIns="91440" rtlCol="0" anchor="t">
+          <a:bodyPr wrap="square" lIns="137160" tIns="91440" rIns="137160" bIns="91440" rtlCol="0" anchor="ctr">
             <a:normAutofit/>
           </a:bodyPr>
           <a:lstStyle/>
           <a:p>
-            <a:pPr marL="0" indent="0" algn="l">
+            <a:pPr marL="0" indent="0" algn="ctr">
               <a:buNone/>
             </a:pPr>
             <a:r>
@@ -15295,15 +15295,14 @@
             </a:r>
           </a:p>
           <a:p>
-            <a:pPr marL="274320" indent="-274320" algn="l">
+            <a:pPr marL="0" indent="0" algn="ctr">
               <a:lnSpc>
                 <a:spcPct val="104000"/>
               </a:lnSpc>
               <a:spcBef>
                 <a:spcPts val="300"/>
               </a:spcBef>
-              <a:buFont typeface="Arial"/>
-              <a:buChar char="•"/>
+              <a:buNone/>
             </a:pPr>
             <a:r>
               <a:rPr lang="en-US" sz="1500" dirty="0">
@@ -15317,15 +15316,14 @@
             </a:r>
           </a:p>
           <a:p>
-            <a:pPr marL="274320" indent="-274320" algn="l">
+            <a:pPr marL="0" indent="0" algn="ctr">
               <a:lnSpc>
                 <a:spcPct val="104000"/>
               </a:lnSpc>
               <a:spcBef>
                 <a:spcPts val="300"/>
               </a:spcBef>
-              <a:buFont typeface="Arial"/>
-              <a:buChar char="•"/>
+              <a:buNone/>
             </a:pPr>
             <a:r>
               <a:rPr lang="en-US" sz="1500" dirty="0">
@@ -15339,15 +15337,14 @@
             </a:r>
           </a:p>
           <a:p>
-            <a:pPr marL="274320" indent="-274320" algn="l">
+            <a:pPr marL="0" indent="0" algn="ctr">
               <a:lnSpc>
                 <a:spcPct val="104000"/>
               </a:lnSpc>
               <a:spcBef>
                 <a:spcPts val="300"/>
               </a:spcBef>
-              <a:buFont typeface="Arial"/>
-              <a:buChar char="•"/>
+              <a:buNone/>
             </a:pPr>
             <a:r>
               <a:rPr lang="en-US" sz="1500" dirty="0">
@@ -15361,15 +15358,14 @@
             </a:r>
           </a:p>
           <a:p>
-            <a:pPr marL="274320" indent="-274320" algn="l">
+            <a:pPr marL="0" indent="0" algn="ctr">
               <a:lnSpc>
                 <a:spcPct val="104000"/>
               </a:lnSpc>
               <a:spcBef>
                 <a:spcPts val="300"/>
               </a:spcBef>
-              <a:buFont typeface="Arial"/>
-              <a:buChar char="•"/>
+              <a:buNone/>
             </a:pPr>
             <a:r>
               <a:rPr lang="en-US" sz="1500" dirty="0">
@@ -15383,15 +15379,14 @@
             </a:r>
           </a:p>
           <a:p>
-            <a:pPr marL="274320" indent="-274320" algn="l">
+            <a:pPr marL="0" indent="0" algn="ctr">
               <a:lnSpc>
                 <a:spcPct val="104000"/>
               </a:lnSpc>
               <a:spcBef>
                 <a:spcPts val="300"/>
               </a:spcBef>
-              <a:buFont typeface="Arial"/>
-              <a:buChar char="•"/>
+              <a:buNone/>
             </a:pPr>
             <a:r>
               <a:rPr lang="en-US" sz="1500" dirty="0">
@@ -15724,7 +15719,7 @@
           </a:ln>
         </p:spPr>
         <p:txBody>
-          <a:bodyPr wrap="square" lIns="137160" tIns="91440" rIns="137160" bIns="91440" rtlCol="0" anchor="t">
+          <a:bodyPr wrap="square" lIns="137160" tIns="91440" rIns="137160" bIns="91440" rtlCol="0" anchor="ctr">
             <a:normAutofit/>
           </a:bodyPr>
           <a:lstStyle/>
@@ -15883,7 +15878,7 @@
           </a:ln>
         </p:spPr>
         <p:txBody>
-          <a:bodyPr wrap="square" lIns="137160" tIns="91440" rIns="137160" bIns="91440" rtlCol="0" anchor="t">
+          <a:bodyPr wrap="square" lIns="137160" tIns="91440" rIns="137160" bIns="91440" rtlCol="0" anchor="ctr">
             <a:normAutofit/>
           </a:bodyPr>
           <a:lstStyle/>
@@ -16293,7 +16288,7 @@
           </a:ln>
         </p:spPr>
         <p:txBody>
-          <a:bodyPr wrap="square" lIns="137160" tIns="91440" rIns="137160" bIns="91440" rtlCol="0" anchor="t">
+          <a:bodyPr wrap="square" lIns="137160" tIns="91440" rIns="137160" bIns="91440" rtlCol="0" anchor="ctr">
             <a:normAutofit/>
           </a:bodyPr>
           <a:lstStyle/>
@@ -16430,7 +16425,7 @@
           </a:ln>
         </p:spPr>
         <p:txBody>
-          <a:bodyPr wrap="square" lIns="137160" tIns="91440" rIns="137160" bIns="91440" rtlCol="0" anchor="t">
+          <a:bodyPr wrap="square" lIns="137160" tIns="91440" rIns="137160" bIns="91440" rtlCol="0" anchor="ctr">
             <a:normAutofit/>
           </a:bodyPr>
           <a:lstStyle/>
@@ -16944,12 +16939,12 @@
           </a:ln>
         </p:spPr>
         <p:txBody>
-          <a:bodyPr wrap="square" lIns="137160" tIns="91440" rIns="137160" bIns="91440" rtlCol="0" anchor="t">
+          <a:bodyPr wrap="square" lIns="137160" tIns="91440" rIns="137160" bIns="91440" rtlCol="0" anchor="ctr">
             <a:normAutofit/>
           </a:bodyPr>
           <a:lstStyle/>
           <a:p>
-            <a:pPr marL="0" indent="0" algn="l">
+            <a:pPr marL="0" indent="0" algn="ctr">
               <a:buNone/>
             </a:pPr>
             <a:r>
@@ -16964,15 +16959,14 @@
             </a:r>
           </a:p>
           <a:p>
-            <a:pPr marL="274320" indent="-274320" algn="l">
+            <a:pPr marL="0" indent="0" algn="ctr">
               <a:lnSpc>
                 <a:spcPct val="104000"/>
               </a:lnSpc>
               <a:spcBef>
                 <a:spcPts val="300"/>
               </a:spcBef>
-              <a:buFont typeface="Arial"/>
-              <a:buChar char="•"/>
+              <a:buNone/>
             </a:pPr>
             <a:r>
               <a:rPr lang="en-US" sz="1500" dirty="0">
@@ -16986,15 +16980,14 @@
             </a:r>
           </a:p>
           <a:p>
-            <a:pPr marL="274320" indent="-274320" algn="l">
+            <a:pPr marL="0" indent="0" algn="ctr">
               <a:lnSpc>
                 <a:spcPct val="104000"/>
               </a:lnSpc>
               <a:spcBef>
                 <a:spcPts val="300"/>
               </a:spcBef>
-              <a:buFont typeface="Arial"/>
-              <a:buChar char="•"/>
+              <a:buNone/>
             </a:pPr>
             <a:r>
               <a:rPr lang="en-US" sz="1500" dirty="0">
@@ -17229,7 +17222,7 @@
                 <a:latin typeface="Arial"/>
                 <a:cs typeface="Arial"/>
               </a:rPr>
-              <a:t>Xây dựng đề cương 7: đạo đức, đăng ký, khả thi, kế hoạch công bố</a:t>
+              <a:t>Xây dựng đề cương 7: đạo đức, đăng ký, khả thi, kế hoạch công bố</a:t>
             </a:r>
           </a:p>
         </p:txBody>
@@ -17424,7 +17417,7 @@
                 <a:latin typeface="Arial"/>
                 <a:cs typeface="Arial"/>
               </a:rPr>
-              <a:t>Tính khả thi: rủi ro lớn nhất và một cách khắc phục (3 phút)</a:t>
+              <a:t>Tính khả thi: rủi ro lớn nhất và một cách khắc phục (3 phút)</a:t>
             </a:r>
           </a:p>
           <a:p>
@@ -17478,12 +17471,12 @@
           </a:ln>
         </p:spPr>
         <p:txBody>
-          <a:bodyPr wrap="square" lIns="137160" tIns="91440" rIns="137160" bIns="91440" rtlCol="0" anchor="t">
+          <a:bodyPr wrap="square" lIns="137160" tIns="91440" rIns="137160" bIns="91440" rtlCol="0" anchor="ctr">
             <a:normAutofit/>
           </a:bodyPr>
           <a:lstStyle/>
           <a:p>
-            <a:pPr marL="0" indent="0" algn="l">
+            <a:pPr marL="0" indent="0" algn="ctr">
               <a:buNone/>
             </a:pPr>
             <a:r>
@@ -17498,15 +17491,14 @@
             </a:r>
           </a:p>
           <a:p>
-            <a:pPr marL="274320" indent="-274320" algn="l">
+            <a:pPr marL="0" indent="0" algn="ctr">
               <a:lnSpc>
                 <a:spcPct val="104000"/>
               </a:lnSpc>
               <a:spcBef>
                 <a:spcPts val="300"/>
               </a:spcBef>
-              <a:buFont typeface="Arial"/>
-              <a:buChar char="•"/>
+              <a:buNone/>
             </a:pPr>
             <a:r>
               <a:rPr lang="en-US" sz="1500" dirty="0">
@@ -17520,15 +17512,14 @@
             </a:r>
           </a:p>
           <a:p>
-            <a:pPr marL="274320" indent="-274320" algn="l">
+            <a:pPr marL="0" indent="0" algn="ctr">
               <a:lnSpc>
                 <a:spcPct val="104000"/>
               </a:lnSpc>
               <a:spcBef>
                 <a:spcPts val="300"/>
               </a:spcBef>
-              <a:buFont typeface="Arial"/>
-              <a:buChar char="•"/>
+              <a:buNone/>
             </a:pPr>
             <a:r>
               <a:rPr lang="en-US" sz="1500" dirty="0">
@@ -17542,15 +17533,14 @@
             </a:r>
           </a:p>
           <a:p>
-            <a:pPr marL="274320" indent="-274320" algn="l">
+            <a:pPr marL="0" indent="0" algn="ctr">
               <a:lnSpc>
                 <a:spcPct val="104000"/>
               </a:lnSpc>
               <a:spcBef>
                 <a:spcPts val="300"/>
               </a:spcBef>
-              <a:buFont typeface="Arial"/>
-              <a:buChar char="•"/>
+              <a:buNone/>
             </a:pPr>
             <a:r>
               <a:rPr lang="en-US" sz="1500" dirty="0">
@@ -18650,12 +18640,12 @@
           </a:ln>
         </p:spPr>
         <p:txBody>
-          <a:bodyPr wrap="square" lIns="110000" tIns="91440" rIns="110000" bIns="91440" rtlCol="0" anchor="t">
+          <a:bodyPr wrap="square" lIns="110000" tIns="91440" rIns="110000" bIns="91440" rtlCol="0" anchor="ctr">
             <a:normAutofit/>
           </a:bodyPr>
           <a:lstStyle/>
           <a:p>
-            <a:pPr marL="0" indent="0" algn="l">
+            <a:pPr marL="0" indent="0" algn="ctr">
               <a:lnSpc>
                 <a:spcPct val="104000"/>
               </a:lnSpc>
@@ -18744,12 +18734,12 @@
           </a:ln>
         </p:spPr>
         <p:txBody>
-          <a:bodyPr wrap="square" lIns="110000" tIns="91440" rIns="110000" bIns="91440" rtlCol="0" anchor="t">
+          <a:bodyPr wrap="square" lIns="110000" tIns="91440" rIns="110000" bIns="91440" rtlCol="0" anchor="ctr">
             <a:normAutofit/>
           </a:bodyPr>
           <a:lstStyle/>
           <a:p>
-            <a:pPr marL="0" indent="0" algn="l">
+            <a:pPr marL="0" indent="0" algn="ctr">
               <a:lnSpc>
                 <a:spcPct val="104000"/>
               </a:lnSpc>
@@ -18838,12 +18828,12 @@
           </a:ln>
         </p:spPr>
         <p:txBody>
-          <a:bodyPr wrap="square" lIns="110000" tIns="91440" rIns="110000" bIns="91440" rtlCol="0" anchor="t">
+          <a:bodyPr wrap="square" lIns="110000" tIns="91440" rIns="110000" bIns="91440" rtlCol="0" anchor="ctr">
             <a:normAutofit/>
           </a:bodyPr>
           <a:lstStyle/>
           <a:p>
-            <a:pPr marL="0" indent="0" algn="l">
+            <a:pPr marL="0" indent="0" algn="ctr">
               <a:lnSpc>
                 <a:spcPct val="104000"/>
               </a:lnSpc>
@@ -18932,12 +18922,12 @@
           </a:ln>
         </p:spPr>
         <p:txBody>
-          <a:bodyPr wrap="square" lIns="110000" tIns="91440" rIns="110000" bIns="91440" rtlCol="0" anchor="t">
+          <a:bodyPr wrap="square" lIns="110000" tIns="91440" rIns="110000" bIns="91440" rtlCol="0" anchor="ctr">
             <a:normAutofit/>
           </a:bodyPr>
           <a:lstStyle/>
           <a:p>
-            <a:pPr marL="0" indent="0" algn="l">
+            <a:pPr marL="0" indent="0" algn="ctr">
               <a:lnSpc>
                 <a:spcPct val="104000"/>
               </a:lnSpc>
@@ -19026,12 +19016,12 @@
           </a:ln>
         </p:spPr>
         <p:txBody>
-          <a:bodyPr wrap="square" lIns="110000" tIns="91440" rIns="110000" bIns="91440" rtlCol="0" anchor="t">
+          <a:bodyPr wrap="square" lIns="110000" tIns="91440" rIns="110000" bIns="91440" rtlCol="0" anchor="ctr">
             <a:normAutofit/>
           </a:bodyPr>
           <a:lstStyle/>
           <a:p>
-            <a:pPr marL="0" indent="0" algn="l">
+            <a:pPr marL="0" indent="0" algn="ctr">
               <a:lnSpc>
                 <a:spcPct val="104000"/>
               </a:lnSpc>
@@ -19120,12 +19110,12 @@
           </a:ln>
         </p:spPr>
         <p:txBody>
-          <a:bodyPr wrap="square" lIns="110000" tIns="91440" rIns="110000" bIns="91440" rtlCol="0" anchor="t">
+          <a:bodyPr wrap="square" lIns="110000" tIns="91440" rIns="110000" bIns="91440" rtlCol="0" anchor="ctr">
             <a:normAutofit/>
           </a:bodyPr>
           <a:lstStyle/>
           <a:p>
-            <a:pPr marL="0" indent="0" algn="l">
+            <a:pPr marL="0" indent="0" algn="ctr">
               <a:lnSpc>
                 <a:spcPct val="104000"/>
               </a:lnSpc>
@@ -19502,12 +19492,12 @@
           </a:ln>
         </p:spPr>
         <p:txBody>
-          <a:bodyPr wrap="square" lIns="137160" tIns="91440" rIns="137160" bIns="91440" rtlCol="0" anchor="t">
+          <a:bodyPr wrap="square" lIns="137160" tIns="91440" rIns="137160" bIns="91440" rtlCol="0" anchor="ctr">
             <a:normAutofit/>
           </a:bodyPr>
           <a:lstStyle/>
           <a:p>
-            <a:pPr marL="0" indent="0" algn="l">
+            <a:pPr marL="0" indent="0" algn="ctr">
               <a:lnSpc>
                 <a:spcPct val="104000"/>
               </a:lnSpc>
@@ -19528,7 +19518,7 @@
             </a:r>
           </a:p>
           <a:p>
-            <a:pPr marL="0" indent="0" algn="l">
+            <a:pPr marL="0" indent="0" algn="ctr">
               <a:lnSpc>
                 <a:spcPct val="104000"/>
               </a:lnSpc>
@@ -19549,7 +19539,7 @@
             </a:r>
           </a:p>
           <a:p>
-            <a:pPr marL="0" indent="0" algn="l">
+            <a:pPr marL="0" indent="0" algn="ctr">
               <a:lnSpc>
                 <a:spcPct val="104000"/>
               </a:lnSpc>
@@ -19570,7 +19560,7 @@
             </a:r>
           </a:p>
           <a:p>
-            <a:pPr marL="0" indent="0" algn="l">
+            <a:pPr marL="0" indent="0" algn="ctr">
               <a:lnSpc>
                 <a:spcPct val="104000"/>
               </a:lnSpc>
@@ -19657,12 +19647,12 @@
           </a:ln>
         </p:spPr>
         <p:txBody>
-          <a:bodyPr wrap="square" lIns="137160" tIns="91440" rIns="137160" bIns="91440" rtlCol="0" anchor="t">
+          <a:bodyPr wrap="square" lIns="137160" tIns="91440" rIns="137160" bIns="91440" rtlCol="0" anchor="ctr">
             <a:normAutofit/>
           </a:bodyPr>
           <a:lstStyle/>
           <a:p>
-            <a:pPr marL="0" indent="0" algn="l">
+            <a:pPr marL="0" indent="0" algn="ctr">
               <a:lnSpc>
                 <a:spcPct val="104000"/>
               </a:lnSpc>
@@ -19683,7 +19673,7 @@
             </a:r>
           </a:p>
           <a:p>
-            <a:pPr marL="0" indent="0" algn="l">
+            <a:pPr marL="0" indent="0" algn="ctr">
               <a:lnSpc>
                 <a:spcPct val="104000"/>
               </a:lnSpc>
@@ -19704,7 +19694,7 @@
             </a:r>
           </a:p>
           <a:p>
-            <a:pPr marL="0" indent="0" algn="l">
+            <a:pPr marL="0" indent="0" algn="ctr">
               <a:lnSpc>
                 <a:spcPct val="104000"/>
               </a:lnSpc>
@@ -19791,12 +19781,12 @@
           </a:ln>
         </p:spPr>
         <p:txBody>
-          <a:bodyPr wrap="square" lIns="137160" tIns="91440" rIns="137160" bIns="91440" rtlCol="0" anchor="t">
+          <a:bodyPr wrap="square" lIns="137160" tIns="91440" rIns="137160" bIns="91440" rtlCol="0" anchor="ctr">
             <a:normAutofit/>
           </a:bodyPr>
           <a:lstStyle/>
           <a:p>
-            <a:pPr marL="0" indent="0" algn="l">
+            <a:pPr marL="0" indent="0" algn="ctr">
               <a:lnSpc>
                 <a:spcPct val="104000"/>
               </a:lnSpc>
@@ -19817,7 +19807,7 @@
             </a:r>
           </a:p>
           <a:p>
-            <a:pPr marL="0" indent="0" algn="l">
+            <a:pPr marL="0" indent="0" algn="ctr">
               <a:lnSpc>
                 <a:spcPct val="104000"/>
               </a:lnSpc>
@@ -19838,7 +19828,7 @@
             </a:r>
           </a:p>
           <a:p>
-            <a:pPr marL="0" indent="0" algn="l">
+            <a:pPr marL="0" indent="0" algn="ctr">
               <a:lnSpc>
                 <a:spcPct val="104000"/>
               </a:lnSpc>
@@ -19925,12 +19915,12 @@
           </a:ln>
         </p:spPr>
         <p:txBody>
-          <a:bodyPr wrap="square" lIns="137160" tIns="91440" rIns="137160" bIns="91440" rtlCol="0" anchor="t">
+          <a:bodyPr wrap="square" lIns="137160" tIns="91440" rIns="137160" bIns="91440" rtlCol="0" anchor="ctr">
             <a:normAutofit/>
           </a:bodyPr>
           <a:lstStyle/>
           <a:p>
-            <a:pPr marL="0" indent="0" algn="l">
+            <a:pPr marL="0" indent="0" algn="ctr">
               <a:lnSpc>
                 <a:spcPct val="104000"/>
               </a:lnSpc>
@@ -19951,7 +19941,7 @@
             </a:r>
           </a:p>
           <a:p>
-            <a:pPr marL="0" indent="0" algn="l">
+            <a:pPr marL="0" indent="0" algn="ctr">
               <a:lnSpc>
                 <a:spcPct val="104000"/>
               </a:lnSpc>
@@ -19972,7 +19962,7 @@
             </a:r>
           </a:p>
           <a:p>
-            <a:pPr marL="0" indent="0" algn="l">
+            <a:pPr marL="0" indent="0" algn="ctr">
               <a:lnSpc>
                 <a:spcPct val="104000"/>
               </a:lnSpc>
@@ -19993,7 +19983,7 @@
             </a:r>
           </a:p>
           <a:p>
-            <a:pPr marL="0" indent="0" algn="l">
+            <a:pPr marL="0" indent="0" algn="ctr">
               <a:lnSpc>
                 <a:spcPct val="104000"/>
               </a:lnSpc>
@@ -21122,12 +21112,12 @@
           </a:ln>
         </p:spPr>
         <p:txBody>
-          <a:bodyPr wrap="square" lIns="137160" tIns="91440" rIns="137160" bIns="91440" rtlCol="0" anchor="t">
+          <a:bodyPr wrap="square" lIns="137160" tIns="91440" rIns="137160" bIns="91440" rtlCol="0" anchor="ctr">
             <a:normAutofit/>
           </a:bodyPr>
           <a:lstStyle/>
           <a:p>
-            <a:pPr marL="0" indent="0" algn="l">
+            <a:pPr marL="0" indent="0" algn="ctr">
               <a:lnSpc>
                 <a:spcPct val="104000"/>
               </a:lnSpc>
@@ -21148,7 +21138,7 @@
             </a:r>
           </a:p>
           <a:p>
-            <a:pPr marL="0" indent="0" algn="l">
+            <a:pPr marL="0" indent="0" algn="ctr">
               <a:lnSpc>
                 <a:spcPct val="104000"/>
               </a:lnSpc>
@@ -21165,11 +21155,11 @@
                 <a:latin typeface="Arial"/>
                 <a:cs typeface="Arial"/>
               </a:rPr>
-              <a:t>Hôm nay: Phần 4 (đạo đức, đăng ký, khả thi, công bố)</a:t>
-            </a:r>
-          </a:p>
-          <a:p>
-            <a:pPr marL="0" indent="0" algn="l">
+              <a:t>Hôm nay: Phần 4 (đạo đức, đăng ký, khả thi, công bố)</a:t>
+            </a:r>
+          </a:p>
+          <a:p>
+            <a:pPr marL="0" indent="0" algn="ctr">
               <a:lnSpc>
                 <a:spcPct val="104000"/>
               </a:lnSpc>
@@ -21256,12 +21246,12 @@
           </a:ln>
         </p:spPr>
         <p:txBody>
-          <a:bodyPr wrap="square" lIns="137160" tIns="91440" rIns="137160" bIns="91440" rtlCol="0" anchor="t">
+          <a:bodyPr wrap="square" lIns="137160" tIns="91440" rIns="137160" bIns="91440" rtlCol="0" anchor="ctr">
             <a:normAutofit/>
           </a:bodyPr>
           <a:lstStyle/>
           <a:p>
-            <a:pPr marL="0" indent="0" algn="l">
+            <a:pPr marL="0" indent="0" algn="ctr">
               <a:lnSpc>
                 <a:spcPct val="104000"/>
               </a:lnSpc>
@@ -21282,7 +21272,7 @@
             </a:r>
           </a:p>
           <a:p>
-            <a:pPr marL="0" indent="0" algn="l">
+            <a:pPr marL="0" indent="0" algn="ctr">
               <a:lnSpc>
                 <a:spcPct val="104000"/>
               </a:lnSpc>
@@ -21303,7 +21293,7 @@
             </a:r>
           </a:p>
           <a:p>
-            <a:pPr marL="0" indent="0" algn="l">
+            <a:pPr marL="0" indent="0" algn="ctr">
               <a:lnSpc>
                 <a:spcPct val="104000"/>
               </a:lnSpc>
@@ -21324,7 +21314,7 @@
             </a:r>
           </a:p>
           <a:p>
-            <a:pPr marL="0" indent="0" algn="l">
+            <a:pPr marL="0" indent="0" algn="ctr">
               <a:lnSpc>
                 <a:spcPct val="104000"/>
               </a:lnSpc>
@@ -21411,12 +21401,12 @@
           </a:ln>
         </p:spPr>
         <p:txBody>
-          <a:bodyPr wrap="square" lIns="137160" tIns="91440" rIns="137160" bIns="91440" rtlCol="0" anchor="t">
+          <a:bodyPr wrap="square" lIns="137160" tIns="91440" rIns="137160" bIns="91440" rtlCol="0" anchor="ctr">
             <a:normAutofit/>
           </a:bodyPr>
           <a:lstStyle/>
           <a:p>
-            <a:pPr marL="0" indent="0" algn="l">
+            <a:pPr marL="0" indent="0" algn="ctr">
               <a:lnSpc>
                 <a:spcPct val="104000"/>
               </a:lnSpc>
@@ -21437,7 +21427,7 @@
             </a:r>
           </a:p>
           <a:p>
-            <a:pPr marL="0" indent="0" algn="l">
+            <a:pPr marL="0" indent="0" algn="ctr">
               <a:lnSpc>
                 <a:spcPct val="104000"/>
               </a:lnSpc>
@@ -21454,11 +21444,11 @@
                 <a:latin typeface="Arial"/>
                 <a:cs typeface="Arial"/>
               </a:rPr>
-              <a:t>Bài 2: Hyun 2023, thuần tập, 2 516 người bệnh</a:t>
-            </a:r>
-          </a:p>
-          <a:p>
-            <a:pPr marL="0" indent="0" algn="l">
+              <a:t>Bài 2: Hyun 2023, thuần tập, 2516 người bệnh</a:t>
+            </a:r>
+          </a:p>
+          <a:p>
+            <a:pPr marL="0" indent="0" algn="ctr">
               <a:lnSpc>
                 <a:spcPct val="104000"/>
               </a:lnSpc>
@@ -21796,12 +21786,12 @@
           </a:ln>
         </p:spPr>
         <p:txBody>
-          <a:bodyPr wrap="square" lIns="137160" tIns="91440" rIns="137160" bIns="91440" rtlCol="0" anchor="t">
+          <a:bodyPr wrap="square" lIns="137160" tIns="91440" rIns="137160" bIns="91440" rtlCol="0" anchor="ctr">
             <a:normAutofit/>
           </a:bodyPr>
           <a:lstStyle/>
           <a:p>
-            <a:pPr marL="0" indent="0" algn="l">
+            <a:pPr marL="0" indent="0" algn="ctr">
               <a:lnSpc>
                 <a:spcPct val="104000"/>
               </a:lnSpc>
@@ -21822,7 +21812,7 @@
             </a:r>
           </a:p>
           <a:p>
-            <a:pPr marL="0" indent="0" algn="l">
+            <a:pPr marL="0" indent="0" algn="ctr">
               <a:lnSpc>
                 <a:spcPct val="104000"/>
               </a:lnSpc>
@@ -21909,12 +21899,12 @@
           </a:ln>
         </p:spPr>
         <p:txBody>
-          <a:bodyPr wrap="square" lIns="137160" tIns="91440" rIns="137160" bIns="91440" rtlCol="0" anchor="t">
+          <a:bodyPr wrap="square" lIns="137160" tIns="91440" rIns="137160" bIns="91440" rtlCol="0" anchor="ctr">
             <a:normAutofit/>
           </a:bodyPr>
           <a:lstStyle/>
           <a:p>
-            <a:pPr marL="0" indent="0" algn="l">
+            <a:pPr marL="0" indent="0" algn="ctr">
               <a:lnSpc>
                 <a:spcPct val="104000"/>
               </a:lnSpc>
@@ -21935,7 +21925,7 @@
             </a:r>
           </a:p>
           <a:p>
-            <a:pPr marL="0" indent="0" algn="l">
+            <a:pPr marL="0" indent="0" algn="ctr">
               <a:lnSpc>
                 <a:spcPct val="104000"/>
               </a:lnSpc>
@@ -22022,12 +22012,12 @@
           </a:ln>
         </p:spPr>
         <p:txBody>
-          <a:bodyPr wrap="square" lIns="137160" tIns="91440" rIns="137160" bIns="91440" rtlCol="0" anchor="t">
+          <a:bodyPr wrap="square" lIns="137160" tIns="91440" rIns="137160" bIns="91440" rtlCol="0" anchor="ctr">
             <a:normAutofit/>
           </a:bodyPr>
           <a:lstStyle/>
           <a:p>
-            <a:pPr marL="0" indent="0" algn="l">
+            <a:pPr marL="0" indent="0" algn="ctr">
               <a:lnSpc>
                 <a:spcPct val="104000"/>
               </a:lnSpc>
@@ -22048,7 +22038,7 @@
             </a:r>
           </a:p>
           <a:p>
-            <a:pPr marL="0" indent="0" algn="l">
+            <a:pPr marL="0" indent="0" algn="ctr">
               <a:lnSpc>
                 <a:spcPct val="104000"/>
               </a:lnSpc>
@@ -22135,12 +22125,12 @@
           </a:ln>
         </p:spPr>
         <p:txBody>
-          <a:bodyPr wrap="square" lIns="137160" tIns="91440" rIns="137160" bIns="91440" rtlCol="0" anchor="t">
+          <a:bodyPr wrap="square" lIns="137160" tIns="91440" rIns="137160" bIns="91440" rtlCol="0" anchor="ctr">
             <a:normAutofit/>
           </a:bodyPr>
           <a:lstStyle/>
           <a:p>
-            <a:pPr marL="0" indent="0" algn="l">
+            <a:pPr marL="0" indent="0" algn="ctr">
               <a:lnSpc>
                 <a:spcPct val="104000"/>
               </a:lnSpc>
@@ -22161,7 +22151,7 @@
             </a:r>
           </a:p>
           <a:p>
-            <a:pPr marL="0" indent="0" algn="l">
+            <a:pPr marL="0" indent="0" algn="ctr">
               <a:lnSpc>
                 <a:spcPct val="104000"/>
               </a:lnSpc>
@@ -22777,7 +22767,7 @@
                 <a:latin typeface="Arial"/>
                 <a:cs typeface="Arial"/>
               </a:rPr>
-              <a:t>Bảng và hình tự đứng được</a:t>
+              <a:t>Bảng và hình tự giải thích được</a:t>
             </a:r>
           </a:p>
         </p:txBody>
@@ -23967,12 +23957,12 @@
           </a:ln>
         </p:spPr>
         <p:txBody>
-          <a:bodyPr wrap="square" lIns="137160" tIns="91440" rIns="137160" bIns="91440" rtlCol="0" anchor="t">
+          <a:bodyPr wrap="square" lIns="137160" tIns="91440" rIns="137160" bIns="91440" rtlCol="0" anchor="ctr">
             <a:normAutofit/>
           </a:bodyPr>
           <a:lstStyle/>
           <a:p>
-            <a:pPr marL="0" indent="0" algn="l">
+            <a:pPr marL="0" indent="0" algn="ctr">
               <a:lnSpc>
                 <a:spcPct val="104000"/>
               </a:lnSpc>
@@ -23993,7 +23983,7 @@
             </a:r>
           </a:p>
           <a:p>
-            <a:pPr marL="0" indent="0" algn="l">
+            <a:pPr marL="0" indent="0" algn="ctr">
               <a:lnSpc>
                 <a:spcPct val="104000"/>
               </a:lnSpc>
@@ -24014,7 +24004,7 @@
             </a:r>
           </a:p>
           <a:p>
-            <a:pPr marL="0" indent="0" algn="l">
+            <a:pPr marL="0" indent="0" algn="ctr">
               <a:lnSpc>
                 <a:spcPct val="104000"/>
               </a:lnSpc>
@@ -24035,7 +24025,7 @@
             </a:r>
           </a:p>
           <a:p>
-            <a:pPr marL="0" indent="0" algn="l">
+            <a:pPr marL="0" indent="0" algn="ctr">
               <a:lnSpc>
                 <a:spcPct val="104000"/>
               </a:lnSpc>
@@ -24056,7 +24046,7 @@
             </a:r>
           </a:p>
           <a:p>
-            <a:pPr marL="0" indent="0" algn="l">
+            <a:pPr marL="0" indent="0" algn="ctr">
               <a:lnSpc>
                 <a:spcPct val="104000"/>
               </a:lnSpc>
@@ -24077,7 +24067,7 @@
             </a:r>
           </a:p>
           <a:p>
-            <a:pPr marL="0" indent="0" algn="l">
+            <a:pPr marL="0" indent="0" algn="ctr">
               <a:lnSpc>
                 <a:spcPct val="104000"/>
               </a:lnSpc>
@@ -24098,7 +24088,7 @@
             </a:r>
           </a:p>
           <a:p>
-            <a:pPr marL="0" indent="0" algn="l">
+            <a:pPr marL="0" indent="0" algn="ctr">
               <a:lnSpc>
                 <a:spcPct val="104000"/>
               </a:lnSpc>
@@ -24119,7 +24109,7 @@
             </a:r>
           </a:p>
           <a:p>
-            <a:pPr marL="0" indent="0" algn="l">
+            <a:pPr marL="0" indent="0" algn="ctr">
               <a:lnSpc>
                 <a:spcPct val="104000"/>
               </a:lnSpc>
@@ -24206,12 +24196,12 @@
           </a:ln>
         </p:spPr>
         <p:txBody>
-          <a:bodyPr wrap="square" lIns="137160" tIns="91440" rIns="137160" bIns="91440" rtlCol="0" anchor="t">
+          <a:bodyPr wrap="square" lIns="137160" tIns="91440" rIns="137160" bIns="91440" rtlCol="0" anchor="ctr">
             <a:normAutofit/>
           </a:bodyPr>
           <a:lstStyle/>
           <a:p>
-            <a:pPr marL="0" indent="0" algn="l">
+            <a:pPr marL="0" indent="0" algn="ctr">
               <a:lnSpc>
                 <a:spcPct val="104000"/>
               </a:lnSpc>
@@ -24232,7 +24222,7 @@
             </a:r>
           </a:p>
           <a:p>
-            <a:pPr marL="0" indent="0" algn="l">
+            <a:pPr marL="0" indent="0" algn="ctr">
               <a:lnSpc>
                 <a:spcPct val="104000"/>
               </a:lnSpc>
@@ -24253,7 +24243,7 @@
             </a:r>
           </a:p>
           <a:p>
-            <a:pPr marL="0" indent="0" algn="l">
+            <a:pPr marL="0" indent="0" algn="ctr">
               <a:lnSpc>
                 <a:spcPct val="104000"/>
               </a:lnSpc>
@@ -24274,7 +24264,7 @@
             </a:r>
           </a:p>
           <a:p>
-            <a:pPr marL="0" indent="0" algn="l">
+            <a:pPr marL="0" indent="0" algn="ctr">
               <a:lnSpc>
                 <a:spcPct val="104000"/>
               </a:lnSpc>
@@ -24295,7 +24285,7 @@
             </a:r>
           </a:p>
           <a:p>
-            <a:pPr marL="0" indent="0" algn="l">
+            <a:pPr marL="0" indent="0" algn="ctr">
               <a:lnSpc>
                 <a:spcPct val="104000"/>
               </a:lnSpc>
@@ -24784,12 +24774,12 @@
           </a:ln>
         </p:spPr>
         <p:txBody>
-          <a:bodyPr wrap="square" lIns="137160" tIns="91440" rIns="137160" bIns="91440" rtlCol="0" anchor="t">
+          <a:bodyPr wrap="square" lIns="137160" tIns="91440" rIns="137160" bIns="91440" rtlCol="0" anchor="ctr">
             <a:normAutofit/>
           </a:bodyPr>
           <a:lstStyle/>
           <a:p>
-            <a:pPr marL="0" indent="0" algn="l">
+            <a:pPr marL="0" indent="0" algn="ctr">
               <a:buNone/>
             </a:pPr>
             <a:r>
@@ -24804,15 +24794,14 @@
             </a:r>
           </a:p>
           <a:p>
-            <a:pPr marL="274320" indent="-274320" algn="l">
+            <a:pPr marL="0" indent="0" algn="ctr">
               <a:lnSpc>
                 <a:spcPct val="104000"/>
               </a:lnSpc>
               <a:spcBef>
                 <a:spcPts val="300"/>
               </a:spcBef>
-              <a:buFont typeface="Arial"/>
-              <a:buChar char="•"/>
+              <a:buNone/>
             </a:pPr>
             <a:r>
               <a:rPr lang="en-US" sz="1500" dirty="0">
@@ -24826,15 +24815,14 @@
             </a:r>
           </a:p>
           <a:p>
-            <a:pPr marL="274320" indent="-274320" algn="l">
+            <a:pPr marL="0" indent="0" algn="ctr">
               <a:lnSpc>
                 <a:spcPct val="104000"/>
               </a:lnSpc>
               <a:spcBef>
                 <a:spcPts val="300"/>
               </a:spcBef>
-              <a:buFont typeface="Arial"/>
-              <a:buChar char="•"/>
+              <a:buNone/>
             </a:pPr>
             <a:r>
               <a:rPr lang="en-US" sz="1500" dirty="0">
@@ -24848,15 +24836,14 @@
             </a:r>
           </a:p>
           <a:p>
-            <a:pPr marL="274320" indent="-274320" algn="l">
+            <a:pPr marL="0" indent="0" algn="ctr">
               <a:lnSpc>
                 <a:spcPct val="104000"/>
               </a:lnSpc>
               <a:spcBef>
                 <a:spcPts val="300"/>
               </a:spcBef>
-              <a:buFont typeface="Arial"/>
-              <a:buChar char="•"/>
+              <a:buNone/>
             </a:pPr>
             <a:r>
               <a:rPr lang="en-US" sz="1500" dirty="0">
@@ -24870,15 +24857,14 @@
             </a:r>
           </a:p>
           <a:p>
-            <a:pPr marL="274320" indent="-274320" algn="l">
+            <a:pPr marL="0" indent="0" algn="ctr">
               <a:lnSpc>
                 <a:spcPct val="104000"/>
               </a:lnSpc>
               <a:spcBef>
                 <a:spcPts val="300"/>
               </a:spcBef>
-              <a:buFont typeface="Arial"/>
-              <a:buChar char="•"/>
+              <a:buNone/>
             </a:pPr>
             <a:r>
               <a:rPr lang="en-US" sz="1500" dirty="0">
@@ -24892,15 +24878,14 @@
             </a:r>
           </a:p>
           <a:p>
-            <a:pPr marL="274320" indent="-274320" algn="l">
+            <a:pPr marL="0" indent="0" algn="ctr">
               <a:lnSpc>
                 <a:spcPct val="104000"/>
               </a:lnSpc>
               <a:spcBef>
                 <a:spcPts val="300"/>
               </a:spcBef>
-              <a:buFont typeface="Arial"/>
-              <a:buChar char="•"/>
+              <a:buNone/>
             </a:pPr>
             <a:r>
               <a:rPr lang="en-US" sz="1500" dirty="0">
@@ -25558,12 +25543,12 @@
           </a:ln>
         </p:spPr>
         <p:txBody>
-          <a:bodyPr wrap="square" lIns="137160" tIns="91440" rIns="137160" bIns="91440" rtlCol="0" anchor="t">
+          <a:bodyPr wrap="square" lIns="137160" tIns="91440" rIns="137160" bIns="91440" rtlCol="0" anchor="ctr">
             <a:normAutofit/>
           </a:bodyPr>
           <a:lstStyle/>
           <a:p>
-            <a:pPr marL="0" indent="0" algn="l">
+            <a:pPr marL="0" indent="0" algn="ctr">
               <a:buNone/>
             </a:pPr>
             <a:r>
@@ -25578,15 +25563,14 @@
             </a:r>
           </a:p>
           <a:p>
-            <a:pPr marL="274320" indent="-274320" algn="l">
+            <a:pPr marL="0" indent="0" algn="ctr">
               <a:lnSpc>
                 <a:spcPct val="104000"/>
               </a:lnSpc>
               <a:spcBef>
                 <a:spcPts val="300"/>
               </a:spcBef>
-              <a:buFont typeface="Arial"/>
-              <a:buChar char="•"/>
+              <a:buNone/>
             </a:pPr>
             <a:r>
               <a:rPr lang="en-US" sz="1500" dirty="0">
@@ -25600,15 +25584,14 @@
             </a:r>
           </a:p>
           <a:p>
-            <a:pPr marL="274320" indent="-274320" algn="l">
+            <a:pPr marL="0" indent="0" algn="ctr">
               <a:lnSpc>
                 <a:spcPct val="104000"/>
               </a:lnSpc>
               <a:spcBef>
                 <a:spcPts val="300"/>
               </a:spcBef>
-              <a:buFont typeface="Arial"/>
-              <a:buChar char="•"/>
+              <a:buNone/>
             </a:pPr>
             <a:r>
               <a:rPr lang="en-US" sz="1500" dirty="0">
@@ -25622,15 +25605,14 @@
             </a:r>
           </a:p>
           <a:p>
-            <a:pPr marL="274320" indent="-274320" algn="l">
+            <a:pPr marL="0" indent="0" algn="ctr">
               <a:lnSpc>
                 <a:spcPct val="104000"/>
               </a:lnSpc>
               <a:spcBef>
                 <a:spcPts val="300"/>
               </a:spcBef>
-              <a:buFont typeface="Arial"/>
-              <a:buChar char="•"/>
+              <a:buNone/>
             </a:pPr>
             <a:r>
               <a:rPr lang="en-US" sz="1500" dirty="0">
@@ -25644,15 +25626,14 @@
             </a:r>
           </a:p>
           <a:p>
-            <a:pPr marL="274320" indent="-274320" algn="l">
+            <a:pPr marL="0" indent="0" algn="ctr">
               <a:lnSpc>
                 <a:spcPct val="104000"/>
               </a:lnSpc>
               <a:spcBef>
                 <a:spcPts val="300"/>
               </a:spcBef>
-              <a:buFont typeface="Arial"/>
-              <a:buChar char="•"/>
+              <a:buNone/>
             </a:pPr>
             <a:r>
               <a:rPr lang="en-US" sz="1500" dirty="0">
@@ -26136,12 +26117,12 @@
           </a:ln>
         </p:spPr>
         <p:txBody>
-          <a:bodyPr wrap="square" lIns="137160" tIns="91440" rIns="137160" bIns="91440" rtlCol="0" anchor="t">
+          <a:bodyPr wrap="square" lIns="137160" tIns="91440" rIns="137160" bIns="91440" rtlCol="0" anchor="ctr">
             <a:normAutofit/>
           </a:bodyPr>
           <a:lstStyle/>
           <a:p>
-            <a:pPr marL="0" indent="0" algn="l">
+            <a:pPr marL="0" indent="0" algn="ctr">
               <a:buNone/>
             </a:pPr>
             <a:r>
@@ -26156,15 +26137,14 @@
             </a:r>
           </a:p>
           <a:p>
-            <a:pPr marL="274320" indent="-274320" algn="l">
+            <a:pPr marL="0" indent="0" algn="ctr">
               <a:lnSpc>
                 <a:spcPct val="104000"/>
               </a:lnSpc>
               <a:spcBef>
                 <a:spcPts val="300"/>
               </a:spcBef>
-              <a:buFont typeface="Arial"/>
-              <a:buChar char="•"/>
+              <a:buNone/>
             </a:pPr>
             <a:r>
               <a:rPr lang="en-US" sz="1500" dirty="0">
@@ -26178,15 +26158,14 @@
             </a:r>
           </a:p>
           <a:p>
-            <a:pPr marL="274320" indent="-274320" algn="l">
+            <a:pPr marL="0" indent="0" algn="ctr">
               <a:lnSpc>
                 <a:spcPct val="104000"/>
               </a:lnSpc>
               <a:spcBef>
                 <a:spcPts val="300"/>
               </a:spcBef>
-              <a:buFont typeface="Arial"/>
-              <a:buChar char="•"/>
+              <a:buNone/>
             </a:pPr>
             <a:r>
               <a:rPr lang="en-US" sz="1500" dirty="0">
@@ -26200,15 +26179,14 @@
             </a:r>
           </a:p>
           <a:p>
-            <a:pPr marL="274320" indent="-274320" algn="l">
+            <a:pPr marL="0" indent="0" algn="ctr">
               <a:lnSpc>
                 <a:spcPct val="104000"/>
               </a:lnSpc>
               <a:spcBef>
                 <a:spcPts val="300"/>
               </a:spcBef>
-              <a:buFont typeface="Arial"/>
-              <a:buChar char="•"/>
+              <a:buNone/>
             </a:pPr>
             <a:r>
               <a:rPr lang="en-US" sz="1500" dirty="0">
@@ -26222,15 +26200,14 @@
             </a:r>
           </a:p>
           <a:p>
-            <a:pPr marL="274320" indent="-274320" algn="l">
+            <a:pPr marL="0" indent="0" algn="ctr">
               <a:lnSpc>
                 <a:spcPct val="104000"/>
               </a:lnSpc>
               <a:spcBef>
                 <a:spcPts val="300"/>
               </a:spcBef>
-              <a:buFont typeface="Arial"/>
-              <a:buChar char="•"/>
+              <a:buNone/>
             </a:pPr>
             <a:r>
               <a:rPr lang="en-US" sz="1500" dirty="0">
@@ -26244,15 +26221,14 @@
             </a:r>
           </a:p>
           <a:p>
-            <a:pPr marL="274320" indent="-274320" algn="l">
+            <a:pPr marL="0" indent="0" algn="ctr">
               <a:lnSpc>
                 <a:spcPct val="104000"/>
               </a:lnSpc>
               <a:spcBef>
                 <a:spcPts val="300"/>
               </a:spcBef>
-              <a:buFont typeface="Arial"/>
-              <a:buChar char="•"/>
+              <a:buNone/>
             </a:pPr>
             <a:r>
               <a:rPr lang="en-US" sz="1500" dirty="0">
@@ -27601,12 +27577,12 @@
           </a:ln>
         </p:spPr>
         <p:txBody>
-          <a:bodyPr wrap="square" lIns="137160" tIns="91440" rIns="137160" bIns="91440" rtlCol="0" anchor="t">
+          <a:bodyPr wrap="square" lIns="137160" tIns="91440" rIns="137160" bIns="91440" rtlCol="0" anchor="ctr">
             <a:normAutofit/>
           </a:bodyPr>
           <a:lstStyle/>
           <a:p>
-            <a:pPr marL="0" indent="0" algn="l">
+            <a:pPr marL="0" indent="0" algn="ctr">
               <a:buNone/>
             </a:pPr>
             <a:r>
@@ -27621,15 +27597,14 @@
             </a:r>
           </a:p>
           <a:p>
-            <a:pPr marL="274320" indent="-274320" algn="l">
+            <a:pPr marL="0" indent="0" algn="ctr">
               <a:lnSpc>
                 <a:spcPct val="104000"/>
               </a:lnSpc>
               <a:spcBef>
                 <a:spcPts val="300"/>
               </a:spcBef>
-              <a:buFont typeface="Arial"/>
-              <a:buChar char="•"/>
+              <a:buNone/>
             </a:pPr>
             <a:r>
               <a:rPr lang="en-US" sz="1500" dirty="0">
@@ -27643,15 +27618,14 @@
             </a:r>
           </a:p>
           <a:p>
-            <a:pPr marL="274320" indent="-274320" algn="l">
+            <a:pPr marL="0" indent="0" algn="ctr">
               <a:lnSpc>
                 <a:spcPct val="104000"/>
               </a:lnSpc>
               <a:spcBef>
                 <a:spcPts val="300"/>
               </a:spcBef>
-              <a:buFont typeface="Arial"/>
-              <a:buChar char="•"/>
+              <a:buNone/>
             </a:pPr>
             <a:r>
               <a:rPr lang="en-US" sz="1500" dirty="0">
@@ -27665,15 +27639,14 @@
             </a:r>
           </a:p>
           <a:p>
-            <a:pPr marL="274320" indent="-274320" algn="l">
+            <a:pPr marL="0" indent="0" algn="ctr">
               <a:lnSpc>
                 <a:spcPct val="104000"/>
               </a:lnSpc>
               <a:spcBef>
                 <a:spcPts val="300"/>
               </a:spcBef>
-              <a:buFont typeface="Arial"/>
-              <a:buChar char="•"/>
+              <a:buNone/>
             </a:pPr>
             <a:r>
               <a:rPr lang="en-US" sz="1500" dirty="0">
@@ -28388,12 +28361,12 @@
           </a:ln>
         </p:spPr>
         <p:txBody>
-          <a:bodyPr wrap="square" lIns="137160" tIns="91440" rIns="137160" bIns="91440" rtlCol="0" anchor="t">
+          <a:bodyPr wrap="square" lIns="137160" tIns="91440" rIns="137160" bIns="91440" rtlCol="0" anchor="ctr">
             <a:normAutofit/>
           </a:bodyPr>
           <a:lstStyle/>
           <a:p>
-            <a:pPr marL="0" indent="0" algn="l">
+            <a:pPr marL="0" indent="0" algn="ctr">
               <a:buNone/>
             </a:pPr>
             <a:r>
@@ -28408,15 +28381,14 @@
             </a:r>
           </a:p>
           <a:p>
-            <a:pPr marL="274320" indent="-274320" algn="l">
+            <a:pPr marL="0" indent="0" algn="ctr">
               <a:lnSpc>
                 <a:spcPct val="104000"/>
               </a:lnSpc>
               <a:spcBef>
                 <a:spcPts val="300"/>
               </a:spcBef>
-              <a:buFont typeface="Arial"/>
-              <a:buChar char="•"/>
+              <a:buNone/>
             </a:pPr>
             <a:r>
               <a:rPr lang="en-US" sz="1500" dirty="0">
@@ -28430,15 +28402,14 @@
             </a:r>
           </a:p>
           <a:p>
-            <a:pPr marL="274320" indent="-274320" algn="l">
+            <a:pPr marL="0" indent="0" algn="ctr">
               <a:lnSpc>
                 <a:spcPct val="104000"/>
               </a:lnSpc>
               <a:spcBef>
                 <a:spcPts val="300"/>
               </a:spcBef>
-              <a:buFont typeface="Arial"/>
-              <a:buChar char="•"/>
+              <a:buNone/>
             </a:pPr>
             <a:r>
               <a:rPr lang="en-US" sz="1500" dirty="0">
@@ -28452,15 +28423,14 @@
             </a:r>
           </a:p>
           <a:p>
-            <a:pPr marL="274320" indent="-274320" algn="l">
+            <a:pPr marL="0" indent="0" algn="ctr">
               <a:lnSpc>
                 <a:spcPct val="104000"/>
               </a:lnSpc>
               <a:spcBef>
                 <a:spcPts val="300"/>
               </a:spcBef>
-              <a:buFont typeface="Arial"/>
-              <a:buChar char="•"/>
+              <a:buNone/>
             </a:pPr>
             <a:r>
               <a:rPr lang="en-US" sz="1500" dirty="0">
@@ -28474,15 +28444,14 @@
             </a:r>
           </a:p>
           <a:p>
-            <a:pPr marL="274320" indent="-274320" algn="l">
+            <a:pPr marL="0" indent="0" algn="ctr">
               <a:lnSpc>
                 <a:spcPct val="104000"/>
               </a:lnSpc>
               <a:spcBef>
                 <a:spcPts val="300"/>
               </a:spcBef>
-              <a:buFont typeface="Arial"/>
-              <a:buChar char="•"/>
+              <a:buNone/>
             </a:pPr>
             <a:r>
               <a:rPr lang="en-US" sz="1500" dirty="0">
@@ -29072,12 +29041,12 @@
           </a:ln>
         </p:spPr>
         <p:txBody>
-          <a:bodyPr wrap="square" lIns="137160" tIns="91440" rIns="137160" bIns="91440" rtlCol="0" anchor="t">
+          <a:bodyPr wrap="square" lIns="137160" tIns="91440" rIns="137160" bIns="91440" rtlCol="0" anchor="ctr">
             <a:normAutofit/>
           </a:bodyPr>
           <a:lstStyle/>
           <a:p>
-            <a:pPr marL="0" indent="0" algn="l">
+            <a:pPr marL="0" indent="0" algn="ctr">
               <a:lnSpc>
                 <a:spcPct val="104000"/>
               </a:lnSpc>
@@ -29098,7 +29067,7 @@
             </a:r>
           </a:p>
           <a:p>
-            <a:pPr marL="0" indent="0" algn="l">
+            <a:pPr marL="0" indent="0" algn="ctr">
               <a:lnSpc>
                 <a:spcPct val="104000"/>
               </a:lnSpc>
@@ -29119,7 +29088,7 @@
             </a:r>
           </a:p>
           <a:p>
-            <a:pPr marL="0" indent="0" algn="l">
+            <a:pPr marL="0" indent="0" algn="ctr">
               <a:lnSpc>
                 <a:spcPct val="104000"/>
               </a:lnSpc>
@@ -29140,7 +29109,7 @@
             </a:r>
           </a:p>
           <a:p>
-            <a:pPr marL="0" indent="0" algn="l">
+            <a:pPr marL="0" indent="0" algn="ctr">
               <a:lnSpc>
                 <a:spcPct val="104000"/>
               </a:lnSpc>
@@ -29161,7 +29130,7 @@
             </a:r>
           </a:p>
           <a:p>
-            <a:pPr marL="0" indent="0" algn="l">
+            <a:pPr marL="0" indent="0" algn="ctr">
               <a:lnSpc>
                 <a:spcPct val="104000"/>
               </a:lnSpc>
@@ -29182,7 +29151,7 @@
             </a:r>
           </a:p>
           <a:p>
-            <a:pPr marL="0" indent="0" algn="l">
+            <a:pPr marL="0" indent="0" algn="ctr">
               <a:lnSpc>
                 <a:spcPct val="104000"/>
               </a:lnSpc>
@@ -29203,7 +29172,7 @@
             </a:r>
           </a:p>
           <a:p>
-            <a:pPr marL="0" indent="0" algn="l">
+            <a:pPr marL="0" indent="0" algn="ctr">
               <a:lnSpc>
                 <a:spcPct val="104000"/>
               </a:lnSpc>
@@ -29290,12 +29259,12 @@
           </a:ln>
         </p:spPr>
         <p:txBody>
-          <a:bodyPr wrap="square" lIns="137160" tIns="91440" rIns="137160" bIns="91440" rtlCol="0" anchor="t">
+          <a:bodyPr wrap="square" lIns="137160" tIns="91440" rIns="137160" bIns="91440" rtlCol="0" anchor="ctr">
             <a:normAutofit/>
           </a:bodyPr>
           <a:lstStyle/>
           <a:p>
-            <a:pPr marL="0" indent="0" algn="l">
+            <a:pPr marL="0" indent="0" algn="ctr">
               <a:lnSpc>
                 <a:spcPct val="104000"/>
               </a:lnSpc>
@@ -29316,7 +29285,7 @@
             </a:r>
           </a:p>
           <a:p>
-            <a:pPr marL="0" indent="0" algn="l">
+            <a:pPr marL="0" indent="0" algn="ctr">
               <a:lnSpc>
                 <a:spcPct val="104000"/>
               </a:lnSpc>
@@ -29337,7 +29306,7 @@
             </a:r>
           </a:p>
           <a:p>
-            <a:pPr marL="0" indent="0" algn="l">
+            <a:pPr marL="0" indent="0" algn="ctr">
               <a:lnSpc>
                 <a:spcPct val="104000"/>
               </a:lnSpc>
@@ -29424,12 +29393,12 @@
           </a:ln>
         </p:spPr>
         <p:txBody>
-          <a:bodyPr wrap="square" lIns="137160" tIns="91440" rIns="137160" bIns="91440" rtlCol="0" anchor="t">
+          <a:bodyPr wrap="square" lIns="137160" tIns="91440" rIns="137160" bIns="91440" rtlCol="0" anchor="ctr">
             <a:normAutofit/>
           </a:bodyPr>
           <a:lstStyle/>
           <a:p>
-            <a:pPr marL="0" indent="0" algn="l">
+            <a:pPr marL="0" indent="0" algn="ctr">
               <a:lnSpc>
                 <a:spcPct val="104000"/>
               </a:lnSpc>
@@ -29450,7 +29419,7 @@
             </a:r>
           </a:p>
           <a:p>
-            <a:pPr marL="0" indent="0" algn="l">
+            <a:pPr marL="0" indent="0" algn="ctr">
               <a:lnSpc>
                 <a:spcPct val="104000"/>
               </a:lnSpc>
@@ -29471,7 +29440,7 @@
             </a:r>
           </a:p>
           <a:p>
-            <a:pPr marL="0" indent="0" algn="l">
+            <a:pPr marL="0" indent="0" algn="ctr">
               <a:lnSpc>
                 <a:spcPct val="104000"/>
               </a:lnSpc>
@@ -30124,12 +30093,12 @@
           </a:ln>
         </p:spPr>
         <p:txBody>
-          <a:bodyPr wrap="square" lIns="137160" tIns="91440" rIns="137160" bIns="91440" rtlCol="0" anchor="t">
+          <a:bodyPr wrap="square" lIns="137160" tIns="91440" rIns="137160" bIns="91440" rtlCol="0" anchor="ctr">
             <a:normAutofit/>
           </a:bodyPr>
           <a:lstStyle/>
           <a:p>
-            <a:pPr marL="0" indent="0" algn="l">
+            <a:pPr marL="0" indent="0" algn="ctr">
               <a:lnSpc>
                 <a:spcPct val="104000"/>
               </a:lnSpc>
@@ -30150,7 +30119,7 @@
             </a:r>
           </a:p>
           <a:p>
-            <a:pPr marL="0" indent="0" algn="l">
+            <a:pPr marL="0" indent="0" algn="ctr">
               <a:lnSpc>
                 <a:spcPct val="104000"/>
               </a:lnSpc>
@@ -30171,7 +30140,7 @@
             </a:r>
           </a:p>
           <a:p>
-            <a:pPr marL="0" indent="0" algn="l">
+            <a:pPr marL="0" indent="0" algn="ctr">
               <a:lnSpc>
                 <a:spcPct val="104000"/>
               </a:lnSpc>
@@ -30192,7 +30161,7 @@
             </a:r>
           </a:p>
           <a:p>
-            <a:pPr marL="0" indent="0" algn="l">
+            <a:pPr marL="0" indent="0" algn="ctr">
               <a:lnSpc>
                 <a:spcPct val="104000"/>
               </a:lnSpc>
@@ -30279,12 +30248,12 @@
           </a:ln>
         </p:spPr>
         <p:txBody>
-          <a:bodyPr wrap="square" lIns="137160" tIns="91440" rIns="137160" bIns="91440" rtlCol="0" anchor="t">
+          <a:bodyPr wrap="square" lIns="137160" tIns="91440" rIns="137160" bIns="91440" rtlCol="0" anchor="ctr">
             <a:normAutofit/>
           </a:bodyPr>
           <a:lstStyle/>
           <a:p>
-            <a:pPr marL="0" indent="0" algn="l">
+            <a:pPr marL="0" indent="0" algn="ctr">
               <a:lnSpc>
                 <a:spcPct val="104000"/>
               </a:lnSpc>
@@ -30305,7 +30274,7 @@
             </a:r>
           </a:p>
           <a:p>
-            <a:pPr marL="0" indent="0" algn="l">
+            <a:pPr marL="0" indent="0" algn="ctr">
               <a:lnSpc>
                 <a:spcPct val="104000"/>
               </a:lnSpc>
@@ -30326,7 +30295,7 @@
             </a:r>
           </a:p>
           <a:p>
-            <a:pPr marL="0" indent="0" algn="l">
+            <a:pPr marL="0" indent="0" algn="ctr">
               <a:lnSpc>
                 <a:spcPct val="104000"/>
               </a:lnSpc>
@@ -30347,7 +30316,7 @@
             </a:r>
           </a:p>
           <a:p>
-            <a:pPr marL="0" indent="0" algn="l">
+            <a:pPr marL="0" indent="0" algn="ctr">
               <a:lnSpc>
                 <a:spcPct val="104000"/>
               </a:lnSpc>
@@ -30434,12 +30403,12 @@
           </a:ln>
         </p:spPr>
         <p:txBody>
-          <a:bodyPr wrap="square" lIns="137160" tIns="91440" rIns="137160" bIns="91440" rtlCol="0" anchor="t">
+          <a:bodyPr wrap="square" lIns="137160" tIns="91440" rIns="137160" bIns="91440" rtlCol="0" anchor="ctr">
             <a:normAutofit/>
           </a:bodyPr>
           <a:lstStyle/>
           <a:p>
-            <a:pPr marL="0" indent="0" algn="l">
+            <a:pPr marL="0" indent="0" algn="ctr">
               <a:lnSpc>
                 <a:spcPct val="104000"/>
               </a:lnSpc>
@@ -30460,7 +30429,7 @@
             </a:r>
           </a:p>
           <a:p>
-            <a:pPr marL="0" indent="0" algn="l">
+            <a:pPr marL="0" indent="0" algn="ctr">
               <a:lnSpc>
                 <a:spcPct val="104000"/>
               </a:lnSpc>
@@ -30481,7 +30450,7 @@
             </a:r>
           </a:p>
           <a:p>
-            <a:pPr marL="0" indent="0" algn="l">
+            <a:pPr marL="0" indent="0" algn="ctr">
               <a:lnSpc>
                 <a:spcPct val="104000"/>
               </a:lnSpc>
@@ -30502,7 +30471,7 @@
             </a:r>
           </a:p>
           <a:p>
-            <a:pPr marL="0" indent="0" algn="l">
+            <a:pPr marL="0" indent="0" algn="ctr">
               <a:lnSpc>
                 <a:spcPct val="104000"/>
               </a:lnSpc>
@@ -30589,12 +30558,12 @@
           </a:ln>
         </p:spPr>
         <p:txBody>
-          <a:bodyPr wrap="square" lIns="137160" tIns="91440" rIns="137160" bIns="91440" rtlCol="0" anchor="t">
+          <a:bodyPr wrap="square" lIns="137160" tIns="91440" rIns="137160" bIns="91440" rtlCol="0" anchor="ctr">
             <a:normAutofit/>
           </a:bodyPr>
           <a:lstStyle/>
           <a:p>
-            <a:pPr marL="0" indent="0" algn="l">
+            <a:pPr marL="0" indent="0" algn="ctr">
               <a:lnSpc>
                 <a:spcPct val="104000"/>
               </a:lnSpc>
@@ -30615,7 +30584,7 @@
             </a:r>
           </a:p>
           <a:p>
-            <a:pPr marL="0" indent="0" algn="l">
+            <a:pPr marL="0" indent="0" algn="ctr">
               <a:lnSpc>
                 <a:spcPct val="104000"/>
               </a:lnSpc>
@@ -30636,7 +30605,7 @@
             </a:r>
           </a:p>
           <a:p>
-            <a:pPr marL="0" indent="0" algn="l">
+            <a:pPr marL="0" indent="0" algn="ctr">
               <a:lnSpc>
                 <a:spcPct val="104000"/>
               </a:lnSpc>
@@ -30657,7 +30626,7 @@
             </a:r>
           </a:p>
           <a:p>
-            <a:pPr marL="0" indent="0" algn="l">
+            <a:pPr marL="0" indent="0" algn="ctr">
               <a:lnSpc>
                 <a:spcPct val="104000"/>
               </a:lnSpc>
@@ -30995,7 +30964,7 @@
           </a:ln>
         </p:spPr>
         <p:txBody>
-          <a:bodyPr wrap="square" lIns="137160" tIns="91440" rIns="137160" bIns="91440" rtlCol="0" anchor="t">
+          <a:bodyPr wrap="square" lIns="137160" tIns="91440" rIns="137160" bIns="91440" rtlCol="0" anchor="ctr">
             <a:normAutofit/>
           </a:bodyPr>
           <a:lstStyle/>
@@ -31198,7 +31167,7 @@
           </a:ln>
         </p:spPr>
         <p:txBody>
-          <a:bodyPr wrap="square" lIns="137160" tIns="91440" rIns="137160" bIns="91440" rtlCol="0" anchor="t">
+          <a:bodyPr wrap="square" lIns="137160" tIns="91440" rIns="137160" bIns="91440" rtlCol="0" anchor="ctr">
             <a:normAutofit/>
           </a:bodyPr>
           <a:lstStyle/>
@@ -31265,7 +31234,7 @@
                 <a:latin typeface="Arial"/>
                 <a:cs typeface="Arial"/>
               </a:rPr>
-              <a:t>Đề cương rõ ràng, khả thi</a:t>
+              <a:t>Đề cương rõ ràng, khả thi</a:t>
             </a:r>
           </a:p>
           <a:p>
@@ -31547,14 +31516,14 @@
               <a:buNone/>
             </a:pPr>
             <a:r>
-              <a:rPr lang="en-US" sz="2400" b="1" dirty="0">
+              <a:rPr lang="en-US" sz="2800" b="1" dirty="0">
                 <a:solidFill>
                   <a:srgbClr val="0D7377"/>
                 </a:solidFill>
                 <a:latin typeface="Arial"/>
                 <a:cs typeface="Arial"/>
               </a:rPr>
-              <a:t>Hành trình qua hội đồng đạo đức: phê duyệt trước dữ liệu</a:t>
+              <a:t>Xét duyệt đạo đức: phê duyệt trước khi thu dữ liệu</a:t>
             </a:r>
           </a:p>
         </p:txBody>
@@ -31693,12 +31662,12 @@
           </a:ln>
         </p:spPr>
         <p:txBody>
-          <a:bodyPr wrap="square" lIns="110000" tIns="91440" rIns="110000" bIns="91440" rtlCol="0" anchor="t">
+          <a:bodyPr wrap="square" lIns="110000" tIns="91440" rIns="110000" bIns="91440" rtlCol="0" anchor="ctr">
             <a:normAutofit/>
           </a:bodyPr>
           <a:lstStyle/>
           <a:p>
-            <a:pPr marL="0" indent="0" algn="l">
+            <a:pPr marL="0" indent="0" algn="ctr">
               <a:lnSpc>
                 <a:spcPct val="104000"/>
               </a:lnSpc>
@@ -31719,7 +31688,7 @@
             </a:r>
           </a:p>
           <a:p>
-            <a:pPr marL="0" indent="0" algn="l">
+            <a:pPr marL="0" indent="0" algn="ctr">
               <a:lnSpc>
                 <a:spcPct val="104000"/>
               </a:lnSpc>
@@ -31740,7 +31709,7 @@
             </a:r>
           </a:p>
           <a:p>
-            <a:pPr marL="0" indent="0" algn="l">
+            <a:pPr marL="0" indent="0" algn="ctr">
               <a:lnSpc>
                 <a:spcPct val="104000"/>
               </a:lnSpc>
@@ -31829,12 +31798,12 @@
           </a:ln>
         </p:spPr>
         <p:txBody>
-          <a:bodyPr wrap="square" lIns="110000" tIns="91440" rIns="110000" bIns="91440" rtlCol="0" anchor="t">
+          <a:bodyPr wrap="square" lIns="110000" tIns="91440" rIns="110000" bIns="91440" rtlCol="0" anchor="ctr">
             <a:normAutofit/>
           </a:bodyPr>
           <a:lstStyle/>
           <a:p>
-            <a:pPr marL="0" indent="0" algn="l">
+            <a:pPr marL="0" indent="0" algn="ctr">
               <a:lnSpc>
                 <a:spcPct val="104000"/>
               </a:lnSpc>
@@ -31923,12 +31892,12 @@
           </a:ln>
         </p:spPr>
         <p:txBody>
-          <a:bodyPr wrap="square" lIns="110000" tIns="91440" rIns="110000" bIns="91440" rtlCol="0" anchor="t">
+          <a:bodyPr wrap="square" lIns="110000" tIns="91440" rIns="110000" bIns="91440" rtlCol="0" anchor="ctr">
             <a:normAutofit/>
           </a:bodyPr>
           <a:lstStyle/>
           <a:p>
-            <a:pPr marL="0" indent="0" algn="l">
+            <a:pPr marL="0" indent="0" algn="ctr">
               <a:lnSpc>
                 <a:spcPct val="104000"/>
               </a:lnSpc>
@@ -32017,12 +31986,12 @@
           </a:ln>
         </p:spPr>
         <p:txBody>
-          <a:bodyPr wrap="square" lIns="110000" tIns="91440" rIns="110000" bIns="91440" rtlCol="0" anchor="t">
+          <a:bodyPr wrap="square" lIns="110000" tIns="91440" rIns="110000" bIns="91440" rtlCol="0" anchor="ctr">
             <a:normAutofit/>
           </a:bodyPr>
           <a:lstStyle/>
           <a:p>
-            <a:pPr marL="0" indent="0" algn="l">
+            <a:pPr marL="0" indent="0" algn="ctr">
               <a:lnSpc>
                 <a:spcPct val="104000"/>
               </a:lnSpc>
@@ -32043,7 +32012,7 @@
             </a:r>
           </a:p>
           <a:p>
-            <a:pPr marL="0" indent="0" algn="l">
+            <a:pPr marL="0" indent="0" algn="ctr">
               <a:lnSpc>
                 <a:spcPct val="104000"/>
               </a:lnSpc>
@@ -32132,12 +32101,12 @@
           </a:ln>
         </p:spPr>
         <p:txBody>
-          <a:bodyPr wrap="square" lIns="110000" tIns="91440" rIns="110000" bIns="91440" rtlCol="0" anchor="t">
+          <a:bodyPr wrap="square" lIns="110000" tIns="91440" rIns="110000" bIns="91440" rtlCol="0" anchor="ctr">
             <a:normAutofit/>
           </a:bodyPr>
           <a:lstStyle/>
           <a:p>
-            <a:pPr marL="0" indent="0" algn="l">
+            <a:pPr marL="0" indent="0" algn="ctr">
               <a:lnSpc>
                 <a:spcPct val="104000"/>
               </a:lnSpc>
@@ -32226,12 +32195,12 @@
           </a:ln>
         </p:spPr>
         <p:txBody>
-          <a:bodyPr wrap="square" lIns="110000" tIns="91440" rIns="110000" bIns="91440" rtlCol="0" anchor="t">
+          <a:bodyPr wrap="square" lIns="110000" tIns="91440" rIns="110000" bIns="91440" rtlCol="0" anchor="ctr">
             <a:normAutofit/>
           </a:bodyPr>
           <a:lstStyle/>
           <a:p>
-            <a:pPr marL="0" indent="0" algn="l">
+            <a:pPr marL="0" indent="0" algn="ctr">
               <a:lnSpc>
                 <a:spcPct val="104000"/>
               </a:lnSpc>
@@ -32252,7 +32221,7 @@
             </a:r>
           </a:p>
           <a:p>
-            <a:pPr marL="0" indent="0" algn="l">
+            <a:pPr marL="0" indent="0" algn="ctr">
               <a:lnSpc>
                 <a:spcPct val="104000"/>
               </a:lnSpc>
@@ -32629,12 +32598,12 @@
           </a:ln>
         </p:spPr>
         <p:txBody>
-          <a:bodyPr wrap="square" lIns="137160" tIns="91440" rIns="137160" bIns="91440" rtlCol="0" anchor="t">
+          <a:bodyPr wrap="square" lIns="137160" tIns="91440" rIns="137160" bIns="91440" rtlCol="0" anchor="ctr">
             <a:normAutofit/>
           </a:bodyPr>
           <a:lstStyle/>
           <a:p>
-            <a:pPr marL="0" indent="0" algn="l">
+            <a:pPr marL="0" indent="0" algn="ctr">
               <a:lnSpc>
                 <a:spcPct val="104000"/>
               </a:lnSpc>
@@ -32655,7 +32624,7 @@
             </a:r>
           </a:p>
           <a:p>
-            <a:pPr marL="0" indent="0" algn="l">
+            <a:pPr marL="0" indent="0" algn="ctr">
               <a:lnSpc>
                 <a:spcPct val="104000"/>
               </a:lnSpc>
@@ -32676,7 +32645,7 @@
             </a:r>
           </a:p>
           <a:p>
-            <a:pPr marL="0" indent="0" algn="l">
+            <a:pPr marL="0" indent="0" algn="ctr">
               <a:lnSpc>
                 <a:spcPct val="104000"/>
               </a:lnSpc>
@@ -32763,12 +32732,12 @@
           </a:ln>
         </p:spPr>
         <p:txBody>
-          <a:bodyPr wrap="square" lIns="137160" tIns="91440" rIns="137160" bIns="91440" rtlCol="0" anchor="t">
+          <a:bodyPr wrap="square" lIns="137160" tIns="91440" rIns="137160" bIns="91440" rtlCol="0" anchor="ctr">
             <a:normAutofit/>
           </a:bodyPr>
           <a:lstStyle/>
           <a:p>
-            <a:pPr marL="0" indent="0" algn="l">
+            <a:pPr marL="0" indent="0" algn="ctr">
               <a:lnSpc>
                 <a:spcPct val="104000"/>
               </a:lnSpc>
@@ -32789,7 +32758,7 @@
             </a:r>
           </a:p>
           <a:p>
-            <a:pPr marL="0" indent="0" algn="l">
+            <a:pPr marL="0" indent="0" algn="ctr">
               <a:lnSpc>
                 <a:spcPct val="104000"/>
               </a:lnSpc>
@@ -32810,7 +32779,7 @@
             </a:r>
           </a:p>
           <a:p>
-            <a:pPr marL="0" indent="0" algn="l">
+            <a:pPr marL="0" indent="0" algn="ctr">
               <a:lnSpc>
                 <a:spcPct val="104000"/>
               </a:lnSpc>
@@ -32897,12 +32866,12 @@
           </a:ln>
         </p:spPr>
         <p:txBody>
-          <a:bodyPr wrap="square" lIns="137160" tIns="91440" rIns="137160" bIns="91440" rtlCol="0" anchor="t">
+          <a:bodyPr wrap="square" lIns="137160" tIns="91440" rIns="137160" bIns="91440" rtlCol="0" anchor="ctr">
             <a:normAutofit/>
           </a:bodyPr>
           <a:lstStyle/>
           <a:p>
-            <a:pPr marL="0" indent="0" algn="l">
+            <a:pPr marL="0" indent="0" algn="ctr">
               <a:lnSpc>
                 <a:spcPct val="104000"/>
               </a:lnSpc>
@@ -32923,7 +32892,7 @@
             </a:r>
           </a:p>
           <a:p>
-            <a:pPr marL="0" indent="0" algn="l">
+            <a:pPr marL="0" indent="0" algn="ctr">
               <a:lnSpc>
                 <a:spcPct val="104000"/>
               </a:lnSpc>
@@ -32944,7 +32913,7 @@
             </a:r>
           </a:p>
           <a:p>
-            <a:pPr marL="0" indent="0" algn="l">
+            <a:pPr marL="0" indent="0" algn="ctr">
               <a:lnSpc>
                 <a:spcPct val="104000"/>
               </a:lnSpc>
@@ -33321,12 +33290,12 @@
           </a:ln>
         </p:spPr>
         <p:txBody>
-          <a:bodyPr wrap="square" lIns="137160" tIns="91440" rIns="137160" bIns="91440" rtlCol="0" anchor="t">
+          <a:bodyPr wrap="square" lIns="137160" tIns="91440" rIns="137160" bIns="91440" rtlCol="0" anchor="ctr">
             <a:normAutofit/>
           </a:bodyPr>
           <a:lstStyle/>
           <a:p>
-            <a:pPr marL="0" indent="0" algn="l">
+            <a:pPr marL="0" indent="0" algn="ctr">
               <a:lnSpc>
                 <a:spcPct val="104000"/>
               </a:lnSpc>
@@ -33347,7 +33316,7 @@
             </a:r>
           </a:p>
           <a:p>
-            <a:pPr marL="0" indent="0" algn="l">
+            <a:pPr marL="0" indent="0" algn="ctr">
               <a:lnSpc>
                 <a:spcPct val="104000"/>
               </a:lnSpc>
@@ -33368,7 +33337,7 @@
             </a:r>
           </a:p>
           <a:p>
-            <a:pPr marL="0" indent="0" algn="l">
+            <a:pPr marL="0" indent="0" algn="ctr">
               <a:lnSpc>
                 <a:spcPct val="104000"/>
               </a:lnSpc>
@@ -33389,7 +33358,7 @@
             </a:r>
           </a:p>
           <a:p>
-            <a:pPr marL="0" indent="0" algn="l">
+            <a:pPr marL="0" indent="0" algn="ctr">
               <a:lnSpc>
                 <a:spcPct val="104000"/>
               </a:lnSpc>
@@ -33476,12 +33445,12 @@
           </a:ln>
         </p:spPr>
         <p:txBody>
-          <a:bodyPr wrap="square" lIns="137160" tIns="91440" rIns="137160" bIns="91440" rtlCol="0" anchor="t">
+          <a:bodyPr wrap="square" lIns="137160" tIns="91440" rIns="137160" bIns="91440" rtlCol="0" anchor="ctr">
             <a:normAutofit/>
           </a:bodyPr>
           <a:lstStyle/>
           <a:p>
-            <a:pPr marL="0" indent="0" algn="l">
+            <a:pPr marL="0" indent="0" algn="ctr">
               <a:lnSpc>
                 <a:spcPct val="104000"/>
               </a:lnSpc>
@@ -33502,7 +33471,7 @@
             </a:r>
           </a:p>
           <a:p>
-            <a:pPr marL="0" indent="0" algn="l">
+            <a:pPr marL="0" indent="0" algn="ctr">
               <a:lnSpc>
                 <a:spcPct val="104000"/>
               </a:lnSpc>
@@ -33523,7 +33492,7 @@
             </a:r>
           </a:p>
           <a:p>
-            <a:pPr marL="0" indent="0" algn="l">
+            <a:pPr marL="0" indent="0" algn="ctr">
               <a:lnSpc>
                 <a:spcPct val="104000"/>
               </a:lnSpc>
@@ -33610,12 +33579,12 @@
           </a:ln>
         </p:spPr>
         <p:txBody>
-          <a:bodyPr wrap="square" lIns="137160" tIns="91440" rIns="137160" bIns="91440" rtlCol="0" anchor="t">
+          <a:bodyPr wrap="square" lIns="137160" tIns="91440" rIns="137160" bIns="91440" rtlCol="0" anchor="ctr">
             <a:normAutofit/>
           </a:bodyPr>
           <a:lstStyle/>
           <a:p>
-            <a:pPr marL="0" indent="0" algn="l">
+            <a:pPr marL="0" indent="0" algn="ctr">
               <a:lnSpc>
                 <a:spcPct val="104000"/>
               </a:lnSpc>
@@ -33636,7 +33605,7 @@
             </a:r>
           </a:p>
           <a:p>
-            <a:pPr marL="0" indent="0" algn="l">
+            <a:pPr marL="0" indent="0" algn="ctr">
               <a:lnSpc>
                 <a:spcPct val="104000"/>
               </a:lnSpc>
@@ -33657,7 +33626,7 @@
             </a:r>
           </a:p>
           <a:p>
-            <a:pPr marL="0" indent="0" algn="l">
+            <a:pPr marL="0" indent="0" algn="ctr">
               <a:lnSpc>
                 <a:spcPct val="104000"/>
               </a:lnSpc>
@@ -33744,12 +33713,12 @@
           </a:ln>
         </p:spPr>
         <p:txBody>
-          <a:bodyPr wrap="square" lIns="137160" tIns="91440" rIns="137160" bIns="91440" rtlCol="0" anchor="t">
+          <a:bodyPr wrap="square" lIns="137160" tIns="91440" rIns="137160" bIns="91440" rtlCol="0" anchor="ctr">
             <a:normAutofit/>
           </a:bodyPr>
           <a:lstStyle/>
           <a:p>
-            <a:pPr marL="0" indent="0" algn="l">
+            <a:pPr marL="0" indent="0" algn="ctr">
               <a:lnSpc>
                 <a:spcPct val="104000"/>
               </a:lnSpc>
@@ -33770,7 +33739,7 @@
             </a:r>
           </a:p>
           <a:p>
-            <a:pPr marL="0" indent="0" algn="l">
+            <a:pPr marL="0" indent="0" algn="ctr">
               <a:lnSpc>
                 <a:spcPct val="104000"/>
               </a:lnSpc>
@@ -33791,7 +33760,7 @@
             </a:r>
           </a:p>
           <a:p>
-            <a:pPr marL="0" indent="0" algn="l">
+            <a:pPr marL="0" indent="0" algn="ctr">
               <a:lnSpc>
                 <a:spcPct val="104000"/>
               </a:lnSpc>

--- a/vi/files/slides/Session_7_VN.pptx
+++ b/vi/files/slides/Session_7_VN.pptx
@@ -3934,7 +3934,7 @@
           <a:p>
             <a:r>
               <a:rPr lang="en-US" sz="1400" b="0" dirty="0"/>
-              <a:t>Hạn nộp bản nháp Phương pháp và Kết quả: trước Buổi 8 (thư mục khóa học hoặc email). Thực hành thứ Bảy tuần sau sẽ thêm Đặt vấn đề, Bàn luận, Tóm tắt và Tiêu đề.</a:t>
+              <a:t>Hạn nộp bản nháp Phương pháp và Kết quả: trước Buổi 8 (qua email). Thực hành thứ Bảy tuần sau sẽ thêm Đặt vấn đề, Bàn luận, Tóm tắt và Tiêu đề.</a:t>
             </a:r>
           </a:p>
         </p:txBody>
@@ -26295,7 +26295,7 @@
                 <a:latin typeface="Arial"/>
                 <a:cs typeface="Arial"/>
               </a:rPr>
-              <a:t>Phương pháp và Kết quả của bạn (khoảng 600 từ), gửi vào thư mục khóa học trước Buổi 8</a:t>
+              <a:t>Phương pháp và Kết quả của bạn (khoảng 600 từ), gửi qua email trước Buổi 8</a:t>
             </a:r>
           </a:p>
         </p:txBody>
@@ -26904,7 +26904,7 @@
                 <a:latin typeface="Arial"/>
                 <a:cs typeface="Arial"/>
               </a:rPr>
-              <a:t>Bảng thuật ngữ đầy đủ (Anh-Việt): Course/References/glossary_EN_VN (PDF trong thư mục khóa học)</a:t>
+              <a:t>Bảng thuật ngữ đầy đủ (Anh-Việt): tệp PDF gửi qua email</a:t>
             </a:r>
           </a:p>
         </p:txBody>

--- a/vi/files/slides/Session_7_VN.pptx
+++ b/vi/files/slides/Session_7_VN.pptx
@@ -56,6 +56,7 @@
     <p:sldId id="298" r:id="rId142"/>
     <p:sldId id="299" r:id="rId143"/>
     <p:sldId id="300" r:id="rId144"/>
+    <p:sldId id="301" r:id="rId145"/>
   </p:sldIdLst>
   <p:sldSz cx="12192000" cy="6858000"/>
   <p:notesSz cx="6858000" cy="9144000"/>
@@ -733,25 +734,19 @@
           <a:p>
             <a:r>
               <a:rPr lang="en-US" sz="1400" b="0" dirty="0"/>
-              <a:t>Buổi 7 (19:30). Trực tuyến, 19:30-22:30, giải lao 15 phút lúc 20:45. Hai nửa: trước giải lao là bảo vệ người bệnh và khoa học (đạo đức, liêm chính) và làm mẫu Phần 4 của đề cương. Sau giải lao bắt đầu viết bản thảo FLUID-ICU.</a:t>
+              <a:t>Buổi 7 (19:30-22:30, giải lao 20:45-21:00). Trước giải lao: đạo đức, liêm chính và Phần 4 đề cương. Sau giải lao: phần Kết quả.</a:t>
             </a:r>
           </a:p>
           <a:p>
             <a:r>
               <a:rPr lang="en-US" sz="1400" b="0" dirty="0"/>
-              <a:t>Hình thức: cả lớp làm chung. Học viên trả lời bằng bình chọn (poll), hoặc giảng viên mời hai ba người trả lời, bật micro. Giảng viên (hoặc một học viên tình nguyện) gõ câu trả lời của lớp lên màn hình chia sẻ. Không dùng phòng nhóm nhỏ.</a:t>
+              <a:t>Trước buổi học, gửi email phiếu bài tập, năm gói kết quả, mẫu bản thảo và danh sách cặp bình duyệt.</a:t>
             </a:r>
           </a:p>
           <a:p>
             <a:r>
               <a:rPr lang="en-US" sz="1400" b="0" dirty="0"/>
-              <a:t>Trước buổi học: gửi các tệp PDF (phiếu bài tập Buổi 7, năm gói kết quả phân tích Q1-Q5, Bài 1 và Bài 2, mẫu bản thảo). Cài sẵn các câu bình chọn. Mở một tài liệu chung để ghi câu trả lời của lớp.</a:t>
-            </a:r>
-          </a:p>
-          <a:p>
-            <a:r>
-              <a:rPr lang="en-US" sz="1400" b="0" dirty="0"/>
-              <a:t>Nhịp: chậm. Nếu thiếu thời gian, bỏ các slide trong mục 'Slide bổ sung: Buổi 7' ở cuối, không bao giờ bỏ phần thực hành.</a:t>
+              <a:t>Nếu thiếu giờ, bỏ slide bổ sung, không bỏ phần thực hành.</a:t>
             </a:r>
           </a:p>
         </p:txBody>
@@ -832,37 +827,25 @@
           <a:p>
             <a:r>
               <a:rPr lang="en-US" sz="1400" b="0" dirty="0"/>
-              <a:t>Đây là vấn đề thực tế của ICU: phần lớn người bệnh đang an thần, mê sảng hoặc sốc khi đủ tiêu chuẩn. Sơ đồ này giữ dạng hình vì các nhánh rẽ chính là thông điệp.</a:t>
+              <a:t>Phần lớn người bệnh ICU không tự quyết định được khi đủ tiêu chuẩn.</a:t>
             </a:r>
           </a:p>
           <a:p>
             <a:r>
               <a:rPr lang="en-US" sz="1400" b="0" dirty="0"/>
-              <a:t>Đọc sơ đồ từ trái sang phải. 1) Người bệnh có tự quyết định được không? Nếu có, người bệnh ký đồng ý. 2) Nếu không, người đại diện hợp pháp (thường là gia đình, theo quy định pháp luật) đồng ý, và hỏi lại người bệnh khi họ có khả năng. 3) Nếu không liên lạc kịp người đại diện và điều trị không thể chờ, nghiên cứu chỉ được tiến hành khi đề cương đã giải thích lý do và hội đồng đạo đức đã duyệt trước quy trình khẩn cấp này. Sau đó xin sự đồng ý để tiếp tục sớm nhất có thể. Đó là 'đồng ý trì hoãn'. Tuyên bố Helsinki 2024 cho phép đúng điều này, với các điều kiện trên.</a:t>
+              <a:t>Người bệnh, rồi người đại diện hợp pháp, rồi đồng ý trì hoãn chỉ khi hội đồng đã duyệt trước. Bài 1 dùng cách này. Bài 2 được miễn đồng ý vì dùng dữ liệu sổ bộ.</a:t>
             </a:r>
           </a:p>
           <a:p>
             <a:r>
               <a:rPr lang="en-US" sz="1400" b="0" dirty="0"/>
-              <a:t>Bài 1 áp dụng cách này: đồng ý bằng văn bản của người bệnh hoặc người đại diện hợp pháp 'trước khi phân nhóm ngẫu nhiên hoặc sớm nhất có thể sau đó' (trang 3).</a:t>
+              <a:t>Luật địa phương quy định ai được làm người đại diện.</a:t>
             </a:r>
           </a:p>
           <a:p>
             <a:r>
               <a:rPr lang="en-US" sz="1400" b="0" dirty="0"/>
-              <a:t>Bài 2 khác: một sổ bộ dùng dữ liệu thường quy. Hội đồng miễn sự đồng ý cá nhân và dữ liệu được loại bỏ thông tin định danh trước khi phân tích (trang 8).</a:t>
-            </a:r>
-          </a:p>
-          <a:p>
-            <a:r>
-              <a:rPr lang="en-US" sz="1400" b="0" dirty="0"/>
-              <a:t>Luật địa phương quy định ai được làm người đại diện và có cho phép đồng ý trì hoãn hay không. Hãy hỏi hội đồng trước khi viết đề cương.</a:t>
-            </a:r>
-          </a:p>
-          <a:p>
-            <a:r>
-              <a:rPr lang="en-US" sz="1400" b="0" dirty="0"/>
-              <a:t>Hỏi: nếu gia đình từ chối sau khi người bệnh đã được đưa vào theo đồng ý trì hoãn thì sao? Đáp án: người bệnh rời nghiên cứu. Dữ liệu đã thu có được dùng hay không tùy đề cương đã duyệt và sự đồng ý của gia đình.</a:t>
+              <a:t>Hỏi: gia đình từ chối sau khi đã đưa vào? Kỳ vọng: người bệnh rời nghiên cứu.</a:t>
             </a:r>
           </a:p>
         </p:txBody>
@@ -943,31 +926,19 @@
           <a:p>
             <a:r>
               <a:rPr lang="en-US" sz="1400" b="0" dirty="0"/>
-              <a:t>Ví dụ mẫu, cả lớp cùng làm. Với từng người bệnh, mời một người trả lời trước khi mở dòng cuối (bấm chậm).</a:t>
+              <a:t>Mời một người trả lời cho từng người bệnh trước khi mở đáp án.</a:t>
             </a:r>
           </a:p>
           <a:p>
             <a:r>
               <a:rPr lang="en-US" sz="1400" b="0" dirty="0"/>
-              <a:t>Ông A: có năng lực quyết định, nên người bệnh tự quyết định.</a:t>
+              <a:t>Ông A: tự đồng ý. Bà B: người đại diện đồng ý, hỏi lại bà khi bà tự quyết được. Ông C: đồng ý trì hoãn, chỉ khi đã được duyệt.</a:t>
             </a:r>
           </a:p>
           <a:p>
             <a:r>
               <a:rPr lang="en-US" sz="1400" b="0" dirty="0"/>
-              <a:t>Bà B: hiện không có năng lực. Người đại diện hợp pháp (ở đây là con gái, nếu luật địa phương cho phép) đồng ý. Bà B được hỏi lại khi có năng lực, và bà có thể rút lui.</a:t>
-            </a:r>
-          </a:p>
-          <a:p>
-            <a:r>
-              <a:rPr lang="en-US" sz="1400" b="0" dirty="0"/>
-              <a:t>Ông C: không liên lạc kịp người đại diện và điều trị không thể chờ. Đồng ý trì hoãn chỉ áp dụng khi đề cương mô tả và hội đồng đã phê duyệt. Xin sự đồng ý của gia đình hoặc người bệnh sớm nhất có thể. Bài 1 dùng cách này.</a:t>
-            </a:r>
-          </a:p>
-          <a:p>
-            <a:r>
-              <a:rPr lang="en-US" sz="1400" b="0" dirty="0"/>
-              <a:t>Quan niệm sai: 'bác sĩ điều trị có thể đồng ý thay người bệnh'. Không. Bác sĩ điều trị không phải người đại diện.</a:t>
+              <a:t>Hiểu lầm: bác sĩ điều trị có thể đồng ý thay người bệnh. Không.</a:t>
             </a:r>
           </a:p>
         </p:txBody>
@@ -1048,43 +1019,25 @@
           <a:p>
             <a:r>
               <a:rPr lang="en-US" sz="1400" b="0" dirty="0"/>
-              <a:t>Ý chính: bảo mật được bảo đảm bằng thiết kế, không phải bằng thiện chí.</a:t>
+              <a:t>Bảo mật ngay từ thiết kế: mã nghiên cứu, tuổi thay ngày sinh, tháng thay ngày cụ thể.</a:t>
             </a:r>
           </a:p>
           <a:p>
             <a:r>
               <a:rPr lang="en-US" sz="1400" b="0" dirty="0"/>
-              <a:t>Trước: các thông tin định danh trực tiếp như họ tên, mã bệnh án, ngày sinh chính xác, địa chỉ, số điện thoại, ảnh. Sau: mã nghiên cứu, tuổi thay cho ngày sinh, tháng thay cho ngày chính xác, và chỉ các biến có trong từ điển dữ liệu. Dòng ví dụ (hư cấu) là một người bệnh trước và sau.</a:t>
+              <a:t>Tệp khóa mã được giữ riêng, có khóa, chỉ một hoặc hai người có tên được mở.</a:t>
             </a:r>
           </a:p>
           <a:p>
             <a:r>
               <a:rPr lang="en-US" sz="1400" b="0" dirty="0"/>
-              <a:t>Tệp khóa nối mã với danh tính được lưu riêng, có mật khẩu, chỉ một hai người có tên được truy cập.</a:t>
+              <a:t>Không để dữ liệu người bệnh trên điện thoại cá nhân, ứng dụng nhắn tin hay công cụ AI công cộng.</a:t>
             </a:r>
           </a:p>
           <a:p>
             <a:r>
               <a:rPr lang="en-US" sz="1400" b="0" dirty="0"/>
-              <a:t>Cẩn thận nhận diện gián tiếp: 'người bệnh 19 tuổi duy nhất chạy ECMO trong tháng 3' vẫn nhận ra được dù không có tên. Báo cáo các nhóm rất nhỏ một cách thận trọng.</a:t>
-            </a:r>
-          </a:p>
-          <a:p>
-            <a:r>
-              <a:rPr lang="en-US" sz="1400" b="0" dirty="0"/>
-              <a:t>Quy tắc thực hành: không lưu dữ liệu người bệnh trên điện thoại cá nhân, ứng dụng nhắn tin, email cá nhân, đám mây công cộng hay công cụ AI. Chỉ dùng nơi lưu trữ được mã hóa và được cơ sở cho phép.</a:t>
-            </a:r>
-          </a:p>
-          <a:p>
-            <a:r>
-              <a:rPr lang="en-US" sz="1400" b="0" dirty="0"/>
-              <a:t>Ví dụ xuyên suốt: Bài 2 ghi rõ thông tin người bệnh đã được ẩn danh và loại bỏ định danh trước khi phân tích.</a:t>
-            </a:r>
-          </a:p>
-          <a:p>
-            <a:r>
-              <a:rPr lang="en-US" sz="1400" b="0" dirty="0"/>
-              <a:t>Hỏi (mời hai ba người trả lời, bật micro): tệp khóa trong nghiên cứu của bạn sẽ nằm ở đâu? Đáp án: nơi lưu trữ được cơ sở phê duyệt, có mật khẩu, không phải USB trong túi áo.</a:t>
+              <a:t>Hỏi: tệp khóa mã của bạn sẽ được giữ ở đâu?</a:t>
             </a:r>
           </a:p>
         </p:txBody>
@@ -1165,19 +1118,19 @@
           <a:p>
             <a:r>
               <a:rPr lang="en-US" sz="1400" b="0" dirty="0"/>
-              <a:t>Ví dụ mẫu nối 7.1 với bản thảo. Nói rõ FLUID-ICU là bộ dữ liệu giảng dạy mô phỏng, không có phê duyệt thật, nên trong bản thảo học viên viết: 'Phân tích này dùng bộ dữ liệu giảng dạy mô phỏng. Không cần phê duyệt đạo đức hay sự đồng ý.' Với một nghiên cứu thuần tập thật, đoạn văn sẽ như bốn thẻ trên.</a:t>
+              <a:t>Nếu FLUID-ICU là thật, đoạn đạo đức sẽ trả lời bốn câu hỏi này bằng bốn câu.</a:t>
             </a:r>
           </a:p>
           <a:p>
             <a:r>
               <a:rPr lang="en-US" sz="1400" b="0" dirty="0"/>
-              <a:t>Câu mẫu (nghiên cứu thật): 'Nghiên cứu được hội đồng đạo đức của bốn bệnh viện tham gia phê duyệt (số, ngày). Hội đồng miễn sự đồng ý cá nhân vì dữ liệu được thu thập trong chăm sóc thường quy và phân tích sau khi loại bỏ thông tin định danh.'</a:t>
+              <a:t>Đây là dữ liệu mô phỏng: học viên ghi câu về dữ liệu mô phỏng ngay dưới tên bài, như hướng dẫn bài tập. Chỉ cần đoạn đạo đức nếu viết phần Phương pháp (không bắt buộc).</a:t>
             </a:r>
           </a:p>
           <a:p>
             <a:r>
               <a:rPr lang="en-US" sz="1400" b="0" dirty="0"/>
-              <a:t>Hỏi: đoạn này nằm ở đâu? Đáp án: trong Phương pháp. Đa số tạp chí còn yêu cầu ở phần 'Cam kết'.</a:t>
+              <a:t>Hỏi: trong bài báo thật, đoạn này nằm ở đâu? Kỳ vọng: phần Phương pháp.</a:t>
             </a:r>
           </a:p>
         </p:txBody>
@@ -1258,25 +1211,19 @@
           <a:p>
             <a:r>
               <a:rPr lang="en-US" sz="1400" b="0" dirty="0"/>
-              <a:t>Đi qua năm thẻ. Thời gian: riêng phê duyệt đạo đức có thể mất 1-3 tháng. Tuyển chọn luôn lâu hơn dự kiến. Kinh phí: ghi các khoản dù số tiền nhỏ. Nhân lực: ai thu thập số liệu ca đêm và cuối tuần, ai phân tích, có thời gian dành riêng không? Tuyển chọn: Bài 1 sàng lọc 1201 người bệnh ở ba ICU trong 17 tháng để phân nhóm được 50 (khoảng 4%). Phần lớn người bệnh 'trông có vẻ đủ tiêu chuẩn' lại không đủ hoặc không được đưa vào. Dữ liệu: biến đó đã được ghi thường quy chưa? Bài 2 không thể nghiên cứu thuốc lợi tiểu vì sổ bộ không ghi nhận.</a:t>
+              <a:t>Đi qua năm thẻ. Thủ tục đạo đức mất 1-3 tháng. Tuyển chọn luôn lâu hơn dự kiến: Bài 1 sàng lọc 1201 người bệnh để phân nhóm ngẫu nhiên 50.</a:t>
             </a:r>
           </a:p>
           <a:p>
             <a:r>
               <a:rPr lang="en-US" sz="1400" b="0" dirty="0"/>
-              <a:t>Quy tắc kinh nghiệm: đếm số người bệnh thỏa tiêu chuẩn mà khoa đã gặp năm ngoái, rồi giả định bạn chỉ đưa vào được một phần nhỏ.</a:t>
+              <a:t>Quy tắc nhanh: đếm số người bệnh đủ tiêu chuẩn năm ngoái và dự kiến chỉ đưa vào được một phần.</a:t>
             </a:r>
           </a:p>
           <a:p>
             <a:r>
               <a:rPr lang="en-US" sz="1400" b="0" dirty="0"/>
-              <a:t>Bình chọn: thẻ nào là rủi ro lớn nhất cho nghiên cứu của bạn? Thường là tuyển chọn và nhân lực (thu thập số liệu ca đêm).</a:t>
-            </a:r>
-          </a:p>
-          <a:p>
-            <a:r>
-              <a:rPr lang="en-US" sz="1400" b="0" dirty="0"/>
-              <a:t>Đây là slide khả thi duy nhất của Cấp độ 1. Không đi sâu hơn.</a:t>
+              <a:t>Thăm dò: thẻ nào là rủi ro lớn nhất cho nghiên cứu của bạn?</a:t>
             </a:r>
           </a:p>
         </p:txBody>
@@ -1357,19 +1304,19 @@
           <a:p>
             <a:r>
               <a:rPr lang="en-US" sz="1400" b="0" dirty="0"/>
-              <a:t>Phần 7.2 (20:10-20:30). Sáu slide (khoảng 2.5 phút mỗi slide), rồi 5 phút bình chọn tình huống lúc 20:25.</a:t>
+              <a:t>Phần 7.2 (20:10-20:30). Sáu slide, rồi 5 phút thăm dò tình huống.</a:t>
             </a:r>
           </a:p>
           <a:p>
             <a:r>
               <a:rPr lang="en-US" sz="1400" b="0" dirty="0"/>
-              <a:t>Giọng điệu: không phải để 'bắt lỗi'. Phần lớn vấn đề liêm chính bắt đầu từ những lối tắt nhỏ khi bị áp lực: một giá trị thiếu 'được điền vào', một giá trị ngoại lai 'được làm sạch', thêm sếp vào danh sách tác giả. Mục tiêu là nhận ra sớm những bước trượt nhỏ này.</a:t>
+              <a:t>Giọng điệu: phần lớn vấn đề liêm chính bắt đầu từ những lối tắt nhỏ khi bị áp lực.</a:t>
             </a:r>
           </a:p>
           <a:p>
             <a:r>
               <a:rPr lang="en-US" sz="1400" b="0" dirty="0"/>
-              <a:t>Liên hệ bản thảo: bản thảo của mỗi học viên cần tuyên bố về tác giả, xung đột lợi ích, khả năng cung cấp dữ liệu và việc dùng AI.</a:t>
+              <a:t>Mọi bản nháp phần Kết quả cần có câu công khai sử dụng AI.</a:t>
             </a:r>
           </a:p>
         </p:txBody>
@@ -1450,43 +1397,19 @@
           <a:p>
             <a:r>
               <a:rPr lang="en-US" sz="1400" b="0" dirty="0"/>
-              <a:t>Ý chính: ba hình thức hành vi sai trái kinh điển trong nghiên cứu (FFP: fabrication, falsification, plagiarism).</a:t>
+              <a:t>Bịa đặt, làm sai lệch, đạo văn. Sai sót trung thực không phải là vi phạm: hãy sửa công khai.</a:t>
             </a:r>
           </a:p>
           <a:p>
             <a:r>
               <a:rPr lang="en-US" sz="1400" b="0" dirty="0"/>
-              <a:t>Bịa đặt: tạo ra dữ liệu hoặc người bệnh (VD: điền cân bằng dịch ngày 3 'theo trí nhớ' vì mất phiếu theo dõi).</a:t>
+              <a:t>Kế hoạch chất lượng dữ liệu ở Buổi 5 giúp tránh vô tình làm sai lệch.</a:t>
             </a:r>
           </a:p>
           <a:p>
             <a:r>
               <a:rPr lang="en-US" sz="1400" b="0" dirty="0"/>
-              <a:t>Làm sai lệch: sửa, chọn lọc hoặc bỏ bớt dữ liệu, hình ảnh hay kết quả cho đẹp (VD: loại hai người bệnh 'lạ' sau khi thấy họ làm yếu kết quả).</a:t>
-            </a:r>
-          </a:p>
-          <a:p>
-            <a:r>
-              <a:rPr lang="en-US" sz="1400" b="0" dirty="0"/>
-              <a:t>Đạo văn: dùng câu chữ, ý tưởng hoặc hình ảnh của người khác mà không ghi nguồn, kể cả chép nguyên đoạn có trích dẫn nhưng không đặt trong ngoặc kép.</a:t>
-            </a:r>
-          </a:p>
-          <a:p>
-            <a:r>
-              <a:rPr lang="en-US" sz="1400" b="0" dirty="0"/>
-              <a:t>Sai sót trung thực không phải hành vi sai trái, nhưng phải được đính chính công khai.</a:t>
-            </a:r>
-          </a:p>
-          <a:p>
-            <a:r>
-              <a:rPr lang="en-US" sz="1400" b="0" dirty="0"/>
-              <a:t>Liên hệ Buổi 5: kế hoạch chất lượng dữ liệu (kiểm tra khoảng giá trị, quy tắc xử lý giá trị ngoại lai định trước) bảo vệ bạn khỏi làm sai lệch vô tình.</a:t>
-            </a:r>
-          </a:p>
-          <a:p>
-            <a:r>
-              <a:rPr lang="en-US" sz="1400" b="0" dirty="0"/>
-              <a:t>Bình chọn: trong ba loại này, loại nào hay gặp nhất trong luận văn? Đáp án: đạo văn, thường là chép phần đặt vấn đề. Phần mềm kiểm tra trùng lặp sẽ phát hiện.</a:t>
+              <a:t>Thăm dò: lỗi nào hay gặp nhất trong luận văn? Kỳ vọng: đạo văn.</a:t>
             </a:r>
           </a:p>
         </p:txBody>
@@ -1567,31 +1490,19 @@
           <a:p>
             <a:r>
               <a:rPr lang="en-US" sz="1400" b="0" dirty="0"/>
-              <a:t>Ý chính: các hành vi này làm sai lệch bằng chứng mà bác sĩ và hội đồng xây dựng hướng dẫn dựa vào.</a:t>
+              <a:t>Công bố trùng lặp đếm cùng người bệnh hai lần. Cắt lát xúc xích che mất bức tranh toàn cảnh. Báo cáo chọn lọc là lý do thử nghiệm phải đăng ký một kết cục chính.</a:t>
             </a:r>
           </a:p>
           <a:p>
             <a:r>
               <a:rPr lang="en-US" sz="1400" b="0" dirty="0"/>
-              <a:t>Xuất bản trùng lặp làm cùng một nhóm người bệnh bị tính hai lần trong phân tích gộp và có thể phóng đại tác dụng. Một bài phân tích thứ cấp hợp lệ vẫn được chấp nhận nếu trích dẫn chéo rõ ràng và có thêm điều mới.</a:t>
+              <a:t>Bài 1 báo cáo thẳng kết cục chính âm tính.</a:t>
             </a:r>
           </a:p>
           <a:p>
             <a:r>
               <a:rPr lang="en-US" sz="1400" b="0" dirty="0"/>
-              <a:t>Xuất bản 'cắt lát': VD tử vong ở một bài, tổn thương thận ở bài khác, thời gian nằm ICU ở bài thứ ba, cùng một nghiên cứu thuần tập, không bài nào nhắc đến bài kia.</a:t>
-            </a:r>
-          </a:p>
-          <a:p>
-            <a:r>
-              <a:rPr lang="en-US" sz="1400" b="0" dirty="0"/>
-              <a:t>Báo cáo chọn lọc và đổi kết cục là lý do thử nghiệm phải đăng ký với một kết cục chính trước người bệnh đầu tiên. Ví dụ xuyên suốt: Bài 1 đăng ký đề cương trên ClinicalTrials.gov ngày 1/7/2021, trước khi tuyển chọn từ tháng 9/2021, và báo cáo thẳng kết cục chính âm tính trong phần tóm tắt. Đó là thực hành tốt.</a:t>
-            </a:r>
-          </a:p>
-          <a:p>
-            <a:r>
-              <a:rPr lang="en-US" sz="1400" b="0" dirty="0"/>
-              <a:t>Hỏi: kết cục chính của Bài 1 là âm tính. Vì sao việc nó được công bố lại quan trọng? Đáp án: sai lệch công bố. Nếu chỉ thử nghiệm dương tính được đăng, các bài đã công bố sẽ phóng đại lợi ích.</a:t>
+              <a:t>Hỏi: vì sao một thử nghiệm âm tính cần được công bố? Kỳ vọng: sai lệch công bố.</a:t>
             </a:r>
           </a:p>
         </p:txBody>
@@ -1672,37 +1583,25 @@
           <a:p>
             <a:r>
               <a:rPr lang="en-US" sz="1400" b="0" dirty="0"/>
-              <a:t>Ý chính: Ủy ban Quốc tế các Biên tập viên Tạp chí Y khoa (ICMJE) yêu cầu đủ cả bốn tiêu chí: 1) đóng góp đáng kể vào ý tưởng hoặc thiết kế, hoặc thu thập, phân tích hay diễn giải dữ liệu. 2) viết bản thảo hoặc chỉnh sửa quan trọng về nội dung, 3) duyệt phiên bản cuối cùng để công bố. 4) đồng ý chịu trách nhiệm về mọi khía cạnh của công trình.</a:t>
+              <a:t>Tác giả phải đáp ứng đủ bốn tiêu chí ICMJE. Những người khác được ghi trong phần Lời cảm ơn.</a:t>
             </a:r>
           </a:p>
           <a:p>
             <a:r>
               <a:rPr lang="en-US" sz="1400" b="0" dirty="0"/>
-              <a:t>Ai có đóng góp nhưng chưa đủ bốn tiêu chí được ghi trong Lời cảm ơn (người thu thập số liệu, đồng nghiệp kiểm tra tuân thủ, trưởng khoa hỗ trợ).</a:t>
+              <a:t>Tác giả danh dự: có tên mà không làm. Tác giả ma: làm mà không có tên.</a:t>
             </a:r>
           </a:p>
           <a:p>
             <a:r>
               <a:rPr lang="en-US" sz="1400" b="0" dirty="0"/>
-              <a:t>Tác giả 'danh dự': tên được thêm vì thâm niên hay quan hệ. Tác giả 'ma': người thực sự làm (thường là người trẻ hoặc người viết thuê) nhưng không có tên. Cả hai đều không được chấp nhận.</a:t>
+              <a:t>Thăm dò: chỉ thu thập dữ liệu có đủ làm tác giả không? Kỳ vọng: không.</a:t>
             </a:r>
           </a:p>
           <a:p>
             <a:r>
               <a:rPr lang="en-US" sz="1400" b="0" dirty="0"/>
-              <a:t>Ví dụ xuyên suốt: Bài 2 được công bố 'thay mặt' một nhóm nghiên cứu, và các thành viên được liệt kê trong Lời cảm ơn. Đó là cách ghi công đúng cho một mạng lưới lớn.</a:t>
-            </a:r>
-          </a:p>
-          <a:p>
-            <a:r>
-              <a:rPr lang="en-US" sz="1400" b="0" dirty="0"/>
-              <a:t>Bình chọn: chỉ thu thập số liệu, có đủ để đứng tên tác giả không? Đáp án: không, nếu thiếu tiêu chí 2, 3 và 4.</a:t>
-            </a:r>
-          </a:p>
-          <a:p>
-            <a:r>
-              <a:rPr lang="en-US" sz="1400" b="0" dirty="0"/>
-              <a:t>Mẹo: thống nhất bằng văn bản danh sách và thứ tự tác giả từ giai đoạn đề cương và xem lại trước khi nộp bài. CRediT (ai làm gì) có trong phần Slide bổ sung.</a:t>
+              <a:t>Thống nhất danh sách tác giả ngay từ giai đoạn đề cương.</a:t>
             </a:r>
           </a:p>
         </p:txBody>
@@ -1783,31 +1682,19 @@
           <a:p>
             <a:r>
               <a:rPr lang="en-US" sz="1400" b="0" dirty="0"/>
-              <a:t>Ý chính: xung đột lợi ích là bất cứ điều gì có thể bị xem là ảnh hưởng đến nhận định của bạn, tài chính hoặc phi tài chính. Có xung đột lợi ích là chuyện thường gặp và không sai. Che giấu mới là sai.</a:t>
+              <a:t>Có lợi ích là chuyện thường. Che giấu mới là vấn đề. Phần lớn tạp chí dùng mẫu khai báo ICMJE.</a:t>
             </a:r>
           </a:p>
           <a:p>
             <a:r>
               <a:rPr lang="en-US" sz="1400" b="0" dirty="0"/>
-              <a:t>Mỗi tác giả điền mẫu khai báo của tạp chí (đa số dùng mẫu khai báo của ICMJE), thường cho 36 tháng gần nhất.</a:t>
+              <a:t>Bài 2 nêu nhà tài trợ không tham gia. Bài 1 nêu một khoản tài trợ nội bộ.</a:t>
             </a:r>
           </a:p>
           <a:p>
             <a:r>
               <a:rPr lang="en-US" sz="1400" b="0" dirty="0"/>
-              <a:t>Tuyên bố nguồn tài trợ: ai tài trợ, mã số tài trợ, và vai trò của nhà tài trợ trong thiết kế, thu thập dữ liệu, phân tích, viết bài và quyết định công bố.</a:t>
-            </a:r>
-          </a:p>
-          <a:p>
-            <a:r>
-              <a:rPr lang="en-US" sz="1400" b="0" dirty="0"/>
-              <a:t>Ví dụ xuyên suốt: Bài 2 ghi rõ nhà tài trợ không có vai trò trong thiết kế, thu thập, phân tích dữ liệu hay soạn bản thảo, một yêu cầu của ICMJE thường bị quên (chú giải #39). Bài 1 ghi kinh phí nội bộ của bệnh viện và không có xung đột lợi ích (trang 12).</a:t>
-            </a:r>
-          </a:p>
-          <a:p>
-            <a:r>
-              <a:rPr lang="en-US" sz="1400" b="0" dirty="0"/>
-              <a:t>Hỏi: năm ngoái một công ty dược tài trợ bạn đi hội nghị. Có khai báo khi viết bài về dịch truyền không? Đáp án: có nếu có thể bị xem là liên quan. Khi phân vân, hãy khai báo.</a:t>
+              <a:t>Hỏi: năm ngoái một công ty trả tiền đi lại cho bạn. Có khai báo không? Kỳ vọng: còn băn khoăn thì khai báo.</a:t>
             </a:r>
           </a:p>
         </p:txBody>
@@ -1888,25 +1775,19 @@
           <a:p>
             <a:r>
               <a:rPr lang="en-US" sz="1400" b="0" dirty="0"/>
-              <a:t>Ôn tập (19:30-19:40, gồm 1 phút chào và slide 'Hôm nay'). Mở đầu bằng cách đọc hai ba câu trả lời cho câu hỏi cuối Buổi 6 (đã đọc trong tuần) và sửa những chỗ hiểu sai.</a:t>
+              <a:t>Ôn tập (19:30-19:40). Mở đầu bằng hai hoặc ba câu trả lời cuối Buổi 6.</a:t>
             </a:r>
           </a:p>
           <a:p>
             <a:r>
               <a:rPr lang="en-US" sz="1400" b="0" dirty="0"/>
-              <a:t>Câu 1-4 là câu hỏi mở. Đọc từng câu, cho 30 giây, rồi mời hai ba người trả lời, bật micro. Mở khung đáp án sau mỗi câu. Dành nhiều thời gian nhất cho câu có nhiều câu trả lời khác nhau.</a:t>
+              <a:t>Câu 1-4: mỗi câu 30 giây, mời hai hoặc ba người, rồi mở đáp án. Câu 1 dẫn vào bài hôm nay: phần Kết quả báo cáo cả ước lượng thô và đã hiệu chỉnh.</a:t>
             </a:r>
           </a:p>
           <a:p>
             <a:r>
               <a:rPr lang="en-US" sz="1400" b="0" dirty="0"/>
-              <a:t>Câu 1 nối thẳng với phần viết hôm nay: trong Kết quả báo cáo cả ước lượng thô và hiệu chỉnh (mục STROBE 16), và trong Bàn luận giải thích vì sao chúng khác nhau.</a:t>
-            </a:r>
-          </a:p>
-          <a:p>
-            <a:r>
-              <a:rPr lang="en-US" sz="1400" b="0" dirty="0"/>
-              <a:t>Câu 5 trả lời trong khung chat. Đây là con số mỗi học viên sẽ viết sau giải lao. Ai chưa chọn câu hỏi thì chọn ngay hôm nay (Q1 đến Q5, gói kết quả đã gửi trước buổi học).</a:t>
+              <a:t>Câu 5 trong khung chat: kết quả chính của câu hỏi mỗi người đã chọn. Ai chưa chọn thì chọn ngay bây giờ.</a:t>
             </a:r>
           </a:p>
         </p:txBody>
@@ -1987,31 +1868,19 @@
           <a:p>
             <a:r>
               <a:rPr lang="en-US" sz="1400" b="0" dirty="0"/>
-              <a:t>Ý chính: tạp chí ngày càng yêu cầu tuyên bố chia sẻ dữ liệu. ICMJE bắt buộc với thử nghiệm lâm sàng, và thử nghiệm phải mô tả kế hoạch chia sẻ dữ liệu khi đăng ký.</a:t>
+              <a:t>Từ 'cung cấp khi có yêu cầu' (cả hai bài) đến kho lưu trữ mở có DOI.</a:t>
             </a:r>
           </a:p>
           <a:p>
             <a:r>
               <a:rPr lang="en-US" sz="1400" b="0" dirty="0"/>
-              <a:t>Các bậc: không chia sẻ. 'Có thể cung cấp theo yêu cầu hợp lý' (cam kết yếu nhất, cả hai bài đều dùng, trang 12 và 8). Kho dữ liệu có kiểm soát (nhà nghiên cứu nộp đơn xin). Kho mở có mã DOI (cho dữ liệu đã loại bỏ định danh hoàn toàn).</a:t>
+              <a:t>Trước khi chia sẻ: phiếu đồng ý và phê duyệt đạo đức phải cho phép, dữ liệu đã khử định danh, kèm từ điển dữ liệu và mã phân tích.</a:t>
             </a:r>
           </a:p>
           <a:p>
             <a:r>
               <a:rPr lang="en-US" sz="1400" b="0" dirty="0"/>
-              <a:t>Trước khi chia sẻ: phiếu đồng ý và phê duyệt đạo đức phải cho phép, dữ liệu đã loại bỏ định danh, và chia sẻ kèm từ điển dữ liệu và mã phân tích để người khác dùng được.</a:t>
-            </a:r>
-          </a:p>
-          <a:p>
-            <a:r>
-              <a:rPr lang="en-US" sz="1400" b="0" dirty="0"/>
-              <a:t>Liên hệ Buổi 5: từ điển dữ liệu sạch là điều làm cho dữ liệu chia sẻ dùng được.</a:t>
-            </a:r>
-          </a:p>
-          <a:p>
-            <a:r>
-              <a:rPr lang="en-US" sz="1400" b="0" dirty="0"/>
-              <a:t>Hỏi (mời hai ba người trả lời, bật micro): hôm nay cần viết gì trong phiếu đồng ý để ngày mai dữ liệu có thể được chia sẻ? Đáp án: một câu xin phép chia sẻ dữ liệu đã loại bỏ định danh cho các nghiên cứu sau này.</a:t>
+              <a:t>Hỏi: phiếu đồng ý hôm nay phải ghi gì để mai bạn được chia sẻ dữ liệu?</a:t>
             </a:r>
           </a:p>
         </p:txBody>
@@ -2092,37 +1961,19 @@
           <a:p>
             <a:r>
               <a:rPr lang="en-US" sz="1400" b="0" dirty="0"/>
-              <a:t>Ý chính: quan điểm hiện nay của ICMJE và COPE (Ủy ban Đạo đức Xuất bản). Công cụ AI không thể là tác giả, vì không thể nhận trách nhiệm về công trình. Tác giả dùng AI phải công khai (hỗ trợ viết thường ghi ở Lời cảm ơn, dùng trong thu thập, phân tích dữ liệu hay tạo hình ghi ở phần Phương pháp) và vẫn chịu hoàn toàn trách nhiệm về từng chữ, con số và tài liệu tham khảo, kể cả phần do công cụ tạo ra.</a:t>
+              <a:t>AI không thể là tác giả. Công khai việc dùng AI và kiểm tra mọi nhận định và tài liệu tham khảo.</a:t>
             </a:r>
           </a:p>
           <a:p>
             <a:r>
               <a:rPr lang="en-US" sz="1400" b="0" dirty="0"/>
-              <a:t>Không bao giờ dán dữ liệu nhận diện được người bệnh, hoặc bản thảo bạn đang phản biện, vào công cụ AI công cộng: vi phạm bảo mật, và người phản biện có nghĩa vụ giữ bí mật bản thảo.</a:t>
+              <a:t>Không bao giờ dán dữ liệu người bệnh hay bản thảo bạn đang bình duyệt vào công cụ AI công cộng.</a:t>
             </a:r>
           </a:p>
           <a:p>
             <a:r>
               <a:rPr lang="en-US" sz="1400" b="0" dirty="0"/>
-              <a:t>Công cụ AI có thể bịa ra tài liệu tham khảo trông như thật. Kiểm tra từng trích dẫn trên PubMed.</a:t>
-            </a:r>
-          </a:p>
-          <a:p>
-            <a:r>
-              <a:rPr lang="en-US" sz="1400" b="0" dirty="0"/>
-              <a:t>Hình ảnh: hình do AI tạo hoặc chỉnh sửa không được dùng làm dữ liệu.</a:t>
-            </a:r>
-          </a:p>
-          <a:p>
-            <a:r>
-              <a:rPr lang="en-US" sz="1400" b="0" dirty="0"/>
-              <a:t>Luôn đọc chính sách AI trong Hướng dẫn tác giả của tạp chí dự kiến, vì chính sách thay đổi liên tục.</a:t>
-            </a:r>
-          </a:p>
-          <a:p>
-            <a:r>
-              <a:rPr lang="en-US" sz="1400" b="0" dirty="0"/>
-              <a:t>Hỏi: một đồng nghiệp nhờ chatbot 'viết phần bàn luận' rồi nộp mà không đọc. Đã vi phạm những điều cấm nào? Đáp án: tài liệu tham khảo có thể bị bịa, văn bản không ai chịu trách nhiệm, và không công khai.</a:t>
+              <a:t>Hỏi: một đồng nghiệp nhờ chatbot viết phần Bàn luận và nộp mà không đọc. Vi phạm những quy tắc nào?</a:t>
             </a:r>
           </a:p>
         </p:txBody>
@@ -2203,25 +2054,19 @@
           <a:p>
             <a:r>
               <a:rPr lang="en-US" sz="1400" b="0" dirty="0"/>
-              <a:t>Câu hỏi nhanh, cả lớp (20:25-20:30). Tình huống và đáp án: Course/Practicals/s7_exercises.md (Phần A) và Course/Solutions/s7_solutions.md.</a:t>
+              <a:t>Câu đố (20:25-20:30). Tình huống và đáp án: s7_exercises_VN Phần A và s7_solutions_VN.</a:t>
             </a:r>
           </a:p>
           <a:p>
             <a:r>
               <a:rPr lang="en-US" sz="1400" b="0" dirty="0"/>
-              <a:t>Dùng ba tình huống: 1 (dữ liệu thiếu 'điền theo trí nhớ': đỏ, bịa đặt), 3 (trưởng khoa đứng tác giả cuối mà không đóng góp: đỏ, tác giả danh dự, đề nghị ghi Lời cảm ơn), 4 (dùng AI sửa tiếng Anh, có kiểm tra và công khai: xanh. Cũng chatbot đó nhưng được đưa bảng dữ liệu người bệnh: đỏ).</a:t>
+              <a:t>Dùng tình huống 1 (đỏ, bịa đặt), 3 (đỏ, tác giả danh dự) và 4 (xanh nếu chỉnh tiếng Anh có kiểm tra và công khai, đỏ với bảng tính người bệnh).</a:t>
             </a:r>
           </a:p>
           <a:p>
             <a:r>
               <a:rPr lang="en-US" sz="1400" b="0" dirty="0"/>
-              <a:t>Mỗi tình huống là một câu bình chọn ba phương án. Chiếu kết quả, rồi mời một người ở màu nhiều nhất và một người ở màu ít nhất nêu lý do.</a:t>
-            </a:r>
-          </a:p>
-          <a:p>
-            <a:r>
-              <a:rPr lang="en-US" sz="1400" b="0" dirty="0"/>
-              <a:t>Nếu lớp chia rẽ, đó là lúc tốt nhất để giảng.</a:t>
+              <a:t>Mời một người ở màu đông nhất và một người ở màu ít nhất nêu lý do.</a:t>
             </a:r>
           </a:p>
         </p:txBody>
@@ -2302,25 +2147,19 @@
           <a:p>
             <a:r>
               <a:rPr lang="en-US" sz="1400" b="0" dirty="0"/>
-              <a:t>Xây dựng đề cương 7 (20:30-20:45). Cả lớp. Chia sẻ phiếu Phần B và điền trực tiếp cho ví dụ xuyên suốt: nghiên cứu thuần tập hồi cứu về cân bằng dịch và tử vong 28 ngày ở người lớn sốc nhiễm khuẩn tại ICU của mình (đáp án mẫu: Course/Solutions/s7_solutions.md, Phần B). Với mỗi câu, mời hai ba người trả lời và gõ câu tốt nhất.</a:t>
+              <a:t>Xây dựng đề cương 7 (20:30-20:45). Điền trực tiếp Phần B cho ví dụ xuyên suốt. Đáp án: s7_solutions_VN Phần B.</a:t>
             </a:r>
           </a:p>
           <a:p>
             <a:r>
               <a:rPr lang="en-US" sz="1400" b="0" dirty="0"/>
-              <a:t>Nêu các vấn đề thường gặp khi làm: (1) 'sẽ xin sự đồng ý' mà không nói ai, khi nào, thế nào (dùng sơ đồ ICU). (2) nghiên cứu hồi cứu hồ sơ cho rằng không cần hội đồng (sai: hội đồng quyết định và có thể miễn sự đồng ý). (3) số người bệnh lấy từ tính cỡ mẫu thay vì từ số nhập viện của khoa. (4) chọn CONSORT cho nghiên cứu quan sát.</a:t>
+              <a:t>Chú ý: 'sẽ lấy đồng ý' mà không nói ai và khi nào, cho rằng hồi cứu hồ sơ được miễn duyệt, lấy số tuyển chọn từ cỡ mẫu, chọn CONSORT cho thuần tập.</a:t>
             </a:r>
           </a:p>
           <a:p>
             <a:r>
               <a:rPr lang="en-US" sz="1400" b="0" dirty="0"/>
-              <a:t>Bài về nhà: mỗi học viên viết Phần 4 cho đề cương của mình trong tuần này. Tạp chí và hướng dẫn báo cáo sẽ được kiểm tra lại ở 8.2 thứ Bảy tuần sau.</a:t>
-            </a:r>
-          </a:p>
-          <a:p>
-            <a:r>
-              <a:rPr lang="en-US" sz="1400" b="0" dirty="0"/>
-              <a:t>Nhắc: mọi người nộp đề cương viết và 6 slide trình bày. Khoảng năm học viên tình nguyện trình bày thứ Bảy tuần sau (mỗi người 6 phút). Đề nghị người tình nguyện báo qua khung chat hoặc email trong tuần.</a:t>
+              <a:t>Về nhà: Phần 4 đề cương của mình. Ai muốn trình bày thì gửi email cho trưởng khóa học trước thứ Tư trước Buổi 8.</a:t>
             </a:r>
           </a:p>
         </p:txBody>
@@ -2401,25 +2240,13 @@
           <a:p>
             <a:r>
               <a:rPr lang="en-US" sz="1400" b="0" dirty="0"/>
-              <a:t>Slide chỉ có hình, có chủ ý. Trước giờ giải lao, nói: lớp quay lại lúc 21:00 với phần 7.3, viết bài báo (35 phút), rồi thực hành bản thảo 1 (45 phút). Trong giờ giải lao, mở gói kết quả phân tích của câu hỏi bạn đã chọn (Q1 đến Q5) và mẫu bản thảo (Course/Templates/Manuscript_Template_IMRaD). Ai chưa chọn câu hỏi thì chọn ngay bây giờ.</a:t>
+              <a:t>Giải lao (20:45-21:00). Nói: 21:00 bắt đầu lại với phần Kết quả. Mở gói kết quả của bạn và mẫu bản thảo.</a:t>
             </a:r>
           </a:p>
           <a:p>
             <a:r>
               <a:rPr lang="en-US" sz="1400" b="0" dirty="0"/>
-              <a:t>Giải lao (20:45-21:00).</a:t>
-            </a:r>
-          </a:p>
-          <a:p>
-            <a:r>
-              <a:rPr lang="en-US" sz="1400" b="0" dirty="0"/>
-              <a:t>Giữ phòng học mở. Có mặt trong khung chat cho những ai chưa nói được kết quả chính trong phần ôn tập.</a:t>
-            </a:r>
-          </a:p>
-          <a:p>
-            <a:r>
-              <a:rPr lang="en-US" sz="1400" b="0" dirty="0"/>
-              <a:t>Chuẩn bị màn hình cho phần thực hành: mẫu bản thảo và gói kết quả Q1 đặt cạnh nhau.</a:t>
+              <a:t>Chuẩn bị màn hình: mẫu bản thảo và gói kết quả Q1 cạnh nhau.</a:t>
             </a:r>
           </a:p>
         </p:txBody>
@@ -2500,19 +2327,13 @@
           <a:p>
             <a:r>
               <a:rPr lang="en-US" sz="1400" b="0" dirty="0"/>
-              <a:t>Phần 7.3 (21:00-21:35). Chín slide (khoảng 3.5 phút mỗi slide) và 3 phút kiểm tra lúc 21:32.</a:t>
+              <a:t>Phần 7.3 (21:00-21:35). Chín slide và 3 phút kiểm tra.</a:t>
             </a:r>
           </a:p>
           <a:p>
             <a:r>
               <a:rPr lang="en-US" sz="1400" b="0" dirty="0"/>
-              <a:t>Mọi ví dụ lấy từ bộ dữ liệu của khóa học (Q1, câu hỏi chính) hoặc từ hai bài báo.</a:t>
-            </a:r>
-          </a:p>
-          <a:p>
-            <a:r>
-              <a:rPr lang="en-US" sz="1400" b="0" dirty="0"/>
-              <a:t>Hai ví dụ mẫu là trọng tâm. Đọc chậm cùng cả lớp.</a:t>
+              <a:t>Các slide về Kết quả và ví dụ mẫu là trọng tâm. Các slide về Phương pháp ngắn hơn: Phương pháp không bắt buộc trong bản thảo.</a:t>
             </a:r>
           </a:p>
         </p:txBody>
@@ -2593,25 +2414,19 @@
           <a:p>
             <a:r>
               <a:rPr lang="en-US" sz="1400" b="0" dirty="0"/>
-              <a:t>Ý chính: người đọc đi từ tiêu đề đến tóm tắt, đặt vấn đề, phương pháp, kết quả và bàn luận. Người viết thì không nên. Hãy bắt đầu từ bằng chứng: soạn bảng và hình, rồi Phương pháp (có thể soạn từ đề cương ngay cả trước khi có dữ liệu), rồi Kết quả (mô tả các bảng), rồi Đặt vấn đề (dẫn tới đúng câu hỏi bạn đã trả lời), rồi Bàn luận, và chỉ sau đó mới viết tóm tắt và tiêu đề.</a:t>
+              <a:t>Người viết bắt đầu từ bằng chứng: bảng trước, tên bài sau cùng.</a:t>
             </a:r>
           </a:p>
           <a:p>
             <a:r>
               <a:rPr lang="en-US" sz="1400" b="0" dirty="0"/>
-              <a:t>Vì sao hiệu quả: mỗi phần được viết từ thứ đã có sẵn, còn tóm tắt và tiêu đề tóm lược một bài đã xong, nên không thể hứa hẹn nhiều hơn những gì bài báo có.</a:t>
+              <a:t>Với FLUID-ICU, các bảng đã có trong gói kết quả, nên phần Kết quả của bạn bắt đầu từ đó.</a:t>
             </a:r>
           </a:p>
           <a:p>
             <a:r>
               <a:rPr lang="en-US" sz="1400" b="0" dirty="0"/>
-              <a:t>Quan niệm sai: 'phải viết xong phần đặt vấn đề mới bắt đầu được'. Nhiều người viết lần đầu bị tắc ở phần đặt vấn đề hàng tháng trời.</a:t>
-            </a:r>
-          </a:p>
-          <a:p>
-            <a:r>
-              <a:rPr lang="en-US" sz="1400" b="0" dirty="0"/>
-              <a:t>Với bản thảo FLUID-ICU, các bảng đã có sẵn: chúng nằm trong gói kết quả phân tích của bạn.</a:t>
+              <a:t>Hiểu lầm: 'phải viết xong Đặt vấn đề mới bắt đầu được'.</a:t>
             </a:r>
           </a:p>
         </p:txBody>
@@ -2692,25 +2507,19 @@
           <a:p>
             <a:r>
               <a:rPr lang="en-US" sz="1400" b="0" dirty="0"/>
-              <a:t>Ý chính: Phương pháp = đủ chi tiết để lặp lại nghiên cứu, theo thứ tự của bảng kiểm báo cáo (CONSORT cho thử nghiệm hoặc STROBE cho nghiên cứu quan sát).</a:t>
+              <a:t>Phương pháp: đủ chi tiết để làm lại nghiên cứu, theo thứ tự STROBE.</a:t>
             </a:r>
           </a:p>
           <a:p>
             <a:r>
               <a:rPr lang="en-US" sz="1400" b="0" dirty="0"/>
-              <a:t>Thực hành tốt: Bài 1 đặt tên hội đồng đạo đức, số phê duyệt, quy trình xin sự đồng ý và nguồn tài trợ ngay trong Phương pháp (chú giải #13). Mô tả can thiệp đủ để làm lại: tập huấn nhân viên, dược sĩ kiểm tra hằng ngày, bảng pha loãng thuốc trong phụ lục (#16). Tách một kết cục chính khỏi kết cục phụ và an toàn (#17). Ghi phần mềm và phiên bản (#21). Bài 2 định nghĩa rõ dịch vào và dịch ra nào tạo nên cân bằng dịch (#13) và dẫn bài mô tả nghiên cứu thuần tập thay vì viết lại (#12).</a:t>
+              <a:t>Tốt: Bài 1 mô tả can thiệp đủ để làm lại. Cần sửa: Bài 2 không nói biến hiệu chỉnh bị thiếu được xử lý thế nào.</a:t>
             </a:r>
           </a:p>
           <a:p>
             <a:r>
               <a:rPr lang="en-US" sz="1400" b="0" dirty="0"/>
-              <a:t>Cần sửa: Bài 1 là 'thí điểm' nhưng tính cỡ mẫu theo hiệu quả với giả định (70 so với 40 ml/kg) không đạt (#18). Nêu kiểm định Mann-Whitney nhưng báo cáo chênh lệch trung bình kèm KTC (#19). Khoảng 40 giá trị p phụ không nói gì về so sánh bội (#20). Bài 2: 'caliper 0.1' của cái gì? Xử lý biến bị thiếu thế nào? Phân cụm theo gì? (#15, #17). Không có câu về cỡ mẫu (#19).</a:t>
-            </a:r>
-          </a:p>
-          <a:p>
-            <a:r>
-              <a:rPr lang="en-US" sz="1400" b="0" dirty="0"/>
-              <a:t>Các bài có chú giải nằm trong Course/Papers (số chú giải tham chiếu tới các bài này).</a:t>
+              <a:t>Phương pháp không bắt buộc trong bản thảo: mọi thông tin có trong gói kết quả, SAP và từ điển dữ liệu.</a:t>
             </a:r>
           </a:p>
         </p:txBody>
@@ -2791,31 +2600,19 @@
           <a:p>
             <a:r>
               <a:rPr lang="en-US" sz="1400" b="0" dirty="0"/>
-              <a:t>Ví dụ mẫu (bộ dữ liệu khóa học). Đọc từng câu và nêu mục STROBE tương ứng.</a:t>
+              <a:t>Dành cho ai viết phần Phương pháp (không bắt buộc). Mỗi mục STROBE một câu, tất cả từ gói kết quả Q1, mục 2.</a:t>
             </a:r>
           </a:p>
           <a:p>
             <a:r>
               <a:rPr lang="en-US" sz="1400" b="0" dirty="0"/>
-              <a:t>Mọi thông tin lấy từ gói kết quả Q1, mục 2: nghiên cứu thuần tập tiến cứu đa trung tâm, 4 ICU, người lớn nhiễm khuẩn huyết liên tiếp, từ 1/2023 đến 12/2024. Phơi nhiễm = cân bằng tích lũy (vào trừ ra, ngày 1-3) &gt; 0 ml/kg. Kết cục = tử vong trong 28 ngày sau nhập ICU.</a:t>
+              <a:t>Mục 10: với thuần tập có sẵn, ghi là mọi người bệnh đủ tiêu chuẩn đều được đưa vào.</a:t>
             </a:r>
           </a:p>
           <a:p>
             <a:r>
               <a:rPr lang="en-US" sz="1400" b="0" dirty="0"/>
-              <a:t>STROBE 10 (cỡ mẫu): với một nghiên cứu thuần tập cố định, không bịa ra phép tính cỡ mẫu. Chỉ nói đã đưa vào toàn bộ người bệnh đủ tiêu chuẩn.</a:t>
-            </a:r>
-          </a:p>
-          <a:p>
-            <a:r>
-              <a:rPr lang="en-US" sz="1400" b="0" dirty="0"/>
-              <a:t>Câu đạo đức là riêng của khóa học: FLUID-ICU là dữ liệu mô phỏng, và mọi bản thảo phải nói rõ.</a:t>
-            </a:r>
-          </a:p>
-          <a:p>
-            <a:r>
-              <a:rPr lang="en-US" sz="1400" b="0" dirty="0"/>
-              <a:t>Hỏi (mời hai ba người trả lời, bật micro): câu nào người đọc cần để lặp lại nghiên cứu? Đáp án: định nghĩa phơi nhiễm (cân bằng dịch được tính thế nào).</a:t>
+              <a:t>Hỏi: câu nào người đọc cần để làm lại nghiên cứu? Kỳ vọng: cách tính cân bằng dịch.</a:t>
             </a:r>
           </a:p>
         </p:txBody>
@@ -2896,31 +2693,13 @@
           <a:p>
             <a:r>
               <a:rPr lang="en-US" sz="1400" b="0" dirty="0"/>
-              <a:t>Ví dụ mẫu. Đây là mục STROBE 12 viết cho Q1 (gói kết quả Q1, mục 2 và 4-5). SOFA = thang điểm đánh giá suy đa cơ quan.</a:t>
+              <a:t>Mục STROBE 12 cho Q1. Các biến hiệu chỉnh được chọn trong SAP trước khi xem dữ liệu.</a:t>
             </a:r>
           </a:p>
           <a:p>
             <a:r>
               <a:rPr lang="en-US" sz="1400" b="0" dirty="0"/>
-              <a:t>Biến hiệu chỉnh: tuổi, SOFA, lactat, vận mạch, thở máy, bệnh thận mạn. Tất cả được định trước trong kế hoạch phân tích thống kê (SAP, Buổi 6), không chọn theo giá trị p.</a:t>
-            </a:r>
-          </a:p>
-          <a:p>
-            <a:r>
-              <a:rPr lang="en-US" sz="1400" b="0" dirty="0"/>
-              <a:t>Dữ liệu bị thiếu: lactat thiếu ở 93/620 (15.0%). Phân tích chính trên các trường hợp đầy đủ (n = 527), quy gán đa bội (m = 20) là phân tích độ nhạy.</a:t>
-            </a:r>
-          </a:p>
-          <a:p>
-            <a:r>
-              <a:rPr lang="en-US" sz="1400" b="0" dirty="0"/>
-              <a:t>Thay đổi tác động: suy tim, định trước.</a:t>
-            </a:r>
-          </a:p>
-          <a:p>
-            <a:r>
-              <a:rPr lang="en-US" sz="1400" b="0" dirty="0"/>
-              <a:t>Quan niệm sai: 'đoạn thống kê là việc của nhà thống kê'. Người phản biện đọc nó trước tiên. Mọi con số trong Kết quả phải truy được về một câu ở đây.</a:t>
+              <a:t>Mỗi con số trong phần Kết quả phải truy được về một câu ở đây. Người phản biện đọc đoạn này đầu tiên.</a:t>
             </a:r>
           </a:p>
         </p:txBody>
@@ -3001,25 +2780,19 @@
           <a:p>
             <a:r>
               <a:rPr lang="en-US" sz="1400" b="0" dirty="0"/>
-              <a:t>Hai sản phẩm, cả hai đều là bài cá nhân. Sản phẩm 1, đề cương nghiên cứu của từng học viên, hôm nay có phần cuối cùng (đạo đức, đăng ký, khả thi, kế hoạch công bố). Mọi người đều nộp. Khoảng năm học viên tình nguyện sẽ trình bày vào thứ Bảy tuần sau.</a:t>
+              <a:t>Hai sản phẩm cá nhân. Đề cương: Phần 4 hôm nay, nộp vào thứ Bảy tuần sau.</a:t>
             </a:r>
           </a:p>
           <a:p>
             <a:r>
               <a:rPr lang="en-US" sz="1400" b="0" dirty="0"/>
-              <a:t>Sản phẩm 2, bản thảo của từng học viên, chuyển từ 'đọc kết quả phân tích' (Buổi 6) sang viết. Nói rõ: chúng tôi đưa kết quả của câu hỏi FLUID-ICU bạn chọn trong một gói kết quả phân tích, và bạn viết bài báo. Không ai phải tự tính toán.</a:t>
+              <a:t>Phần Kết quả: chúng tôi đưa kết quả cho câu hỏi của mỗi người, họ viết một phần Kết quả sẵn sàng để nộp. Phương pháp, Đặt vấn đề, Bàn luận và Tóm tắt không bắt buộc.</a:t>
             </a:r>
           </a:p>
           <a:p>
             <a:r>
               <a:rPr lang="en-US" sz="1400" b="0" dirty="0"/>
-              <a:t>Nhắc lại tên hai bài báo: Bài 1 (Boulet 2024) là thử nghiệm ngẫu nhiên về hạn chế dịch trong sốc nhiễm khuẩn (48 người bệnh). Bài 2 (Hyun 2023) là nghiên cứu thuần tập về cân bằng dịch và tử vong trong nhiễm khuẩn huyết (2516 người bệnh). Cả buổi dùng chúng làm ví dụ về cách làm tốt và chưa tốt.</a:t>
-            </a:r>
-          </a:p>
-          <a:p>
-            <a:r>
-              <a:rPr lang="en-US" sz="1400" b="0" dirty="0"/>
-              <a:t>Hỏi (mời hai ba người trả lời, bật micro): bạn đã chọn câu hỏi nào (Q1-Q5)?</a:t>
+              <a:t>Hỏi: bạn đã chọn câu hỏi nào (Q1-Q5)?</a:t>
             </a:r>
           </a:p>
         </p:txBody>
@@ -3100,31 +2873,13 @@
           <a:p>
             <a:r>
               <a:rPr lang="en-US" sz="1400" b="0" dirty="0"/>
-              <a:t>Bốn quy tắc. 1) Đối tượng trước tiên: bao nhiêu người được sàng lọc, đưa vào, phân tích và vì sao mất một số, kèm sơ đồ dòng người tham gia. Bài 1 có sơ đồ CONSORT trong bài chính (chú giải #23, #27). Bài 2 để trong phụ lục dù 79% sổ bộ bị loại (#20).</a:t>
+              <a:t>Bốn quy tắc. Người tham gia trước, kèm lưu đồ. Tác động kèm KTC 95%, không viết 'p = 0.42, không có ý nghĩa'. Không bình luận. Mỗi số một chỗ, và văn bản phải khớp với bảng: văn bản và Bảng 1 của Bài 1 mâu thuẫn về creatinine.</a:t>
             </a:r>
           </a:p>
           <a:p>
             <a:r>
               <a:rPr lang="en-US" sz="1400" b="0" dirty="0"/>
-              <a:t>2) Con số kèm khoảng tin cậy, không phải 'p = 0.42, không có ý nghĩa'. Phân tích 48 trên 50 người bệnh đã phân nhóm là phân tích theo ý định điều trị có điều chỉnh và nên gọi đúng tên (#24).</a:t>
-            </a:r>
-          </a:p>
-          <a:p>
-            <a:r>
-              <a:rPr lang="en-US" sz="1400" b="0" dirty="0"/>
-              <a:t>3) Không bình luận trong phần Kết quả. Bài 2 báo cáo kết quả theo thứ tự mục tiêu, mỗi kết quả có HR, KTC và P, không bình luận (#25).</a:t>
-            </a:r>
-          </a:p>
-          <a:p>
-            <a:r>
-              <a:rPr lang="en-US" sz="1400" b="0" dirty="0"/>
-              <a:t>4) Mỗi con số một chỗ: số chính trong văn bản, chi tiết trong bảng, và phải khớp nhau. Văn bản Bài 1 nói creatinine cao hơn ở nhóm can thiệp. Bảng 1 cho thấy ngược lại (#25). Mâu thuẫn giữa văn bản và bảng là lý do bị từ chối kinh điển.</a:t>
-            </a:r>
-          </a:p>
-          <a:p>
-            <a:r>
-              <a:rPr lang="en-US" sz="1400" b="0" dirty="0"/>
-              <a:t>Nói với học viên: trước khi nộp bản nháp, đối chiếu từng con số trong bài với gói kết quả phân tích.</a:t>
+              <a:t>Trước khi nộp, đối chiếu mọi con số với gói kết quả.</a:t>
             </a:r>
           </a:p>
         </p:txBody>
@@ -3205,37 +2960,19 @@
           <a:p>
             <a:r>
               <a:rPr lang="en-US" sz="1400" b="0" dirty="0"/>
-              <a:t>Ví dụ mẫu. Mọi con số lấy từ Course/Data/key_results.md (dữ liệu mô phỏng). OR = tỷ số chênh. HR = tỷ số nguy cơ tức thời.</a:t>
+              <a:t>Mọi con số từ gói kết quả Q1 (mô phỏng). Mỗi mục STROBE một câu, từ 13 đến 17.</a:t>
             </a:r>
           </a:p>
           <a:p>
             <a:r>
               <a:rPr lang="en-US" sz="1400" b="0" dirty="0"/>
-              <a:t>Luồng: 620 đưa vào, 618 có cân bằng ngày 3, 527 trong mô hình hiệu chỉnh các trường hợp đầy đủ (91 thiếu lactat hoặc tuổi).</a:t>
+              <a:t>Chỉ ra những gì không có: không 'vì', không 'có ý nghĩa', không giải thích vì sao OR nhỏ lại. Điều đó thuộc về phần Bàn luận.</a:t>
             </a:r>
           </a:p>
           <a:p>
             <a:r>
               <a:rPr lang="en-US" sz="1400" b="0" dirty="0"/>
-              <a:t>Cân bằng dương 373/618 (60.4%). SOFA trung vị 8 (6 đến 10) so với 6 (4 đến 8). Vận mạch 205/373 (55.0%) so với 61/245 (24.9%).</a:t>
-            </a:r>
-          </a:p>
-          <a:p>
-            <a:r>
-              <a:rPr lang="en-US" sz="1400" b="0" dirty="0"/>
-              <a:t>Tử vong: 134/373 (35.9%) so với 45/245 (18.4%). OR thô 2.49 (1.70 đến 3.70). OR hiệu chỉnh 1.62 (1.02 đến 2.59), p 0.044. Độ nhạy: quy gán đa bội OR 1.70 (1.09 đến 2.64). HR Cox hiệu chỉnh 1.46 (1.00 đến 2.13).</a:t>
-            </a:r>
-          </a:p>
-          <a:p>
-            <a:r>
-              <a:rPr lang="en-US" sz="1400" b="0" dirty="0"/>
-              <a:t>Chỉ ra điều không có trong đoạn: không 'vì', không 'có ý nghĩa', không giải thích vì sao OR giảm. Đó là việc của Bàn luận thứ Bảy tuần sau.</a:t>
-            </a:r>
-          </a:p>
-          <a:p>
-            <a:r>
-              <a:rPr lang="en-US" sz="1400" b="0" dirty="0"/>
-              <a:t>Bình chọn: câu thô-và-hiệu chỉnh đáp ứng mục STROBE nào? Đáp án: 16.</a:t>
+              <a:t>Thăm dò: mục nào yêu cầu ước lượng thô và đã hiệu chỉnh? Kỳ vọng: 16.</a:t>
             </a:r>
           </a:p>
         </p:txBody>
@@ -3316,31 +3053,19 @@
           <a:p>
             <a:r>
               <a:rPr lang="en-US" sz="1400" b="0" dirty="0"/>
-              <a:t>Ý chính: người phản biện và bác sĩ đọc bảng kỹ hơn văn bản. Bảng phải tự giải thích được: tiêu đề nói cái gì, ở ai, khi nào, n ở mỗi tiêu đề cột. Đơn vị và cách tóm tắt ở mỗi dòng. Chú thích giải nghĩa từ viết tắt và dữ liệu bị thiếu. Hình là Bảng 1 của Bài 1, vẽ lại.</a:t>
+              <a:t>Bảng phải tự đọc hiểu được: tên bảng nói cái gì, ai, khi nào, n mỗi cột, đơn vị và cách tóm tắt ở mỗi dòng, chú thích chữ viết tắt và dữ liệu thiếu.</a:t>
             </a:r>
           </a:p>
           <a:p>
             <a:r>
               <a:rPr lang="en-US" sz="1400" b="0" dirty="0"/>
-              <a:t>Thực hành tốt: Bảng 1 Bài 1 có n mỗi cột, SD hoặc IQR mỗi dòng và không có giá trị p ban đầu, đúng cho thử nghiệm ngẫu nhiên (chú giải #31). Bảng 1 Bài 2 thêm SMD (chênh lệch trung bình chuẩn hóa) và chú thích số người bệnh thiếu dữ liệu (#30). Hình trục thời gian có chú thích tự đủ nghĩa (#21).</a:t>
+              <a:t>Lỗi trong hai bài: sai đơn vị (Bài 1), không có số người còn nguy cơ dưới đường Kaplan-Meier (Bài 2).</a:t>
             </a:r>
           </a:p>
           <a:p>
             <a:r>
               <a:rPr lang="en-US" sz="1400" b="0" dirty="0"/>
-              <a:t>Lỗi cần tránh: natri và kali in đơn vị umol/L (đúng là mmol/L) ở Bài 1 (#30). Một dòng chép trùng ở Bảng 2 Bài 1 (#32). Dẫn sai số hình ở Bài 1 (#28, #41). Tiêu đề bảng mơ hồ (#34). Đơn vị bạch cầu viết '* 10^3/L' ở Bài 2 (#30). Đường cong Kaplan-Meier nên có số còn nguy cơ (Bài 2, #31).</a:t>
-            </a:r>
-          </a:p>
-          <a:p>
-            <a:r>
-              <a:rPr lang="en-US" sz="1400" b="0" dirty="0"/>
-              <a:t>Liên hệ Buổi 5: quy tắc bảng đạt chuẩn công bố. Bảng 1 FLUID-ICU trong mỗi gói kết quả đã theo các quy tắc này.</a:t>
-            </a:r>
-          </a:p>
-          <a:p>
-            <a:r>
-              <a:rPr lang="en-US" sz="1400" b="0" dirty="0"/>
-              <a:t>Hỏi: bảng có tiêu đề 'Kết quả' sai ở đâu? Đáp án: không nói gì về cái gì, ở ai, khi nào.</a:t>
+              <a:t>Hỏi: bảng có tên 'Kết quả' thì sai ở đâu?</a:t>
             </a:r>
           </a:p>
         </p:txBody>
@@ -3421,31 +3146,13 @@
           <a:p>
             <a:r>
               <a:rPr lang="en-US" sz="1400" b="0" dirty="0"/>
-              <a:t>Ví dụ mẫu: từ Bảng 1 đến một câu Kết quả (STROBE 14).</a:t>
+              <a:t>Từ Bảng 1 thành một câu Kết quả (STROBE 14): 'Người bệnh có cân bằng dương nặng hơn lúc ban đầu (trung vị SOFA 8 so với 6, vận mạch 55.0% so với 24.9%) và ít bị suy tim hơn (11.5% so với 22.0%).'</a:t>
             </a:r>
           </a:p>
           <a:p>
             <a:r>
               <a:rPr lang="en-US" sz="1400" b="0" dirty="0"/>
-              <a:t>Câu mẫu: 'Người bệnh cân bằng dương nặng hơn lúc ban đầu (SOFA trung vị 8 so với 6, vận mạch 55.0% so với 24.9%) và ít suy tim hơn (11.5% so với 22.0%).'</a:t>
-            </a:r>
-          </a:p>
-          <a:p>
-            <a:r>
-              <a:rPr lang="en-US" sz="1400" b="0" dirty="0"/>
-              <a:t>Ý chính: câu về Bảng 1 mô tả, không kiểm định, nên không cần giá trị p (Bảng 1 của nghiên cứu quan sát thường dùng SMD).</a:t>
-            </a:r>
-          </a:p>
-          <a:p>
-            <a:r>
-              <a:rPr lang="en-US" sz="1400" b="0" dirty="0"/>
-              <a:t>Suy tim thấp hơn ở nhóm dương vì bác sĩ truyền ít dịch cho người bệnh suy tim: ví dụ hay về việc quyết định điều trị định hình dữ liệu.</a:t>
-            </a:r>
-          </a:p>
-          <a:p>
-            <a:r>
-              <a:rPr lang="en-US" sz="1400" b="0" dirty="0"/>
-              <a:t>Bảng 1 đầy đủ, có các dòng dữ liệu bị thiếu, nằm trong mỗi gói kết quả.</a:t>
+              <a:t>Câu này mô tả, không kiểm định: không cần giá trị p.</a:t>
             </a:r>
           </a:p>
         </p:txBody>
@@ -3526,25 +3233,19 @@
           <a:p>
             <a:r>
               <a:rPr lang="en-US" sz="1400" b="0" dirty="0"/>
-              <a:t>Ý chính: FLUID-ICU là nghiên cứu thuần tập, nên bài báo theo STROBE (STrengthening the Reporting of OBservational studies in Epidemiology), bản cho thuần tập. Mục 11 (biến định lượng) nằm trong mục 7 và 12.</a:t>
+              <a:t>FLUID-ICU là thuần tập, nên theo STROBE. Phần Kết quả gồm mục 13 đến 17.</a:t>
             </a:r>
           </a:p>
           <a:p>
             <a:r>
               <a:rPr lang="en-US" sz="1400" b="0" dirty="0"/>
-              <a:t>Các mục hay bị quên: 9 (sai lệch: nói rõ cách xử lý nhiễu do chỉ định, tức là hiệu chỉnh theo mức độ nặng), 10 (cỡ mẫu: với bộ dữ liệu cố định ghi 'đưa vào toàn bộ người bệnh đủ tiêu chuẩn trong nghiên cứu thuần tập'), 12 (dữ liệu bị thiếu: xử lý lactat thiếu thế nào), 16 (báo cáo cả ước lượng thô và hiệu chỉnh, kèm các biến hiệu chỉnh).</a:t>
+              <a:t>Hay bị quên nhất: mục 16 (thô và đã hiệu chỉnh, kèm các biến hiệu chỉnh) và dữ liệu thiếu.</a:t>
             </a:r>
           </a:p>
           <a:p>
             <a:r>
               <a:rPr lang="en-US" sz="1400" b="0" dirty="0"/>
-              <a:t>Bảng kiểm có trong phiếu bài tập Buổi 7 (Phần C) và trên equator-network.org (trình diễn thứ Bảy tuần sau).</a:t>
-            </a:r>
-          </a:p>
-          <a:p>
-            <a:r>
-              <a:rPr lang="en-US" sz="1400" b="0" dirty="0"/>
-              <a:t>Bình chọn: mục nào nói về Bảng 1? Đáp án: 14 (dữ liệu mô tả).</a:t>
+              <a:t>Thăm dò: mục nào ứng với Bảng 1? Kỳ vọng: 14.</a:t>
             </a:r>
           </a:p>
         </p:txBody>
@@ -3625,19 +3326,19 @@
           <a:p>
             <a:r>
               <a:rPr lang="en-US" sz="1400" b="0" dirty="0"/>
-              <a:t>Kiểm tra (21:32-21:35). Mỗi câu một lượt bình chọn ba phương án: Phương pháp, Kết quả, Bàn luận. Mọi con số là kết quả FLUID-ICU Q1 (key_results.md).</a:t>
+              <a:t>Kiểm tra (21:32-21:35). Mỗi câu một thăm dò.</a:t>
             </a:r>
           </a:p>
           <a:p>
             <a:r>
               <a:rPr lang="en-US" sz="1400" b="0" dirty="0"/>
-              <a:t>Câu 4 là bẫy: cách xử lý dữ liệu bị thiếu thuộc Phương pháp. Bao nhiêu bị thiếu thuộc Kết quả.</a:t>
+              <a:t>Câu 4 là câu bẫy: xử lý dữ liệu thiếu thế nào thuộc Phương pháp, thiếu bao nhiêu thuộc Kết quả.</a:t>
             </a:r>
           </a:p>
           <a:p>
             <a:r>
               <a:rPr lang="en-US" sz="1400" b="0" dirty="0"/>
-              <a:t>Câu 3 là lỗi kinh điển: một lời diễn giải lọt vào Kết quả. Chuyển nó sang Bàn luận.</a:t>
+              <a:t>Câu 3 là lỗi kinh điển: bình luận trong phần Kết quả.</a:t>
             </a:r>
           </a:p>
         </p:txBody>
@@ -3718,25 +3419,19 @@
           <a:p>
             <a:r>
               <a:rPr lang="en-US" sz="1400" b="0" dirty="0"/>
-              <a:t>Thực hành bản thảo 1 (21:35-22:20). Bộ dữ liệu khóa học.</a:t>
+              <a:t>Thực hành bản thảo 1 (21:35-22:20).</a:t>
             </a:r>
           </a:p>
           <a:p>
             <a:r>
               <a:rPr lang="en-US" sz="1400" b="0" dirty="0"/>
-              <a:t>Phần 1 (21:35-22:05): giảng viên soạn Phương pháp và Kết quả cho Q1 ngay trên màn hình chia sẻ, mời từng người đề xuất câu, bật micro.</a:t>
+              <a:t>Phần 1: bạn viết trực tiếp phần Kết quả của Q1, mời học viên đề xuất từng câu. Phần 2: mỗi học viên bắt đầu phần Kết quả cho câu hỏi của mình.</a:t>
             </a:r>
           </a:p>
           <a:p>
             <a:r>
               <a:rPr lang="en-US" sz="1400" b="0" dirty="0"/>
-              <a:t>Phần 2 (22:05-22:20): mỗi học viên bắt đầu bản nháp của mình với câu hỏi đã chọn (Q1 đến Q5) và hoàn thành ở nhà.</a:t>
-            </a:r>
-          </a:p>
-          <a:p>
-            <a:r>
-              <a:rPr lang="en-US" sz="1400" b="0" dirty="0"/>
-              <a:t>Hướng dẫn: Course/Practicals/s7_exercises.md, Phần C. Đoạn văn mẫu cho Q1: Course/Solutions/s7_solutions.md (dùng để định hướng bản nháp của lớp, không dán nguyên văn).</a:t>
+              <a:t>Hướng dẫn: s7_exercises_VN Phần C. Văn bản mẫu: s7_solutions_VN Phần C (dùng để định hướng, không dán vào).</a:t>
             </a:r>
           </a:p>
         </p:txBody>
@@ -3817,25 +3512,25 @@
           <a:p>
             <a:r>
               <a:rPr lang="en-US" sz="1400" b="0" dirty="0"/>
-              <a:t>Thực hành Phần 1 (21:35-22:05). Cả lớp. Bật đồng hồ trên màn hình và nhắc từng giai đoạn.</a:t>
+              <a:t>Thực hành phần 1 (21:35-22:05). Để đồng hồ đếm giờ trên màn hình.</a:t>
             </a:r>
           </a:p>
           <a:p>
             <a:r>
               <a:rPr lang="en-US" sz="1400" b="0" dirty="0"/>
-              <a:t>Phương pháp theo thứ tự: thiết kế và bối cảnh, đối tượng, biến số (phơi nhiễm, kết cục, yếu tố gây nhiễu), nguồn dữ liệu và sai lệch, cỡ mẫu, phân tích thống kê, câu đạo đức (dữ liệu mô phỏng). Kết quả: đối tượng và sơ đồ, câu về Bảng 1, số liệu kết cục, OR thô và hiệu chỉnh, một kết quả phân tích độ nhạy.</a:t>
+              <a:t>Thứ tự: lưu đồ, câu về Bảng 1, số tử vong mỗi nhóm, OR thô và hiệu chỉnh, HR Cox và quy gán.</a:t>
             </a:r>
           </a:p>
           <a:p>
             <a:r>
               <a:rPr lang="en-US" sz="1400" b="0" dirty="0"/>
-              <a:t>Câu gợi ý cho lớp: 'Đoạn phân tích thống kê ở đâu?' 'Đã hiệu chỉnh theo gì?' 'Có con số nào không có khoảng tin cậy?' 'Có tính từ ("có ý nghĩa", "mạnh") nào lẽ ra phải là con số?' 'Có lời diễn giải nào trong phần Kết quả không?'</a:t>
+              <a:t>Câu gợi ý: 'Có con số nào thiếu KTC không?' 'Có tính từ nào nên thay bằng con số?' 'Có bình luận nào không?'</a:t>
             </a:r>
           </a:p>
           <a:p>
             <a:r>
               <a:rPr lang="en-US" sz="1400" b="0" dirty="0"/>
-              <a:t>Mục tiêu khoảng 300 từ mỗi phần. Lưu bản nháp của lớp và gửi dạng PDF sau buổi học: đây là mẫu cho bản nháp của mỗi người.</a:t>
+              <a:t>Khoảng 300 từ. Gửi bản nháp của lớp dạng PDF sau buổi học.</a:t>
             </a:r>
           </a:p>
         </p:txBody>
@@ -3916,25 +3611,19 @@
           <a:p>
             <a:r>
               <a:rPr lang="en-US" sz="1400" b="0" dirty="0"/>
-              <a:t>Thực hành Phần 2 (22:05-22:20). Cá nhân, viết trong im lặng. Để đồng hồ trên màn hình và trả lời câu hỏi trong khung chat.</a:t>
+              <a:t>Thực hành phần 2 (22:05-22:20). Mỗi người tự viết. Trả lời câu hỏi trong khung chat.</a:t>
             </a:r>
           </a:p>
           <a:p>
             <a:r>
               <a:rPr lang="en-US" sz="1400" b="0" dirty="0"/>
-              <a:t>Học viên chọn Q1 viết lại bản nháp của lớp bằng lời của mình và thêm một hình hoặc bảng. Không chép nguyên.</a:t>
+              <a:t>Q1: viết lại bằng lời của mình, không chép bản nháp của lớp. Q3: số ngày không thở máy tính tử vong là 0. Q4: báo cáo cả ước lượng trường hợp đầy đủ và quy gán. Q5: chỉ người sống sót, trung vị và IQR.</a:t>
             </a:r>
           </a:p>
           <a:p>
             <a:r>
               <a:rPr lang="en-US" sz="1400" b="0" dirty="0"/>
-              <a:t>Lưu ý riêng cho từng câu hỏi (gửi vào khung chat): Q4 báo cáo cả ước lượng các trường hợp đầy đủ và quy gán. Q5 dùng trung vị và IQR (chỉ người sống sót). Q3: số ngày không thở máy bị lệch và tính tử vong là 0, nên kiểm tra cách tóm tắt.</a:t>
-            </a:r>
-          </a:p>
-          <a:p>
-            <a:r>
-              <a:rPr lang="en-US" sz="1400" b="0" dirty="0"/>
-              <a:t>Hạn nộp bản nháp Phương pháp và Kết quả: trước Buổi 8 (qua email). Thực hành thứ Bảy tuần sau sẽ thêm Đặt vấn đề, Bàn luận, Tóm tắt và Tiêu đề.</a:t>
+              <a:t>Có thể thêm các phần không bắt buộc nếu còn thời gian.</a:t>
             </a:r>
           </a:p>
         </p:txBody>
@@ -4015,13 +3704,7 @@
           <a:p>
             <a:r>
               <a:rPr lang="en-US" sz="1400" b="0" dirty="0"/>
-              <a:t>Từ khóa (22:20-22:23). Chiếu thuật ngữ, mời một người giải thích, bật micro, rồi mở cột bên phải.</a:t>
-            </a:r>
-          </a:p>
-          <a:p>
-            <a:r>
-              <a:rPr lang="en-US" sz="1400" b="0" dirty="0"/>
-              <a:t>Đây cũng là những từ dễ xuất hiện nhất trong bài kiểm tra cuối khóa thứ Bảy tuần sau.</a:t>
+              <a:t>Từ khóa (22:20-22:22). Chiếu thuật ngữ, mời một người giải thích, rồi mở cột bên phải.</a:t>
             </a:r>
           </a:p>
         </p:txBody>
@@ -4102,19 +3785,19 @@
           <a:p>
             <a:r>
               <a:rPr lang="en-US" sz="1400" b="0" dirty="0"/>
-              <a:t>Phần 7.1 (19:40-20:10). Mười slide, khoảng 3 phút mỗi slide, gồm hai ví dụ mẫu.</a:t>
+              <a:t>Phần 7.1 (19:40-20:10). Mười slide, khoảng 3 phút mỗi slide.</a:t>
             </a:r>
           </a:p>
           <a:p>
             <a:r>
               <a:rPr lang="en-US" sz="1400" b="0" dirty="0"/>
-              <a:t>Slide về sự đồng ý trong ICU và ví dụ mẫu đi kèm cần nhiều thời gian nhất: đó là vấn đề thực tế của các ICU.</a:t>
+              <a:t>Dành nhiều thời gian nhất cho sự đồng ý ở ICU: đó là vấn đề thật ở khoa của chúng ta.</a:t>
             </a:r>
           </a:p>
           <a:p>
             <a:r>
               <a:rPr lang="en-US" sz="1400" b="0" dirty="0"/>
-              <a:t>Liên hệ: mọi nội dung của phần này sẽ thành một đoạn trong Đề cương Phần 4 (Xây dựng đề cương 7 lúc 20:30).</a:t>
+              <a:t>Mọi nội dung ở đây trở thành một đoạn trong Phần 4 đề cương.</a:t>
             </a:r>
           </a:p>
         </p:txBody>
@@ -4195,19 +3878,13 @@
           <a:p>
             <a:r>
               <a:rPr lang="en-US" sz="1400" b="0" dirty="0"/>
-              <a:t>Tổng kết (22:23-22:30). Đọc ba thông điệp. Mời một người nói thêm thông điệp thứ tư.</a:t>
+              <a:t>Bình duyệt (22:22-22:24). Chiếu danh sách cặp bình duyệt và nói rõ đã bốc thăm ngẫu nhiên. Mỗi người bình duyệt một bản nháp và nhận một bản bình duyệt.</a:t>
             </a:r>
           </a:p>
           <a:p>
             <a:r>
               <a:rPr lang="en-US" sz="1400" b="0" dirty="0"/>
-              <a:t>Câu hỏi cuối buổi: mục đích là kiểm tra mức hiểu bài. Đọc các câu trả lời trước Buổi 8 và mở đầu Buổi 8 bằng chúng (phần ôn tập).</a:t>
-            </a:r>
-          </a:p>
-          <a:p>
-            <a:r>
-              <a:rPr lang="en-US" sz="1400" b="0" dirty="0"/>
-              <a:t>Bài về nhà: Phần 4 của đề cương (phiếu Phần B). Bản nháp Phương pháp + Kết quả, 6 slide theo hướng dẫn trình bày (Course/Assignment/presentation_guide.md). Mọi người nộp slide và đề cương viết. Khoảng năm học viên tình nguyện trình bày (mỗi người 6 phút). Đề nghị người tình nguyện báo trong tuần.</a:t>
+              <a:t>Gửi bản nháp thẳng cho người bình duyệt giúp tiết kiệm thời gian: bản bình duyệt nộp sau hai tuần, bản sửa sau đó bốn tuần.</a:t>
             </a:r>
           </a:p>
         </p:txBody>
@@ -4288,7 +3965,19 @@
           <a:p>
             <a:r>
               <a:rPr lang="en-US" sz="1400" b="0" dirty="0"/>
-              <a:t>Extra: các slide sau mục này là tùy chọn. Dùng khi lớp đi nhanh hơn dự kiến, hoặc giới thiệu cho học viên tự học.</a:t>
+              <a:t>Tổng kết (22:24-22:30). Đọc ba thông điệp và mời một người thêm thông điệp thứ tư.</a:t>
+            </a:r>
+          </a:p>
+          <a:p>
+            <a:r>
+              <a:rPr lang="en-US" sz="1400" b="0" dirty="0"/>
+              <a:t>Đọc các câu trả lời cuối buổi trước Buổi 8 và mở đầu bằng chúng.</a:t>
+            </a:r>
+          </a:p>
+          <a:p>
+            <a:r>
+              <a:rPr lang="en-US" sz="1400" b="0" dirty="0"/>
+              <a:t>Về nhà: Phần 4 đề cương, bản nháp phần Kết quả, 6 slide (Presentation_Guide_VN).</a:t>
             </a:r>
           </a:p>
         </p:txBody>
@@ -4369,13 +4058,7 @@
           <a:p>
             <a:r>
               <a:rPr lang="en-US" sz="1400" b="0" dirty="0"/>
-              <a:t>Kiểm tra bổ sung (1 phút + 1 phút đáp án). Mỗi tình huống một lượt bình chọn ba phương án: bắt buộc, nên, không cần. Rồi mở đáp án.</a:t>
-            </a:r>
-          </a:p>
-          <a:p>
-            <a:r>
-              <a:rPr lang="en-US" sz="1400" b="0" dirty="0"/>
-              <a:t>Tình huống 4 mở ra một thảo luận hữu ích: audit so sánh thực hành với một chuẩn và thường được phê duyệt qua phòng quản lý chất lượng, không đăng ký. Nếu định công bố như một nghiên cứu, hãy hỏi hội đồng đạo đức trước (Buổi 1: nghiên cứu, audit và cải tiến chất lượng).</a:t>
+              <a:t>Slide bổ sung: không bắt buộc, dùng khi lớp đi nhanh hoặc để tự học.</a:t>
             </a:r>
           </a:p>
         </p:txBody>
@@ -4456,25 +4139,13 @@
           <a:p>
             <a:r>
               <a:rPr lang="en-US" sz="1400" b="0" dirty="0"/>
-              <a:t>Extra: Ý chính: hầu hết bài báo lâm sàng theo cấu trúc IMRaD (Đặt vấn đề, Phương pháp, Kết quả, Bàn luận), mở đầu bằng tiêu đề và tóm tắt, kết thúc bằng tài liệu tham khảo và các cam kết.</a:t>
+              <a:t>Kiểm tra bổ sung. Mỗi tình huống một thăm dò: bắt buộc, nên, hay không cần.</a:t>
             </a:r>
           </a:p>
           <a:p>
             <a:r>
               <a:rPr lang="en-US" sz="1400" b="0" dirty="0"/>
-              <a:t>Đặt vấn đề: từ điều đã biết, đến điều chưa biết, đến câu hỏi của bạn (hình phễu). Phương pháp: đủ chi tiết để người khác lặp lại. Kết quả: con số, không bình luận. Bàn luận: trả lời câu hỏi trước, so sánh với nghiên cứu khác, nêu hạn chế, rồi mới nói ý nghĩa.</a:t>
-            </a:r>
-          </a:p>
-          <a:p>
-            <a:r>
-              <a:rPr lang="en-US" sz="1400" b="0" dirty="0"/>
-              <a:t>Ví dụ xuyên suốt: phần đặt vấn đề của Bài 1 là một hình phễu mẫu mực trong ba đoạn (trang 2-3), kết thúc bằng mục tiêu chính là đánh giá cân bằng dịch sau 5 ngày đầu. Phần Bàn luận mở đầu bằng câu trả lời cho câu hỏi đó (trang 8).</a:t>
-            </a:r>
-          </a:p>
-          <a:p>
-            <a:r>
-              <a:rPr lang="en-US" sz="1400" b="0" dirty="0"/>
-              <a:t>Mẹo cho phần thẩm định ở Buổi 8: đồng hồ cát chỉ chỗ cần tìm. PICO ở đoạn cuối Đặt vấn đề, thiết kế và kết cục ở Phương pháp, tác dụng chính ở đoạn đầu Kết quả, hạn chế ở gần cuối Bàn luận.</a:t>
+              <a:t>Tình huống 4: kiểm định chất lượng (audit) đi qua phòng quản lý chất lượng, không đăng ký. Nếu muốn công bố như nghiên cứu, hỏi hội đồng đạo đức trước.</a:t>
             </a:r>
           </a:p>
         </p:txBody>
@@ -4555,25 +4226,13 @@
           <a:p>
             <a:r>
               <a:rPr lang="en-US" sz="1400" b="0" dirty="0"/>
-              <a:t>Extra: CRediT (Contributor Roles Taxonomy, phân loại vai trò đóng góp) gồm 14 vai trò chuẩn, giữ nguyên tên tiếng Anh khi nộp bài. Nó không thay thế tiêu chí ICMJE mà làm cho đóng góp của mỗi người được nhìn thấy.</a:t>
+              <a:t>Bổ sung. IMRaD: Đặt vấn đề thu hẹp về câu hỏi, Bàn luận mở rộng trở lại thực hành.</a:t>
             </a:r>
           </a:p>
           <a:p>
             <a:r>
               <a:rPr lang="en-US" sz="1400" b="0" dirty="0"/>
-              <a:t>Ví dụ xuyên suốt: Bài 1 (trang 12) có tuyên bố CRediT. VD nhà thống kê được ghi công Methodology và Formal analysis. Bài 2 (trang 8) mô tả đóng góp bằng văn xuôi và ghi tất cả tác giả đã đọc và duyệt bản thảo cuối. Cách này chấp nhận được, nhưng CRediT là định dạng đa số tạp chí đang yêu cầu.</a:t>
-            </a:r>
-          </a:p>
-          <a:p>
-            <a:r>
-              <a:rPr lang="en-US" sz="1400" b="0" dirty="0"/>
-              <a:t>Đề nghị mỗi học viên ghi vào đề cương của mình ai là tác giả thứ nhất và ai làm gì. Điều này tránh những cuộc nói chuyện khó khăn về sau.</a:t>
-            </a:r>
-          </a:p>
-          <a:p>
-            <a:r>
-              <a:rPr lang="en-US" sz="1400" b="0" dirty="0"/>
-              <a:t>Hỏi: trong bệnh viện, ai thường đứng tên tác giả cuối, vì sao? Đáp án: người hướng dẫn cấp cao. Hợp lệ nếu đủ bốn tiêu chí, là 'danh dự' nếu không.</a:t>
+              <a:t>Đặt vấn đề của Bài 1 là hình phễu ba đoạn, và Bàn luận mở đầu bằng câu trả lời cho câu hỏi.</a:t>
             </a:r>
           </a:p>
         </p:txBody>
@@ -4654,7 +4313,100 @@
           <a:p>
             <a:r>
               <a:rPr lang="en-US" sz="1400" b="0" dirty="0"/>
-              <a:t>Slide bản quyền. Để trên màn hình khi học viên rời phòng họp.</a:t>
+              <a:t>Bổ sung. CRediT nêu ai làm gì (14 vai trò). Nó không thay thế tiêu chí ICMJE.</a:t>
+            </a:r>
+          </a:p>
+          <a:p>
+            <a:r>
+              <a:rPr lang="en-US" sz="1400" b="0" dirty="0"/>
+              <a:t>Bài 1 có tuyên bố CRediT.</a:t>
+            </a:r>
+          </a:p>
+          <a:p>
+            <a:r>
+              <a:rPr lang="en-US" sz="1400" b="0" dirty="0"/>
+              <a:t>Đề nghị mỗi học viên ghi trong đề cương ai sẽ làm gì.</a:t>
+            </a:r>
+          </a:p>
+        </p:txBody>
+      </p:sp>
+      <p:sp>
+        <p:nvSpPr>
+          <p:cNvPr id="4" name="Slide Number Placeholder 3"/>
+          <p:cNvSpPr>
+            <a:spLocks noGrp="1"/>
+          </p:cNvSpPr>
+          <p:nvPr>
+            <p:ph type="sldNum" sz="quarter" idx="10"/>
+          </p:nvPr>
+        </p:nvSpPr>
+        <p:spPr/>
+        <p:txBody>
+          <a:bodyPr/>
+          <a:lstStyle/>
+          <a:p>
+            <a:fld id="{F7021451-1387-4CA6-816F-3879F97B5CBC}" type="slidenum">
+              <a:rPr lang="en-US"/>
+              <a:t>1</a:t>
+            </a:fld>
+          </a:p>
+        </p:txBody>
+      </p:sp>
+    </p:spTree>
+  </p:cSld>
+  <p:clrMapOvr>
+    <a:masterClrMapping/>
+  </p:clrMapOvr>
+</p:notes>
+</file>
+
+<file path=ppt/notesSlides/notesSlide46.xml><?xml version="1.0" encoding="utf-8"?>
+<p:notes xmlns:a="http://schemas.openxmlformats.org/drawingml/2006/main" xmlns:r="http://schemas.openxmlformats.org/officeDocument/2006/relationships" xmlns:p="http://schemas.openxmlformats.org/presentationml/2006/main">
+  <p:cSld>
+    <p:spTree>
+      <p:nvGrpSpPr>
+        <p:cNvPr id="1" name=""/>
+        <p:cNvGrpSpPr/>
+        <p:nvPr/>
+      </p:nvGrpSpPr>
+      <p:grpSpPr>
+        <a:xfrm>
+          <a:off x="0" y="0"/>
+          <a:ext cx="0" cy="0"/>
+          <a:chOff x="0" y="0"/>
+          <a:chExt cx="0" cy="0"/>
+        </a:xfrm>
+      </p:grpSpPr>
+      <p:sp>
+        <p:nvSpPr>
+          <p:cNvPr id="2" name="Slide Image Placeholder 1"/>
+          <p:cNvSpPr>
+            <a:spLocks noGrp="1" noRot="1" noChangeAspect="1"/>
+          </p:cNvSpPr>
+          <p:nvPr>
+            <p:ph type="sldImg"/>
+          </p:nvPr>
+        </p:nvSpPr>
+        <p:spPr/>
+      </p:sp>
+      <p:sp>
+        <p:nvSpPr>
+          <p:cNvPr id="3" name="Notes Placeholder 2"/>
+          <p:cNvSpPr>
+            <a:spLocks noGrp="1"/>
+          </p:cNvSpPr>
+          <p:nvPr>
+            <p:ph type="body" idx="1"/>
+          </p:nvPr>
+        </p:nvSpPr>
+        <p:spPr/>
+        <p:txBody>
+          <a:bodyPr/>
+          <a:lstStyle/>
+          <a:p>
+            <a:r>
+              <a:rPr lang="en-US" sz="1400" b="0" dirty="0"/>
+              <a:t>Để trên màn hình khi học viên rời phòng họp.</a:t>
             </a:r>
           </a:p>
         </p:txBody>
@@ -4735,31 +4487,25 @@
           <a:p>
             <a:r>
               <a:rPr lang="en-US" sz="1400" b="0" dirty="0"/>
-              <a:t>Ý chính: đề cương chi tiết là kế hoạch đầy đủ bằng văn bản, được viết và phê duyệt trước khi đưa người bệnh đầu tiên vào nghiên cứu. SPIRIT 2025 (Standard Protocol Items: Recommendations for Interventional Trials) là bảng kiểm quốc tế về nội dung đề cương thử nghiệm lâm sàng. Nghiên cứu quan sát cũng theo cùng logic.</a:t>
+              <a:t>Đề cương chi tiết là toàn bộ kế hoạch, được duyệt trước người bệnh đầu tiên. SPIRIT 2025 là bảng kiểm cho đề cương thử nghiệm.</a:t>
             </a:r>
           </a:p>
           <a:p>
             <a:r>
               <a:rPr lang="en-US" sz="1400" b="0" dirty="0"/>
-              <a:t>Đi qua bốn thẻ: ai và cái gì (trang bìa, đăng ký, nhóm, kinh phí), tại sao (Phần 1), như thế nào (Phần 2 và 3), bảo vệ và chia sẻ (Phần 4, hôm nay). PICO = Đối tượng, Can thiệp hoặc phơi nhiễm, So sánh, Kết cục.</a:t>
+              <a:t>Đi qua bốn thẻ: đó chính là bốn phần của đề cương.</a:t>
             </a:r>
           </a:p>
           <a:p>
             <a:r>
               <a:rPr lang="en-US" sz="1400" b="0" dirty="0"/>
-              <a:t>Mọi thay đổi sau khi phê duyệt phải là sửa đổi chính thức, được duyệt trước khi áp dụng, không lặng lẽ thay đổi.</a:t>
+              <a:t>Bài 1 đăng ký đề cương và SAP trước người bệnh đầu tiên (NCT04947904).</a:t>
             </a:r>
           </a:p>
           <a:p>
             <a:r>
               <a:rPr lang="en-US" sz="1400" b="0" dirty="0"/>
-              <a:t>Ví dụ xuyên suốt: Bài 1 cho biết đề cương và kế hoạch phân tích thống kê đã đăng ký trên ClinicalTrials.gov (NCT04947904) trước người bệnh đầu tiên. Nhờ vậy người đọc kiểm tra được tác giả có làm đúng kế hoạch hay không.</a:t>
-            </a:r>
-          </a:p>
-          <a:p>
-            <a:r>
-              <a:rPr lang="en-US" sz="1400" b="0" dirty="0"/>
-              <a:t>Bình chọn: phần nào trong đề cương của bạn đang yếu nhất? Thường là Như thế nào (cỡ mẫu hoặc kế hoạch phân tích). Trấn an: mẫu đề cương (Course/Templates/Research_Proposal_Template) theo đúng thứ tự này.</a:t>
+              <a:t>Thăm dò: phần nào trong đề cương của bạn yếu nhất? Kỳ vọng: cỡ mẫu hoặc kế hoạch phân tích.</a:t>
             </a:r>
           </a:p>
         </p:txBody>
@@ -4840,31 +4586,19 @@
           <a:p>
             <a:r>
               <a:rPr lang="en-US" sz="1400" b="0" dirty="0"/>
-              <a:t>Ý chính: Tuyên bố Helsinki (Hiệp hội Y khoa Thế giới, bản sửa đổi mới nhất tháng 10/2024) là nền tảng đạo đức của nghiên cứu trên người. Cốt lõi: quyền và lợi ích của từng người tham gia đặt trên mục tiêu tạo ra tri thức. Đề cương được một hội đồng đạo đức độc lập phê duyệt trước khi bắt đầu. Đồng ý tự nguyện, có hiểu biết. Rủi ro tối thiểu và có lý do chính đáng. Bảo vệ quyền riêng tư. Mọi nghiên cứu đăng ký trước người tham gia đầu tiên và công bố tất cả kết quả, kể cả âm tính hoặc chưa kết luận được.</a:t>
+              <a:t>Helsinki (2024): người tham gia đặt trên mục tiêu tạo tri thức mới. Phê duyệt đạo đức, đồng ý tự nguyện, quyền riêng tư, đăng ký, công bố mọi kết quả.</a:t>
             </a:r>
           </a:p>
           <a:p>
             <a:r>
               <a:rPr lang="en-US" sz="1400" b="0" dirty="0"/>
-              <a:t>Bản 2024 dùng từ 'người tham gia' thay cho 'đối tượng', tăng cường bảo vệ đối tượng dễ bị tổn thương và người không thể tự đồng ý, và nhấn mạnh liêm chính khoa học.</a:t>
+              <a:t>GCP (ICH E6(R3), 2025): tiêu chuẩn chất lượng cho thử nghiệm. Bài 1, một thử nghiệm học thuật, đã tuân theo.</a:t>
             </a:r>
           </a:p>
           <a:p>
             <a:r>
               <a:rPr lang="en-US" sz="1400" b="0" dirty="0"/>
-              <a:t>ICH E6(R3) Thực hành tốt thử nghiệm lâm sàng (ICH = Hội đồng Quốc tế về Hài hòa, thông qua tháng 1/2025) là chuẩn chất lượng quốc tế cho thử nghiệm lâm sàng. Tinh thần này áp dụng cho mọi nghiên cứu.</a:t>
-            </a:r>
-          </a:p>
-          <a:p>
-            <a:r>
-              <a:rPr lang="en-US" sz="1400" b="0" dirty="0"/>
-              <a:t>Quan niệm sai: 'GCP chỉ dành cho công ty dược'. Bài 1, một thử nghiệm ICU học thuật, ghi rõ phân tích theo ICH-GCP.</a:t>
-            </a:r>
-          </a:p>
-          <a:p>
-            <a:r>
-              <a:rPr lang="en-US" sz="1400" b="0" dirty="0"/>
-              <a:t>Bình chọn: điểm nào trong 12 điểm này khó thực hiện nhất ở khoa của bạn? Thường là dữ liệu tin cậy (hồ sơ thiếu) hoặc thời gian dành riêng cho nghiên cứu.</a:t>
+              <a:t>Thăm dò: điểm nào trong 12 điểm khó nhất ở khoa mình?</a:t>
             </a:r>
           </a:p>
         </p:txBody>
@@ -4945,37 +4679,25 @@
           <a:p>
             <a:r>
               <a:rPr lang="en-US" sz="1400" b="0" dirty="0"/>
-              <a:t>Đi qua sáu bước từ trái sang phải. Phần lớn cơ sở yêu cầu thẩm định khoa học hoặc cấp khoa trước, sau đó hồ sơ được nộp cho hội đồng đạo đức trong nghiên cứu y sinh học (còn gọi là IRB hoặc IEC).</a:t>
+              <a:t>Đi qua sáu bước. Phần lớn cơ sở yêu cầu duyệt khoa học trước.</a:t>
             </a:r>
           </a:p>
           <a:p>
             <a:r>
               <a:rPr lang="en-US" sz="1400" b="0" dirty="0"/>
-              <a:t>Hồ sơ gồm: đề cương, bản thông tin và phiếu đồng ý tham gia, phiếu thu thập dữ liệu (CRF), lý lịch nghiên cứu viên và chứng chỉ GCP, dự toán kinh phí và bảo hiểm khi cần.</a:t>
+              <a:t>Hội đồng quyết định hình thức xét duyệt, không phải bạn. Dự trù 1 đến 3 tháng.</a:t>
             </a:r>
           </a:p>
           <a:p>
             <a:r>
               <a:rPr lang="en-US" sz="1400" b="0" dirty="0"/>
-              <a:t>Các hình thức xét duyệt: một số nghiên cứu nguy cơ thấp được miễn hoặc xét duyệt rút gọn. Thử nghiệm và nghiên cứu có nguy cơ cao hơn mức tối thiểu được xét tại hội đồng toàn thể. Hội đồng quyết định hình thức, không phải nghiên cứu viên.</a:t>
+              <a:t>Hiểu lầm: 'thu trước, xin sau'. Hội đồng không thể duyệt hồi tố.</a:t>
             </a:r>
           </a:p>
           <a:p>
             <a:r>
               <a:rPr lang="en-US" sz="1400" b="0" dirty="0"/>
-              <a:t>Trong quá trình nghiên cứu: sửa đổi đề cương, báo cáo biến cố bất lợi, báo cáo tiến độ và báo cáo cuối đều gửi hội đồng.</a:t>
-            </a:r>
-          </a:p>
-          <a:p>
-            <a:r>
-              <a:rPr lang="en-US" sz="1400" b="0" dirty="0"/>
-              <a:t>Quan niệm sai cần sửa: 'cứ thu thập trước, xin phép sau'. Hội đồng không thể phê duyệt hồi tố và tạp chí sẽ từ chối bài.</a:t>
-            </a:r>
-          </a:p>
-          <a:p>
-            <a:r>
-              <a:rPr lang="en-US" sz="1400" b="0" dirty="0"/>
-              <a:t>Ví dụ xuyên suốt: Bài 1 ghi tên hội đồng và số phê duyệt trong phần Phương pháp. Bài 2 ghi số phê duyệt IRB trong phần Cam kết.</a:t>
+              <a:t>Bài 1 ghi số phê duyệt trong phần Phương pháp.</a:t>
             </a:r>
           </a:p>
         </p:txBody>
@@ -5056,37 +4778,25 @@
           <a:p>
             <a:r>
               <a:rPr lang="en-US" sz="1400" b="0" dirty="0"/>
-              <a:t>Ý chính: đăng ký đưa sự tồn tại, thiết kế và kết cục chính của nghiên cứu lên hồ sơ công khai trước khi đưa bất kỳ ai vào. Điều này ngăn việc giấu các nghiên cứu âm tính và đổi kết cục.</a:t>
+              <a:t>Đăng ký công khai nghiên cứu và kết cục chính trước khi có người tham gia.</a:t>
             </a:r>
           </a:p>
           <a:p>
             <a:r>
               <a:rPr lang="en-US" sz="1400" b="0" dirty="0"/>
-              <a:t>Thử nghiệm lâm sàng: bắt buộc đăng ký. Các tạp chí theo ICMJE (Ủy ban Quốc tế các Biên tập viên Tạp chí Y khoa) không đăng thử nghiệm không được đăng ký trước người tham gia đầu tiên, và nhiều quốc gia quy định bằng luật. Dùng ClinicalTrials.gov hoặc một cơ sở đăng ký chính thức khác của WHO. Cổng WHO ICTRP (Nền tảng Đăng ký Thử nghiệm Lâm sàng Quốc tế) tra cứu tất cả cùng lúc. Đó là cổng tìm kiếm, không phải nơi đăng ký.</a:t>
+              <a:t>Thử nghiệm: bắt buộc. Tổng quan: PROSPERO. Quan sát: khuyến khích.</a:t>
             </a:r>
           </a:p>
           <a:p>
             <a:r>
               <a:rPr lang="en-US" sz="1400" b="0" dirty="0"/>
-              <a:t>Tổng quan hệ thống: đăng ký đề cương trên PROSPERO trước khi trích xuất dữ liệu. Nhiều tạp chí yêu cầu.</a:t>
+              <a:t>Bài 1: đăng ký ngày 1/7/2021, người bệnh đầu tiên tháng 9/2021.</a:t>
             </a:r>
           </a:p>
           <a:p>
             <a:r>
               <a:rPr lang="en-US" sz="1400" b="0" dirty="0"/>
-              <a:t>Nghiên cứu quan sát: khuyến khích chứ chưa bắt buộc. Tuyên bố Helsinki yêu cầu mọi nghiên cứu trên người được đăng ký.</a:t>
-            </a:r>
-          </a:p>
-          <a:p>
-            <a:r>
-              <a:rPr lang="en-US" sz="1400" b="0" dirty="0"/>
-              <a:t>Ví dụ xuyên suốt: Bài 1 đăng ký NCT04947904 ngày 1/7/2021, người bệnh đầu tiên vào tháng 9/2021, tức là đăng ký tiến cứu. Số đăng ký có ngay trong phần tóm tắt.</a:t>
-            </a:r>
-          </a:p>
-          <a:p>
-            <a:r>
-              <a:rPr lang="en-US" sz="1400" b="0" dirty="0"/>
-              <a:t>Hỏi (mời hai ba người trả lời, bật micro): nghiên cứu của bạn có cần đăng ký không? Đáp án: thử nghiệm thì có. Phần lớn đề cương thuần tập là 'khuyến khích'. Nếu còn thời gian, có câu bình chọn bốn tình huống trong phần Slide bổ sung.</a:t>
+              <a:t>Hỏi: nghiên cứu của bạn có cần đăng ký không?</a:t>
             </a:r>
           </a:p>
         </p:txBody>
@@ -5167,31 +4877,19 @@
           <a:p>
             <a:r>
               <a:rPr lang="en-US" sz="1400" b="0" dirty="0"/>
-              <a:t>Ý chính: sự đồng ý hợp lệ cần đủ bốn yếu tố: thông tin, hiểu biết, tự nguyện và có văn bản.</a:t>
+              <a:t>Đồng ý hợp lệ cần đủ bốn: thông tin, hiểu, tự nguyện, có văn bản.</a:t>
             </a:r>
           </a:p>
           <a:p>
             <a:r>
               <a:rPr lang="en-US" sz="1400" b="0" dirty="0"/>
-              <a:t>Người bệnh thường hỏi lại điều dưỡng và các thành viên khác trong nhóm 'tôi đã ký cái gì?', nên đây là việc của mọi người, không riêng nghiên cứu viên chính.</a:t>
+              <a:t>Trong Bài 1, hai người bệnh nhóm chứng rút lui và không được phân tích: quyền của họ được tôn trọng.</a:t>
             </a:r>
           </a:p>
           <a:p>
             <a:r>
               <a:rPr lang="en-US" sz="1400" b="0" dirty="0"/>
-              <a:t>Rút lui: người tham gia có thể rời nghiên cứu bất cứ lúc nào, không cần nêu lý do và không ảnh hưởng đến điều trị. Ví dụ xuyên suốt: trong Bài 1, hai người bệnh nhóm chứng rút lại sự đồng ý và không được đưa vào phân tích. Quyền đó được tôn trọng, và vì vậy thử nghiệm phân tích 48 trên 50 người.</a:t>
-            </a:r>
-          </a:p>
-          <a:p>
-            <a:r>
-              <a:rPr lang="en-US" sz="1400" b="0" dirty="0"/>
-              <a:t>Lỗi thường gặp: phiếu đồng ý viết như văn bản học thuật, bằng ngôn ngữ mà gia đình không đọc thành thạo. Hãy xin mẫu của hội đồng (có một mẫu trong Course/Templates/Informed_Consent_Template).</a:t>
-            </a:r>
-          </a:p>
-          <a:p>
-            <a:r>
-              <a:rPr lang="en-US" sz="1400" b="0" dirty="0"/>
-              <a:t>Hỏi (mời hai ba người trả lời, bật micro): trong nghiên cứu của bạn, ai sẽ xin sự đồng ý và vào lúc nào? Đáp án mong đợi: một thành viên đã được đào tạo, nếu được thì không phải bác sĩ điều trị đang chịu áp lực thời gian.</a:t>
+              <a:t>Hỏi: ai lấy đồng ý trong nghiên cứu của bạn, và khi nào? Kỳ vọng: một thành viên đã được tập huấn, không phải bác sĩ điều trị đang chịu áp lực thời gian.</a:t>
             </a:r>
           </a:p>
         </p:txBody>
@@ -8265,14 +7963,14 @@
               <a:buNone/>
             </a:pPr>
             <a:r>
-              <a:rPr lang="en-US" sz="2200" b="1" dirty="0">
+              <a:rPr lang="en-US" sz="2600" b="1" dirty="0">
                 <a:solidFill>
                   <a:srgbClr val="0D7377"/>
                 </a:solidFill>
                 <a:latin typeface="Arial"/>
                 <a:cs typeface="Arial"/>
               </a:rPr>
-              <a:t>Buổi 7 · Bảo vệ &amp; viết: đạo đức, liêm chính, Phương pháp và Kết quả</a:t>
+              <a:t>Buổi 7 · Bảo vệ &amp; viết: đạo đức, liêm chính và phần Kết quả</a:t>
             </a:r>
           </a:p>
         </p:txBody>
@@ -8441,7 +8139,7 @@
                 <a:latin typeface="Arial"/>
                 <a:cs typeface="Arial"/>
               </a:rPr>
-              <a:t>21:00  7.3  Viết bài báo (I): Phương pháp, Kết quả, bảng, STROBE</a:t>
+              <a:t>21:00  7.3  Viết bài báo (I): phần Kết quả, bảng, STROBE</a:t>
             </a:r>
           </a:p>
           <a:p>
@@ -8460,7 +8158,7 @@
                 <a:latin typeface="Arial"/>
                 <a:cs typeface="Arial"/>
               </a:rPr>
-              <a:t>21:35  Thực hành bản thảo 1: cả lớp cùng viết, rồi mỗi người tự viết</a:t>
+              <a:t>21:35  Thực hành bản thảo 1: phần Kết quả, cả lớp cùng viết rồi mỗi người tự viết</a:t>
             </a:r>
           </a:p>
         </p:txBody>
@@ -18315,7 +18013,7 @@
                 <a:latin typeface="Arial"/>
                 <a:cs typeface="Arial"/>
               </a:rPr>
-              <a:t>Viết bài báo (I): Phương pháp và Kết quả</a:t>
+              <a:t>Viết bài báo (I): phần Kết quả</a:t>
             </a:r>
           </a:p>
           <a:p>
@@ -18333,7 +18031,7 @@
                 <a:latin typeface="Arial"/>
                 <a:cs typeface="Arial"/>
               </a:rPr>
-              <a:t>Viết những gì đã làm và đã thấy, không hơn</a:t>
+              <a:t>Báo cáo những gì đã thấy, không hơn</a:t>
             </a:r>
           </a:p>
         </p:txBody>
@@ -19397,7 +19095,7 @@
         <p:spPr>
           <a:xfrm>
             <a:off x="457200" y="1100000"/>
-            <a:ext cx="11277600" cy="480000"/>
+            <a:ext cx="11277600" cy="626796"/>
           </a:xfrm>
           <a:prstGeom prst="rect">
             <a:avLst/>
@@ -19422,7 +19120,7 @@
                 <a:latin typeface="Arial"/>
                 <a:cs typeface="Arial"/>
               </a:rPr>
-              <a:t>Nếu đồng nghiệp không làm lại được nghiên cứu từ phần Phương pháp, hãy thêm chi tiết.</a:t>
+              <a:t>Không bắt buộc trong bản thảo của bạn. Nếu đồng nghiệp không làm lại được nghiên cứu từ phần này, hãy thêm chi tiết.</a:t>
             </a:r>
           </a:p>
         </p:txBody>
@@ -19435,7 +19133,7 @@
         </p:nvSpPr>
         <p:spPr>
           <a:xfrm>
-            <a:off x="457200" y="1871973"/>
+            <a:off x="457200" y="1969837"/>
             <a:ext cx="2669400" cy="640000"/>
           </a:xfrm>
           <a:prstGeom prst="rect">
@@ -19478,7 +19176,7 @@
         </p:nvSpPr>
         <p:spPr>
           <a:xfrm>
-            <a:off x="457200" y="2511973"/>
+            <a:off x="457200" y="2609837"/>
             <a:ext cx="2669400" cy="2314080"/>
           </a:xfrm>
           <a:prstGeom prst="rect">
@@ -19590,7 +19288,7 @@
         </p:nvSpPr>
         <p:spPr>
           <a:xfrm>
-            <a:off x="3326600" y="1871973"/>
+            <a:off x="3326600" y="1969837"/>
             <a:ext cx="2669400" cy="640000"/>
           </a:xfrm>
           <a:prstGeom prst="rect">
@@ -19633,7 +19331,7 @@
         </p:nvSpPr>
         <p:spPr>
           <a:xfrm>
-            <a:off x="3326600" y="2511973"/>
+            <a:off x="3326600" y="2609837"/>
             <a:ext cx="2669400" cy="2314080"/>
           </a:xfrm>
           <a:prstGeom prst="rect">
@@ -19724,7 +19422,7 @@
         </p:nvSpPr>
         <p:spPr>
           <a:xfrm>
-            <a:off x="6196000" y="1871973"/>
+            <a:off x="6196000" y="1969837"/>
             <a:ext cx="2669400" cy="640000"/>
           </a:xfrm>
           <a:prstGeom prst="rect">
@@ -19767,7 +19465,7 @@
         </p:nvSpPr>
         <p:spPr>
           <a:xfrm>
-            <a:off x="6196000" y="2511973"/>
+            <a:off x="6196000" y="2609837"/>
             <a:ext cx="2669400" cy="2314080"/>
           </a:xfrm>
           <a:prstGeom prst="rect">
@@ -19858,7 +19556,7 @@
         </p:nvSpPr>
         <p:spPr>
           <a:xfrm>
-            <a:off x="9065400" y="1871973"/>
+            <a:off x="9065400" y="1969837"/>
             <a:ext cx="2669400" cy="640000"/>
           </a:xfrm>
           <a:prstGeom prst="rect">
@@ -19901,7 +19599,7 @@
         </p:nvSpPr>
         <p:spPr>
           <a:xfrm>
-            <a:off x="9065400" y="2511973"/>
+            <a:off x="9065400" y="2609837"/>
             <a:ext cx="2669400" cy="2314080"/>
           </a:xfrm>
           <a:prstGeom prst="rect">
@@ -20223,7 +19921,7 @@
                 <a:latin typeface="Arial"/>
                 <a:cs typeface="Arial"/>
               </a:rPr>
-              <a:t>Ví dụ mẫu: Phương pháp cho FLUID-ICU câu hỏi 1</a:t>
+              <a:t>Không bắt buộc: Phương pháp cho FLUID-ICU câu hỏi 1</a:t>
             </a:r>
           </a:p>
         </p:txBody>
@@ -20599,7 +20297,7 @@
                 <a:latin typeface="Arial"/>
                 <a:cs typeface="Arial"/>
               </a:rPr>
-              <a:t>Ví dụ mẫu: đoạn phân tích thống kê</a:t>
+              <a:t>Không bắt buộc: đoạn phân tích thống kê</a:t>
             </a:r>
           </a:p>
         </p:txBody>
@@ -21055,7 +20753,7 @@
         </p:nvSpPr>
         <p:spPr>
           <a:xfrm>
-            <a:off x="457200" y="1914275"/>
+            <a:off x="457200" y="1821670"/>
             <a:ext cx="3625866" cy="640000"/>
           </a:xfrm>
           <a:prstGeom prst="rect">
@@ -21098,8 +20796,8 @@
         </p:nvSpPr>
         <p:spPr>
           <a:xfrm>
-            <a:off x="457200" y="2554275"/>
-            <a:ext cx="3625866" cy="2480767"/>
+            <a:off x="457200" y="2461670"/>
+            <a:ext cx="3625866" cy="2758580"/>
           </a:xfrm>
           <a:prstGeom prst="rect">
             <a:avLst/>
@@ -21189,7 +20887,7 @@
         </p:nvSpPr>
         <p:spPr>
           <a:xfrm>
-            <a:off x="4283066" y="1914275"/>
+            <a:off x="4283066" y="1821670"/>
             <a:ext cx="3625866" cy="640000"/>
           </a:xfrm>
           <a:prstGeom prst="rect">
@@ -21219,7 +20917,7 @@
                 <a:latin typeface="Arial"/>
                 <a:cs typeface="Arial"/>
               </a:rPr>
-              <a:t>Sản phẩm 2: bản thảo của bạn</a:t>
+              <a:t>Sản phẩm 2: phần Kết quả của bạn</a:t>
             </a:r>
           </a:p>
         </p:txBody>
@@ -21232,8 +20930,8 @@
         </p:nvSpPr>
         <p:spPr>
           <a:xfrm>
-            <a:off x="4283066" y="2554275"/>
-            <a:ext cx="3625866" cy="2480767"/>
+            <a:off x="4283066" y="2461670"/>
+            <a:ext cx="3625866" cy="2758580"/>
           </a:xfrm>
           <a:prstGeom prst="rect">
             <a:avLst/>
@@ -21310,7 +21008,7 @@
                 <a:latin typeface="Arial"/>
                 <a:cs typeface="Arial"/>
               </a:rPr>
-              <a:t>Hôm nay: Phương pháp, Kết quả</a:t>
+              <a:t>Hôm nay: phần Kết quả, viết trực tiếp trên Q1</a:t>
             </a:r>
           </a:p>
           <a:p>
@@ -21331,7 +21029,7 @@
                 <a:latin typeface="Arial"/>
                 <a:cs typeface="Arial"/>
               </a:rPr>
-              <a:t>Buổi 8: Đặt vấn đề, Bàn luận, Tóm tắt, Tiêu đề</a:t>
+              <a:t>Buổi 8: hoàn thiện. Các phần khác không bắt buộc</a:t>
             </a:r>
           </a:p>
         </p:txBody>
@@ -21344,7 +21042,7 @@
         </p:nvSpPr>
         <p:spPr>
           <a:xfrm>
-            <a:off x="8108932" y="1914275"/>
+            <a:off x="8108932" y="1821670"/>
             <a:ext cx="3625866" cy="640000"/>
           </a:xfrm>
           <a:prstGeom prst="rect">
@@ -21387,8 +21085,8 @@
         </p:nvSpPr>
         <p:spPr>
           <a:xfrm>
-            <a:off x="8108932" y="2554275"/>
-            <a:ext cx="3625866" cy="2480767"/>
+            <a:off x="8108932" y="2461670"/>
+            <a:ext cx="3625866" cy="2758580"/>
           </a:xfrm>
           <a:prstGeom prst="rect">
             <a:avLst/>
@@ -21465,7 +21163,7 @@
                 <a:latin typeface="Arial"/>
                 <a:cs typeface="Arial"/>
               </a:rPr>
-              <a:t>Tệp PDF trong Course/Papers</a:t>
+              <a:t>Tệp PDF gửi qua email</a:t>
             </a:r>
           </a:p>
         </p:txBody>
@@ -21520,7 +21218,7 @@
                 <a:latin typeface="Arial"/>
                 <a:cs typeface="Arial"/>
               </a:rPr>
-              <a:t>Trước giải lao: Đề cương Phần 4. Sau giải lao: Phương pháp và Kết quả.</a:t>
+              <a:t>Trước giải lao: Đề cương Phần 4. Sau giải lao: phần Kết quả.</a:t>
             </a:r>
           </a:p>
         </p:txBody>
@@ -24357,7 +24055,7 @@
                 <a:latin typeface="Arial"/>
                 <a:cs typeface="Arial"/>
               </a:rPr>
-              <a:t>Viết với bảng kiểm STROBE mở bên cạnh và đánh dấu từng mục khi viết.</a:t>
+              <a:t>Phần Kết quả của bạn: mục 13 đến 17. Phương pháp (không bắt buộc): mục 4 đến 12.</a:t>
             </a:r>
           </a:p>
         </p:txBody>
@@ -25133,7 +24831,7 @@
                 <a:latin typeface="Arial"/>
                 <a:cs typeface="Arial"/>
               </a:rPr>
-              <a:t>Viết Phương pháp và Kết quả: cả lớp cùng viết, rồi mỗi người tự viết</a:t>
+              <a:t>Viết phần Kết quả: cả lớp cùng viết, rồi mỗi người tự viết</a:t>
             </a:r>
           </a:p>
           <a:p>
@@ -25151,7 +24849,7 @@
                 <a:latin typeface="Arial"/>
                 <a:cs typeface="Arial"/>
               </a:rPr>
-              <a:t>30 phút cả lớp cùng soạn Q1, rồi 15 phút cho câu hỏi của riêng bạn</a:t>
+              <a:t>30 phút cả lớp cùng viết Q1, rồi 15 phút cho câu hỏi của riêng bạn</a:t>
             </a:r>
           </a:p>
         </p:txBody>
@@ -25464,7 +25162,7 @@
                 <a:latin typeface="Arial"/>
                 <a:cs typeface="Arial"/>
               </a:rPr>
-              <a:t>Phương pháp (15 phút): khi được mời, bạn nói câu mình đề xuất. Giảng viên gõ câu tốt nhất</a:t>
+              <a:t>Người tham gia và Bảng 1 (10 phút): khi được mời, bạn đề xuất từng câu</a:t>
             </a:r>
           </a:p>
           <a:p>
@@ -25489,7 +25187,7 @@
                 <a:latin typeface="Arial"/>
                 <a:cs typeface="Arial"/>
               </a:rPr>
-              <a:t>Kết quả (12 phút): đối tượng, câu về Bảng 1, OR thô và hiệu chỉnh</a:t>
+              <a:t>Kết quả chính (12 phút): số tử vong mỗi nhóm, OR thô và hiệu chỉnh kèm KTC 95%</a:t>
             </a:r>
           </a:p>
           <a:p>
@@ -25514,6 +25212,31 @@
                 <a:latin typeface="Arial"/>
                 <a:cs typeface="Arial"/>
               </a:rPr>
+              <a:t>Các phân tích khác (5 phút): mô hình Cox và quy gán đa bội</a:t>
+            </a:r>
+          </a:p>
+          <a:p>
+            <a:pPr marL="380000" indent="-380000" algn="l">
+              <a:lnSpc>
+                <a:spcPct val="104000"/>
+              </a:lnSpc>
+              <a:spcBef>
+                <a:spcPts val="450"/>
+              </a:spcBef>
+              <a:buClr>
+                <a:srgbClr val="0D7377"/>
+              </a:buClr>
+              <a:buFont typeface="Arial"/>
+              <a:buChar char="•"/>
+            </a:pPr>
+            <a:r>
+              <a:rPr lang="en-US" sz="1650" dirty="0">
+                <a:solidFill>
+                  <a:srgbClr val="000000"/>
+                </a:solidFill>
+                <a:latin typeface="Arial"/>
+                <a:cs typeface="Arial"/>
+              </a:rPr>
               <a:t>Kiểm số (3 phút): một học viên đọc đối chiếu từng con số với gói kết quả</a:t>
             </a:r>
           </a:p>
@@ -25580,7 +25303,7 @@
                 <a:latin typeface="Arial"/>
                 <a:cs typeface="Arial"/>
               </a:rPr>
-              <a:t>Gói kết quả Q1 (gửi trước buổi học)</a:t>
+              <a:t>Gói kết quả Q1</a:t>
             </a:r>
           </a:p>
           <a:p>
@@ -25601,7 +25324,7 @@
                 <a:latin typeface="Arial"/>
                 <a:cs typeface="Arial"/>
               </a:rPr>
-              <a:t>Mẫu bản thảo (Course/Templates)</a:t>
+              <a:t>Mẫu bản thảo</a:t>
             </a:r>
           </a:p>
           <a:p>
@@ -25622,7 +25345,7 @@
                 <a:latin typeface="Arial"/>
                 <a:cs typeface="Arial"/>
               </a:rPr>
-              <a:t>Mục STROBE 4-17</a:t>
+              <a:t>Mục STROBE 13-17</a:t>
             </a:r>
           </a:p>
           <a:p>
@@ -25700,7 +25423,7 @@
                 <a:latin typeface="Arial"/>
                 <a:cs typeface="Arial"/>
               </a:rPr>
-              <a:t>Bản nháp của lớp cho Phương pháp và Kết quả Q1, gửi dạng PDF sau buổi học</a:t>
+              <a:t>Phần Kết quả Q1 của lớp, gửi dạng PDF sau buổi học</a:t>
             </a:r>
           </a:p>
         </p:txBody>
@@ -25988,7 +25711,7 @@
                 <a:latin typeface="Arial"/>
                 <a:cs typeface="Arial"/>
               </a:rPr>
-              <a:t>Mở gói kết quả phân tích của câu hỏi của bạn (Q1 đến Q5)</a:t>
+              <a:t>Mở gói kết quả của câu hỏi của bạn (Q1 đến Q5)</a:t>
             </a:r>
           </a:p>
           <a:p>
@@ -26038,7 +25761,7 @@
                 <a:latin typeface="Arial"/>
                 <a:cs typeface="Arial"/>
               </a:rPr>
-              <a:t>Bắt đầu với Phương pháp: thiết kế, đối tượng, biến số, thống kê</a:t>
+              <a:t>Bắt đầu với người tham gia và câu về Bảng 1</a:t>
             </a:r>
           </a:p>
           <a:p>
@@ -26063,7 +25786,7 @@
                 <a:latin typeface="Arial"/>
                 <a:cs typeface="Arial"/>
               </a:rPr>
-              <a:t>Có câu hỏi: giơ tay hoặc dùng khung chat. Giảng viên trả lời</a:t>
+              <a:t>Có câu hỏi: giơ tay hoặc dùng khung chat</a:t>
             </a:r>
           </a:p>
           <a:p>
@@ -26088,7 +25811,7 @@
                 <a:latin typeface="Arial"/>
                 <a:cs typeface="Arial"/>
               </a:rPr>
-              <a:t>Ở nhà: hoàn thành Phương pháp và Kết quả, Bảng 1 và một hình hoặc bảng</a:t>
+              <a:t>Ở nhà: hoàn thành phần Kết quả, Bảng 1 và một bảng hoặc hình chính</a:t>
             </a:r>
           </a:p>
         </p:txBody>
@@ -26295,7 +26018,7 @@
                 <a:latin typeface="Arial"/>
                 <a:cs typeface="Arial"/>
               </a:rPr>
-              <a:t>Phương pháp và Kết quả của bạn (khoảng 600 từ), gửi qua email trước Buổi 8</a:t>
+              <a:t>Phần Kết quả của bạn, hạn 23:59 ngày học Buổi 8</a:t>
             </a:r>
           </a:p>
         </p:txBody>
@@ -27328,7 +27051,7 @@
                 <a:latin typeface="Arial"/>
                 <a:cs typeface="Arial"/>
               </a:rPr>
-              <a:t>Tổng kết, câu hỏi cuối buổi và bài về nhà</a:t>
+              <a:t>Bình duyệt: người bình duyệt và các hạn nộp</a:t>
             </a:r>
           </a:p>
         </p:txBody>
@@ -27361,59 +27084,240 @@
           </a:p>
         </p:txBody>
       </p:sp>
-      <p:sp>
-        <p:nvSpPr>
-          <p:cNvPr id="50" name="Banner"/>
-          <p:cNvSpPr/>
-          <p:nvPr/>
-        </p:nvSpPr>
-        <p:spPr>
-          <a:xfrm>
-            <a:off x="457200" y="1120000"/>
-            <a:ext cx="11277600" cy="470000"/>
-          </a:xfrm>
-          <a:prstGeom prst="rect">
-            <a:avLst/>
-          </a:prstGeom>
-          <a:solidFill>
-            <a:srgbClr val="1F5C7A"/>
-          </a:solidFill>
-          <a:ln>
-            <a:noFill/>
-          </a:ln>
-        </p:spPr>
-        <p:txBody>
-          <a:bodyPr wrap="square" lIns="182880" tIns="45720" rIns="182880" bIns="45720" rtlCol="0" anchor="ctr">
-            <a:normAutofit/>
-          </a:bodyPr>
-          <a:lstStyle/>
-          <a:p>
-            <a:pPr marL="0" indent="0" algn="l">
-              <a:buNone/>
-            </a:pPr>
-            <a:r>
-              <a:rPr lang="en-US" sz="1500" b="1" dirty="0">
-                <a:solidFill>
-                  <a:srgbClr val="FFFFFF"/>
-                </a:solidFill>
-                <a:latin typeface="Arial"/>
-                <a:cs typeface="Arial"/>
-              </a:rPr>
-              <a:t>THẢO LUẬN   |   7 phút</a:t>
-            </a:r>
-          </a:p>
-        </p:txBody>
-      </p:sp>
-      <p:sp>
-        <p:nvSpPr>
-          <p:cNvPr id="51" name="Steps"/>
+      <p:graphicFrame>
+        <p:nvGraphicFramePr>
+          <p:cNvPr id="30" name="Table"/>
+          <p:cNvGraphicFramePr/>
+          <p:nvPr/>
+        </p:nvGraphicFramePr>
+        <p:xfrm>
+          <a:off x="457200" y="1867110"/>
+          <a:ext cx="11277600" cy="2085920"/>
+        </p:xfrm>
+        <a:graphic>
+          <a:graphicData uri="http://schemas.openxmlformats.org/drawingml/2006/table">
+            <a:tbl>
+              <a:tblPr firstRow="1" bandRow="1">
+                <a:tableStyleId>{5C22544A-7EE6-4342-B048-85BDC9FD1C3A}</a:tableStyleId>
+              </a:tblPr>
+              <a:tblGrid>
+                <a:gridCol w="5638800"/>
+                <a:gridCol w="5638800"/>
+              </a:tblGrid>
+              <a:tr h="380000">
+                <a:tc>
+                  <a:txBody>
+                    <a:bodyPr/>
+                    <a:lstStyle/>
+                    <a:p>
+                      <a:pPr algn="l"/>
+                      <a:r>
+                        <a:rPr lang="en-US" sz="1500" b="1" dirty="0">
+                          <a:solidFill>
+                            <a:srgbClr val="FFFFFF"/>
+                          </a:solidFill>
+                          <a:latin typeface="Arial"/>
+                          <a:cs typeface="Arial"/>
+                        </a:rPr>
+                        <a:t>Khi nào</a:t>
+                      </a:r>
+                    </a:p>
+                  </a:txBody>
+                  <a:tcPr marL="73152" marR="73152" marT="45720" marB="45720" anchor="ctr">
+                    <a:solidFill>
+                      <a:srgbClr val="0D7377"/>
+                    </a:solidFill>
+                  </a:tcPr>
+                </a:tc>
+                <a:tc>
+                  <a:txBody>
+                    <a:bodyPr/>
+                    <a:lstStyle/>
+                    <a:p>
+                      <a:pPr algn="l"/>
+                      <a:r>
+                        <a:rPr lang="en-US" sz="1500" b="1" dirty="0">
+                          <a:solidFill>
+                            <a:srgbClr val="FFFFFF"/>
+                          </a:solidFill>
+                          <a:latin typeface="Arial"/>
+                          <a:cs typeface="Arial"/>
+                        </a:rPr>
+                        <a:t>Bạn làm gì</a:t>
+                      </a:r>
+                    </a:p>
+                  </a:txBody>
+                  <a:tcPr marL="73152" marR="73152" marT="45720" marB="45720" anchor="ctr">
+                    <a:solidFill>
+                      <a:srgbClr val="0D7377"/>
+                    </a:solidFill>
+                  </a:tcPr>
+                </a:tc>
+              </a:tr>
+              <a:tr h="568640">
+                <a:tc>
+                  <a:txBody>
+                    <a:bodyPr/>
+                    <a:lstStyle/>
+                    <a:p>
+                      <a:pPr algn="l"/>
+                      <a:r>
+                        <a:rPr lang="en-US" sz="1500" dirty="0">
+                          <a:solidFill>
+                            <a:srgbClr val="000000"/>
+                          </a:solidFill>
+                          <a:latin typeface="Arial"/>
+                          <a:cs typeface="Arial"/>
+                        </a:rPr>
+                        <a:t>23:59, thứ Bảy 19/12 (Buổi 8)</a:t>
+                      </a:r>
+                    </a:p>
+                  </a:txBody>
+                  <a:tcPr marL="73152" marR="73152" marT="45720" marB="45720" anchor="ctr">
+                    <a:solidFill>
+                      <a:srgbClr val="FFFFFF"/>
+                    </a:solidFill>
+                  </a:tcPr>
+                </a:tc>
+                <a:tc>
+                  <a:txBody>
+                    <a:bodyPr/>
+                    <a:lstStyle/>
+                    <a:p>
+                      <a:pPr algn="l"/>
+                      <a:r>
+                        <a:rPr lang="en-US" sz="1500" dirty="0">
+                          <a:solidFill>
+                            <a:srgbClr val="000000"/>
+                          </a:solidFill>
+                          <a:latin typeface="Arial"/>
+                          <a:cs typeface="Arial"/>
+                        </a:rPr>
+                        <a:t>Gửi email phần Kết quả cho người bình duyệt của bạn và trưởng khóa học</a:t>
+                      </a:r>
+                    </a:p>
+                  </a:txBody>
+                  <a:tcPr marL="73152" marR="73152" marT="45720" marB="45720" anchor="ctr">
+                    <a:solidFill>
+                      <a:srgbClr val="FFFFFF"/>
+                    </a:solidFill>
+                  </a:tcPr>
+                </a:tc>
+              </a:tr>
+              <a:tr h="568640">
+                <a:tc>
+                  <a:txBody>
+                    <a:bodyPr/>
+                    <a:lstStyle/>
+                    <a:p>
+                      <a:pPr algn="l"/>
+                      <a:r>
+                        <a:rPr lang="en-US" sz="1500" dirty="0">
+                          <a:solidFill>
+                            <a:srgbClr val="000000"/>
+                          </a:solidFill>
+                          <a:latin typeface="Arial"/>
+                          <a:cs typeface="Arial"/>
+                        </a:rPr>
+                        <a:t>Thứ Bảy 2/1</a:t>
+                      </a:r>
+                    </a:p>
+                  </a:txBody>
+                  <a:tcPr marL="73152" marR="73152" marT="45720" marB="45720" anchor="ctr">
+                    <a:solidFill>
+                      <a:srgbClr val="F5F9FA"/>
+                    </a:solidFill>
+                  </a:tcPr>
+                </a:tc>
+                <a:tc>
+                  <a:txBody>
+                    <a:bodyPr/>
+                    <a:lstStyle/>
+                    <a:p>
+                      <a:pPr algn="l"/>
+                      <a:r>
+                        <a:rPr lang="en-US" sz="1500" dirty="0">
+                          <a:solidFill>
+                            <a:srgbClr val="000000"/>
+                          </a:solidFill>
+                          <a:latin typeface="Arial"/>
+                          <a:cs typeface="Arial"/>
+                        </a:rPr>
+                        <a:t>Người bình duyệt gửi email bản bình duyệt cho tác giả và trưởng khóa học</a:t>
+                      </a:r>
+                    </a:p>
+                  </a:txBody>
+                  <a:tcPr marL="73152" marR="73152" marT="45720" marB="45720" anchor="ctr">
+                    <a:solidFill>
+                      <a:srgbClr val="F5F9FA"/>
+                    </a:solidFill>
+                  </a:tcPr>
+                </a:tc>
+              </a:tr>
+              <a:tr h="568640">
+                <a:tc>
+                  <a:txBody>
+                    <a:bodyPr/>
+                    <a:lstStyle/>
+                    <a:p>
+                      <a:pPr algn="l"/>
+                      <a:r>
+                        <a:rPr lang="en-US" sz="1500" dirty="0">
+                          <a:solidFill>
+                            <a:srgbClr val="000000"/>
+                          </a:solidFill>
+                          <a:latin typeface="Arial"/>
+                          <a:cs typeface="Arial"/>
+                        </a:rPr>
+                        <a:t>Thứ Bảy 30/1</a:t>
+                      </a:r>
+                    </a:p>
+                  </a:txBody>
+                  <a:tcPr marL="73152" marR="73152" marT="45720" marB="45720" anchor="ctr">
+                    <a:solidFill>
+                      <a:srgbClr val="FFFFFF"/>
+                    </a:solidFill>
+                  </a:tcPr>
+                </a:tc>
+                <a:tc>
+                  <a:txBody>
+                    <a:bodyPr/>
+                    <a:lstStyle/>
+                    <a:p>
+                      <a:pPr algn="l"/>
+                      <a:r>
+                        <a:rPr lang="en-US" sz="1500" dirty="0">
+                          <a:solidFill>
+                            <a:srgbClr val="000000"/>
+                          </a:solidFill>
+                          <a:latin typeface="Arial"/>
+                          <a:cs typeface="Arial"/>
+                        </a:rPr>
+                        <a:t>Gửi email phần Kết quả đã sửa và thư phản hồi cho trưởng khóa học</a:t>
+                      </a:r>
+                    </a:p>
+                  </a:txBody>
+                  <a:tcPr marL="73152" marR="73152" marT="45720" marB="45720" anchor="ctr">
+                    <a:solidFill>
+                      <a:srgbClr val="FFFFFF"/>
+                    </a:solidFill>
+                  </a:tcPr>
+                </a:tc>
+              </a:tr>
+            </a:tbl>
+          </a:graphicData>
+        </a:graphic>
+      </p:graphicFrame>
+      <p:sp>
+        <p:nvSpPr>
+          <p:cNvPr id="31" name="Caption"/>
           <p:cNvSpPr txBox="1"/>
           <p:nvPr/>
         </p:nvSpPr>
         <p:spPr>
           <a:xfrm>
-            <a:off x="457200" y="1720000"/>
-            <a:ext cx="6766560" cy="3510000"/>
+            <a:off x="457200" y="4043030"/>
+            <a:ext cx="11277600" cy="562750"/>
           </a:xfrm>
           <a:prstGeom prst="rect">
             <a:avLst/>
@@ -27427,293 +27331,18 @@
           <a:bodyPr wrap="square" lIns="91440" tIns="45720" rIns="91440" bIns="45720" rtlCol="0" anchor="t"/>
           <a:lstStyle/>
           <a:p>
-            <a:pPr marL="380000" indent="-380000" algn="l">
-              <a:lnSpc>
-                <a:spcPct val="104000"/>
-              </a:lnSpc>
-              <a:spcBef>
-                <a:spcPts val="450"/>
-              </a:spcBef>
-              <a:buClr>
-                <a:srgbClr val="1F5C7A"/>
-              </a:buClr>
-              <a:buFont typeface="Arial"/>
-              <a:buChar char="•"/>
-            </a:pPr>
-            <a:r>
-              <a:rPr lang="en-US" sz="1650" dirty="0">
-                <a:solidFill>
-                  <a:srgbClr val="000000"/>
-                </a:solidFill>
-                <a:latin typeface="Arial"/>
-                <a:cs typeface="Arial"/>
-              </a:rPr>
-              <a:t>Ba thông điệp mang về (bên phải)</a:t>
-            </a:r>
-          </a:p>
-          <a:p>
-            <a:pPr marL="380000" indent="-380000" algn="l">
-              <a:lnSpc>
-                <a:spcPct val="104000"/>
-              </a:lnSpc>
-              <a:spcBef>
-                <a:spcPts val="450"/>
-              </a:spcBef>
-              <a:buClr>
-                <a:srgbClr val="1F5C7A"/>
-              </a:buClr>
-              <a:buFont typeface="Arial"/>
-              <a:buChar char="•"/>
-            </a:pPr>
-            <a:r>
-              <a:rPr lang="en-US" sz="1650" dirty="0">
-                <a:solidFill>
-                  <a:srgbClr val="000000"/>
-                </a:solidFill>
-                <a:latin typeface="Arial"/>
-                <a:cs typeface="Arial"/>
-              </a:rPr>
-              <a:t>Câu hỏi cuối buổi trong khung chat: 'Ai đồng ý cho người bệnh sốc nhiễm khuẩn đang an thần, và khi nào?'</a:t>
-            </a:r>
-          </a:p>
-          <a:p>
-            <a:pPr marL="380000" indent="-380000" algn="l">
-              <a:lnSpc>
-                <a:spcPct val="104000"/>
-              </a:lnSpc>
-              <a:spcBef>
-                <a:spcPts val="450"/>
-              </a:spcBef>
-              <a:buClr>
-                <a:srgbClr val="1F5C7A"/>
-              </a:buClr>
-              <a:buFont typeface="Arial"/>
-              <a:buChar char="•"/>
-            </a:pPr>
-            <a:r>
-              <a:rPr lang="en-US" sz="1650" dirty="0">
-                <a:solidFill>
-                  <a:srgbClr val="000000"/>
-                </a:solidFill>
-                <a:latin typeface="Arial"/>
-                <a:cs typeface="Arial"/>
-              </a:rPr>
-              <a:t>Bài về nhà 1: viết Phần 4 cho đề cương của bạn</a:t>
-            </a:r>
-          </a:p>
-          <a:p>
-            <a:pPr marL="380000" indent="-380000" algn="l">
-              <a:lnSpc>
-                <a:spcPct val="104000"/>
-              </a:lnSpc>
-              <a:spcBef>
-                <a:spcPts val="450"/>
-              </a:spcBef>
-              <a:buClr>
-                <a:srgbClr val="1F5C7A"/>
-              </a:buClr>
-              <a:buFont typeface="Arial"/>
-              <a:buChar char="•"/>
-            </a:pPr>
-            <a:r>
-              <a:rPr lang="en-US" sz="1650" dirty="0">
-                <a:solidFill>
-                  <a:srgbClr val="000000"/>
-                </a:solidFill>
-                <a:latin typeface="Arial"/>
-                <a:cs typeface="Arial"/>
-              </a:rPr>
-              <a:t>Bài về nhà 2: hoàn thành bản nháp Phương pháp và Kết quả trước Buổi 8</a:t>
-            </a:r>
-          </a:p>
-          <a:p>
-            <a:pPr marL="380000" indent="-380000" algn="l">
-              <a:lnSpc>
-                <a:spcPct val="104000"/>
-              </a:lnSpc>
-              <a:spcBef>
-                <a:spcPts val="450"/>
-              </a:spcBef>
-              <a:buClr>
-                <a:srgbClr val="1F5C7A"/>
-              </a:buClr>
-              <a:buFont typeface="Arial"/>
-              <a:buChar char="•"/>
-            </a:pPr>
-            <a:r>
-              <a:rPr lang="en-US" sz="1650" dirty="0">
-                <a:solidFill>
-                  <a:srgbClr val="000000"/>
-                </a:solidFill>
-                <a:latin typeface="Arial"/>
-                <a:cs typeface="Arial"/>
-              </a:rPr>
-              <a:t>Bài về nhà 3: chuẩn bị 6 slide trình bày (mọi người đều nộp)</a:t>
-            </a:r>
-          </a:p>
-        </p:txBody>
-      </p:sp>
-      <p:sp>
-        <p:nvSpPr>
-          <p:cNvPr id="52" name="Side"/>
-          <p:cNvSpPr/>
-          <p:nvPr/>
-        </p:nvSpPr>
-        <p:spPr>
-          <a:xfrm>
-            <a:off x="7423760" y="1720000"/>
-            <a:ext cx="4311040" cy="2168030"/>
-          </a:xfrm>
-          <a:prstGeom prst="roundRect">
-            <a:avLst>
-              <a:gd name="adj" fmla="val 5000"/>
-            </a:avLst>
-          </a:prstGeom>
-          <a:solidFill>
-            <a:srgbClr val="EAF2F5"/>
-          </a:solidFill>
-          <a:ln>
-            <a:noFill/>
-          </a:ln>
-        </p:spPr>
-        <p:txBody>
-          <a:bodyPr wrap="square" lIns="137160" tIns="91440" rIns="137160" bIns="91440" rtlCol="0" anchor="ctr">
-            <a:normAutofit/>
-          </a:bodyPr>
-          <a:lstStyle/>
-          <a:p>
-            <a:pPr marL="0" indent="0" algn="ctr">
-              <a:buNone/>
-            </a:pPr>
-            <a:r>
-              <a:rPr lang="en-US" sz="1600" b="1" dirty="0">
-                <a:solidFill>
-                  <a:srgbClr val="1F5C7A"/>
-                </a:solidFill>
-                <a:latin typeface="Arial"/>
-                <a:cs typeface="Arial"/>
-              </a:rPr>
-              <a:t>Mang về</a:t>
-            </a:r>
-          </a:p>
-          <a:p>
-            <a:pPr marL="0" indent="0" algn="ctr">
-              <a:lnSpc>
-                <a:spcPct val="104000"/>
-              </a:lnSpc>
-              <a:spcBef>
-                <a:spcPts val="300"/>
-              </a:spcBef>
-              <a:buNone/>
-            </a:pPr>
-            <a:r>
-              <a:rPr lang="en-US" sz="1500" dirty="0">
-                <a:solidFill>
-                  <a:srgbClr val="000000"/>
-                </a:solidFill>
-                <a:latin typeface="Arial"/>
-                <a:cs typeface="Arial"/>
-              </a:rPr>
-              <a:t>Chưa phê duyệt thì không có dữ liệu, kể cả 'vài ca'</a:t>
-            </a:r>
-          </a:p>
-          <a:p>
-            <a:pPr marL="0" indent="0" algn="ctr">
-              <a:lnSpc>
-                <a:spcPct val="104000"/>
-              </a:lnSpc>
-              <a:spcBef>
-                <a:spcPts val="300"/>
-              </a:spcBef>
-              <a:buNone/>
-            </a:pPr>
-            <a:r>
-              <a:rPr lang="en-US" sz="1500" dirty="0">
-                <a:solidFill>
-                  <a:srgbClr val="000000"/>
-                </a:solidFill>
-                <a:latin typeface="Arial"/>
-                <a:cs typeface="Arial"/>
-              </a:rPr>
-              <a:t>Mọi tác giả đủ bốn tiêu chí. Khai báo mọi lợi ích</a:t>
-            </a:r>
-          </a:p>
-          <a:p>
-            <a:pPr marL="0" indent="0" algn="ctr">
-              <a:lnSpc>
-                <a:spcPct val="104000"/>
-              </a:lnSpc>
-              <a:spcBef>
-                <a:spcPts val="300"/>
-              </a:spcBef>
-              <a:buNone/>
-            </a:pPr>
-            <a:r>
-              <a:rPr lang="en-US" sz="1500" dirty="0">
-                <a:solidFill>
-                  <a:srgbClr val="000000"/>
-                </a:solidFill>
-                <a:latin typeface="Arial"/>
-                <a:cs typeface="Arial"/>
-              </a:rPr>
-              <a:t>Phương pháp = đã làm gì. Kết quả = con số kèm KTC, không bình luận</a:t>
-            </a:r>
-          </a:p>
-        </p:txBody>
-      </p:sp>
-      <p:sp>
-        <p:nvSpPr>
-          <p:cNvPr id="53" name="Deliverable"/>
-          <p:cNvSpPr/>
-          <p:nvPr/>
-        </p:nvSpPr>
-        <p:spPr>
-          <a:xfrm>
-            <a:off x="457200" y="5350000"/>
-            <a:ext cx="11277600" cy="600000"/>
-          </a:xfrm>
-          <a:prstGeom prst="roundRect">
-            <a:avLst>
-              <a:gd name="adj" fmla="val 12000"/>
-            </a:avLst>
-          </a:prstGeom>
-          <a:solidFill>
-            <a:srgbClr val="FFFFFF"/>
-          </a:solidFill>
-          <a:ln w="15875">
-            <a:solidFill>
-              <a:srgbClr val="1F5C7A"/>
-            </a:solidFill>
-          </a:ln>
-        </p:spPr>
-        <p:txBody>
-          <a:bodyPr wrap="square" lIns="182880" tIns="45720" rIns="182880" bIns="45720" rtlCol="0" anchor="ctr">
-            <a:normAutofit/>
-          </a:bodyPr>
-          <a:lstStyle/>
-          <a:p>
-            <a:pPr marL="0" indent="0" algn="ctr">
-              <a:buNone/>
-            </a:pPr>
-            <a:r>
-              <a:rPr lang="en-US" sz="1300" b="1" dirty="0">
-                <a:solidFill>
-                  <a:srgbClr val="1F5C7A"/>
-                </a:solidFill>
-                <a:latin typeface="Arial"/>
-                <a:cs typeface="Arial"/>
-              </a:rPr>
-              <a:t>SẢN PHẨM   </a:t>
-            </a:r>
-            <a:r>
-              <a:rPr lang="en-US" sz="1500" dirty="0">
-                <a:solidFill>
-                  <a:srgbClr val="000000"/>
-                </a:solidFill>
-                <a:latin typeface="Arial"/>
-                <a:cs typeface="Arial"/>
-              </a:rPr>
-              <a:t>Câu trả lời cuối buổi được đọc trước Buổi 8. Phần 4 và Phương pháp + Kết quả đã soạn</a:t>
+            <a:pPr marL="0" indent="0" algn="l">
+              <a:buNone/>
+            </a:pPr>
+            <a:r>
+              <a:rPr lang="en-US" sz="1300" i="1" dirty="0">
+                <a:solidFill>
+                  <a:srgbClr val="595959"/>
+                </a:solidFill>
+                <a:latin typeface="Arial"/>
+                <a:cs typeface="Arial"/>
+              </a:rPr>
+              <a:t>Người bình duyệt được phân công ngẫu nhiên: xem danh sách trên màn hình và trong email. Trưởng khóa học: myluong1710@gmail.com</a:t>
             </a:r>
           </a:p>
         </p:txBody>
@@ -27881,7 +27510,7 @@
                 <a:latin typeface="Arial"/>
                 <a:cs typeface="Arial"/>
               </a:rPr>
-              <a:t>Slide bổ sung  |  Buổi 7</a:t>
+              <a:t>Tổng kết, câu hỏi cuối buổi và bài về nhà</a:t>
             </a:r>
           </a:p>
         </p:txBody>
@@ -27916,14 +27545,57 @@
       </p:sp>
       <p:sp>
         <p:nvSpPr>
-          <p:cNvPr id="20" name="Statement"/>
+          <p:cNvPr id="50" name="Banner"/>
+          <p:cNvSpPr/>
+          <p:nvPr/>
+        </p:nvSpPr>
+        <p:spPr>
+          <a:xfrm>
+            <a:off x="457200" y="1120000"/>
+            <a:ext cx="11277600" cy="470000"/>
+          </a:xfrm>
+          <a:prstGeom prst="rect">
+            <a:avLst/>
+          </a:prstGeom>
+          <a:solidFill>
+            <a:srgbClr val="1F5C7A"/>
+          </a:solidFill>
+          <a:ln>
+            <a:noFill/>
+          </a:ln>
+        </p:spPr>
+        <p:txBody>
+          <a:bodyPr wrap="square" lIns="182880" tIns="45720" rIns="182880" bIns="45720" rtlCol="0" anchor="ctr">
+            <a:normAutofit/>
+          </a:bodyPr>
+          <a:lstStyle/>
+          <a:p>
+            <a:pPr marL="0" indent="0" algn="l">
+              <a:buNone/>
+            </a:pPr>
+            <a:r>
+              <a:rPr lang="en-US" sz="1500" b="1" dirty="0">
+                <a:solidFill>
+                  <a:srgbClr val="FFFFFF"/>
+                </a:solidFill>
+                <a:latin typeface="Arial"/>
+                <a:cs typeface="Arial"/>
+              </a:rPr>
+              <a:t>THẢO LUẬN   |   7 phút</a:t>
+            </a:r>
+          </a:p>
+        </p:txBody>
+      </p:sp>
+      <p:sp>
+        <p:nvSpPr>
+          <p:cNvPr id="51" name="Steps"/>
           <p:cNvSpPr txBox="1"/>
           <p:nvPr/>
         </p:nvSpPr>
         <p:spPr>
           <a:xfrm>
-            <a:off x="1057200" y="1280000"/>
-            <a:ext cx="10077600" cy="4470000"/>
+            <a:off x="457200" y="1720000"/>
+            <a:ext cx="6766560" cy="3510000"/>
           </a:xfrm>
           <a:prstGeom prst="rect">
             <a:avLst/>
@@ -27934,42 +27606,296 @@
           </a:ln>
         </p:spPr>
         <p:txBody>
-          <a:bodyPr wrap="square" lIns="91440" tIns="45720" rIns="91440" bIns="45720" rtlCol="0" anchor="ctr"/>
-          <a:lstStyle/>
+          <a:bodyPr wrap="square" lIns="91440" tIns="45720" rIns="91440" bIns="45720" rtlCol="0" anchor="t"/>
+          <a:lstStyle/>
+          <a:p>
+            <a:pPr marL="380000" indent="-380000" algn="l">
+              <a:lnSpc>
+                <a:spcPct val="104000"/>
+              </a:lnSpc>
+              <a:spcBef>
+                <a:spcPts val="450"/>
+              </a:spcBef>
+              <a:buClr>
+                <a:srgbClr val="1F5C7A"/>
+              </a:buClr>
+              <a:buFont typeface="Arial"/>
+              <a:buChar char="•"/>
+            </a:pPr>
+            <a:r>
+              <a:rPr lang="en-US" sz="1650" dirty="0">
+                <a:solidFill>
+                  <a:srgbClr val="000000"/>
+                </a:solidFill>
+                <a:latin typeface="Arial"/>
+                <a:cs typeface="Arial"/>
+              </a:rPr>
+              <a:t>Ba thông điệp mang về (bên phải)</a:t>
+            </a:r>
+          </a:p>
+          <a:p>
+            <a:pPr marL="380000" indent="-380000" algn="l">
+              <a:lnSpc>
+                <a:spcPct val="104000"/>
+              </a:lnSpc>
+              <a:spcBef>
+                <a:spcPts val="450"/>
+              </a:spcBef>
+              <a:buClr>
+                <a:srgbClr val="1F5C7A"/>
+              </a:buClr>
+              <a:buFont typeface="Arial"/>
+              <a:buChar char="•"/>
+            </a:pPr>
+            <a:r>
+              <a:rPr lang="en-US" sz="1650" dirty="0">
+                <a:solidFill>
+                  <a:srgbClr val="000000"/>
+                </a:solidFill>
+                <a:latin typeface="Arial"/>
+                <a:cs typeface="Arial"/>
+              </a:rPr>
+              <a:t>Câu hỏi cuối buổi trong khung chat: 'Ai đồng ý cho người bệnh sốc nhiễm khuẩn đang an thần, và khi nào?'</a:t>
+            </a:r>
+          </a:p>
+          <a:p>
+            <a:pPr marL="380000" indent="-380000" algn="l">
+              <a:lnSpc>
+                <a:spcPct val="104000"/>
+              </a:lnSpc>
+              <a:spcBef>
+                <a:spcPts val="450"/>
+              </a:spcBef>
+              <a:buClr>
+                <a:srgbClr val="1F5C7A"/>
+              </a:buClr>
+              <a:buFont typeface="Arial"/>
+              <a:buChar char="•"/>
+            </a:pPr>
+            <a:r>
+              <a:rPr lang="en-US" sz="1650" dirty="0">
+                <a:solidFill>
+                  <a:srgbClr val="000000"/>
+                </a:solidFill>
+                <a:latin typeface="Arial"/>
+                <a:cs typeface="Arial"/>
+              </a:rPr>
+              <a:t>Bài về nhà 1: viết Phần 4 cho đề cương của bạn</a:t>
+            </a:r>
+          </a:p>
+          <a:p>
+            <a:pPr marL="380000" indent="-380000" algn="l">
+              <a:lnSpc>
+                <a:spcPct val="104000"/>
+              </a:lnSpc>
+              <a:spcBef>
+                <a:spcPts val="450"/>
+              </a:spcBef>
+              <a:buClr>
+                <a:srgbClr val="1F5C7A"/>
+              </a:buClr>
+              <a:buFont typeface="Arial"/>
+              <a:buChar char="•"/>
+            </a:pPr>
+            <a:r>
+              <a:rPr lang="en-US" sz="1650" dirty="0">
+                <a:solidFill>
+                  <a:srgbClr val="000000"/>
+                </a:solidFill>
+                <a:latin typeface="Arial"/>
+                <a:cs typeface="Arial"/>
+              </a:rPr>
+              <a:t>Bài về nhà 2: viết phần Kết quả (hạn 23:59 ngày học Buổi 8)</a:t>
+            </a:r>
+          </a:p>
+          <a:p>
+            <a:pPr marL="380000" indent="-380000" algn="l">
+              <a:lnSpc>
+                <a:spcPct val="104000"/>
+              </a:lnSpc>
+              <a:spcBef>
+                <a:spcPts val="450"/>
+              </a:spcBef>
+              <a:buClr>
+                <a:srgbClr val="1F5C7A"/>
+              </a:buClr>
+              <a:buFont typeface="Arial"/>
+              <a:buChar char="•"/>
+            </a:pPr>
+            <a:r>
+              <a:rPr lang="en-US" sz="1650" dirty="0">
+                <a:solidFill>
+                  <a:srgbClr val="000000"/>
+                </a:solidFill>
+                <a:latin typeface="Arial"/>
+                <a:cs typeface="Arial"/>
+              </a:rPr>
+              <a:t>Bài về nhà 3: chuẩn bị 6 slide trình bày (mọi người đều nộp)</a:t>
+            </a:r>
+          </a:p>
+        </p:txBody>
+      </p:sp>
+      <p:sp>
+        <p:nvSpPr>
+          <p:cNvPr id="52" name="Side"/>
+          <p:cNvSpPr/>
+          <p:nvPr/>
+        </p:nvSpPr>
+        <p:spPr>
+          <a:xfrm>
+            <a:off x="7423760" y="1720000"/>
+            <a:ext cx="4311040" cy="2168030"/>
+          </a:xfrm>
+          <a:prstGeom prst="roundRect">
+            <a:avLst>
+              <a:gd name="adj" fmla="val 5000"/>
+            </a:avLst>
+          </a:prstGeom>
+          <a:solidFill>
+            <a:srgbClr val="EAF2F5"/>
+          </a:solidFill>
+          <a:ln>
+            <a:noFill/>
+          </a:ln>
+        </p:spPr>
+        <p:txBody>
+          <a:bodyPr wrap="square" lIns="137160" tIns="91440" rIns="137160" bIns="91440" rtlCol="0" anchor="ctr">
+            <a:normAutofit/>
+          </a:bodyPr>
+          <a:lstStyle/>
+          <a:p>
+            <a:pPr marL="0" indent="0" algn="ctr">
+              <a:buNone/>
+            </a:pPr>
+            <a:r>
+              <a:rPr lang="en-US" sz="1600" b="1" dirty="0">
+                <a:solidFill>
+                  <a:srgbClr val="1F5C7A"/>
+                </a:solidFill>
+                <a:latin typeface="Arial"/>
+                <a:cs typeface="Arial"/>
+              </a:rPr>
+              <a:t>Mang về</a:t>
+            </a:r>
+          </a:p>
           <a:p>
             <a:pPr marL="0" indent="0" algn="ctr">
               <a:lnSpc>
-                <a:spcPct val="110000"/>
+                <a:spcPct val="104000"/>
               </a:lnSpc>
-              <a:buNone/>
-            </a:pPr>
-            <a:r>
-              <a:rPr lang="en-US" sz="3200" b="1" dirty="0">
-                <a:solidFill>
-                  <a:srgbClr val="0D7377"/>
-                </a:solidFill>
-                <a:latin typeface="Arial"/>
-                <a:cs typeface="Arial"/>
-              </a:rPr>
-              <a:t>Slide bổ sung: Buổi 7</a:t>
+              <a:spcBef>
+                <a:spcPts val="300"/>
+              </a:spcBef>
+              <a:buNone/>
+            </a:pPr>
+            <a:r>
+              <a:rPr lang="en-US" sz="1500" dirty="0">
+                <a:solidFill>
+                  <a:srgbClr val="000000"/>
+                </a:solidFill>
+                <a:latin typeface="Arial"/>
+                <a:cs typeface="Arial"/>
+              </a:rPr>
+              <a:t>Chưa phê duyệt thì không có dữ liệu, kể cả 'vài ca'</a:t>
             </a:r>
           </a:p>
           <a:p>
             <a:pPr marL="0" indent="0" algn="ctr">
+              <a:lnSpc>
+                <a:spcPct val="104000"/>
+              </a:lnSpc>
               <a:spcBef>
-                <a:spcPts val="1200"/>
+                <a:spcPts val="300"/>
               </a:spcBef>
               <a:buNone/>
             </a:pPr>
             <a:r>
-              <a:rPr lang="en-US" sz="1900" i="1" dirty="0">
-                <a:solidFill>
-                  <a:srgbClr val="595959"/>
-                </a:solidFill>
-                <a:latin typeface="Arial"/>
-                <a:cs typeface="Arial"/>
-              </a:rPr>
-              <a:t>Chỉ dùng khi còn thời gian, hoặc để tự học</a:t>
+              <a:rPr lang="en-US" sz="1500" dirty="0">
+                <a:solidFill>
+                  <a:srgbClr val="000000"/>
+                </a:solidFill>
+                <a:latin typeface="Arial"/>
+                <a:cs typeface="Arial"/>
+              </a:rPr>
+              <a:t>Mọi tác giả đủ bốn tiêu chí. Khai báo mọi lợi ích</a:t>
+            </a:r>
+          </a:p>
+          <a:p>
+            <a:pPr marL="0" indent="0" algn="ctr">
+              <a:lnSpc>
+                <a:spcPct val="104000"/>
+              </a:lnSpc>
+              <a:spcBef>
+                <a:spcPts val="300"/>
+              </a:spcBef>
+              <a:buNone/>
+            </a:pPr>
+            <a:r>
+              <a:rPr lang="en-US" sz="1500" dirty="0">
+                <a:solidFill>
+                  <a:srgbClr val="000000"/>
+                </a:solidFill>
+                <a:latin typeface="Arial"/>
+                <a:cs typeface="Arial"/>
+              </a:rPr>
+              <a:t>Kết quả = con số kèm KTC, không bình luận</a:t>
+            </a:r>
+          </a:p>
+        </p:txBody>
+      </p:sp>
+      <p:sp>
+        <p:nvSpPr>
+          <p:cNvPr id="53" name="Deliverable"/>
+          <p:cNvSpPr/>
+          <p:nvPr/>
+        </p:nvSpPr>
+        <p:spPr>
+          <a:xfrm>
+            <a:off x="457200" y="5350000"/>
+            <a:ext cx="11277600" cy="600000"/>
+          </a:xfrm>
+          <a:prstGeom prst="roundRect">
+            <a:avLst>
+              <a:gd name="adj" fmla="val 12000"/>
+            </a:avLst>
+          </a:prstGeom>
+          <a:solidFill>
+            <a:srgbClr val="FFFFFF"/>
+          </a:solidFill>
+          <a:ln w="15875">
+            <a:solidFill>
+              <a:srgbClr val="1F5C7A"/>
+            </a:solidFill>
+          </a:ln>
+        </p:spPr>
+        <p:txBody>
+          <a:bodyPr wrap="square" lIns="182880" tIns="45720" rIns="182880" bIns="45720" rtlCol="0" anchor="ctr">
+            <a:normAutofit/>
+          </a:bodyPr>
+          <a:lstStyle/>
+          <a:p>
+            <a:pPr marL="0" indent="0" algn="ctr">
+              <a:buNone/>
+            </a:pPr>
+            <a:r>
+              <a:rPr lang="en-US" sz="1300" b="1" dirty="0">
+                <a:solidFill>
+                  <a:srgbClr val="1F5C7A"/>
+                </a:solidFill>
+                <a:latin typeface="Arial"/>
+                <a:cs typeface="Arial"/>
+              </a:rPr>
+              <a:t>SẢN PHẨM   </a:t>
+            </a:r>
+            <a:r>
+              <a:rPr lang="en-US" sz="1500" dirty="0">
+                <a:solidFill>
+                  <a:srgbClr val="000000"/>
+                </a:solidFill>
+                <a:latin typeface="Arial"/>
+                <a:cs typeface="Arial"/>
+              </a:rPr>
+              <a:t>Câu trả lời cuối buổi được đọc trước Buổi 8. Phần 4 và phần Kết quả đã soạn</a:t>
             </a:r>
           </a:p>
         </p:txBody>
@@ -28137,7 +28063,7 @@
                 <a:latin typeface="Arial"/>
                 <a:cs typeface="Arial"/>
               </a:rPr>
-              <a:t>Kiểm tra: có cần đăng ký không?</a:t>
+              <a:t>Slide bổ sung  |  Buổi 7</a:t>
             </a:r>
           </a:p>
         </p:txBody>
@@ -28172,57 +28098,14 @@
       </p:sp>
       <p:sp>
         <p:nvSpPr>
-          <p:cNvPr id="50" name="Banner"/>
-          <p:cNvSpPr/>
-          <p:nvPr/>
-        </p:nvSpPr>
-        <p:spPr>
-          <a:xfrm>
-            <a:off x="457200" y="1120000"/>
-            <a:ext cx="11277600" cy="470000"/>
-          </a:xfrm>
-          <a:prstGeom prst="rect">
-            <a:avLst/>
-          </a:prstGeom>
-          <a:solidFill>
-            <a:srgbClr val="6C3483"/>
-          </a:solidFill>
-          <a:ln>
-            <a:noFill/>
-          </a:ln>
-        </p:spPr>
-        <p:txBody>
-          <a:bodyPr wrap="square" lIns="182880" tIns="45720" rIns="182880" bIns="45720" rtlCol="0" anchor="ctr">
-            <a:normAutofit/>
-          </a:bodyPr>
-          <a:lstStyle/>
-          <a:p>
-            <a:pPr marL="0" indent="0" algn="l">
-              <a:buNone/>
-            </a:pPr>
-            <a:r>
-              <a:rPr lang="en-US" sz="1500" b="1" dirty="0">
-                <a:solidFill>
-                  <a:srgbClr val="FFFFFF"/>
-                </a:solidFill>
-                <a:latin typeface="Arial"/>
-                <a:cs typeface="Arial"/>
-              </a:rPr>
-              <a:t>CÂU HỎI NHANH   |   2 phút</a:t>
-            </a:r>
-          </a:p>
-        </p:txBody>
-      </p:sp>
-      <p:sp>
-        <p:nvSpPr>
-          <p:cNvPr id="51" name="Steps"/>
+          <p:cNvPr id="20" name="Statement"/>
           <p:cNvSpPr txBox="1"/>
           <p:nvPr/>
         </p:nvSpPr>
         <p:spPr>
           <a:xfrm>
-            <a:off x="457200" y="1720000"/>
-            <a:ext cx="6766560" cy="4230000"/>
+            <a:off x="1057200" y="1280000"/>
+            <a:ext cx="10077600" cy="4470000"/>
           </a:xfrm>
           <a:prstGeom prst="rect">
             <a:avLst/>
@@ -28233,235 +28116,42 @@
           </a:ln>
         </p:spPr>
         <p:txBody>
-          <a:bodyPr wrap="square" lIns="91440" tIns="45720" rIns="91440" bIns="45720" rtlCol="0" anchor="t"/>
-          <a:lstStyle/>
-          <a:p>
-            <a:pPr marL="380000" indent="-380000" algn="l">
-              <a:lnSpc>
-                <a:spcPct val="104000"/>
-              </a:lnSpc>
-              <a:spcBef>
-                <a:spcPts val="450"/>
-              </a:spcBef>
-              <a:buClr>
-                <a:srgbClr val="6C3483"/>
-              </a:buClr>
-              <a:buFont typeface="Arial"/>
-              <a:buChar char="•"/>
-            </a:pPr>
-            <a:r>
-              <a:rPr lang="en-US" sz="1650" dirty="0">
-                <a:solidFill>
-                  <a:srgbClr val="000000"/>
-                </a:solidFill>
-                <a:latin typeface="Arial"/>
-                <a:cs typeface="Arial"/>
-              </a:rPr>
-              <a:t>Thử nghiệm ngẫu nhiên so sánh hạn chế dịch với dịch thông thường trong sốc nhiễm khuẩn</a:t>
-            </a:r>
-          </a:p>
-          <a:p>
-            <a:pPr marL="380000" indent="-380000" algn="l">
-              <a:lnSpc>
-                <a:spcPct val="104000"/>
-              </a:lnSpc>
-              <a:spcBef>
-                <a:spcPts val="450"/>
-              </a:spcBef>
-              <a:buClr>
-                <a:srgbClr val="6C3483"/>
-              </a:buClr>
-              <a:buFont typeface="Arial"/>
-              <a:buChar char="•"/>
-            </a:pPr>
-            <a:r>
-              <a:rPr lang="en-US" sz="1650" dirty="0">
-                <a:solidFill>
-                  <a:srgbClr val="000000"/>
-                </a:solidFill>
-                <a:latin typeface="Arial"/>
-                <a:cs typeface="Arial"/>
-              </a:rPr>
-              <a:t>Tổng quan hệ thống về chiến lược dịch truyền trong nhiễm khuẩn huyết</a:t>
-            </a:r>
-          </a:p>
-          <a:p>
-            <a:pPr marL="380000" indent="-380000" algn="l">
-              <a:lnSpc>
-                <a:spcPct val="104000"/>
-              </a:lnSpc>
-              <a:spcBef>
-                <a:spcPts val="450"/>
-              </a:spcBef>
-              <a:buClr>
-                <a:srgbClr val="6C3483"/>
-              </a:buClr>
-              <a:buFont typeface="Arial"/>
-              <a:buChar char="•"/>
-            </a:pPr>
-            <a:r>
-              <a:rPr lang="en-US" sz="1650" dirty="0">
-                <a:solidFill>
-                  <a:srgbClr val="000000"/>
-                </a:solidFill>
-                <a:latin typeface="Arial"/>
-                <a:cs typeface="Arial"/>
-              </a:rPr>
-              <a:t>Nghiên cứu thuần tập hồi cứu từ hồ sơ ICU (như FLUID-ICU)</a:t>
-            </a:r>
-          </a:p>
-          <a:p>
-            <a:pPr marL="380000" indent="-380000" algn="l">
-              <a:lnSpc>
-                <a:spcPct val="104000"/>
-              </a:lnSpc>
-              <a:spcBef>
-                <a:spcPts val="450"/>
-              </a:spcBef>
-              <a:buClr>
-                <a:srgbClr val="6C3483"/>
-              </a:buClr>
-              <a:buFont typeface="Arial"/>
-              <a:buChar char="•"/>
-            </a:pPr>
-            <a:r>
-              <a:rPr lang="en-US" sz="1650" dirty="0">
-                <a:solidFill>
-                  <a:srgbClr val="000000"/>
-                </a:solidFill>
-                <a:latin typeface="Arial"/>
-                <a:cs typeface="Arial"/>
-              </a:rPr>
-              <a:t>Đánh giá lâm sàng (audit) việc ghi phiếu cân bằng dịch so với chuẩn của khoa</a:t>
-            </a:r>
-          </a:p>
-        </p:txBody>
-      </p:sp>
-      <p:sp>
-        <p:nvSpPr>
-          <p:cNvPr id="52" name="Side"/>
-          <p:cNvSpPr/>
-          <p:nvPr/>
-        </p:nvSpPr>
-        <p:spPr>
-          <a:xfrm>
-            <a:off x="7423760" y="1720000"/>
-            <a:ext cx="4311040" cy="2206130"/>
-          </a:xfrm>
-          <a:prstGeom prst="roundRect">
-            <a:avLst>
-              <a:gd name="adj" fmla="val 5000"/>
-            </a:avLst>
-          </a:prstGeom>
-          <a:solidFill>
-            <a:srgbClr val="EAF2F5"/>
-          </a:solidFill>
-          <a:ln>
-            <a:noFill/>
-          </a:ln>
-        </p:spPr>
-        <p:txBody>
-          <a:bodyPr wrap="square" lIns="137160" tIns="91440" rIns="137160" bIns="91440" rtlCol="0" anchor="ctr">
-            <a:normAutofit/>
-          </a:bodyPr>
-          <a:lstStyle/>
-          <a:p>
-            <a:pPr marL="0" indent="0" algn="ctr">
-              <a:buNone/>
-            </a:pPr>
-            <a:r>
-              <a:rPr lang="en-US" sz="1600" b="1" dirty="0">
-                <a:solidFill>
-                  <a:srgbClr val="6C3483"/>
-                </a:solidFill>
-                <a:latin typeface="Arial"/>
-                <a:cs typeface="Arial"/>
-              </a:rPr>
-              <a:t>Đáp án</a:t>
-            </a:r>
-          </a:p>
+          <a:bodyPr wrap="square" lIns="91440" tIns="45720" rIns="91440" bIns="45720" rtlCol="0" anchor="ctr"/>
+          <a:lstStyle/>
           <a:p>
             <a:pPr marL="0" indent="0" algn="ctr">
               <a:lnSpc>
-                <a:spcPct val="104000"/>
+                <a:spcPct val="110000"/>
               </a:lnSpc>
+              <a:buNone/>
+            </a:pPr>
+            <a:r>
+              <a:rPr lang="en-US" sz="3200" b="1" dirty="0">
+                <a:solidFill>
+                  <a:srgbClr val="0D7377"/>
+                </a:solidFill>
+                <a:latin typeface="Arial"/>
+                <a:cs typeface="Arial"/>
+              </a:rPr>
+              <a:t>Slide bổ sung: Buổi 7</a:t>
+            </a:r>
+          </a:p>
+          <a:p>
+            <a:pPr marL="0" indent="0" algn="ctr">
               <a:spcBef>
-                <a:spcPts val="300"/>
+                <a:spcPts val="1200"/>
               </a:spcBef>
               <a:buNone/>
             </a:pPr>
             <a:r>
-              <a:rPr lang="en-US" sz="1500" dirty="0">
-                <a:solidFill>
-                  <a:srgbClr val="000000"/>
-                </a:solidFill>
-                <a:latin typeface="Arial"/>
-                <a:cs typeface="Arial"/>
-              </a:rPr>
-              <a:t>Bắt buộc: cơ sở đăng ký thử nghiệm, trước người bệnh đầu tiên</a:t>
-            </a:r>
-          </a:p>
-          <a:p>
-            <a:pPr marL="0" indent="0" algn="ctr">
-              <a:lnSpc>
-                <a:spcPct val="104000"/>
-              </a:lnSpc>
-              <a:spcBef>
-                <a:spcPts val="300"/>
-              </a:spcBef>
-              <a:buNone/>
-            </a:pPr>
-            <a:r>
-              <a:rPr lang="en-US" sz="1500" dirty="0">
-                <a:solidFill>
-                  <a:srgbClr val="000000"/>
-                </a:solidFill>
-                <a:latin typeface="Arial"/>
-                <a:cs typeface="Arial"/>
-              </a:rPr>
-              <a:t>Nên: PROSPERO</a:t>
-            </a:r>
-          </a:p>
-          <a:p>
-            <a:pPr marL="0" indent="0" algn="ctr">
-              <a:lnSpc>
-                <a:spcPct val="104000"/>
-              </a:lnSpc>
-              <a:spcBef>
-                <a:spcPts val="300"/>
-              </a:spcBef>
-              <a:buNone/>
-            </a:pPr>
-            <a:r>
-              <a:rPr lang="en-US" sz="1500" dirty="0">
-                <a:solidFill>
-                  <a:srgbClr val="000000"/>
-                </a:solidFill>
-                <a:latin typeface="Arial"/>
-                <a:cs typeface="Arial"/>
-              </a:rPr>
-              <a:t>Khuyến khích, không bắt buộc</a:t>
-            </a:r>
-          </a:p>
-          <a:p>
-            <a:pPr marL="0" indent="0" algn="ctr">
-              <a:lnSpc>
-                <a:spcPct val="104000"/>
-              </a:lnSpc>
-              <a:spcBef>
-                <a:spcPts val="300"/>
-              </a:spcBef>
-              <a:buNone/>
-            </a:pPr>
-            <a:r>
-              <a:rPr lang="en-US" sz="1500" dirty="0">
-                <a:solidFill>
-                  <a:srgbClr val="000000"/>
-                </a:solidFill>
-                <a:latin typeface="Arial"/>
-                <a:cs typeface="Arial"/>
-              </a:rPr>
-              <a:t>Audit: không đăng ký nghiên cứu. Phê duyệt nội bộ</a:t>
+              <a:rPr lang="en-US" sz="1900" i="1" dirty="0">
+                <a:solidFill>
+                  <a:srgbClr val="595959"/>
+                </a:solidFill>
+                <a:latin typeface="Arial"/>
+                <a:cs typeface="Arial"/>
+              </a:rPr>
+              <a:t>Chỉ dùng khi còn thời gian, hoặc để tự học</a:t>
             </a:r>
           </a:p>
         </p:txBody>
@@ -28629,7 +28319,7 @@
                 <a:latin typeface="Arial"/>
                 <a:cs typeface="Arial"/>
               </a:rPr>
-              <a:t>IMRaD: hình đồng hồ cát của mọi bài báo</a:t>
+              <a:t>Kiểm tra: có cần đăng ký không?</a:t>
             </a:r>
           </a:p>
         </p:txBody>
@@ -28662,48 +28352,22 @@
           </a:p>
         </p:txBody>
       </p:sp>
-      <p:pic>
-        <p:nvPicPr>
-          <p:cNvPr id="25" name="Figure"/>
-          <p:cNvPicPr>
-            <a:picLocks noChangeAspect="1"/>
-          </p:cNvPicPr>
-          <p:nvPr/>
-        </p:nvPicPr>
-        <p:blipFill>
-          <a:blip r:embed="rId4"/>
-          <a:stretch>
-            <a:fillRect/>
-          </a:stretch>
-        </p:blipFill>
-        <p:spPr>
-          <a:xfrm>
-            <a:off x="908500" y="1150000"/>
-            <a:ext cx="10375000" cy="4150000"/>
+      <p:sp>
+        <p:nvSpPr>
+          <p:cNvPr id="50" name="Banner"/>
+          <p:cNvSpPr/>
+          <p:nvPr/>
+        </p:nvSpPr>
+        <p:spPr>
+          <a:xfrm>
+            <a:off x="457200" y="1120000"/>
+            <a:ext cx="11277600" cy="470000"/>
           </a:xfrm>
           <a:prstGeom prst="rect">
             <a:avLst/>
           </a:prstGeom>
-        </p:spPr>
-      </p:pic>
-      <p:sp>
-        <p:nvSpPr>
-          <p:cNvPr id="60" name="Takeaway"/>
-          <p:cNvSpPr/>
-          <p:nvPr/>
-        </p:nvSpPr>
-        <p:spPr>
-          <a:xfrm>
-            <a:off x="457200" y="5390000"/>
-            <a:ext cx="11277600" cy="560000"/>
-          </a:xfrm>
-          <a:prstGeom prst="roundRect">
-            <a:avLst>
-              <a:gd name="adj" fmla="val 12000"/>
-            </a:avLst>
-          </a:prstGeom>
           <a:solidFill>
-            <a:srgbClr val="0D7377"/>
+            <a:srgbClr val="6C3483"/>
           </a:solidFill>
           <a:ln>
             <a:noFill/>
@@ -28715,28 +28379,271 @@
           </a:bodyPr>
           <a:lstStyle/>
           <a:p>
+            <a:pPr marL="0" indent="0" algn="l">
+              <a:buNone/>
+            </a:pPr>
+            <a:r>
+              <a:rPr lang="en-US" sz="1500" b="1" dirty="0">
+                <a:solidFill>
+                  <a:srgbClr val="FFFFFF"/>
+                </a:solidFill>
+                <a:latin typeface="Arial"/>
+                <a:cs typeface="Arial"/>
+              </a:rPr>
+              <a:t>CÂU HỎI NHANH   |   2 phút</a:t>
+            </a:r>
+          </a:p>
+        </p:txBody>
+      </p:sp>
+      <p:sp>
+        <p:nvSpPr>
+          <p:cNvPr id="51" name="Steps"/>
+          <p:cNvSpPr txBox="1"/>
+          <p:nvPr/>
+        </p:nvSpPr>
+        <p:spPr>
+          <a:xfrm>
+            <a:off x="457200" y="1720000"/>
+            <a:ext cx="6766560" cy="4230000"/>
+          </a:xfrm>
+          <a:prstGeom prst="rect">
+            <a:avLst/>
+          </a:prstGeom>
+          <a:noFill/>
+          <a:ln>
+            <a:noFill/>
+          </a:ln>
+        </p:spPr>
+        <p:txBody>
+          <a:bodyPr wrap="square" lIns="91440" tIns="45720" rIns="91440" bIns="45720" rtlCol="0" anchor="t"/>
+          <a:lstStyle/>
+          <a:p>
+            <a:pPr marL="380000" indent="-380000" algn="l">
+              <a:lnSpc>
+                <a:spcPct val="104000"/>
+              </a:lnSpc>
+              <a:spcBef>
+                <a:spcPts val="450"/>
+              </a:spcBef>
+              <a:buClr>
+                <a:srgbClr val="6C3483"/>
+              </a:buClr>
+              <a:buFont typeface="Arial"/>
+              <a:buChar char="•"/>
+            </a:pPr>
+            <a:r>
+              <a:rPr lang="en-US" sz="1650" dirty="0">
+                <a:solidFill>
+                  <a:srgbClr val="000000"/>
+                </a:solidFill>
+                <a:latin typeface="Arial"/>
+                <a:cs typeface="Arial"/>
+              </a:rPr>
+              <a:t>Thử nghiệm ngẫu nhiên so sánh hạn chế dịch với dịch thông thường trong sốc nhiễm khuẩn</a:t>
+            </a:r>
+          </a:p>
+          <a:p>
+            <a:pPr marL="380000" indent="-380000" algn="l">
+              <a:lnSpc>
+                <a:spcPct val="104000"/>
+              </a:lnSpc>
+              <a:spcBef>
+                <a:spcPts val="450"/>
+              </a:spcBef>
+              <a:buClr>
+                <a:srgbClr val="6C3483"/>
+              </a:buClr>
+              <a:buFont typeface="Arial"/>
+              <a:buChar char="•"/>
+            </a:pPr>
+            <a:r>
+              <a:rPr lang="en-US" sz="1650" dirty="0">
+                <a:solidFill>
+                  <a:srgbClr val="000000"/>
+                </a:solidFill>
+                <a:latin typeface="Arial"/>
+                <a:cs typeface="Arial"/>
+              </a:rPr>
+              <a:t>Tổng quan hệ thống về chiến lược dịch truyền trong nhiễm khuẩn huyết</a:t>
+            </a:r>
+          </a:p>
+          <a:p>
+            <a:pPr marL="380000" indent="-380000" algn="l">
+              <a:lnSpc>
+                <a:spcPct val="104000"/>
+              </a:lnSpc>
+              <a:spcBef>
+                <a:spcPts val="450"/>
+              </a:spcBef>
+              <a:buClr>
+                <a:srgbClr val="6C3483"/>
+              </a:buClr>
+              <a:buFont typeface="Arial"/>
+              <a:buChar char="•"/>
+            </a:pPr>
+            <a:r>
+              <a:rPr lang="en-US" sz="1650" dirty="0">
+                <a:solidFill>
+                  <a:srgbClr val="000000"/>
+                </a:solidFill>
+                <a:latin typeface="Arial"/>
+                <a:cs typeface="Arial"/>
+              </a:rPr>
+              <a:t>Nghiên cứu thuần tập hồi cứu từ hồ sơ ICU (như FLUID-ICU)</a:t>
+            </a:r>
+          </a:p>
+          <a:p>
+            <a:pPr marL="380000" indent="-380000" algn="l">
+              <a:lnSpc>
+                <a:spcPct val="104000"/>
+              </a:lnSpc>
+              <a:spcBef>
+                <a:spcPts val="450"/>
+              </a:spcBef>
+              <a:buClr>
+                <a:srgbClr val="6C3483"/>
+              </a:buClr>
+              <a:buFont typeface="Arial"/>
+              <a:buChar char="•"/>
+            </a:pPr>
+            <a:r>
+              <a:rPr lang="en-US" sz="1650" dirty="0">
+                <a:solidFill>
+                  <a:srgbClr val="000000"/>
+                </a:solidFill>
+                <a:latin typeface="Arial"/>
+                <a:cs typeface="Arial"/>
+              </a:rPr>
+              <a:t>Đánh giá lâm sàng (audit) việc ghi phiếu cân bằng dịch so với chuẩn của khoa</a:t>
+            </a:r>
+          </a:p>
+        </p:txBody>
+      </p:sp>
+      <p:sp>
+        <p:nvSpPr>
+          <p:cNvPr id="52" name="Side"/>
+          <p:cNvSpPr/>
+          <p:nvPr/>
+        </p:nvSpPr>
+        <p:spPr>
+          <a:xfrm>
+            <a:off x="7423760" y="1720000"/>
+            <a:ext cx="4311040" cy="2206130"/>
+          </a:xfrm>
+          <a:prstGeom prst="roundRect">
+            <a:avLst>
+              <a:gd name="adj" fmla="val 5000"/>
+            </a:avLst>
+          </a:prstGeom>
+          <a:solidFill>
+            <a:srgbClr val="EAF2F5"/>
+          </a:solidFill>
+          <a:ln>
+            <a:noFill/>
+          </a:ln>
+        </p:spPr>
+        <p:txBody>
+          <a:bodyPr wrap="square" lIns="137160" tIns="91440" rIns="137160" bIns="91440" rtlCol="0" anchor="ctr">
+            <a:normAutofit/>
+          </a:bodyPr>
+          <a:lstStyle/>
+          <a:p>
             <a:pPr marL="0" indent="0" algn="ctr">
               <a:buNone/>
             </a:pPr>
             <a:r>
-              <a:rPr lang="en-US" sz="1300" b="1" dirty="0">
-                <a:solidFill>
-                  <a:srgbClr val="FFFFFF"/>
-                </a:solidFill>
-                <a:latin typeface="Arial"/>
-                <a:cs typeface="Arial"/>
-              </a:rPr>
-              <a:t>THÔNG ĐIỆP CHÍNH   </a:t>
-            </a:r>
-            <a:r>
-              <a:rPr lang="en-US" sz="1550" dirty="0">
-                <a:solidFill>
-                  <a:srgbClr val="FFFFFF"/>
-                </a:solidFill>
-                <a:latin typeface="Arial"/>
-                <a:cs typeface="Arial"/>
-              </a:rPr>
-              <a:t>Đặt vấn đề thu hẹp đến câu hỏi. Bàn luận mở rộng trở lại thực hành.</a:t>
+              <a:rPr lang="en-US" sz="1600" b="1" dirty="0">
+                <a:solidFill>
+                  <a:srgbClr val="6C3483"/>
+                </a:solidFill>
+                <a:latin typeface="Arial"/>
+                <a:cs typeface="Arial"/>
+              </a:rPr>
+              <a:t>Đáp án</a:t>
+            </a:r>
+          </a:p>
+          <a:p>
+            <a:pPr marL="0" indent="0" algn="ctr">
+              <a:lnSpc>
+                <a:spcPct val="104000"/>
+              </a:lnSpc>
+              <a:spcBef>
+                <a:spcPts val="300"/>
+              </a:spcBef>
+              <a:buNone/>
+            </a:pPr>
+            <a:r>
+              <a:rPr lang="en-US" sz="1500" dirty="0">
+                <a:solidFill>
+                  <a:srgbClr val="000000"/>
+                </a:solidFill>
+                <a:latin typeface="Arial"/>
+                <a:cs typeface="Arial"/>
+              </a:rPr>
+              <a:t>Bắt buộc: cơ sở đăng ký thử nghiệm, trước người bệnh đầu tiên</a:t>
+            </a:r>
+          </a:p>
+          <a:p>
+            <a:pPr marL="0" indent="0" algn="ctr">
+              <a:lnSpc>
+                <a:spcPct val="104000"/>
+              </a:lnSpc>
+              <a:spcBef>
+                <a:spcPts val="300"/>
+              </a:spcBef>
+              <a:buNone/>
+            </a:pPr>
+            <a:r>
+              <a:rPr lang="en-US" sz="1500" dirty="0">
+                <a:solidFill>
+                  <a:srgbClr val="000000"/>
+                </a:solidFill>
+                <a:latin typeface="Arial"/>
+                <a:cs typeface="Arial"/>
+              </a:rPr>
+              <a:t>Nên: PROSPERO</a:t>
+            </a:r>
+          </a:p>
+          <a:p>
+            <a:pPr marL="0" indent="0" algn="ctr">
+              <a:lnSpc>
+                <a:spcPct val="104000"/>
+              </a:lnSpc>
+              <a:spcBef>
+                <a:spcPts val="300"/>
+              </a:spcBef>
+              <a:buNone/>
+            </a:pPr>
+            <a:r>
+              <a:rPr lang="en-US" sz="1500" dirty="0">
+                <a:solidFill>
+                  <a:srgbClr val="000000"/>
+                </a:solidFill>
+                <a:latin typeface="Arial"/>
+                <a:cs typeface="Arial"/>
+              </a:rPr>
+              <a:t>Khuyến khích, không bắt buộc</a:t>
+            </a:r>
+          </a:p>
+          <a:p>
+            <a:pPr marL="0" indent="0" algn="ctr">
+              <a:lnSpc>
+                <a:spcPct val="104000"/>
+              </a:lnSpc>
+              <a:spcBef>
+                <a:spcPts val="300"/>
+              </a:spcBef>
+              <a:buNone/>
+            </a:pPr>
+            <a:r>
+              <a:rPr lang="en-US" sz="1500" dirty="0">
+                <a:solidFill>
+                  <a:srgbClr val="000000"/>
+                </a:solidFill>
+                <a:latin typeface="Arial"/>
+                <a:cs typeface="Arial"/>
+              </a:rPr>
+              <a:t>Audit: không đăng ký nghiên cứu. Phê duyệt nội bộ</a:t>
             </a:r>
           </a:p>
         </p:txBody>
@@ -28904,7 +28811,7 @@
                 <a:latin typeface="Arial"/>
                 <a:cs typeface="Arial"/>
               </a:rPr>
-              <a:t>CRediT: ghi rõ ai làm gì</a:t>
+              <a:t>IMRaD: hình đồng hồ cát của mọi bài báo</a:t>
             </a:r>
           </a:p>
         </p:txBody>
@@ -28937,58 +28844,45 @@
           </a:p>
         </p:txBody>
       </p:sp>
-      <p:sp>
-        <p:nvSpPr>
-          <p:cNvPr id="19" name="Intro"/>
-          <p:cNvSpPr txBox="1"/>
-          <p:nvPr/>
-        </p:nvSpPr>
-        <p:spPr>
-          <a:xfrm>
-            <a:off x="457200" y="1100000"/>
-            <a:ext cx="11277600" cy="480000"/>
+      <p:pic>
+        <p:nvPicPr>
+          <p:cNvPr id="25" name="Figure"/>
+          <p:cNvPicPr>
+            <a:picLocks noChangeAspect="1"/>
+          </p:cNvPicPr>
+          <p:nvPr/>
+        </p:nvPicPr>
+        <p:blipFill>
+          <a:blip r:embed="rId4"/>
+          <a:stretch>
+            <a:fillRect/>
+          </a:stretch>
+        </p:blipFill>
+        <p:spPr>
+          <a:xfrm>
+            <a:off x="908500" y="1150000"/>
+            <a:ext cx="10375000" cy="4150000"/>
           </a:xfrm>
           <a:prstGeom prst="rect">
             <a:avLst/>
           </a:prstGeom>
-          <a:noFill/>
-          <a:ln>
-            <a:noFill/>
-          </a:ln>
-        </p:spPr>
-        <p:txBody>
-          <a:bodyPr wrap="square" lIns="91440" tIns="45720" rIns="91440" bIns="45720" rtlCol="0" anchor="t"/>
-          <a:lstStyle/>
-          <a:p>
-            <a:pPr marL="0" indent="0" algn="l">
-              <a:buNone/>
-            </a:pPr>
-            <a:r>
-              <a:rPr lang="en-US" sz="1700" i="1" dirty="0">
-                <a:solidFill>
-                  <a:srgbClr val="595959"/>
-                </a:solidFill>
-                <a:latin typeface="Arial"/>
-                <a:cs typeface="Arial"/>
-              </a:rPr>
-              <a:t>CRediT (phân loại vai trò đóng góp): 14 vai trò chuẩn mà tạp chí ngày nay yêu cầu.</a:t>
-            </a:r>
-          </a:p>
-        </p:txBody>
-      </p:sp>
-      <p:sp>
-        <p:nvSpPr>
-          <p:cNvPr id="70" name="CardHead"/>
+        </p:spPr>
+      </p:pic>
+      <p:sp>
+        <p:nvSpPr>
+          <p:cNvPr id="60" name="Takeaway"/>
           <p:cNvSpPr/>
           <p:nvPr/>
         </p:nvSpPr>
         <p:spPr>
           <a:xfrm>
-            <a:off x="457200" y="1765612"/>
-            <a:ext cx="3625866" cy="640000"/>
-          </a:xfrm>
-          <a:prstGeom prst="rect">
-            <a:avLst/>
+            <a:off x="457200" y="5390000"/>
+            <a:ext cx="11277600" cy="560000"/>
+          </a:xfrm>
+          <a:prstGeom prst="roundRect">
+            <a:avLst>
+              <a:gd name="adj" fmla="val 12000"/>
+            </a:avLst>
           </a:prstGeom>
           <a:solidFill>
             <a:srgbClr val="0D7377"/>
@@ -28998,494 +28892,6 @@
           </a:ln>
         </p:spPr>
         <p:txBody>
-          <a:bodyPr wrap="square" lIns="91440" tIns="45720" rIns="91440" bIns="45720" rtlCol="0" anchor="ctr">
-            <a:normAutofit/>
-          </a:bodyPr>
-          <a:lstStyle/>
-          <a:p>
-            <a:pPr marL="0" indent="0" algn="ctr">
-              <a:buNone/>
-            </a:pPr>
-            <a:r>
-              <a:rPr lang="en-US" sz="1900" b="1" dirty="0">
-                <a:solidFill>
-                  <a:srgbClr val="FFFFFF"/>
-                </a:solidFill>
-                <a:latin typeface="Arial"/>
-                <a:cs typeface="Arial"/>
-              </a:rPr>
-              <a:t>Một số trong 14 vai trò</a:t>
-            </a:r>
-          </a:p>
-        </p:txBody>
-      </p:sp>
-      <p:sp>
-        <p:nvSpPr>
-          <p:cNvPr id="71" name="CardBody"/>
-          <p:cNvSpPr/>
-          <p:nvPr/>
-        </p:nvSpPr>
-        <p:spPr>
-          <a:xfrm>
-            <a:off x="457200" y="2405612"/>
-            <a:ext cx="3625866" cy="2633164"/>
-          </a:xfrm>
-          <a:prstGeom prst="rect">
-            <a:avLst/>
-          </a:prstGeom>
-          <a:solidFill>
-            <a:srgbClr val="EAF2F5"/>
-          </a:solidFill>
-          <a:ln>
-            <a:noFill/>
-          </a:ln>
-        </p:spPr>
-        <p:txBody>
-          <a:bodyPr wrap="square" lIns="137160" tIns="91440" rIns="137160" bIns="91440" rtlCol="0" anchor="ctr">
-            <a:normAutofit/>
-          </a:bodyPr>
-          <a:lstStyle/>
-          <a:p>
-            <a:pPr marL="0" indent="0" algn="ctr">
-              <a:lnSpc>
-                <a:spcPct val="104000"/>
-              </a:lnSpc>
-              <a:spcBef>
-                <a:spcPts val="400"/>
-              </a:spcBef>
-              <a:buNone/>
-            </a:pPr>
-            <a:r>
-              <a:rPr lang="en-US" sz="1750" dirty="0">
-                <a:solidFill>
-                  <a:srgbClr val="000000"/>
-                </a:solidFill>
-                <a:latin typeface="Arial"/>
-                <a:cs typeface="Arial"/>
-              </a:rPr>
-              <a:t>Conceptualization</a:t>
-            </a:r>
-          </a:p>
-          <a:p>
-            <a:pPr marL="0" indent="0" algn="ctr">
-              <a:lnSpc>
-                <a:spcPct val="104000"/>
-              </a:lnSpc>
-              <a:spcBef>
-                <a:spcPts val="400"/>
-              </a:spcBef>
-              <a:buNone/>
-            </a:pPr>
-            <a:r>
-              <a:rPr lang="en-US" sz="1750" dirty="0">
-                <a:solidFill>
-                  <a:srgbClr val="000000"/>
-                </a:solidFill>
-                <a:latin typeface="Arial"/>
-                <a:cs typeface="Arial"/>
-              </a:rPr>
-              <a:t>Methodology</a:t>
-            </a:r>
-          </a:p>
-          <a:p>
-            <a:pPr marL="0" indent="0" algn="ctr">
-              <a:lnSpc>
-                <a:spcPct val="104000"/>
-              </a:lnSpc>
-              <a:spcBef>
-                <a:spcPts val="400"/>
-              </a:spcBef>
-              <a:buNone/>
-            </a:pPr>
-            <a:r>
-              <a:rPr lang="en-US" sz="1750" dirty="0">
-                <a:solidFill>
-                  <a:srgbClr val="000000"/>
-                </a:solidFill>
-                <a:latin typeface="Arial"/>
-                <a:cs typeface="Arial"/>
-              </a:rPr>
-              <a:t>Investigation</a:t>
-            </a:r>
-          </a:p>
-          <a:p>
-            <a:pPr marL="0" indent="0" algn="ctr">
-              <a:lnSpc>
-                <a:spcPct val="104000"/>
-              </a:lnSpc>
-              <a:spcBef>
-                <a:spcPts val="400"/>
-              </a:spcBef>
-              <a:buNone/>
-            </a:pPr>
-            <a:r>
-              <a:rPr lang="en-US" sz="1750" dirty="0">
-                <a:solidFill>
-                  <a:srgbClr val="000000"/>
-                </a:solidFill>
-                <a:latin typeface="Arial"/>
-                <a:cs typeface="Arial"/>
-              </a:rPr>
-              <a:t>Formal analysis</a:t>
-            </a:r>
-          </a:p>
-          <a:p>
-            <a:pPr marL="0" indent="0" algn="ctr">
-              <a:lnSpc>
-                <a:spcPct val="104000"/>
-              </a:lnSpc>
-              <a:spcBef>
-                <a:spcPts val="400"/>
-              </a:spcBef>
-              <a:buNone/>
-            </a:pPr>
-            <a:r>
-              <a:rPr lang="en-US" sz="1750" dirty="0">
-                <a:solidFill>
-                  <a:srgbClr val="000000"/>
-                </a:solidFill>
-                <a:latin typeface="Arial"/>
-                <a:cs typeface="Arial"/>
-              </a:rPr>
-              <a:t>Writing (original draft)</a:t>
-            </a:r>
-          </a:p>
-          <a:p>
-            <a:pPr marL="0" indent="0" algn="ctr">
-              <a:lnSpc>
-                <a:spcPct val="104000"/>
-              </a:lnSpc>
-              <a:spcBef>
-                <a:spcPts val="400"/>
-              </a:spcBef>
-              <a:buNone/>
-            </a:pPr>
-            <a:r>
-              <a:rPr lang="en-US" sz="1750" dirty="0">
-                <a:solidFill>
-                  <a:srgbClr val="000000"/>
-                </a:solidFill>
-                <a:latin typeface="Arial"/>
-                <a:cs typeface="Arial"/>
-              </a:rPr>
-              <a:t>Writing (review and editing)</a:t>
-            </a:r>
-          </a:p>
-          <a:p>
-            <a:pPr marL="0" indent="0" algn="ctr">
-              <a:lnSpc>
-                <a:spcPct val="104000"/>
-              </a:lnSpc>
-              <a:spcBef>
-                <a:spcPts val="400"/>
-              </a:spcBef>
-              <a:buNone/>
-            </a:pPr>
-            <a:r>
-              <a:rPr lang="en-US" sz="1750" dirty="0">
-                <a:solidFill>
-                  <a:srgbClr val="000000"/>
-                </a:solidFill>
-                <a:latin typeface="Arial"/>
-                <a:cs typeface="Arial"/>
-              </a:rPr>
-              <a:t>Supervision</a:t>
-            </a:r>
-          </a:p>
-        </p:txBody>
-      </p:sp>
-      <p:sp>
-        <p:nvSpPr>
-          <p:cNvPr id="72" name="CardHead"/>
-          <p:cNvSpPr/>
-          <p:nvPr/>
-        </p:nvSpPr>
-        <p:spPr>
-          <a:xfrm>
-            <a:off x="4283066" y="1765612"/>
-            <a:ext cx="3625866" cy="640000"/>
-          </a:xfrm>
-          <a:prstGeom prst="rect">
-            <a:avLst/>
-          </a:prstGeom>
-          <a:solidFill>
-            <a:srgbClr val="0B376C"/>
-          </a:solidFill>
-          <a:ln>
-            <a:noFill/>
-          </a:ln>
-        </p:spPr>
-        <p:txBody>
-          <a:bodyPr wrap="square" lIns="91440" tIns="45720" rIns="91440" bIns="45720" rtlCol="0" anchor="ctr">
-            <a:normAutofit/>
-          </a:bodyPr>
-          <a:lstStyle/>
-          <a:p>
-            <a:pPr marL="0" indent="0" algn="ctr">
-              <a:buNone/>
-            </a:pPr>
-            <a:r>
-              <a:rPr lang="en-US" sz="1900" b="1" dirty="0">
-                <a:solidFill>
-                  <a:srgbClr val="FFFFFF"/>
-                </a:solidFill>
-                <a:latin typeface="Arial"/>
-                <a:cs typeface="Arial"/>
-              </a:rPr>
-              <a:t>Bài 1 đã làm</a:t>
-            </a:r>
-          </a:p>
-        </p:txBody>
-      </p:sp>
-      <p:sp>
-        <p:nvSpPr>
-          <p:cNvPr id="73" name="CardBody"/>
-          <p:cNvSpPr/>
-          <p:nvPr/>
-        </p:nvSpPr>
-        <p:spPr>
-          <a:xfrm>
-            <a:off x="4283066" y="2405612"/>
-            <a:ext cx="3625866" cy="2633164"/>
-          </a:xfrm>
-          <a:prstGeom prst="rect">
-            <a:avLst/>
-          </a:prstGeom>
-          <a:solidFill>
-            <a:srgbClr val="EAF2F5"/>
-          </a:solidFill>
-          <a:ln>
-            <a:noFill/>
-          </a:ln>
-        </p:spPr>
-        <p:txBody>
-          <a:bodyPr wrap="square" lIns="137160" tIns="91440" rIns="137160" bIns="91440" rtlCol="0" anchor="ctr">
-            <a:normAutofit/>
-          </a:bodyPr>
-          <a:lstStyle/>
-          <a:p>
-            <a:pPr marL="0" indent="0" algn="ctr">
-              <a:lnSpc>
-                <a:spcPct val="104000"/>
-              </a:lnSpc>
-              <a:spcBef>
-                <a:spcPts val="400"/>
-              </a:spcBef>
-              <a:buNone/>
-            </a:pPr>
-            <a:r>
-              <a:rPr lang="en-US" sz="1750" dirty="0">
-                <a:solidFill>
-                  <a:srgbClr val="000000"/>
-                </a:solidFill>
-                <a:latin typeface="Arial"/>
-                <a:cs typeface="Arial"/>
-              </a:rPr>
-              <a:t>NB: Writing (original draft)</a:t>
-            </a:r>
-          </a:p>
-          <a:p>
-            <a:pPr marL="0" indent="0" algn="ctr">
-              <a:lnSpc>
-                <a:spcPct val="104000"/>
-              </a:lnSpc>
-              <a:spcBef>
-                <a:spcPts val="400"/>
-              </a:spcBef>
-              <a:buNone/>
-            </a:pPr>
-            <a:r>
-              <a:rPr lang="en-US" sz="1750" dirty="0">
-                <a:solidFill>
-                  <a:srgbClr val="000000"/>
-                </a:solidFill>
-                <a:latin typeface="Arial"/>
-                <a:cs typeface="Arial"/>
-              </a:rPr>
-              <a:t>CS: Methodology, Formal analysis</a:t>
-            </a:r>
-          </a:p>
-          <a:p>
-            <a:pPr marL="0" indent="0" algn="ctr">
-              <a:lnSpc>
-                <a:spcPct val="104000"/>
-              </a:lnSpc>
-              <a:spcBef>
-                <a:spcPts val="400"/>
-              </a:spcBef>
-              <a:buNone/>
-            </a:pPr>
-            <a:r>
-              <a:rPr lang="en-US" sz="1750" dirty="0">
-                <a:solidFill>
-                  <a:srgbClr val="000000"/>
-                </a:solidFill>
-                <a:latin typeface="Arial"/>
-                <a:cs typeface="Arial"/>
-              </a:rPr>
-              <a:t>SDB: Conceptualization, Supervision, Funding acquisition</a:t>
-            </a:r>
-          </a:p>
-        </p:txBody>
-      </p:sp>
-      <p:sp>
-        <p:nvSpPr>
-          <p:cNvPr id="74" name="CardHead"/>
-          <p:cNvSpPr/>
-          <p:nvPr/>
-        </p:nvSpPr>
-        <p:spPr>
-          <a:xfrm>
-            <a:off x="8108932" y="1765612"/>
-            <a:ext cx="3625866" cy="640000"/>
-          </a:xfrm>
-          <a:prstGeom prst="rect">
-            <a:avLst/>
-          </a:prstGeom>
-          <a:solidFill>
-            <a:srgbClr val="5FA39B"/>
-          </a:solidFill>
-          <a:ln>
-            <a:noFill/>
-          </a:ln>
-        </p:spPr>
-        <p:txBody>
-          <a:bodyPr wrap="square" lIns="91440" tIns="45720" rIns="91440" bIns="45720" rtlCol="0" anchor="ctr">
-            <a:normAutofit/>
-          </a:bodyPr>
-          <a:lstStyle/>
-          <a:p>
-            <a:pPr marL="0" indent="0" algn="ctr">
-              <a:buNone/>
-            </a:pPr>
-            <a:r>
-              <a:rPr lang="en-US" sz="1900" b="1" dirty="0">
-                <a:solidFill>
-                  <a:srgbClr val="FFFFFF"/>
-                </a:solidFill>
-                <a:latin typeface="Arial"/>
-                <a:cs typeface="Arial"/>
-              </a:rPr>
-              <a:t>Đề cương của bạn</a:t>
-            </a:r>
-          </a:p>
-        </p:txBody>
-      </p:sp>
-      <p:sp>
-        <p:nvSpPr>
-          <p:cNvPr id="75" name="CardBody"/>
-          <p:cNvSpPr/>
-          <p:nvPr/>
-        </p:nvSpPr>
-        <p:spPr>
-          <a:xfrm>
-            <a:off x="8108932" y="2405612"/>
-            <a:ext cx="3625866" cy="2633164"/>
-          </a:xfrm>
-          <a:prstGeom prst="rect">
-            <a:avLst/>
-          </a:prstGeom>
-          <a:solidFill>
-            <a:srgbClr val="EAF2F5"/>
-          </a:solidFill>
-          <a:ln>
-            <a:noFill/>
-          </a:ln>
-        </p:spPr>
-        <p:txBody>
-          <a:bodyPr wrap="square" lIns="137160" tIns="91440" rIns="137160" bIns="91440" rtlCol="0" anchor="ctr">
-            <a:normAutofit/>
-          </a:bodyPr>
-          <a:lstStyle/>
-          <a:p>
-            <a:pPr marL="0" indent="0" algn="ctr">
-              <a:lnSpc>
-                <a:spcPct val="104000"/>
-              </a:lnSpc>
-              <a:spcBef>
-                <a:spcPts val="400"/>
-              </a:spcBef>
-              <a:buNone/>
-            </a:pPr>
-            <a:r>
-              <a:rPr lang="en-US" sz="1750" dirty="0">
-                <a:solidFill>
-                  <a:srgbClr val="000000"/>
-                </a:solidFill>
-                <a:latin typeface="Arial"/>
-                <a:cs typeface="Arial"/>
-              </a:rPr>
-              <a:t>Thống nhất danh sách tác giả ngay</a:t>
-            </a:r>
-          </a:p>
-          <a:p>
-            <a:pPr marL="0" indent="0" algn="ctr">
-              <a:lnSpc>
-                <a:spcPct val="104000"/>
-              </a:lnSpc>
-              <a:spcBef>
-                <a:spcPts val="400"/>
-              </a:spcBef>
-              <a:buNone/>
-            </a:pPr>
-            <a:r>
-              <a:rPr lang="en-US" sz="1750" dirty="0">
-                <a:solidFill>
-                  <a:srgbClr val="000000"/>
-                </a:solidFill>
-                <a:latin typeface="Arial"/>
-                <a:cs typeface="Arial"/>
-              </a:rPr>
-              <a:t>Ghi vai trò từng người</a:t>
-            </a:r>
-          </a:p>
-          <a:p>
-            <a:pPr marL="0" indent="0" algn="ctr">
-              <a:lnSpc>
-                <a:spcPct val="104000"/>
-              </a:lnSpc>
-              <a:spcBef>
-                <a:spcPts val="400"/>
-              </a:spcBef>
-              <a:buNone/>
-            </a:pPr>
-            <a:r>
-              <a:rPr lang="en-US" sz="1750" dirty="0">
-                <a:solidFill>
-                  <a:srgbClr val="000000"/>
-                </a:solidFill>
-                <a:latin typeface="Arial"/>
-                <a:cs typeface="Arial"/>
-              </a:rPr>
-              <a:t>Xem lại trước khi nộp</a:t>
-            </a:r>
-          </a:p>
-        </p:txBody>
-      </p:sp>
-      <p:sp>
-        <p:nvSpPr>
-          <p:cNvPr id="60" name="Takeaway"/>
-          <p:cNvSpPr/>
-          <p:nvPr/>
-        </p:nvSpPr>
-        <p:spPr>
-          <a:xfrm>
-            <a:off x="457200" y="5390000"/>
-            <a:ext cx="11277600" cy="560000"/>
-          </a:xfrm>
-          <a:prstGeom prst="roundRect">
-            <a:avLst>
-              <a:gd name="adj" fmla="val 12000"/>
-            </a:avLst>
-          </a:prstGeom>
-          <a:solidFill>
-            <a:srgbClr val="0D7377"/>
-          </a:solidFill>
-          <a:ln>
-            <a:noFill/>
-          </a:ln>
-        </p:spPr>
-        <p:txBody>
           <a:bodyPr wrap="square" lIns="182880" tIns="45720" rIns="182880" bIns="45720" rtlCol="0" anchor="ctr">
             <a:normAutofit/>
           </a:bodyPr>
@@ -29512,7 +28918,7 @@
                 <a:latin typeface="Arial"/>
                 <a:cs typeface="Arial"/>
               </a:rPr>
-              <a:t>Vai trò minh bạch ngăn tác giả 'danh dự' và tác giả 'ma'.</a:t>
+              <a:t>Đặt vấn đề thu hẹp đến câu hỏi. Bàn luận mở rộng trở lại thực hành.</a:t>
             </a:r>
           </a:p>
         </p:txBody>
@@ -29622,6 +29028,782 @@
 </file>
 
 <file path=ppt/slides/slide45.xml><?xml version="1.0" encoding="utf-8"?>
+<p:sld xmlns:a="http://schemas.openxmlformats.org/drawingml/2006/main" xmlns:r="http://schemas.openxmlformats.org/officeDocument/2006/relationships" xmlns:p="http://schemas.openxmlformats.org/presentationml/2006/main">
+  <p:cSld>
+    <p:bg>
+      <p:bgPr>
+        <a:solidFill>
+          <a:schemeClr val="bg1"/>
+        </a:solidFill>
+        <a:effectLst/>
+      </p:bgPr>
+    </p:bg>
+    <p:spTree>
+      <p:nvGrpSpPr>
+        <p:cNvPr id="1" name=""/>
+        <p:cNvGrpSpPr/>
+        <p:nvPr/>
+      </p:nvGrpSpPr>
+      <p:grpSpPr>
+        <a:xfrm>
+          <a:off x="0" y="0"/>
+          <a:ext cx="0" cy="0"/>
+          <a:chOff x="0" y="0"/>
+          <a:chExt cx="0" cy="0"/>
+        </a:xfrm>
+      </p:grpSpPr>
+      <p:sp>
+        <p:nvSpPr>
+          <p:cNvPr id="10" name="Title"/>
+          <p:cNvSpPr txBox="1"/>
+          <p:nvPr/>
+        </p:nvSpPr>
+        <p:spPr>
+          <a:xfrm>
+            <a:off x="457200" y="160000"/>
+            <a:ext cx="11277600" cy="750000"/>
+          </a:xfrm>
+          <a:prstGeom prst="rect">
+            <a:avLst/>
+          </a:prstGeom>
+          <a:noFill/>
+          <a:ln>
+            <a:noFill/>
+          </a:ln>
+        </p:spPr>
+        <p:txBody>
+          <a:bodyPr wrap="square" lIns="91440" tIns="45720" rIns="91440" bIns="45720" rtlCol="0" anchor="ctr"/>
+          <a:lstStyle/>
+          <a:p>
+            <a:pPr marL="0" indent="0" algn="l">
+              <a:buNone/>
+            </a:pPr>
+            <a:r>
+              <a:rPr lang="en-US" sz="2800" b="1" dirty="0">
+                <a:solidFill>
+                  <a:srgbClr val="0D7377"/>
+                </a:solidFill>
+                <a:latin typeface="Arial"/>
+                <a:cs typeface="Arial"/>
+              </a:rPr>
+              <a:t>CRediT: ghi rõ ai làm gì</a:t>
+            </a:r>
+          </a:p>
+        </p:txBody>
+      </p:sp>
+      <p:sp>
+        <p:nvSpPr>
+          <p:cNvPr id="11" name="Rule"/>
+          <p:cNvSpPr/>
+          <p:nvPr/>
+        </p:nvSpPr>
+        <p:spPr>
+          <a:xfrm>
+            <a:off x="457200" y="940000"/>
+            <a:ext cx="11277600" cy="0"/>
+          </a:xfrm>
+          <a:prstGeom prst="line">
+            <a:avLst/>
+          </a:prstGeom>
+          <a:ln w="19050">
+            <a:solidFill>
+              <a:srgbClr val="0D7377"/>
+            </a:solidFill>
+          </a:ln>
+        </p:spPr>
+        <p:txBody>
+          <a:bodyPr/>
+          <a:lstStyle/>
+          <a:p>
+            <a:endParaRPr/>
+          </a:p>
+        </p:txBody>
+      </p:sp>
+      <p:sp>
+        <p:nvSpPr>
+          <p:cNvPr id="19" name="Intro"/>
+          <p:cNvSpPr txBox="1"/>
+          <p:nvPr/>
+        </p:nvSpPr>
+        <p:spPr>
+          <a:xfrm>
+            <a:off x="457200" y="1100000"/>
+            <a:ext cx="11277600" cy="480000"/>
+          </a:xfrm>
+          <a:prstGeom prst="rect">
+            <a:avLst/>
+          </a:prstGeom>
+          <a:noFill/>
+          <a:ln>
+            <a:noFill/>
+          </a:ln>
+        </p:spPr>
+        <p:txBody>
+          <a:bodyPr wrap="square" lIns="91440" tIns="45720" rIns="91440" bIns="45720" rtlCol="0" anchor="t"/>
+          <a:lstStyle/>
+          <a:p>
+            <a:pPr marL="0" indent="0" algn="l">
+              <a:buNone/>
+            </a:pPr>
+            <a:r>
+              <a:rPr lang="en-US" sz="1700" i="1" dirty="0">
+                <a:solidFill>
+                  <a:srgbClr val="595959"/>
+                </a:solidFill>
+                <a:latin typeface="Arial"/>
+                <a:cs typeface="Arial"/>
+              </a:rPr>
+              <a:t>CRediT (phân loại vai trò đóng góp): 14 vai trò chuẩn mà tạp chí ngày nay yêu cầu.</a:t>
+            </a:r>
+          </a:p>
+        </p:txBody>
+      </p:sp>
+      <p:sp>
+        <p:nvSpPr>
+          <p:cNvPr id="70" name="CardHead"/>
+          <p:cNvSpPr/>
+          <p:nvPr/>
+        </p:nvSpPr>
+        <p:spPr>
+          <a:xfrm>
+            <a:off x="457200" y="1765612"/>
+            <a:ext cx="3625866" cy="640000"/>
+          </a:xfrm>
+          <a:prstGeom prst="rect">
+            <a:avLst/>
+          </a:prstGeom>
+          <a:solidFill>
+            <a:srgbClr val="0D7377"/>
+          </a:solidFill>
+          <a:ln>
+            <a:noFill/>
+          </a:ln>
+        </p:spPr>
+        <p:txBody>
+          <a:bodyPr wrap="square" lIns="91440" tIns="45720" rIns="91440" bIns="45720" rtlCol="0" anchor="ctr">
+            <a:normAutofit/>
+          </a:bodyPr>
+          <a:lstStyle/>
+          <a:p>
+            <a:pPr marL="0" indent="0" algn="ctr">
+              <a:buNone/>
+            </a:pPr>
+            <a:r>
+              <a:rPr lang="en-US" sz="1900" b="1" dirty="0">
+                <a:solidFill>
+                  <a:srgbClr val="FFFFFF"/>
+                </a:solidFill>
+                <a:latin typeface="Arial"/>
+                <a:cs typeface="Arial"/>
+              </a:rPr>
+              <a:t>Một số trong 14 vai trò</a:t>
+            </a:r>
+          </a:p>
+        </p:txBody>
+      </p:sp>
+      <p:sp>
+        <p:nvSpPr>
+          <p:cNvPr id="71" name="CardBody"/>
+          <p:cNvSpPr/>
+          <p:nvPr/>
+        </p:nvSpPr>
+        <p:spPr>
+          <a:xfrm>
+            <a:off x="457200" y="2405612"/>
+            <a:ext cx="3625866" cy="2633164"/>
+          </a:xfrm>
+          <a:prstGeom prst="rect">
+            <a:avLst/>
+          </a:prstGeom>
+          <a:solidFill>
+            <a:srgbClr val="EAF2F5"/>
+          </a:solidFill>
+          <a:ln>
+            <a:noFill/>
+          </a:ln>
+        </p:spPr>
+        <p:txBody>
+          <a:bodyPr wrap="square" lIns="137160" tIns="91440" rIns="137160" bIns="91440" rtlCol="0" anchor="ctr">
+            <a:normAutofit/>
+          </a:bodyPr>
+          <a:lstStyle/>
+          <a:p>
+            <a:pPr marL="0" indent="0" algn="ctr">
+              <a:lnSpc>
+                <a:spcPct val="104000"/>
+              </a:lnSpc>
+              <a:spcBef>
+                <a:spcPts val="400"/>
+              </a:spcBef>
+              <a:buNone/>
+            </a:pPr>
+            <a:r>
+              <a:rPr lang="en-US" sz="1750" dirty="0">
+                <a:solidFill>
+                  <a:srgbClr val="000000"/>
+                </a:solidFill>
+                <a:latin typeface="Arial"/>
+                <a:cs typeface="Arial"/>
+              </a:rPr>
+              <a:t>Conceptualization</a:t>
+            </a:r>
+          </a:p>
+          <a:p>
+            <a:pPr marL="0" indent="0" algn="ctr">
+              <a:lnSpc>
+                <a:spcPct val="104000"/>
+              </a:lnSpc>
+              <a:spcBef>
+                <a:spcPts val="400"/>
+              </a:spcBef>
+              <a:buNone/>
+            </a:pPr>
+            <a:r>
+              <a:rPr lang="en-US" sz="1750" dirty="0">
+                <a:solidFill>
+                  <a:srgbClr val="000000"/>
+                </a:solidFill>
+                <a:latin typeface="Arial"/>
+                <a:cs typeface="Arial"/>
+              </a:rPr>
+              <a:t>Methodology</a:t>
+            </a:r>
+          </a:p>
+          <a:p>
+            <a:pPr marL="0" indent="0" algn="ctr">
+              <a:lnSpc>
+                <a:spcPct val="104000"/>
+              </a:lnSpc>
+              <a:spcBef>
+                <a:spcPts val="400"/>
+              </a:spcBef>
+              <a:buNone/>
+            </a:pPr>
+            <a:r>
+              <a:rPr lang="en-US" sz="1750" dirty="0">
+                <a:solidFill>
+                  <a:srgbClr val="000000"/>
+                </a:solidFill>
+                <a:latin typeface="Arial"/>
+                <a:cs typeface="Arial"/>
+              </a:rPr>
+              <a:t>Investigation</a:t>
+            </a:r>
+          </a:p>
+          <a:p>
+            <a:pPr marL="0" indent="0" algn="ctr">
+              <a:lnSpc>
+                <a:spcPct val="104000"/>
+              </a:lnSpc>
+              <a:spcBef>
+                <a:spcPts val="400"/>
+              </a:spcBef>
+              <a:buNone/>
+            </a:pPr>
+            <a:r>
+              <a:rPr lang="en-US" sz="1750" dirty="0">
+                <a:solidFill>
+                  <a:srgbClr val="000000"/>
+                </a:solidFill>
+                <a:latin typeface="Arial"/>
+                <a:cs typeface="Arial"/>
+              </a:rPr>
+              <a:t>Formal analysis</a:t>
+            </a:r>
+          </a:p>
+          <a:p>
+            <a:pPr marL="0" indent="0" algn="ctr">
+              <a:lnSpc>
+                <a:spcPct val="104000"/>
+              </a:lnSpc>
+              <a:spcBef>
+                <a:spcPts val="400"/>
+              </a:spcBef>
+              <a:buNone/>
+            </a:pPr>
+            <a:r>
+              <a:rPr lang="en-US" sz="1750" dirty="0">
+                <a:solidFill>
+                  <a:srgbClr val="000000"/>
+                </a:solidFill>
+                <a:latin typeface="Arial"/>
+                <a:cs typeface="Arial"/>
+              </a:rPr>
+              <a:t>Writing (original draft)</a:t>
+            </a:r>
+          </a:p>
+          <a:p>
+            <a:pPr marL="0" indent="0" algn="ctr">
+              <a:lnSpc>
+                <a:spcPct val="104000"/>
+              </a:lnSpc>
+              <a:spcBef>
+                <a:spcPts val="400"/>
+              </a:spcBef>
+              <a:buNone/>
+            </a:pPr>
+            <a:r>
+              <a:rPr lang="en-US" sz="1750" dirty="0">
+                <a:solidFill>
+                  <a:srgbClr val="000000"/>
+                </a:solidFill>
+                <a:latin typeface="Arial"/>
+                <a:cs typeface="Arial"/>
+              </a:rPr>
+              <a:t>Writing (review and editing)</a:t>
+            </a:r>
+          </a:p>
+          <a:p>
+            <a:pPr marL="0" indent="0" algn="ctr">
+              <a:lnSpc>
+                <a:spcPct val="104000"/>
+              </a:lnSpc>
+              <a:spcBef>
+                <a:spcPts val="400"/>
+              </a:spcBef>
+              <a:buNone/>
+            </a:pPr>
+            <a:r>
+              <a:rPr lang="en-US" sz="1750" dirty="0">
+                <a:solidFill>
+                  <a:srgbClr val="000000"/>
+                </a:solidFill>
+                <a:latin typeface="Arial"/>
+                <a:cs typeface="Arial"/>
+              </a:rPr>
+              <a:t>Supervision</a:t>
+            </a:r>
+          </a:p>
+        </p:txBody>
+      </p:sp>
+      <p:sp>
+        <p:nvSpPr>
+          <p:cNvPr id="72" name="CardHead"/>
+          <p:cNvSpPr/>
+          <p:nvPr/>
+        </p:nvSpPr>
+        <p:spPr>
+          <a:xfrm>
+            <a:off x="4283066" y="1765612"/>
+            <a:ext cx="3625866" cy="640000"/>
+          </a:xfrm>
+          <a:prstGeom prst="rect">
+            <a:avLst/>
+          </a:prstGeom>
+          <a:solidFill>
+            <a:srgbClr val="0B376C"/>
+          </a:solidFill>
+          <a:ln>
+            <a:noFill/>
+          </a:ln>
+        </p:spPr>
+        <p:txBody>
+          <a:bodyPr wrap="square" lIns="91440" tIns="45720" rIns="91440" bIns="45720" rtlCol="0" anchor="ctr">
+            <a:normAutofit/>
+          </a:bodyPr>
+          <a:lstStyle/>
+          <a:p>
+            <a:pPr marL="0" indent="0" algn="ctr">
+              <a:buNone/>
+            </a:pPr>
+            <a:r>
+              <a:rPr lang="en-US" sz="1900" b="1" dirty="0">
+                <a:solidFill>
+                  <a:srgbClr val="FFFFFF"/>
+                </a:solidFill>
+                <a:latin typeface="Arial"/>
+                <a:cs typeface="Arial"/>
+              </a:rPr>
+              <a:t>Bài 1 đã làm</a:t>
+            </a:r>
+          </a:p>
+        </p:txBody>
+      </p:sp>
+      <p:sp>
+        <p:nvSpPr>
+          <p:cNvPr id="73" name="CardBody"/>
+          <p:cNvSpPr/>
+          <p:nvPr/>
+        </p:nvSpPr>
+        <p:spPr>
+          <a:xfrm>
+            <a:off x="4283066" y="2405612"/>
+            <a:ext cx="3625866" cy="2633164"/>
+          </a:xfrm>
+          <a:prstGeom prst="rect">
+            <a:avLst/>
+          </a:prstGeom>
+          <a:solidFill>
+            <a:srgbClr val="EAF2F5"/>
+          </a:solidFill>
+          <a:ln>
+            <a:noFill/>
+          </a:ln>
+        </p:spPr>
+        <p:txBody>
+          <a:bodyPr wrap="square" lIns="137160" tIns="91440" rIns="137160" bIns="91440" rtlCol="0" anchor="ctr">
+            <a:normAutofit/>
+          </a:bodyPr>
+          <a:lstStyle/>
+          <a:p>
+            <a:pPr marL="0" indent="0" algn="ctr">
+              <a:lnSpc>
+                <a:spcPct val="104000"/>
+              </a:lnSpc>
+              <a:spcBef>
+                <a:spcPts val="400"/>
+              </a:spcBef>
+              <a:buNone/>
+            </a:pPr>
+            <a:r>
+              <a:rPr lang="en-US" sz="1750" dirty="0">
+                <a:solidFill>
+                  <a:srgbClr val="000000"/>
+                </a:solidFill>
+                <a:latin typeface="Arial"/>
+                <a:cs typeface="Arial"/>
+              </a:rPr>
+              <a:t>NB: Writing (original draft)</a:t>
+            </a:r>
+          </a:p>
+          <a:p>
+            <a:pPr marL="0" indent="0" algn="ctr">
+              <a:lnSpc>
+                <a:spcPct val="104000"/>
+              </a:lnSpc>
+              <a:spcBef>
+                <a:spcPts val="400"/>
+              </a:spcBef>
+              <a:buNone/>
+            </a:pPr>
+            <a:r>
+              <a:rPr lang="en-US" sz="1750" dirty="0">
+                <a:solidFill>
+                  <a:srgbClr val="000000"/>
+                </a:solidFill>
+                <a:latin typeface="Arial"/>
+                <a:cs typeface="Arial"/>
+              </a:rPr>
+              <a:t>CS: Methodology, Formal analysis</a:t>
+            </a:r>
+          </a:p>
+          <a:p>
+            <a:pPr marL="0" indent="0" algn="ctr">
+              <a:lnSpc>
+                <a:spcPct val="104000"/>
+              </a:lnSpc>
+              <a:spcBef>
+                <a:spcPts val="400"/>
+              </a:spcBef>
+              <a:buNone/>
+            </a:pPr>
+            <a:r>
+              <a:rPr lang="en-US" sz="1750" dirty="0">
+                <a:solidFill>
+                  <a:srgbClr val="000000"/>
+                </a:solidFill>
+                <a:latin typeface="Arial"/>
+                <a:cs typeface="Arial"/>
+              </a:rPr>
+              <a:t>SDB: Conceptualization, Supervision, Funding acquisition</a:t>
+            </a:r>
+          </a:p>
+        </p:txBody>
+      </p:sp>
+      <p:sp>
+        <p:nvSpPr>
+          <p:cNvPr id="74" name="CardHead"/>
+          <p:cNvSpPr/>
+          <p:nvPr/>
+        </p:nvSpPr>
+        <p:spPr>
+          <a:xfrm>
+            <a:off x="8108932" y="1765612"/>
+            <a:ext cx="3625866" cy="640000"/>
+          </a:xfrm>
+          <a:prstGeom prst="rect">
+            <a:avLst/>
+          </a:prstGeom>
+          <a:solidFill>
+            <a:srgbClr val="5FA39B"/>
+          </a:solidFill>
+          <a:ln>
+            <a:noFill/>
+          </a:ln>
+        </p:spPr>
+        <p:txBody>
+          <a:bodyPr wrap="square" lIns="91440" tIns="45720" rIns="91440" bIns="45720" rtlCol="0" anchor="ctr">
+            <a:normAutofit/>
+          </a:bodyPr>
+          <a:lstStyle/>
+          <a:p>
+            <a:pPr marL="0" indent="0" algn="ctr">
+              <a:buNone/>
+            </a:pPr>
+            <a:r>
+              <a:rPr lang="en-US" sz="1900" b="1" dirty="0">
+                <a:solidFill>
+                  <a:srgbClr val="FFFFFF"/>
+                </a:solidFill>
+                <a:latin typeface="Arial"/>
+                <a:cs typeface="Arial"/>
+              </a:rPr>
+              <a:t>Đề cương của bạn</a:t>
+            </a:r>
+          </a:p>
+        </p:txBody>
+      </p:sp>
+      <p:sp>
+        <p:nvSpPr>
+          <p:cNvPr id="75" name="CardBody"/>
+          <p:cNvSpPr/>
+          <p:nvPr/>
+        </p:nvSpPr>
+        <p:spPr>
+          <a:xfrm>
+            <a:off x="8108932" y="2405612"/>
+            <a:ext cx="3625866" cy="2633164"/>
+          </a:xfrm>
+          <a:prstGeom prst="rect">
+            <a:avLst/>
+          </a:prstGeom>
+          <a:solidFill>
+            <a:srgbClr val="EAF2F5"/>
+          </a:solidFill>
+          <a:ln>
+            <a:noFill/>
+          </a:ln>
+        </p:spPr>
+        <p:txBody>
+          <a:bodyPr wrap="square" lIns="137160" tIns="91440" rIns="137160" bIns="91440" rtlCol="0" anchor="ctr">
+            <a:normAutofit/>
+          </a:bodyPr>
+          <a:lstStyle/>
+          <a:p>
+            <a:pPr marL="0" indent="0" algn="ctr">
+              <a:lnSpc>
+                <a:spcPct val="104000"/>
+              </a:lnSpc>
+              <a:spcBef>
+                <a:spcPts val="400"/>
+              </a:spcBef>
+              <a:buNone/>
+            </a:pPr>
+            <a:r>
+              <a:rPr lang="en-US" sz="1750" dirty="0">
+                <a:solidFill>
+                  <a:srgbClr val="000000"/>
+                </a:solidFill>
+                <a:latin typeface="Arial"/>
+                <a:cs typeface="Arial"/>
+              </a:rPr>
+              <a:t>Thống nhất danh sách tác giả ngay</a:t>
+            </a:r>
+          </a:p>
+          <a:p>
+            <a:pPr marL="0" indent="0" algn="ctr">
+              <a:lnSpc>
+                <a:spcPct val="104000"/>
+              </a:lnSpc>
+              <a:spcBef>
+                <a:spcPts val="400"/>
+              </a:spcBef>
+              <a:buNone/>
+            </a:pPr>
+            <a:r>
+              <a:rPr lang="en-US" sz="1750" dirty="0">
+                <a:solidFill>
+                  <a:srgbClr val="000000"/>
+                </a:solidFill>
+                <a:latin typeface="Arial"/>
+                <a:cs typeface="Arial"/>
+              </a:rPr>
+              <a:t>Ghi vai trò từng người</a:t>
+            </a:r>
+          </a:p>
+          <a:p>
+            <a:pPr marL="0" indent="0" algn="ctr">
+              <a:lnSpc>
+                <a:spcPct val="104000"/>
+              </a:lnSpc>
+              <a:spcBef>
+                <a:spcPts val="400"/>
+              </a:spcBef>
+              <a:buNone/>
+            </a:pPr>
+            <a:r>
+              <a:rPr lang="en-US" sz="1750" dirty="0">
+                <a:solidFill>
+                  <a:srgbClr val="000000"/>
+                </a:solidFill>
+                <a:latin typeface="Arial"/>
+                <a:cs typeface="Arial"/>
+              </a:rPr>
+              <a:t>Xem lại trước khi nộp</a:t>
+            </a:r>
+          </a:p>
+        </p:txBody>
+      </p:sp>
+      <p:sp>
+        <p:nvSpPr>
+          <p:cNvPr id="60" name="Takeaway"/>
+          <p:cNvSpPr/>
+          <p:nvPr/>
+        </p:nvSpPr>
+        <p:spPr>
+          <a:xfrm>
+            <a:off x="457200" y="5390000"/>
+            <a:ext cx="11277600" cy="560000"/>
+          </a:xfrm>
+          <a:prstGeom prst="roundRect">
+            <a:avLst>
+              <a:gd name="adj" fmla="val 12000"/>
+            </a:avLst>
+          </a:prstGeom>
+          <a:solidFill>
+            <a:srgbClr val="0D7377"/>
+          </a:solidFill>
+          <a:ln>
+            <a:noFill/>
+          </a:ln>
+        </p:spPr>
+        <p:txBody>
+          <a:bodyPr wrap="square" lIns="182880" tIns="45720" rIns="182880" bIns="45720" rtlCol="0" anchor="ctr">
+            <a:normAutofit/>
+          </a:bodyPr>
+          <a:lstStyle/>
+          <a:p>
+            <a:pPr marL="0" indent="0" algn="ctr">
+              <a:buNone/>
+            </a:pPr>
+            <a:r>
+              <a:rPr lang="en-US" sz="1300" b="1" dirty="0">
+                <a:solidFill>
+                  <a:srgbClr val="FFFFFF"/>
+                </a:solidFill>
+                <a:latin typeface="Arial"/>
+                <a:cs typeface="Arial"/>
+              </a:rPr>
+              <a:t>THÔNG ĐIỆP CHÍNH   </a:t>
+            </a:r>
+            <a:r>
+              <a:rPr lang="en-US" sz="1550" dirty="0">
+                <a:solidFill>
+                  <a:srgbClr val="FFFFFF"/>
+                </a:solidFill>
+                <a:latin typeface="Arial"/>
+                <a:cs typeface="Arial"/>
+              </a:rPr>
+              <a:t>Vai trò minh bạch ngăn tác giả 'danh dự' và tác giả 'ma'.</a:t>
+            </a:r>
+          </a:p>
+        </p:txBody>
+      </p:sp>
+      <p:sp>
+        <p:nvSpPr>
+          <p:cNvPr id="901" name="Footer"/>
+          <p:cNvSpPr txBox="1"/>
+          <p:nvPr/>
+        </p:nvSpPr>
+        <p:spPr>
+          <a:xfrm>
+            <a:off x="4599946" y="6458701"/>
+            <a:ext cx="2845651" cy="276999"/>
+          </a:xfrm>
+          <a:prstGeom prst="rect">
+            <a:avLst/>
+          </a:prstGeom>
+          <a:noFill/>
+          <a:ln>
+            <a:noFill/>
+          </a:ln>
+        </p:spPr>
+        <p:txBody>
+          <a:bodyPr wrap="none" lIns="91440" tIns="45720" rIns="91440" bIns="45720" rtlCol="0" anchor="t"/>
+          <a:lstStyle/>
+          <a:p>
+            <a:r>
+              <a:rPr lang="en-US" sz="1200" dirty="0">
+                <a:solidFill>
+                  <a:schemeClr val="accent5">
+                    <a:lumMod val="50000"/>
+                  </a:schemeClr>
+                </a:solidFill>
+                <a:latin typeface="Arial"/>
+              </a:rPr>
+              <a:t>Neudata | #ClearDataClearImpact</a:t>
+            </a:r>
+          </a:p>
+        </p:txBody>
+      </p:sp>
+      <p:pic>
+        <p:nvPicPr>
+          <p:cNvPr id="902" name="Logo"/>
+          <p:cNvPicPr>
+            <a:picLocks noChangeAspect="1"/>
+          </p:cNvPicPr>
+          <p:nvPr/>
+        </p:nvPicPr>
+        <p:blipFill>
+          <a:blip r:embed="rId3"/>
+          <a:stretch>
+            <a:fillRect/>
+          </a:stretch>
+        </p:blipFill>
+        <p:spPr>
+          <a:xfrm>
+            <a:off x="138853" y="6122125"/>
+            <a:ext cx="716763" cy="683623"/>
+          </a:xfrm>
+          <a:prstGeom prst="rect">
+            <a:avLst/>
+          </a:prstGeom>
+        </p:spPr>
+      </p:pic>
+      <p:sp>
+        <p:nvSpPr>
+          <p:cNvPr id="903" name="Slide Number"/>
+          <p:cNvSpPr>
+            <a:spLocks noGrp="1"/>
+          </p:cNvSpPr>
+          <p:nvPr>
+            <p:ph type="sldNum" sz="quarter" idx="12"/>
+          </p:nvPr>
+        </p:nvSpPr>
+        <p:spPr>
+          <a:xfrm>
+            <a:off x="11330000" y="6470000"/>
+            <a:ext cx="620000" cy="320000"/>
+          </a:xfrm>
+        </p:spPr>
+        <p:txBody>
+          <a:bodyPr/>
+          <a:lstStyle/>
+          <a:p>
+            <a:pPr algn="r"/>
+            <a:fld id="{C1FF6DA9-008F-8B48-92A6-B652298478BF}" type="slidenum">
+              <a:rPr lang="en-US" sz="1050" smtClean="0">
+                <a:solidFill>
+                  <a:schemeClr val="accent5">
+                    <a:lumMod val="50000"/>
+                  </a:schemeClr>
+                </a:solidFill>
+              </a:rPr>
+              <a:t>2</a:t>
+            </a:fld>
+            <a:endParaRPr lang="en-US"/>
+          </a:p>
+        </p:txBody>
+      </p:sp>
+    </p:spTree>
+  </p:cSld>
+  <p:clrMapOvr>
+    <a:masterClrMapping/>
+  </p:clrMapOvr>
+</p:sld>
+</file>
+
+<file path=ppt/slides/slide46.xml><?xml version="1.0" encoding="utf-8"?>
 <p:sld xmlns:a="http://schemas.openxmlformats.org/drawingml/2006/main" xmlns:r="http://schemas.openxmlformats.org/officeDocument/2006/relationships" xmlns:p="http://schemas.openxmlformats.org/presentationml/2006/main">
   <p:cSld>
     <p:bg>

--- a/vi/files/slides/Session_7_VN.pptx
+++ b/vi/files/slides/Session_7_VN.pptx
@@ -734,7 +734,7 @@
           <a:p>
             <a:r>
               <a:rPr lang="en-US" sz="1400" b="0" dirty="0"/>
-              <a:t>Buổi 7 (19:30-22:30, giải lao 20:45-21:00). Trước giải lao: đạo đức, liêm chính và Phần 4 đề cương. Sau giải lao: phần Kết quả.</a:t>
+              <a:t>Buổi 7 (19:30-22:30, giải lao 20:45-21:00). Trước giải lao: đạo đức, liêm chính và Phần 4 đề cương. Sau giải lao: IMRaD, Phương pháp và Kết quả.</a:t>
             </a:r>
           </a:p>
           <a:p>
@@ -1124,12 +1124,6 @@
           <a:p>
             <a:r>
               <a:rPr lang="en-US" sz="1400" b="0" dirty="0"/>
-              <a:t>Đây là dữ liệu mô phỏng: học viên ghi câu về dữ liệu mô phỏng ngay dưới tên bài, như hướng dẫn bài tập. Chỉ cần đoạn đạo đức nếu viết phần Phương pháp (không bắt buộc).</a:t>
-            </a:r>
-          </a:p>
-          <a:p>
-            <a:r>
-              <a:rPr lang="en-US" sz="1400" b="0" dirty="0"/>
               <a:t>Hỏi: trong bài báo thật, đoạn này nằm ở đâu? Kỳ vọng: phần Phương pháp.</a:t>
             </a:r>
           </a:p>
@@ -2159,7 +2153,7 @@
           <a:p>
             <a:r>
               <a:rPr lang="en-US" sz="1400" b="0" dirty="0"/>
-              <a:t>Về nhà: Phần 4 đề cương của mình. Ai muốn trình bày thì gửi email cho trưởng khóa học trước thứ Tư trước Buổi 8.</a:t>
+              <a:t>Về nhà: Phần 4 đề cương của mình. Ai muốn trình bày thì gửi email cho giảng viên trước thứ Tư 16/12.</a:t>
             </a:r>
           </a:p>
         </p:txBody>
@@ -2327,13 +2321,13 @@
           <a:p>
             <a:r>
               <a:rPr lang="en-US" sz="1400" b="0" dirty="0"/>
-              <a:t>Phần 7.3 (21:00-21:35). Chín slide và 3 phút kiểm tra.</a:t>
+              <a:t>Phần 7.3 (21:00-21:35). Mười slide và 3 phút kiểm tra.</a:t>
             </a:r>
           </a:p>
           <a:p>
             <a:r>
               <a:rPr lang="en-US" sz="1400" b="0" dirty="0"/>
-              <a:t>Các slide về Kết quả và ví dụ mẫu là trọng tâm. Các slide về Phương pháp ngắn hơn: Phương pháp không bắt buộc trong bản thảo.</a:t>
+              <a:t>IMRaD trước, rồi Phương pháp và Kết quả, mỗi phần có ví dụ mẫu trên Q1. Phần kiểm tra luyện cả hai.</a:t>
             </a:r>
           </a:p>
         </p:txBody>
@@ -2414,19 +2408,19 @@
           <a:p>
             <a:r>
               <a:rPr lang="en-US" sz="1400" b="0" dirty="0"/>
-              <a:t>Người viết bắt đầu từ bằng chứng: bảng trước, tên bài sau cùng.</a:t>
+              <a:t>IMRaD: Đặt vấn đề (vì sao), Phương pháp (đã làm gì), Kết quả (đã thấy gì), Bàn luận (điều đó có nghĩa gì). Tóm tắt và tên bài tóm lược toàn bài.</a:t>
             </a:r>
           </a:p>
           <a:p>
             <a:r>
               <a:rPr lang="en-US" sz="1400" b="0" dirty="0"/>
-              <a:t>Với FLUID-ICU, các bảng đã có trong gói kết quả, nên phần Kết quả của bạn bắt đầu từ đó.</a:t>
+              <a:t>Đặt vấn đề thu hẹp về câu hỏi, Bàn luận mở rộng trở lại thực hành. Đặt vấn đề của Bài 1 là hình phễu ba đoạn, và Bàn luận mở đầu bằng câu trả lời cho câu hỏi.</a:t>
             </a:r>
           </a:p>
           <a:p>
             <a:r>
               <a:rPr lang="en-US" sz="1400" b="0" dirty="0"/>
-              <a:t>Hiểu lầm: 'phải viết xong Đặt vấn đề mới bắt đầu được'.</a:t>
+              <a:t>Hôm nay: Phương pháp và Kết quả. Thứ Bảy tuần sau: Đặt vấn đề, Bàn luận, Tóm tắt và tên bài.</a:t>
             </a:r>
           </a:p>
         </p:txBody>
@@ -2507,19 +2501,19 @@
           <a:p>
             <a:r>
               <a:rPr lang="en-US" sz="1400" b="0" dirty="0"/>
-              <a:t>Phương pháp: đủ chi tiết để làm lại nghiên cứu, theo thứ tự STROBE.</a:t>
+              <a:t>Người viết bắt đầu từ bằng chứng: bảng trước, tên bài sau cùng.</a:t>
             </a:r>
           </a:p>
           <a:p>
             <a:r>
               <a:rPr lang="en-US" sz="1400" b="0" dirty="0"/>
-              <a:t>Tốt: Bài 1 mô tả can thiệp đủ để làm lại. Cần sửa: Bài 2 không nói biến hiệu chỉnh bị thiếu được xử lý thế nào.</a:t>
+              <a:t>Với FLUID-ICU, các bảng đã có trong gói kết quả, nên phần Kết quả của bạn bắt đầu từ đó.</a:t>
             </a:r>
           </a:p>
           <a:p>
             <a:r>
               <a:rPr lang="en-US" sz="1400" b="0" dirty="0"/>
-              <a:t>Phương pháp không bắt buộc trong bản thảo: mọi thông tin có trong gói kết quả, SAP và từ điển dữ liệu.</a:t>
+              <a:t>Hiểu lầm: 'phải viết xong Đặt vấn đề mới bắt đầu được'.</a:t>
             </a:r>
           </a:p>
         </p:txBody>
@@ -2600,19 +2594,19 @@
           <a:p>
             <a:r>
               <a:rPr lang="en-US" sz="1400" b="0" dirty="0"/>
-              <a:t>Dành cho ai viết phần Phương pháp (không bắt buộc). Mỗi mục STROBE một câu, tất cả từ gói kết quả Q1, mục 2.</a:t>
+              <a:t>Phương pháp: đủ chi tiết để làm lại nghiên cứu, theo thứ tự STROBE.</a:t>
             </a:r>
           </a:p>
           <a:p>
             <a:r>
               <a:rPr lang="en-US" sz="1400" b="0" dirty="0"/>
-              <a:t>Mục 10: với thuần tập có sẵn, ghi là mọi người bệnh đủ tiêu chuẩn đều được đưa vào.</a:t>
+              <a:t>Tốt: Bài 1 mô tả can thiệp đủ để làm lại. Cần sửa: Bài 2 không nói biến hiệu chỉnh bị thiếu được xử lý thế nào.</a:t>
             </a:r>
           </a:p>
           <a:p>
             <a:r>
               <a:rPr lang="en-US" sz="1400" b="0" dirty="0"/>
-              <a:t>Hỏi: câu nào người đọc cần để làm lại nghiên cứu? Kỳ vọng: cách tính cân bằng dịch.</a:t>
+              <a:t>Với FLUID-ICU, mọi thông tin có trong gói kết quả, SAP và từ điển dữ liệu.</a:t>
             </a:r>
           </a:p>
         </p:txBody>
@@ -2693,13 +2687,19 @@
           <a:p>
             <a:r>
               <a:rPr lang="en-US" sz="1400" b="0" dirty="0"/>
-              <a:t>Mục STROBE 12 cho Q1. Các biến hiệu chỉnh được chọn trong SAP trước khi xem dữ liệu.</a:t>
+              <a:t>Mỗi mục STROBE một câu, tất cả từ gói kết quả Q1, mục 2.</a:t>
             </a:r>
           </a:p>
           <a:p>
             <a:r>
               <a:rPr lang="en-US" sz="1400" b="0" dirty="0"/>
-              <a:t>Mỗi con số trong phần Kết quả phải truy được về một câu ở đây. Người phản biện đọc đoạn này đầu tiên.</a:t>
+              <a:t>Mục 10: với thuần tập có sẵn, ghi là mọi người bệnh đủ tiêu chuẩn đều được đưa vào.</a:t>
+            </a:r>
+          </a:p>
+          <a:p>
+            <a:r>
+              <a:rPr lang="en-US" sz="1400" b="0" dirty="0"/>
+              <a:t>Hỏi: câu nào người đọc cần để làm lại nghiên cứu? Kỳ vọng: cách tính cân bằng dịch.</a:t>
             </a:r>
           </a:p>
         </p:txBody>
@@ -2786,7 +2786,13 @@
           <a:p>
             <a:r>
               <a:rPr lang="en-US" sz="1400" b="0" dirty="0"/>
-              <a:t>Phần Kết quả: chúng tôi đưa kết quả cho câu hỏi của mỗi người, họ viết một phần Kết quả sẵn sàng để nộp. Phương pháp, Đặt vấn đề, Bàn luận và Tóm tắt không bắt buộc.</a:t>
+              <a:t>Phần Kết quả: chúng tôi đưa kết quả cho câu hỏi của mỗi người, họ viết một phần Kết quả sẵn sàng để nộp.</a:t>
+            </a:r>
+          </a:p>
+          <a:p>
+            <a:r>
+              <a:rPr lang="en-US" sz="1400" b="0" dirty="0"/>
+              <a:t>Mọi phần đều được dạy: hôm nay Phương pháp và Kết quả, tuần sau Đặt vấn đề, Bàn luận, Tóm tắt và tên bài. Chỉ bắt buộc nộp phần Kết quả.</a:t>
             </a:r>
           </a:p>
           <a:p>
@@ -2873,13 +2879,13 @@
           <a:p>
             <a:r>
               <a:rPr lang="en-US" sz="1400" b="0" dirty="0"/>
-              <a:t>Bốn quy tắc. Người tham gia trước, kèm lưu đồ. Tác động kèm KTC 95%, không viết 'p = 0.42, không có ý nghĩa'. Không bình luận. Mỗi số một chỗ, và văn bản phải khớp với bảng: văn bản và Bảng 1 của Bài 1 mâu thuẫn về creatinine.</a:t>
+              <a:t>Mục STROBE 12 cho Q1. Các biến hiệu chỉnh được chọn trong SAP trước khi xem dữ liệu.</a:t>
             </a:r>
           </a:p>
           <a:p>
             <a:r>
               <a:rPr lang="en-US" sz="1400" b="0" dirty="0"/>
-              <a:t>Trước khi nộp, đối chiếu mọi con số với gói kết quả.</a:t>
+              <a:t>Mỗi con số trong phần Kết quả phải truy được về một câu ở đây. Người phản biện đọc đoạn này đầu tiên.</a:t>
             </a:r>
           </a:p>
         </p:txBody>
@@ -2960,19 +2966,13 @@
           <a:p>
             <a:r>
               <a:rPr lang="en-US" sz="1400" b="0" dirty="0"/>
-              <a:t>Mọi con số từ gói kết quả Q1 (mô phỏng). Mỗi mục STROBE một câu, từ 13 đến 17.</a:t>
+              <a:t>Bốn quy tắc. Người tham gia trước, kèm lưu đồ. Tác động kèm KTC 95%, không viết 'p = 0.42, không có ý nghĩa'. Không bình luận. Mỗi số một chỗ, và văn bản phải khớp với bảng: văn bản và Bảng 1 của Bài 1 mâu thuẫn về creatinine.</a:t>
             </a:r>
           </a:p>
           <a:p>
             <a:r>
               <a:rPr lang="en-US" sz="1400" b="0" dirty="0"/>
-              <a:t>Chỉ ra những gì không có: không 'vì', không 'có ý nghĩa', không giải thích vì sao OR nhỏ lại. Điều đó thuộc về phần Bàn luận.</a:t>
-            </a:r>
-          </a:p>
-          <a:p>
-            <a:r>
-              <a:rPr lang="en-US" sz="1400" b="0" dirty="0"/>
-              <a:t>Thăm dò: mục nào yêu cầu ước lượng thô và đã hiệu chỉnh? Kỳ vọng: 16.</a:t>
+              <a:t>Trước khi nộp, đối chiếu mọi con số với gói kết quả.</a:t>
             </a:r>
           </a:p>
         </p:txBody>
@@ -3053,19 +3053,19 @@
           <a:p>
             <a:r>
               <a:rPr lang="en-US" sz="1400" b="0" dirty="0"/>
-              <a:t>Bảng phải tự đọc hiểu được: tên bảng nói cái gì, ai, khi nào, n mỗi cột, đơn vị và cách tóm tắt ở mỗi dòng, chú thích chữ viết tắt và dữ liệu thiếu.</a:t>
+              <a:t>Mọi con số từ gói kết quả Q1 (mô phỏng). Mỗi mục STROBE một câu, từ 13 đến 17.</a:t>
             </a:r>
           </a:p>
           <a:p>
             <a:r>
               <a:rPr lang="en-US" sz="1400" b="0" dirty="0"/>
-              <a:t>Lỗi trong hai bài: sai đơn vị (Bài 1), không có số người còn nguy cơ dưới đường Kaplan-Meier (Bài 2).</a:t>
+              <a:t>Chỉ ra những gì không có: không 'vì', không 'có ý nghĩa', không giải thích vì sao OR nhỏ lại. Điều đó thuộc về phần Bàn luận.</a:t>
             </a:r>
           </a:p>
           <a:p>
             <a:r>
               <a:rPr lang="en-US" sz="1400" b="0" dirty="0"/>
-              <a:t>Hỏi: bảng có tên 'Kết quả' thì sai ở đâu?</a:t>
+              <a:t>Thăm dò: mục nào yêu cầu ước lượng thô và đã hiệu chỉnh? Kỳ vọng: 16.</a:t>
             </a:r>
           </a:p>
         </p:txBody>
@@ -3146,13 +3146,19 @@
           <a:p>
             <a:r>
               <a:rPr lang="en-US" sz="1400" b="0" dirty="0"/>
-              <a:t>Từ Bảng 1 thành một câu Kết quả (STROBE 14): 'Người bệnh có cân bằng dương nặng hơn lúc ban đầu (trung vị SOFA 8 so với 6, vận mạch 55.0% so với 24.9%) và ít bị suy tim hơn (11.5% so với 22.0%).'</a:t>
+              <a:t>Bảng phải tự đọc hiểu được: tên bảng nói cái gì, ai, khi nào, n mỗi cột, đơn vị và cách tóm tắt ở mỗi dòng, chú thích chữ viết tắt và dữ liệu thiếu.</a:t>
             </a:r>
           </a:p>
           <a:p>
             <a:r>
               <a:rPr lang="en-US" sz="1400" b="0" dirty="0"/>
-              <a:t>Câu này mô tả, không kiểm định: không cần giá trị p.</a:t>
+              <a:t>Lỗi trong hai bài: sai đơn vị (Bài 1), không có số người còn nguy cơ dưới đường Kaplan-Meier (Bài 2).</a:t>
+            </a:r>
+          </a:p>
+          <a:p>
+            <a:r>
+              <a:rPr lang="en-US" sz="1400" b="0" dirty="0"/>
+              <a:t>Hỏi: bảng có tên 'Kết quả' thì sai ở đâu?</a:t>
             </a:r>
           </a:p>
         </p:txBody>
@@ -3233,19 +3239,13 @@
           <a:p>
             <a:r>
               <a:rPr lang="en-US" sz="1400" b="0" dirty="0"/>
-              <a:t>FLUID-ICU là thuần tập, nên theo STROBE. Phần Kết quả gồm mục 13 đến 17.</a:t>
+              <a:t>Từ Bảng 1 thành một câu Kết quả (STROBE 14): 'Người bệnh có cân bằng dương nặng hơn lúc ban đầu (trung vị SOFA 8 so với 6, vận mạch 55.0% so với 24.9%) và ít bị suy tim hơn (11.5% so với 22.0%).'</a:t>
             </a:r>
           </a:p>
           <a:p>
             <a:r>
               <a:rPr lang="en-US" sz="1400" b="0" dirty="0"/>
-              <a:t>Hay bị quên nhất: mục 16 (thô và đã hiệu chỉnh, kèm các biến hiệu chỉnh) và dữ liệu thiếu.</a:t>
-            </a:r>
-          </a:p>
-          <a:p>
-            <a:r>
-              <a:rPr lang="en-US" sz="1400" b="0" dirty="0"/>
-              <a:t>Thăm dò: mục nào ứng với Bảng 1? Kỳ vọng: 14.</a:t>
+              <a:t>Câu này mô tả, không kiểm định: không cần giá trị p.</a:t>
             </a:r>
           </a:p>
         </p:txBody>
@@ -3326,19 +3326,19 @@
           <a:p>
             <a:r>
               <a:rPr lang="en-US" sz="1400" b="0" dirty="0"/>
-              <a:t>Kiểm tra (21:32-21:35). Mỗi câu một thăm dò.</a:t>
+              <a:t>FLUID-ICU là thuần tập, nên theo STROBE. Phần Kết quả gồm mục 13 đến 17.</a:t>
             </a:r>
           </a:p>
           <a:p>
             <a:r>
               <a:rPr lang="en-US" sz="1400" b="0" dirty="0"/>
-              <a:t>Câu 4 là câu bẫy: xử lý dữ liệu thiếu thế nào thuộc Phương pháp, thiếu bao nhiêu thuộc Kết quả.</a:t>
+              <a:t>Hay bị quên nhất: mục 16 (thô và đã hiệu chỉnh, kèm các biến hiệu chỉnh) và dữ liệu thiếu.</a:t>
             </a:r>
           </a:p>
           <a:p>
             <a:r>
               <a:rPr lang="en-US" sz="1400" b="0" dirty="0"/>
-              <a:t>Câu 3 là lỗi kinh điển: bình luận trong phần Kết quả.</a:t>
+              <a:t>Thăm dò: mục nào ứng với Bảng 1? Kỳ vọng: 14.</a:t>
             </a:r>
           </a:p>
         </p:txBody>
@@ -3419,19 +3419,19 @@
           <a:p>
             <a:r>
               <a:rPr lang="en-US" sz="1400" b="0" dirty="0"/>
-              <a:t>Thực hành bản thảo 1 (21:35-22:20).</a:t>
+              <a:t>Kiểm tra (21:32-21:35). Mỗi câu một thăm dò.</a:t>
             </a:r>
           </a:p>
           <a:p>
             <a:r>
               <a:rPr lang="en-US" sz="1400" b="0" dirty="0"/>
-              <a:t>Phần 1: bạn viết trực tiếp phần Kết quả của Q1, mời học viên đề xuất từng câu. Phần 2: mỗi học viên bắt đầu phần Kết quả cho câu hỏi của mình.</a:t>
+              <a:t>Câu 4 là câu bẫy: xử lý dữ liệu thiếu thế nào thuộc Phương pháp, thiếu bao nhiêu thuộc Kết quả.</a:t>
             </a:r>
           </a:p>
           <a:p>
             <a:r>
               <a:rPr lang="en-US" sz="1400" b="0" dirty="0"/>
-              <a:t>Hướng dẫn: s7_exercises_VN Phần C. Văn bản mẫu: s7_solutions_VN Phần C (dùng để định hướng, không dán vào).</a:t>
+              <a:t>Câu 3 là lỗi kinh điển: bình luận trong phần Kết quả.</a:t>
             </a:r>
           </a:p>
         </p:txBody>
@@ -3512,25 +3512,19 @@
           <a:p>
             <a:r>
               <a:rPr lang="en-US" sz="1400" b="0" dirty="0"/>
-              <a:t>Thực hành phần 1 (21:35-22:05). Để đồng hồ đếm giờ trên màn hình.</a:t>
+              <a:t>Thực hành bản thảo 1 (21:35-22:20).</a:t>
             </a:r>
           </a:p>
           <a:p>
             <a:r>
               <a:rPr lang="en-US" sz="1400" b="0" dirty="0"/>
-              <a:t>Thứ tự: lưu đồ, câu về Bảng 1, số tử vong mỗi nhóm, OR thô và hiệu chỉnh, HR Cox và quy gán.</a:t>
+              <a:t>Phần 1: bạn viết trực tiếp phần Kết quả của Q1, mời học viên đề xuất từng câu. Phần 2: mỗi học viên bắt đầu phần Kết quả cho câu hỏi của mình.</a:t>
             </a:r>
           </a:p>
           <a:p>
             <a:r>
               <a:rPr lang="en-US" sz="1400" b="0" dirty="0"/>
-              <a:t>Câu gợi ý: 'Có con số nào thiếu KTC không?' 'Có tính từ nào nên thay bằng con số?' 'Có bình luận nào không?'</a:t>
-            </a:r>
-          </a:p>
-          <a:p>
-            <a:r>
-              <a:rPr lang="en-US" sz="1400" b="0" dirty="0"/>
-              <a:t>Khoảng 300 từ. Gửi bản nháp của lớp dạng PDF sau buổi học.</a:t>
+              <a:t>Hướng dẫn: s7_exercises_VN Phần C. Văn bản mẫu: s7_solutions_VN Phần C (dùng để định hướng, không dán vào).</a:t>
             </a:r>
           </a:p>
         </p:txBody>
@@ -3611,19 +3605,25 @@
           <a:p>
             <a:r>
               <a:rPr lang="en-US" sz="1400" b="0" dirty="0"/>
-              <a:t>Thực hành phần 2 (22:05-22:20). Mỗi người tự viết. Trả lời câu hỏi trong khung chat.</a:t>
+              <a:t>Thực hành phần 1 (21:35-22:05). Để đồng hồ đếm giờ trên màn hình.</a:t>
             </a:r>
           </a:p>
           <a:p>
             <a:r>
               <a:rPr lang="en-US" sz="1400" b="0" dirty="0"/>
-              <a:t>Q1: viết lại bằng lời của mình, không chép bản nháp của lớp. Q3: số ngày không thở máy tính tử vong là 0. Q4: báo cáo cả ước lượng trường hợp đầy đủ và quy gán. Q5: chỉ người sống sót, trung vị và IQR.</a:t>
+              <a:t>Thứ tự: lưu đồ, câu về Bảng 1, số tử vong mỗi nhóm, OR thô và hiệu chỉnh, HR Cox và quy gán.</a:t>
             </a:r>
           </a:p>
           <a:p>
             <a:r>
               <a:rPr lang="en-US" sz="1400" b="0" dirty="0"/>
-              <a:t>Có thể thêm các phần không bắt buộc nếu còn thời gian.</a:t>
+              <a:t>Câu gợi ý: 'Có con số nào thiếu KTC không?' 'Có tính từ nào nên thay bằng con số?' 'Có bình luận nào không?'</a:t>
+            </a:r>
+          </a:p>
+          <a:p>
+            <a:r>
+              <a:rPr lang="en-US" sz="1400" b="0" dirty="0"/>
+              <a:t>Khoảng 300 từ. Gửi bản nháp của lớp dạng PDF sau buổi học.</a:t>
             </a:r>
           </a:p>
         </p:txBody>
@@ -3704,7 +3704,19 @@
           <a:p>
             <a:r>
               <a:rPr lang="en-US" sz="1400" b="0" dirty="0"/>
-              <a:t>Từ khóa (22:20-22:22). Chiếu thuật ngữ, mời một người giải thích, rồi mở cột bên phải.</a:t>
+              <a:t>Thực hành phần 2 (22:05-22:20). Mỗi người tự viết. Trả lời câu hỏi trong khung chat.</a:t>
+            </a:r>
+          </a:p>
+          <a:p>
+            <a:r>
+              <a:rPr lang="en-US" sz="1400" b="0" dirty="0"/>
+              <a:t>Q1: viết lại bằng lời của mình, không chép bản nháp của lớp. Q3: số ngày không thở máy tính tử vong là 0. Q4: báo cáo cả ước lượng trường hợp đầy đủ và quy gán. Q5: chỉ người sống sót, trung vị và IQR.</a:t>
+            </a:r>
+          </a:p>
+          <a:p>
+            <a:r>
+              <a:rPr lang="en-US" sz="1400" b="0" dirty="0"/>
+              <a:t>Có thể thêm các phần khác, nhưng chỉ bắt buộc nộp phần Kết quả.</a:t>
             </a:r>
           </a:p>
         </p:txBody>
@@ -3878,13 +3890,7 @@
           <a:p>
             <a:r>
               <a:rPr lang="en-US" sz="1400" b="0" dirty="0"/>
-              <a:t>Bình duyệt (22:22-22:24). Chiếu danh sách cặp bình duyệt và nói rõ đã bốc thăm ngẫu nhiên. Mỗi người bình duyệt một bản nháp và nhận một bản bình duyệt.</a:t>
-            </a:r>
-          </a:p>
-          <a:p>
-            <a:r>
-              <a:rPr lang="en-US" sz="1400" b="0" dirty="0"/>
-              <a:t>Gửi bản nháp thẳng cho người bình duyệt giúp tiết kiệm thời gian: bản bình duyệt nộp sau hai tuần, bản sửa sau đó bốn tuần.</a:t>
+              <a:t>Từ khóa (22:20-22:22). Chiếu thuật ngữ, mời một người giải thích, rồi mở cột bên phải.</a:t>
             </a:r>
           </a:p>
         </p:txBody>
@@ -3965,19 +3971,13 @@
           <a:p>
             <a:r>
               <a:rPr lang="en-US" sz="1400" b="0" dirty="0"/>
-              <a:t>Tổng kết (22:24-22:30). Đọc ba thông điệp và mời một người thêm thông điệp thứ tư.</a:t>
+              <a:t>Bình duyệt (22:22-22:24). Chiếu danh sách cặp bình duyệt và nói rõ đã bốc thăm ngẫu nhiên. Mỗi người bình duyệt một bản nháp và nhận một bản bình duyệt.</a:t>
             </a:r>
           </a:p>
           <a:p>
             <a:r>
               <a:rPr lang="en-US" sz="1400" b="0" dirty="0"/>
-              <a:t>Đọc các câu trả lời cuối buổi trước Buổi 8 và mở đầu bằng chúng.</a:t>
-            </a:r>
-          </a:p>
-          <a:p>
-            <a:r>
-              <a:rPr lang="en-US" sz="1400" b="0" dirty="0"/>
-              <a:t>Về nhà: Phần 4 đề cương, bản nháp phần Kết quả, 6 slide (Presentation_Guide_VN).</a:t>
+              <a:t>Gửi bản nháp thẳng cho người bình duyệt giúp tiết kiệm thời gian: bản bình duyệt nộp sau mười ngày, bản sửa mười ngày sau đó.</a:t>
             </a:r>
           </a:p>
         </p:txBody>
@@ -4058,7 +4058,19 @@
           <a:p>
             <a:r>
               <a:rPr lang="en-US" sz="1400" b="0" dirty="0"/>
-              <a:t>Slide bổ sung: không bắt buộc, dùng khi lớp đi nhanh hoặc để tự học.</a:t>
+              <a:t>Tổng kết (22:24-22:30). Đọc ba thông điệp và mời một người thêm thông điệp thứ tư.</a:t>
+            </a:r>
+          </a:p>
+          <a:p>
+            <a:r>
+              <a:rPr lang="en-US" sz="1400" b="0" dirty="0"/>
+              <a:t>Đọc các câu trả lời cuối buổi trước Buổi 8 và mở đầu bằng chúng.</a:t>
+            </a:r>
+          </a:p>
+          <a:p>
+            <a:r>
+              <a:rPr lang="en-US" sz="1400" b="0" dirty="0"/>
+              <a:t>Về nhà: Phần 4 đề cương, bản nháp phần Kết quả, 6 slide (Presentation_Guide_VN).</a:t>
             </a:r>
           </a:p>
         </p:txBody>
@@ -4139,13 +4151,7 @@
           <a:p>
             <a:r>
               <a:rPr lang="en-US" sz="1400" b="0" dirty="0"/>
-              <a:t>Kiểm tra bổ sung. Mỗi tình huống một thăm dò: bắt buộc, nên, hay không cần.</a:t>
-            </a:r>
-          </a:p>
-          <a:p>
-            <a:r>
-              <a:rPr lang="en-US" sz="1400" b="0" dirty="0"/>
-              <a:t>Tình huống 4: kiểm định chất lượng (audit) đi qua phòng quản lý chất lượng, không đăng ký. Nếu muốn công bố như nghiên cứu, hỏi hội đồng đạo đức trước.</a:t>
+              <a:t>Slide bổ sung: không bắt buộc, dùng khi lớp đi nhanh hoặc để tự học.</a:t>
             </a:r>
           </a:p>
         </p:txBody>
@@ -4226,13 +4232,13 @@
           <a:p>
             <a:r>
               <a:rPr lang="en-US" sz="1400" b="0" dirty="0"/>
-              <a:t>Bổ sung. IMRaD: Đặt vấn đề thu hẹp về câu hỏi, Bàn luận mở rộng trở lại thực hành.</a:t>
+              <a:t>Kiểm tra bổ sung. Mỗi tình huống một thăm dò: bắt buộc, nên, hay không cần.</a:t>
             </a:r>
           </a:p>
           <a:p>
             <a:r>
               <a:rPr lang="en-US" sz="1400" b="0" dirty="0"/>
-              <a:t>Đặt vấn đề của Bài 1 là hình phễu ba đoạn, và Bàn luận mở đầu bằng câu trả lời cho câu hỏi.</a:t>
+              <a:t>Tình huống 4: kiểm định chất lượng (audit) đi qua phòng quản lý chất lượng, không đăng ký. Nếu muốn công bố như nghiên cứu, hỏi hội đồng đạo đức trước.</a:t>
             </a:r>
           </a:p>
         </p:txBody>
@@ -7963,14 +7969,14 @@
               <a:buNone/>
             </a:pPr>
             <a:r>
-              <a:rPr lang="en-US" sz="2600" b="1" dirty="0">
+              <a:rPr lang="en-US" sz="2200" b="1" dirty="0">
                 <a:solidFill>
                   <a:srgbClr val="0D7377"/>
                 </a:solidFill>
                 <a:latin typeface="Arial"/>
                 <a:cs typeface="Arial"/>
               </a:rPr>
-              <a:t>Buổi 7 · Bảo vệ &amp; viết: đạo đức, liêm chính và phần Kết quả</a:t>
+              <a:t>Buổi 7 · Bảo vệ &amp; viết: đạo đức, liêm chính, Phương pháp và Kết quả</a:t>
             </a:r>
           </a:p>
         </p:txBody>
@@ -8139,7 +8145,7 @@
                 <a:latin typeface="Arial"/>
                 <a:cs typeface="Arial"/>
               </a:rPr>
-              <a:t>21:00  7.3  Viết bài báo (I): phần Kết quả, bảng, STROBE</a:t>
+              <a:t>21:00  7.3  Viết bài báo (I): IMRaD, Phương pháp và Kết quả</a:t>
             </a:r>
           </a:p>
           <a:p>
@@ -18013,7 +18019,7 @@
                 <a:latin typeface="Arial"/>
                 <a:cs typeface="Arial"/>
               </a:rPr>
-              <a:t>Viết bài báo (I): phần Kết quả</a:t>
+              <a:t>Viết bài báo (I): IMRaD, Phương pháp và Kết quả</a:t>
             </a:r>
           </a:p>
           <a:p>
@@ -18031,7 +18037,7 @@
                 <a:latin typeface="Arial"/>
                 <a:cs typeface="Arial"/>
               </a:rPr>
-              <a:t>Báo cáo những gì đã thấy, không hơn</a:t>
+              <a:t>Nói rõ đã làm gì, rồi báo cáo những gì đã thấy</a:t>
             </a:r>
           </a:p>
         </p:txBody>
@@ -18199,7 +18205,7 @@
                 <a:latin typeface="Arial"/>
                 <a:cs typeface="Arial"/>
               </a:rPr>
-              <a:t>Viết theo thứ tự khác với thứ tự người đọc</a:t>
+              <a:t>IMRaD: hình đồng hồ cát của mọi bài báo</a:t>
             </a:r>
           </a:p>
         </p:txBody>
@@ -18232,59 +18238,44 @@
           </a:p>
         </p:txBody>
       </p:sp>
-      <p:sp>
-        <p:nvSpPr>
-          <p:cNvPr id="19" name="Intro"/>
-          <p:cNvSpPr txBox="1"/>
-          <p:nvPr/>
-        </p:nvSpPr>
-        <p:spPr>
-          <a:xfrm>
-            <a:off x="457200" y="1100000"/>
-            <a:ext cx="11277600" cy="626796"/>
+      <p:pic>
+        <p:nvPicPr>
+          <p:cNvPr id="25" name="Figure"/>
+          <p:cNvPicPr>
+            <a:picLocks noChangeAspect="1"/>
+          </p:cNvPicPr>
+          <p:nvPr/>
+        </p:nvPicPr>
+        <p:blipFill>
+          <a:blip r:embed="rId4"/>
+          <a:stretch>
+            <a:fillRect/>
+          </a:stretch>
+        </p:blipFill>
+        <p:spPr>
+          <a:xfrm>
+            <a:off x="908500" y="1150000"/>
+            <a:ext cx="10375000" cy="4150000"/>
           </a:xfrm>
           <a:prstGeom prst="rect">
             <a:avLst/>
           </a:prstGeom>
-          <a:noFill/>
-          <a:ln>
-            <a:noFill/>
-          </a:ln>
-        </p:spPr>
-        <p:txBody>
-          <a:bodyPr wrap="square" lIns="91440" tIns="45720" rIns="91440" bIns="45720" rtlCol="0" anchor="t"/>
-          <a:lstStyle/>
-          <a:p>
-            <a:pPr marL="0" indent="0" algn="l">
-              <a:buNone/>
-            </a:pPr>
-            <a:r>
-              <a:rPr lang="en-US" sz="1700" i="1" dirty="0">
-                <a:solidFill>
-                  <a:srgbClr val="595959"/>
-                </a:solidFill>
-                <a:latin typeface="Arial"/>
-                <a:cs typeface="Arial"/>
-              </a:rPr>
-              <a:t>Người đọc đọc: Tiêu đề, Tóm tắt, Đặt vấn đề, Phương pháp, Kết quả, Bàn luận. Người viết bắt đầu từ dữ liệu.</a:t>
-            </a:r>
-          </a:p>
-        </p:txBody>
-      </p:sp>
-      <p:sp>
-        <p:nvSpPr>
-          <p:cNvPr id="80" name="Step"/>
+        </p:spPr>
+      </p:pic>
+      <p:sp>
+        <p:nvSpPr>
+          <p:cNvPr id="60" name="Takeaway"/>
           <p:cNvSpPr/>
           <p:nvPr/>
         </p:nvSpPr>
         <p:spPr>
           <a:xfrm>
-            <a:off x="457200" y="1806796"/>
-            <a:ext cx="1929600" cy="760000"/>
-          </a:xfrm>
-          <a:prstGeom prst="homePlate">
+            <a:off x="457200" y="5390000"/>
+            <a:ext cx="11277600" cy="560000"/>
+          </a:xfrm>
+          <a:prstGeom prst="roundRect">
             <a:avLst>
-              <a:gd name="adj" fmla="val 28000"/>
+              <a:gd name="adj" fmla="val 12000"/>
             </a:avLst>
           </a:prstGeom>
           <a:solidFill>
@@ -18295,570 +18286,6 @@
           </a:ln>
         </p:spPr>
         <p:txBody>
-          <a:bodyPr wrap="square" lIns="200000" tIns="45720" rIns="200000" bIns="45720" rtlCol="0" anchor="ctr">
-            <a:normAutofit/>
-          </a:bodyPr>
-          <a:lstStyle/>
-          <a:p>
-            <a:pPr marL="0" indent="0" algn="ctr">
-              <a:buNone/>
-            </a:pPr>
-            <a:r>
-              <a:rPr lang="en-US" sz="1400" b="1" dirty="0">
-                <a:solidFill>
-                  <a:srgbClr val="FFFFFF"/>
-                </a:solidFill>
-                <a:latin typeface="Arial"/>
-                <a:cs typeface="Arial"/>
-              </a:rPr>
-              <a:t>1 Bảng</a:t>
-            </a:r>
-          </a:p>
-        </p:txBody>
-      </p:sp>
-      <p:sp>
-        <p:nvSpPr>
-          <p:cNvPr id="81" name="StepText"/>
-          <p:cNvSpPr/>
-          <p:nvPr/>
-        </p:nvSpPr>
-        <p:spPr>
-          <a:xfrm>
-            <a:off x="497200" y="2726796"/>
-            <a:ext cx="1789600" cy="1100000"/>
-          </a:xfrm>
-          <a:prstGeom prst="rect">
-            <a:avLst/>
-          </a:prstGeom>
-          <a:solidFill>
-            <a:srgbClr val="EAF2F5"/>
-          </a:solidFill>
-          <a:ln>
-            <a:noFill/>
-          </a:ln>
-        </p:spPr>
-        <p:txBody>
-          <a:bodyPr wrap="square" lIns="110000" tIns="91440" rIns="110000" bIns="91440" rtlCol="0" anchor="ctr">
-            <a:normAutofit/>
-          </a:bodyPr>
-          <a:lstStyle/>
-          <a:p>
-            <a:pPr marL="0" indent="0" algn="ctr">
-              <a:lnSpc>
-                <a:spcPct val="104000"/>
-              </a:lnSpc>
-              <a:spcBef>
-                <a:spcPts val="200"/>
-              </a:spcBef>
-              <a:buNone/>
-            </a:pPr>
-            <a:r>
-              <a:rPr lang="en-US" sz="1500" dirty="0">
-                <a:solidFill>
-                  <a:srgbClr val="000000"/>
-                </a:solidFill>
-                <a:latin typeface="Arial"/>
-                <a:cs typeface="Arial"/>
-              </a:rPr>
-              <a:t>Bảng và hình: câu chuyện nằm trong dữ liệu</a:t>
-            </a:r>
-          </a:p>
-        </p:txBody>
-      </p:sp>
-      <p:sp>
-        <p:nvSpPr>
-          <p:cNvPr id="82" name="Step"/>
-          <p:cNvSpPr/>
-          <p:nvPr/>
-        </p:nvSpPr>
-        <p:spPr>
-          <a:xfrm>
-            <a:off x="2326800" y="1806796"/>
-            <a:ext cx="1929600" cy="760000"/>
-          </a:xfrm>
-          <a:prstGeom prst="chevron">
-            <a:avLst>
-              <a:gd name="adj" fmla="val 28000"/>
-            </a:avLst>
-          </a:prstGeom>
-          <a:solidFill>
-            <a:srgbClr val="0B376C"/>
-          </a:solidFill>
-          <a:ln>
-            <a:noFill/>
-          </a:ln>
-        </p:spPr>
-        <p:txBody>
-          <a:bodyPr wrap="square" lIns="200000" tIns="45720" rIns="200000" bIns="45720" rtlCol="0" anchor="ctr">
-            <a:normAutofit/>
-          </a:bodyPr>
-          <a:lstStyle/>
-          <a:p>
-            <a:pPr marL="0" indent="0" algn="ctr">
-              <a:buNone/>
-            </a:pPr>
-            <a:r>
-              <a:rPr lang="en-US" sz="1400" b="1" dirty="0">
-                <a:solidFill>
-                  <a:srgbClr val="FFFFFF"/>
-                </a:solidFill>
-                <a:latin typeface="Arial"/>
-                <a:cs typeface="Arial"/>
-              </a:rPr>
-              <a:t>2 Phương pháp</a:t>
-            </a:r>
-          </a:p>
-        </p:txBody>
-      </p:sp>
-      <p:sp>
-        <p:nvSpPr>
-          <p:cNvPr id="83" name="StepText"/>
-          <p:cNvSpPr/>
-          <p:nvPr/>
-        </p:nvSpPr>
-        <p:spPr>
-          <a:xfrm>
-            <a:off x="2366800" y="2726796"/>
-            <a:ext cx="1789600" cy="1100000"/>
-          </a:xfrm>
-          <a:prstGeom prst="rect">
-            <a:avLst/>
-          </a:prstGeom>
-          <a:solidFill>
-            <a:srgbClr val="EAF2F5"/>
-          </a:solidFill>
-          <a:ln>
-            <a:noFill/>
-          </a:ln>
-        </p:spPr>
-        <p:txBody>
-          <a:bodyPr wrap="square" lIns="110000" tIns="91440" rIns="110000" bIns="91440" rtlCol="0" anchor="ctr">
-            <a:normAutofit/>
-          </a:bodyPr>
-          <a:lstStyle/>
-          <a:p>
-            <a:pPr marL="0" indent="0" algn="ctr">
-              <a:lnSpc>
-                <a:spcPct val="104000"/>
-              </a:lnSpc>
-              <a:spcBef>
-                <a:spcPts val="200"/>
-              </a:spcBef>
-              <a:buNone/>
-            </a:pPr>
-            <a:r>
-              <a:rPr lang="en-US" sz="1500" dirty="0">
-                <a:solidFill>
-                  <a:srgbClr val="000000"/>
-                </a:solidFill>
-                <a:latin typeface="Arial"/>
-                <a:cs typeface="Arial"/>
-              </a:rPr>
-              <a:t>Bạn biết mình đã làm gì</a:t>
-            </a:r>
-          </a:p>
-        </p:txBody>
-      </p:sp>
-      <p:sp>
-        <p:nvSpPr>
-          <p:cNvPr id="84" name="Step"/>
-          <p:cNvSpPr/>
-          <p:nvPr/>
-        </p:nvSpPr>
-        <p:spPr>
-          <a:xfrm>
-            <a:off x="4196400" y="1806796"/>
-            <a:ext cx="1929600" cy="760000"/>
-          </a:xfrm>
-          <a:prstGeom prst="chevron">
-            <a:avLst>
-              <a:gd name="adj" fmla="val 28000"/>
-            </a:avLst>
-          </a:prstGeom>
-          <a:solidFill>
-            <a:srgbClr val="5FA39B"/>
-          </a:solidFill>
-          <a:ln>
-            <a:noFill/>
-          </a:ln>
-        </p:spPr>
-        <p:txBody>
-          <a:bodyPr wrap="square" lIns="200000" tIns="45720" rIns="200000" bIns="45720" rtlCol="0" anchor="ctr">
-            <a:normAutofit/>
-          </a:bodyPr>
-          <a:lstStyle/>
-          <a:p>
-            <a:pPr marL="0" indent="0" algn="ctr">
-              <a:buNone/>
-            </a:pPr>
-            <a:r>
-              <a:rPr lang="en-US" sz="1400" b="1" dirty="0">
-                <a:solidFill>
-                  <a:srgbClr val="FFFFFF"/>
-                </a:solidFill>
-                <a:latin typeface="Arial"/>
-                <a:cs typeface="Arial"/>
-              </a:rPr>
-              <a:t>3 Kết quả</a:t>
-            </a:r>
-          </a:p>
-        </p:txBody>
-      </p:sp>
-      <p:sp>
-        <p:nvSpPr>
-          <p:cNvPr id="85" name="StepText"/>
-          <p:cNvSpPr/>
-          <p:nvPr/>
-        </p:nvSpPr>
-        <p:spPr>
-          <a:xfrm>
-            <a:off x="4236400" y="2726796"/>
-            <a:ext cx="1789600" cy="1100000"/>
-          </a:xfrm>
-          <a:prstGeom prst="rect">
-            <a:avLst/>
-          </a:prstGeom>
-          <a:solidFill>
-            <a:srgbClr val="EAF2F5"/>
-          </a:solidFill>
-          <a:ln>
-            <a:noFill/>
-          </a:ln>
-        </p:spPr>
-        <p:txBody>
-          <a:bodyPr wrap="square" lIns="110000" tIns="91440" rIns="110000" bIns="91440" rtlCol="0" anchor="ctr">
-            <a:normAutofit/>
-          </a:bodyPr>
-          <a:lstStyle/>
-          <a:p>
-            <a:pPr marL="0" indent="0" algn="ctr">
-              <a:lnSpc>
-                <a:spcPct val="104000"/>
-              </a:lnSpc>
-              <a:spcBef>
-                <a:spcPts val="200"/>
-              </a:spcBef>
-              <a:buNone/>
-            </a:pPr>
-            <a:r>
-              <a:rPr lang="en-US" sz="1500" dirty="0">
-                <a:solidFill>
-                  <a:srgbClr val="000000"/>
-                </a:solidFill>
-                <a:latin typeface="Arial"/>
-                <a:cs typeface="Arial"/>
-              </a:rPr>
-              <a:t>Mô tả các bảng</a:t>
-            </a:r>
-          </a:p>
-        </p:txBody>
-      </p:sp>
-      <p:sp>
-        <p:nvSpPr>
-          <p:cNvPr id="86" name="Step"/>
-          <p:cNvSpPr/>
-          <p:nvPr/>
-        </p:nvSpPr>
-        <p:spPr>
-          <a:xfrm>
-            <a:off x="6066000" y="1806796"/>
-            <a:ext cx="1929600" cy="760000"/>
-          </a:xfrm>
-          <a:prstGeom prst="chevron">
-            <a:avLst>
-              <a:gd name="adj" fmla="val 28000"/>
-            </a:avLst>
-          </a:prstGeom>
-          <a:solidFill>
-            <a:srgbClr val="0070C0"/>
-          </a:solidFill>
-          <a:ln>
-            <a:noFill/>
-          </a:ln>
-        </p:spPr>
-        <p:txBody>
-          <a:bodyPr wrap="square" lIns="200000" tIns="45720" rIns="200000" bIns="45720" rtlCol="0" anchor="ctr">
-            <a:normAutofit/>
-          </a:bodyPr>
-          <a:lstStyle/>
-          <a:p>
-            <a:pPr marL="0" indent="0" algn="ctr">
-              <a:buNone/>
-            </a:pPr>
-            <a:r>
-              <a:rPr lang="en-US" sz="1400" b="1" dirty="0">
-                <a:solidFill>
-                  <a:srgbClr val="FFFFFF"/>
-                </a:solidFill>
-                <a:latin typeface="Arial"/>
-                <a:cs typeface="Arial"/>
-              </a:rPr>
-              <a:t>4 Đặt vấn đề</a:t>
-            </a:r>
-          </a:p>
-        </p:txBody>
-      </p:sp>
-      <p:sp>
-        <p:nvSpPr>
-          <p:cNvPr id="87" name="StepText"/>
-          <p:cNvSpPr/>
-          <p:nvPr/>
-        </p:nvSpPr>
-        <p:spPr>
-          <a:xfrm>
-            <a:off x="6106000" y="2726796"/>
-            <a:ext cx="1789600" cy="1100000"/>
-          </a:xfrm>
-          <a:prstGeom prst="rect">
-            <a:avLst/>
-          </a:prstGeom>
-          <a:solidFill>
-            <a:srgbClr val="EAF2F5"/>
-          </a:solidFill>
-          <a:ln>
-            <a:noFill/>
-          </a:ln>
-        </p:spPr>
-        <p:txBody>
-          <a:bodyPr wrap="square" lIns="110000" tIns="91440" rIns="110000" bIns="91440" rtlCol="0" anchor="ctr">
-            <a:normAutofit/>
-          </a:bodyPr>
-          <a:lstStyle/>
-          <a:p>
-            <a:pPr marL="0" indent="0" algn="ctr">
-              <a:lnSpc>
-                <a:spcPct val="104000"/>
-              </a:lnSpc>
-              <a:spcBef>
-                <a:spcPts val="200"/>
-              </a:spcBef>
-              <a:buNone/>
-            </a:pPr>
-            <a:r>
-              <a:rPr lang="en-US" sz="1500" dirty="0">
-                <a:solidFill>
-                  <a:srgbClr val="000000"/>
-                </a:solidFill>
-                <a:latin typeface="Arial"/>
-                <a:cs typeface="Arial"/>
-              </a:rPr>
-              <a:t>Dẫn tới câu hỏi bạn đã trả lời</a:t>
-            </a:r>
-          </a:p>
-        </p:txBody>
-      </p:sp>
-      <p:sp>
-        <p:nvSpPr>
-          <p:cNvPr id="88" name="Step"/>
-          <p:cNvSpPr/>
-          <p:nvPr/>
-        </p:nvSpPr>
-        <p:spPr>
-          <a:xfrm>
-            <a:off x="7935600" y="1806796"/>
-            <a:ext cx="1929600" cy="760000"/>
-          </a:xfrm>
-          <a:prstGeom prst="chevron">
-            <a:avLst>
-              <a:gd name="adj" fmla="val 28000"/>
-            </a:avLst>
-          </a:prstGeom>
-          <a:solidFill>
-            <a:srgbClr val="055F56"/>
-          </a:solidFill>
-          <a:ln>
-            <a:noFill/>
-          </a:ln>
-        </p:spPr>
-        <p:txBody>
-          <a:bodyPr wrap="square" lIns="200000" tIns="45720" rIns="200000" bIns="45720" rtlCol="0" anchor="ctr">
-            <a:normAutofit/>
-          </a:bodyPr>
-          <a:lstStyle/>
-          <a:p>
-            <a:pPr marL="0" indent="0" algn="ctr">
-              <a:buNone/>
-            </a:pPr>
-            <a:r>
-              <a:rPr lang="en-US" sz="1400" b="1" dirty="0">
-                <a:solidFill>
-                  <a:srgbClr val="FFFFFF"/>
-                </a:solidFill>
-                <a:latin typeface="Arial"/>
-                <a:cs typeface="Arial"/>
-              </a:rPr>
-              <a:t>5 Bàn luận</a:t>
-            </a:r>
-          </a:p>
-        </p:txBody>
-      </p:sp>
-      <p:sp>
-        <p:nvSpPr>
-          <p:cNvPr id="89" name="StepText"/>
-          <p:cNvSpPr/>
-          <p:nvPr/>
-        </p:nvSpPr>
-        <p:spPr>
-          <a:xfrm>
-            <a:off x="7975600" y="2726796"/>
-            <a:ext cx="1789600" cy="1100000"/>
-          </a:xfrm>
-          <a:prstGeom prst="rect">
-            <a:avLst/>
-          </a:prstGeom>
-          <a:solidFill>
-            <a:srgbClr val="EAF2F5"/>
-          </a:solidFill>
-          <a:ln>
-            <a:noFill/>
-          </a:ln>
-        </p:spPr>
-        <p:txBody>
-          <a:bodyPr wrap="square" lIns="110000" tIns="91440" rIns="110000" bIns="91440" rtlCol="0" anchor="ctr">
-            <a:normAutofit/>
-          </a:bodyPr>
-          <a:lstStyle/>
-          <a:p>
-            <a:pPr marL="0" indent="0" algn="ctr">
-              <a:lnSpc>
-                <a:spcPct val="104000"/>
-              </a:lnSpc>
-              <a:spcBef>
-                <a:spcPts val="200"/>
-              </a:spcBef>
-              <a:buNone/>
-            </a:pPr>
-            <a:r>
-              <a:rPr lang="en-US" sz="1500" dirty="0">
-                <a:solidFill>
-                  <a:srgbClr val="000000"/>
-                </a:solidFill>
-                <a:latin typeface="Arial"/>
-                <a:cs typeface="Arial"/>
-              </a:rPr>
-              <a:t>Trả lời, so sánh, giải thích</a:t>
-            </a:r>
-          </a:p>
-        </p:txBody>
-      </p:sp>
-      <p:sp>
-        <p:nvSpPr>
-          <p:cNvPr id="90" name="Step"/>
-          <p:cNvSpPr/>
-          <p:nvPr/>
-        </p:nvSpPr>
-        <p:spPr>
-          <a:xfrm>
-            <a:off x="9805200" y="1806796"/>
-            <a:ext cx="1929600" cy="760000"/>
-          </a:xfrm>
-          <a:prstGeom prst="chevron">
-            <a:avLst>
-              <a:gd name="adj" fmla="val 28000"/>
-            </a:avLst>
-          </a:prstGeom>
-          <a:solidFill>
-            <a:srgbClr val="8A99A3"/>
-          </a:solidFill>
-          <a:ln>
-            <a:noFill/>
-          </a:ln>
-        </p:spPr>
-        <p:txBody>
-          <a:bodyPr wrap="square" lIns="200000" tIns="45720" rIns="200000" bIns="45720" rtlCol="0" anchor="ctr">
-            <a:normAutofit/>
-          </a:bodyPr>
-          <a:lstStyle/>
-          <a:p>
-            <a:pPr marL="0" indent="0" algn="ctr">
-              <a:buNone/>
-            </a:pPr>
-            <a:r>
-              <a:rPr lang="en-US" sz="1400" b="1" dirty="0">
-                <a:solidFill>
-                  <a:srgbClr val="FFFFFF"/>
-                </a:solidFill>
-                <a:latin typeface="Arial"/>
-                <a:cs typeface="Arial"/>
-              </a:rPr>
-              <a:t>6 Tóm tắt, tiêu đề</a:t>
-            </a:r>
-          </a:p>
-        </p:txBody>
-      </p:sp>
-      <p:sp>
-        <p:nvSpPr>
-          <p:cNvPr id="91" name="StepText"/>
-          <p:cNvSpPr/>
-          <p:nvPr/>
-        </p:nvSpPr>
-        <p:spPr>
-          <a:xfrm>
-            <a:off x="9845200" y="2726796"/>
-            <a:ext cx="1789600" cy="1100000"/>
-          </a:xfrm>
-          <a:prstGeom prst="rect">
-            <a:avLst/>
-          </a:prstGeom>
-          <a:solidFill>
-            <a:srgbClr val="EAF2F5"/>
-          </a:solidFill>
-          <a:ln>
-            <a:noFill/>
-          </a:ln>
-        </p:spPr>
-        <p:txBody>
-          <a:bodyPr wrap="square" lIns="110000" tIns="91440" rIns="110000" bIns="91440" rtlCol="0" anchor="ctr">
-            <a:normAutofit/>
-          </a:bodyPr>
-          <a:lstStyle/>
-          <a:p>
-            <a:pPr marL="0" indent="0" algn="ctr">
-              <a:lnSpc>
-                <a:spcPct val="104000"/>
-              </a:lnSpc>
-              <a:spcBef>
-                <a:spcPts val="200"/>
-              </a:spcBef>
-              <a:buNone/>
-            </a:pPr>
-            <a:r>
-              <a:rPr lang="en-US" sz="1500" dirty="0">
-                <a:solidFill>
-                  <a:srgbClr val="000000"/>
-                </a:solidFill>
-                <a:latin typeface="Arial"/>
-                <a:cs typeface="Arial"/>
-              </a:rPr>
-              <a:t>Tóm lược toàn bài. Đặt tên sau cùng</a:t>
-            </a:r>
-          </a:p>
-        </p:txBody>
-      </p:sp>
-      <p:sp>
-        <p:nvSpPr>
-          <p:cNvPr id="60" name="Takeaway"/>
-          <p:cNvSpPr/>
-          <p:nvPr/>
-        </p:nvSpPr>
-        <p:spPr>
-          <a:xfrm>
-            <a:off x="457200" y="5390000"/>
-            <a:ext cx="11277600" cy="560000"/>
-          </a:xfrm>
-          <a:prstGeom prst="roundRect">
-            <a:avLst>
-              <a:gd name="adj" fmla="val 12000"/>
-            </a:avLst>
-          </a:prstGeom>
-          <a:solidFill>
-            <a:srgbClr val="0D7377"/>
-          </a:solidFill>
-          <a:ln>
-            <a:noFill/>
-          </a:ln>
-        </p:spPr>
-        <p:txBody>
           <a:bodyPr wrap="square" lIns="182880" tIns="45720" rIns="182880" bIns="45720" rtlCol="0" anchor="ctr">
             <a:normAutofit/>
           </a:bodyPr>
@@ -18885,7 +18312,7 @@
                 <a:latin typeface="Arial"/>
                 <a:cs typeface="Arial"/>
               </a:rPr>
-              <a:t>Bắt đầu từ các bảng. Viết tiêu đề sau cùng.</a:t>
+              <a:t>Đặt vấn đề thu hẹp đến câu hỏi. Bàn luận mở rộng trở lại thực hành.</a:t>
             </a:r>
           </a:p>
         </p:txBody>
@@ -19053,7 +18480,7 @@
                 <a:latin typeface="Arial"/>
                 <a:cs typeface="Arial"/>
               </a:rPr>
-              <a:t>Phương pháp: đủ chi tiết để người khác làm lại</a:t>
+              <a:t>Viết theo thứ tự khác với thứ tự người đọc</a:t>
             </a:r>
           </a:p>
         </p:txBody>
@@ -19120,24 +18547,26 @@
                 <a:latin typeface="Arial"/>
                 <a:cs typeface="Arial"/>
               </a:rPr>
-              <a:t>Không bắt buộc trong bản thảo của bạn. Nếu đồng nghiệp không làm lại được nghiên cứu từ phần này, hãy thêm chi tiết.</a:t>
-            </a:r>
-          </a:p>
-        </p:txBody>
-      </p:sp>
-      <p:sp>
-        <p:nvSpPr>
-          <p:cNvPr id="70" name="CardHead"/>
+              <a:t>Người đọc đọc: Tiêu đề, Tóm tắt, Đặt vấn đề, Phương pháp, Kết quả, Bàn luận. Người viết bắt đầu từ dữ liệu.</a:t>
+            </a:r>
+          </a:p>
+        </p:txBody>
+      </p:sp>
+      <p:sp>
+        <p:nvSpPr>
+          <p:cNvPr id="80" name="Step"/>
           <p:cNvSpPr/>
           <p:nvPr/>
         </p:nvSpPr>
         <p:spPr>
           <a:xfrm>
-            <a:off x="457200" y="1969837"/>
-            <a:ext cx="2669400" cy="640000"/>
-          </a:xfrm>
-          <a:prstGeom prst="rect">
-            <a:avLst/>
+            <a:off x="457200" y="1806796"/>
+            <a:ext cx="1929600" cy="760000"/>
+          </a:xfrm>
+          <a:prstGeom prst="homePlate">
+            <a:avLst>
+              <a:gd name="adj" fmla="val 28000"/>
+            </a:avLst>
           </a:prstGeom>
           <a:solidFill>
             <a:srgbClr val="0D7377"/>
@@ -19147,7 +18576,7 @@
           </a:ln>
         </p:spPr>
         <p:txBody>
-          <a:bodyPr wrap="square" lIns="91440" tIns="45720" rIns="91440" bIns="45720" rtlCol="0" anchor="ctr">
+          <a:bodyPr wrap="square" lIns="200000" tIns="45720" rIns="200000" bIns="45720" rtlCol="0" anchor="ctr">
             <a:normAutofit/>
           </a:bodyPr>
           <a:lstStyle/>
@@ -19156,28 +18585,28 @@
               <a:buNone/>
             </a:pPr>
             <a:r>
-              <a:rPr lang="en-US" sz="1700" b="1" dirty="0">
+              <a:rPr lang="en-US" sz="1200" b="1" dirty="0">
                 <a:solidFill>
                   <a:srgbClr val="FFFFFF"/>
                 </a:solidFill>
                 <a:latin typeface="Arial"/>
                 <a:cs typeface="Arial"/>
               </a:rPr>
-              <a:t>Ai và ở đâu</a:t>
-            </a:r>
-          </a:p>
-        </p:txBody>
-      </p:sp>
-      <p:sp>
-        <p:nvSpPr>
-          <p:cNvPr id="71" name="CardBody"/>
+              <a:t>1 Bảng</a:t>
+            </a:r>
+          </a:p>
+        </p:txBody>
+      </p:sp>
+      <p:sp>
+        <p:nvSpPr>
+          <p:cNvPr id="81" name="StepText"/>
           <p:cNvSpPr/>
           <p:nvPr/>
         </p:nvSpPr>
         <p:spPr>
           <a:xfrm>
-            <a:off x="457200" y="2609837"/>
-            <a:ext cx="2669400" cy="2314080"/>
+            <a:off x="497200" y="2726796"/>
+            <a:ext cx="1789600" cy="1100000"/>
           </a:xfrm>
           <a:prstGeom prst="rect">
             <a:avLst/>
@@ -19190,7 +18619,7 @@
           </a:ln>
         </p:spPr>
         <p:txBody>
-          <a:bodyPr wrap="square" lIns="137160" tIns="91440" rIns="137160" bIns="91440" rtlCol="0" anchor="ctr">
+          <a:bodyPr wrap="square" lIns="110000" tIns="91440" rIns="110000" bIns="91440" rtlCol="0" anchor="ctr">
             <a:normAutofit/>
           </a:bodyPr>
           <a:lstStyle/>
@@ -19200,109 +18629,330 @@
                 <a:spcPct val="104000"/>
               </a:lnSpc>
               <a:spcBef>
-                <a:spcPts val="400"/>
+                <a:spcPts val="200"/>
               </a:spcBef>
               <a:buNone/>
             </a:pPr>
             <a:r>
-              <a:rPr lang="en-US" sz="1600" dirty="0">
+              <a:rPr lang="en-US" sz="1500" dirty="0">
                 <a:solidFill>
                   <a:srgbClr val="000000"/>
                 </a:solidFill>
                 <a:latin typeface="Arial"/>
                 <a:cs typeface="Arial"/>
               </a:rPr>
-              <a:t>Thiết kế, bối cảnh, thời gian</a:t>
-            </a:r>
-          </a:p>
+              <a:t>Bảng và hình: câu chuyện nằm trong dữ liệu</a:t>
+            </a:r>
+          </a:p>
+        </p:txBody>
+      </p:sp>
+      <p:sp>
+        <p:nvSpPr>
+          <p:cNvPr id="82" name="Step"/>
+          <p:cNvSpPr/>
+          <p:nvPr/>
+        </p:nvSpPr>
+        <p:spPr>
+          <a:xfrm>
+            <a:off x="2326800" y="1806796"/>
+            <a:ext cx="1929600" cy="760000"/>
+          </a:xfrm>
+          <a:prstGeom prst="chevron">
+            <a:avLst>
+              <a:gd name="adj" fmla="val 28000"/>
+            </a:avLst>
+          </a:prstGeom>
+          <a:solidFill>
+            <a:srgbClr val="0B376C"/>
+          </a:solidFill>
+          <a:ln>
+            <a:noFill/>
+          </a:ln>
+        </p:spPr>
+        <p:txBody>
+          <a:bodyPr wrap="square" lIns="200000" tIns="45720" rIns="200000" bIns="45720" rtlCol="0" anchor="ctr">
+            <a:normAutofit/>
+          </a:bodyPr>
+          <a:lstStyle/>
+          <a:p>
+            <a:pPr marL="0" indent="0" algn="ctr">
+              <a:buNone/>
+            </a:pPr>
+            <a:r>
+              <a:rPr lang="en-US" sz="1200" b="1" dirty="0">
+                <a:solidFill>
+                  <a:srgbClr val="FFFFFF"/>
+                </a:solidFill>
+                <a:latin typeface="Arial"/>
+                <a:cs typeface="Arial"/>
+              </a:rPr>
+              <a:t>2 Phương pháp</a:t>
+            </a:r>
+          </a:p>
+        </p:txBody>
+      </p:sp>
+      <p:sp>
+        <p:nvSpPr>
+          <p:cNvPr id="83" name="StepText"/>
+          <p:cNvSpPr/>
+          <p:nvPr/>
+        </p:nvSpPr>
+        <p:spPr>
+          <a:xfrm>
+            <a:off x="2366800" y="2726796"/>
+            <a:ext cx="1789600" cy="1100000"/>
+          </a:xfrm>
+          <a:prstGeom prst="rect">
+            <a:avLst/>
+          </a:prstGeom>
+          <a:solidFill>
+            <a:srgbClr val="EAF2F5"/>
+          </a:solidFill>
+          <a:ln>
+            <a:noFill/>
+          </a:ln>
+        </p:spPr>
+        <p:txBody>
+          <a:bodyPr wrap="square" lIns="110000" tIns="91440" rIns="110000" bIns="91440" rtlCol="0" anchor="ctr">
+            <a:normAutofit/>
+          </a:bodyPr>
+          <a:lstStyle/>
           <a:p>
             <a:pPr marL="0" indent="0" algn="ctr">
               <a:lnSpc>
                 <a:spcPct val="104000"/>
               </a:lnSpc>
               <a:spcBef>
-                <a:spcPts val="400"/>
+                <a:spcPts val="200"/>
               </a:spcBef>
               <a:buNone/>
             </a:pPr>
             <a:r>
-              <a:rPr lang="en-US" sz="1600" dirty="0">
+              <a:rPr lang="en-US" sz="1500" dirty="0">
                 <a:solidFill>
                   <a:srgbClr val="000000"/>
                 </a:solidFill>
                 <a:latin typeface="Arial"/>
                 <a:cs typeface="Arial"/>
               </a:rPr>
-              <a:t>Tiêu chuẩn chọn</a:t>
-            </a:r>
-          </a:p>
+              <a:t>Bạn biết mình đã làm gì</a:t>
+            </a:r>
+          </a:p>
+        </p:txBody>
+      </p:sp>
+      <p:sp>
+        <p:nvSpPr>
+          <p:cNvPr id="84" name="Step"/>
+          <p:cNvSpPr/>
+          <p:nvPr/>
+        </p:nvSpPr>
+        <p:spPr>
+          <a:xfrm>
+            <a:off x="4196400" y="1806796"/>
+            <a:ext cx="1929600" cy="760000"/>
+          </a:xfrm>
+          <a:prstGeom prst="chevron">
+            <a:avLst>
+              <a:gd name="adj" fmla="val 28000"/>
+            </a:avLst>
+          </a:prstGeom>
+          <a:solidFill>
+            <a:srgbClr val="5FA39B"/>
+          </a:solidFill>
+          <a:ln>
+            <a:noFill/>
+          </a:ln>
+        </p:spPr>
+        <p:txBody>
+          <a:bodyPr wrap="square" lIns="200000" tIns="45720" rIns="200000" bIns="45720" rtlCol="0" anchor="ctr">
+            <a:normAutofit/>
+          </a:bodyPr>
+          <a:lstStyle/>
+          <a:p>
+            <a:pPr marL="0" indent="0" algn="ctr">
+              <a:buNone/>
+            </a:pPr>
+            <a:r>
+              <a:rPr lang="en-US" sz="1200" b="1" dirty="0">
+                <a:solidFill>
+                  <a:srgbClr val="FFFFFF"/>
+                </a:solidFill>
+                <a:latin typeface="Arial"/>
+                <a:cs typeface="Arial"/>
+              </a:rPr>
+              <a:t>3 Kết quả</a:t>
+            </a:r>
+          </a:p>
+        </p:txBody>
+      </p:sp>
+      <p:sp>
+        <p:nvSpPr>
+          <p:cNvPr id="85" name="StepText"/>
+          <p:cNvSpPr/>
+          <p:nvPr/>
+        </p:nvSpPr>
+        <p:spPr>
+          <a:xfrm>
+            <a:off x="4236400" y="2726796"/>
+            <a:ext cx="1789600" cy="1100000"/>
+          </a:xfrm>
+          <a:prstGeom prst="rect">
+            <a:avLst/>
+          </a:prstGeom>
+          <a:solidFill>
+            <a:srgbClr val="EAF2F5"/>
+          </a:solidFill>
+          <a:ln>
+            <a:noFill/>
+          </a:ln>
+        </p:spPr>
+        <p:txBody>
+          <a:bodyPr wrap="square" lIns="110000" tIns="91440" rIns="110000" bIns="91440" rtlCol="0" anchor="ctr">
+            <a:normAutofit/>
+          </a:bodyPr>
+          <a:lstStyle/>
           <a:p>
             <a:pPr marL="0" indent="0" algn="ctr">
               <a:lnSpc>
                 <a:spcPct val="104000"/>
               </a:lnSpc>
               <a:spcBef>
-                <a:spcPts val="400"/>
+                <a:spcPts val="200"/>
               </a:spcBef>
               <a:buNone/>
             </a:pPr>
             <a:r>
-              <a:rPr lang="en-US" sz="1600" dirty="0">
+              <a:rPr lang="en-US" sz="1500" dirty="0">
                 <a:solidFill>
                   <a:srgbClr val="000000"/>
                 </a:solidFill>
                 <a:latin typeface="Arial"/>
                 <a:cs typeface="Arial"/>
               </a:rPr>
-              <a:t>Phê duyệt đạo đức và sự đồng ý</a:t>
-            </a:r>
-          </a:p>
+              <a:t>Mô tả các bảng</a:t>
+            </a:r>
+          </a:p>
+        </p:txBody>
+      </p:sp>
+      <p:sp>
+        <p:nvSpPr>
+          <p:cNvPr id="86" name="Step"/>
+          <p:cNvSpPr/>
+          <p:nvPr/>
+        </p:nvSpPr>
+        <p:spPr>
+          <a:xfrm>
+            <a:off x="6066000" y="1806796"/>
+            <a:ext cx="1929600" cy="760000"/>
+          </a:xfrm>
+          <a:prstGeom prst="chevron">
+            <a:avLst>
+              <a:gd name="adj" fmla="val 28000"/>
+            </a:avLst>
+          </a:prstGeom>
+          <a:solidFill>
+            <a:srgbClr val="0070C0"/>
+          </a:solidFill>
+          <a:ln>
+            <a:noFill/>
+          </a:ln>
+        </p:spPr>
+        <p:txBody>
+          <a:bodyPr wrap="square" lIns="200000" tIns="45720" rIns="200000" bIns="45720" rtlCol="0" anchor="ctr">
+            <a:normAutofit/>
+          </a:bodyPr>
+          <a:lstStyle/>
+          <a:p>
+            <a:pPr marL="0" indent="0" algn="ctr">
+              <a:buNone/>
+            </a:pPr>
+            <a:r>
+              <a:rPr lang="en-US" sz="1200" b="1" dirty="0">
+                <a:solidFill>
+                  <a:srgbClr val="FFFFFF"/>
+                </a:solidFill>
+                <a:latin typeface="Arial"/>
+                <a:cs typeface="Arial"/>
+              </a:rPr>
+              <a:t>4 Đặt vấn đề</a:t>
+            </a:r>
+          </a:p>
+        </p:txBody>
+      </p:sp>
+      <p:sp>
+        <p:nvSpPr>
+          <p:cNvPr id="87" name="StepText"/>
+          <p:cNvSpPr/>
+          <p:nvPr/>
+        </p:nvSpPr>
+        <p:spPr>
+          <a:xfrm>
+            <a:off x="6106000" y="2726796"/>
+            <a:ext cx="1789600" cy="1100000"/>
+          </a:xfrm>
+          <a:prstGeom prst="rect">
+            <a:avLst/>
+          </a:prstGeom>
+          <a:solidFill>
+            <a:srgbClr val="EAF2F5"/>
+          </a:solidFill>
+          <a:ln>
+            <a:noFill/>
+          </a:ln>
+        </p:spPr>
+        <p:txBody>
+          <a:bodyPr wrap="square" lIns="110000" tIns="91440" rIns="110000" bIns="91440" rtlCol="0" anchor="ctr">
+            <a:normAutofit/>
+          </a:bodyPr>
+          <a:lstStyle/>
           <a:p>
             <a:pPr marL="0" indent="0" algn="ctr">
               <a:lnSpc>
                 <a:spcPct val="104000"/>
               </a:lnSpc>
               <a:spcBef>
-                <a:spcPts val="400"/>
+                <a:spcPts val="200"/>
               </a:spcBef>
               <a:buNone/>
             </a:pPr>
             <a:r>
-              <a:rPr lang="en-US" sz="1600" dirty="0">
+              <a:rPr lang="en-US" sz="1500" dirty="0">
                 <a:solidFill>
                   <a:srgbClr val="000000"/>
                 </a:solidFill>
                 <a:latin typeface="Arial"/>
                 <a:cs typeface="Arial"/>
               </a:rPr>
-              <a:t>Số đăng ký</a:t>
-            </a:r>
-          </a:p>
-        </p:txBody>
-      </p:sp>
-      <p:sp>
-        <p:nvSpPr>
-          <p:cNvPr id="72" name="CardHead"/>
+              <a:t>Dẫn tới câu hỏi bạn đã trả lời</a:t>
+            </a:r>
+          </a:p>
+        </p:txBody>
+      </p:sp>
+      <p:sp>
+        <p:nvSpPr>
+          <p:cNvPr id="88" name="Step"/>
           <p:cNvSpPr/>
           <p:nvPr/>
         </p:nvSpPr>
         <p:spPr>
           <a:xfrm>
-            <a:off x="3326600" y="1969837"/>
-            <a:ext cx="2669400" cy="640000"/>
-          </a:xfrm>
-          <a:prstGeom prst="rect">
-            <a:avLst/>
+            <a:off x="7935600" y="1806796"/>
+            <a:ext cx="1929600" cy="760000"/>
+          </a:xfrm>
+          <a:prstGeom prst="chevron">
+            <a:avLst>
+              <a:gd name="adj" fmla="val 28000"/>
+            </a:avLst>
           </a:prstGeom>
           <a:solidFill>
-            <a:srgbClr val="0B376C"/>
+            <a:srgbClr val="055F56"/>
           </a:solidFill>
           <a:ln>
             <a:noFill/>
           </a:ln>
         </p:spPr>
         <p:txBody>
-          <a:bodyPr wrap="square" lIns="91440" tIns="45720" rIns="91440" bIns="45720" rtlCol="0" anchor="ctr">
+          <a:bodyPr wrap="square" lIns="200000" tIns="45720" rIns="200000" bIns="45720" rtlCol="0" anchor="ctr">
             <a:normAutofit/>
           </a:bodyPr>
           <a:lstStyle/>
@@ -19311,28 +18961,28 @@
               <a:buNone/>
             </a:pPr>
             <a:r>
-              <a:rPr lang="en-US" sz="1700" b="1" dirty="0">
+              <a:rPr lang="en-US" sz="1200" b="1" dirty="0">
                 <a:solidFill>
                   <a:srgbClr val="FFFFFF"/>
                 </a:solidFill>
                 <a:latin typeface="Arial"/>
                 <a:cs typeface="Arial"/>
               </a:rPr>
-              <a:t>Đã làm gì</a:t>
-            </a:r>
-          </a:p>
-        </p:txBody>
-      </p:sp>
-      <p:sp>
-        <p:nvSpPr>
-          <p:cNvPr id="73" name="CardBody"/>
+              <a:t>5 Bàn luận</a:t>
+            </a:r>
+          </a:p>
+        </p:txBody>
+      </p:sp>
+      <p:sp>
+        <p:nvSpPr>
+          <p:cNvPr id="89" name="StepText"/>
           <p:cNvSpPr/>
           <p:nvPr/>
         </p:nvSpPr>
         <p:spPr>
           <a:xfrm>
-            <a:off x="3326600" y="2609837"/>
-            <a:ext cx="2669400" cy="2314080"/>
+            <a:off x="7975600" y="2726796"/>
+            <a:ext cx="1789600" cy="1100000"/>
           </a:xfrm>
           <a:prstGeom prst="rect">
             <a:avLst/>
@@ -19345,7 +18995,7 @@
           </a:ln>
         </p:spPr>
         <p:txBody>
-          <a:bodyPr wrap="square" lIns="137160" tIns="91440" rIns="137160" bIns="91440" rtlCol="0" anchor="ctr">
+          <a:bodyPr wrap="square" lIns="110000" tIns="91440" rIns="110000" bIns="91440" rtlCol="0" anchor="ctr">
             <a:normAutofit/>
           </a:bodyPr>
           <a:lstStyle/>
@@ -19355,350 +19005,113 @@
                 <a:spcPct val="104000"/>
               </a:lnSpc>
               <a:spcBef>
-                <a:spcPts val="400"/>
+                <a:spcPts val="200"/>
               </a:spcBef>
               <a:buNone/>
             </a:pPr>
             <a:r>
-              <a:rPr lang="en-US" sz="1600" dirty="0">
+              <a:rPr lang="en-US" sz="1500" dirty="0">
                 <a:solidFill>
                   <a:srgbClr val="000000"/>
                 </a:solidFill>
                 <a:latin typeface="Arial"/>
                 <a:cs typeface="Arial"/>
               </a:rPr>
-              <a:t>Mô tả đầy đủ can thiệp hoặc phơi nhiễm</a:t>
-            </a:r>
-          </a:p>
+              <a:t>Trả lời, so sánh, giải thích</a:t>
+            </a:r>
+          </a:p>
+        </p:txBody>
+      </p:sp>
+      <p:sp>
+        <p:nvSpPr>
+          <p:cNvPr id="90" name="Step"/>
+          <p:cNvSpPr/>
+          <p:nvPr/>
+        </p:nvSpPr>
+        <p:spPr>
+          <a:xfrm>
+            <a:off x="9805200" y="1806796"/>
+            <a:ext cx="1929600" cy="760000"/>
+          </a:xfrm>
+          <a:prstGeom prst="chevron">
+            <a:avLst>
+              <a:gd name="adj" fmla="val 28000"/>
+            </a:avLst>
+          </a:prstGeom>
+          <a:solidFill>
+            <a:srgbClr val="8A99A3"/>
+          </a:solidFill>
+          <a:ln>
+            <a:noFill/>
+          </a:ln>
+        </p:spPr>
+        <p:txBody>
+          <a:bodyPr wrap="square" lIns="200000" tIns="45720" rIns="200000" bIns="45720" rtlCol="0" anchor="ctr">
+            <a:normAutofit/>
+          </a:bodyPr>
+          <a:lstStyle/>
+          <a:p>
+            <a:pPr marL="0" indent="0" algn="ctr">
+              <a:buNone/>
+            </a:pPr>
+            <a:r>
+              <a:rPr lang="en-US" sz="1200" b="1" dirty="0">
+                <a:solidFill>
+                  <a:srgbClr val="FFFFFF"/>
+                </a:solidFill>
+                <a:latin typeface="Arial"/>
+                <a:cs typeface="Arial"/>
+              </a:rPr>
+              <a:t>6 Tóm tắt, tiêu đề</a:t>
+            </a:r>
+          </a:p>
+        </p:txBody>
+      </p:sp>
+      <p:sp>
+        <p:nvSpPr>
+          <p:cNvPr id="91" name="StepText"/>
+          <p:cNvSpPr/>
+          <p:nvPr/>
+        </p:nvSpPr>
+        <p:spPr>
+          <a:xfrm>
+            <a:off x="9845200" y="2726796"/>
+            <a:ext cx="1789600" cy="1100000"/>
+          </a:xfrm>
+          <a:prstGeom prst="rect">
+            <a:avLst/>
+          </a:prstGeom>
+          <a:solidFill>
+            <a:srgbClr val="EAF2F5"/>
+          </a:solidFill>
+          <a:ln>
+            <a:noFill/>
+          </a:ln>
+        </p:spPr>
+        <p:txBody>
+          <a:bodyPr wrap="square" lIns="110000" tIns="91440" rIns="110000" bIns="91440" rtlCol="0" anchor="ctr">
+            <a:normAutofit/>
+          </a:bodyPr>
+          <a:lstStyle/>
           <a:p>
             <a:pPr marL="0" indent="0" algn="ctr">
               <a:lnSpc>
                 <a:spcPct val="104000"/>
               </a:lnSpc>
               <a:spcBef>
-                <a:spcPts val="400"/>
+                <a:spcPts val="200"/>
               </a:spcBef>
               <a:buNone/>
             </a:pPr>
             <a:r>
-              <a:rPr lang="en-US" sz="1600" dirty="0">
+              <a:rPr lang="en-US" sz="1500" dirty="0">
                 <a:solidFill>
                   <a:srgbClr val="000000"/>
                 </a:solidFill>
                 <a:latin typeface="Arial"/>
                 <a:cs typeface="Arial"/>
               </a:rPr>
-              <a:t>Định nghĩa các biến</a:t>
-            </a:r>
-          </a:p>
-          <a:p>
-            <a:pPr marL="0" indent="0" algn="ctr">
-              <a:lnSpc>
-                <a:spcPct val="104000"/>
-              </a:lnSpc>
-              <a:spcBef>
-                <a:spcPts val="400"/>
-              </a:spcBef>
-              <a:buNone/>
-            </a:pPr>
-            <a:r>
-              <a:rPr lang="en-US" sz="1600" dirty="0">
-                <a:solidFill>
-                  <a:srgbClr val="000000"/>
-                </a:solidFill>
-                <a:latin typeface="Arial"/>
-                <a:cs typeface="Arial"/>
-              </a:rPr>
-              <a:t>Bài 1: tập huấn nhân viên, dược sĩ kiểm tra hằng ngày</a:t>
-            </a:r>
-          </a:p>
-        </p:txBody>
-      </p:sp>
-      <p:sp>
-        <p:nvSpPr>
-          <p:cNvPr id="74" name="CardHead"/>
-          <p:cNvSpPr/>
-          <p:nvPr/>
-        </p:nvSpPr>
-        <p:spPr>
-          <a:xfrm>
-            <a:off x="6196000" y="1969837"/>
-            <a:ext cx="2669400" cy="640000"/>
-          </a:xfrm>
-          <a:prstGeom prst="rect">
-            <a:avLst/>
-          </a:prstGeom>
-          <a:solidFill>
-            <a:srgbClr val="5FA39B"/>
-          </a:solidFill>
-          <a:ln>
-            <a:noFill/>
-          </a:ln>
-        </p:spPr>
-        <p:txBody>
-          <a:bodyPr wrap="square" lIns="91440" tIns="45720" rIns="91440" bIns="45720" rtlCol="0" anchor="ctr">
-            <a:normAutofit/>
-          </a:bodyPr>
-          <a:lstStyle/>
-          <a:p>
-            <a:pPr marL="0" indent="0" algn="ctr">
-              <a:buNone/>
-            </a:pPr>
-            <a:r>
-              <a:rPr lang="en-US" sz="1700" b="1" dirty="0">
-                <a:solidFill>
-                  <a:srgbClr val="FFFFFF"/>
-                </a:solidFill>
-                <a:latin typeface="Arial"/>
-                <a:cs typeface="Arial"/>
-              </a:rPr>
-              <a:t>Kết cục và cỡ mẫu</a:t>
-            </a:r>
-          </a:p>
-        </p:txBody>
-      </p:sp>
-      <p:sp>
-        <p:nvSpPr>
-          <p:cNvPr id="75" name="CardBody"/>
-          <p:cNvSpPr/>
-          <p:nvPr/>
-        </p:nvSpPr>
-        <p:spPr>
-          <a:xfrm>
-            <a:off x="6196000" y="2609837"/>
-            <a:ext cx="2669400" cy="2314080"/>
-          </a:xfrm>
-          <a:prstGeom prst="rect">
-            <a:avLst/>
-          </a:prstGeom>
-          <a:solidFill>
-            <a:srgbClr val="EAF2F5"/>
-          </a:solidFill>
-          <a:ln>
-            <a:noFill/>
-          </a:ln>
-        </p:spPr>
-        <p:txBody>
-          <a:bodyPr wrap="square" lIns="137160" tIns="91440" rIns="137160" bIns="91440" rtlCol="0" anchor="ctr">
-            <a:normAutofit/>
-          </a:bodyPr>
-          <a:lstStyle/>
-          <a:p>
-            <a:pPr marL="0" indent="0" algn="ctr">
-              <a:lnSpc>
-                <a:spcPct val="104000"/>
-              </a:lnSpc>
-              <a:spcBef>
-                <a:spcPts val="400"/>
-              </a:spcBef>
-              <a:buNone/>
-            </a:pPr>
-            <a:r>
-              <a:rPr lang="en-US" sz="1600" dirty="0">
-                <a:solidFill>
-                  <a:srgbClr val="000000"/>
-                </a:solidFill>
-                <a:latin typeface="Arial"/>
-                <a:cs typeface="Arial"/>
-              </a:rPr>
-              <a:t>Một kết cục chính: đo thế nào, khi nào</a:t>
-            </a:r>
-          </a:p>
-          <a:p>
-            <a:pPr marL="0" indent="0" algn="ctr">
-              <a:lnSpc>
-                <a:spcPct val="104000"/>
-              </a:lnSpc>
-              <a:spcBef>
-                <a:spcPts val="400"/>
-              </a:spcBef>
-              <a:buNone/>
-            </a:pPr>
-            <a:r>
-              <a:rPr lang="en-US" sz="1600" dirty="0">
-                <a:solidFill>
-                  <a:srgbClr val="000000"/>
-                </a:solidFill>
-                <a:latin typeface="Arial"/>
-                <a:cs typeface="Arial"/>
-              </a:rPr>
-              <a:t>Cỡ mẫu: giả định và nguồn</a:t>
-            </a:r>
-          </a:p>
-          <a:p>
-            <a:pPr marL="0" indent="0" algn="ctr">
-              <a:lnSpc>
-                <a:spcPct val="104000"/>
-              </a:lnSpc>
-              <a:spcBef>
-                <a:spcPts val="400"/>
-              </a:spcBef>
-              <a:buNone/>
-            </a:pPr>
-            <a:r>
-              <a:rPr lang="en-US" sz="1600" dirty="0">
-                <a:solidFill>
-                  <a:srgbClr val="000000"/>
-                </a:solidFill>
-                <a:latin typeface="Arial"/>
-                <a:cs typeface="Arial"/>
-              </a:rPr>
-              <a:t>Bài 2: không nêu cỡ mẫu</a:t>
-            </a:r>
-          </a:p>
-        </p:txBody>
-      </p:sp>
-      <p:sp>
-        <p:nvSpPr>
-          <p:cNvPr id="76" name="CardHead"/>
-          <p:cNvSpPr/>
-          <p:nvPr/>
-        </p:nvSpPr>
-        <p:spPr>
-          <a:xfrm>
-            <a:off x="9065400" y="1969837"/>
-            <a:ext cx="2669400" cy="640000"/>
-          </a:xfrm>
-          <a:prstGeom prst="rect">
-            <a:avLst/>
-          </a:prstGeom>
-          <a:solidFill>
-            <a:srgbClr val="0070C0"/>
-          </a:solidFill>
-          <a:ln>
-            <a:noFill/>
-          </a:ln>
-        </p:spPr>
-        <p:txBody>
-          <a:bodyPr wrap="square" lIns="91440" tIns="45720" rIns="91440" bIns="45720" rtlCol="0" anchor="ctr">
-            <a:normAutofit/>
-          </a:bodyPr>
-          <a:lstStyle/>
-          <a:p>
-            <a:pPr marL="0" indent="0" algn="ctr">
-              <a:buNone/>
-            </a:pPr>
-            <a:r>
-              <a:rPr lang="en-US" sz="1700" b="1" dirty="0">
-                <a:solidFill>
-                  <a:srgbClr val="FFFFFF"/>
-                </a:solidFill>
-                <a:latin typeface="Arial"/>
-                <a:cs typeface="Arial"/>
-              </a:rPr>
-              <a:t>Phân tích thống kê</a:t>
-            </a:r>
-          </a:p>
-        </p:txBody>
-      </p:sp>
-      <p:sp>
-        <p:nvSpPr>
-          <p:cNvPr id="77" name="CardBody"/>
-          <p:cNvSpPr/>
-          <p:nvPr/>
-        </p:nvSpPr>
-        <p:spPr>
-          <a:xfrm>
-            <a:off x="9065400" y="2609837"/>
-            <a:ext cx="2669400" cy="2314080"/>
-          </a:xfrm>
-          <a:prstGeom prst="rect">
-            <a:avLst/>
-          </a:prstGeom>
-          <a:solidFill>
-            <a:srgbClr val="EAF2F5"/>
-          </a:solidFill>
-          <a:ln>
-            <a:noFill/>
-          </a:ln>
-        </p:spPr>
-        <p:txBody>
-          <a:bodyPr wrap="square" lIns="137160" tIns="91440" rIns="137160" bIns="91440" rtlCol="0" anchor="ctr">
-            <a:normAutofit/>
-          </a:bodyPr>
-          <a:lstStyle/>
-          <a:p>
-            <a:pPr marL="0" indent="0" algn="ctr">
-              <a:lnSpc>
-                <a:spcPct val="104000"/>
-              </a:lnSpc>
-              <a:spcBef>
-                <a:spcPts val="400"/>
-              </a:spcBef>
-              <a:buNone/>
-            </a:pPr>
-            <a:r>
-              <a:rPr lang="en-US" sz="1600" dirty="0">
-                <a:solidFill>
-                  <a:srgbClr val="000000"/>
-                </a:solidFill>
-                <a:latin typeface="Arial"/>
-                <a:cs typeface="Arial"/>
-              </a:rPr>
-              <a:t>Mỗi so sánh có một phương pháp</a:t>
-            </a:r>
-          </a:p>
-          <a:p>
-            <a:pPr marL="0" indent="0" algn="ctr">
-              <a:lnSpc>
-                <a:spcPct val="104000"/>
-              </a:lnSpc>
-              <a:spcBef>
-                <a:spcPts val="400"/>
-              </a:spcBef>
-              <a:buNone/>
-            </a:pPr>
-            <a:r>
-              <a:rPr lang="en-US" sz="1600" dirty="0">
-                <a:solidFill>
-                  <a:srgbClr val="000000"/>
-                </a:solidFill>
-                <a:latin typeface="Arial"/>
-                <a:cs typeface="Arial"/>
-              </a:rPr>
-              <a:t>Ước lượng khớp với kiểm định</a:t>
-            </a:r>
-          </a:p>
-          <a:p>
-            <a:pPr marL="0" indent="0" algn="ctr">
-              <a:lnSpc>
-                <a:spcPct val="104000"/>
-              </a:lnSpc>
-              <a:spcBef>
-                <a:spcPts val="400"/>
-              </a:spcBef>
-              <a:buNone/>
-            </a:pPr>
-            <a:r>
-              <a:rPr lang="en-US" sz="1600" dirty="0">
-                <a:solidFill>
-                  <a:srgbClr val="000000"/>
-                </a:solidFill>
-                <a:latin typeface="Arial"/>
-                <a:cs typeface="Arial"/>
-              </a:rPr>
-              <a:t>Dữ liệu bị thiếu, so sánh bội</a:t>
-            </a:r>
-          </a:p>
-          <a:p>
-            <a:pPr marL="0" indent="0" algn="ctr">
-              <a:lnSpc>
-                <a:spcPct val="104000"/>
-              </a:lnSpc>
-              <a:spcBef>
-                <a:spcPts val="400"/>
-              </a:spcBef>
-              <a:buNone/>
-            </a:pPr>
-            <a:r>
-              <a:rPr lang="en-US" sz="1600" dirty="0">
-                <a:solidFill>
-                  <a:srgbClr val="000000"/>
-                </a:solidFill>
-                <a:latin typeface="Arial"/>
-                <a:cs typeface="Arial"/>
-              </a:rPr>
-              <a:t>Phần mềm và phiên bản</a:t>
+              <a:t>Tóm lược toàn bài. Đặt tên sau cùng</a:t>
             </a:r>
           </a:p>
         </p:txBody>
@@ -19753,7 +19166,7 @@
                 <a:latin typeface="Arial"/>
                 <a:cs typeface="Arial"/>
               </a:rPr>
-              <a:t>Đoạn phân tích thống kê nêu phương pháp cho mọi so sánh được báo cáo.</a:t>
+              <a:t>Bắt đầu từ các bảng. Viết tiêu đề sau cùng.</a:t>
             </a:r>
           </a:p>
         </p:txBody>
@@ -19921,7 +19334,7 @@
                 <a:latin typeface="Arial"/>
                 <a:cs typeface="Arial"/>
               </a:rPr>
-              <a:t>Không bắt buộc: Phương pháp cho FLUID-ICU câu hỏi 1</a:t>
+              <a:t>Phương pháp: đủ chi tiết để người khác làm lại</a:t>
             </a:r>
           </a:p>
         </p:txBody>
@@ -19956,14 +19369,14 @@
       </p:sp>
       <p:sp>
         <p:nvSpPr>
-          <p:cNvPr id="20" name="Body"/>
+          <p:cNvPr id="19" name="Intro"/>
           <p:cNvSpPr txBox="1"/>
           <p:nvPr/>
         </p:nvSpPr>
         <p:spPr>
           <a:xfrm>
-            <a:off x="457200" y="1080000"/>
-            <a:ext cx="11277600" cy="4780000"/>
+            <a:off x="457200" y="1100000"/>
+            <a:ext cx="11277600" cy="626796"/>
           </a:xfrm>
           <a:prstGeom prst="rect">
             <a:avLst/>
@@ -19974,162 +19387,654 @@
           </a:ln>
         </p:spPr>
         <p:txBody>
-          <a:bodyPr wrap="square" lIns="91440" tIns="45720" rIns="91440" bIns="45720" rtlCol="0" anchor="ctr"/>
+          <a:bodyPr wrap="square" lIns="91440" tIns="45720" rIns="91440" bIns="45720" rtlCol="0" anchor="t"/>
           <a:lstStyle/>
           <a:p>
             <a:pPr marL="0" indent="0" algn="l">
+              <a:buNone/>
+            </a:pPr>
+            <a:r>
+              <a:rPr lang="en-US" sz="1700" i="1" dirty="0">
+                <a:solidFill>
+                  <a:srgbClr val="595959"/>
+                </a:solidFill>
+                <a:latin typeface="Arial"/>
+                <a:cs typeface="Arial"/>
+              </a:rPr>
+              <a:t>Phương pháp nói rõ bạn đã làm gì. Nếu đồng nghiệp không làm lại được nghiên cứu từ phần này, hãy thêm chi tiết.</a:t>
+            </a:r>
+          </a:p>
+        </p:txBody>
+      </p:sp>
+      <p:sp>
+        <p:nvSpPr>
+          <p:cNvPr id="70" name="CardHead"/>
+          <p:cNvSpPr/>
+          <p:nvPr/>
+        </p:nvSpPr>
+        <p:spPr>
+          <a:xfrm>
+            <a:off x="457200" y="1969837"/>
+            <a:ext cx="2669400" cy="640000"/>
+          </a:xfrm>
+          <a:prstGeom prst="rect">
+            <a:avLst/>
+          </a:prstGeom>
+          <a:solidFill>
+            <a:srgbClr val="0D7377"/>
+          </a:solidFill>
+          <a:ln>
+            <a:noFill/>
+          </a:ln>
+        </p:spPr>
+        <p:txBody>
+          <a:bodyPr wrap="square" lIns="91440" tIns="45720" rIns="91440" bIns="45720" rtlCol="0" anchor="ctr">
+            <a:normAutofit/>
+          </a:bodyPr>
+          <a:lstStyle/>
+          <a:p>
+            <a:pPr marL="0" indent="0" algn="ctr">
+              <a:buNone/>
+            </a:pPr>
+            <a:r>
+              <a:rPr lang="en-US" sz="1700" b="1" dirty="0">
+                <a:solidFill>
+                  <a:srgbClr val="FFFFFF"/>
+                </a:solidFill>
+                <a:latin typeface="Arial"/>
+                <a:cs typeface="Arial"/>
+              </a:rPr>
+              <a:t>Ai và ở đâu</a:t>
+            </a:r>
+          </a:p>
+        </p:txBody>
+      </p:sp>
+      <p:sp>
+        <p:nvSpPr>
+          <p:cNvPr id="71" name="CardBody"/>
+          <p:cNvSpPr/>
+          <p:nvPr/>
+        </p:nvSpPr>
+        <p:spPr>
+          <a:xfrm>
+            <a:off x="457200" y="2609837"/>
+            <a:ext cx="2669400" cy="2314080"/>
+          </a:xfrm>
+          <a:prstGeom prst="rect">
+            <a:avLst/>
+          </a:prstGeom>
+          <a:solidFill>
+            <a:srgbClr val="EAF2F5"/>
+          </a:solidFill>
+          <a:ln>
+            <a:noFill/>
+          </a:ln>
+        </p:spPr>
+        <p:txBody>
+          <a:bodyPr wrap="square" lIns="137160" tIns="91440" rIns="137160" bIns="91440" rtlCol="0" anchor="ctr">
+            <a:normAutofit/>
+          </a:bodyPr>
+          <a:lstStyle/>
+          <a:p>
+            <a:pPr marL="0" indent="0" algn="ctr">
               <a:lnSpc>
-                <a:spcPct val="108000"/>
-              </a:lnSpc>
-              <a:buNone/>
-            </a:pPr>
-            <a:r>
-              <a:rPr lang="en-US" sz="1900" i="1" dirty="0">
-                <a:solidFill>
-                  <a:srgbClr val="595959"/>
-                </a:solidFill>
-                <a:latin typeface="Arial"/>
-                <a:cs typeface="Arial"/>
-              </a:rPr>
-              <a:t>Mỗi mục STROBE một câu (dữ liệu mô phỏng). STROBE = bảng kiểm báo cáo nghiên cứu quan sát.</a:t>
-            </a:r>
-          </a:p>
-          <a:p>
-            <a:pPr>
-              <a:buNone/>
-            </a:pPr>
-            <a:endParaRPr sz="950"/>
-          </a:p>
-          <a:p>
-            <a:pPr marL="274320" indent="-274320" algn="l">
-              <a:lnSpc>
-                <a:spcPct val="106000"/>
+                <a:spcPct val="104000"/>
               </a:lnSpc>
               <a:spcBef>
-                <a:spcPts val="560"/>
+                <a:spcPts val="400"/>
               </a:spcBef>
-              <a:buFont typeface="Arial"/>
-              <a:buChar char="•"/>
-            </a:pPr>
-            <a:r>
-              <a:rPr lang="en-US" sz="1700" dirty="0">
+              <a:buNone/>
+            </a:pPr>
+            <a:r>
+              <a:rPr lang="en-US" sz="1600" dirty="0">
                 <a:solidFill>
                   <a:srgbClr val="000000"/>
                 </a:solidFill>
                 <a:latin typeface="Arial"/>
                 <a:cs typeface="Arial"/>
               </a:rPr>
-              <a:t>Mục 4-6: Chúng tôi phân tích FLUID-ICU, một nghiên cứu thuần tập tiến cứu gồm người lớn nhiễm khuẩn huyết liên tiếp nhập bốn ICU từ tháng 1/2023 đến tháng 12/2024.</a:t>
-            </a:r>
-          </a:p>
-          <a:p>
-            <a:pPr marL="274320" indent="-274320" algn="l">
+              <a:t>Thiết kế, bối cảnh, thời gian</a:t>
+            </a:r>
+          </a:p>
+          <a:p>
+            <a:pPr marL="0" indent="0" algn="ctr">
               <a:lnSpc>
-                <a:spcPct val="106000"/>
+                <a:spcPct val="104000"/>
               </a:lnSpc>
               <a:spcBef>
-                <a:spcPts val="560"/>
+                <a:spcPts val="400"/>
               </a:spcBef>
-              <a:buFont typeface="Arial"/>
-              <a:buChar char="•"/>
-            </a:pPr>
-            <a:r>
-              <a:rPr lang="en-US" sz="1700" dirty="0">
+              <a:buNone/>
+            </a:pPr>
+            <a:r>
+              <a:rPr lang="en-US" sz="1600" dirty="0">
                 <a:solidFill>
                   <a:srgbClr val="000000"/>
                 </a:solidFill>
                 <a:latin typeface="Arial"/>
                 <a:cs typeface="Arial"/>
               </a:rPr>
-              <a:t>Mục 7: Phơi nhiễm là cân bằng dịch tích lũy dương đến ngày ICU thứ 3 (dịch vào trừ dịch ra ngày 1-3, &gt; 0 ml/kg). Kết cục là tử vong do mọi nguyên nhân trong 28 ngày sau nhập ICU.</a:t>
-            </a:r>
-          </a:p>
-          <a:p>
-            <a:pPr marL="274320" indent="-274320" algn="l">
+              <a:t>Tiêu chuẩn chọn</a:t>
+            </a:r>
+          </a:p>
+          <a:p>
+            <a:pPr marL="0" indent="0" algn="ctr">
               <a:lnSpc>
-                <a:spcPct val="106000"/>
+                <a:spcPct val="104000"/>
               </a:lnSpc>
               <a:spcBef>
-                <a:spcPts val="560"/>
+                <a:spcPts val="400"/>
               </a:spcBef>
-              <a:buFont typeface="Arial"/>
-              <a:buChar char="•"/>
-            </a:pPr>
-            <a:r>
-              <a:rPr lang="en-US" sz="1700" dirty="0">
+              <a:buNone/>
+            </a:pPr>
+            <a:r>
+              <a:rPr lang="en-US" sz="1600" dirty="0">
                 <a:solidFill>
                   <a:srgbClr val="000000"/>
                 </a:solidFill>
                 <a:latin typeface="Arial"/>
                 <a:cs typeface="Arial"/>
               </a:rPr>
-              <a:t>Mục 8: Dữ liệu lấy từ hồ sơ ICU theo phiếu thu thập dữ liệu chuẩn.</a:t>
-            </a:r>
-          </a:p>
-          <a:p>
-            <a:pPr marL="274320" indent="-274320" algn="l">
+              <a:t>Phê duyệt đạo đức và sự đồng ý</a:t>
+            </a:r>
+          </a:p>
+          <a:p>
+            <a:pPr marL="0" indent="0" algn="ctr">
               <a:lnSpc>
-                <a:spcPct val="106000"/>
+                <a:spcPct val="104000"/>
               </a:lnSpc>
               <a:spcBef>
-                <a:spcPts val="560"/>
+                <a:spcPts val="400"/>
               </a:spcBef>
-              <a:buFont typeface="Arial"/>
-              <a:buChar char="•"/>
-            </a:pPr>
-            <a:r>
-              <a:rPr lang="en-US" sz="1700" dirty="0">
+              <a:buNone/>
+            </a:pPr>
+            <a:r>
+              <a:rPr lang="en-US" sz="1600" dirty="0">
                 <a:solidFill>
                   <a:srgbClr val="000000"/>
                 </a:solidFill>
                 <a:latin typeface="Arial"/>
                 <a:cs typeface="Arial"/>
               </a:rPr>
-              <a:t>Mục 9: Để xử lý nhiễu do chỉ định, chúng tôi hiệu chỉnh theo mức độ nặng và bệnh nền đã định trước trong kế hoạch phân tích.</a:t>
-            </a:r>
-          </a:p>
-          <a:p>
-            <a:pPr marL="274320" indent="-274320" algn="l">
+              <a:t>Số đăng ký</a:t>
+            </a:r>
+          </a:p>
+        </p:txBody>
+      </p:sp>
+      <p:sp>
+        <p:nvSpPr>
+          <p:cNvPr id="72" name="CardHead"/>
+          <p:cNvSpPr/>
+          <p:nvPr/>
+        </p:nvSpPr>
+        <p:spPr>
+          <a:xfrm>
+            <a:off x="3326600" y="1969837"/>
+            <a:ext cx="2669400" cy="640000"/>
+          </a:xfrm>
+          <a:prstGeom prst="rect">
+            <a:avLst/>
+          </a:prstGeom>
+          <a:solidFill>
+            <a:srgbClr val="0B376C"/>
+          </a:solidFill>
+          <a:ln>
+            <a:noFill/>
+          </a:ln>
+        </p:spPr>
+        <p:txBody>
+          <a:bodyPr wrap="square" lIns="91440" tIns="45720" rIns="91440" bIns="45720" rtlCol="0" anchor="ctr">
+            <a:normAutofit/>
+          </a:bodyPr>
+          <a:lstStyle/>
+          <a:p>
+            <a:pPr marL="0" indent="0" algn="ctr">
+              <a:buNone/>
+            </a:pPr>
+            <a:r>
+              <a:rPr lang="en-US" sz="1700" b="1" dirty="0">
+                <a:solidFill>
+                  <a:srgbClr val="FFFFFF"/>
+                </a:solidFill>
+                <a:latin typeface="Arial"/>
+                <a:cs typeface="Arial"/>
+              </a:rPr>
+              <a:t>Đã làm gì</a:t>
+            </a:r>
+          </a:p>
+        </p:txBody>
+      </p:sp>
+      <p:sp>
+        <p:nvSpPr>
+          <p:cNvPr id="73" name="CardBody"/>
+          <p:cNvSpPr/>
+          <p:nvPr/>
+        </p:nvSpPr>
+        <p:spPr>
+          <a:xfrm>
+            <a:off x="3326600" y="2609837"/>
+            <a:ext cx="2669400" cy="2314080"/>
+          </a:xfrm>
+          <a:prstGeom prst="rect">
+            <a:avLst/>
+          </a:prstGeom>
+          <a:solidFill>
+            <a:srgbClr val="EAF2F5"/>
+          </a:solidFill>
+          <a:ln>
+            <a:noFill/>
+          </a:ln>
+        </p:spPr>
+        <p:txBody>
+          <a:bodyPr wrap="square" lIns="137160" tIns="91440" rIns="137160" bIns="91440" rtlCol="0" anchor="ctr">
+            <a:normAutofit/>
+          </a:bodyPr>
+          <a:lstStyle/>
+          <a:p>
+            <a:pPr marL="0" indent="0" algn="ctr">
               <a:lnSpc>
-                <a:spcPct val="106000"/>
+                <a:spcPct val="104000"/>
               </a:lnSpc>
               <a:spcBef>
-                <a:spcPts val="560"/>
+                <a:spcPts val="400"/>
               </a:spcBef>
-              <a:buFont typeface="Arial"/>
-              <a:buChar char="•"/>
-            </a:pPr>
-            <a:r>
-              <a:rPr lang="en-US" sz="1700" dirty="0">
+              <a:buNone/>
+            </a:pPr>
+            <a:r>
+              <a:rPr lang="en-US" sz="1600" dirty="0">
                 <a:solidFill>
                   <a:srgbClr val="000000"/>
                 </a:solidFill>
                 <a:latin typeface="Arial"/>
                 <a:cs typeface="Arial"/>
               </a:rPr>
-              <a:t>Mục 10: Toàn bộ người bệnh đủ tiêu chuẩn trong nghiên cứu thuần tập được đưa vào (không tính cỡ mẫu riêng).</a:t>
-            </a:r>
-          </a:p>
-          <a:p>
-            <a:pPr marL="274320" indent="-274320" algn="l">
+              <a:t>Mô tả đầy đủ can thiệp hoặc phơi nhiễm</a:t>
+            </a:r>
+          </a:p>
+          <a:p>
+            <a:pPr marL="0" indent="0" algn="ctr">
               <a:lnSpc>
-                <a:spcPct val="106000"/>
+                <a:spcPct val="104000"/>
               </a:lnSpc>
               <a:spcBef>
-                <a:spcPts val="560"/>
+                <a:spcPts val="400"/>
               </a:spcBef>
-              <a:buFont typeface="Arial"/>
-              <a:buChar char="•"/>
-            </a:pPr>
-            <a:r>
-              <a:rPr lang="en-US" sz="1700" dirty="0">
-                <a:solidFill>
-                  <a:srgbClr val="0B376C"/>
-                </a:solidFill>
-                <a:latin typeface="Arial"/>
-                <a:cs typeface="Arial"/>
-              </a:rPr>
-              <a:t>Đạo đức (bản khóa học): Phân tích này dùng bộ dữ liệu giảng dạy mô phỏng. Không cần phê duyệt đạo đức hay sự đồng ý.</a:t>
+              <a:buNone/>
+            </a:pPr>
+            <a:r>
+              <a:rPr lang="en-US" sz="1600" dirty="0">
+                <a:solidFill>
+                  <a:srgbClr val="000000"/>
+                </a:solidFill>
+                <a:latin typeface="Arial"/>
+                <a:cs typeface="Arial"/>
+              </a:rPr>
+              <a:t>Định nghĩa các biến</a:t>
+            </a:r>
+          </a:p>
+          <a:p>
+            <a:pPr marL="0" indent="0" algn="ctr">
+              <a:lnSpc>
+                <a:spcPct val="104000"/>
+              </a:lnSpc>
+              <a:spcBef>
+                <a:spcPts val="400"/>
+              </a:spcBef>
+              <a:buNone/>
+            </a:pPr>
+            <a:r>
+              <a:rPr lang="en-US" sz="1600" dirty="0">
+                <a:solidFill>
+                  <a:srgbClr val="000000"/>
+                </a:solidFill>
+                <a:latin typeface="Arial"/>
+                <a:cs typeface="Arial"/>
+              </a:rPr>
+              <a:t>Bài 1: tập huấn nhân viên, dược sĩ kiểm tra hằng ngày</a:t>
+            </a:r>
+          </a:p>
+        </p:txBody>
+      </p:sp>
+      <p:sp>
+        <p:nvSpPr>
+          <p:cNvPr id="74" name="CardHead"/>
+          <p:cNvSpPr/>
+          <p:nvPr/>
+        </p:nvSpPr>
+        <p:spPr>
+          <a:xfrm>
+            <a:off x="6196000" y="1969837"/>
+            <a:ext cx="2669400" cy="640000"/>
+          </a:xfrm>
+          <a:prstGeom prst="rect">
+            <a:avLst/>
+          </a:prstGeom>
+          <a:solidFill>
+            <a:srgbClr val="5FA39B"/>
+          </a:solidFill>
+          <a:ln>
+            <a:noFill/>
+          </a:ln>
+        </p:spPr>
+        <p:txBody>
+          <a:bodyPr wrap="square" lIns="91440" tIns="45720" rIns="91440" bIns="45720" rtlCol="0" anchor="ctr">
+            <a:normAutofit/>
+          </a:bodyPr>
+          <a:lstStyle/>
+          <a:p>
+            <a:pPr marL="0" indent="0" algn="ctr">
+              <a:buNone/>
+            </a:pPr>
+            <a:r>
+              <a:rPr lang="en-US" sz="1700" b="1" dirty="0">
+                <a:solidFill>
+                  <a:srgbClr val="FFFFFF"/>
+                </a:solidFill>
+                <a:latin typeface="Arial"/>
+                <a:cs typeface="Arial"/>
+              </a:rPr>
+              <a:t>Kết cục và cỡ mẫu</a:t>
+            </a:r>
+          </a:p>
+        </p:txBody>
+      </p:sp>
+      <p:sp>
+        <p:nvSpPr>
+          <p:cNvPr id="75" name="CardBody"/>
+          <p:cNvSpPr/>
+          <p:nvPr/>
+        </p:nvSpPr>
+        <p:spPr>
+          <a:xfrm>
+            <a:off x="6196000" y="2609837"/>
+            <a:ext cx="2669400" cy="2314080"/>
+          </a:xfrm>
+          <a:prstGeom prst="rect">
+            <a:avLst/>
+          </a:prstGeom>
+          <a:solidFill>
+            <a:srgbClr val="EAF2F5"/>
+          </a:solidFill>
+          <a:ln>
+            <a:noFill/>
+          </a:ln>
+        </p:spPr>
+        <p:txBody>
+          <a:bodyPr wrap="square" lIns="137160" tIns="91440" rIns="137160" bIns="91440" rtlCol="0" anchor="ctr">
+            <a:normAutofit/>
+          </a:bodyPr>
+          <a:lstStyle/>
+          <a:p>
+            <a:pPr marL="0" indent="0" algn="ctr">
+              <a:lnSpc>
+                <a:spcPct val="104000"/>
+              </a:lnSpc>
+              <a:spcBef>
+                <a:spcPts val="400"/>
+              </a:spcBef>
+              <a:buNone/>
+            </a:pPr>
+            <a:r>
+              <a:rPr lang="en-US" sz="1600" dirty="0">
+                <a:solidFill>
+                  <a:srgbClr val="000000"/>
+                </a:solidFill>
+                <a:latin typeface="Arial"/>
+                <a:cs typeface="Arial"/>
+              </a:rPr>
+              <a:t>Một kết cục chính: đo thế nào, khi nào</a:t>
+            </a:r>
+          </a:p>
+          <a:p>
+            <a:pPr marL="0" indent="0" algn="ctr">
+              <a:lnSpc>
+                <a:spcPct val="104000"/>
+              </a:lnSpc>
+              <a:spcBef>
+                <a:spcPts val="400"/>
+              </a:spcBef>
+              <a:buNone/>
+            </a:pPr>
+            <a:r>
+              <a:rPr lang="en-US" sz="1600" dirty="0">
+                <a:solidFill>
+                  <a:srgbClr val="000000"/>
+                </a:solidFill>
+                <a:latin typeface="Arial"/>
+                <a:cs typeface="Arial"/>
+              </a:rPr>
+              <a:t>Cỡ mẫu: giả định và nguồn</a:t>
+            </a:r>
+          </a:p>
+          <a:p>
+            <a:pPr marL="0" indent="0" algn="ctr">
+              <a:lnSpc>
+                <a:spcPct val="104000"/>
+              </a:lnSpc>
+              <a:spcBef>
+                <a:spcPts val="400"/>
+              </a:spcBef>
+              <a:buNone/>
+            </a:pPr>
+            <a:r>
+              <a:rPr lang="en-US" sz="1600" dirty="0">
+                <a:solidFill>
+                  <a:srgbClr val="000000"/>
+                </a:solidFill>
+                <a:latin typeface="Arial"/>
+                <a:cs typeface="Arial"/>
+              </a:rPr>
+              <a:t>Bài 2: không nêu cỡ mẫu</a:t>
+            </a:r>
+          </a:p>
+        </p:txBody>
+      </p:sp>
+      <p:sp>
+        <p:nvSpPr>
+          <p:cNvPr id="76" name="CardHead"/>
+          <p:cNvSpPr/>
+          <p:nvPr/>
+        </p:nvSpPr>
+        <p:spPr>
+          <a:xfrm>
+            <a:off x="9065400" y="1969837"/>
+            <a:ext cx="2669400" cy="640000"/>
+          </a:xfrm>
+          <a:prstGeom prst="rect">
+            <a:avLst/>
+          </a:prstGeom>
+          <a:solidFill>
+            <a:srgbClr val="0070C0"/>
+          </a:solidFill>
+          <a:ln>
+            <a:noFill/>
+          </a:ln>
+        </p:spPr>
+        <p:txBody>
+          <a:bodyPr wrap="square" lIns="91440" tIns="45720" rIns="91440" bIns="45720" rtlCol="0" anchor="ctr">
+            <a:normAutofit/>
+          </a:bodyPr>
+          <a:lstStyle/>
+          <a:p>
+            <a:pPr marL="0" indent="0" algn="ctr">
+              <a:buNone/>
+            </a:pPr>
+            <a:r>
+              <a:rPr lang="en-US" sz="1700" b="1" dirty="0">
+                <a:solidFill>
+                  <a:srgbClr val="FFFFFF"/>
+                </a:solidFill>
+                <a:latin typeface="Arial"/>
+                <a:cs typeface="Arial"/>
+              </a:rPr>
+              <a:t>Phân tích thống kê</a:t>
+            </a:r>
+          </a:p>
+        </p:txBody>
+      </p:sp>
+      <p:sp>
+        <p:nvSpPr>
+          <p:cNvPr id="77" name="CardBody"/>
+          <p:cNvSpPr/>
+          <p:nvPr/>
+        </p:nvSpPr>
+        <p:spPr>
+          <a:xfrm>
+            <a:off x="9065400" y="2609837"/>
+            <a:ext cx="2669400" cy="2314080"/>
+          </a:xfrm>
+          <a:prstGeom prst="rect">
+            <a:avLst/>
+          </a:prstGeom>
+          <a:solidFill>
+            <a:srgbClr val="EAF2F5"/>
+          </a:solidFill>
+          <a:ln>
+            <a:noFill/>
+          </a:ln>
+        </p:spPr>
+        <p:txBody>
+          <a:bodyPr wrap="square" lIns="137160" tIns="91440" rIns="137160" bIns="91440" rtlCol="0" anchor="ctr">
+            <a:normAutofit/>
+          </a:bodyPr>
+          <a:lstStyle/>
+          <a:p>
+            <a:pPr marL="0" indent="0" algn="ctr">
+              <a:lnSpc>
+                <a:spcPct val="104000"/>
+              </a:lnSpc>
+              <a:spcBef>
+                <a:spcPts val="400"/>
+              </a:spcBef>
+              <a:buNone/>
+            </a:pPr>
+            <a:r>
+              <a:rPr lang="en-US" sz="1600" dirty="0">
+                <a:solidFill>
+                  <a:srgbClr val="000000"/>
+                </a:solidFill>
+                <a:latin typeface="Arial"/>
+                <a:cs typeface="Arial"/>
+              </a:rPr>
+              <a:t>Mỗi so sánh có một phương pháp</a:t>
+            </a:r>
+          </a:p>
+          <a:p>
+            <a:pPr marL="0" indent="0" algn="ctr">
+              <a:lnSpc>
+                <a:spcPct val="104000"/>
+              </a:lnSpc>
+              <a:spcBef>
+                <a:spcPts val="400"/>
+              </a:spcBef>
+              <a:buNone/>
+            </a:pPr>
+            <a:r>
+              <a:rPr lang="en-US" sz="1600" dirty="0">
+                <a:solidFill>
+                  <a:srgbClr val="000000"/>
+                </a:solidFill>
+                <a:latin typeface="Arial"/>
+                <a:cs typeface="Arial"/>
+              </a:rPr>
+              <a:t>Ước lượng khớp với kiểm định</a:t>
+            </a:r>
+          </a:p>
+          <a:p>
+            <a:pPr marL="0" indent="0" algn="ctr">
+              <a:lnSpc>
+                <a:spcPct val="104000"/>
+              </a:lnSpc>
+              <a:spcBef>
+                <a:spcPts val="400"/>
+              </a:spcBef>
+              <a:buNone/>
+            </a:pPr>
+            <a:r>
+              <a:rPr lang="en-US" sz="1600" dirty="0">
+                <a:solidFill>
+                  <a:srgbClr val="000000"/>
+                </a:solidFill>
+                <a:latin typeface="Arial"/>
+                <a:cs typeface="Arial"/>
+              </a:rPr>
+              <a:t>Dữ liệu bị thiếu, so sánh bội</a:t>
+            </a:r>
+          </a:p>
+          <a:p>
+            <a:pPr marL="0" indent="0" algn="ctr">
+              <a:lnSpc>
+                <a:spcPct val="104000"/>
+              </a:lnSpc>
+              <a:spcBef>
+                <a:spcPts val="400"/>
+              </a:spcBef>
+              <a:buNone/>
+            </a:pPr>
+            <a:r>
+              <a:rPr lang="en-US" sz="1600" dirty="0">
+                <a:solidFill>
+                  <a:srgbClr val="000000"/>
+                </a:solidFill>
+                <a:latin typeface="Arial"/>
+                <a:cs typeface="Arial"/>
+              </a:rPr>
+              <a:t>Phần mềm và phiên bản</a:t>
+            </a:r>
+          </a:p>
+        </p:txBody>
+      </p:sp>
+      <p:sp>
+        <p:nvSpPr>
+          <p:cNvPr id="60" name="Takeaway"/>
+          <p:cNvSpPr/>
+          <p:nvPr/>
+        </p:nvSpPr>
+        <p:spPr>
+          <a:xfrm>
+            <a:off x="457200" y="5390000"/>
+            <a:ext cx="11277600" cy="560000"/>
+          </a:xfrm>
+          <a:prstGeom prst="roundRect">
+            <a:avLst>
+              <a:gd name="adj" fmla="val 12000"/>
+            </a:avLst>
+          </a:prstGeom>
+          <a:solidFill>
+            <a:srgbClr val="0D7377"/>
+          </a:solidFill>
+          <a:ln>
+            <a:noFill/>
+          </a:ln>
+        </p:spPr>
+        <p:txBody>
+          <a:bodyPr wrap="square" lIns="182880" tIns="45720" rIns="182880" bIns="45720" rtlCol="0" anchor="ctr">
+            <a:normAutofit/>
+          </a:bodyPr>
+          <a:lstStyle/>
+          <a:p>
+            <a:pPr marL="0" indent="0" algn="ctr">
+              <a:buNone/>
+            </a:pPr>
+            <a:r>
+              <a:rPr lang="en-US" sz="1300" b="1" dirty="0">
+                <a:solidFill>
+                  <a:srgbClr val="FFFFFF"/>
+                </a:solidFill>
+                <a:latin typeface="Arial"/>
+                <a:cs typeface="Arial"/>
+              </a:rPr>
+              <a:t>THÔNG ĐIỆP CHÍNH   </a:t>
+            </a:r>
+            <a:r>
+              <a:rPr lang="en-US" sz="1550" dirty="0">
+                <a:solidFill>
+                  <a:srgbClr val="FFFFFF"/>
+                </a:solidFill>
+                <a:latin typeface="Arial"/>
+                <a:cs typeface="Arial"/>
+              </a:rPr>
+              <a:t>Đoạn phân tích thống kê nêu phương pháp cho mọi so sánh được báo cáo.</a:t>
             </a:r>
           </a:p>
         </p:txBody>
@@ -20297,7 +20202,7 @@
                 <a:latin typeface="Arial"/>
                 <a:cs typeface="Arial"/>
               </a:rPr>
-              <a:t>Không bắt buộc: đoạn phân tích thống kê</a:t>
+              <a:t>Ví dụ mẫu: Phương pháp cho FLUID-ICU câu hỏi 1</a:t>
             </a:r>
           </a:p>
         </p:txBody>
@@ -20367,7 +20272,7 @@
                 <a:latin typeface="Arial"/>
                 <a:cs typeface="Arial"/>
               </a:rPr>
-              <a:t>Mục STROBE 12 cho Q1: mỗi quyết định một câu, tất cả được chọn trước khi xem dữ liệu.</a:t>
+              <a:t>Mỗi mục STROBE một câu (dữ liệu mô phỏng). STROBE = bảng kiểm báo cáo nghiên cứu quan sát.</a:t>
             </a:r>
           </a:p>
           <a:p>
@@ -20395,7 +20300,7 @@
                 <a:latin typeface="Arial"/>
                 <a:cs typeface="Arial"/>
               </a:rPr>
-              <a:t>Đặc điểm ban đầu: trung bình (độ lệch chuẩn, SD), trung vị (khoảng tứ phân vị, IQR) hoặc n (%), theo nhóm cân bằng.</a:t>
+              <a:t>Mục 4-6: Chúng tôi phân tích FLUID-ICU, một nghiên cứu thuần tập tiến cứu gồm người lớn nhiễm khuẩn huyết liên tiếp nhập bốn ICU từ tháng 1/2023 đến tháng 12/2024.</a:t>
             </a:r>
           </a:p>
           <a:p>
@@ -20417,7 +20322,7 @@
                 <a:latin typeface="Arial"/>
                 <a:cs typeface="Arial"/>
               </a:rPr>
-              <a:t>Tử vong 28 ngày: kiểm định chi bình phương. Tỷ số chênh thô và hiệu chỉnh bằng hồi quy logistic (tuổi, điểm SOFA, lactat, vận mạch, thở máy, bệnh thận mạn).</a:t>
+              <a:t>Mục 7: Phơi nhiễm là cân bằng dịch tích lũy dương đến ngày ICU thứ 3 (dịch vào trừ dịch ra ngày 1-3, &gt; 0 ml/kg). Kết cục là tử vong do mọi nguyên nhân trong 28 ngày sau nhập ICU.</a:t>
             </a:r>
           </a:p>
           <a:p>
@@ -20439,7 +20344,7 @@
                 <a:latin typeface="Arial"/>
                 <a:cs typeface="Arial"/>
               </a:rPr>
-              <a:t>Thời gian đến tử vong: đường cong Kaplan-Meier (kiểm định log-rank) và hồi quy Cox với cùng các biến. Kiểm tra giả định nguy cơ tỷ lệ.</a:t>
+              <a:t>Mục 8: Dữ liệu lấy từ hồ sơ ICU theo phiếu thu thập dữ liệu chuẩn.</a:t>
             </a:r>
           </a:p>
           <a:p>
@@ -20461,7 +20366,7 @@
                 <a:latin typeface="Arial"/>
                 <a:cs typeface="Arial"/>
               </a:rPr>
-              <a:t>Thay đổi tác động theo suy tim: một số hạng tương tác (định trước).</a:t>
+              <a:t>Mục 9: Để xử lý nhiễu do chỉ định, chúng tôi hiệu chỉnh theo mức độ nặng và bệnh nền đã định trước trong kế hoạch phân tích.</a:t>
             </a:r>
           </a:p>
           <a:p>
@@ -20483,7 +20388,7 @@
                 <a:latin typeface="Arial"/>
                 <a:cs typeface="Arial"/>
               </a:rPr>
-              <a:t>Phân tích chính trên các trường hợp đầy đủ. Lactat bị thiếu (15%) được xử lý bằng quy gán đa bội (20 bộ dữ liệu) trong phân tích độ nhạy.</a:t>
+              <a:t>Mục 10: Toàn bộ người bệnh đủ tiêu chuẩn trong nghiên cứu thuần tập được đưa vào (không tính cỡ mẫu riêng).</a:t>
             </a:r>
           </a:p>
           <a:p>
@@ -20500,12 +20405,12 @@
             <a:r>
               <a:rPr lang="en-US" sz="1700" dirty="0">
                 <a:solidFill>
-                  <a:srgbClr val="000000"/>
-                </a:solidFill>
-                <a:latin typeface="Arial"/>
-                <a:cs typeface="Arial"/>
-              </a:rPr>
-              <a:t>Ước lượng kèm khoảng tin cậy 95%. Phân tích bằng R 4.6.</a:t>
+                  <a:srgbClr val="0B376C"/>
+                </a:solidFill>
+                <a:latin typeface="Arial"/>
+                <a:cs typeface="Arial"/>
+              </a:rPr>
+              <a:t>Đạo đức (bản khóa học): Phân tích này dùng bộ dữ liệu giảng dạy mô phỏng. Không cần phê duyệt đạo đức hay sự đồng ý.</a:t>
             </a:r>
           </a:p>
         </p:txBody>
@@ -21008,7 +20913,7 @@
                 <a:latin typeface="Arial"/>
                 <a:cs typeface="Arial"/>
               </a:rPr>
-              <a:t>Hôm nay: phần Kết quả, viết trực tiếp trên Q1</a:t>
+              <a:t>Hôm nay: Phương pháp, Kết quả (viết trên Q1)</a:t>
             </a:r>
           </a:p>
           <a:p>
@@ -21029,7 +20934,7 @@
                 <a:latin typeface="Arial"/>
                 <a:cs typeface="Arial"/>
               </a:rPr>
-              <a:t>Buổi 8: hoàn thiện. Các phần khác không bắt buộc</a:t>
+              <a:t>Buổi 8: Đặt vấn đề, Bàn luận, Tóm tắt, tên bài</a:t>
             </a:r>
           </a:p>
         </p:txBody>
@@ -21218,7 +21123,7 @@
                 <a:latin typeface="Arial"/>
                 <a:cs typeface="Arial"/>
               </a:rPr>
-              <a:t>Trước giải lao: Đề cương Phần 4. Sau giải lao: phần Kết quả.</a:t>
+              <a:t>Trước giải lao: Đề cương Phần 4. Sau giải lao: Phương pháp và Kết quả.</a:t>
             </a:r>
           </a:p>
         </p:txBody>
@@ -21386,7 +21291,7 @@
                 <a:latin typeface="Arial"/>
                 <a:cs typeface="Arial"/>
               </a:rPr>
-              <a:t>Kết quả: báo cáo, không bình luận</a:t>
+              <a:t>Ví dụ mẫu: đoạn phân tích thống kê</a:t>
             </a:r>
           </a:p>
         </p:txBody>
@@ -21421,507 +21326,180 @@
       </p:sp>
       <p:sp>
         <p:nvSpPr>
-          <p:cNvPr id="70" name="CardHead"/>
-          <p:cNvSpPr/>
-          <p:nvPr/>
-        </p:nvSpPr>
-        <p:spPr>
-          <a:xfrm>
-            <a:off x="457200" y="1697173"/>
-            <a:ext cx="2669400" cy="640000"/>
+          <p:cNvPr id="20" name="Body"/>
+          <p:cNvSpPr txBox="1"/>
+          <p:nvPr/>
+        </p:nvSpPr>
+        <p:spPr>
+          <a:xfrm>
+            <a:off x="457200" y="1080000"/>
+            <a:ext cx="11277600" cy="4780000"/>
           </a:xfrm>
           <a:prstGeom prst="rect">
             <a:avLst/>
           </a:prstGeom>
-          <a:solidFill>
-            <a:srgbClr val="0D7377"/>
-          </a:solidFill>
+          <a:noFill/>
           <a:ln>
             <a:noFill/>
           </a:ln>
         </p:spPr>
         <p:txBody>
-          <a:bodyPr wrap="square" lIns="91440" tIns="45720" rIns="91440" bIns="45720" rtlCol="0" anchor="ctr">
-            <a:normAutofit/>
-          </a:bodyPr>
-          <a:lstStyle/>
-          <a:p>
-            <a:pPr marL="0" indent="0" algn="ctr">
-              <a:buNone/>
-            </a:pPr>
-            <a:r>
-              <a:rPr lang="en-US" sz="1700" b="1" dirty="0">
-                <a:solidFill>
-                  <a:srgbClr val="FFFFFF"/>
-                </a:solidFill>
-                <a:latin typeface="Arial"/>
-                <a:cs typeface="Arial"/>
-              </a:rPr>
-              <a:t>1  Đối tượng trước</a:t>
-            </a:r>
-          </a:p>
-        </p:txBody>
-      </p:sp>
-      <p:sp>
-        <p:nvSpPr>
-          <p:cNvPr id="71" name="CardBody"/>
-          <p:cNvSpPr/>
-          <p:nvPr/>
-        </p:nvSpPr>
-        <p:spPr>
-          <a:xfrm>
-            <a:off x="457200" y="2337173"/>
-            <a:ext cx="2669400" cy="1958480"/>
-          </a:xfrm>
-          <a:prstGeom prst="rect">
-            <a:avLst/>
-          </a:prstGeom>
-          <a:solidFill>
-            <a:srgbClr val="EAF2F5"/>
-          </a:solidFill>
-          <a:ln>
-            <a:noFill/>
-          </a:ln>
-        </p:spPr>
-        <p:txBody>
-          <a:bodyPr wrap="square" lIns="137160" tIns="91440" rIns="137160" bIns="91440" rtlCol="0" anchor="ctr">
-            <a:normAutofit/>
-          </a:bodyPr>
-          <a:lstStyle/>
-          <a:p>
-            <a:pPr marL="0" indent="0" algn="ctr">
+          <a:bodyPr wrap="square" lIns="91440" tIns="45720" rIns="91440" bIns="45720" rtlCol="0" anchor="ctr"/>
+          <a:lstStyle/>
+          <a:p>
+            <a:pPr marL="0" indent="0" algn="l">
               <a:lnSpc>
-                <a:spcPct val="104000"/>
+                <a:spcPct val="108000"/>
+              </a:lnSpc>
+              <a:buNone/>
+            </a:pPr>
+            <a:r>
+              <a:rPr lang="en-US" sz="1900" i="1" dirty="0">
+                <a:solidFill>
+                  <a:srgbClr val="595959"/>
+                </a:solidFill>
+                <a:latin typeface="Arial"/>
+                <a:cs typeface="Arial"/>
+              </a:rPr>
+              <a:t>Mục STROBE 12 cho Q1: mỗi quyết định một câu, tất cả được chọn trước khi xem dữ liệu.</a:t>
+            </a:r>
+          </a:p>
+          <a:p>
+            <a:pPr>
+              <a:buNone/>
+            </a:pPr>
+            <a:endParaRPr sz="950"/>
+          </a:p>
+          <a:p>
+            <a:pPr marL="274320" indent="-274320" algn="l">
+              <a:lnSpc>
+                <a:spcPct val="106000"/>
               </a:lnSpc>
               <a:spcBef>
-                <a:spcPts val="400"/>
+                <a:spcPts val="560"/>
               </a:spcBef>
-              <a:buNone/>
-            </a:pPr>
-            <a:r>
-              <a:rPr lang="en-US" sz="1600" dirty="0">
+              <a:buFont typeface="Arial"/>
+              <a:buChar char="•"/>
+            </a:pPr>
+            <a:r>
+              <a:rPr lang="en-US" sz="1700" dirty="0">
                 <a:solidFill>
                   <a:srgbClr val="000000"/>
                 </a:solidFill>
                 <a:latin typeface="Arial"/>
                 <a:cs typeface="Arial"/>
               </a:rPr>
-              <a:t>Sàng lọc, đưa vào, phân tích, và vì sao mất một số</a:t>
-            </a:r>
-          </a:p>
-          <a:p>
-            <a:pPr marL="0" indent="0" algn="ctr">
+              <a:t>Đặc điểm ban đầu: trung bình (độ lệch chuẩn, SD), trung vị (khoảng tứ phân vị, IQR) hoặc n (%), theo nhóm cân bằng.</a:t>
+            </a:r>
+          </a:p>
+          <a:p>
+            <a:pPr marL="274320" indent="-274320" algn="l">
               <a:lnSpc>
-                <a:spcPct val="104000"/>
+                <a:spcPct val="106000"/>
               </a:lnSpc>
               <a:spcBef>
-                <a:spcPts val="400"/>
+                <a:spcPts val="560"/>
               </a:spcBef>
-              <a:buNone/>
-            </a:pPr>
-            <a:r>
-              <a:rPr lang="en-US" sz="1600" dirty="0">
+              <a:buFont typeface="Arial"/>
+              <a:buChar char="•"/>
+            </a:pPr>
+            <a:r>
+              <a:rPr lang="en-US" sz="1700" dirty="0">
                 <a:solidFill>
                   <a:srgbClr val="000000"/>
                 </a:solidFill>
                 <a:latin typeface="Arial"/>
                 <a:cs typeface="Arial"/>
               </a:rPr>
-              <a:t>Bài 1: sàng lọc 1201, phân nhóm 50, phân tích 48</a:t>
-            </a:r>
-          </a:p>
-        </p:txBody>
-      </p:sp>
-      <p:sp>
-        <p:nvSpPr>
-          <p:cNvPr id="72" name="CardHead"/>
-          <p:cNvSpPr/>
-          <p:nvPr/>
-        </p:nvSpPr>
-        <p:spPr>
-          <a:xfrm>
-            <a:off x="3326600" y="1697173"/>
-            <a:ext cx="2669400" cy="640000"/>
-          </a:xfrm>
-          <a:prstGeom prst="rect">
-            <a:avLst/>
-          </a:prstGeom>
-          <a:solidFill>
-            <a:srgbClr val="0B376C"/>
-          </a:solidFill>
-          <a:ln>
-            <a:noFill/>
-          </a:ln>
-        </p:spPr>
-        <p:txBody>
-          <a:bodyPr wrap="square" lIns="91440" tIns="45720" rIns="91440" bIns="45720" rtlCol="0" anchor="ctr">
-            <a:normAutofit/>
-          </a:bodyPr>
-          <a:lstStyle/>
-          <a:p>
-            <a:pPr marL="0" indent="0" algn="ctr">
-              <a:buNone/>
-            </a:pPr>
-            <a:r>
-              <a:rPr lang="en-US" sz="1700" b="1" dirty="0">
-                <a:solidFill>
-                  <a:srgbClr val="FFFFFF"/>
-                </a:solidFill>
-                <a:latin typeface="Arial"/>
-                <a:cs typeface="Arial"/>
-              </a:rPr>
-              <a:t>2  Con số kèm KTC</a:t>
-            </a:r>
-          </a:p>
-        </p:txBody>
-      </p:sp>
-      <p:sp>
-        <p:nvSpPr>
-          <p:cNvPr id="73" name="CardBody"/>
-          <p:cNvSpPr/>
-          <p:nvPr/>
-        </p:nvSpPr>
-        <p:spPr>
-          <a:xfrm>
-            <a:off x="3326600" y="2337173"/>
-            <a:ext cx="2669400" cy="1958480"/>
-          </a:xfrm>
-          <a:prstGeom prst="rect">
-            <a:avLst/>
-          </a:prstGeom>
-          <a:solidFill>
-            <a:srgbClr val="EAF2F5"/>
-          </a:solidFill>
-          <a:ln>
-            <a:noFill/>
-          </a:ln>
-        </p:spPr>
-        <p:txBody>
-          <a:bodyPr wrap="square" lIns="137160" tIns="91440" rIns="137160" bIns="91440" rtlCol="0" anchor="ctr">
-            <a:normAutofit/>
-          </a:bodyPr>
-          <a:lstStyle/>
-          <a:p>
-            <a:pPr marL="0" indent="0" algn="ctr">
+              <a:t>Tử vong 28 ngày: kiểm định chi bình phương. Tỷ số chênh thô và hiệu chỉnh bằng hồi quy logistic (tuổi, điểm SOFA, lactat, vận mạch, thở máy, bệnh thận mạn).</a:t>
+            </a:r>
+          </a:p>
+          <a:p>
+            <a:pPr marL="274320" indent="-274320" algn="l">
               <a:lnSpc>
-                <a:spcPct val="104000"/>
+                <a:spcPct val="106000"/>
               </a:lnSpc>
               <a:spcBef>
-                <a:spcPts val="400"/>
+                <a:spcPts val="560"/>
               </a:spcBef>
-              <a:buNone/>
-            </a:pPr>
-            <a:r>
-              <a:rPr lang="en-US" sz="1600" dirty="0">
+              <a:buFont typeface="Arial"/>
+              <a:buChar char="•"/>
+            </a:pPr>
+            <a:r>
+              <a:rPr lang="en-US" sz="1700" dirty="0">
                 <a:solidFill>
                   <a:srgbClr val="000000"/>
                 </a:solidFill>
                 <a:latin typeface="Arial"/>
                 <a:cs typeface="Arial"/>
               </a:rPr>
-              <a:t>Độ lớn tác động kèm khoảng tin cậy 95% (KTC 95%)</a:t>
-            </a:r>
-          </a:p>
-          <a:p>
-            <a:pPr marL="0" indent="0" algn="ctr">
+              <a:t>Thời gian đến tử vong: đường cong Kaplan-Meier (kiểm định log-rank) và hồi quy Cox với cùng các biến. Kiểm tra giả định nguy cơ tỷ lệ.</a:t>
+            </a:r>
+          </a:p>
+          <a:p>
+            <a:pPr marL="274320" indent="-274320" algn="l">
               <a:lnSpc>
-                <a:spcPct val="104000"/>
+                <a:spcPct val="106000"/>
               </a:lnSpc>
               <a:spcBef>
-                <a:spcPts val="400"/>
+                <a:spcPts val="560"/>
               </a:spcBef>
-              <a:buNone/>
-            </a:pPr>
-            <a:r>
-              <a:rPr lang="en-US" sz="1600" dirty="0">
+              <a:buFont typeface="Arial"/>
+              <a:buChar char="•"/>
+            </a:pPr>
+            <a:r>
+              <a:rPr lang="en-US" sz="1700" dirty="0">
                 <a:solidFill>
                   <a:srgbClr val="000000"/>
                 </a:solidFill>
                 <a:latin typeface="Arial"/>
                 <a:cs typeface="Arial"/>
               </a:rPr>
-              <a:t>Không phải 'p = 0.42, không có ý nghĩa'</a:t>
-            </a:r>
-          </a:p>
-        </p:txBody>
-      </p:sp>
-      <p:sp>
-        <p:nvSpPr>
-          <p:cNvPr id="74" name="CardHead"/>
-          <p:cNvSpPr/>
-          <p:nvPr/>
-        </p:nvSpPr>
-        <p:spPr>
-          <a:xfrm>
-            <a:off x="6196000" y="1697173"/>
-            <a:ext cx="2669400" cy="640000"/>
-          </a:xfrm>
-          <a:prstGeom prst="rect">
-            <a:avLst/>
-          </a:prstGeom>
-          <a:solidFill>
-            <a:srgbClr val="5FA39B"/>
-          </a:solidFill>
-          <a:ln>
-            <a:noFill/>
-          </a:ln>
-        </p:spPr>
-        <p:txBody>
-          <a:bodyPr wrap="square" lIns="91440" tIns="45720" rIns="91440" bIns="45720" rtlCol="0" anchor="ctr">
-            <a:normAutofit/>
-          </a:bodyPr>
-          <a:lstStyle/>
-          <a:p>
-            <a:pPr marL="0" indent="0" algn="ctr">
-              <a:buNone/>
-            </a:pPr>
-            <a:r>
-              <a:rPr lang="en-US" sz="1700" b="1" dirty="0">
-                <a:solidFill>
-                  <a:srgbClr val="FFFFFF"/>
-                </a:solidFill>
-                <a:latin typeface="Arial"/>
-                <a:cs typeface="Arial"/>
-              </a:rPr>
-              <a:t>3  Không bình luận</a:t>
-            </a:r>
-          </a:p>
-        </p:txBody>
-      </p:sp>
-      <p:sp>
-        <p:nvSpPr>
-          <p:cNvPr id="75" name="CardBody"/>
-          <p:cNvSpPr/>
-          <p:nvPr/>
-        </p:nvSpPr>
-        <p:spPr>
-          <a:xfrm>
-            <a:off x="6196000" y="2337173"/>
-            <a:ext cx="2669400" cy="1958480"/>
-          </a:xfrm>
-          <a:prstGeom prst="rect">
-            <a:avLst/>
-          </a:prstGeom>
-          <a:solidFill>
-            <a:srgbClr val="EAF2F5"/>
-          </a:solidFill>
-          <a:ln>
-            <a:noFill/>
-          </a:ln>
-        </p:spPr>
-        <p:txBody>
-          <a:bodyPr wrap="square" lIns="137160" tIns="91440" rIns="137160" bIns="91440" rtlCol="0" anchor="ctr">
-            <a:normAutofit/>
-          </a:bodyPr>
-          <a:lstStyle/>
-          <a:p>
-            <a:pPr marL="0" indent="0" algn="ctr">
+              <a:t>Thay đổi tác động theo suy tim: một số hạng tương tác (định trước).</a:t>
+            </a:r>
+          </a:p>
+          <a:p>
+            <a:pPr marL="274320" indent="-274320" algn="l">
               <a:lnSpc>
-                <a:spcPct val="104000"/>
+                <a:spcPct val="106000"/>
               </a:lnSpc>
               <a:spcBef>
-                <a:spcPts val="400"/>
+                <a:spcPts val="560"/>
               </a:spcBef>
-              <a:buNone/>
-            </a:pPr>
-            <a:r>
-              <a:rPr lang="en-US" sz="1600" dirty="0">
+              <a:buFont typeface="Arial"/>
+              <a:buChar char="•"/>
+            </a:pPr>
+            <a:r>
+              <a:rPr lang="en-US" sz="1700" dirty="0">
                 <a:solidFill>
                   <a:srgbClr val="000000"/>
                 </a:solidFill>
                 <a:latin typeface="Arial"/>
                 <a:cs typeface="Arial"/>
               </a:rPr>
-              <a:t>Kết quả báo cáo. Bàn luận diễn giải</a:t>
-            </a:r>
-          </a:p>
-          <a:p>
-            <a:pPr marL="0" indent="0" algn="ctr">
+              <a:t>Phân tích chính trên các trường hợp đầy đủ. Lactat bị thiếu (15%) được xử lý bằng quy gán đa bội (20 bộ dữ liệu) trong phân tích độ nhạy.</a:t>
+            </a:r>
+          </a:p>
+          <a:p>
+            <a:pPr marL="274320" indent="-274320" algn="l">
               <a:lnSpc>
-                <a:spcPct val="104000"/>
+                <a:spcPct val="106000"/>
               </a:lnSpc>
               <a:spcBef>
-                <a:spcPts val="400"/>
+                <a:spcPts val="560"/>
               </a:spcBef>
-              <a:buNone/>
-            </a:pPr>
-            <a:r>
-              <a:rPr lang="en-US" sz="1600" dirty="0">
+              <a:buFont typeface="Arial"/>
+              <a:buChar char="•"/>
+            </a:pPr>
+            <a:r>
+              <a:rPr lang="en-US" sz="1700" dirty="0">
                 <a:solidFill>
                   <a:srgbClr val="000000"/>
                 </a:solidFill>
                 <a:latin typeface="Arial"/>
                 <a:cs typeface="Arial"/>
               </a:rPr>
-              <a:t>Bài 2: kết quả theo thứ tự mục tiêu</a:t>
-            </a:r>
-          </a:p>
-        </p:txBody>
-      </p:sp>
-      <p:sp>
-        <p:nvSpPr>
-          <p:cNvPr id="76" name="CardHead"/>
-          <p:cNvSpPr/>
-          <p:nvPr/>
-        </p:nvSpPr>
-        <p:spPr>
-          <a:xfrm>
-            <a:off x="9065400" y="1697173"/>
-            <a:ext cx="2669400" cy="640000"/>
-          </a:xfrm>
-          <a:prstGeom prst="rect">
-            <a:avLst/>
-          </a:prstGeom>
-          <a:solidFill>
-            <a:srgbClr val="0070C0"/>
-          </a:solidFill>
-          <a:ln>
-            <a:noFill/>
-          </a:ln>
-        </p:spPr>
-        <p:txBody>
-          <a:bodyPr wrap="square" lIns="91440" tIns="45720" rIns="91440" bIns="45720" rtlCol="0" anchor="ctr">
-            <a:normAutofit/>
-          </a:bodyPr>
-          <a:lstStyle/>
-          <a:p>
-            <a:pPr marL="0" indent="0" algn="ctr">
-              <a:buNone/>
-            </a:pPr>
-            <a:r>
-              <a:rPr lang="en-US" sz="1700" b="1" dirty="0">
-                <a:solidFill>
-                  <a:srgbClr val="FFFFFF"/>
-                </a:solidFill>
-                <a:latin typeface="Arial"/>
-                <a:cs typeface="Arial"/>
-              </a:rPr>
-              <a:t>4  Mỗi số một chỗ</a:t>
-            </a:r>
-          </a:p>
-        </p:txBody>
-      </p:sp>
-      <p:sp>
-        <p:nvSpPr>
-          <p:cNvPr id="77" name="CardBody"/>
-          <p:cNvSpPr/>
-          <p:nvPr/>
-        </p:nvSpPr>
-        <p:spPr>
-          <a:xfrm>
-            <a:off x="9065400" y="2337173"/>
-            <a:ext cx="2669400" cy="1958480"/>
-          </a:xfrm>
-          <a:prstGeom prst="rect">
-            <a:avLst/>
-          </a:prstGeom>
-          <a:solidFill>
-            <a:srgbClr val="EAF2F5"/>
-          </a:solidFill>
-          <a:ln>
-            <a:noFill/>
-          </a:ln>
-        </p:spPr>
-        <p:txBody>
-          <a:bodyPr wrap="square" lIns="137160" tIns="91440" rIns="137160" bIns="91440" rtlCol="0" anchor="ctr">
-            <a:normAutofit/>
-          </a:bodyPr>
-          <a:lstStyle/>
-          <a:p>
-            <a:pPr marL="0" indent="0" algn="ctr">
-              <a:lnSpc>
-                <a:spcPct val="104000"/>
-              </a:lnSpc>
-              <a:spcBef>
-                <a:spcPts val="400"/>
-              </a:spcBef>
-              <a:buNone/>
-            </a:pPr>
-            <a:r>
-              <a:rPr lang="en-US" sz="1600" dirty="0">
-                <a:solidFill>
-                  <a:srgbClr val="000000"/>
-                </a:solidFill>
-                <a:latin typeface="Arial"/>
-                <a:cs typeface="Arial"/>
-              </a:rPr>
-              <a:t>Số chính trong văn bản, chi tiết trong bảng</a:t>
-            </a:r>
-          </a:p>
-          <a:p>
-            <a:pPr marL="0" indent="0" algn="ctr">
-              <a:lnSpc>
-                <a:spcPct val="104000"/>
-              </a:lnSpc>
-              <a:spcBef>
-                <a:spcPts val="400"/>
-              </a:spcBef>
-              <a:buNone/>
-            </a:pPr>
-            <a:r>
-              <a:rPr lang="en-US" sz="1600" dirty="0">
-                <a:solidFill>
-                  <a:srgbClr val="000000"/>
-                </a:solidFill>
-                <a:latin typeface="Arial"/>
-                <a:cs typeface="Arial"/>
-              </a:rPr>
-              <a:t>Bài 1: văn bản và Bảng 1 mâu thuẫn về creatinine</a:t>
-            </a:r>
-          </a:p>
-        </p:txBody>
-      </p:sp>
-      <p:sp>
-        <p:nvSpPr>
-          <p:cNvPr id="60" name="Takeaway"/>
-          <p:cNvSpPr/>
-          <p:nvPr/>
-        </p:nvSpPr>
-        <p:spPr>
-          <a:xfrm>
-            <a:off x="457200" y="5390000"/>
-            <a:ext cx="11277600" cy="560000"/>
-          </a:xfrm>
-          <a:prstGeom prst="roundRect">
-            <a:avLst>
-              <a:gd name="adj" fmla="val 12000"/>
-            </a:avLst>
-          </a:prstGeom>
-          <a:solidFill>
-            <a:srgbClr val="0D7377"/>
-          </a:solidFill>
-          <a:ln>
-            <a:noFill/>
-          </a:ln>
-        </p:spPr>
-        <p:txBody>
-          <a:bodyPr wrap="square" lIns="182880" tIns="45720" rIns="182880" bIns="45720" rtlCol="0" anchor="ctr">
-            <a:normAutofit/>
-          </a:bodyPr>
-          <a:lstStyle/>
-          <a:p>
-            <a:pPr marL="0" indent="0" algn="ctr">
-              <a:buNone/>
-            </a:pPr>
-            <a:r>
-              <a:rPr lang="en-US" sz="1300" b="1" dirty="0">
-                <a:solidFill>
-                  <a:srgbClr val="FFFFFF"/>
-                </a:solidFill>
-                <a:latin typeface="Arial"/>
-                <a:cs typeface="Arial"/>
-              </a:rPr>
-              <a:t>THÔNG ĐIỆP CHÍNH   </a:t>
-            </a:r>
-            <a:r>
-              <a:rPr lang="en-US" sz="1550" dirty="0">
-                <a:solidFill>
-                  <a:srgbClr val="FFFFFF"/>
-                </a:solidFill>
-                <a:latin typeface="Arial"/>
-                <a:cs typeface="Arial"/>
-              </a:rPr>
-              <a:t>Đối tượng trước, rồi mỗi kết cục là độ lớn tác động kèm KTC 95%.</a:t>
+              <a:t>Ước lượng kèm khoảng tin cậy 95%. Phân tích bằng R 4.6.</a:t>
             </a:r>
           </a:p>
         </p:txBody>
@@ -22089,7 +21667,7 @@
                 <a:latin typeface="Arial"/>
                 <a:cs typeface="Arial"/>
               </a:rPr>
-              <a:t>Ví dụ mẫu: Kết quả cho FLUID-ICU câu hỏi 1</a:t>
+              <a:t>Kết quả: báo cáo, không bình luận</a:t>
             </a:r>
           </a:p>
         </p:txBody>
@@ -22124,180 +21702,507 @@
       </p:sp>
       <p:sp>
         <p:nvSpPr>
-          <p:cNvPr id="20" name="Body"/>
-          <p:cNvSpPr txBox="1"/>
-          <p:nvPr/>
-        </p:nvSpPr>
-        <p:spPr>
-          <a:xfrm>
-            <a:off x="457200" y="1080000"/>
-            <a:ext cx="11277600" cy="4780000"/>
+          <p:cNvPr id="70" name="CardHead"/>
+          <p:cNvSpPr/>
+          <p:nvPr/>
+        </p:nvSpPr>
+        <p:spPr>
+          <a:xfrm>
+            <a:off x="457200" y="1697173"/>
+            <a:ext cx="2669400" cy="640000"/>
           </a:xfrm>
           <a:prstGeom prst="rect">
             <a:avLst/>
           </a:prstGeom>
-          <a:noFill/>
+          <a:solidFill>
+            <a:srgbClr val="0D7377"/>
+          </a:solidFill>
           <a:ln>
             <a:noFill/>
           </a:ln>
         </p:spPr>
         <p:txBody>
-          <a:bodyPr wrap="square" lIns="91440" tIns="45720" rIns="91440" bIns="45720" rtlCol="0" anchor="ctr"/>
-          <a:lstStyle/>
-          <a:p>
-            <a:pPr marL="0" indent="0" algn="l">
+          <a:bodyPr wrap="square" lIns="91440" tIns="45720" rIns="91440" bIns="45720" rtlCol="0" anchor="ctr">
+            <a:normAutofit/>
+          </a:bodyPr>
+          <a:lstStyle/>
+          <a:p>
+            <a:pPr marL="0" indent="0" algn="ctr">
+              <a:buNone/>
+            </a:pPr>
+            <a:r>
+              <a:rPr lang="en-US" sz="1700" b="1" dirty="0">
+                <a:solidFill>
+                  <a:srgbClr val="FFFFFF"/>
+                </a:solidFill>
+                <a:latin typeface="Arial"/>
+                <a:cs typeface="Arial"/>
+              </a:rPr>
+              <a:t>1  Đối tượng trước</a:t>
+            </a:r>
+          </a:p>
+        </p:txBody>
+      </p:sp>
+      <p:sp>
+        <p:nvSpPr>
+          <p:cNvPr id="71" name="CardBody"/>
+          <p:cNvSpPr/>
+          <p:nvPr/>
+        </p:nvSpPr>
+        <p:spPr>
+          <a:xfrm>
+            <a:off x="457200" y="2337173"/>
+            <a:ext cx="2669400" cy="1958480"/>
+          </a:xfrm>
+          <a:prstGeom prst="rect">
+            <a:avLst/>
+          </a:prstGeom>
+          <a:solidFill>
+            <a:srgbClr val="EAF2F5"/>
+          </a:solidFill>
+          <a:ln>
+            <a:noFill/>
+          </a:ln>
+        </p:spPr>
+        <p:txBody>
+          <a:bodyPr wrap="square" lIns="137160" tIns="91440" rIns="137160" bIns="91440" rtlCol="0" anchor="ctr">
+            <a:normAutofit/>
+          </a:bodyPr>
+          <a:lstStyle/>
+          <a:p>
+            <a:pPr marL="0" indent="0" algn="ctr">
               <a:lnSpc>
-                <a:spcPct val="108000"/>
-              </a:lnSpc>
-              <a:buNone/>
-            </a:pPr>
-            <a:r>
-              <a:rPr lang="en-US" sz="1900" i="1" dirty="0">
-                <a:solidFill>
-                  <a:srgbClr val="595959"/>
-                </a:solidFill>
-                <a:latin typeface="Arial"/>
-                <a:cs typeface="Arial"/>
-              </a:rPr>
-              <a:t>Đối tượng, Bảng 1, số liệu kết cục, ước lượng thô và hiệu chỉnh (dữ liệu mô phỏng).</a:t>
-            </a:r>
-          </a:p>
-          <a:p>
-            <a:pPr>
-              <a:buNone/>
-            </a:pPr>
-            <a:endParaRPr sz="950"/>
-          </a:p>
-          <a:p>
-            <a:pPr marL="274320" indent="-274320" algn="l">
-              <a:lnSpc>
-                <a:spcPct val="106000"/>
+                <a:spcPct val="104000"/>
               </a:lnSpc>
               <a:spcBef>
-                <a:spcPts val="560"/>
+                <a:spcPts val="400"/>
               </a:spcBef>
-              <a:buFont typeface="Arial"/>
-              <a:buChar char="•"/>
-            </a:pPr>
-            <a:r>
-              <a:rPr lang="en-US" sz="1700" dirty="0">
+              <a:buNone/>
+            </a:pPr>
+            <a:r>
+              <a:rPr lang="en-US" sz="1600" dirty="0">
                 <a:solidFill>
                   <a:srgbClr val="000000"/>
                 </a:solidFill>
                 <a:latin typeface="Arial"/>
                 <a:cs typeface="Arial"/>
               </a:rPr>
-              <a:t>Mục 13: Trong 620 người bệnh được đưa vào, 618 có cân bằng dịch ngày 3 và được phân tích, 527 có đủ dữ liệu cho mô hình hiệu chỉnh.</a:t>
-            </a:r>
-          </a:p>
-          <a:p>
-            <a:pPr marL="274320" indent="-274320" algn="l">
+              <a:t>Sàng lọc, đưa vào, phân tích, và vì sao mất một số</a:t>
+            </a:r>
+          </a:p>
+          <a:p>
+            <a:pPr marL="0" indent="0" algn="ctr">
               <a:lnSpc>
-                <a:spcPct val="106000"/>
+                <a:spcPct val="104000"/>
               </a:lnSpc>
               <a:spcBef>
-                <a:spcPts val="560"/>
+                <a:spcPts val="400"/>
               </a:spcBef>
-              <a:buFont typeface="Arial"/>
-              <a:buChar char="•"/>
-            </a:pPr>
-            <a:r>
-              <a:rPr lang="en-US" sz="1700" dirty="0">
+              <a:buNone/>
+            </a:pPr>
+            <a:r>
+              <a:rPr lang="en-US" sz="1600" dirty="0">
                 <a:solidFill>
                   <a:srgbClr val="000000"/>
                 </a:solidFill>
                 <a:latin typeface="Arial"/>
                 <a:cs typeface="Arial"/>
               </a:rPr>
-              <a:t>Mục 14: 373 người (60.4%) có cân bằng dương. Nhóm này nặng hơn: SOFA trung vị 8 so với 6. Vận mạch 55.0% so với 24.9% (Bảng 1).</a:t>
-            </a:r>
-          </a:p>
-          <a:p>
-            <a:pPr marL="274320" indent="-274320" algn="l">
+              <a:t>Bài 1: sàng lọc 1201, phân nhóm 50, phân tích 48</a:t>
+            </a:r>
+          </a:p>
+        </p:txBody>
+      </p:sp>
+      <p:sp>
+        <p:nvSpPr>
+          <p:cNvPr id="72" name="CardHead"/>
+          <p:cNvSpPr/>
+          <p:nvPr/>
+        </p:nvSpPr>
+        <p:spPr>
+          <a:xfrm>
+            <a:off x="3326600" y="1697173"/>
+            <a:ext cx="2669400" cy="640000"/>
+          </a:xfrm>
+          <a:prstGeom prst="rect">
+            <a:avLst/>
+          </a:prstGeom>
+          <a:solidFill>
+            <a:srgbClr val="0B376C"/>
+          </a:solidFill>
+          <a:ln>
+            <a:noFill/>
+          </a:ln>
+        </p:spPr>
+        <p:txBody>
+          <a:bodyPr wrap="square" lIns="91440" tIns="45720" rIns="91440" bIns="45720" rtlCol="0" anchor="ctr">
+            <a:normAutofit/>
+          </a:bodyPr>
+          <a:lstStyle/>
+          <a:p>
+            <a:pPr marL="0" indent="0" algn="ctr">
+              <a:buNone/>
+            </a:pPr>
+            <a:r>
+              <a:rPr lang="en-US" sz="1700" b="1" dirty="0">
+                <a:solidFill>
+                  <a:srgbClr val="FFFFFF"/>
+                </a:solidFill>
+                <a:latin typeface="Arial"/>
+                <a:cs typeface="Arial"/>
+              </a:rPr>
+              <a:t>2  Con số kèm KTC</a:t>
+            </a:r>
+          </a:p>
+        </p:txBody>
+      </p:sp>
+      <p:sp>
+        <p:nvSpPr>
+          <p:cNvPr id="73" name="CardBody"/>
+          <p:cNvSpPr/>
+          <p:nvPr/>
+        </p:nvSpPr>
+        <p:spPr>
+          <a:xfrm>
+            <a:off x="3326600" y="2337173"/>
+            <a:ext cx="2669400" cy="1958480"/>
+          </a:xfrm>
+          <a:prstGeom prst="rect">
+            <a:avLst/>
+          </a:prstGeom>
+          <a:solidFill>
+            <a:srgbClr val="EAF2F5"/>
+          </a:solidFill>
+          <a:ln>
+            <a:noFill/>
+          </a:ln>
+        </p:spPr>
+        <p:txBody>
+          <a:bodyPr wrap="square" lIns="137160" tIns="91440" rIns="137160" bIns="91440" rtlCol="0" anchor="ctr">
+            <a:normAutofit/>
+          </a:bodyPr>
+          <a:lstStyle/>
+          <a:p>
+            <a:pPr marL="0" indent="0" algn="ctr">
               <a:lnSpc>
-                <a:spcPct val="106000"/>
+                <a:spcPct val="104000"/>
               </a:lnSpc>
               <a:spcBef>
-                <a:spcPts val="560"/>
+                <a:spcPts val="400"/>
               </a:spcBef>
-              <a:buFont typeface="Arial"/>
-              <a:buChar char="•"/>
-            </a:pPr>
-            <a:r>
-              <a:rPr lang="en-US" sz="1700" dirty="0">
+              <a:buNone/>
+            </a:pPr>
+            <a:r>
+              <a:rPr lang="en-US" sz="1600" dirty="0">
                 <a:solidFill>
                   <a:srgbClr val="000000"/>
                 </a:solidFill>
                 <a:latin typeface="Arial"/>
                 <a:cs typeface="Arial"/>
               </a:rPr>
-              <a:t>Mục 15: Đến ngày 28, 134 trên 373 (35.9%) người bệnh cân bằng dương và 45 trên 245 (18.4%) người bệnh cân bằng âm đã tử vong.</a:t>
-            </a:r>
-          </a:p>
-          <a:p>
-            <a:pPr marL="274320" indent="-274320" algn="l">
+              <a:t>Độ lớn tác động kèm khoảng tin cậy 95% (KTC 95%)</a:t>
+            </a:r>
+          </a:p>
+          <a:p>
+            <a:pPr marL="0" indent="0" algn="ctr">
               <a:lnSpc>
-                <a:spcPct val="106000"/>
+                <a:spcPct val="104000"/>
               </a:lnSpc>
               <a:spcBef>
-                <a:spcPts val="560"/>
+                <a:spcPts val="400"/>
               </a:spcBef>
-              <a:buFont typeface="Arial"/>
-              <a:buChar char="•"/>
-            </a:pPr>
-            <a:r>
-              <a:rPr lang="en-US" sz="1700" dirty="0">
+              <a:buNone/>
+            </a:pPr>
+            <a:r>
+              <a:rPr lang="en-US" sz="1600" dirty="0">
                 <a:solidFill>
                   <a:srgbClr val="000000"/>
                 </a:solidFill>
                 <a:latin typeface="Arial"/>
                 <a:cs typeface="Arial"/>
               </a:rPr>
-              <a:t>Mục 16: OR thô 2.49 (KTC 95% 1.70 đến 3.70). OR hiệu chỉnh 1.62 (KTC 95% 1.02 đến 2.59).</a:t>
-            </a:r>
-          </a:p>
-          <a:p>
-            <a:pPr marL="274320" indent="-274320" algn="l">
+              <a:t>Không phải 'p = 0.42, không có ý nghĩa'</a:t>
+            </a:r>
+          </a:p>
+        </p:txBody>
+      </p:sp>
+      <p:sp>
+        <p:nvSpPr>
+          <p:cNvPr id="74" name="CardHead"/>
+          <p:cNvSpPr/>
+          <p:nvPr/>
+        </p:nvSpPr>
+        <p:spPr>
+          <a:xfrm>
+            <a:off x="6196000" y="1697173"/>
+            <a:ext cx="2669400" cy="640000"/>
+          </a:xfrm>
+          <a:prstGeom prst="rect">
+            <a:avLst/>
+          </a:prstGeom>
+          <a:solidFill>
+            <a:srgbClr val="5FA39B"/>
+          </a:solidFill>
+          <a:ln>
+            <a:noFill/>
+          </a:ln>
+        </p:spPr>
+        <p:txBody>
+          <a:bodyPr wrap="square" lIns="91440" tIns="45720" rIns="91440" bIns="45720" rtlCol="0" anchor="ctr">
+            <a:normAutofit/>
+          </a:bodyPr>
+          <a:lstStyle/>
+          <a:p>
+            <a:pPr marL="0" indent="0" algn="ctr">
+              <a:buNone/>
+            </a:pPr>
+            <a:r>
+              <a:rPr lang="en-US" sz="1700" b="1" dirty="0">
+                <a:solidFill>
+                  <a:srgbClr val="FFFFFF"/>
+                </a:solidFill>
+                <a:latin typeface="Arial"/>
+                <a:cs typeface="Arial"/>
+              </a:rPr>
+              <a:t>3  Không bình luận</a:t>
+            </a:r>
+          </a:p>
+        </p:txBody>
+      </p:sp>
+      <p:sp>
+        <p:nvSpPr>
+          <p:cNvPr id="75" name="CardBody"/>
+          <p:cNvSpPr/>
+          <p:nvPr/>
+        </p:nvSpPr>
+        <p:spPr>
+          <a:xfrm>
+            <a:off x="6196000" y="2337173"/>
+            <a:ext cx="2669400" cy="1958480"/>
+          </a:xfrm>
+          <a:prstGeom prst="rect">
+            <a:avLst/>
+          </a:prstGeom>
+          <a:solidFill>
+            <a:srgbClr val="EAF2F5"/>
+          </a:solidFill>
+          <a:ln>
+            <a:noFill/>
+          </a:ln>
+        </p:spPr>
+        <p:txBody>
+          <a:bodyPr wrap="square" lIns="137160" tIns="91440" rIns="137160" bIns="91440" rtlCol="0" anchor="ctr">
+            <a:normAutofit/>
+          </a:bodyPr>
+          <a:lstStyle/>
+          <a:p>
+            <a:pPr marL="0" indent="0" algn="ctr">
               <a:lnSpc>
-                <a:spcPct val="106000"/>
+                <a:spcPct val="104000"/>
               </a:lnSpc>
               <a:spcBef>
-                <a:spcPts val="560"/>
+                <a:spcPts val="400"/>
               </a:spcBef>
-              <a:buFont typeface="Arial"/>
-              <a:buChar char="•"/>
-            </a:pPr>
-            <a:r>
-              <a:rPr lang="en-US" sz="1700" dirty="0">
+              <a:buNone/>
+            </a:pPr>
+            <a:r>
+              <a:rPr lang="en-US" sz="1600" dirty="0">
                 <a:solidFill>
                   <a:srgbClr val="000000"/>
                 </a:solidFill>
                 <a:latin typeface="Arial"/>
                 <a:cs typeface="Arial"/>
               </a:rPr>
-              <a:t>Mục 17: Quy gán đa bội: OR hiệu chỉnh 1.70 (1.09 đến 2.64). HR Cox hiệu chỉnh 1.46 (1.00 đến 2.13).</a:t>
-            </a:r>
-          </a:p>
-          <a:p>
-            <a:pPr marL="274320" indent="-274320" algn="l">
+              <a:t>Kết quả báo cáo. Bàn luận diễn giải</a:t>
+            </a:r>
+          </a:p>
+          <a:p>
+            <a:pPr marL="0" indent="0" algn="ctr">
               <a:lnSpc>
-                <a:spcPct val="106000"/>
+                <a:spcPct val="104000"/>
               </a:lnSpc>
               <a:spcBef>
-                <a:spcPts val="560"/>
+                <a:spcPts val="400"/>
               </a:spcBef>
-              <a:buFont typeface="Arial"/>
-              <a:buChar char="•"/>
-            </a:pPr>
-            <a:r>
-              <a:rPr lang="en-US" sz="1700" dirty="0">
-                <a:solidFill>
-                  <a:srgbClr val="0B376C"/>
-                </a:solidFill>
-                <a:latin typeface="Arial"/>
-                <a:cs typeface="Arial"/>
-              </a:rPr>
-              <a:t>Không 'vì', không 'có ý nghĩa', không 'gợi ý': chỉ con số kèm KTC 95%.</a:t>
+              <a:buNone/>
+            </a:pPr>
+            <a:r>
+              <a:rPr lang="en-US" sz="1600" dirty="0">
+                <a:solidFill>
+                  <a:srgbClr val="000000"/>
+                </a:solidFill>
+                <a:latin typeface="Arial"/>
+                <a:cs typeface="Arial"/>
+              </a:rPr>
+              <a:t>Bài 2: kết quả theo thứ tự mục tiêu</a:t>
+            </a:r>
+          </a:p>
+        </p:txBody>
+      </p:sp>
+      <p:sp>
+        <p:nvSpPr>
+          <p:cNvPr id="76" name="CardHead"/>
+          <p:cNvSpPr/>
+          <p:nvPr/>
+        </p:nvSpPr>
+        <p:spPr>
+          <a:xfrm>
+            <a:off x="9065400" y="1697173"/>
+            <a:ext cx="2669400" cy="640000"/>
+          </a:xfrm>
+          <a:prstGeom prst="rect">
+            <a:avLst/>
+          </a:prstGeom>
+          <a:solidFill>
+            <a:srgbClr val="0070C0"/>
+          </a:solidFill>
+          <a:ln>
+            <a:noFill/>
+          </a:ln>
+        </p:spPr>
+        <p:txBody>
+          <a:bodyPr wrap="square" lIns="91440" tIns="45720" rIns="91440" bIns="45720" rtlCol="0" anchor="ctr">
+            <a:normAutofit/>
+          </a:bodyPr>
+          <a:lstStyle/>
+          <a:p>
+            <a:pPr marL="0" indent="0" algn="ctr">
+              <a:buNone/>
+            </a:pPr>
+            <a:r>
+              <a:rPr lang="en-US" sz="1700" b="1" dirty="0">
+                <a:solidFill>
+                  <a:srgbClr val="FFFFFF"/>
+                </a:solidFill>
+                <a:latin typeface="Arial"/>
+                <a:cs typeface="Arial"/>
+              </a:rPr>
+              <a:t>4  Mỗi số một chỗ</a:t>
+            </a:r>
+          </a:p>
+        </p:txBody>
+      </p:sp>
+      <p:sp>
+        <p:nvSpPr>
+          <p:cNvPr id="77" name="CardBody"/>
+          <p:cNvSpPr/>
+          <p:nvPr/>
+        </p:nvSpPr>
+        <p:spPr>
+          <a:xfrm>
+            <a:off x="9065400" y="2337173"/>
+            <a:ext cx="2669400" cy="1958480"/>
+          </a:xfrm>
+          <a:prstGeom prst="rect">
+            <a:avLst/>
+          </a:prstGeom>
+          <a:solidFill>
+            <a:srgbClr val="EAF2F5"/>
+          </a:solidFill>
+          <a:ln>
+            <a:noFill/>
+          </a:ln>
+        </p:spPr>
+        <p:txBody>
+          <a:bodyPr wrap="square" lIns="137160" tIns="91440" rIns="137160" bIns="91440" rtlCol="0" anchor="ctr">
+            <a:normAutofit/>
+          </a:bodyPr>
+          <a:lstStyle/>
+          <a:p>
+            <a:pPr marL="0" indent="0" algn="ctr">
+              <a:lnSpc>
+                <a:spcPct val="104000"/>
+              </a:lnSpc>
+              <a:spcBef>
+                <a:spcPts val="400"/>
+              </a:spcBef>
+              <a:buNone/>
+            </a:pPr>
+            <a:r>
+              <a:rPr lang="en-US" sz="1600" dirty="0">
+                <a:solidFill>
+                  <a:srgbClr val="000000"/>
+                </a:solidFill>
+                <a:latin typeface="Arial"/>
+                <a:cs typeface="Arial"/>
+              </a:rPr>
+              <a:t>Số chính trong văn bản, chi tiết trong bảng</a:t>
+            </a:r>
+          </a:p>
+          <a:p>
+            <a:pPr marL="0" indent="0" algn="ctr">
+              <a:lnSpc>
+                <a:spcPct val="104000"/>
+              </a:lnSpc>
+              <a:spcBef>
+                <a:spcPts val="400"/>
+              </a:spcBef>
+              <a:buNone/>
+            </a:pPr>
+            <a:r>
+              <a:rPr lang="en-US" sz="1600" dirty="0">
+                <a:solidFill>
+                  <a:srgbClr val="000000"/>
+                </a:solidFill>
+                <a:latin typeface="Arial"/>
+                <a:cs typeface="Arial"/>
+              </a:rPr>
+              <a:t>Bài 1: văn bản và Bảng 1 mâu thuẫn về creatinine</a:t>
+            </a:r>
+          </a:p>
+        </p:txBody>
+      </p:sp>
+      <p:sp>
+        <p:nvSpPr>
+          <p:cNvPr id="60" name="Takeaway"/>
+          <p:cNvSpPr/>
+          <p:nvPr/>
+        </p:nvSpPr>
+        <p:spPr>
+          <a:xfrm>
+            <a:off x="457200" y="5390000"/>
+            <a:ext cx="11277600" cy="560000"/>
+          </a:xfrm>
+          <a:prstGeom prst="roundRect">
+            <a:avLst>
+              <a:gd name="adj" fmla="val 12000"/>
+            </a:avLst>
+          </a:prstGeom>
+          <a:solidFill>
+            <a:srgbClr val="0D7377"/>
+          </a:solidFill>
+          <a:ln>
+            <a:noFill/>
+          </a:ln>
+        </p:spPr>
+        <p:txBody>
+          <a:bodyPr wrap="square" lIns="182880" tIns="45720" rIns="182880" bIns="45720" rtlCol="0" anchor="ctr">
+            <a:normAutofit/>
+          </a:bodyPr>
+          <a:lstStyle/>
+          <a:p>
+            <a:pPr marL="0" indent="0" algn="ctr">
+              <a:buNone/>
+            </a:pPr>
+            <a:r>
+              <a:rPr lang="en-US" sz="1300" b="1" dirty="0">
+                <a:solidFill>
+                  <a:srgbClr val="FFFFFF"/>
+                </a:solidFill>
+                <a:latin typeface="Arial"/>
+                <a:cs typeface="Arial"/>
+              </a:rPr>
+              <a:t>THÔNG ĐIỆP CHÍNH   </a:t>
+            </a:r>
+            <a:r>
+              <a:rPr lang="en-US" sz="1550" dirty="0">
+                <a:solidFill>
+                  <a:srgbClr val="FFFFFF"/>
+                </a:solidFill>
+                <a:latin typeface="Arial"/>
+                <a:cs typeface="Arial"/>
+              </a:rPr>
+              <a:t>Đối tượng trước, rồi mỗi kết cục là độ lớn tác động kèm KTC 95%.</a:t>
             </a:r>
           </a:p>
         </p:txBody>
@@ -22465,7 +22370,7 @@
                 <a:latin typeface="Arial"/>
                 <a:cs typeface="Arial"/>
               </a:rPr>
-              <a:t>Bảng và hình tự giải thích được</a:t>
+              <a:t>Ví dụ mẫu: Kết quả cho FLUID-ICU câu hỏi 1</a:t>
             </a:r>
           </a:p>
         </p:txBody>
@@ -22498,81 +22403,182 @@
           </a:p>
         </p:txBody>
       </p:sp>
-      <p:pic>
-        <p:nvPicPr>
-          <p:cNvPr id="25" name="Figure"/>
-          <p:cNvPicPr>
-            <a:picLocks noChangeAspect="1"/>
-          </p:cNvPicPr>
-          <p:nvPr/>
-        </p:nvPicPr>
-        <p:blipFill>
-          <a:blip r:embed="rId4"/>
-          <a:stretch>
-            <a:fillRect/>
-          </a:stretch>
-        </p:blipFill>
-        <p:spPr>
-          <a:xfrm>
-            <a:off x="908500" y="1150000"/>
-            <a:ext cx="10375000" cy="4150000"/>
+      <p:sp>
+        <p:nvSpPr>
+          <p:cNvPr id="20" name="Body"/>
+          <p:cNvSpPr txBox="1"/>
+          <p:nvPr/>
+        </p:nvSpPr>
+        <p:spPr>
+          <a:xfrm>
+            <a:off x="457200" y="1080000"/>
+            <a:ext cx="11277600" cy="4780000"/>
           </a:xfrm>
           <a:prstGeom prst="rect">
             <a:avLst/>
           </a:prstGeom>
-        </p:spPr>
-      </p:pic>
-      <p:sp>
-        <p:nvSpPr>
-          <p:cNvPr id="60" name="Takeaway"/>
-          <p:cNvSpPr/>
-          <p:nvPr/>
-        </p:nvSpPr>
-        <p:spPr>
-          <a:xfrm>
-            <a:off x="457200" y="5390000"/>
-            <a:ext cx="11277600" cy="560000"/>
-          </a:xfrm>
-          <a:prstGeom prst="roundRect">
-            <a:avLst>
-              <a:gd name="adj" fmla="val 12000"/>
-            </a:avLst>
-          </a:prstGeom>
-          <a:solidFill>
-            <a:srgbClr val="0D7377"/>
-          </a:solidFill>
+          <a:noFill/>
           <a:ln>
             <a:noFill/>
           </a:ln>
         </p:spPr>
         <p:txBody>
-          <a:bodyPr wrap="square" lIns="182880" tIns="45720" rIns="182880" bIns="45720" rtlCol="0" anchor="ctr">
-            <a:normAutofit/>
-          </a:bodyPr>
-          <a:lstStyle/>
-          <a:p>
-            <a:pPr marL="0" indent="0" algn="ctr">
-              <a:buNone/>
-            </a:pPr>
-            <a:r>
-              <a:rPr lang="en-US" sz="1300" b="1" dirty="0">
-                <a:solidFill>
-                  <a:srgbClr val="FFFFFF"/>
-                </a:solidFill>
-                <a:latin typeface="Arial"/>
-                <a:cs typeface="Arial"/>
-              </a:rPr>
-              <a:t>THÔNG ĐIỆP CHÍNH   </a:t>
-            </a:r>
-            <a:r>
-              <a:rPr lang="en-US" sz="1550" dirty="0">
-                <a:solidFill>
-                  <a:srgbClr val="FFFFFF"/>
-                </a:solidFill>
-                <a:latin typeface="Arial"/>
-                <a:cs typeface="Arial"/>
-              </a:rPr>
-              <a:t>Người đọc phải hiểu mỗi bảng mà không cần đọc văn bản.</a:t>
+          <a:bodyPr wrap="square" lIns="91440" tIns="45720" rIns="91440" bIns="45720" rtlCol="0" anchor="ctr"/>
+          <a:lstStyle/>
+          <a:p>
+            <a:pPr marL="0" indent="0" algn="l">
+              <a:lnSpc>
+                <a:spcPct val="108000"/>
+              </a:lnSpc>
+              <a:buNone/>
+            </a:pPr>
+            <a:r>
+              <a:rPr lang="en-US" sz="1900" i="1" dirty="0">
+                <a:solidFill>
+                  <a:srgbClr val="595959"/>
+                </a:solidFill>
+                <a:latin typeface="Arial"/>
+                <a:cs typeface="Arial"/>
+              </a:rPr>
+              <a:t>Đối tượng, Bảng 1, số liệu kết cục, ước lượng thô và hiệu chỉnh (dữ liệu mô phỏng).</a:t>
+            </a:r>
+          </a:p>
+          <a:p>
+            <a:pPr>
+              <a:buNone/>
+            </a:pPr>
+            <a:endParaRPr sz="950"/>
+          </a:p>
+          <a:p>
+            <a:pPr marL="274320" indent="-274320" algn="l">
+              <a:lnSpc>
+                <a:spcPct val="106000"/>
+              </a:lnSpc>
+              <a:spcBef>
+                <a:spcPts val="560"/>
+              </a:spcBef>
+              <a:buFont typeface="Arial"/>
+              <a:buChar char="•"/>
+            </a:pPr>
+            <a:r>
+              <a:rPr lang="en-US" sz="1700" dirty="0">
+                <a:solidFill>
+                  <a:srgbClr val="000000"/>
+                </a:solidFill>
+                <a:latin typeface="Arial"/>
+                <a:cs typeface="Arial"/>
+              </a:rPr>
+              <a:t>Mục 13: Trong 620 người bệnh được đưa vào, 618 có cân bằng dịch ngày 3 và được phân tích, 527 có đủ dữ liệu cho mô hình hiệu chỉnh.</a:t>
+            </a:r>
+          </a:p>
+          <a:p>
+            <a:pPr marL="274320" indent="-274320" algn="l">
+              <a:lnSpc>
+                <a:spcPct val="106000"/>
+              </a:lnSpc>
+              <a:spcBef>
+                <a:spcPts val="560"/>
+              </a:spcBef>
+              <a:buFont typeface="Arial"/>
+              <a:buChar char="•"/>
+            </a:pPr>
+            <a:r>
+              <a:rPr lang="en-US" sz="1700" dirty="0">
+                <a:solidFill>
+                  <a:srgbClr val="000000"/>
+                </a:solidFill>
+                <a:latin typeface="Arial"/>
+                <a:cs typeface="Arial"/>
+              </a:rPr>
+              <a:t>Mục 14: 373 người (60.4%) có cân bằng dương. Nhóm này nặng hơn: SOFA trung vị 8 so với 6. Vận mạch 55.0% so với 24.9% (Bảng 1).</a:t>
+            </a:r>
+          </a:p>
+          <a:p>
+            <a:pPr marL="274320" indent="-274320" algn="l">
+              <a:lnSpc>
+                <a:spcPct val="106000"/>
+              </a:lnSpc>
+              <a:spcBef>
+                <a:spcPts val="560"/>
+              </a:spcBef>
+              <a:buFont typeface="Arial"/>
+              <a:buChar char="•"/>
+            </a:pPr>
+            <a:r>
+              <a:rPr lang="en-US" sz="1700" dirty="0">
+                <a:solidFill>
+                  <a:srgbClr val="000000"/>
+                </a:solidFill>
+                <a:latin typeface="Arial"/>
+                <a:cs typeface="Arial"/>
+              </a:rPr>
+              <a:t>Mục 15: Đến ngày 28, 134 trên 373 (35.9%) người bệnh cân bằng dương và 45 trên 245 (18.4%) người bệnh cân bằng âm đã tử vong.</a:t>
+            </a:r>
+          </a:p>
+          <a:p>
+            <a:pPr marL="274320" indent="-274320" algn="l">
+              <a:lnSpc>
+                <a:spcPct val="106000"/>
+              </a:lnSpc>
+              <a:spcBef>
+                <a:spcPts val="560"/>
+              </a:spcBef>
+              <a:buFont typeface="Arial"/>
+              <a:buChar char="•"/>
+            </a:pPr>
+            <a:r>
+              <a:rPr lang="en-US" sz="1700" dirty="0">
+                <a:solidFill>
+                  <a:srgbClr val="000000"/>
+                </a:solidFill>
+                <a:latin typeface="Arial"/>
+                <a:cs typeface="Arial"/>
+              </a:rPr>
+              <a:t>Mục 16: OR thô 2.49 (KTC 95% 1.70 đến 3.70). OR hiệu chỉnh 1.62 (KTC 95% 1.02 đến 2.59).</a:t>
+            </a:r>
+          </a:p>
+          <a:p>
+            <a:pPr marL="274320" indent="-274320" algn="l">
+              <a:lnSpc>
+                <a:spcPct val="106000"/>
+              </a:lnSpc>
+              <a:spcBef>
+                <a:spcPts val="560"/>
+              </a:spcBef>
+              <a:buFont typeface="Arial"/>
+              <a:buChar char="•"/>
+            </a:pPr>
+            <a:r>
+              <a:rPr lang="en-US" sz="1700" dirty="0">
+                <a:solidFill>
+                  <a:srgbClr val="000000"/>
+                </a:solidFill>
+                <a:latin typeface="Arial"/>
+                <a:cs typeface="Arial"/>
+              </a:rPr>
+              <a:t>Mục 17: Quy gán đa bội: OR hiệu chỉnh 1.70 (1.09 đến 2.64). HR Cox hiệu chỉnh 1.46 (1.00 đến 2.13).</a:t>
+            </a:r>
+          </a:p>
+          <a:p>
+            <a:pPr marL="274320" indent="-274320" algn="l">
+              <a:lnSpc>
+                <a:spcPct val="106000"/>
+              </a:lnSpc>
+              <a:spcBef>
+                <a:spcPts val="560"/>
+              </a:spcBef>
+              <a:buFont typeface="Arial"/>
+              <a:buChar char="•"/>
+            </a:pPr>
+            <a:r>
+              <a:rPr lang="en-US" sz="1700" dirty="0">
+                <a:solidFill>
+                  <a:srgbClr val="0B376C"/>
+                </a:solidFill>
+                <a:latin typeface="Arial"/>
+                <a:cs typeface="Arial"/>
+              </a:rPr>
+              <a:t>Không 'vì', không 'có ý nghĩa', không 'gợi ý': chỉ con số kèm KTC 95%.</a:t>
             </a:r>
           </a:p>
         </p:txBody>
@@ -22682,6 +22688,281 @@
 </file>
 
 <file path=ppt/slides/slide33.xml><?xml version="1.0" encoding="utf-8"?>
+<p:sld xmlns:a="http://schemas.openxmlformats.org/drawingml/2006/main" xmlns:r="http://schemas.openxmlformats.org/officeDocument/2006/relationships" xmlns:p="http://schemas.openxmlformats.org/presentationml/2006/main">
+  <p:cSld>
+    <p:bg>
+      <p:bgPr>
+        <a:solidFill>
+          <a:schemeClr val="bg1"/>
+        </a:solidFill>
+        <a:effectLst/>
+      </p:bgPr>
+    </p:bg>
+    <p:spTree>
+      <p:nvGrpSpPr>
+        <p:cNvPr id="1" name=""/>
+        <p:cNvGrpSpPr/>
+        <p:nvPr/>
+      </p:nvGrpSpPr>
+      <p:grpSpPr>
+        <a:xfrm>
+          <a:off x="0" y="0"/>
+          <a:ext cx="0" cy="0"/>
+          <a:chOff x="0" y="0"/>
+          <a:chExt cx="0" cy="0"/>
+        </a:xfrm>
+      </p:grpSpPr>
+      <p:sp>
+        <p:nvSpPr>
+          <p:cNvPr id="10" name="Title"/>
+          <p:cNvSpPr txBox="1"/>
+          <p:nvPr/>
+        </p:nvSpPr>
+        <p:spPr>
+          <a:xfrm>
+            <a:off x="457200" y="160000"/>
+            <a:ext cx="11277600" cy="750000"/>
+          </a:xfrm>
+          <a:prstGeom prst="rect">
+            <a:avLst/>
+          </a:prstGeom>
+          <a:noFill/>
+          <a:ln>
+            <a:noFill/>
+          </a:ln>
+        </p:spPr>
+        <p:txBody>
+          <a:bodyPr wrap="square" lIns="91440" tIns="45720" rIns="91440" bIns="45720" rtlCol="0" anchor="ctr"/>
+          <a:lstStyle/>
+          <a:p>
+            <a:pPr marL="0" indent="0" algn="l">
+              <a:buNone/>
+            </a:pPr>
+            <a:r>
+              <a:rPr lang="en-US" sz="2800" b="1" dirty="0">
+                <a:solidFill>
+                  <a:srgbClr val="0D7377"/>
+                </a:solidFill>
+                <a:latin typeface="Arial"/>
+                <a:cs typeface="Arial"/>
+              </a:rPr>
+              <a:t>Bảng và hình tự giải thích được</a:t>
+            </a:r>
+          </a:p>
+        </p:txBody>
+      </p:sp>
+      <p:sp>
+        <p:nvSpPr>
+          <p:cNvPr id="11" name="Rule"/>
+          <p:cNvSpPr/>
+          <p:nvPr/>
+        </p:nvSpPr>
+        <p:spPr>
+          <a:xfrm>
+            <a:off x="457200" y="940000"/>
+            <a:ext cx="11277600" cy="0"/>
+          </a:xfrm>
+          <a:prstGeom prst="line">
+            <a:avLst/>
+          </a:prstGeom>
+          <a:ln w="19050">
+            <a:solidFill>
+              <a:srgbClr val="0D7377"/>
+            </a:solidFill>
+          </a:ln>
+        </p:spPr>
+        <p:txBody>
+          <a:bodyPr/>
+          <a:lstStyle/>
+          <a:p>
+            <a:endParaRPr/>
+          </a:p>
+        </p:txBody>
+      </p:sp>
+      <p:pic>
+        <p:nvPicPr>
+          <p:cNvPr id="25" name="Figure"/>
+          <p:cNvPicPr>
+            <a:picLocks noChangeAspect="1"/>
+          </p:cNvPicPr>
+          <p:nvPr/>
+        </p:nvPicPr>
+        <p:blipFill>
+          <a:blip r:embed="rId4"/>
+          <a:stretch>
+            <a:fillRect/>
+          </a:stretch>
+        </p:blipFill>
+        <p:spPr>
+          <a:xfrm>
+            <a:off x="908500" y="1150000"/>
+            <a:ext cx="10375000" cy="4150000"/>
+          </a:xfrm>
+          <a:prstGeom prst="rect">
+            <a:avLst/>
+          </a:prstGeom>
+        </p:spPr>
+      </p:pic>
+      <p:sp>
+        <p:nvSpPr>
+          <p:cNvPr id="60" name="Takeaway"/>
+          <p:cNvSpPr/>
+          <p:nvPr/>
+        </p:nvSpPr>
+        <p:spPr>
+          <a:xfrm>
+            <a:off x="457200" y="5390000"/>
+            <a:ext cx="11277600" cy="560000"/>
+          </a:xfrm>
+          <a:prstGeom prst="roundRect">
+            <a:avLst>
+              <a:gd name="adj" fmla="val 12000"/>
+            </a:avLst>
+          </a:prstGeom>
+          <a:solidFill>
+            <a:srgbClr val="0D7377"/>
+          </a:solidFill>
+          <a:ln>
+            <a:noFill/>
+          </a:ln>
+        </p:spPr>
+        <p:txBody>
+          <a:bodyPr wrap="square" lIns="182880" tIns="45720" rIns="182880" bIns="45720" rtlCol="0" anchor="ctr">
+            <a:normAutofit/>
+          </a:bodyPr>
+          <a:lstStyle/>
+          <a:p>
+            <a:pPr marL="0" indent="0" algn="ctr">
+              <a:buNone/>
+            </a:pPr>
+            <a:r>
+              <a:rPr lang="en-US" sz="1300" b="1" dirty="0">
+                <a:solidFill>
+                  <a:srgbClr val="FFFFFF"/>
+                </a:solidFill>
+                <a:latin typeface="Arial"/>
+                <a:cs typeface="Arial"/>
+              </a:rPr>
+              <a:t>THÔNG ĐIỆP CHÍNH   </a:t>
+            </a:r>
+            <a:r>
+              <a:rPr lang="en-US" sz="1550" dirty="0">
+                <a:solidFill>
+                  <a:srgbClr val="FFFFFF"/>
+                </a:solidFill>
+                <a:latin typeface="Arial"/>
+                <a:cs typeface="Arial"/>
+              </a:rPr>
+              <a:t>Người đọc phải hiểu mỗi bảng mà không cần đọc văn bản.</a:t>
+            </a:r>
+          </a:p>
+        </p:txBody>
+      </p:sp>
+      <p:sp>
+        <p:nvSpPr>
+          <p:cNvPr id="901" name="Footer"/>
+          <p:cNvSpPr txBox="1"/>
+          <p:nvPr/>
+        </p:nvSpPr>
+        <p:spPr>
+          <a:xfrm>
+            <a:off x="4599946" y="6458701"/>
+            <a:ext cx="2845651" cy="276999"/>
+          </a:xfrm>
+          <a:prstGeom prst="rect">
+            <a:avLst/>
+          </a:prstGeom>
+          <a:noFill/>
+          <a:ln>
+            <a:noFill/>
+          </a:ln>
+        </p:spPr>
+        <p:txBody>
+          <a:bodyPr wrap="none" lIns="91440" tIns="45720" rIns="91440" bIns="45720" rtlCol="0" anchor="t"/>
+          <a:lstStyle/>
+          <a:p>
+            <a:r>
+              <a:rPr lang="en-US" sz="1200" dirty="0">
+                <a:solidFill>
+                  <a:schemeClr val="accent5">
+                    <a:lumMod val="50000"/>
+                  </a:schemeClr>
+                </a:solidFill>
+                <a:latin typeface="Arial"/>
+              </a:rPr>
+              <a:t>Neudata | #ClearDataClearImpact</a:t>
+            </a:r>
+          </a:p>
+        </p:txBody>
+      </p:sp>
+      <p:pic>
+        <p:nvPicPr>
+          <p:cNvPr id="902" name="Logo"/>
+          <p:cNvPicPr>
+            <a:picLocks noChangeAspect="1"/>
+          </p:cNvPicPr>
+          <p:nvPr/>
+        </p:nvPicPr>
+        <p:blipFill>
+          <a:blip r:embed="rId3"/>
+          <a:stretch>
+            <a:fillRect/>
+          </a:stretch>
+        </p:blipFill>
+        <p:spPr>
+          <a:xfrm>
+            <a:off x="138853" y="6122125"/>
+            <a:ext cx="716763" cy="683623"/>
+          </a:xfrm>
+          <a:prstGeom prst="rect">
+            <a:avLst/>
+          </a:prstGeom>
+        </p:spPr>
+      </p:pic>
+      <p:sp>
+        <p:nvSpPr>
+          <p:cNvPr id="903" name="Slide Number"/>
+          <p:cNvSpPr>
+            <a:spLocks noGrp="1"/>
+          </p:cNvSpPr>
+          <p:nvPr>
+            <p:ph type="sldNum" sz="quarter" idx="12"/>
+          </p:nvPr>
+        </p:nvSpPr>
+        <p:spPr>
+          <a:xfrm>
+            <a:off x="11330000" y="6470000"/>
+            <a:ext cx="620000" cy="320000"/>
+          </a:xfrm>
+        </p:spPr>
+        <p:txBody>
+          <a:bodyPr/>
+          <a:lstStyle/>
+          <a:p>
+            <a:pPr algn="r"/>
+            <a:fld id="{C1FF6DA9-008F-8B48-92A6-B652298478BF}" type="slidenum">
+              <a:rPr lang="en-US" sz="1050" smtClean="0">
+                <a:solidFill>
+                  <a:schemeClr val="accent5">
+                    <a:lumMod val="50000"/>
+                  </a:schemeClr>
+                </a:solidFill>
+              </a:rPr>
+              <a:t>2</a:t>
+            </a:fld>
+            <a:endParaRPr lang="en-US"/>
+          </a:p>
+        </p:txBody>
+      </p:sp>
+    </p:spTree>
+  </p:cSld>
+  <p:clrMapOvr>
+    <a:masterClrMapping/>
+  </p:clrMapOvr>
+</p:sld>
+</file>
+
+<file path=ppt/slides/slide34.xml><?xml version="1.0" encoding="utf-8"?>
 <p:sld xmlns:a="http://schemas.openxmlformats.org/drawingml/2006/main" xmlns:r="http://schemas.openxmlformats.org/officeDocument/2006/relationships" xmlns:p="http://schemas.openxmlformats.org/presentationml/2006/main">
   <p:cSld>
     <p:bg>
@@ -23459,711 +23740,6 @@
 </p:sld>
 </file>
 
-<file path=ppt/slides/slide34.xml><?xml version="1.0" encoding="utf-8"?>
-<p:sld xmlns:a="http://schemas.openxmlformats.org/drawingml/2006/main" xmlns:r="http://schemas.openxmlformats.org/officeDocument/2006/relationships" xmlns:p="http://schemas.openxmlformats.org/presentationml/2006/main">
-  <p:cSld>
-    <p:bg>
-      <p:bgPr>
-        <a:solidFill>
-          <a:schemeClr val="bg1"/>
-        </a:solidFill>
-        <a:effectLst/>
-      </p:bgPr>
-    </p:bg>
-    <p:spTree>
-      <p:nvGrpSpPr>
-        <p:cNvPr id="1" name=""/>
-        <p:cNvGrpSpPr/>
-        <p:nvPr/>
-      </p:nvGrpSpPr>
-      <p:grpSpPr>
-        <a:xfrm>
-          <a:off x="0" y="0"/>
-          <a:ext cx="0" cy="0"/>
-          <a:chOff x="0" y="0"/>
-          <a:chExt cx="0" cy="0"/>
-        </a:xfrm>
-      </p:grpSpPr>
-      <p:sp>
-        <p:nvSpPr>
-          <p:cNvPr id="10" name="Title"/>
-          <p:cNvSpPr txBox="1"/>
-          <p:nvPr/>
-        </p:nvSpPr>
-        <p:spPr>
-          <a:xfrm>
-            <a:off x="457200" y="160000"/>
-            <a:ext cx="11277600" cy="750000"/>
-          </a:xfrm>
-          <a:prstGeom prst="rect">
-            <a:avLst/>
-          </a:prstGeom>
-          <a:noFill/>
-          <a:ln>
-            <a:noFill/>
-          </a:ln>
-        </p:spPr>
-        <p:txBody>
-          <a:bodyPr wrap="square" lIns="91440" tIns="45720" rIns="91440" bIns="45720" rtlCol="0" anchor="ctr"/>
-          <a:lstStyle/>
-          <a:p>
-            <a:pPr marL="0" indent="0" algn="l">
-              <a:buNone/>
-            </a:pPr>
-            <a:r>
-              <a:rPr lang="en-US" sz="2800" b="1" dirty="0">
-                <a:solidFill>
-                  <a:srgbClr val="0D7377"/>
-                </a:solidFill>
-                <a:latin typeface="Arial"/>
-                <a:cs typeface="Arial"/>
-              </a:rPr>
-              <a:t>STROBE cho bài báo FLUID-ICU: mục nào ở đâu</a:t>
-            </a:r>
-          </a:p>
-        </p:txBody>
-      </p:sp>
-      <p:sp>
-        <p:nvSpPr>
-          <p:cNvPr id="11" name="Rule"/>
-          <p:cNvSpPr/>
-          <p:nvPr/>
-        </p:nvSpPr>
-        <p:spPr>
-          <a:xfrm>
-            <a:off x="457200" y="940000"/>
-            <a:ext cx="11277600" cy="0"/>
-          </a:xfrm>
-          <a:prstGeom prst="line">
-            <a:avLst/>
-          </a:prstGeom>
-          <a:ln w="19050">
-            <a:solidFill>
-              <a:srgbClr val="0D7377"/>
-            </a:solidFill>
-          </a:ln>
-        </p:spPr>
-        <p:txBody>
-          <a:bodyPr/>
-          <a:lstStyle/>
-          <a:p>
-            <a:endParaRPr/>
-          </a:p>
-        </p:txBody>
-      </p:sp>
-      <p:sp>
-        <p:nvSpPr>
-          <p:cNvPr id="19" name="Intro"/>
-          <p:cNvSpPr txBox="1"/>
-          <p:nvPr/>
-        </p:nvSpPr>
-        <p:spPr>
-          <a:xfrm>
-            <a:off x="457200" y="1100000"/>
-            <a:ext cx="11277600" cy="480000"/>
-          </a:xfrm>
-          <a:prstGeom prst="rect">
-            <a:avLst/>
-          </a:prstGeom>
-          <a:noFill/>
-          <a:ln>
-            <a:noFill/>
-          </a:ln>
-        </p:spPr>
-        <p:txBody>
-          <a:bodyPr wrap="square" lIns="91440" tIns="45720" rIns="91440" bIns="45720" rtlCol="0" anchor="t"/>
-          <a:lstStyle/>
-          <a:p>
-            <a:pPr marL="0" indent="0" algn="l">
-              <a:buNone/>
-            </a:pPr>
-            <a:r>
-              <a:rPr lang="en-US" sz="1700" i="1" dirty="0">
-                <a:solidFill>
-                  <a:srgbClr val="595959"/>
-                </a:solidFill>
-                <a:latin typeface="Arial"/>
-                <a:cs typeface="Arial"/>
-              </a:rPr>
-              <a:t>FLUID-ICU là nghiên cứu thuần tập, nên bài báo theo STROBE. Các số là số mục STROBE.</a:t>
-            </a:r>
-          </a:p>
-        </p:txBody>
-      </p:sp>
-      <p:sp>
-        <p:nvSpPr>
-          <p:cNvPr id="70" name="CardHead"/>
-          <p:cNvSpPr/>
-          <p:nvPr/>
-        </p:nvSpPr>
-        <p:spPr>
-          <a:xfrm>
-            <a:off x="457200" y="1761906"/>
-            <a:ext cx="5538800" cy="640000"/>
-          </a:xfrm>
-          <a:prstGeom prst="rect">
-            <a:avLst/>
-          </a:prstGeom>
-          <a:solidFill>
-            <a:srgbClr val="0D7377"/>
-          </a:solidFill>
-          <a:ln>
-            <a:noFill/>
-          </a:ln>
-        </p:spPr>
-        <p:txBody>
-          <a:bodyPr wrap="square" lIns="91440" tIns="45720" rIns="91440" bIns="45720" rtlCol="0" anchor="ctr">
-            <a:normAutofit/>
-          </a:bodyPr>
-          <a:lstStyle/>
-          <a:p>
-            <a:pPr marL="0" indent="0" algn="ctr">
-              <a:buNone/>
-            </a:pPr>
-            <a:r>
-              <a:rPr lang="en-US" sz="1900" b="1" dirty="0">
-                <a:solidFill>
-                  <a:srgbClr val="FFFFFF"/>
-                </a:solidFill>
-                <a:latin typeface="Arial"/>
-                <a:cs typeface="Arial"/>
-              </a:rPr>
-              <a:t>Phương pháp (mục 4-12)</a:t>
-            </a:r>
-          </a:p>
-        </p:txBody>
-      </p:sp>
-      <p:sp>
-        <p:nvSpPr>
-          <p:cNvPr id="71" name="CardBody"/>
-          <p:cNvSpPr/>
-          <p:nvPr/>
-        </p:nvSpPr>
-        <p:spPr>
-          <a:xfrm>
-            <a:off x="457200" y="2401906"/>
-            <a:ext cx="5538800" cy="2644280"/>
-          </a:xfrm>
-          <a:prstGeom prst="rect">
-            <a:avLst/>
-          </a:prstGeom>
-          <a:solidFill>
-            <a:srgbClr val="EAF2F5"/>
-          </a:solidFill>
-          <a:ln>
-            <a:noFill/>
-          </a:ln>
-        </p:spPr>
-        <p:txBody>
-          <a:bodyPr wrap="square" lIns="137160" tIns="91440" rIns="137160" bIns="91440" rtlCol="0" anchor="ctr">
-            <a:normAutofit/>
-          </a:bodyPr>
-          <a:lstStyle/>
-          <a:p>
-            <a:pPr marL="0" indent="0" algn="ctr">
-              <a:lnSpc>
-                <a:spcPct val="104000"/>
-              </a:lnSpc>
-              <a:spcBef>
-                <a:spcPts val="400"/>
-              </a:spcBef>
-              <a:buNone/>
-            </a:pPr>
-            <a:r>
-              <a:rPr lang="en-US" sz="1500" dirty="0">
-                <a:solidFill>
-                  <a:srgbClr val="000000"/>
-                </a:solidFill>
-                <a:latin typeface="Arial"/>
-                <a:cs typeface="Arial"/>
-              </a:rPr>
-              <a:t>4  Thiết kế</a:t>
-            </a:r>
-          </a:p>
-          <a:p>
-            <a:pPr marL="0" indent="0" algn="ctr">
-              <a:lnSpc>
-                <a:spcPct val="104000"/>
-              </a:lnSpc>
-              <a:spcBef>
-                <a:spcPts val="400"/>
-              </a:spcBef>
-              <a:buNone/>
-            </a:pPr>
-            <a:r>
-              <a:rPr lang="en-US" sz="1500" dirty="0">
-                <a:solidFill>
-                  <a:srgbClr val="000000"/>
-                </a:solidFill>
-                <a:latin typeface="Arial"/>
-                <a:cs typeface="Arial"/>
-              </a:rPr>
-              <a:t>5  Bối cảnh, thời gian</a:t>
-            </a:r>
-          </a:p>
-          <a:p>
-            <a:pPr marL="0" indent="0" algn="ctr">
-              <a:lnSpc>
-                <a:spcPct val="104000"/>
-              </a:lnSpc>
-              <a:spcBef>
-                <a:spcPts val="400"/>
-              </a:spcBef>
-              <a:buNone/>
-            </a:pPr>
-            <a:r>
-              <a:rPr lang="en-US" sz="1500" dirty="0">
-                <a:solidFill>
-                  <a:srgbClr val="000000"/>
-                </a:solidFill>
-                <a:latin typeface="Arial"/>
-                <a:cs typeface="Arial"/>
-              </a:rPr>
-              <a:t>6  Đối tượng</a:t>
-            </a:r>
-          </a:p>
-          <a:p>
-            <a:pPr marL="0" indent="0" algn="ctr">
-              <a:lnSpc>
-                <a:spcPct val="104000"/>
-              </a:lnSpc>
-              <a:spcBef>
-                <a:spcPts val="400"/>
-              </a:spcBef>
-              <a:buNone/>
-            </a:pPr>
-            <a:r>
-              <a:rPr lang="en-US" sz="1500" dirty="0">
-                <a:solidFill>
-                  <a:srgbClr val="000000"/>
-                </a:solidFill>
-                <a:latin typeface="Arial"/>
-                <a:cs typeface="Arial"/>
-              </a:rPr>
-              <a:t>7  Biến số</a:t>
-            </a:r>
-          </a:p>
-          <a:p>
-            <a:pPr marL="0" indent="0" algn="ctr">
-              <a:lnSpc>
-                <a:spcPct val="104000"/>
-              </a:lnSpc>
-              <a:spcBef>
-                <a:spcPts val="400"/>
-              </a:spcBef>
-              <a:buNone/>
-            </a:pPr>
-            <a:r>
-              <a:rPr lang="en-US" sz="1500" dirty="0">
-                <a:solidFill>
-                  <a:srgbClr val="000000"/>
-                </a:solidFill>
-                <a:latin typeface="Arial"/>
-                <a:cs typeface="Arial"/>
-              </a:rPr>
-              <a:t>8  Nguồn dữ liệu</a:t>
-            </a:r>
-          </a:p>
-          <a:p>
-            <a:pPr marL="0" indent="0" algn="ctr">
-              <a:lnSpc>
-                <a:spcPct val="104000"/>
-              </a:lnSpc>
-              <a:spcBef>
-                <a:spcPts val="400"/>
-              </a:spcBef>
-              <a:buNone/>
-            </a:pPr>
-            <a:r>
-              <a:rPr lang="en-US" sz="1500" dirty="0">
-                <a:solidFill>
-                  <a:srgbClr val="000000"/>
-                </a:solidFill>
-                <a:latin typeface="Arial"/>
-                <a:cs typeface="Arial"/>
-              </a:rPr>
-              <a:t>9  Sai lệch</a:t>
-            </a:r>
-          </a:p>
-          <a:p>
-            <a:pPr marL="0" indent="0" algn="ctr">
-              <a:lnSpc>
-                <a:spcPct val="104000"/>
-              </a:lnSpc>
-              <a:spcBef>
-                <a:spcPts val="400"/>
-              </a:spcBef>
-              <a:buNone/>
-            </a:pPr>
-            <a:r>
-              <a:rPr lang="en-US" sz="1500" dirty="0">
-                <a:solidFill>
-                  <a:srgbClr val="000000"/>
-                </a:solidFill>
-                <a:latin typeface="Arial"/>
-                <a:cs typeface="Arial"/>
-              </a:rPr>
-              <a:t>10  Cỡ mẫu</a:t>
-            </a:r>
-          </a:p>
-          <a:p>
-            <a:pPr marL="0" indent="0" algn="ctr">
-              <a:lnSpc>
-                <a:spcPct val="104000"/>
-              </a:lnSpc>
-              <a:spcBef>
-                <a:spcPts val="400"/>
-              </a:spcBef>
-              <a:buNone/>
-            </a:pPr>
-            <a:r>
-              <a:rPr lang="en-US" sz="1500" dirty="0">
-                <a:solidFill>
-                  <a:srgbClr val="000000"/>
-                </a:solidFill>
-                <a:latin typeface="Arial"/>
-                <a:cs typeface="Arial"/>
-              </a:rPr>
-              <a:t>12  Thống kê, dữ liệu bị thiếu</a:t>
-            </a:r>
-          </a:p>
-        </p:txBody>
-      </p:sp>
-      <p:sp>
-        <p:nvSpPr>
-          <p:cNvPr id="72" name="CardHead"/>
-          <p:cNvSpPr/>
-          <p:nvPr/>
-        </p:nvSpPr>
-        <p:spPr>
-          <a:xfrm>
-            <a:off x="6196000" y="1761906"/>
-            <a:ext cx="5538800" cy="640000"/>
-          </a:xfrm>
-          <a:prstGeom prst="rect">
-            <a:avLst/>
-          </a:prstGeom>
-          <a:solidFill>
-            <a:srgbClr val="0B376C"/>
-          </a:solidFill>
-          <a:ln>
-            <a:noFill/>
-          </a:ln>
-        </p:spPr>
-        <p:txBody>
-          <a:bodyPr wrap="square" lIns="91440" tIns="45720" rIns="91440" bIns="45720" rtlCol="0" anchor="ctr">
-            <a:normAutofit/>
-          </a:bodyPr>
-          <a:lstStyle/>
-          <a:p>
-            <a:pPr marL="0" indent="0" algn="ctr">
-              <a:buNone/>
-            </a:pPr>
-            <a:r>
-              <a:rPr lang="en-US" sz="1900" b="1" dirty="0">
-                <a:solidFill>
-                  <a:srgbClr val="FFFFFF"/>
-                </a:solidFill>
-                <a:latin typeface="Arial"/>
-                <a:cs typeface="Arial"/>
-              </a:rPr>
-              <a:t>Kết quả (mục 13-17)</a:t>
-            </a:r>
-          </a:p>
-        </p:txBody>
-      </p:sp>
-      <p:sp>
-        <p:nvSpPr>
-          <p:cNvPr id="73" name="CardBody"/>
-          <p:cNvSpPr/>
-          <p:nvPr/>
-        </p:nvSpPr>
-        <p:spPr>
-          <a:xfrm>
-            <a:off x="6196000" y="2401906"/>
-            <a:ext cx="5538800" cy="2644280"/>
-          </a:xfrm>
-          <a:prstGeom prst="rect">
-            <a:avLst/>
-          </a:prstGeom>
-          <a:solidFill>
-            <a:srgbClr val="EAF2F5"/>
-          </a:solidFill>
-          <a:ln>
-            <a:noFill/>
-          </a:ln>
-        </p:spPr>
-        <p:txBody>
-          <a:bodyPr wrap="square" lIns="137160" tIns="91440" rIns="137160" bIns="91440" rtlCol="0" anchor="ctr">
-            <a:normAutofit/>
-          </a:bodyPr>
-          <a:lstStyle/>
-          <a:p>
-            <a:pPr marL="0" indent="0" algn="ctr">
-              <a:lnSpc>
-                <a:spcPct val="104000"/>
-              </a:lnSpc>
-              <a:spcBef>
-                <a:spcPts val="400"/>
-              </a:spcBef>
-              <a:buNone/>
-            </a:pPr>
-            <a:r>
-              <a:rPr lang="en-US" sz="1500" dirty="0">
-                <a:solidFill>
-                  <a:srgbClr val="000000"/>
-                </a:solidFill>
-                <a:latin typeface="Arial"/>
-                <a:cs typeface="Arial"/>
-              </a:rPr>
-              <a:t>13  Đối tượng và sơ đồ</a:t>
-            </a:r>
-          </a:p>
-          <a:p>
-            <a:pPr marL="0" indent="0" algn="ctr">
-              <a:lnSpc>
-                <a:spcPct val="104000"/>
-              </a:lnSpc>
-              <a:spcBef>
-                <a:spcPts val="400"/>
-              </a:spcBef>
-              <a:buNone/>
-            </a:pPr>
-            <a:r>
-              <a:rPr lang="en-US" sz="1500" dirty="0">
-                <a:solidFill>
-                  <a:srgbClr val="000000"/>
-                </a:solidFill>
-                <a:latin typeface="Arial"/>
-                <a:cs typeface="Arial"/>
-              </a:rPr>
-              <a:t>14  Dữ liệu mô tả (Bảng 1)</a:t>
-            </a:r>
-          </a:p>
-          <a:p>
-            <a:pPr marL="0" indent="0" algn="ctr">
-              <a:lnSpc>
-                <a:spcPct val="104000"/>
-              </a:lnSpc>
-              <a:spcBef>
-                <a:spcPts val="400"/>
-              </a:spcBef>
-              <a:buNone/>
-            </a:pPr>
-            <a:r>
-              <a:rPr lang="en-US" sz="1500" dirty="0">
-                <a:solidFill>
-                  <a:srgbClr val="000000"/>
-                </a:solidFill>
-                <a:latin typeface="Arial"/>
-                <a:cs typeface="Arial"/>
-              </a:rPr>
-              <a:t>15  Dữ liệu kết cục</a:t>
-            </a:r>
-          </a:p>
-          <a:p>
-            <a:pPr marL="0" indent="0" algn="ctr">
-              <a:lnSpc>
-                <a:spcPct val="104000"/>
-              </a:lnSpc>
-              <a:spcBef>
-                <a:spcPts val="400"/>
-              </a:spcBef>
-              <a:buNone/>
-            </a:pPr>
-            <a:r>
-              <a:rPr lang="en-US" sz="1500" dirty="0">
-                <a:solidFill>
-                  <a:srgbClr val="000000"/>
-                </a:solidFill>
-                <a:latin typeface="Arial"/>
-                <a:cs typeface="Arial"/>
-              </a:rPr>
-              <a:t>16  Kết quả chính: thô và hiệu chỉnh, KTC 95%</a:t>
-            </a:r>
-          </a:p>
-          <a:p>
-            <a:pPr marL="0" indent="0" algn="ctr">
-              <a:lnSpc>
-                <a:spcPct val="104000"/>
-              </a:lnSpc>
-              <a:spcBef>
-                <a:spcPts val="400"/>
-              </a:spcBef>
-              <a:buNone/>
-            </a:pPr>
-            <a:r>
-              <a:rPr lang="en-US" sz="1500" dirty="0">
-                <a:solidFill>
-                  <a:srgbClr val="000000"/>
-                </a:solidFill>
-                <a:latin typeface="Arial"/>
-                <a:cs typeface="Arial"/>
-              </a:rPr>
-              <a:t>17  Phân tích khác</a:t>
-            </a:r>
-          </a:p>
-        </p:txBody>
-      </p:sp>
-      <p:sp>
-        <p:nvSpPr>
-          <p:cNvPr id="60" name="Takeaway"/>
-          <p:cNvSpPr/>
-          <p:nvPr/>
-        </p:nvSpPr>
-        <p:spPr>
-          <a:xfrm>
-            <a:off x="457200" y="5390000"/>
-            <a:ext cx="11277600" cy="560000"/>
-          </a:xfrm>
-          <a:prstGeom prst="roundRect">
-            <a:avLst>
-              <a:gd name="adj" fmla="val 12000"/>
-            </a:avLst>
-          </a:prstGeom>
-          <a:solidFill>
-            <a:srgbClr val="0D7377"/>
-          </a:solidFill>
-          <a:ln>
-            <a:noFill/>
-          </a:ln>
-        </p:spPr>
-        <p:txBody>
-          <a:bodyPr wrap="square" lIns="182880" tIns="45720" rIns="182880" bIns="45720" rtlCol="0" anchor="ctr">
-            <a:normAutofit/>
-          </a:bodyPr>
-          <a:lstStyle/>
-          <a:p>
-            <a:pPr marL="0" indent="0" algn="ctr">
-              <a:buNone/>
-            </a:pPr>
-            <a:r>
-              <a:rPr lang="en-US" sz="1300" b="1" dirty="0">
-                <a:solidFill>
-                  <a:srgbClr val="FFFFFF"/>
-                </a:solidFill>
-                <a:latin typeface="Arial"/>
-                <a:cs typeface="Arial"/>
-              </a:rPr>
-              <a:t>THÔNG ĐIỆP CHÍNH   </a:t>
-            </a:r>
-            <a:r>
-              <a:rPr lang="en-US" sz="1550" dirty="0">
-                <a:solidFill>
-                  <a:srgbClr val="FFFFFF"/>
-                </a:solidFill>
-                <a:latin typeface="Arial"/>
-                <a:cs typeface="Arial"/>
-              </a:rPr>
-              <a:t>Phần Kết quả của bạn: mục 13 đến 17. Phương pháp (không bắt buộc): mục 4 đến 12.</a:t>
-            </a:r>
-          </a:p>
-        </p:txBody>
-      </p:sp>
-      <p:sp>
-        <p:nvSpPr>
-          <p:cNvPr id="901" name="Footer"/>
-          <p:cNvSpPr txBox="1"/>
-          <p:nvPr/>
-        </p:nvSpPr>
-        <p:spPr>
-          <a:xfrm>
-            <a:off x="4599946" y="6458701"/>
-            <a:ext cx="2845651" cy="276999"/>
-          </a:xfrm>
-          <a:prstGeom prst="rect">
-            <a:avLst/>
-          </a:prstGeom>
-          <a:noFill/>
-          <a:ln>
-            <a:noFill/>
-          </a:ln>
-        </p:spPr>
-        <p:txBody>
-          <a:bodyPr wrap="none" lIns="91440" tIns="45720" rIns="91440" bIns="45720" rtlCol="0" anchor="t"/>
-          <a:lstStyle/>
-          <a:p>
-            <a:r>
-              <a:rPr lang="en-US" sz="1200" dirty="0">
-                <a:solidFill>
-                  <a:schemeClr val="accent5">
-                    <a:lumMod val="50000"/>
-                  </a:schemeClr>
-                </a:solidFill>
-                <a:latin typeface="Arial"/>
-              </a:rPr>
-              <a:t>Neudata | #ClearDataClearImpact</a:t>
-            </a:r>
-          </a:p>
-        </p:txBody>
-      </p:sp>
-      <p:pic>
-        <p:nvPicPr>
-          <p:cNvPr id="902" name="Logo"/>
-          <p:cNvPicPr>
-            <a:picLocks noChangeAspect="1"/>
-          </p:cNvPicPr>
-          <p:nvPr/>
-        </p:nvPicPr>
-        <p:blipFill>
-          <a:blip r:embed="rId3"/>
-          <a:stretch>
-            <a:fillRect/>
-          </a:stretch>
-        </p:blipFill>
-        <p:spPr>
-          <a:xfrm>
-            <a:off x="138853" y="6122125"/>
-            <a:ext cx="716763" cy="683623"/>
-          </a:xfrm>
-          <a:prstGeom prst="rect">
-            <a:avLst/>
-          </a:prstGeom>
-        </p:spPr>
-      </p:pic>
-      <p:sp>
-        <p:nvSpPr>
-          <p:cNvPr id="903" name="Slide Number"/>
-          <p:cNvSpPr>
-            <a:spLocks noGrp="1"/>
-          </p:cNvSpPr>
-          <p:nvPr>
-            <p:ph type="sldNum" sz="quarter" idx="12"/>
-          </p:nvPr>
-        </p:nvSpPr>
-        <p:spPr>
-          <a:xfrm>
-            <a:off x="11330000" y="6470000"/>
-            <a:ext cx="620000" cy="320000"/>
-          </a:xfrm>
-        </p:spPr>
-        <p:txBody>
-          <a:bodyPr/>
-          <a:lstStyle/>
-          <a:p>
-            <a:pPr algn="r"/>
-            <a:fld id="{C1FF6DA9-008F-8B48-92A6-B652298478BF}" type="slidenum">
-              <a:rPr lang="en-US" sz="1050" smtClean="0">
-                <a:solidFill>
-                  <a:schemeClr val="accent5">
-                    <a:lumMod val="50000"/>
-                  </a:schemeClr>
-                </a:solidFill>
-              </a:rPr>
-              <a:t>2</a:t>
-            </a:fld>
-            <a:endParaRPr lang="en-US"/>
-          </a:p>
-        </p:txBody>
-      </p:sp>
-    </p:spTree>
-  </p:cSld>
-  <p:clrMapOvr>
-    <a:masterClrMapping/>
-  </p:clrMapOvr>
-</p:sld>
-</file>
-
 <file path=ppt/slides/slide35.xml><?xml version="1.0" encoding="utf-8"?>
 <p:sld xmlns:a="http://schemas.openxmlformats.org/drawingml/2006/main" xmlns:r="http://schemas.openxmlformats.org/officeDocument/2006/relationships" xmlns:p="http://schemas.openxmlformats.org/presentationml/2006/main">
   <p:cSld>
@@ -24223,7 +23799,7 @@
                 <a:latin typeface="Arial"/>
                 <a:cs typeface="Arial"/>
               </a:rPr>
-              <a:t>Kiểm tra: Phương pháp, Kết quả hay Bàn luận?</a:t>
+              <a:t>STROBE cho bài báo FLUID-ICU: mục nào ở đâu</a:t>
             </a:r>
           </a:p>
         </p:txBody>
@@ -24258,211 +23834,99 @@
       </p:sp>
       <p:sp>
         <p:nvSpPr>
-          <p:cNvPr id="50" name="Banner"/>
+          <p:cNvPr id="19" name="Intro"/>
+          <p:cNvSpPr txBox="1"/>
+          <p:nvPr/>
+        </p:nvSpPr>
+        <p:spPr>
+          <a:xfrm>
+            <a:off x="457200" y="1100000"/>
+            <a:ext cx="11277600" cy="480000"/>
+          </a:xfrm>
+          <a:prstGeom prst="rect">
+            <a:avLst/>
+          </a:prstGeom>
+          <a:noFill/>
+          <a:ln>
+            <a:noFill/>
+          </a:ln>
+        </p:spPr>
+        <p:txBody>
+          <a:bodyPr wrap="square" lIns="91440" tIns="45720" rIns="91440" bIns="45720" rtlCol="0" anchor="t"/>
+          <a:lstStyle/>
+          <a:p>
+            <a:pPr marL="0" indent="0" algn="l">
+              <a:buNone/>
+            </a:pPr>
+            <a:r>
+              <a:rPr lang="en-US" sz="1700" i="1" dirty="0">
+                <a:solidFill>
+                  <a:srgbClr val="595959"/>
+                </a:solidFill>
+                <a:latin typeface="Arial"/>
+                <a:cs typeface="Arial"/>
+              </a:rPr>
+              <a:t>FLUID-ICU là nghiên cứu thuần tập, nên bài báo theo STROBE. Các số là số mục STROBE.</a:t>
+            </a:r>
+          </a:p>
+        </p:txBody>
+      </p:sp>
+      <p:sp>
+        <p:nvSpPr>
+          <p:cNvPr id="70" name="CardHead"/>
           <p:cNvSpPr/>
           <p:nvPr/>
         </p:nvSpPr>
         <p:spPr>
           <a:xfrm>
-            <a:off x="457200" y="1120000"/>
-            <a:ext cx="11277600" cy="470000"/>
+            <a:off x="457200" y="1761906"/>
+            <a:ext cx="5538800" cy="640000"/>
           </a:xfrm>
           <a:prstGeom prst="rect">
             <a:avLst/>
           </a:prstGeom>
           <a:solidFill>
-            <a:srgbClr val="6C3483"/>
+            <a:srgbClr val="0D7377"/>
           </a:solidFill>
           <a:ln>
             <a:noFill/>
           </a:ln>
         </p:spPr>
         <p:txBody>
-          <a:bodyPr wrap="square" lIns="182880" tIns="45720" rIns="182880" bIns="45720" rtlCol="0" anchor="ctr">
+          <a:bodyPr wrap="square" lIns="91440" tIns="45720" rIns="91440" bIns="45720" rtlCol="0" anchor="ctr">
             <a:normAutofit/>
           </a:bodyPr>
           <a:lstStyle/>
           <a:p>
-            <a:pPr marL="0" indent="0" algn="l">
-              <a:buNone/>
-            </a:pPr>
-            <a:r>
-              <a:rPr lang="en-US" sz="1500" b="1" dirty="0">
+            <a:pPr marL="0" indent="0" algn="ctr">
+              <a:buNone/>
+            </a:pPr>
+            <a:r>
+              <a:rPr lang="en-US" sz="1900" b="1" dirty="0">
                 <a:solidFill>
                   <a:srgbClr val="FFFFFF"/>
                 </a:solidFill>
                 <a:latin typeface="Arial"/>
                 <a:cs typeface="Arial"/>
               </a:rPr>
-              <a:t>CÂU HỎI NHANH   |   3 phút</a:t>
-            </a:r>
-          </a:p>
-        </p:txBody>
-      </p:sp>
-      <p:sp>
-        <p:nvSpPr>
-          <p:cNvPr id="51" name="Steps"/>
-          <p:cNvSpPr txBox="1"/>
-          <p:nvPr/>
-        </p:nvSpPr>
-        <p:spPr>
-          <a:xfrm>
-            <a:off x="457200" y="1720000"/>
-            <a:ext cx="6766560" cy="4230000"/>
+              <a:t>Phương pháp (mục 4-12)</a:t>
+            </a:r>
+          </a:p>
+        </p:txBody>
+      </p:sp>
+      <p:sp>
+        <p:nvSpPr>
+          <p:cNvPr id="71" name="CardBody"/>
+          <p:cNvSpPr/>
+          <p:nvPr/>
+        </p:nvSpPr>
+        <p:spPr>
+          <a:xfrm>
+            <a:off x="457200" y="2401906"/>
+            <a:ext cx="5538800" cy="2644280"/>
           </a:xfrm>
           <a:prstGeom prst="rect">
             <a:avLst/>
-          </a:prstGeom>
-          <a:noFill/>
-          <a:ln>
-            <a:noFill/>
-          </a:ln>
-        </p:spPr>
-        <p:txBody>
-          <a:bodyPr wrap="square" lIns="91440" tIns="45720" rIns="91440" bIns="45720" rtlCol="0" anchor="t"/>
-          <a:lstStyle/>
-          <a:p>
-            <a:pPr marL="380000" indent="-380000" algn="l">
-              <a:lnSpc>
-                <a:spcPct val="104000"/>
-              </a:lnSpc>
-              <a:spcBef>
-                <a:spcPts val="450"/>
-              </a:spcBef>
-              <a:buClr>
-                <a:srgbClr val="6C3483"/>
-              </a:buClr>
-              <a:buFont typeface="Arial"/>
-              <a:buChar char="•"/>
-            </a:pPr>
-            <a:r>
-              <a:rPr lang="en-US" sz="1650" dirty="0">
-                <a:solidFill>
-                  <a:srgbClr val="000000"/>
-                </a:solidFill>
-                <a:latin typeface="Arial"/>
-                <a:cs typeface="Arial"/>
-              </a:rPr>
-              <a:t>'Chúng tôi dùng hồi quy logistic hiệu chỉnh theo điểm SOFA và tuổi.'</a:t>
-            </a:r>
-          </a:p>
-          <a:p>
-            <a:pPr marL="380000" indent="-380000" algn="l">
-              <a:lnSpc>
-                <a:spcPct val="104000"/>
-              </a:lnSpc>
-              <a:spcBef>
-                <a:spcPts val="450"/>
-              </a:spcBef>
-              <a:buClr>
-                <a:srgbClr val="6C3483"/>
-              </a:buClr>
-              <a:buFont typeface="Arial"/>
-              <a:buChar char="•"/>
-            </a:pPr>
-            <a:r>
-              <a:rPr lang="en-US" sz="1650" dirty="0">
-                <a:solidFill>
-                  <a:srgbClr val="000000"/>
-                </a:solidFill>
-                <a:latin typeface="Arial"/>
-                <a:cs typeface="Arial"/>
-              </a:rPr>
-              <a:t>'Trong 620 người bệnh được đưa vào, 618 có cân bằng dịch ngày 3.'</a:t>
-            </a:r>
-          </a:p>
-          <a:p>
-            <a:pPr marL="380000" indent="-380000" algn="l">
-              <a:lnSpc>
-                <a:spcPct val="104000"/>
-              </a:lnSpc>
-              <a:spcBef>
-                <a:spcPts val="450"/>
-              </a:spcBef>
-              <a:buClr>
-                <a:srgbClr val="6C3483"/>
-              </a:buClr>
-              <a:buFont typeface="Arial"/>
-              <a:buChar char="•"/>
-            </a:pPr>
-            <a:r>
-              <a:rPr lang="en-US" sz="1650" dirty="0">
-                <a:solidFill>
-                  <a:srgbClr val="000000"/>
-                </a:solidFill>
-                <a:latin typeface="Arial"/>
-                <a:cs typeface="Arial"/>
-              </a:rPr>
-              <a:t>'Điều này có thể do người bệnh nặng hơn được truyền nhiều dịch hơn.'</a:t>
-            </a:r>
-          </a:p>
-          <a:p>
-            <a:pPr marL="380000" indent="-380000" algn="l">
-              <a:lnSpc>
-                <a:spcPct val="104000"/>
-              </a:lnSpc>
-              <a:spcBef>
-                <a:spcPts val="450"/>
-              </a:spcBef>
-              <a:buClr>
-                <a:srgbClr val="6C3483"/>
-              </a:buClr>
-              <a:buFont typeface="Arial"/>
-              <a:buChar char="•"/>
-            </a:pPr>
-            <a:r>
-              <a:rPr lang="en-US" sz="1650" dirty="0">
-                <a:solidFill>
-                  <a:srgbClr val="000000"/>
-                </a:solidFill>
-                <a:latin typeface="Arial"/>
-                <a:cs typeface="Arial"/>
-              </a:rPr>
-              <a:t>'Lactat bị thiếu ở 15.0% người bệnh và được quy gán.'</a:t>
-            </a:r>
-          </a:p>
-          <a:p>
-            <a:pPr marL="380000" indent="-380000" algn="l">
-              <a:lnSpc>
-                <a:spcPct val="104000"/>
-              </a:lnSpc>
-              <a:spcBef>
-                <a:spcPts val="450"/>
-              </a:spcBef>
-              <a:buClr>
-                <a:srgbClr val="6C3483"/>
-              </a:buClr>
-              <a:buFont typeface="Arial"/>
-              <a:buChar char="•"/>
-            </a:pPr>
-            <a:r>
-              <a:rPr lang="en-US" sz="1650" dirty="0">
-                <a:solidFill>
-                  <a:srgbClr val="000000"/>
-                </a:solidFill>
-                <a:latin typeface="Arial"/>
-                <a:cs typeface="Arial"/>
-              </a:rPr>
-              <a:t>'Tử vong 28 ngày cao hơn khi cân bằng dương (OR hiệu chỉnh 1.62, KTC 95% 1.02 đến 2.59).'</a:t>
-            </a:r>
-          </a:p>
-        </p:txBody>
-      </p:sp>
-      <p:sp>
-        <p:nvSpPr>
-          <p:cNvPr id="52" name="Side"/>
-          <p:cNvSpPr/>
-          <p:nvPr/>
-        </p:nvSpPr>
-        <p:spPr>
-          <a:xfrm>
-            <a:off x="7423760" y="1720000"/>
-            <a:ext cx="4311040" cy="2244230"/>
-          </a:xfrm>
-          <a:prstGeom prst="roundRect">
-            <a:avLst>
-              <a:gd name="adj" fmla="val 5000"/>
-            </a:avLst>
           </a:prstGeom>
           <a:solidFill>
             <a:srgbClr val="EAF2F5"/>
@@ -24478,17 +23942,23 @@
           <a:lstStyle/>
           <a:p>
             <a:pPr marL="0" indent="0" algn="ctr">
-              <a:buNone/>
-            </a:pPr>
-            <a:r>
-              <a:rPr lang="en-US" sz="1600" b="1" dirty="0">
-                <a:solidFill>
-                  <a:srgbClr val="6C3483"/>
-                </a:solidFill>
-                <a:latin typeface="Arial"/>
-                <a:cs typeface="Arial"/>
-              </a:rPr>
-              <a:t>Đáp án</a:t>
+              <a:lnSpc>
+                <a:spcPct val="104000"/>
+              </a:lnSpc>
+              <a:spcBef>
+                <a:spcPts val="400"/>
+              </a:spcBef>
+              <a:buNone/>
+            </a:pPr>
+            <a:r>
+              <a:rPr lang="en-US" sz="1500" dirty="0">
+                <a:solidFill>
+                  <a:srgbClr val="000000"/>
+                </a:solidFill>
+                <a:latin typeface="Arial"/>
+                <a:cs typeface="Arial"/>
+              </a:rPr>
+              <a:t>4  Thiết kế</a:t>
             </a:r>
           </a:p>
           <a:p>
@@ -24497,7 +23967,7 @@
                 <a:spcPct val="104000"/>
               </a:lnSpc>
               <a:spcBef>
-                <a:spcPts val="300"/>
+                <a:spcPts val="400"/>
               </a:spcBef>
               <a:buNone/>
             </a:pPr>
@@ -24509,7 +23979,7 @@
                 <a:latin typeface="Arial"/>
                 <a:cs typeface="Arial"/>
               </a:rPr>
-              <a:t>Phương pháp</a:t>
+              <a:t>5  Bối cảnh, thời gian</a:t>
             </a:r>
           </a:p>
           <a:p>
@@ -24518,7 +23988,7 @@
                 <a:spcPct val="104000"/>
               </a:lnSpc>
               <a:spcBef>
-                <a:spcPts val="300"/>
+                <a:spcPts val="400"/>
               </a:spcBef>
               <a:buNone/>
             </a:pPr>
@@ -24530,7 +24000,7 @@
                 <a:latin typeface="Arial"/>
                 <a:cs typeface="Arial"/>
               </a:rPr>
-              <a:t>Kết quả (đối tượng)</a:t>
+              <a:t>6  Đối tượng</a:t>
             </a:r>
           </a:p>
           <a:p>
@@ -24539,7 +24009,7 @@
                 <a:spcPct val="104000"/>
               </a:lnSpc>
               <a:spcBef>
-                <a:spcPts val="300"/>
+                <a:spcPts val="400"/>
               </a:spcBef>
               <a:buNone/>
             </a:pPr>
@@ -24551,7 +24021,7 @@
                 <a:latin typeface="Arial"/>
                 <a:cs typeface="Arial"/>
               </a:rPr>
-              <a:t>Bàn luận (giải thích)</a:t>
+              <a:t>7  Biến số</a:t>
             </a:r>
           </a:p>
           <a:p>
@@ -24560,7 +24030,7 @@
                 <a:spcPct val="104000"/>
               </a:lnSpc>
               <a:spcBef>
-                <a:spcPts val="300"/>
+                <a:spcPts val="400"/>
               </a:spcBef>
               <a:buNone/>
             </a:pPr>
@@ -24572,7 +24042,7 @@
                 <a:latin typeface="Arial"/>
                 <a:cs typeface="Arial"/>
               </a:rPr>
-              <a:t>Phương pháp (cách xử lý) và Kết quả (bao nhiêu)</a:t>
+              <a:t>8  Nguồn dữ liệu</a:t>
             </a:r>
           </a:p>
           <a:p>
@@ -24581,7 +24051,7 @@
                 <a:spcPct val="104000"/>
               </a:lnSpc>
               <a:spcBef>
-                <a:spcPts val="300"/>
+                <a:spcPts val="400"/>
               </a:spcBef>
               <a:buNone/>
             </a:pPr>
@@ -24593,7 +24063,280 @@
                 <a:latin typeface="Arial"/>
                 <a:cs typeface="Arial"/>
               </a:rPr>
-              <a:t>Kết quả</a:t>
+              <a:t>9  Sai lệch</a:t>
+            </a:r>
+          </a:p>
+          <a:p>
+            <a:pPr marL="0" indent="0" algn="ctr">
+              <a:lnSpc>
+                <a:spcPct val="104000"/>
+              </a:lnSpc>
+              <a:spcBef>
+                <a:spcPts val="400"/>
+              </a:spcBef>
+              <a:buNone/>
+            </a:pPr>
+            <a:r>
+              <a:rPr lang="en-US" sz="1500" dirty="0">
+                <a:solidFill>
+                  <a:srgbClr val="000000"/>
+                </a:solidFill>
+                <a:latin typeface="Arial"/>
+                <a:cs typeface="Arial"/>
+              </a:rPr>
+              <a:t>10  Cỡ mẫu</a:t>
+            </a:r>
+          </a:p>
+          <a:p>
+            <a:pPr marL="0" indent="0" algn="ctr">
+              <a:lnSpc>
+                <a:spcPct val="104000"/>
+              </a:lnSpc>
+              <a:spcBef>
+                <a:spcPts val="400"/>
+              </a:spcBef>
+              <a:buNone/>
+            </a:pPr>
+            <a:r>
+              <a:rPr lang="en-US" sz="1500" dirty="0">
+                <a:solidFill>
+                  <a:srgbClr val="000000"/>
+                </a:solidFill>
+                <a:latin typeface="Arial"/>
+                <a:cs typeface="Arial"/>
+              </a:rPr>
+              <a:t>12  Thống kê, dữ liệu bị thiếu</a:t>
+            </a:r>
+          </a:p>
+        </p:txBody>
+      </p:sp>
+      <p:sp>
+        <p:nvSpPr>
+          <p:cNvPr id="72" name="CardHead"/>
+          <p:cNvSpPr/>
+          <p:nvPr/>
+        </p:nvSpPr>
+        <p:spPr>
+          <a:xfrm>
+            <a:off x="6196000" y="1761906"/>
+            <a:ext cx="5538800" cy="640000"/>
+          </a:xfrm>
+          <a:prstGeom prst="rect">
+            <a:avLst/>
+          </a:prstGeom>
+          <a:solidFill>
+            <a:srgbClr val="0B376C"/>
+          </a:solidFill>
+          <a:ln>
+            <a:noFill/>
+          </a:ln>
+        </p:spPr>
+        <p:txBody>
+          <a:bodyPr wrap="square" lIns="91440" tIns="45720" rIns="91440" bIns="45720" rtlCol="0" anchor="ctr">
+            <a:normAutofit/>
+          </a:bodyPr>
+          <a:lstStyle/>
+          <a:p>
+            <a:pPr marL="0" indent="0" algn="ctr">
+              <a:buNone/>
+            </a:pPr>
+            <a:r>
+              <a:rPr lang="en-US" sz="1900" b="1" dirty="0">
+                <a:solidFill>
+                  <a:srgbClr val="FFFFFF"/>
+                </a:solidFill>
+                <a:latin typeface="Arial"/>
+                <a:cs typeface="Arial"/>
+              </a:rPr>
+              <a:t>Kết quả (mục 13-17)</a:t>
+            </a:r>
+          </a:p>
+        </p:txBody>
+      </p:sp>
+      <p:sp>
+        <p:nvSpPr>
+          <p:cNvPr id="73" name="CardBody"/>
+          <p:cNvSpPr/>
+          <p:nvPr/>
+        </p:nvSpPr>
+        <p:spPr>
+          <a:xfrm>
+            <a:off x="6196000" y="2401906"/>
+            <a:ext cx="5538800" cy="2644280"/>
+          </a:xfrm>
+          <a:prstGeom prst="rect">
+            <a:avLst/>
+          </a:prstGeom>
+          <a:solidFill>
+            <a:srgbClr val="EAF2F5"/>
+          </a:solidFill>
+          <a:ln>
+            <a:noFill/>
+          </a:ln>
+        </p:spPr>
+        <p:txBody>
+          <a:bodyPr wrap="square" lIns="137160" tIns="91440" rIns="137160" bIns="91440" rtlCol="0" anchor="ctr">
+            <a:normAutofit/>
+          </a:bodyPr>
+          <a:lstStyle/>
+          <a:p>
+            <a:pPr marL="0" indent="0" algn="ctr">
+              <a:lnSpc>
+                <a:spcPct val="104000"/>
+              </a:lnSpc>
+              <a:spcBef>
+                <a:spcPts val="400"/>
+              </a:spcBef>
+              <a:buNone/>
+            </a:pPr>
+            <a:r>
+              <a:rPr lang="en-US" sz="1500" dirty="0">
+                <a:solidFill>
+                  <a:srgbClr val="000000"/>
+                </a:solidFill>
+                <a:latin typeface="Arial"/>
+                <a:cs typeface="Arial"/>
+              </a:rPr>
+              <a:t>13  Đối tượng và sơ đồ</a:t>
+            </a:r>
+          </a:p>
+          <a:p>
+            <a:pPr marL="0" indent="0" algn="ctr">
+              <a:lnSpc>
+                <a:spcPct val="104000"/>
+              </a:lnSpc>
+              <a:spcBef>
+                <a:spcPts val="400"/>
+              </a:spcBef>
+              <a:buNone/>
+            </a:pPr>
+            <a:r>
+              <a:rPr lang="en-US" sz="1500" dirty="0">
+                <a:solidFill>
+                  <a:srgbClr val="000000"/>
+                </a:solidFill>
+                <a:latin typeface="Arial"/>
+                <a:cs typeface="Arial"/>
+              </a:rPr>
+              <a:t>14  Dữ liệu mô tả (Bảng 1)</a:t>
+            </a:r>
+          </a:p>
+          <a:p>
+            <a:pPr marL="0" indent="0" algn="ctr">
+              <a:lnSpc>
+                <a:spcPct val="104000"/>
+              </a:lnSpc>
+              <a:spcBef>
+                <a:spcPts val="400"/>
+              </a:spcBef>
+              <a:buNone/>
+            </a:pPr>
+            <a:r>
+              <a:rPr lang="en-US" sz="1500" dirty="0">
+                <a:solidFill>
+                  <a:srgbClr val="000000"/>
+                </a:solidFill>
+                <a:latin typeface="Arial"/>
+                <a:cs typeface="Arial"/>
+              </a:rPr>
+              <a:t>15  Dữ liệu kết cục</a:t>
+            </a:r>
+          </a:p>
+          <a:p>
+            <a:pPr marL="0" indent="0" algn="ctr">
+              <a:lnSpc>
+                <a:spcPct val="104000"/>
+              </a:lnSpc>
+              <a:spcBef>
+                <a:spcPts val="400"/>
+              </a:spcBef>
+              <a:buNone/>
+            </a:pPr>
+            <a:r>
+              <a:rPr lang="en-US" sz="1500" dirty="0">
+                <a:solidFill>
+                  <a:srgbClr val="000000"/>
+                </a:solidFill>
+                <a:latin typeface="Arial"/>
+                <a:cs typeface="Arial"/>
+              </a:rPr>
+              <a:t>16  Kết quả chính: thô và hiệu chỉnh, KTC 95%</a:t>
+            </a:r>
+          </a:p>
+          <a:p>
+            <a:pPr marL="0" indent="0" algn="ctr">
+              <a:lnSpc>
+                <a:spcPct val="104000"/>
+              </a:lnSpc>
+              <a:spcBef>
+                <a:spcPts val="400"/>
+              </a:spcBef>
+              <a:buNone/>
+            </a:pPr>
+            <a:r>
+              <a:rPr lang="en-US" sz="1500" dirty="0">
+                <a:solidFill>
+                  <a:srgbClr val="000000"/>
+                </a:solidFill>
+                <a:latin typeface="Arial"/>
+                <a:cs typeface="Arial"/>
+              </a:rPr>
+              <a:t>17  Phân tích khác</a:t>
+            </a:r>
+          </a:p>
+        </p:txBody>
+      </p:sp>
+      <p:sp>
+        <p:nvSpPr>
+          <p:cNvPr id="60" name="Takeaway"/>
+          <p:cNvSpPr/>
+          <p:nvPr/>
+        </p:nvSpPr>
+        <p:spPr>
+          <a:xfrm>
+            <a:off x="457200" y="5390000"/>
+            <a:ext cx="11277600" cy="560000"/>
+          </a:xfrm>
+          <a:prstGeom prst="roundRect">
+            <a:avLst>
+              <a:gd name="adj" fmla="val 12000"/>
+            </a:avLst>
+          </a:prstGeom>
+          <a:solidFill>
+            <a:srgbClr val="0D7377"/>
+          </a:solidFill>
+          <a:ln>
+            <a:noFill/>
+          </a:ln>
+        </p:spPr>
+        <p:txBody>
+          <a:bodyPr wrap="square" lIns="182880" tIns="45720" rIns="182880" bIns="45720" rtlCol="0" anchor="ctr">
+            <a:normAutofit/>
+          </a:bodyPr>
+          <a:lstStyle/>
+          <a:p>
+            <a:pPr marL="0" indent="0" algn="ctr">
+              <a:buNone/>
+            </a:pPr>
+            <a:r>
+              <a:rPr lang="en-US" sz="1300" b="1" dirty="0">
+                <a:solidFill>
+                  <a:srgbClr val="FFFFFF"/>
+                </a:solidFill>
+                <a:latin typeface="Arial"/>
+                <a:cs typeface="Arial"/>
+              </a:rPr>
+              <a:t>THÔNG ĐIỆP CHÍNH   </a:t>
+            </a:r>
+            <a:r>
+              <a:rPr lang="en-US" sz="1550" dirty="0">
+                <a:solidFill>
+                  <a:srgbClr val="FFFFFF"/>
+                </a:solidFill>
+                <a:latin typeface="Arial"/>
+                <a:cs typeface="Arial"/>
+              </a:rPr>
+              <a:t>Phương pháp: mục 4 đến 12. Kết quả: mục 13 đến 17.</a:t>
             </a:r>
           </a:p>
         </p:txBody>
@@ -24761,7 +24504,7 @@
                 <a:latin typeface="Arial"/>
                 <a:cs typeface="Arial"/>
               </a:rPr>
-              <a:t>Thực hành bản thảo 1  |  45 phút</a:t>
+              <a:t>Kiểm tra: Phương pháp, Kết quả hay Bàn luận?</a:t>
             </a:r>
           </a:p>
         </p:txBody>
@@ -24796,14 +24539,57 @@
       </p:sp>
       <p:sp>
         <p:nvSpPr>
-          <p:cNvPr id="20" name="Statement"/>
+          <p:cNvPr id="50" name="Banner"/>
+          <p:cNvSpPr/>
+          <p:nvPr/>
+        </p:nvSpPr>
+        <p:spPr>
+          <a:xfrm>
+            <a:off x="457200" y="1120000"/>
+            <a:ext cx="11277600" cy="470000"/>
+          </a:xfrm>
+          <a:prstGeom prst="rect">
+            <a:avLst/>
+          </a:prstGeom>
+          <a:solidFill>
+            <a:srgbClr val="6C3483"/>
+          </a:solidFill>
+          <a:ln>
+            <a:noFill/>
+          </a:ln>
+        </p:spPr>
+        <p:txBody>
+          <a:bodyPr wrap="square" lIns="182880" tIns="45720" rIns="182880" bIns="45720" rtlCol="0" anchor="ctr">
+            <a:normAutofit/>
+          </a:bodyPr>
+          <a:lstStyle/>
+          <a:p>
+            <a:pPr marL="0" indent="0" algn="l">
+              <a:buNone/>
+            </a:pPr>
+            <a:r>
+              <a:rPr lang="en-US" sz="1500" b="1" dirty="0">
+                <a:solidFill>
+                  <a:srgbClr val="FFFFFF"/>
+                </a:solidFill>
+                <a:latin typeface="Arial"/>
+                <a:cs typeface="Arial"/>
+              </a:rPr>
+              <a:t>CÂU HỎI NHANH   |   3 phút</a:t>
+            </a:r>
+          </a:p>
+        </p:txBody>
+      </p:sp>
+      <p:sp>
+        <p:nvSpPr>
+          <p:cNvPr id="51" name="Steps"/>
           <p:cNvSpPr txBox="1"/>
           <p:nvPr/>
         </p:nvSpPr>
         <p:spPr>
           <a:xfrm>
-            <a:off x="1057200" y="1280000"/>
-            <a:ext cx="10077600" cy="4470000"/>
+            <a:off x="457200" y="1720000"/>
+            <a:ext cx="6766560" cy="4230000"/>
           </a:xfrm>
           <a:prstGeom prst="rect">
             <a:avLst/>
@@ -24814,42 +24600,281 @@
           </a:ln>
         </p:spPr>
         <p:txBody>
-          <a:bodyPr wrap="square" lIns="91440" tIns="45720" rIns="91440" bIns="45720" rtlCol="0" anchor="ctr"/>
-          <a:lstStyle/>
+          <a:bodyPr wrap="square" lIns="91440" tIns="45720" rIns="91440" bIns="45720" rtlCol="0" anchor="t"/>
+          <a:lstStyle/>
+          <a:p>
+            <a:pPr marL="380000" indent="-380000" algn="l">
+              <a:lnSpc>
+                <a:spcPct val="104000"/>
+              </a:lnSpc>
+              <a:spcBef>
+                <a:spcPts val="450"/>
+              </a:spcBef>
+              <a:buClr>
+                <a:srgbClr val="6C3483"/>
+              </a:buClr>
+              <a:buFont typeface="Arial"/>
+              <a:buChar char="•"/>
+            </a:pPr>
+            <a:r>
+              <a:rPr lang="en-US" sz="1650" dirty="0">
+                <a:solidFill>
+                  <a:srgbClr val="000000"/>
+                </a:solidFill>
+                <a:latin typeface="Arial"/>
+                <a:cs typeface="Arial"/>
+              </a:rPr>
+              <a:t>'Chúng tôi dùng hồi quy logistic hiệu chỉnh theo điểm SOFA và tuổi.'</a:t>
+            </a:r>
+          </a:p>
+          <a:p>
+            <a:pPr marL="380000" indent="-380000" algn="l">
+              <a:lnSpc>
+                <a:spcPct val="104000"/>
+              </a:lnSpc>
+              <a:spcBef>
+                <a:spcPts val="450"/>
+              </a:spcBef>
+              <a:buClr>
+                <a:srgbClr val="6C3483"/>
+              </a:buClr>
+              <a:buFont typeface="Arial"/>
+              <a:buChar char="•"/>
+            </a:pPr>
+            <a:r>
+              <a:rPr lang="en-US" sz="1650" dirty="0">
+                <a:solidFill>
+                  <a:srgbClr val="000000"/>
+                </a:solidFill>
+                <a:latin typeface="Arial"/>
+                <a:cs typeface="Arial"/>
+              </a:rPr>
+              <a:t>'Trong 620 người bệnh được đưa vào, 618 có cân bằng dịch ngày 3.'</a:t>
+            </a:r>
+          </a:p>
+          <a:p>
+            <a:pPr marL="380000" indent="-380000" algn="l">
+              <a:lnSpc>
+                <a:spcPct val="104000"/>
+              </a:lnSpc>
+              <a:spcBef>
+                <a:spcPts val="450"/>
+              </a:spcBef>
+              <a:buClr>
+                <a:srgbClr val="6C3483"/>
+              </a:buClr>
+              <a:buFont typeface="Arial"/>
+              <a:buChar char="•"/>
+            </a:pPr>
+            <a:r>
+              <a:rPr lang="en-US" sz="1650" dirty="0">
+                <a:solidFill>
+                  <a:srgbClr val="000000"/>
+                </a:solidFill>
+                <a:latin typeface="Arial"/>
+                <a:cs typeface="Arial"/>
+              </a:rPr>
+              <a:t>'Điều này có thể do người bệnh nặng hơn được truyền nhiều dịch hơn.'</a:t>
+            </a:r>
+          </a:p>
+          <a:p>
+            <a:pPr marL="380000" indent="-380000" algn="l">
+              <a:lnSpc>
+                <a:spcPct val="104000"/>
+              </a:lnSpc>
+              <a:spcBef>
+                <a:spcPts val="450"/>
+              </a:spcBef>
+              <a:buClr>
+                <a:srgbClr val="6C3483"/>
+              </a:buClr>
+              <a:buFont typeface="Arial"/>
+              <a:buChar char="•"/>
+            </a:pPr>
+            <a:r>
+              <a:rPr lang="en-US" sz="1650" dirty="0">
+                <a:solidFill>
+                  <a:srgbClr val="000000"/>
+                </a:solidFill>
+                <a:latin typeface="Arial"/>
+                <a:cs typeface="Arial"/>
+              </a:rPr>
+              <a:t>'Lactat bị thiếu ở 15.0% người bệnh và được quy gán.'</a:t>
+            </a:r>
+          </a:p>
+          <a:p>
+            <a:pPr marL="380000" indent="-380000" algn="l">
+              <a:lnSpc>
+                <a:spcPct val="104000"/>
+              </a:lnSpc>
+              <a:spcBef>
+                <a:spcPts val="450"/>
+              </a:spcBef>
+              <a:buClr>
+                <a:srgbClr val="6C3483"/>
+              </a:buClr>
+              <a:buFont typeface="Arial"/>
+              <a:buChar char="•"/>
+            </a:pPr>
+            <a:r>
+              <a:rPr lang="en-US" sz="1650" dirty="0">
+                <a:solidFill>
+                  <a:srgbClr val="000000"/>
+                </a:solidFill>
+                <a:latin typeface="Arial"/>
+                <a:cs typeface="Arial"/>
+              </a:rPr>
+              <a:t>'Tử vong 28 ngày cao hơn khi cân bằng dương (OR hiệu chỉnh 1.62, KTC 95% 1.02 đến 2.59).'</a:t>
+            </a:r>
+          </a:p>
+        </p:txBody>
+      </p:sp>
+      <p:sp>
+        <p:nvSpPr>
+          <p:cNvPr id="52" name="Side"/>
+          <p:cNvSpPr/>
+          <p:nvPr/>
+        </p:nvSpPr>
+        <p:spPr>
+          <a:xfrm>
+            <a:off x="7423760" y="1720000"/>
+            <a:ext cx="4311040" cy="2244230"/>
+          </a:xfrm>
+          <a:prstGeom prst="roundRect">
+            <a:avLst>
+              <a:gd name="adj" fmla="val 5000"/>
+            </a:avLst>
+          </a:prstGeom>
+          <a:solidFill>
+            <a:srgbClr val="EAF2F5"/>
+          </a:solidFill>
+          <a:ln>
+            <a:noFill/>
+          </a:ln>
+        </p:spPr>
+        <p:txBody>
+          <a:bodyPr wrap="square" lIns="137160" tIns="91440" rIns="137160" bIns="91440" rtlCol="0" anchor="ctr">
+            <a:normAutofit/>
+          </a:bodyPr>
+          <a:lstStyle/>
+          <a:p>
+            <a:pPr marL="0" indent="0" algn="ctr">
+              <a:buNone/>
+            </a:pPr>
+            <a:r>
+              <a:rPr lang="en-US" sz="1600" b="1" dirty="0">
+                <a:solidFill>
+                  <a:srgbClr val="6C3483"/>
+                </a:solidFill>
+                <a:latin typeface="Arial"/>
+                <a:cs typeface="Arial"/>
+              </a:rPr>
+              <a:t>Đáp án</a:t>
+            </a:r>
+          </a:p>
           <a:p>
             <a:pPr marL="0" indent="0" algn="ctr">
               <a:lnSpc>
-                <a:spcPct val="110000"/>
+                <a:spcPct val="104000"/>
               </a:lnSpc>
-              <a:buNone/>
-            </a:pPr>
-            <a:r>
-              <a:rPr lang="en-US" sz="3200" b="1" dirty="0">
-                <a:solidFill>
-                  <a:srgbClr val="0D7377"/>
-                </a:solidFill>
-                <a:latin typeface="Arial"/>
-                <a:cs typeface="Arial"/>
-              </a:rPr>
-              <a:t>Viết phần Kết quả: cả lớp cùng viết, rồi mỗi người tự viết</a:t>
+              <a:spcBef>
+                <a:spcPts val="300"/>
+              </a:spcBef>
+              <a:buNone/>
+            </a:pPr>
+            <a:r>
+              <a:rPr lang="en-US" sz="1500" dirty="0">
+                <a:solidFill>
+                  <a:srgbClr val="000000"/>
+                </a:solidFill>
+                <a:latin typeface="Arial"/>
+                <a:cs typeface="Arial"/>
+              </a:rPr>
+              <a:t>Phương pháp</a:t>
             </a:r>
           </a:p>
           <a:p>
             <a:pPr marL="0" indent="0" algn="ctr">
+              <a:lnSpc>
+                <a:spcPct val="104000"/>
+              </a:lnSpc>
               <a:spcBef>
-                <a:spcPts val="1200"/>
+                <a:spcPts val="300"/>
               </a:spcBef>
               <a:buNone/>
             </a:pPr>
             <a:r>
-              <a:rPr lang="en-US" sz="1900" i="1" dirty="0">
-                <a:solidFill>
-                  <a:srgbClr val="595959"/>
-                </a:solidFill>
-                <a:latin typeface="Arial"/>
-                <a:cs typeface="Arial"/>
-              </a:rPr>
-              <a:t>30 phút cả lớp cùng viết Q1, rồi 15 phút cho câu hỏi của riêng bạn</a:t>
+              <a:rPr lang="en-US" sz="1500" dirty="0">
+                <a:solidFill>
+                  <a:srgbClr val="000000"/>
+                </a:solidFill>
+                <a:latin typeface="Arial"/>
+                <a:cs typeface="Arial"/>
+              </a:rPr>
+              <a:t>Kết quả (đối tượng)</a:t>
+            </a:r>
+          </a:p>
+          <a:p>
+            <a:pPr marL="0" indent="0" algn="ctr">
+              <a:lnSpc>
+                <a:spcPct val="104000"/>
+              </a:lnSpc>
+              <a:spcBef>
+                <a:spcPts val="300"/>
+              </a:spcBef>
+              <a:buNone/>
+            </a:pPr>
+            <a:r>
+              <a:rPr lang="en-US" sz="1500" dirty="0">
+                <a:solidFill>
+                  <a:srgbClr val="000000"/>
+                </a:solidFill>
+                <a:latin typeface="Arial"/>
+                <a:cs typeface="Arial"/>
+              </a:rPr>
+              <a:t>Bàn luận (giải thích)</a:t>
+            </a:r>
+          </a:p>
+          <a:p>
+            <a:pPr marL="0" indent="0" algn="ctr">
+              <a:lnSpc>
+                <a:spcPct val="104000"/>
+              </a:lnSpc>
+              <a:spcBef>
+                <a:spcPts val="300"/>
+              </a:spcBef>
+              <a:buNone/>
+            </a:pPr>
+            <a:r>
+              <a:rPr lang="en-US" sz="1500" dirty="0">
+                <a:solidFill>
+                  <a:srgbClr val="000000"/>
+                </a:solidFill>
+                <a:latin typeface="Arial"/>
+                <a:cs typeface="Arial"/>
+              </a:rPr>
+              <a:t>Phương pháp (cách xử lý) và Kết quả (bao nhiêu)</a:t>
+            </a:r>
+          </a:p>
+          <a:p>
+            <a:pPr marL="0" indent="0" algn="ctr">
+              <a:lnSpc>
+                <a:spcPct val="104000"/>
+              </a:lnSpc>
+              <a:spcBef>
+                <a:spcPts val="300"/>
+              </a:spcBef>
+              <a:buNone/>
+            </a:pPr>
+            <a:r>
+              <a:rPr lang="en-US" sz="1500" dirty="0">
+                <a:solidFill>
+                  <a:srgbClr val="000000"/>
+                </a:solidFill>
+                <a:latin typeface="Arial"/>
+                <a:cs typeface="Arial"/>
+              </a:rPr>
+              <a:t>Kết quả</a:t>
             </a:r>
           </a:p>
         </p:txBody>
@@ -25017,7 +25042,7 @@
                 <a:latin typeface="Arial"/>
                 <a:cs typeface="Arial"/>
               </a:rPr>
-              <a:t>Thực hành bản thảo 1, phần 1: cả lớp cùng soạn Q1</a:t>
+              <a:t>Thực hành bản thảo 1  |  45 phút</a:t>
             </a:r>
           </a:p>
         </p:txBody>
@@ -25052,57 +25077,14 @@
       </p:sp>
       <p:sp>
         <p:nvSpPr>
-          <p:cNvPr id="50" name="Banner"/>
-          <p:cNvSpPr/>
-          <p:nvPr/>
-        </p:nvSpPr>
-        <p:spPr>
-          <a:xfrm>
-            <a:off x="457200" y="1120000"/>
-            <a:ext cx="11277600" cy="470000"/>
-          </a:xfrm>
-          <a:prstGeom prst="rect">
-            <a:avLst/>
-          </a:prstGeom>
-          <a:solidFill>
-            <a:srgbClr val="0D7377"/>
-          </a:solidFill>
-          <a:ln>
-            <a:noFill/>
-          </a:ln>
-        </p:spPr>
-        <p:txBody>
-          <a:bodyPr wrap="square" lIns="182880" tIns="45720" rIns="182880" bIns="45720" rtlCol="0" anchor="ctr">
-            <a:normAutofit/>
-          </a:bodyPr>
-          <a:lstStyle/>
-          <a:p>
-            <a:pPr marL="0" indent="0" algn="l">
-              <a:buNone/>
-            </a:pPr>
-            <a:r>
-              <a:rPr lang="en-US" sz="1500" b="1" dirty="0">
-                <a:solidFill>
-                  <a:srgbClr val="FFFFFF"/>
-                </a:solidFill>
-                <a:latin typeface="Arial"/>
-                <a:cs typeface="Arial"/>
-              </a:rPr>
-              <a:t>CẢ LỚP CÙNG LÀM   |   30 phút</a:t>
-            </a:r>
-          </a:p>
-        </p:txBody>
-      </p:sp>
-      <p:sp>
-        <p:nvSpPr>
-          <p:cNvPr id="51" name="Steps"/>
+          <p:cNvPr id="20" name="Statement"/>
           <p:cNvSpPr txBox="1"/>
           <p:nvPr/>
         </p:nvSpPr>
         <p:spPr>
           <a:xfrm>
-            <a:off x="457200" y="1720000"/>
-            <a:ext cx="6766560" cy="3510000"/>
+            <a:off x="1057200" y="1280000"/>
+            <a:ext cx="10077600" cy="4470000"/>
           </a:xfrm>
           <a:prstGeom prst="rect">
             <a:avLst/>
@@ -25113,317 +25095,42 @@
           </a:ln>
         </p:spPr>
         <p:txBody>
-          <a:bodyPr wrap="square" lIns="91440" tIns="45720" rIns="91440" bIns="45720" rtlCol="0" anchor="t"/>
-          <a:lstStyle/>
-          <a:p>
-            <a:pPr marL="380000" indent="-380000" algn="l">
-              <a:lnSpc>
-                <a:spcPct val="104000"/>
-              </a:lnSpc>
-              <a:spcBef>
-                <a:spcPts val="450"/>
-              </a:spcBef>
-              <a:buClr>
-                <a:srgbClr val="0D7377"/>
-              </a:buClr>
-              <a:buFont typeface="Arial"/>
-              <a:buChar char="•"/>
-            </a:pPr>
-            <a:r>
-              <a:rPr lang="en-US" sz="1650" dirty="0">
-                <a:solidFill>
-                  <a:srgbClr val="000000"/>
-                </a:solidFill>
-                <a:latin typeface="Arial"/>
-                <a:cs typeface="Arial"/>
-              </a:rPr>
-              <a:t>Giảng viên chia sẻ mẫu bản thảo và gói kết quả Q1</a:t>
-            </a:r>
-          </a:p>
-          <a:p>
-            <a:pPr marL="380000" indent="-380000" algn="l">
-              <a:lnSpc>
-                <a:spcPct val="104000"/>
-              </a:lnSpc>
-              <a:spcBef>
-                <a:spcPts val="450"/>
-              </a:spcBef>
-              <a:buClr>
-                <a:srgbClr val="0D7377"/>
-              </a:buClr>
-              <a:buFont typeface="Arial"/>
-              <a:buChar char="•"/>
-            </a:pPr>
-            <a:r>
-              <a:rPr lang="en-US" sz="1650" dirty="0">
-                <a:solidFill>
-                  <a:srgbClr val="000000"/>
-                </a:solidFill>
-                <a:latin typeface="Arial"/>
-                <a:cs typeface="Arial"/>
-              </a:rPr>
-              <a:t>Người tham gia và Bảng 1 (10 phút): khi được mời, bạn đề xuất từng câu</a:t>
-            </a:r>
-          </a:p>
-          <a:p>
-            <a:pPr marL="380000" indent="-380000" algn="l">
-              <a:lnSpc>
-                <a:spcPct val="104000"/>
-              </a:lnSpc>
-              <a:spcBef>
-                <a:spcPts val="450"/>
-              </a:spcBef>
-              <a:buClr>
-                <a:srgbClr val="0D7377"/>
-              </a:buClr>
-              <a:buFont typeface="Arial"/>
-              <a:buChar char="•"/>
-            </a:pPr>
-            <a:r>
-              <a:rPr lang="en-US" sz="1650" dirty="0">
-                <a:solidFill>
-                  <a:srgbClr val="000000"/>
-                </a:solidFill>
-                <a:latin typeface="Arial"/>
-                <a:cs typeface="Arial"/>
-              </a:rPr>
-              <a:t>Kết quả chính (12 phút): số tử vong mỗi nhóm, OR thô và hiệu chỉnh kèm KTC 95%</a:t>
-            </a:r>
-          </a:p>
-          <a:p>
-            <a:pPr marL="380000" indent="-380000" algn="l">
-              <a:lnSpc>
-                <a:spcPct val="104000"/>
-              </a:lnSpc>
-              <a:spcBef>
-                <a:spcPts val="450"/>
-              </a:spcBef>
-              <a:buClr>
-                <a:srgbClr val="0D7377"/>
-              </a:buClr>
-              <a:buFont typeface="Arial"/>
-              <a:buChar char="•"/>
-            </a:pPr>
-            <a:r>
-              <a:rPr lang="en-US" sz="1650" dirty="0">
-                <a:solidFill>
-                  <a:srgbClr val="000000"/>
-                </a:solidFill>
-                <a:latin typeface="Arial"/>
-                <a:cs typeface="Arial"/>
-              </a:rPr>
-              <a:t>Các phân tích khác (5 phút): mô hình Cox và quy gán đa bội</a:t>
-            </a:r>
-          </a:p>
-          <a:p>
-            <a:pPr marL="380000" indent="-380000" algn="l">
-              <a:lnSpc>
-                <a:spcPct val="104000"/>
-              </a:lnSpc>
-              <a:spcBef>
-                <a:spcPts val="450"/>
-              </a:spcBef>
-              <a:buClr>
-                <a:srgbClr val="0D7377"/>
-              </a:buClr>
-              <a:buFont typeface="Arial"/>
-              <a:buChar char="•"/>
-            </a:pPr>
-            <a:r>
-              <a:rPr lang="en-US" sz="1650" dirty="0">
-                <a:solidFill>
-                  <a:srgbClr val="000000"/>
-                </a:solidFill>
-                <a:latin typeface="Arial"/>
-                <a:cs typeface="Arial"/>
-              </a:rPr>
-              <a:t>Kiểm số (3 phút): một học viên đọc đối chiếu từng con số với gói kết quả</a:t>
-            </a:r>
-          </a:p>
-        </p:txBody>
-      </p:sp>
-      <p:sp>
-        <p:nvSpPr>
-          <p:cNvPr id="52" name="Side"/>
-          <p:cNvSpPr/>
-          <p:nvPr/>
-        </p:nvSpPr>
-        <p:spPr>
-          <a:xfrm>
-            <a:off x="7423760" y="1720000"/>
-            <a:ext cx="4311040" cy="1729880"/>
-          </a:xfrm>
-          <a:prstGeom prst="roundRect">
-            <a:avLst>
-              <a:gd name="adj" fmla="val 5000"/>
-            </a:avLst>
-          </a:prstGeom>
-          <a:solidFill>
-            <a:srgbClr val="EAF2F5"/>
-          </a:solidFill>
-          <a:ln>
-            <a:noFill/>
-          </a:ln>
-        </p:spPr>
-        <p:txBody>
-          <a:bodyPr wrap="square" lIns="137160" tIns="91440" rIns="137160" bIns="91440" rtlCol="0" anchor="ctr">
-            <a:normAutofit/>
-          </a:bodyPr>
-          <a:lstStyle/>
-          <a:p>
-            <a:pPr marL="0" indent="0" algn="ctr">
-              <a:buNone/>
-            </a:pPr>
-            <a:r>
-              <a:rPr lang="en-US" sz="1600" b="1" dirty="0">
-                <a:solidFill>
-                  <a:srgbClr val="0D7377"/>
-                </a:solidFill>
-                <a:latin typeface="Arial"/>
-                <a:cs typeface="Arial"/>
-              </a:rPr>
-              <a:t>Dùng</a:t>
-            </a:r>
-          </a:p>
+          <a:bodyPr wrap="square" lIns="91440" tIns="45720" rIns="91440" bIns="45720" rtlCol="0" anchor="ctr"/>
+          <a:lstStyle/>
           <a:p>
             <a:pPr marL="0" indent="0" algn="ctr">
               <a:lnSpc>
-                <a:spcPct val="104000"/>
+                <a:spcPct val="110000"/>
               </a:lnSpc>
+              <a:buNone/>
+            </a:pPr>
+            <a:r>
+              <a:rPr lang="en-US" sz="3200" b="1" dirty="0">
+                <a:solidFill>
+                  <a:srgbClr val="0D7377"/>
+                </a:solidFill>
+                <a:latin typeface="Arial"/>
+                <a:cs typeface="Arial"/>
+              </a:rPr>
+              <a:t>Viết phần Kết quả: cả lớp cùng viết, rồi mỗi người tự viết</a:t>
+            </a:r>
+          </a:p>
+          <a:p>
+            <a:pPr marL="0" indent="0" algn="ctr">
               <a:spcBef>
-                <a:spcPts val="300"/>
+                <a:spcPts val="1200"/>
               </a:spcBef>
               <a:buNone/>
             </a:pPr>
             <a:r>
-              <a:rPr lang="en-US" sz="1500" dirty="0">
-                <a:solidFill>
-                  <a:srgbClr val="000000"/>
-                </a:solidFill>
-                <a:latin typeface="Arial"/>
-                <a:cs typeface="Arial"/>
-              </a:rPr>
-              <a:t>Gói kết quả Q1</a:t>
-            </a:r>
-          </a:p>
-          <a:p>
-            <a:pPr marL="0" indent="0" algn="ctr">
-              <a:lnSpc>
-                <a:spcPct val="104000"/>
-              </a:lnSpc>
-              <a:spcBef>
-                <a:spcPts val="300"/>
-              </a:spcBef>
-              <a:buNone/>
-            </a:pPr>
-            <a:r>
-              <a:rPr lang="en-US" sz="1500" dirty="0">
-                <a:solidFill>
-                  <a:srgbClr val="000000"/>
-                </a:solidFill>
-                <a:latin typeface="Arial"/>
-                <a:cs typeface="Arial"/>
-              </a:rPr>
-              <a:t>Mẫu bản thảo</a:t>
-            </a:r>
-          </a:p>
-          <a:p>
-            <a:pPr marL="0" indent="0" algn="ctr">
-              <a:lnSpc>
-                <a:spcPct val="104000"/>
-              </a:lnSpc>
-              <a:spcBef>
-                <a:spcPts val="300"/>
-              </a:spcBef>
-              <a:buNone/>
-            </a:pPr>
-            <a:r>
-              <a:rPr lang="en-US" sz="1500" dirty="0">
-                <a:solidFill>
-                  <a:srgbClr val="000000"/>
-                </a:solidFill>
-                <a:latin typeface="Arial"/>
-                <a:cs typeface="Arial"/>
-              </a:rPr>
-              <a:t>Mục STROBE 13-17</a:t>
-            </a:r>
-          </a:p>
-          <a:p>
-            <a:pPr marL="0" indent="0" algn="ctr">
-              <a:lnSpc>
-                <a:spcPct val="104000"/>
-              </a:lnSpc>
-              <a:spcBef>
-                <a:spcPts val="300"/>
-              </a:spcBef>
-              <a:buNone/>
-            </a:pPr>
-            <a:r>
-              <a:rPr lang="en-US" sz="1500" dirty="0">
-                <a:solidFill>
-                  <a:srgbClr val="000000"/>
-                </a:solidFill>
-                <a:latin typeface="Arial"/>
-                <a:cs typeface="Arial"/>
-              </a:rPr>
-              <a:t>Các ví dụ mẫu (slide)</a:t>
-            </a:r>
-          </a:p>
-        </p:txBody>
-      </p:sp>
-      <p:sp>
-        <p:nvSpPr>
-          <p:cNvPr id="53" name="Deliverable"/>
-          <p:cNvSpPr/>
-          <p:nvPr/>
-        </p:nvSpPr>
-        <p:spPr>
-          <a:xfrm>
-            <a:off x="457200" y="5350000"/>
-            <a:ext cx="11277600" cy="600000"/>
-          </a:xfrm>
-          <a:prstGeom prst="roundRect">
-            <a:avLst>
-              <a:gd name="adj" fmla="val 12000"/>
-            </a:avLst>
-          </a:prstGeom>
-          <a:solidFill>
-            <a:srgbClr val="FFFFFF"/>
-          </a:solidFill>
-          <a:ln w="15875">
-            <a:solidFill>
-              <a:srgbClr val="0D7377"/>
-            </a:solidFill>
-          </a:ln>
-        </p:spPr>
-        <p:txBody>
-          <a:bodyPr wrap="square" lIns="182880" tIns="45720" rIns="182880" bIns="45720" rtlCol="0" anchor="ctr">
-            <a:normAutofit/>
-          </a:bodyPr>
-          <a:lstStyle/>
-          <a:p>
-            <a:pPr marL="0" indent="0" algn="ctr">
-              <a:buNone/>
-            </a:pPr>
-            <a:r>
-              <a:rPr lang="en-US" sz="1300" b="1" dirty="0">
-                <a:solidFill>
-                  <a:srgbClr val="0D7377"/>
-                </a:solidFill>
-                <a:latin typeface="Arial"/>
-                <a:cs typeface="Arial"/>
-              </a:rPr>
-              <a:t>SẢN PHẨM   </a:t>
-            </a:r>
-            <a:r>
-              <a:rPr lang="en-US" sz="1500" dirty="0">
-                <a:solidFill>
-                  <a:srgbClr val="000000"/>
-                </a:solidFill>
-                <a:latin typeface="Arial"/>
-                <a:cs typeface="Arial"/>
-              </a:rPr>
-              <a:t>Phần Kết quả Q1 của lớp, gửi dạng PDF sau buổi học</a:t>
+              <a:rPr lang="en-US" sz="1900" i="1" dirty="0">
+                <a:solidFill>
+                  <a:srgbClr val="595959"/>
+                </a:solidFill>
+                <a:latin typeface="Arial"/>
+                <a:cs typeface="Arial"/>
+              </a:rPr>
+              <a:t>30 phút cả lớp cùng viết Q1, rồi 15 phút cho câu hỏi của riêng bạn</a:t>
             </a:r>
           </a:p>
         </p:txBody>
@@ -25591,6 +25298,580 @@
                 <a:latin typeface="Arial"/>
                 <a:cs typeface="Arial"/>
               </a:rPr>
+              <a:t>Thực hành bản thảo 1, phần 1: cả lớp cùng soạn Q1</a:t>
+            </a:r>
+          </a:p>
+        </p:txBody>
+      </p:sp>
+      <p:sp>
+        <p:nvSpPr>
+          <p:cNvPr id="11" name="Rule"/>
+          <p:cNvSpPr/>
+          <p:nvPr/>
+        </p:nvSpPr>
+        <p:spPr>
+          <a:xfrm>
+            <a:off x="457200" y="940000"/>
+            <a:ext cx="11277600" cy="0"/>
+          </a:xfrm>
+          <a:prstGeom prst="line">
+            <a:avLst/>
+          </a:prstGeom>
+          <a:ln w="19050">
+            <a:solidFill>
+              <a:srgbClr val="0D7377"/>
+            </a:solidFill>
+          </a:ln>
+        </p:spPr>
+        <p:txBody>
+          <a:bodyPr/>
+          <a:lstStyle/>
+          <a:p>
+            <a:endParaRPr/>
+          </a:p>
+        </p:txBody>
+      </p:sp>
+      <p:sp>
+        <p:nvSpPr>
+          <p:cNvPr id="50" name="Banner"/>
+          <p:cNvSpPr/>
+          <p:nvPr/>
+        </p:nvSpPr>
+        <p:spPr>
+          <a:xfrm>
+            <a:off x="457200" y="1120000"/>
+            <a:ext cx="11277600" cy="470000"/>
+          </a:xfrm>
+          <a:prstGeom prst="rect">
+            <a:avLst/>
+          </a:prstGeom>
+          <a:solidFill>
+            <a:srgbClr val="0D7377"/>
+          </a:solidFill>
+          <a:ln>
+            <a:noFill/>
+          </a:ln>
+        </p:spPr>
+        <p:txBody>
+          <a:bodyPr wrap="square" lIns="182880" tIns="45720" rIns="182880" bIns="45720" rtlCol="0" anchor="ctr">
+            <a:normAutofit/>
+          </a:bodyPr>
+          <a:lstStyle/>
+          <a:p>
+            <a:pPr marL="0" indent="0" algn="l">
+              <a:buNone/>
+            </a:pPr>
+            <a:r>
+              <a:rPr lang="en-US" sz="1500" b="1" dirty="0">
+                <a:solidFill>
+                  <a:srgbClr val="FFFFFF"/>
+                </a:solidFill>
+                <a:latin typeface="Arial"/>
+                <a:cs typeface="Arial"/>
+              </a:rPr>
+              <a:t>CẢ LỚP CÙNG LÀM   |   30 phút</a:t>
+            </a:r>
+          </a:p>
+        </p:txBody>
+      </p:sp>
+      <p:sp>
+        <p:nvSpPr>
+          <p:cNvPr id="51" name="Steps"/>
+          <p:cNvSpPr txBox="1"/>
+          <p:nvPr/>
+        </p:nvSpPr>
+        <p:spPr>
+          <a:xfrm>
+            <a:off x="457200" y="1720000"/>
+            <a:ext cx="6766560" cy="3510000"/>
+          </a:xfrm>
+          <a:prstGeom prst="rect">
+            <a:avLst/>
+          </a:prstGeom>
+          <a:noFill/>
+          <a:ln>
+            <a:noFill/>
+          </a:ln>
+        </p:spPr>
+        <p:txBody>
+          <a:bodyPr wrap="square" lIns="91440" tIns="45720" rIns="91440" bIns="45720" rtlCol="0" anchor="t"/>
+          <a:lstStyle/>
+          <a:p>
+            <a:pPr marL="380000" indent="-380000" algn="l">
+              <a:lnSpc>
+                <a:spcPct val="104000"/>
+              </a:lnSpc>
+              <a:spcBef>
+                <a:spcPts val="450"/>
+              </a:spcBef>
+              <a:buClr>
+                <a:srgbClr val="0D7377"/>
+              </a:buClr>
+              <a:buFont typeface="Arial"/>
+              <a:buChar char="•"/>
+            </a:pPr>
+            <a:r>
+              <a:rPr lang="en-US" sz="1650" dirty="0">
+                <a:solidFill>
+                  <a:srgbClr val="000000"/>
+                </a:solidFill>
+                <a:latin typeface="Arial"/>
+                <a:cs typeface="Arial"/>
+              </a:rPr>
+              <a:t>Giảng viên chia sẻ mẫu bản thảo và gói kết quả Q1</a:t>
+            </a:r>
+          </a:p>
+          <a:p>
+            <a:pPr marL="380000" indent="-380000" algn="l">
+              <a:lnSpc>
+                <a:spcPct val="104000"/>
+              </a:lnSpc>
+              <a:spcBef>
+                <a:spcPts val="450"/>
+              </a:spcBef>
+              <a:buClr>
+                <a:srgbClr val="0D7377"/>
+              </a:buClr>
+              <a:buFont typeface="Arial"/>
+              <a:buChar char="•"/>
+            </a:pPr>
+            <a:r>
+              <a:rPr lang="en-US" sz="1650" dirty="0">
+                <a:solidFill>
+                  <a:srgbClr val="000000"/>
+                </a:solidFill>
+                <a:latin typeface="Arial"/>
+                <a:cs typeface="Arial"/>
+              </a:rPr>
+              <a:t>Người tham gia và Bảng 1 (10 phút): khi được mời, bạn đề xuất từng câu</a:t>
+            </a:r>
+          </a:p>
+          <a:p>
+            <a:pPr marL="380000" indent="-380000" algn="l">
+              <a:lnSpc>
+                <a:spcPct val="104000"/>
+              </a:lnSpc>
+              <a:spcBef>
+                <a:spcPts val="450"/>
+              </a:spcBef>
+              <a:buClr>
+                <a:srgbClr val="0D7377"/>
+              </a:buClr>
+              <a:buFont typeface="Arial"/>
+              <a:buChar char="•"/>
+            </a:pPr>
+            <a:r>
+              <a:rPr lang="en-US" sz="1650" dirty="0">
+                <a:solidFill>
+                  <a:srgbClr val="000000"/>
+                </a:solidFill>
+                <a:latin typeface="Arial"/>
+                <a:cs typeface="Arial"/>
+              </a:rPr>
+              <a:t>Kết quả chính (12 phút): số tử vong mỗi nhóm, OR thô và hiệu chỉnh kèm KTC 95%</a:t>
+            </a:r>
+          </a:p>
+          <a:p>
+            <a:pPr marL="380000" indent="-380000" algn="l">
+              <a:lnSpc>
+                <a:spcPct val="104000"/>
+              </a:lnSpc>
+              <a:spcBef>
+                <a:spcPts val="450"/>
+              </a:spcBef>
+              <a:buClr>
+                <a:srgbClr val="0D7377"/>
+              </a:buClr>
+              <a:buFont typeface="Arial"/>
+              <a:buChar char="•"/>
+            </a:pPr>
+            <a:r>
+              <a:rPr lang="en-US" sz="1650" dirty="0">
+                <a:solidFill>
+                  <a:srgbClr val="000000"/>
+                </a:solidFill>
+                <a:latin typeface="Arial"/>
+                <a:cs typeface="Arial"/>
+              </a:rPr>
+              <a:t>Các phân tích khác (5 phút): mô hình Cox và quy gán đa bội</a:t>
+            </a:r>
+          </a:p>
+          <a:p>
+            <a:pPr marL="380000" indent="-380000" algn="l">
+              <a:lnSpc>
+                <a:spcPct val="104000"/>
+              </a:lnSpc>
+              <a:spcBef>
+                <a:spcPts val="450"/>
+              </a:spcBef>
+              <a:buClr>
+                <a:srgbClr val="0D7377"/>
+              </a:buClr>
+              <a:buFont typeface="Arial"/>
+              <a:buChar char="•"/>
+            </a:pPr>
+            <a:r>
+              <a:rPr lang="en-US" sz="1650" dirty="0">
+                <a:solidFill>
+                  <a:srgbClr val="000000"/>
+                </a:solidFill>
+                <a:latin typeface="Arial"/>
+                <a:cs typeface="Arial"/>
+              </a:rPr>
+              <a:t>Kiểm số (3 phút): một học viên đọc đối chiếu từng con số với gói kết quả</a:t>
+            </a:r>
+          </a:p>
+        </p:txBody>
+      </p:sp>
+      <p:sp>
+        <p:nvSpPr>
+          <p:cNvPr id="52" name="Side"/>
+          <p:cNvSpPr/>
+          <p:nvPr/>
+        </p:nvSpPr>
+        <p:spPr>
+          <a:xfrm>
+            <a:off x="7423760" y="1720000"/>
+            <a:ext cx="4311040" cy="1729880"/>
+          </a:xfrm>
+          <a:prstGeom prst="roundRect">
+            <a:avLst>
+              <a:gd name="adj" fmla="val 5000"/>
+            </a:avLst>
+          </a:prstGeom>
+          <a:solidFill>
+            <a:srgbClr val="EAF2F5"/>
+          </a:solidFill>
+          <a:ln>
+            <a:noFill/>
+          </a:ln>
+        </p:spPr>
+        <p:txBody>
+          <a:bodyPr wrap="square" lIns="137160" tIns="91440" rIns="137160" bIns="91440" rtlCol="0" anchor="ctr">
+            <a:normAutofit/>
+          </a:bodyPr>
+          <a:lstStyle/>
+          <a:p>
+            <a:pPr marL="0" indent="0" algn="ctr">
+              <a:buNone/>
+            </a:pPr>
+            <a:r>
+              <a:rPr lang="en-US" sz="1600" b="1" dirty="0">
+                <a:solidFill>
+                  <a:srgbClr val="0D7377"/>
+                </a:solidFill>
+                <a:latin typeface="Arial"/>
+                <a:cs typeface="Arial"/>
+              </a:rPr>
+              <a:t>Dùng</a:t>
+            </a:r>
+          </a:p>
+          <a:p>
+            <a:pPr marL="0" indent="0" algn="ctr">
+              <a:lnSpc>
+                <a:spcPct val="104000"/>
+              </a:lnSpc>
+              <a:spcBef>
+                <a:spcPts val="300"/>
+              </a:spcBef>
+              <a:buNone/>
+            </a:pPr>
+            <a:r>
+              <a:rPr lang="en-US" sz="1500" dirty="0">
+                <a:solidFill>
+                  <a:srgbClr val="000000"/>
+                </a:solidFill>
+                <a:latin typeface="Arial"/>
+                <a:cs typeface="Arial"/>
+              </a:rPr>
+              <a:t>Gói kết quả Q1</a:t>
+            </a:r>
+          </a:p>
+          <a:p>
+            <a:pPr marL="0" indent="0" algn="ctr">
+              <a:lnSpc>
+                <a:spcPct val="104000"/>
+              </a:lnSpc>
+              <a:spcBef>
+                <a:spcPts val="300"/>
+              </a:spcBef>
+              <a:buNone/>
+            </a:pPr>
+            <a:r>
+              <a:rPr lang="en-US" sz="1500" dirty="0">
+                <a:solidFill>
+                  <a:srgbClr val="000000"/>
+                </a:solidFill>
+                <a:latin typeface="Arial"/>
+                <a:cs typeface="Arial"/>
+              </a:rPr>
+              <a:t>Mẫu bản thảo</a:t>
+            </a:r>
+          </a:p>
+          <a:p>
+            <a:pPr marL="0" indent="0" algn="ctr">
+              <a:lnSpc>
+                <a:spcPct val="104000"/>
+              </a:lnSpc>
+              <a:spcBef>
+                <a:spcPts val="300"/>
+              </a:spcBef>
+              <a:buNone/>
+            </a:pPr>
+            <a:r>
+              <a:rPr lang="en-US" sz="1500" dirty="0">
+                <a:solidFill>
+                  <a:srgbClr val="000000"/>
+                </a:solidFill>
+                <a:latin typeface="Arial"/>
+                <a:cs typeface="Arial"/>
+              </a:rPr>
+              <a:t>Mục STROBE 13-17</a:t>
+            </a:r>
+          </a:p>
+          <a:p>
+            <a:pPr marL="0" indent="0" algn="ctr">
+              <a:lnSpc>
+                <a:spcPct val="104000"/>
+              </a:lnSpc>
+              <a:spcBef>
+                <a:spcPts val="300"/>
+              </a:spcBef>
+              <a:buNone/>
+            </a:pPr>
+            <a:r>
+              <a:rPr lang="en-US" sz="1500" dirty="0">
+                <a:solidFill>
+                  <a:srgbClr val="000000"/>
+                </a:solidFill>
+                <a:latin typeface="Arial"/>
+                <a:cs typeface="Arial"/>
+              </a:rPr>
+              <a:t>Các ví dụ mẫu (slide)</a:t>
+            </a:r>
+          </a:p>
+        </p:txBody>
+      </p:sp>
+      <p:sp>
+        <p:nvSpPr>
+          <p:cNvPr id="53" name="Deliverable"/>
+          <p:cNvSpPr/>
+          <p:nvPr/>
+        </p:nvSpPr>
+        <p:spPr>
+          <a:xfrm>
+            <a:off x="457200" y="5350000"/>
+            <a:ext cx="11277600" cy="600000"/>
+          </a:xfrm>
+          <a:prstGeom prst="roundRect">
+            <a:avLst>
+              <a:gd name="adj" fmla="val 12000"/>
+            </a:avLst>
+          </a:prstGeom>
+          <a:solidFill>
+            <a:srgbClr val="FFFFFF"/>
+          </a:solidFill>
+          <a:ln w="15875">
+            <a:solidFill>
+              <a:srgbClr val="0D7377"/>
+            </a:solidFill>
+          </a:ln>
+        </p:spPr>
+        <p:txBody>
+          <a:bodyPr wrap="square" lIns="182880" tIns="45720" rIns="182880" bIns="45720" rtlCol="0" anchor="ctr">
+            <a:normAutofit/>
+          </a:bodyPr>
+          <a:lstStyle/>
+          <a:p>
+            <a:pPr marL="0" indent="0" algn="ctr">
+              <a:buNone/>
+            </a:pPr>
+            <a:r>
+              <a:rPr lang="en-US" sz="1300" b="1" dirty="0">
+                <a:solidFill>
+                  <a:srgbClr val="0D7377"/>
+                </a:solidFill>
+                <a:latin typeface="Arial"/>
+                <a:cs typeface="Arial"/>
+              </a:rPr>
+              <a:t>SẢN PHẨM   </a:t>
+            </a:r>
+            <a:r>
+              <a:rPr lang="en-US" sz="1500" dirty="0">
+                <a:solidFill>
+                  <a:srgbClr val="000000"/>
+                </a:solidFill>
+                <a:latin typeface="Arial"/>
+                <a:cs typeface="Arial"/>
+              </a:rPr>
+              <a:t>Phần Kết quả Q1 của lớp, gửi dạng PDF sau buổi học</a:t>
+            </a:r>
+          </a:p>
+        </p:txBody>
+      </p:sp>
+      <p:sp>
+        <p:nvSpPr>
+          <p:cNvPr id="901" name="Footer"/>
+          <p:cNvSpPr txBox="1"/>
+          <p:nvPr/>
+        </p:nvSpPr>
+        <p:spPr>
+          <a:xfrm>
+            <a:off x="4599946" y="6458701"/>
+            <a:ext cx="2845651" cy="276999"/>
+          </a:xfrm>
+          <a:prstGeom prst="rect">
+            <a:avLst/>
+          </a:prstGeom>
+          <a:noFill/>
+          <a:ln>
+            <a:noFill/>
+          </a:ln>
+        </p:spPr>
+        <p:txBody>
+          <a:bodyPr wrap="none" lIns="91440" tIns="45720" rIns="91440" bIns="45720" rtlCol="0" anchor="t"/>
+          <a:lstStyle/>
+          <a:p>
+            <a:r>
+              <a:rPr lang="en-US" sz="1200" dirty="0">
+                <a:solidFill>
+                  <a:schemeClr val="accent5">
+                    <a:lumMod val="50000"/>
+                  </a:schemeClr>
+                </a:solidFill>
+                <a:latin typeface="Arial"/>
+              </a:rPr>
+              <a:t>Neudata | #ClearDataClearImpact</a:t>
+            </a:r>
+          </a:p>
+        </p:txBody>
+      </p:sp>
+      <p:pic>
+        <p:nvPicPr>
+          <p:cNvPr id="902" name="Logo"/>
+          <p:cNvPicPr>
+            <a:picLocks noChangeAspect="1"/>
+          </p:cNvPicPr>
+          <p:nvPr/>
+        </p:nvPicPr>
+        <p:blipFill>
+          <a:blip r:embed="rId3"/>
+          <a:stretch>
+            <a:fillRect/>
+          </a:stretch>
+        </p:blipFill>
+        <p:spPr>
+          <a:xfrm>
+            <a:off x="138853" y="6122125"/>
+            <a:ext cx="716763" cy="683623"/>
+          </a:xfrm>
+          <a:prstGeom prst="rect">
+            <a:avLst/>
+          </a:prstGeom>
+        </p:spPr>
+      </p:pic>
+      <p:sp>
+        <p:nvSpPr>
+          <p:cNvPr id="903" name="Slide Number"/>
+          <p:cNvSpPr>
+            <a:spLocks noGrp="1"/>
+          </p:cNvSpPr>
+          <p:nvPr>
+            <p:ph type="sldNum" sz="quarter" idx="12"/>
+          </p:nvPr>
+        </p:nvSpPr>
+        <p:spPr>
+          <a:xfrm>
+            <a:off x="11330000" y="6470000"/>
+            <a:ext cx="620000" cy="320000"/>
+          </a:xfrm>
+        </p:spPr>
+        <p:txBody>
+          <a:bodyPr/>
+          <a:lstStyle/>
+          <a:p>
+            <a:pPr algn="r"/>
+            <a:fld id="{C1FF6DA9-008F-8B48-92A6-B652298478BF}" type="slidenum">
+              <a:rPr lang="en-US" sz="1050" smtClean="0">
+                <a:solidFill>
+                  <a:schemeClr val="accent5">
+                    <a:lumMod val="50000"/>
+                  </a:schemeClr>
+                </a:solidFill>
+              </a:rPr>
+              <a:t>2</a:t>
+            </a:fld>
+            <a:endParaRPr lang="en-US"/>
+          </a:p>
+        </p:txBody>
+      </p:sp>
+    </p:spTree>
+  </p:cSld>
+  <p:clrMapOvr>
+    <a:masterClrMapping/>
+  </p:clrMapOvr>
+</p:sld>
+</file>
+
+<file path=ppt/slides/slide39.xml><?xml version="1.0" encoding="utf-8"?>
+<p:sld xmlns:a="http://schemas.openxmlformats.org/drawingml/2006/main" xmlns:r="http://schemas.openxmlformats.org/officeDocument/2006/relationships" xmlns:p="http://schemas.openxmlformats.org/presentationml/2006/main">
+  <p:cSld>
+    <p:bg>
+      <p:bgPr>
+        <a:solidFill>
+          <a:schemeClr val="bg1"/>
+        </a:solidFill>
+        <a:effectLst/>
+      </p:bgPr>
+    </p:bg>
+    <p:spTree>
+      <p:nvGrpSpPr>
+        <p:cNvPr id="1" name=""/>
+        <p:cNvGrpSpPr/>
+        <p:nvPr/>
+      </p:nvGrpSpPr>
+      <p:grpSpPr>
+        <a:xfrm>
+          <a:off x="0" y="0"/>
+          <a:ext cx="0" cy="0"/>
+          <a:chOff x="0" y="0"/>
+          <a:chExt cx="0" cy="0"/>
+        </a:xfrm>
+      </p:grpSpPr>
+      <p:sp>
+        <p:nvSpPr>
+          <p:cNvPr id="10" name="Title"/>
+          <p:cNvSpPr txBox="1"/>
+          <p:nvPr/>
+        </p:nvSpPr>
+        <p:spPr>
+          <a:xfrm>
+            <a:off x="457200" y="160000"/>
+            <a:ext cx="11277600" cy="750000"/>
+          </a:xfrm>
+          <a:prstGeom prst="rect">
+            <a:avLst/>
+          </a:prstGeom>
+          <a:noFill/>
+          <a:ln>
+            <a:noFill/>
+          </a:ln>
+        </p:spPr>
+        <p:txBody>
+          <a:bodyPr wrap="square" lIns="91440" tIns="45720" rIns="91440" bIns="45720" rtlCol="0" anchor="ctr"/>
+          <a:lstStyle/>
+          <a:p>
+            <a:pPr marL="0" indent="0" algn="l">
+              <a:buNone/>
+            </a:pPr>
+            <a:r>
+              <a:rPr lang="en-US" sz="2800" b="1" dirty="0">
+                <a:solidFill>
+                  <a:srgbClr val="0D7377"/>
+                </a:solidFill>
+                <a:latin typeface="Arial"/>
+                <a:cs typeface="Arial"/>
+              </a:rPr>
               <a:t>Thực hành bản thảo 1, phần 2: bắt đầu bản nháp của bạn</a:t>
             </a:r>
           </a:p>
@@ -26018,7 +26299,7 @@
                 <a:latin typeface="Arial"/>
                 <a:cs typeface="Arial"/>
               </a:rPr>
-              <a:t>Phần Kết quả của bạn, hạn 23:59 ngày học Buổi 8</a:t>
+              <a:t>Phần Kết quả của bạn, hạn 23:59 Chủ nhật 20/12</a:t>
             </a:r>
           </a:p>
         </p:txBody>
@@ -26127,7 +26408,263 @@
 </p:sld>
 </file>
 
-<file path=ppt/slides/slide39.xml><?xml version="1.0" encoding="utf-8"?>
+<file path=ppt/slides/slide4.xml><?xml version="1.0" encoding="utf-8"?>
+<p:sld xmlns:a="http://schemas.openxmlformats.org/drawingml/2006/main" xmlns:r="http://schemas.openxmlformats.org/officeDocument/2006/relationships" xmlns:p="http://schemas.openxmlformats.org/presentationml/2006/main">
+  <p:cSld>
+    <p:bg>
+      <p:bgPr>
+        <a:solidFill>
+          <a:schemeClr val="bg1"/>
+        </a:solidFill>
+        <a:effectLst/>
+      </p:bgPr>
+    </p:bg>
+    <p:spTree>
+      <p:nvGrpSpPr>
+        <p:cNvPr id="1" name=""/>
+        <p:cNvGrpSpPr/>
+        <p:nvPr/>
+      </p:nvGrpSpPr>
+      <p:grpSpPr>
+        <a:xfrm>
+          <a:off x="0" y="0"/>
+          <a:ext cx="0" cy="0"/>
+          <a:chOff x="0" y="0"/>
+          <a:chExt cx="0" cy="0"/>
+        </a:xfrm>
+      </p:grpSpPr>
+      <p:sp>
+        <p:nvSpPr>
+          <p:cNvPr id="10" name="Title"/>
+          <p:cNvSpPr txBox="1"/>
+          <p:nvPr/>
+        </p:nvSpPr>
+        <p:spPr>
+          <a:xfrm>
+            <a:off x="457200" y="160000"/>
+            <a:ext cx="11277600" cy="750000"/>
+          </a:xfrm>
+          <a:prstGeom prst="rect">
+            <a:avLst/>
+          </a:prstGeom>
+          <a:noFill/>
+          <a:ln>
+            <a:noFill/>
+          </a:ln>
+        </p:spPr>
+        <p:txBody>
+          <a:bodyPr wrap="square" lIns="91440" tIns="45720" rIns="91440" bIns="45720" rtlCol="0" anchor="ctr"/>
+          <a:lstStyle/>
+          <a:p>
+            <a:pPr marL="0" indent="0" algn="l">
+              <a:buNone/>
+            </a:pPr>
+            <a:r>
+              <a:rPr lang="en-US" sz="2800" b="1" dirty="0">
+                <a:solidFill>
+                  <a:srgbClr val="0D7377"/>
+                </a:solidFill>
+                <a:latin typeface="Arial"/>
+                <a:cs typeface="Arial"/>
+              </a:rPr>
+              <a:t>7.1  |  30 phút</a:t>
+            </a:r>
+          </a:p>
+        </p:txBody>
+      </p:sp>
+      <p:sp>
+        <p:nvSpPr>
+          <p:cNvPr id="11" name="Rule"/>
+          <p:cNvSpPr/>
+          <p:nvPr/>
+        </p:nvSpPr>
+        <p:spPr>
+          <a:xfrm>
+            <a:off x="457200" y="940000"/>
+            <a:ext cx="11277600" cy="0"/>
+          </a:xfrm>
+          <a:prstGeom prst="line">
+            <a:avLst/>
+          </a:prstGeom>
+          <a:ln w="19050">
+            <a:solidFill>
+              <a:srgbClr val="0D7377"/>
+            </a:solidFill>
+          </a:ln>
+        </p:spPr>
+        <p:txBody>
+          <a:bodyPr/>
+          <a:lstStyle/>
+          <a:p>
+            <a:endParaRPr/>
+          </a:p>
+        </p:txBody>
+      </p:sp>
+      <p:sp>
+        <p:nvSpPr>
+          <p:cNvPr id="20" name="Statement"/>
+          <p:cNvSpPr txBox="1"/>
+          <p:nvPr/>
+        </p:nvSpPr>
+        <p:spPr>
+          <a:xfrm>
+            <a:off x="1057200" y="1280000"/>
+            <a:ext cx="10077600" cy="4470000"/>
+          </a:xfrm>
+          <a:prstGeom prst="rect">
+            <a:avLst/>
+          </a:prstGeom>
+          <a:noFill/>
+          <a:ln>
+            <a:noFill/>
+          </a:ln>
+        </p:spPr>
+        <p:txBody>
+          <a:bodyPr wrap="square" lIns="91440" tIns="45720" rIns="91440" bIns="45720" rtlCol="0" anchor="ctr"/>
+          <a:lstStyle/>
+          <a:p>
+            <a:pPr marL="0" indent="0" algn="ctr">
+              <a:lnSpc>
+                <a:spcPct val="110000"/>
+              </a:lnSpc>
+              <a:buNone/>
+            </a:pPr>
+            <a:r>
+              <a:rPr lang="en-US" sz="3200" b="1" dirty="0">
+                <a:solidFill>
+                  <a:srgbClr val="0D7377"/>
+                </a:solidFill>
+                <a:latin typeface="Arial"/>
+                <a:cs typeface="Arial"/>
+              </a:rPr>
+              <a:t>Đề cương chi tiết, đạo đức và sự đồng ý tham gia</a:t>
+            </a:r>
+          </a:p>
+          <a:p>
+            <a:pPr marL="0" indent="0" algn="ctr">
+              <a:spcBef>
+                <a:spcPts val="1200"/>
+              </a:spcBef>
+              <a:buNone/>
+            </a:pPr>
+            <a:r>
+              <a:rPr lang="en-US" sz="1900" i="1" dirty="0">
+                <a:solidFill>
+                  <a:srgbClr val="595959"/>
+                </a:solidFill>
+                <a:latin typeface="Arial"/>
+                <a:cs typeface="Arial"/>
+              </a:rPr>
+              <a:t>Bảo vệ người bệnh trước khi có dữ liệu đầu tiên</a:t>
+            </a:r>
+          </a:p>
+        </p:txBody>
+      </p:sp>
+      <p:sp>
+        <p:nvSpPr>
+          <p:cNvPr id="901" name="Footer"/>
+          <p:cNvSpPr txBox="1"/>
+          <p:nvPr/>
+        </p:nvSpPr>
+        <p:spPr>
+          <a:xfrm>
+            <a:off x="4599946" y="6458701"/>
+            <a:ext cx="2845651" cy="276999"/>
+          </a:xfrm>
+          <a:prstGeom prst="rect">
+            <a:avLst/>
+          </a:prstGeom>
+          <a:noFill/>
+          <a:ln>
+            <a:noFill/>
+          </a:ln>
+        </p:spPr>
+        <p:txBody>
+          <a:bodyPr wrap="none" lIns="91440" tIns="45720" rIns="91440" bIns="45720" rtlCol="0" anchor="t"/>
+          <a:lstStyle/>
+          <a:p>
+            <a:r>
+              <a:rPr lang="en-US" sz="1200" dirty="0">
+                <a:solidFill>
+                  <a:schemeClr val="accent5">
+                    <a:lumMod val="50000"/>
+                  </a:schemeClr>
+                </a:solidFill>
+                <a:latin typeface="Arial"/>
+              </a:rPr>
+              <a:t>Neudata | #ClearDataClearImpact</a:t>
+            </a:r>
+          </a:p>
+        </p:txBody>
+      </p:sp>
+      <p:pic>
+        <p:nvPicPr>
+          <p:cNvPr id="902" name="Logo"/>
+          <p:cNvPicPr>
+            <a:picLocks noChangeAspect="1"/>
+          </p:cNvPicPr>
+          <p:nvPr/>
+        </p:nvPicPr>
+        <p:blipFill>
+          <a:blip r:embed="rId3"/>
+          <a:stretch>
+            <a:fillRect/>
+          </a:stretch>
+        </p:blipFill>
+        <p:spPr>
+          <a:xfrm>
+            <a:off x="138853" y="6122125"/>
+            <a:ext cx="716763" cy="683623"/>
+          </a:xfrm>
+          <a:prstGeom prst="rect">
+            <a:avLst/>
+          </a:prstGeom>
+        </p:spPr>
+      </p:pic>
+      <p:sp>
+        <p:nvSpPr>
+          <p:cNvPr id="903" name="Slide Number"/>
+          <p:cNvSpPr>
+            <a:spLocks noGrp="1"/>
+          </p:cNvSpPr>
+          <p:nvPr>
+            <p:ph type="sldNum" sz="quarter" idx="12"/>
+          </p:nvPr>
+        </p:nvSpPr>
+        <p:spPr>
+          <a:xfrm>
+            <a:off x="11330000" y="6470000"/>
+            <a:ext cx="620000" cy="320000"/>
+          </a:xfrm>
+        </p:spPr>
+        <p:txBody>
+          <a:bodyPr/>
+          <a:lstStyle/>
+          <a:p>
+            <a:pPr algn="r"/>
+            <a:fld id="{C1FF6DA9-008F-8B48-92A6-B652298478BF}" type="slidenum">
+              <a:rPr lang="en-US" sz="1050" smtClean="0">
+                <a:solidFill>
+                  <a:schemeClr val="accent5">
+                    <a:lumMod val="50000"/>
+                  </a:schemeClr>
+                </a:solidFill>
+              </a:rPr>
+              <a:t>2</a:t>
+            </a:fld>
+            <a:endParaRPr lang="en-US"/>
+          </a:p>
+        </p:txBody>
+      </p:sp>
+    </p:spTree>
+  </p:cSld>
+  <p:clrMapOvr>
+    <a:masterClrMapping/>
+  </p:clrMapOvr>
+</p:sld>
+</file>
+
+<file path=ppt/slides/slide40.xml><?xml version="1.0" encoding="utf-8"?>
 <p:sld xmlns:a="http://schemas.openxmlformats.org/drawingml/2006/main" xmlns:r="http://schemas.openxmlformats.org/officeDocument/2006/relationships" xmlns:p="http://schemas.openxmlformats.org/presentationml/2006/main">
   <p:cSld>
     <p:bg>
@@ -26736,263 +27273,7 @@
 </p:sld>
 </file>
 
-<file path=ppt/slides/slide4.xml><?xml version="1.0" encoding="utf-8"?>
-<p:sld xmlns:a="http://schemas.openxmlformats.org/drawingml/2006/main" xmlns:r="http://schemas.openxmlformats.org/officeDocument/2006/relationships" xmlns:p="http://schemas.openxmlformats.org/presentationml/2006/main">
-  <p:cSld>
-    <p:bg>
-      <p:bgPr>
-        <a:solidFill>
-          <a:schemeClr val="bg1"/>
-        </a:solidFill>
-        <a:effectLst/>
-      </p:bgPr>
-    </p:bg>
-    <p:spTree>
-      <p:nvGrpSpPr>
-        <p:cNvPr id="1" name=""/>
-        <p:cNvGrpSpPr/>
-        <p:nvPr/>
-      </p:nvGrpSpPr>
-      <p:grpSpPr>
-        <a:xfrm>
-          <a:off x="0" y="0"/>
-          <a:ext cx="0" cy="0"/>
-          <a:chOff x="0" y="0"/>
-          <a:chExt cx="0" cy="0"/>
-        </a:xfrm>
-      </p:grpSpPr>
-      <p:sp>
-        <p:nvSpPr>
-          <p:cNvPr id="10" name="Title"/>
-          <p:cNvSpPr txBox="1"/>
-          <p:nvPr/>
-        </p:nvSpPr>
-        <p:spPr>
-          <a:xfrm>
-            <a:off x="457200" y="160000"/>
-            <a:ext cx="11277600" cy="750000"/>
-          </a:xfrm>
-          <a:prstGeom prst="rect">
-            <a:avLst/>
-          </a:prstGeom>
-          <a:noFill/>
-          <a:ln>
-            <a:noFill/>
-          </a:ln>
-        </p:spPr>
-        <p:txBody>
-          <a:bodyPr wrap="square" lIns="91440" tIns="45720" rIns="91440" bIns="45720" rtlCol="0" anchor="ctr"/>
-          <a:lstStyle/>
-          <a:p>
-            <a:pPr marL="0" indent="0" algn="l">
-              <a:buNone/>
-            </a:pPr>
-            <a:r>
-              <a:rPr lang="en-US" sz="2800" b="1" dirty="0">
-                <a:solidFill>
-                  <a:srgbClr val="0D7377"/>
-                </a:solidFill>
-                <a:latin typeface="Arial"/>
-                <a:cs typeface="Arial"/>
-              </a:rPr>
-              <a:t>7.1  |  30 phút</a:t>
-            </a:r>
-          </a:p>
-        </p:txBody>
-      </p:sp>
-      <p:sp>
-        <p:nvSpPr>
-          <p:cNvPr id="11" name="Rule"/>
-          <p:cNvSpPr/>
-          <p:nvPr/>
-        </p:nvSpPr>
-        <p:spPr>
-          <a:xfrm>
-            <a:off x="457200" y="940000"/>
-            <a:ext cx="11277600" cy="0"/>
-          </a:xfrm>
-          <a:prstGeom prst="line">
-            <a:avLst/>
-          </a:prstGeom>
-          <a:ln w="19050">
-            <a:solidFill>
-              <a:srgbClr val="0D7377"/>
-            </a:solidFill>
-          </a:ln>
-        </p:spPr>
-        <p:txBody>
-          <a:bodyPr/>
-          <a:lstStyle/>
-          <a:p>
-            <a:endParaRPr/>
-          </a:p>
-        </p:txBody>
-      </p:sp>
-      <p:sp>
-        <p:nvSpPr>
-          <p:cNvPr id="20" name="Statement"/>
-          <p:cNvSpPr txBox="1"/>
-          <p:nvPr/>
-        </p:nvSpPr>
-        <p:spPr>
-          <a:xfrm>
-            <a:off x="1057200" y="1280000"/>
-            <a:ext cx="10077600" cy="4470000"/>
-          </a:xfrm>
-          <a:prstGeom prst="rect">
-            <a:avLst/>
-          </a:prstGeom>
-          <a:noFill/>
-          <a:ln>
-            <a:noFill/>
-          </a:ln>
-        </p:spPr>
-        <p:txBody>
-          <a:bodyPr wrap="square" lIns="91440" tIns="45720" rIns="91440" bIns="45720" rtlCol="0" anchor="ctr"/>
-          <a:lstStyle/>
-          <a:p>
-            <a:pPr marL="0" indent="0" algn="ctr">
-              <a:lnSpc>
-                <a:spcPct val="110000"/>
-              </a:lnSpc>
-              <a:buNone/>
-            </a:pPr>
-            <a:r>
-              <a:rPr lang="en-US" sz="3200" b="1" dirty="0">
-                <a:solidFill>
-                  <a:srgbClr val="0D7377"/>
-                </a:solidFill>
-                <a:latin typeface="Arial"/>
-                <a:cs typeface="Arial"/>
-              </a:rPr>
-              <a:t>Đề cương chi tiết, đạo đức và sự đồng ý tham gia</a:t>
-            </a:r>
-          </a:p>
-          <a:p>
-            <a:pPr marL="0" indent="0" algn="ctr">
-              <a:spcBef>
-                <a:spcPts val="1200"/>
-              </a:spcBef>
-              <a:buNone/>
-            </a:pPr>
-            <a:r>
-              <a:rPr lang="en-US" sz="1900" i="1" dirty="0">
-                <a:solidFill>
-                  <a:srgbClr val="595959"/>
-                </a:solidFill>
-                <a:latin typeface="Arial"/>
-                <a:cs typeface="Arial"/>
-              </a:rPr>
-              <a:t>Bảo vệ người bệnh trước khi có dữ liệu đầu tiên</a:t>
-            </a:r>
-          </a:p>
-        </p:txBody>
-      </p:sp>
-      <p:sp>
-        <p:nvSpPr>
-          <p:cNvPr id="901" name="Footer"/>
-          <p:cNvSpPr txBox="1"/>
-          <p:nvPr/>
-        </p:nvSpPr>
-        <p:spPr>
-          <a:xfrm>
-            <a:off x="4599946" y="6458701"/>
-            <a:ext cx="2845651" cy="276999"/>
-          </a:xfrm>
-          <a:prstGeom prst="rect">
-            <a:avLst/>
-          </a:prstGeom>
-          <a:noFill/>
-          <a:ln>
-            <a:noFill/>
-          </a:ln>
-        </p:spPr>
-        <p:txBody>
-          <a:bodyPr wrap="none" lIns="91440" tIns="45720" rIns="91440" bIns="45720" rtlCol="0" anchor="t"/>
-          <a:lstStyle/>
-          <a:p>
-            <a:r>
-              <a:rPr lang="en-US" sz="1200" dirty="0">
-                <a:solidFill>
-                  <a:schemeClr val="accent5">
-                    <a:lumMod val="50000"/>
-                  </a:schemeClr>
-                </a:solidFill>
-                <a:latin typeface="Arial"/>
-              </a:rPr>
-              <a:t>Neudata | #ClearDataClearImpact</a:t>
-            </a:r>
-          </a:p>
-        </p:txBody>
-      </p:sp>
-      <p:pic>
-        <p:nvPicPr>
-          <p:cNvPr id="902" name="Logo"/>
-          <p:cNvPicPr>
-            <a:picLocks noChangeAspect="1"/>
-          </p:cNvPicPr>
-          <p:nvPr/>
-        </p:nvPicPr>
-        <p:blipFill>
-          <a:blip r:embed="rId3"/>
-          <a:stretch>
-            <a:fillRect/>
-          </a:stretch>
-        </p:blipFill>
-        <p:spPr>
-          <a:xfrm>
-            <a:off x="138853" y="6122125"/>
-            <a:ext cx="716763" cy="683623"/>
-          </a:xfrm>
-          <a:prstGeom prst="rect">
-            <a:avLst/>
-          </a:prstGeom>
-        </p:spPr>
-      </p:pic>
-      <p:sp>
-        <p:nvSpPr>
-          <p:cNvPr id="903" name="Slide Number"/>
-          <p:cNvSpPr>
-            <a:spLocks noGrp="1"/>
-          </p:cNvSpPr>
-          <p:nvPr>
-            <p:ph type="sldNum" sz="quarter" idx="12"/>
-          </p:nvPr>
-        </p:nvSpPr>
-        <p:spPr>
-          <a:xfrm>
-            <a:off x="11330000" y="6470000"/>
-            <a:ext cx="620000" cy="320000"/>
-          </a:xfrm>
-        </p:spPr>
-        <p:txBody>
-          <a:bodyPr/>
-          <a:lstStyle/>
-          <a:p>
-            <a:pPr algn="r"/>
-            <a:fld id="{C1FF6DA9-008F-8B48-92A6-B652298478BF}" type="slidenum">
-              <a:rPr lang="en-US" sz="1050" smtClean="0">
-                <a:solidFill>
-                  <a:schemeClr val="accent5">
-                    <a:lumMod val="50000"/>
-                  </a:schemeClr>
-                </a:solidFill>
-              </a:rPr>
-              <a:t>2</a:t>
-            </a:fld>
-            <a:endParaRPr lang="en-US"/>
-          </a:p>
-        </p:txBody>
-      </p:sp>
-    </p:spTree>
-  </p:cSld>
-  <p:clrMapOvr>
-    <a:masterClrMapping/>
-  </p:clrMapOvr>
-</p:sld>
-</file>
-
-<file path=ppt/slides/slide40.xml><?xml version="1.0" encoding="utf-8"?>
+<file path=ppt/slides/slide41.xml><?xml version="1.0" encoding="utf-8"?>
 <p:sld xmlns:a="http://schemas.openxmlformats.org/drawingml/2006/main" xmlns:r="http://schemas.openxmlformats.org/officeDocument/2006/relationships" xmlns:p="http://schemas.openxmlformats.org/presentationml/2006/main">
   <p:cSld>
     <p:bg>
@@ -27169,7 +27450,7 @@
                           <a:latin typeface="Arial"/>
                           <a:cs typeface="Arial"/>
                         </a:rPr>
-                        <a:t>23:59, thứ Bảy 19/12 (Buổi 8)</a:t>
+                        <a:t>23:59, Chủ nhật 20/12</a:t>
                       </a:r>
                     </a:p>
                   </a:txBody>
@@ -27193,7 +27474,7 @@
                           <a:latin typeface="Arial"/>
                           <a:cs typeface="Arial"/>
                         </a:rPr>
-                        <a:t>Gửi email phần Kết quả cho người bình duyệt của bạn và trưởng khóa học</a:t>
+                        <a:t>Gửi email phần Kết quả cho người bình duyệt của bạn và giảng viên</a:t>
                       </a:r>
                     </a:p>
                   </a:txBody>
@@ -27219,7 +27500,7 @@
                           <a:latin typeface="Arial"/>
                           <a:cs typeface="Arial"/>
                         </a:rPr>
-                        <a:t>Thứ Bảy 2/1</a:t>
+                        <a:t>Thứ Tư 30/12</a:t>
                       </a:r>
                     </a:p>
                   </a:txBody>
@@ -27243,7 +27524,7 @@
                           <a:latin typeface="Arial"/>
                           <a:cs typeface="Arial"/>
                         </a:rPr>
-                        <a:t>Người bình duyệt gửi email bản bình duyệt cho tác giả và trưởng khóa học</a:t>
+                        <a:t>Người bình duyệt gửi email bản bình duyệt cho tác giả và giảng viên</a:t>
                       </a:r>
                     </a:p>
                   </a:txBody>
@@ -27269,7 +27550,7 @@
                           <a:latin typeface="Arial"/>
                           <a:cs typeface="Arial"/>
                         </a:rPr>
-                        <a:t>Thứ Bảy 30/1</a:t>
+                        <a:t>Thứ Bảy 9/1/2027</a:t>
                       </a:r>
                     </a:p>
                   </a:txBody>
@@ -27293,7 +27574,7 @@
                           <a:latin typeface="Arial"/>
                           <a:cs typeface="Arial"/>
                         </a:rPr>
-                        <a:t>Gửi email phần Kết quả đã sửa và thư phản hồi cho trưởng khóa học</a:t>
+                        <a:t>Gửi email phần Kết quả đã sửa và thư phản hồi cho giảng viên</a:t>
                       </a:r>
                     </a:p>
                   </a:txBody>
@@ -27342,560 +27623,7 @@
                 <a:latin typeface="Arial"/>
                 <a:cs typeface="Arial"/>
               </a:rPr>
-              <a:t>Người bình duyệt được phân công ngẫu nhiên: xem danh sách trên màn hình và trong email. Trưởng khóa học: myluong1710@gmail.com</a:t>
-            </a:r>
-          </a:p>
-        </p:txBody>
-      </p:sp>
-      <p:sp>
-        <p:nvSpPr>
-          <p:cNvPr id="901" name="Footer"/>
-          <p:cNvSpPr txBox="1"/>
-          <p:nvPr/>
-        </p:nvSpPr>
-        <p:spPr>
-          <a:xfrm>
-            <a:off x="4599946" y="6458701"/>
-            <a:ext cx="2845651" cy="276999"/>
-          </a:xfrm>
-          <a:prstGeom prst="rect">
-            <a:avLst/>
-          </a:prstGeom>
-          <a:noFill/>
-          <a:ln>
-            <a:noFill/>
-          </a:ln>
-        </p:spPr>
-        <p:txBody>
-          <a:bodyPr wrap="none" lIns="91440" tIns="45720" rIns="91440" bIns="45720" rtlCol="0" anchor="t"/>
-          <a:lstStyle/>
-          <a:p>
-            <a:r>
-              <a:rPr lang="en-US" sz="1200" dirty="0">
-                <a:solidFill>
-                  <a:schemeClr val="accent5">
-                    <a:lumMod val="50000"/>
-                  </a:schemeClr>
-                </a:solidFill>
-                <a:latin typeface="Arial"/>
-              </a:rPr>
-              <a:t>Neudata | #ClearDataClearImpact</a:t>
-            </a:r>
-          </a:p>
-        </p:txBody>
-      </p:sp>
-      <p:pic>
-        <p:nvPicPr>
-          <p:cNvPr id="902" name="Logo"/>
-          <p:cNvPicPr>
-            <a:picLocks noChangeAspect="1"/>
-          </p:cNvPicPr>
-          <p:nvPr/>
-        </p:nvPicPr>
-        <p:blipFill>
-          <a:blip r:embed="rId3"/>
-          <a:stretch>
-            <a:fillRect/>
-          </a:stretch>
-        </p:blipFill>
-        <p:spPr>
-          <a:xfrm>
-            <a:off x="138853" y="6122125"/>
-            <a:ext cx="716763" cy="683623"/>
-          </a:xfrm>
-          <a:prstGeom prst="rect">
-            <a:avLst/>
-          </a:prstGeom>
-        </p:spPr>
-      </p:pic>
-      <p:sp>
-        <p:nvSpPr>
-          <p:cNvPr id="903" name="Slide Number"/>
-          <p:cNvSpPr>
-            <a:spLocks noGrp="1"/>
-          </p:cNvSpPr>
-          <p:nvPr>
-            <p:ph type="sldNum" sz="quarter" idx="12"/>
-          </p:nvPr>
-        </p:nvSpPr>
-        <p:spPr>
-          <a:xfrm>
-            <a:off x="11330000" y="6470000"/>
-            <a:ext cx="620000" cy="320000"/>
-          </a:xfrm>
-        </p:spPr>
-        <p:txBody>
-          <a:bodyPr/>
-          <a:lstStyle/>
-          <a:p>
-            <a:pPr algn="r"/>
-            <a:fld id="{C1FF6DA9-008F-8B48-92A6-B652298478BF}" type="slidenum">
-              <a:rPr lang="en-US" sz="1050" smtClean="0">
-                <a:solidFill>
-                  <a:schemeClr val="accent5">
-                    <a:lumMod val="50000"/>
-                  </a:schemeClr>
-                </a:solidFill>
-              </a:rPr>
-              <a:t>2</a:t>
-            </a:fld>
-            <a:endParaRPr lang="en-US"/>
-          </a:p>
-        </p:txBody>
-      </p:sp>
-    </p:spTree>
-  </p:cSld>
-  <p:clrMapOvr>
-    <a:masterClrMapping/>
-  </p:clrMapOvr>
-</p:sld>
-</file>
-
-<file path=ppt/slides/slide41.xml><?xml version="1.0" encoding="utf-8"?>
-<p:sld xmlns:a="http://schemas.openxmlformats.org/drawingml/2006/main" xmlns:r="http://schemas.openxmlformats.org/officeDocument/2006/relationships" xmlns:p="http://schemas.openxmlformats.org/presentationml/2006/main">
-  <p:cSld>
-    <p:bg>
-      <p:bgPr>
-        <a:solidFill>
-          <a:schemeClr val="bg1"/>
-        </a:solidFill>
-        <a:effectLst/>
-      </p:bgPr>
-    </p:bg>
-    <p:spTree>
-      <p:nvGrpSpPr>
-        <p:cNvPr id="1" name=""/>
-        <p:cNvGrpSpPr/>
-        <p:nvPr/>
-      </p:nvGrpSpPr>
-      <p:grpSpPr>
-        <a:xfrm>
-          <a:off x="0" y="0"/>
-          <a:ext cx="0" cy="0"/>
-          <a:chOff x="0" y="0"/>
-          <a:chExt cx="0" cy="0"/>
-        </a:xfrm>
-      </p:grpSpPr>
-      <p:sp>
-        <p:nvSpPr>
-          <p:cNvPr id="10" name="Title"/>
-          <p:cNvSpPr txBox="1"/>
-          <p:nvPr/>
-        </p:nvSpPr>
-        <p:spPr>
-          <a:xfrm>
-            <a:off x="457200" y="160000"/>
-            <a:ext cx="11277600" cy="750000"/>
-          </a:xfrm>
-          <a:prstGeom prst="rect">
-            <a:avLst/>
-          </a:prstGeom>
-          <a:noFill/>
-          <a:ln>
-            <a:noFill/>
-          </a:ln>
-        </p:spPr>
-        <p:txBody>
-          <a:bodyPr wrap="square" lIns="91440" tIns="45720" rIns="91440" bIns="45720" rtlCol="0" anchor="ctr"/>
-          <a:lstStyle/>
-          <a:p>
-            <a:pPr marL="0" indent="0" algn="l">
-              <a:buNone/>
-            </a:pPr>
-            <a:r>
-              <a:rPr lang="en-US" sz="2800" b="1" dirty="0">
-                <a:solidFill>
-                  <a:srgbClr val="0D7377"/>
-                </a:solidFill>
-                <a:latin typeface="Arial"/>
-                <a:cs typeface="Arial"/>
-              </a:rPr>
-              <a:t>Tổng kết, câu hỏi cuối buổi và bài về nhà</a:t>
-            </a:r>
-          </a:p>
-        </p:txBody>
-      </p:sp>
-      <p:sp>
-        <p:nvSpPr>
-          <p:cNvPr id="11" name="Rule"/>
-          <p:cNvSpPr/>
-          <p:nvPr/>
-        </p:nvSpPr>
-        <p:spPr>
-          <a:xfrm>
-            <a:off x="457200" y="940000"/>
-            <a:ext cx="11277600" cy="0"/>
-          </a:xfrm>
-          <a:prstGeom prst="line">
-            <a:avLst/>
-          </a:prstGeom>
-          <a:ln w="19050">
-            <a:solidFill>
-              <a:srgbClr val="0D7377"/>
-            </a:solidFill>
-          </a:ln>
-        </p:spPr>
-        <p:txBody>
-          <a:bodyPr/>
-          <a:lstStyle/>
-          <a:p>
-            <a:endParaRPr/>
-          </a:p>
-        </p:txBody>
-      </p:sp>
-      <p:sp>
-        <p:nvSpPr>
-          <p:cNvPr id="50" name="Banner"/>
-          <p:cNvSpPr/>
-          <p:nvPr/>
-        </p:nvSpPr>
-        <p:spPr>
-          <a:xfrm>
-            <a:off x="457200" y="1120000"/>
-            <a:ext cx="11277600" cy="470000"/>
-          </a:xfrm>
-          <a:prstGeom prst="rect">
-            <a:avLst/>
-          </a:prstGeom>
-          <a:solidFill>
-            <a:srgbClr val="1F5C7A"/>
-          </a:solidFill>
-          <a:ln>
-            <a:noFill/>
-          </a:ln>
-        </p:spPr>
-        <p:txBody>
-          <a:bodyPr wrap="square" lIns="182880" tIns="45720" rIns="182880" bIns="45720" rtlCol="0" anchor="ctr">
-            <a:normAutofit/>
-          </a:bodyPr>
-          <a:lstStyle/>
-          <a:p>
-            <a:pPr marL="0" indent="0" algn="l">
-              <a:buNone/>
-            </a:pPr>
-            <a:r>
-              <a:rPr lang="en-US" sz="1500" b="1" dirty="0">
-                <a:solidFill>
-                  <a:srgbClr val="FFFFFF"/>
-                </a:solidFill>
-                <a:latin typeface="Arial"/>
-                <a:cs typeface="Arial"/>
-              </a:rPr>
-              <a:t>THẢO LUẬN   |   7 phút</a:t>
-            </a:r>
-          </a:p>
-        </p:txBody>
-      </p:sp>
-      <p:sp>
-        <p:nvSpPr>
-          <p:cNvPr id="51" name="Steps"/>
-          <p:cNvSpPr txBox="1"/>
-          <p:nvPr/>
-        </p:nvSpPr>
-        <p:spPr>
-          <a:xfrm>
-            <a:off x="457200" y="1720000"/>
-            <a:ext cx="6766560" cy="3510000"/>
-          </a:xfrm>
-          <a:prstGeom prst="rect">
-            <a:avLst/>
-          </a:prstGeom>
-          <a:noFill/>
-          <a:ln>
-            <a:noFill/>
-          </a:ln>
-        </p:spPr>
-        <p:txBody>
-          <a:bodyPr wrap="square" lIns="91440" tIns="45720" rIns="91440" bIns="45720" rtlCol="0" anchor="t"/>
-          <a:lstStyle/>
-          <a:p>
-            <a:pPr marL="380000" indent="-380000" algn="l">
-              <a:lnSpc>
-                <a:spcPct val="104000"/>
-              </a:lnSpc>
-              <a:spcBef>
-                <a:spcPts val="450"/>
-              </a:spcBef>
-              <a:buClr>
-                <a:srgbClr val="1F5C7A"/>
-              </a:buClr>
-              <a:buFont typeface="Arial"/>
-              <a:buChar char="•"/>
-            </a:pPr>
-            <a:r>
-              <a:rPr lang="en-US" sz="1650" dirty="0">
-                <a:solidFill>
-                  <a:srgbClr val="000000"/>
-                </a:solidFill>
-                <a:latin typeface="Arial"/>
-                <a:cs typeface="Arial"/>
-              </a:rPr>
-              <a:t>Ba thông điệp mang về (bên phải)</a:t>
-            </a:r>
-          </a:p>
-          <a:p>
-            <a:pPr marL="380000" indent="-380000" algn="l">
-              <a:lnSpc>
-                <a:spcPct val="104000"/>
-              </a:lnSpc>
-              <a:spcBef>
-                <a:spcPts val="450"/>
-              </a:spcBef>
-              <a:buClr>
-                <a:srgbClr val="1F5C7A"/>
-              </a:buClr>
-              <a:buFont typeface="Arial"/>
-              <a:buChar char="•"/>
-            </a:pPr>
-            <a:r>
-              <a:rPr lang="en-US" sz="1650" dirty="0">
-                <a:solidFill>
-                  <a:srgbClr val="000000"/>
-                </a:solidFill>
-                <a:latin typeface="Arial"/>
-                <a:cs typeface="Arial"/>
-              </a:rPr>
-              <a:t>Câu hỏi cuối buổi trong khung chat: 'Ai đồng ý cho người bệnh sốc nhiễm khuẩn đang an thần, và khi nào?'</a:t>
-            </a:r>
-          </a:p>
-          <a:p>
-            <a:pPr marL="380000" indent="-380000" algn="l">
-              <a:lnSpc>
-                <a:spcPct val="104000"/>
-              </a:lnSpc>
-              <a:spcBef>
-                <a:spcPts val="450"/>
-              </a:spcBef>
-              <a:buClr>
-                <a:srgbClr val="1F5C7A"/>
-              </a:buClr>
-              <a:buFont typeface="Arial"/>
-              <a:buChar char="•"/>
-            </a:pPr>
-            <a:r>
-              <a:rPr lang="en-US" sz="1650" dirty="0">
-                <a:solidFill>
-                  <a:srgbClr val="000000"/>
-                </a:solidFill>
-                <a:latin typeface="Arial"/>
-                <a:cs typeface="Arial"/>
-              </a:rPr>
-              <a:t>Bài về nhà 1: viết Phần 4 cho đề cương của bạn</a:t>
-            </a:r>
-          </a:p>
-          <a:p>
-            <a:pPr marL="380000" indent="-380000" algn="l">
-              <a:lnSpc>
-                <a:spcPct val="104000"/>
-              </a:lnSpc>
-              <a:spcBef>
-                <a:spcPts val="450"/>
-              </a:spcBef>
-              <a:buClr>
-                <a:srgbClr val="1F5C7A"/>
-              </a:buClr>
-              <a:buFont typeface="Arial"/>
-              <a:buChar char="•"/>
-            </a:pPr>
-            <a:r>
-              <a:rPr lang="en-US" sz="1650" dirty="0">
-                <a:solidFill>
-                  <a:srgbClr val="000000"/>
-                </a:solidFill>
-                <a:latin typeface="Arial"/>
-                <a:cs typeface="Arial"/>
-              </a:rPr>
-              <a:t>Bài về nhà 2: viết phần Kết quả (hạn 23:59 ngày học Buổi 8)</a:t>
-            </a:r>
-          </a:p>
-          <a:p>
-            <a:pPr marL="380000" indent="-380000" algn="l">
-              <a:lnSpc>
-                <a:spcPct val="104000"/>
-              </a:lnSpc>
-              <a:spcBef>
-                <a:spcPts val="450"/>
-              </a:spcBef>
-              <a:buClr>
-                <a:srgbClr val="1F5C7A"/>
-              </a:buClr>
-              <a:buFont typeface="Arial"/>
-              <a:buChar char="•"/>
-            </a:pPr>
-            <a:r>
-              <a:rPr lang="en-US" sz="1650" dirty="0">
-                <a:solidFill>
-                  <a:srgbClr val="000000"/>
-                </a:solidFill>
-                <a:latin typeface="Arial"/>
-                <a:cs typeface="Arial"/>
-              </a:rPr>
-              <a:t>Bài về nhà 3: chuẩn bị 6 slide trình bày (mọi người đều nộp)</a:t>
-            </a:r>
-          </a:p>
-        </p:txBody>
-      </p:sp>
-      <p:sp>
-        <p:nvSpPr>
-          <p:cNvPr id="52" name="Side"/>
-          <p:cNvSpPr/>
-          <p:nvPr/>
-        </p:nvSpPr>
-        <p:spPr>
-          <a:xfrm>
-            <a:off x="7423760" y="1720000"/>
-            <a:ext cx="4311040" cy="2168030"/>
-          </a:xfrm>
-          <a:prstGeom prst="roundRect">
-            <a:avLst>
-              <a:gd name="adj" fmla="val 5000"/>
-            </a:avLst>
-          </a:prstGeom>
-          <a:solidFill>
-            <a:srgbClr val="EAF2F5"/>
-          </a:solidFill>
-          <a:ln>
-            <a:noFill/>
-          </a:ln>
-        </p:spPr>
-        <p:txBody>
-          <a:bodyPr wrap="square" lIns="137160" tIns="91440" rIns="137160" bIns="91440" rtlCol="0" anchor="ctr">
-            <a:normAutofit/>
-          </a:bodyPr>
-          <a:lstStyle/>
-          <a:p>
-            <a:pPr marL="0" indent="0" algn="ctr">
-              <a:buNone/>
-            </a:pPr>
-            <a:r>
-              <a:rPr lang="en-US" sz="1600" b="1" dirty="0">
-                <a:solidFill>
-                  <a:srgbClr val="1F5C7A"/>
-                </a:solidFill>
-                <a:latin typeface="Arial"/>
-                <a:cs typeface="Arial"/>
-              </a:rPr>
-              <a:t>Mang về</a:t>
-            </a:r>
-          </a:p>
-          <a:p>
-            <a:pPr marL="0" indent="0" algn="ctr">
-              <a:lnSpc>
-                <a:spcPct val="104000"/>
-              </a:lnSpc>
-              <a:spcBef>
-                <a:spcPts val="300"/>
-              </a:spcBef>
-              <a:buNone/>
-            </a:pPr>
-            <a:r>
-              <a:rPr lang="en-US" sz="1500" dirty="0">
-                <a:solidFill>
-                  <a:srgbClr val="000000"/>
-                </a:solidFill>
-                <a:latin typeface="Arial"/>
-                <a:cs typeface="Arial"/>
-              </a:rPr>
-              <a:t>Chưa phê duyệt thì không có dữ liệu, kể cả 'vài ca'</a:t>
-            </a:r>
-          </a:p>
-          <a:p>
-            <a:pPr marL="0" indent="0" algn="ctr">
-              <a:lnSpc>
-                <a:spcPct val="104000"/>
-              </a:lnSpc>
-              <a:spcBef>
-                <a:spcPts val="300"/>
-              </a:spcBef>
-              <a:buNone/>
-            </a:pPr>
-            <a:r>
-              <a:rPr lang="en-US" sz="1500" dirty="0">
-                <a:solidFill>
-                  <a:srgbClr val="000000"/>
-                </a:solidFill>
-                <a:latin typeface="Arial"/>
-                <a:cs typeface="Arial"/>
-              </a:rPr>
-              <a:t>Mọi tác giả đủ bốn tiêu chí. Khai báo mọi lợi ích</a:t>
-            </a:r>
-          </a:p>
-          <a:p>
-            <a:pPr marL="0" indent="0" algn="ctr">
-              <a:lnSpc>
-                <a:spcPct val="104000"/>
-              </a:lnSpc>
-              <a:spcBef>
-                <a:spcPts val="300"/>
-              </a:spcBef>
-              <a:buNone/>
-            </a:pPr>
-            <a:r>
-              <a:rPr lang="en-US" sz="1500" dirty="0">
-                <a:solidFill>
-                  <a:srgbClr val="000000"/>
-                </a:solidFill>
-                <a:latin typeface="Arial"/>
-                <a:cs typeface="Arial"/>
-              </a:rPr>
-              <a:t>Kết quả = con số kèm KTC, không bình luận</a:t>
-            </a:r>
-          </a:p>
-        </p:txBody>
-      </p:sp>
-      <p:sp>
-        <p:nvSpPr>
-          <p:cNvPr id="53" name="Deliverable"/>
-          <p:cNvSpPr/>
-          <p:nvPr/>
-        </p:nvSpPr>
-        <p:spPr>
-          <a:xfrm>
-            <a:off x="457200" y="5350000"/>
-            <a:ext cx="11277600" cy="600000"/>
-          </a:xfrm>
-          <a:prstGeom prst="roundRect">
-            <a:avLst>
-              <a:gd name="adj" fmla="val 12000"/>
-            </a:avLst>
-          </a:prstGeom>
-          <a:solidFill>
-            <a:srgbClr val="FFFFFF"/>
-          </a:solidFill>
-          <a:ln w="15875">
-            <a:solidFill>
-              <a:srgbClr val="1F5C7A"/>
-            </a:solidFill>
-          </a:ln>
-        </p:spPr>
-        <p:txBody>
-          <a:bodyPr wrap="square" lIns="182880" tIns="45720" rIns="182880" bIns="45720" rtlCol="0" anchor="ctr">
-            <a:normAutofit/>
-          </a:bodyPr>
-          <a:lstStyle/>
-          <a:p>
-            <a:pPr marL="0" indent="0" algn="ctr">
-              <a:buNone/>
-            </a:pPr>
-            <a:r>
-              <a:rPr lang="en-US" sz="1300" b="1" dirty="0">
-                <a:solidFill>
-                  <a:srgbClr val="1F5C7A"/>
-                </a:solidFill>
-                <a:latin typeface="Arial"/>
-                <a:cs typeface="Arial"/>
-              </a:rPr>
-              <a:t>SẢN PHẨM   </a:t>
-            </a:r>
-            <a:r>
-              <a:rPr lang="en-US" sz="1500" dirty="0">
-                <a:solidFill>
-                  <a:srgbClr val="000000"/>
-                </a:solidFill>
-                <a:latin typeface="Arial"/>
-                <a:cs typeface="Arial"/>
-              </a:rPr>
-              <a:t>Câu trả lời cuối buổi được đọc trước Buổi 8. Phần 4 và phần Kết quả đã soạn</a:t>
+              <a:t>Người bình duyệt được phân công ngẫu nhiên: xem danh sách trên màn hình và trong email. Email giảng viên Vương Mỹ Lượng: myluong1710@gmail.com</a:t>
             </a:r>
           </a:p>
         </p:txBody>
@@ -28063,7 +27791,7 @@
                 <a:latin typeface="Arial"/>
                 <a:cs typeface="Arial"/>
               </a:rPr>
-              <a:t>Slide bổ sung  |  Buổi 7</a:t>
+              <a:t>Tổng kết, câu hỏi cuối buổi và bài về nhà</a:t>
             </a:r>
           </a:p>
         </p:txBody>
@@ -28098,14 +27826,57 @@
       </p:sp>
       <p:sp>
         <p:nvSpPr>
-          <p:cNvPr id="20" name="Statement"/>
+          <p:cNvPr id="50" name="Banner"/>
+          <p:cNvSpPr/>
+          <p:nvPr/>
+        </p:nvSpPr>
+        <p:spPr>
+          <a:xfrm>
+            <a:off x="457200" y="1120000"/>
+            <a:ext cx="11277600" cy="470000"/>
+          </a:xfrm>
+          <a:prstGeom prst="rect">
+            <a:avLst/>
+          </a:prstGeom>
+          <a:solidFill>
+            <a:srgbClr val="1F5C7A"/>
+          </a:solidFill>
+          <a:ln>
+            <a:noFill/>
+          </a:ln>
+        </p:spPr>
+        <p:txBody>
+          <a:bodyPr wrap="square" lIns="182880" tIns="45720" rIns="182880" bIns="45720" rtlCol="0" anchor="ctr">
+            <a:normAutofit/>
+          </a:bodyPr>
+          <a:lstStyle/>
+          <a:p>
+            <a:pPr marL="0" indent="0" algn="l">
+              <a:buNone/>
+            </a:pPr>
+            <a:r>
+              <a:rPr lang="en-US" sz="1500" b="1" dirty="0">
+                <a:solidFill>
+                  <a:srgbClr val="FFFFFF"/>
+                </a:solidFill>
+                <a:latin typeface="Arial"/>
+                <a:cs typeface="Arial"/>
+              </a:rPr>
+              <a:t>THẢO LUẬN   |   6 phút</a:t>
+            </a:r>
+          </a:p>
+        </p:txBody>
+      </p:sp>
+      <p:sp>
+        <p:nvSpPr>
+          <p:cNvPr id="51" name="Steps"/>
           <p:cNvSpPr txBox="1"/>
           <p:nvPr/>
         </p:nvSpPr>
         <p:spPr>
           <a:xfrm>
-            <a:off x="1057200" y="1280000"/>
-            <a:ext cx="10077600" cy="4470000"/>
+            <a:off x="457200" y="1720000"/>
+            <a:ext cx="6766560" cy="3510000"/>
           </a:xfrm>
           <a:prstGeom prst="rect">
             <a:avLst/>
@@ -28116,42 +27887,296 @@
           </a:ln>
         </p:spPr>
         <p:txBody>
-          <a:bodyPr wrap="square" lIns="91440" tIns="45720" rIns="91440" bIns="45720" rtlCol="0" anchor="ctr"/>
-          <a:lstStyle/>
+          <a:bodyPr wrap="square" lIns="91440" tIns="45720" rIns="91440" bIns="45720" rtlCol="0" anchor="t"/>
+          <a:lstStyle/>
+          <a:p>
+            <a:pPr marL="380000" indent="-380000" algn="l">
+              <a:lnSpc>
+                <a:spcPct val="104000"/>
+              </a:lnSpc>
+              <a:spcBef>
+                <a:spcPts val="450"/>
+              </a:spcBef>
+              <a:buClr>
+                <a:srgbClr val="1F5C7A"/>
+              </a:buClr>
+              <a:buFont typeface="Arial"/>
+              <a:buChar char="•"/>
+            </a:pPr>
+            <a:r>
+              <a:rPr lang="en-US" sz="1650" dirty="0">
+                <a:solidFill>
+                  <a:srgbClr val="000000"/>
+                </a:solidFill>
+                <a:latin typeface="Arial"/>
+                <a:cs typeface="Arial"/>
+              </a:rPr>
+              <a:t>Ba thông điệp mang về (bên phải)</a:t>
+            </a:r>
+          </a:p>
+          <a:p>
+            <a:pPr marL="380000" indent="-380000" algn="l">
+              <a:lnSpc>
+                <a:spcPct val="104000"/>
+              </a:lnSpc>
+              <a:spcBef>
+                <a:spcPts val="450"/>
+              </a:spcBef>
+              <a:buClr>
+                <a:srgbClr val="1F5C7A"/>
+              </a:buClr>
+              <a:buFont typeface="Arial"/>
+              <a:buChar char="•"/>
+            </a:pPr>
+            <a:r>
+              <a:rPr lang="en-US" sz="1650" dirty="0">
+                <a:solidFill>
+                  <a:srgbClr val="000000"/>
+                </a:solidFill>
+                <a:latin typeface="Arial"/>
+                <a:cs typeface="Arial"/>
+              </a:rPr>
+              <a:t>Câu hỏi cuối buổi trong khung chat: 'Ai đồng ý cho người bệnh sốc nhiễm khuẩn đang an thần, và khi nào?'</a:t>
+            </a:r>
+          </a:p>
+          <a:p>
+            <a:pPr marL="380000" indent="-380000" algn="l">
+              <a:lnSpc>
+                <a:spcPct val="104000"/>
+              </a:lnSpc>
+              <a:spcBef>
+                <a:spcPts val="450"/>
+              </a:spcBef>
+              <a:buClr>
+                <a:srgbClr val="1F5C7A"/>
+              </a:buClr>
+              <a:buFont typeface="Arial"/>
+              <a:buChar char="•"/>
+            </a:pPr>
+            <a:r>
+              <a:rPr lang="en-US" sz="1650" dirty="0">
+                <a:solidFill>
+                  <a:srgbClr val="000000"/>
+                </a:solidFill>
+                <a:latin typeface="Arial"/>
+                <a:cs typeface="Arial"/>
+              </a:rPr>
+              <a:t>Bài về nhà 1: viết Phần 4 cho đề cương của bạn</a:t>
+            </a:r>
+          </a:p>
+          <a:p>
+            <a:pPr marL="380000" indent="-380000" algn="l">
+              <a:lnSpc>
+                <a:spcPct val="104000"/>
+              </a:lnSpc>
+              <a:spcBef>
+                <a:spcPts val="450"/>
+              </a:spcBef>
+              <a:buClr>
+                <a:srgbClr val="1F5C7A"/>
+              </a:buClr>
+              <a:buFont typeface="Arial"/>
+              <a:buChar char="•"/>
+            </a:pPr>
+            <a:r>
+              <a:rPr lang="en-US" sz="1650" dirty="0">
+                <a:solidFill>
+                  <a:srgbClr val="000000"/>
+                </a:solidFill>
+                <a:latin typeface="Arial"/>
+                <a:cs typeface="Arial"/>
+              </a:rPr>
+              <a:t>Bài về nhà 2: viết phần Kết quả (hạn 23:59 Chủ nhật 20/12)</a:t>
+            </a:r>
+          </a:p>
+          <a:p>
+            <a:pPr marL="380000" indent="-380000" algn="l">
+              <a:lnSpc>
+                <a:spcPct val="104000"/>
+              </a:lnSpc>
+              <a:spcBef>
+                <a:spcPts val="450"/>
+              </a:spcBef>
+              <a:buClr>
+                <a:srgbClr val="1F5C7A"/>
+              </a:buClr>
+              <a:buFont typeface="Arial"/>
+              <a:buChar char="•"/>
+            </a:pPr>
+            <a:r>
+              <a:rPr lang="en-US" sz="1650" dirty="0">
+                <a:solidFill>
+                  <a:srgbClr val="000000"/>
+                </a:solidFill>
+                <a:latin typeface="Arial"/>
+                <a:cs typeface="Arial"/>
+              </a:rPr>
+              <a:t>Bài về nhà 3: chuẩn bị 6 slide trình bày (mọi người đều nộp)</a:t>
+            </a:r>
+          </a:p>
+        </p:txBody>
+      </p:sp>
+      <p:sp>
+        <p:nvSpPr>
+          <p:cNvPr id="52" name="Side"/>
+          <p:cNvSpPr/>
+          <p:nvPr/>
+        </p:nvSpPr>
+        <p:spPr>
+          <a:xfrm>
+            <a:off x="7423760" y="1720000"/>
+            <a:ext cx="4311040" cy="2168030"/>
+          </a:xfrm>
+          <a:prstGeom prst="roundRect">
+            <a:avLst>
+              <a:gd name="adj" fmla="val 5000"/>
+            </a:avLst>
+          </a:prstGeom>
+          <a:solidFill>
+            <a:srgbClr val="EAF2F5"/>
+          </a:solidFill>
+          <a:ln>
+            <a:noFill/>
+          </a:ln>
+        </p:spPr>
+        <p:txBody>
+          <a:bodyPr wrap="square" lIns="137160" tIns="91440" rIns="137160" bIns="91440" rtlCol="0" anchor="ctr">
+            <a:normAutofit/>
+          </a:bodyPr>
+          <a:lstStyle/>
+          <a:p>
+            <a:pPr marL="0" indent="0" algn="ctr">
+              <a:buNone/>
+            </a:pPr>
+            <a:r>
+              <a:rPr lang="en-US" sz="1600" b="1" dirty="0">
+                <a:solidFill>
+                  <a:srgbClr val="1F5C7A"/>
+                </a:solidFill>
+                <a:latin typeface="Arial"/>
+                <a:cs typeface="Arial"/>
+              </a:rPr>
+              <a:t>Mang về</a:t>
+            </a:r>
+          </a:p>
           <a:p>
             <a:pPr marL="0" indent="0" algn="ctr">
               <a:lnSpc>
-                <a:spcPct val="110000"/>
+                <a:spcPct val="104000"/>
               </a:lnSpc>
-              <a:buNone/>
-            </a:pPr>
-            <a:r>
-              <a:rPr lang="en-US" sz="3200" b="1" dirty="0">
-                <a:solidFill>
-                  <a:srgbClr val="0D7377"/>
-                </a:solidFill>
-                <a:latin typeface="Arial"/>
-                <a:cs typeface="Arial"/>
-              </a:rPr>
-              <a:t>Slide bổ sung: Buổi 7</a:t>
+              <a:spcBef>
+                <a:spcPts val="300"/>
+              </a:spcBef>
+              <a:buNone/>
+            </a:pPr>
+            <a:r>
+              <a:rPr lang="en-US" sz="1500" dirty="0">
+                <a:solidFill>
+                  <a:srgbClr val="000000"/>
+                </a:solidFill>
+                <a:latin typeface="Arial"/>
+                <a:cs typeface="Arial"/>
+              </a:rPr>
+              <a:t>Chưa phê duyệt thì không có dữ liệu, kể cả 'vài ca'</a:t>
             </a:r>
           </a:p>
           <a:p>
             <a:pPr marL="0" indent="0" algn="ctr">
+              <a:lnSpc>
+                <a:spcPct val="104000"/>
+              </a:lnSpc>
               <a:spcBef>
-                <a:spcPts val="1200"/>
+                <a:spcPts val="300"/>
               </a:spcBef>
               <a:buNone/>
             </a:pPr>
             <a:r>
-              <a:rPr lang="en-US" sz="1900" i="1" dirty="0">
-                <a:solidFill>
-                  <a:srgbClr val="595959"/>
-                </a:solidFill>
-                <a:latin typeface="Arial"/>
-                <a:cs typeface="Arial"/>
-              </a:rPr>
-              <a:t>Chỉ dùng khi còn thời gian, hoặc để tự học</a:t>
+              <a:rPr lang="en-US" sz="1500" dirty="0">
+                <a:solidFill>
+                  <a:srgbClr val="000000"/>
+                </a:solidFill>
+                <a:latin typeface="Arial"/>
+                <a:cs typeface="Arial"/>
+              </a:rPr>
+              <a:t>Mọi tác giả đủ bốn tiêu chí. Khai báo mọi lợi ích</a:t>
+            </a:r>
+          </a:p>
+          <a:p>
+            <a:pPr marL="0" indent="0" algn="ctr">
+              <a:lnSpc>
+                <a:spcPct val="104000"/>
+              </a:lnSpc>
+              <a:spcBef>
+                <a:spcPts val="300"/>
+              </a:spcBef>
+              <a:buNone/>
+            </a:pPr>
+            <a:r>
+              <a:rPr lang="en-US" sz="1500" dirty="0">
+                <a:solidFill>
+                  <a:srgbClr val="000000"/>
+                </a:solidFill>
+                <a:latin typeface="Arial"/>
+                <a:cs typeface="Arial"/>
+              </a:rPr>
+              <a:t>Kết quả = con số kèm KTC, không bình luận</a:t>
+            </a:r>
+          </a:p>
+        </p:txBody>
+      </p:sp>
+      <p:sp>
+        <p:nvSpPr>
+          <p:cNvPr id="53" name="Deliverable"/>
+          <p:cNvSpPr/>
+          <p:nvPr/>
+        </p:nvSpPr>
+        <p:spPr>
+          <a:xfrm>
+            <a:off x="457200" y="5350000"/>
+            <a:ext cx="11277600" cy="600000"/>
+          </a:xfrm>
+          <a:prstGeom prst="roundRect">
+            <a:avLst>
+              <a:gd name="adj" fmla="val 12000"/>
+            </a:avLst>
+          </a:prstGeom>
+          <a:solidFill>
+            <a:srgbClr val="FFFFFF"/>
+          </a:solidFill>
+          <a:ln w="15875">
+            <a:solidFill>
+              <a:srgbClr val="1F5C7A"/>
+            </a:solidFill>
+          </a:ln>
+        </p:spPr>
+        <p:txBody>
+          <a:bodyPr wrap="square" lIns="182880" tIns="45720" rIns="182880" bIns="45720" rtlCol="0" anchor="ctr">
+            <a:normAutofit/>
+          </a:bodyPr>
+          <a:lstStyle/>
+          <a:p>
+            <a:pPr marL="0" indent="0" algn="ctr">
+              <a:buNone/>
+            </a:pPr>
+            <a:r>
+              <a:rPr lang="en-US" sz="1300" b="1" dirty="0">
+                <a:solidFill>
+                  <a:srgbClr val="1F5C7A"/>
+                </a:solidFill>
+                <a:latin typeface="Arial"/>
+                <a:cs typeface="Arial"/>
+              </a:rPr>
+              <a:t>SẢN PHẨM   </a:t>
+            </a:r>
+            <a:r>
+              <a:rPr lang="en-US" sz="1500" dirty="0">
+                <a:solidFill>
+                  <a:srgbClr val="000000"/>
+                </a:solidFill>
+                <a:latin typeface="Arial"/>
+                <a:cs typeface="Arial"/>
+              </a:rPr>
+              <a:t>Câu trả lời cuối buổi được đọc trước Buổi 8. Phần 4 và phần Kết quả đã soạn</a:t>
             </a:r>
           </a:p>
         </p:txBody>
@@ -28319,7 +28344,7 @@
                 <a:latin typeface="Arial"/>
                 <a:cs typeface="Arial"/>
               </a:rPr>
-              <a:t>Kiểm tra: có cần đăng ký không?</a:t>
+              <a:t>Slide bổ sung  |  Buổi 7</a:t>
             </a:r>
           </a:p>
         </p:txBody>
@@ -28354,57 +28379,14 @@
       </p:sp>
       <p:sp>
         <p:nvSpPr>
-          <p:cNvPr id="50" name="Banner"/>
-          <p:cNvSpPr/>
-          <p:nvPr/>
-        </p:nvSpPr>
-        <p:spPr>
-          <a:xfrm>
-            <a:off x="457200" y="1120000"/>
-            <a:ext cx="11277600" cy="470000"/>
-          </a:xfrm>
-          <a:prstGeom prst="rect">
-            <a:avLst/>
-          </a:prstGeom>
-          <a:solidFill>
-            <a:srgbClr val="6C3483"/>
-          </a:solidFill>
-          <a:ln>
-            <a:noFill/>
-          </a:ln>
-        </p:spPr>
-        <p:txBody>
-          <a:bodyPr wrap="square" lIns="182880" tIns="45720" rIns="182880" bIns="45720" rtlCol="0" anchor="ctr">
-            <a:normAutofit/>
-          </a:bodyPr>
-          <a:lstStyle/>
-          <a:p>
-            <a:pPr marL="0" indent="0" algn="l">
-              <a:buNone/>
-            </a:pPr>
-            <a:r>
-              <a:rPr lang="en-US" sz="1500" b="1" dirty="0">
-                <a:solidFill>
-                  <a:srgbClr val="FFFFFF"/>
-                </a:solidFill>
-                <a:latin typeface="Arial"/>
-                <a:cs typeface="Arial"/>
-              </a:rPr>
-              <a:t>CÂU HỎI NHANH   |   2 phút</a:t>
-            </a:r>
-          </a:p>
-        </p:txBody>
-      </p:sp>
-      <p:sp>
-        <p:nvSpPr>
-          <p:cNvPr id="51" name="Steps"/>
+          <p:cNvPr id="20" name="Statement"/>
           <p:cNvSpPr txBox="1"/>
           <p:nvPr/>
         </p:nvSpPr>
         <p:spPr>
           <a:xfrm>
-            <a:off x="457200" y="1720000"/>
-            <a:ext cx="6766560" cy="4230000"/>
+            <a:off x="1057200" y="1280000"/>
+            <a:ext cx="10077600" cy="4470000"/>
           </a:xfrm>
           <a:prstGeom prst="rect">
             <a:avLst/>
@@ -28415,235 +28397,42 @@
           </a:ln>
         </p:spPr>
         <p:txBody>
-          <a:bodyPr wrap="square" lIns="91440" tIns="45720" rIns="91440" bIns="45720" rtlCol="0" anchor="t"/>
-          <a:lstStyle/>
-          <a:p>
-            <a:pPr marL="380000" indent="-380000" algn="l">
-              <a:lnSpc>
-                <a:spcPct val="104000"/>
-              </a:lnSpc>
-              <a:spcBef>
-                <a:spcPts val="450"/>
-              </a:spcBef>
-              <a:buClr>
-                <a:srgbClr val="6C3483"/>
-              </a:buClr>
-              <a:buFont typeface="Arial"/>
-              <a:buChar char="•"/>
-            </a:pPr>
-            <a:r>
-              <a:rPr lang="en-US" sz="1650" dirty="0">
-                <a:solidFill>
-                  <a:srgbClr val="000000"/>
-                </a:solidFill>
-                <a:latin typeface="Arial"/>
-                <a:cs typeface="Arial"/>
-              </a:rPr>
-              <a:t>Thử nghiệm ngẫu nhiên so sánh hạn chế dịch với dịch thông thường trong sốc nhiễm khuẩn</a:t>
-            </a:r>
-          </a:p>
-          <a:p>
-            <a:pPr marL="380000" indent="-380000" algn="l">
-              <a:lnSpc>
-                <a:spcPct val="104000"/>
-              </a:lnSpc>
-              <a:spcBef>
-                <a:spcPts val="450"/>
-              </a:spcBef>
-              <a:buClr>
-                <a:srgbClr val="6C3483"/>
-              </a:buClr>
-              <a:buFont typeface="Arial"/>
-              <a:buChar char="•"/>
-            </a:pPr>
-            <a:r>
-              <a:rPr lang="en-US" sz="1650" dirty="0">
-                <a:solidFill>
-                  <a:srgbClr val="000000"/>
-                </a:solidFill>
-                <a:latin typeface="Arial"/>
-                <a:cs typeface="Arial"/>
-              </a:rPr>
-              <a:t>Tổng quan hệ thống về chiến lược dịch truyền trong nhiễm khuẩn huyết</a:t>
-            </a:r>
-          </a:p>
-          <a:p>
-            <a:pPr marL="380000" indent="-380000" algn="l">
-              <a:lnSpc>
-                <a:spcPct val="104000"/>
-              </a:lnSpc>
-              <a:spcBef>
-                <a:spcPts val="450"/>
-              </a:spcBef>
-              <a:buClr>
-                <a:srgbClr val="6C3483"/>
-              </a:buClr>
-              <a:buFont typeface="Arial"/>
-              <a:buChar char="•"/>
-            </a:pPr>
-            <a:r>
-              <a:rPr lang="en-US" sz="1650" dirty="0">
-                <a:solidFill>
-                  <a:srgbClr val="000000"/>
-                </a:solidFill>
-                <a:latin typeface="Arial"/>
-                <a:cs typeface="Arial"/>
-              </a:rPr>
-              <a:t>Nghiên cứu thuần tập hồi cứu từ hồ sơ ICU (như FLUID-ICU)</a:t>
-            </a:r>
-          </a:p>
-          <a:p>
-            <a:pPr marL="380000" indent="-380000" algn="l">
-              <a:lnSpc>
-                <a:spcPct val="104000"/>
-              </a:lnSpc>
-              <a:spcBef>
-                <a:spcPts val="450"/>
-              </a:spcBef>
-              <a:buClr>
-                <a:srgbClr val="6C3483"/>
-              </a:buClr>
-              <a:buFont typeface="Arial"/>
-              <a:buChar char="•"/>
-            </a:pPr>
-            <a:r>
-              <a:rPr lang="en-US" sz="1650" dirty="0">
-                <a:solidFill>
-                  <a:srgbClr val="000000"/>
-                </a:solidFill>
-                <a:latin typeface="Arial"/>
-                <a:cs typeface="Arial"/>
-              </a:rPr>
-              <a:t>Đánh giá lâm sàng (audit) việc ghi phiếu cân bằng dịch so với chuẩn của khoa</a:t>
-            </a:r>
-          </a:p>
-        </p:txBody>
-      </p:sp>
-      <p:sp>
-        <p:nvSpPr>
-          <p:cNvPr id="52" name="Side"/>
-          <p:cNvSpPr/>
-          <p:nvPr/>
-        </p:nvSpPr>
-        <p:spPr>
-          <a:xfrm>
-            <a:off x="7423760" y="1720000"/>
-            <a:ext cx="4311040" cy="2206130"/>
-          </a:xfrm>
-          <a:prstGeom prst="roundRect">
-            <a:avLst>
-              <a:gd name="adj" fmla="val 5000"/>
-            </a:avLst>
-          </a:prstGeom>
-          <a:solidFill>
-            <a:srgbClr val="EAF2F5"/>
-          </a:solidFill>
-          <a:ln>
-            <a:noFill/>
-          </a:ln>
-        </p:spPr>
-        <p:txBody>
-          <a:bodyPr wrap="square" lIns="137160" tIns="91440" rIns="137160" bIns="91440" rtlCol="0" anchor="ctr">
-            <a:normAutofit/>
-          </a:bodyPr>
-          <a:lstStyle/>
-          <a:p>
-            <a:pPr marL="0" indent="0" algn="ctr">
-              <a:buNone/>
-            </a:pPr>
-            <a:r>
-              <a:rPr lang="en-US" sz="1600" b="1" dirty="0">
-                <a:solidFill>
-                  <a:srgbClr val="6C3483"/>
-                </a:solidFill>
-                <a:latin typeface="Arial"/>
-                <a:cs typeface="Arial"/>
-              </a:rPr>
-              <a:t>Đáp án</a:t>
-            </a:r>
-          </a:p>
+          <a:bodyPr wrap="square" lIns="91440" tIns="45720" rIns="91440" bIns="45720" rtlCol="0" anchor="ctr"/>
+          <a:lstStyle/>
           <a:p>
             <a:pPr marL="0" indent="0" algn="ctr">
               <a:lnSpc>
-                <a:spcPct val="104000"/>
+                <a:spcPct val="110000"/>
               </a:lnSpc>
+              <a:buNone/>
+            </a:pPr>
+            <a:r>
+              <a:rPr lang="en-US" sz="3200" b="1" dirty="0">
+                <a:solidFill>
+                  <a:srgbClr val="0D7377"/>
+                </a:solidFill>
+                <a:latin typeface="Arial"/>
+                <a:cs typeface="Arial"/>
+              </a:rPr>
+              <a:t>Slide bổ sung: Buổi 7</a:t>
+            </a:r>
+          </a:p>
+          <a:p>
+            <a:pPr marL="0" indent="0" algn="ctr">
               <a:spcBef>
-                <a:spcPts val="300"/>
+                <a:spcPts val="1200"/>
               </a:spcBef>
               <a:buNone/>
             </a:pPr>
             <a:r>
-              <a:rPr lang="en-US" sz="1500" dirty="0">
-                <a:solidFill>
-                  <a:srgbClr val="000000"/>
-                </a:solidFill>
-                <a:latin typeface="Arial"/>
-                <a:cs typeface="Arial"/>
-              </a:rPr>
-              <a:t>Bắt buộc: cơ sở đăng ký thử nghiệm, trước người bệnh đầu tiên</a:t>
-            </a:r>
-          </a:p>
-          <a:p>
-            <a:pPr marL="0" indent="0" algn="ctr">
-              <a:lnSpc>
-                <a:spcPct val="104000"/>
-              </a:lnSpc>
-              <a:spcBef>
-                <a:spcPts val="300"/>
-              </a:spcBef>
-              <a:buNone/>
-            </a:pPr>
-            <a:r>
-              <a:rPr lang="en-US" sz="1500" dirty="0">
-                <a:solidFill>
-                  <a:srgbClr val="000000"/>
-                </a:solidFill>
-                <a:latin typeface="Arial"/>
-                <a:cs typeface="Arial"/>
-              </a:rPr>
-              <a:t>Nên: PROSPERO</a:t>
-            </a:r>
-          </a:p>
-          <a:p>
-            <a:pPr marL="0" indent="0" algn="ctr">
-              <a:lnSpc>
-                <a:spcPct val="104000"/>
-              </a:lnSpc>
-              <a:spcBef>
-                <a:spcPts val="300"/>
-              </a:spcBef>
-              <a:buNone/>
-            </a:pPr>
-            <a:r>
-              <a:rPr lang="en-US" sz="1500" dirty="0">
-                <a:solidFill>
-                  <a:srgbClr val="000000"/>
-                </a:solidFill>
-                <a:latin typeface="Arial"/>
-                <a:cs typeface="Arial"/>
-              </a:rPr>
-              <a:t>Khuyến khích, không bắt buộc</a:t>
-            </a:r>
-          </a:p>
-          <a:p>
-            <a:pPr marL="0" indent="0" algn="ctr">
-              <a:lnSpc>
-                <a:spcPct val="104000"/>
-              </a:lnSpc>
-              <a:spcBef>
-                <a:spcPts val="300"/>
-              </a:spcBef>
-              <a:buNone/>
-            </a:pPr>
-            <a:r>
-              <a:rPr lang="en-US" sz="1500" dirty="0">
-                <a:solidFill>
-                  <a:srgbClr val="000000"/>
-                </a:solidFill>
-                <a:latin typeface="Arial"/>
-                <a:cs typeface="Arial"/>
-              </a:rPr>
-              <a:t>Audit: không đăng ký nghiên cứu. Phê duyệt nội bộ</a:t>
+              <a:rPr lang="en-US" sz="1900" i="1" dirty="0">
+                <a:solidFill>
+                  <a:srgbClr val="595959"/>
+                </a:solidFill>
+                <a:latin typeface="Arial"/>
+                <a:cs typeface="Arial"/>
+              </a:rPr>
+              <a:t>Chỉ dùng khi còn thời gian, hoặc để tự học</a:t>
             </a:r>
           </a:p>
         </p:txBody>
@@ -28811,7 +28600,7 @@
                 <a:latin typeface="Arial"/>
                 <a:cs typeface="Arial"/>
               </a:rPr>
-              <a:t>IMRaD: hình đồng hồ cát của mọi bài báo</a:t>
+              <a:t>Kiểm tra: có cần đăng ký không?</a:t>
             </a:r>
           </a:p>
         </p:txBody>
@@ -28844,48 +28633,22 @@
           </a:p>
         </p:txBody>
       </p:sp>
-      <p:pic>
-        <p:nvPicPr>
-          <p:cNvPr id="25" name="Figure"/>
-          <p:cNvPicPr>
-            <a:picLocks noChangeAspect="1"/>
-          </p:cNvPicPr>
-          <p:nvPr/>
-        </p:nvPicPr>
-        <p:blipFill>
-          <a:blip r:embed="rId4"/>
-          <a:stretch>
-            <a:fillRect/>
-          </a:stretch>
-        </p:blipFill>
-        <p:spPr>
-          <a:xfrm>
-            <a:off x="908500" y="1150000"/>
-            <a:ext cx="10375000" cy="4150000"/>
+      <p:sp>
+        <p:nvSpPr>
+          <p:cNvPr id="50" name="Banner"/>
+          <p:cNvSpPr/>
+          <p:nvPr/>
+        </p:nvSpPr>
+        <p:spPr>
+          <a:xfrm>
+            <a:off x="457200" y="1120000"/>
+            <a:ext cx="11277600" cy="470000"/>
           </a:xfrm>
           <a:prstGeom prst="rect">
             <a:avLst/>
           </a:prstGeom>
-        </p:spPr>
-      </p:pic>
-      <p:sp>
-        <p:nvSpPr>
-          <p:cNvPr id="60" name="Takeaway"/>
-          <p:cNvSpPr/>
-          <p:nvPr/>
-        </p:nvSpPr>
-        <p:spPr>
-          <a:xfrm>
-            <a:off x="457200" y="5390000"/>
-            <a:ext cx="11277600" cy="560000"/>
-          </a:xfrm>
-          <a:prstGeom prst="roundRect">
-            <a:avLst>
-              <a:gd name="adj" fmla="val 12000"/>
-            </a:avLst>
-          </a:prstGeom>
           <a:solidFill>
-            <a:srgbClr val="0D7377"/>
+            <a:srgbClr val="6C3483"/>
           </a:solidFill>
           <a:ln>
             <a:noFill/>
@@ -28897,28 +28660,271 @@
           </a:bodyPr>
           <a:lstStyle/>
           <a:p>
+            <a:pPr marL="0" indent="0" algn="l">
+              <a:buNone/>
+            </a:pPr>
+            <a:r>
+              <a:rPr lang="en-US" sz="1500" b="1" dirty="0">
+                <a:solidFill>
+                  <a:srgbClr val="FFFFFF"/>
+                </a:solidFill>
+                <a:latin typeface="Arial"/>
+                <a:cs typeface="Arial"/>
+              </a:rPr>
+              <a:t>CÂU HỎI NHANH   |   2 phút</a:t>
+            </a:r>
+          </a:p>
+        </p:txBody>
+      </p:sp>
+      <p:sp>
+        <p:nvSpPr>
+          <p:cNvPr id="51" name="Steps"/>
+          <p:cNvSpPr txBox="1"/>
+          <p:nvPr/>
+        </p:nvSpPr>
+        <p:spPr>
+          <a:xfrm>
+            <a:off x="457200" y="1720000"/>
+            <a:ext cx="6766560" cy="4230000"/>
+          </a:xfrm>
+          <a:prstGeom prst="rect">
+            <a:avLst/>
+          </a:prstGeom>
+          <a:noFill/>
+          <a:ln>
+            <a:noFill/>
+          </a:ln>
+        </p:spPr>
+        <p:txBody>
+          <a:bodyPr wrap="square" lIns="91440" tIns="45720" rIns="91440" bIns="45720" rtlCol="0" anchor="t"/>
+          <a:lstStyle/>
+          <a:p>
+            <a:pPr marL="380000" indent="-380000" algn="l">
+              <a:lnSpc>
+                <a:spcPct val="104000"/>
+              </a:lnSpc>
+              <a:spcBef>
+                <a:spcPts val="450"/>
+              </a:spcBef>
+              <a:buClr>
+                <a:srgbClr val="6C3483"/>
+              </a:buClr>
+              <a:buFont typeface="Arial"/>
+              <a:buChar char="•"/>
+            </a:pPr>
+            <a:r>
+              <a:rPr lang="en-US" sz="1650" dirty="0">
+                <a:solidFill>
+                  <a:srgbClr val="000000"/>
+                </a:solidFill>
+                <a:latin typeface="Arial"/>
+                <a:cs typeface="Arial"/>
+              </a:rPr>
+              <a:t>Thử nghiệm ngẫu nhiên so sánh hạn chế dịch với dịch thông thường trong sốc nhiễm khuẩn</a:t>
+            </a:r>
+          </a:p>
+          <a:p>
+            <a:pPr marL="380000" indent="-380000" algn="l">
+              <a:lnSpc>
+                <a:spcPct val="104000"/>
+              </a:lnSpc>
+              <a:spcBef>
+                <a:spcPts val="450"/>
+              </a:spcBef>
+              <a:buClr>
+                <a:srgbClr val="6C3483"/>
+              </a:buClr>
+              <a:buFont typeface="Arial"/>
+              <a:buChar char="•"/>
+            </a:pPr>
+            <a:r>
+              <a:rPr lang="en-US" sz="1650" dirty="0">
+                <a:solidFill>
+                  <a:srgbClr val="000000"/>
+                </a:solidFill>
+                <a:latin typeface="Arial"/>
+                <a:cs typeface="Arial"/>
+              </a:rPr>
+              <a:t>Tổng quan hệ thống về chiến lược dịch truyền trong nhiễm khuẩn huyết</a:t>
+            </a:r>
+          </a:p>
+          <a:p>
+            <a:pPr marL="380000" indent="-380000" algn="l">
+              <a:lnSpc>
+                <a:spcPct val="104000"/>
+              </a:lnSpc>
+              <a:spcBef>
+                <a:spcPts val="450"/>
+              </a:spcBef>
+              <a:buClr>
+                <a:srgbClr val="6C3483"/>
+              </a:buClr>
+              <a:buFont typeface="Arial"/>
+              <a:buChar char="•"/>
+            </a:pPr>
+            <a:r>
+              <a:rPr lang="en-US" sz="1650" dirty="0">
+                <a:solidFill>
+                  <a:srgbClr val="000000"/>
+                </a:solidFill>
+                <a:latin typeface="Arial"/>
+                <a:cs typeface="Arial"/>
+              </a:rPr>
+              <a:t>Nghiên cứu thuần tập hồi cứu từ hồ sơ ICU (như FLUID-ICU)</a:t>
+            </a:r>
+          </a:p>
+          <a:p>
+            <a:pPr marL="380000" indent="-380000" algn="l">
+              <a:lnSpc>
+                <a:spcPct val="104000"/>
+              </a:lnSpc>
+              <a:spcBef>
+                <a:spcPts val="450"/>
+              </a:spcBef>
+              <a:buClr>
+                <a:srgbClr val="6C3483"/>
+              </a:buClr>
+              <a:buFont typeface="Arial"/>
+              <a:buChar char="•"/>
+            </a:pPr>
+            <a:r>
+              <a:rPr lang="en-US" sz="1650" dirty="0">
+                <a:solidFill>
+                  <a:srgbClr val="000000"/>
+                </a:solidFill>
+                <a:latin typeface="Arial"/>
+                <a:cs typeface="Arial"/>
+              </a:rPr>
+              <a:t>Đánh giá lâm sàng (audit) việc ghi phiếu cân bằng dịch so với chuẩn của khoa</a:t>
+            </a:r>
+          </a:p>
+        </p:txBody>
+      </p:sp>
+      <p:sp>
+        <p:nvSpPr>
+          <p:cNvPr id="52" name="Side"/>
+          <p:cNvSpPr/>
+          <p:nvPr/>
+        </p:nvSpPr>
+        <p:spPr>
+          <a:xfrm>
+            <a:off x="7423760" y="1720000"/>
+            <a:ext cx="4311040" cy="2206130"/>
+          </a:xfrm>
+          <a:prstGeom prst="roundRect">
+            <a:avLst>
+              <a:gd name="adj" fmla="val 5000"/>
+            </a:avLst>
+          </a:prstGeom>
+          <a:solidFill>
+            <a:srgbClr val="EAF2F5"/>
+          </a:solidFill>
+          <a:ln>
+            <a:noFill/>
+          </a:ln>
+        </p:spPr>
+        <p:txBody>
+          <a:bodyPr wrap="square" lIns="137160" tIns="91440" rIns="137160" bIns="91440" rtlCol="0" anchor="ctr">
+            <a:normAutofit/>
+          </a:bodyPr>
+          <a:lstStyle/>
+          <a:p>
             <a:pPr marL="0" indent="0" algn="ctr">
               <a:buNone/>
             </a:pPr>
             <a:r>
-              <a:rPr lang="en-US" sz="1300" b="1" dirty="0">
-                <a:solidFill>
-                  <a:srgbClr val="FFFFFF"/>
-                </a:solidFill>
-                <a:latin typeface="Arial"/>
-                <a:cs typeface="Arial"/>
-              </a:rPr>
-              <a:t>THÔNG ĐIỆP CHÍNH   </a:t>
-            </a:r>
-            <a:r>
-              <a:rPr lang="en-US" sz="1550" dirty="0">
-                <a:solidFill>
-                  <a:srgbClr val="FFFFFF"/>
-                </a:solidFill>
-                <a:latin typeface="Arial"/>
-                <a:cs typeface="Arial"/>
-              </a:rPr>
-              <a:t>Đặt vấn đề thu hẹp đến câu hỏi. Bàn luận mở rộng trở lại thực hành.</a:t>
+              <a:rPr lang="en-US" sz="1600" b="1" dirty="0">
+                <a:solidFill>
+                  <a:srgbClr val="6C3483"/>
+                </a:solidFill>
+                <a:latin typeface="Arial"/>
+                <a:cs typeface="Arial"/>
+              </a:rPr>
+              <a:t>Đáp án</a:t>
+            </a:r>
+          </a:p>
+          <a:p>
+            <a:pPr marL="0" indent="0" algn="ctr">
+              <a:lnSpc>
+                <a:spcPct val="104000"/>
+              </a:lnSpc>
+              <a:spcBef>
+                <a:spcPts val="300"/>
+              </a:spcBef>
+              <a:buNone/>
+            </a:pPr>
+            <a:r>
+              <a:rPr lang="en-US" sz="1500" dirty="0">
+                <a:solidFill>
+                  <a:srgbClr val="000000"/>
+                </a:solidFill>
+                <a:latin typeface="Arial"/>
+                <a:cs typeface="Arial"/>
+              </a:rPr>
+              <a:t>Bắt buộc: cơ sở đăng ký thử nghiệm, trước người bệnh đầu tiên</a:t>
+            </a:r>
+          </a:p>
+          <a:p>
+            <a:pPr marL="0" indent="0" algn="ctr">
+              <a:lnSpc>
+                <a:spcPct val="104000"/>
+              </a:lnSpc>
+              <a:spcBef>
+                <a:spcPts val="300"/>
+              </a:spcBef>
+              <a:buNone/>
+            </a:pPr>
+            <a:r>
+              <a:rPr lang="en-US" sz="1500" dirty="0">
+                <a:solidFill>
+                  <a:srgbClr val="000000"/>
+                </a:solidFill>
+                <a:latin typeface="Arial"/>
+                <a:cs typeface="Arial"/>
+              </a:rPr>
+              <a:t>Nên: PROSPERO</a:t>
+            </a:r>
+          </a:p>
+          <a:p>
+            <a:pPr marL="0" indent="0" algn="ctr">
+              <a:lnSpc>
+                <a:spcPct val="104000"/>
+              </a:lnSpc>
+              <a:spcBef>
+                <a:spcPts val="300"/>
+              </a:spcBef>
+              <a:buNone/>
+            </a:pPr>
+            <a:r>
+              <a:rPr lang="en-US" sz="1500" dirty="0">
+                <a:solidFill>
+                  <a:srgbClr val="000000"/>
+                </a:solidFill>
+                <a:latin typeface="Arial"/>
+                <a:cs typeface="Arial"/>
+              </a:rPr>
+              <a:t>Khuyến khích, không bắt buộc</a:t>
+            </a:r>
+          </a:p>
+          <a:p>
+            <a:pPr marL="0" indent="0" algn="ctr">
+              <a:lnSpc>
+                <a:spcPct val="104000"/>
+              </a:lnSpc>
+              <a:spcBef>
+                <a:spcPts val="300"/>
+              </a:spcBef>
+              <a:buNone/>
+            </a:pPr>
+            <a:r>
+              <a:rPr lang="en-US" sz="1500" dirty="0">
+                <a:solidFill>
+                  <a:srgbClr val="000000"/>
+                </a:solidFill>
+                <a:latin typeface="Arial"/>
+                <a:cs typeface="Arial"/>
+              </a:rPr>
+              <a:t>Audit: không đăng ký nghiên cứu. Phê duyệt nội bộ</a:t>
             </a:r>
           </a:p>
         </p:txBody>
